--- a/deliverables/special_convolutions_cifar10_final.pptx
+++ b/deliverables/special_convolutions_cifar10_final.pptx
@@ -2,28 +2,28 @@
 <file path=ppt/presentation.xml><?xml version="1.0" encoding="utf-8"?>
 <p:presentation xmlns:p="http://schemas.openxmlformats.org/presentationml/2006/main">
   <p:sldMasterIdLst>
-    <p:sldMasterId xmlns:r="http://schemas.openxmlformats.org/officeDocument/2006/relationships" id="2147483648" r:id="R0eac86fb9a164792"/>
+    <p:sldMasterId xmlns:r="http://schemas.openxmlformats.org/officeDocument/2006/relationships" id="2147483648" r:id="R8f3ef2ef4d4440d3"/>
   </p:sldMasterIdLst>
   <p:notesMasterIdLst>
-    <p:notesMasterId xmlns:r="http://schemas.openxmlformats.org/officeDocument/2006/relationships" r:id="R4c13a738561d46d8"/>
+    <p:notesMasterId xmlns:r="http://schemas.openxmlformats.org/officeDocument/2006/relationships" r:id="Rfd6adbc279b84726"/>
   </p:notesMasterIdLst>
   <p:sldIdLst>
-    <p:sldId xmlns:r="http://schemas.openxmlformats.org/officeDocument/2006/relationships" id="256" r:id="R644a643a3b6a4040"/>
-    <p:sldId xmlns:r="http://schemas.openxmlformats.org/officeDocument/2006/relationships" id="257" r:id="R43be1a44274b479e"/>
-    <p:sldId xmlns:r="http://schemas.openxmlformats.org/officeDocument/2006/relationships" id="258" r:id="R7143c9630bbc4ccd"/>
-    <p:sldId xmlns:r="http://schemas.openxmlformats.org/officeDocument/2006/relationships" id="259" r:id="R019298490b4449e7"/>
-    <p:sldId xmlns:r="http://schemas.openxmlformats.org/officeDocument/2006/relationships" id="260" r:id="Re55d211fdf6f4b1b"/>
-    <p:sldId xmlns:r="http://schemas.openxmlformats.org/officeDocument/2006/relationships" id="261" r:id="R0a4f89a2577844e3"/>
-    <p:sldId xmlns:r="http://schemas.openxmlformats.org/officeDocument/2006/relationships" id="262" r:id="Ree0fde8f127343a9"/>
-    <p:sldId xmlns:r="http://schemas.openxmlformats.org/officeDocument/2006/relationships" id="263" r:id="R3e93a3a3de534468"/>
-    <p:sldId xmlns:r="http://schemas.openxmlformats.org/officeDocument/2006/relationships" id="264" r:id="Rcf4b409ded584bbe"/>
-    <p:sldId xmlns:r="http://schemas.openxmlformats.org/officeDocument/2006/relationships" id="265" r:id="R44075662581c4e25"/>
-    <p:sldId xmlns:r="http://schemas.openxmlformats.org/officeDocument/2006/relationships" id="266" r:id="R00eae5b08ac44054"/>
-    <p:sldId xmlns:r="http://schemas.openxmlformats.org/officeDocument/2006/relationships" id="267" r:id="R607701c036c54ecd"/>
-    <p:sldId xmlns:r="http://schemas.openxmlformats.org/officeDocument/2006/relationships" id="268" r:id="Re0506864c1a44ac7"/>
-    <p:sldId xmlns:r="http://schemas.openxmlformats.org/officeDocument/2006/relationships" id="269" r:id="R9a407ca89781456a"/>
-    <p:sldId xmlns:r="http://schemas.openxmlformats.org/officeDocument/2006/relationships" id="270" r:id="R050b3b3abccb4669"/>
-    <p:sldId xmlns:r="http://schemas.openxmlformats.org/officeDocument/2006/relationships" id="271" r:id="Rb94f877788994b44"/>
+    <p:sldId xmlns:r="http://schemas.openxmlformats.org/officeDocument/2006/relationships" id="256" r:id="R7df4cd595d7148a0"/>
+    <p:sldId xmlns:r="http://schemas.openxmlformats.org/officeDocument/2006/relationships" id="257" r:id="R9c9549d0f3df4ae1"/>
+    <p:sldId xmlns:r="http://schemas.openxmlformats.org/officeDocument/2006/relationships" id="258" r:id="R2c5cc8a63d8b48da"/>
+    <p:sldId xmlns:r="http://schemas.openxmlformats.org/officeDocument/2006/relationships" id="259" r:id="R9f1851a162914a27"/>
+    <p:sldId xmlns:r="http://schemas.openxmlformats.org/officeDocument/2006/relationships" id="260" r:id="Re7c633f49ef14300"/>
+    <p:sldId xmlns:r="http://schemas.openxmlformats.org/officeDocument/2006/relationships" id="261" r:id="R092c97f3cda04ba5"/>
+    <p:sldId xmlns:r="http://schemas.openxmlformats.org/officeDocument/2006/relationships" id="262" r:id="Raf190fa78ba449fc"/>
+    <p:sldId xmlns:r="http://schemas.openxmlformats.org/officeDocument/2006/relationships" id="263" r:id="R2c0c69d6331f45b5"/>
+    <p:sldId xmlns:r="http://schemas.openxmlformats.org/officeDocument/2006/relationships" id="264" r:id="R7e2defbfedb041f1"/>
+    <p:sldId xmlns:r="http://schemas.openxmlformats.org/officeDocument/2006/relationships" id="265" r:id="Rbf3de31b99c247c4"/>
+    <p:sldId xmlns:r="http://schemas.openxmlformats.org/officeDocument/2006/relationships" id="266" r:id="Rc737745dec914386"/>
+    <p:sldId xmlns:r="http://schemas.openxmlformats.org/officeDocument/2006/relationships" id="267" r:id="R487dc37dce7546ad"/>
+    <p:sldId xmlns:r="http://schemas.openxmlformats.org/officeDocument/2006/relationships" id="268" r:id="R837f69fcfd734871"/>
+    <p:sldId xmlns:r="http://schemas.openxmlformats.org/officeDocument/2006/relationships" id="269" r:id="Rac73f2d627a04442"/>
+    <p:sldId xmlns:r="http://schemas.openxmlformats.org/officeDocument/2006/relationships" id="270" r:id="Ra36781e64356439e"/>
+    <p:sldId xmlns:r="http://schemas.openxmlformats.org/officeDocument/2006/relationships" id="271" r:id="R1ace0fd220b94c89"/>
   </p:sldIdLst>
   <p:sldSz cx="12192000" cy="6858000"/>
   <p:notesSz cx="6858000" cy="9144000"/>
@@ -1538,7 +1538,7 @@
           <p:cNvPr id="3" name="Title">
             <a:extLst xmlns:a="http://schemas.openxmlformats.org/drawingml/2006/main">
               <a:ext uri="{FF2B5EF4-FFF2-40B4-BE49-F238E27FC236}">
-                <a16:creationId xmlns:a16="http://schemas.microsoft.com/office/drawing/2014/main" id="{49EFA129-26D8-4141-A1C3-EC82A2229A02}"/>
+                <a16:creationId xmlns:a16="http://schemas.microsoft.com/office/drawing/2014/main" id="{1AEACC97-3F4F-48EC-A419-FCA987A04B47}"/>
               </a:ext>
             </a:extLst>
           </p:cNvPr>
@@ -1695,7 +1695,7 @@
           <p:cNvPr id="2" name="Subtitle">
             <a:extLst xmlns:a="http://schemas.openxmlformats.org/drawingml/2006/main">
               <a:ext uri="{FF2B5EF4-FFF2-40B4-BE49-F238E27FC236}">
-                <a16:creationId xmlns:a16="http://schemas.microsoft.com/office/drawing/2014/main" id="{51C60355-C62A-4A40-B4C0-36E35BF85EB5}"/>
+                <a16:creationId xmlns:a16="http://schemas.microsoft.com/office/drawing/2014/main" id="{E576BBEB-03E7-43EA-8D3F-766BFDD6AD6D}"/>
               </a:ext>
             </a:extLst>
           </p:cNvPr>
@@ -1869,7 +1869,7 @@
           <p:cNvPr id="2" name="Section title">
             <a:extLst xmlns:a="http://schemas.openxmlformats.org/drawingml/2006/main">
               <a:ext uri="{FF2B5EF4-FFF2-40B4-BE49-F238E27FC236}">
-                <a16:creationId xmlns:a16="http://schemas.microsoft.com/office/drawing/2014/main" id="{85AE3655-22F4-465A-A81F-D462A9E341F8}"/>
+                <a16:creationId xmlns:a16="http://schemas.microsoft.com/office/drawing/2014/main" id="{85DD3567-79F0-4F61-9434-0DB5A37B1038}"/>
               </a:ext>
             </a:extLst>
           </p:cNvPr>
@@ -2043,7 +2043,7 @@
           <p:cNvPr id="3" name="Title">
             <a:extLst xmlns:a="http://schemas.openxmlformats.org/drawingml/2006/main">
               <a:ext uri="{FF2B5EF4-FFF2-40B4-BE49-F238E27FC236}">
-                <a16:creationId xmlns:a16="http://schemas.microsoft.com/office/drawing/2014/main" id="{FF6C7642-D3FC-4C31-A9FC-C119635BA533}"/>
+                <a16:creationId xmlns:a16="http://schemas.microsoft.com/office/drawing/2014/main" id="{1C6BE7A4-80C1-4778-81E8-98B30FAE3D7A}"/>
               </a:ext>
             </a:extLst>
           </p:cNvPr>
@@ -2200,7 +2200,7 @@
           <p:cNvPr id="2" name="Body">
             <a:extLst xmlns:a="http://schemas.openxmlformats.org/drawingml/2006/main">
               <a:ext uri="{FF2B5EF4-FFF2-40B4-BE49-F238E27FC236}">
-                <a16:creationId xmlns:a16="http://schemas.microsoft.com/office/drawing/2014/main" id="{850BAA14-31E8-4DFA-A15A-1A3617FD03BB}"/>
+                <a16:creationId xmlns:a16="http://schemas.microsoft.com/office/drawing/2014/main" id="{090A909E-81A1-4D80-9DE4-E39900EB486F}"/>
               </a:ext>
             </a:extLst>
           </p:cNvPr>
@@ -2374,7 +2374,7 @@
           <p:cNvPr id="4" name="Title">
             <a:extLst xmlns:a="http://schemas.openxmlformats.org/drawingml/2006/main">
               <a:ext uri="{FF2B5EF4-FFF2-40B4-BE49-F238E27FC236}">
-                <a16:creationId xmlns:a16="http://schemas.microsoft.com/office/drawing/2014/main" id="{F6420F8B-194F-49B4-A1B0-CCDE71B098BD}"/>
+                <a16:creationId xmlns:a16="http://schemas.microsoft.com/office/drawing/2014/main" id="{8E27DE8F-57D5-410F-95A8-656333E84023}"/>
               </a:ext>
             </a:extLst>
           </p:cNvPr>
@@ -2531,7 +2531,7 @@
           <p:cNvPr id="2" name="Left column">
             <a:extLst xmlns:a="http://schemas.openxmlformats.org/drawingml/2006/main">
               <a:ext uri="{FF2B5EF4-FFF2-40B4-BE49-F238E27FC236}">
-                <a16:creationId xmlns:a16="http://schemas.microsoft.com/office/drawing/2014/main" id="{E545A9D8-A34A-4ACC-A192-DCE622F63738}"/>
+                <a16:creationId xmlns:a16="http://schemas.microsoft.com/office/drawing/2014/main" id="{FB155760-AC7A-400B-B08E-F66D3344855A}"/>
               </a:ext>
             </a:extLst>
           </p:cNvPr>
@@ -2688,7 +2688,7 @@
           <p:cNvPr id="3" name="Right column">
             <a:extLst xmlns:a="http://schemas.openxmlformats.org/drawingml/2006/main">
               <a:ext uri="{FF2B5EF4-FFF2-40B4-BE49-F238E27FC236}">
-                <a16:creationId xmlns:a16="http://schemas.microsoft.com/office/drawing/2014/main" id="{024DA302-2F80-4CD6-B973-899DF30CB12F}"/>
+                <a16:creationId xmlns:a16="http://schemas.microsoft.com/office/drawing/2014/main" id="{74D47A20-1EF4-4CE1-813F-E4D909E7242F}"/>
               </a:ext>
             </a:extLst>
           </p:cNvPr>
@@ -2862,7 +2862,7 @@
           <p:cNvPr id="3" name="Title">
             <a:extLst xmlns:a="http://schemas.openxmlformats.org/drawingml/2006/main">
               <a:ext uri="{FF2B5EF4-FFF2-40B4-BE49-F238E27FC236}">
-                <a16:creationId xmlns:a16="http://schemas.microsoft.com/office/drawing/2014/main" id="{AAECDC6E-0C76-4520-B48D-00966C82CFE4}"/>
+                <a16:creationId xmlns:a16="http://schemas.microsoft.com/office/drawing/2014/main" id="{FBE7ACDD-B7F5-43E9-8280-D0782C583620}"/>
               </a:ext>
             </a:extLst>
           </p:cNvPr>
@@ -3019,7 +3019,7 @@
           <p:cNvPr id="2" name="Left column">
             <a:extLst xmlns:a="http://schemas.openxmlformats.org/drawingml/2006/main">
               <a:ext uri="{FF2B5EF4-FFF2-40B4-BE49-F238E27FC236}">
-                <a16:creationId xmlns:a16="http://schemas.microsoft.com/office/drawing/2014/main" id="{F102C26D-866B-44CF-A0B8-36173D1E86E3}"/>
+                <a16:creationId xmlns:a16="http://schemas.microsoft.com/office/drawing/2014/main" id="{2578FFB3-D492-46CB-9D05-BFA82FC8070A}"/>
               </a:ext>
             </a:extLst>
           </p:cNvPr>
@@ -3214,12 +3214,12 @@
   </p:cSld>
   <p:clrMap bg1="lt1" tx1="dk1" bg2="lt2" tx2="dk2" accent1="accent1" accent2="accent2" accent3="accent3" accent4="accent4" accent5="accent5" accent6="accent6" hlink="hlink" folHlink="folHlink"/>
   <p:sldLayoutIdLst>
-    <p:sldLayoutId xmlns:r="http://schemas.openxmlformats.org/officeDocument/2006/relationships" id="2147483649" r:id="R3dca8a63b06349d0"/>
-    <p:sldLayoutId xmlns:r="http://schemas.openxmlformats.org/officeDocument/2006/relationships" id="2147483650" r:id="Rc1fea77aef154561"/>
-    <p:sldLayoutId xmlns:r="http://schemas.openxmlformats.org/officeDocument/2006/relationships" id="2147483651" r:id="Rfa14c40d367747d1"/>
-    <p:sldLayoutId xmlns:r="http://schemas.openxmlformats.org/officeDocument/2006/relationships" id="2147483652" r:id="R1ffb1ce267384feb"/>
-    <p:sldLayoutId xmlns:r="http://schemas.openxmlformats.org/officeDocument/2006/relationships" id="2147483653" r:id="Rc6f6765daace4aac"/>
-    <p:sldLayoutId xmlns:r="http://schemas.openxmlformats.org/officeDocument/2006/relationships" id="2147483654" r:id="Ra89618706e014169"/>
+    <p:sldLayoutId xmlns:r="http://schemas.openxmlformats.org/officeDocument/2006/relationships" id="2147483649" r:id="R67ce683ae13b4a6d"/>
+    <p:sldLayoutId xmlns:r="http://schemas.openxmlformats.org/officeDocument/2006/relationships" id="2147483650" r:id="Rc594b26d380543df"/>
+    <p:sldLayoutId xmlns:r="http://schemas.openxmlformats.org/officeDocument/2006/relationships" id="2147483651" r:id="R22c1b3aaf6224f26"/>
+    <p:sldLayoutId xmlns:r="http://schemas.openxmlformats.org/officeDocument/2006/relationships" id="2147483652" r:id="R98f00d35957c4b36"/>
+    <p:sldLayoutId xmlns:r="http://schemas.openxmlformats.org/officeDocument/2006/relationships" id="2147483653" r:id="R601d3088dc3f4fa2"/>
+    <p:sldLayoutId xmlns:r="http://schemas.openxmlformats.org/officeDocument/2006/relationships" id="2147483654" r:id="R3d27b5b254df4b8c"/>
   </p:sldLayoutIdLst>
   <p:txStyles>
     <p:titleStyle>
@@ -6075,7 +6075,7 @@
           <p:cNvPr id="6" name="">
             <a:extLst xmlns:a="http://schemas.openxmlformats.org/drawingml/2006/main">
               <a:ext uri="{FF2B5EF4-FFF2-40B4-BE49-F238E27FC236}">
-                <a16:creationId xmlns:a16="http://schemas.microsoft.com/office/drawing/2014/main" id="{B77F3127-3CF2-4530-868F-6BC51B640816}"/>
+                <a16:creationId xmlns:a16="http://schemas.microsoft.com/office/drawing/2014/main" id="{0BE8892E-A96F-4CCF-84E9-E8F88D66F570}"/>
               </a:ext>
             </a:extLst>
           </p:cNvPr>
@@ -6108,7 +6108,7 @@
           <p:cNvPr id="2" name="">
             <a:extLst xmlns:a="http://schemas.openxmlformats.org/drawingml/2006/main">
               <a:ext uri="{FF2B5EF4-FFF2-40B4-BE49-F238E27FC236}">
-                <a16:creationId xmlns:a16="http://schemas.microsoft.com/office/drawing/2014/main" id="{CDED219C-84EA-4977-A755-86396F4B9DBA}"/>
+                <a16:creationId xmlns:a16="http://schemas.microsoft.com/office/drawing/2014/main" id="{7218F763-9662-456B-B630-154F94F69565}"/>
               </a:ext>
             </a:extLst>
           </p:cNvPr>
@@ -6199,7 +6199,7 @@
           <p:cNvPr id="3" name="">
             <a:extLst xmlns:a="http://schemas.openxmlformats.org/drawingml/2006/main">
               <a:ext uri="{FF2B5EF4-FFF2-40B4-BE49-F238E27FC236}">
-                <a16:creationId xmlns:a16="http://schemas.microsoft.com/office/drawing/2014/main" id="{23D6A8C5-35B2-412C-B7FF-09C93AD7F251}"/>
+                <a16:creationId xmlns:a16="http://schemas.microsoft.com/office/drawing/2014/main" id="{2609887A-6777-496A-83BD-8101E63528CD}"/>
               </a:ext>
             </a:extLst>
           </p:cNvPr>
@@ -6267,7 +6267,7 @@
           <p:cNvPr id="4" name="">
             <a:extLst xmlns:a="http://schemas.openxmlformats.org/drawingml/2006/main">
               <a:ext uri="{FF2B5EF4-FFF2-40B4-BE49-F238E27FC236}">
-                <a16:creationId xmlns:a16="http://schemas.microsoft.com/office/drawing/2014/main" id="{067BD9E4-A856-4CB2-BB43-CB81054D5933}"/>
+                <a16:creationId xmlns:a16="http://schemas.microsoft.com/office/drawing/2014/main" id="{0187A82A-BD26-4B2A-9C78-7AD66CA65E12}"/>
               </a:ext>
             </a:extLst>
           </p:cNvPr>
@@ -6300,7 +6300,7 @@
           <p:cNvPr id="5" name="">
             <a:extLst xmlns:a="http://schemas.openxmlformats.org/drawingml/2006/main">
               <a:ext uri="{FF2B5EF4-FFF2-40B4-BE49-F238E27FC236}">
-                <a16:creationId xmlns:a16="http://schemas.microsoft.com/office/drawing/2014/main" id="{DD0ACD4B-56F2-4659-961D-0BDF7C620093}"/>
+                <a16:creationId xmlns:a16="http://schemas.microsoft.com/office/drawing/2014/main" id="{EF1D060D-C6AE-4FCC-A022-79CF661086D9}"/>
               </a:ext>
             </a:extLst>
           </p:cNvPr>
@@ -6366,7 +6366,7 @@
     </p:spTree>
     <p:extLst>
       <p:ext uri="{BB962C8B-B14F-4D97-AF65-F5344CB8AC3E}">
-        <p14:creationId xmlns:p14="http://schemas.microsoft.com/office/powerpoint/2010/main" val="1206091015"/>
+        <p14:creationId xmlns:p14="http://schemas.microsoft.com/office/powerpoint/2010/main" val="840360078"/>
       </p:ext>
     </p:extLst>
   </p:cSld>
@@ -6397,7 +6397,7 @@
           <p:cNvPr id="9" name="">
             <a:extLst xmlns:a="http://schemas.openxmlformats.org/drawingml/2006/main">
               <a:ext uri="{FF2B5EF4-FFF2-40B4-BE49-F238E27FC236}">
-                <a16:creationId xmlns:a16="http://schemas.microsoft.com/office/drawing/2014/main" id="{1ECCAC79-17F6-4A46-B39C-AF137C11E706}"/>
+                <a16:creationId xmlns:a16="http://schemas.microsoft.com/office/drawing/2014/main" id="{733FA3A5-E2D2-41ED-A895-59B544E3E9CB}"/>
               </a:ext>
             </a:extLst>
           </p:cNvPr>
@@ -6465,7 +6465,7 @@
           <p:cNvPr id="2" name="">
             <a:extLst xmlns:a="http://schemas.openxmlformats.org/drawingml/2006/main">
               <a:ext uri="{FF2B5EF4-FFF2-40B4-BE49-F238E27FC236}">
-                <a16:creationId xmlns:a16="http://schemas.microsoft.com/office/drawing/2014/main" id="{2D6C0293-AC0C-4DF9-9B51-0C97FF428B31}"/>
+                <a16:creationId xmlns:a16="http://schemas.microsoft.com/office/drawing/2014/main" id="{65150338-26D4-4818-BD61-C0A79A201B19}"/>
               </a:ext>
             </a:extLst>
           </p:cNvPr>
@@ -6498,7 +6498,7 @@
           <p:cNvPr id="3" name="">
             <a:extLst xmlns:a="http://schemas.openxmlformats.org/drawingml/2006/main">
               <a:ext uri="{FF2B5EF4-FFF2-40B4-BE49-F238E27FC236}">
-                <a16:creationId xmlns:a16="http://schemas.microsoft.com/office/drawing/2014/main" id="{DD63622C-D2A3-4D26-8E5B-C62A654B6F75}"/>
+                <a16:creationId xmlns:a16="http://schemas.microsoft.com/office/drawing/2014/main" id="{983C78C9-34A1-418E-92F9-A68B405FB0A5}"/>
               </a:ext>
             </a:extLst>
           </p:cNvPr>
@@ -6566,7 +6566,7 @@
           <p:cNvPr id="4" name="Chart">
             <a:extLst xmlns:a="http://schemas.openxmlformats.org/drawingml/2006/main">
               <a:ext uri="{FF2B5EF4-FFF2-40B4-BE49-F238E27FC236}">
-                <a16:creationId xmlns:a16="http://schemas.microsoft.com/office/drawing/2014/main" id="{AF0FC99B-AFB6-482E-A80B-D081DFA5CE64}"/>
+                <a16:creationId xmlns:a16="http://schemas.microsoft.com/office/drawing/2014/main" id="{465EA573-0C37-4821-B520-9DAA73EC5341}"/>
               </a:ext>
             </a:extLst>
           </p:cNvPr>
@@ -6579,7 +6579,7 @@
         </p:xfrm>
         <a:graphic xmlns:a="http://schemas.openxmlformats.org/drawingml/2006/main">
           <a:graphicData uri="http://schemas.openxmlformats.org/drawingml/2006/chart">
-            <c:chart xmlns:r="http://schemas.openxmlformats.org/officeDocument/2006/relationships" xmlns:c="http://schemas.openxmlformats.org/drawingml/2006/chart" r:id="R3ad805d54f6743ff"/>
+            <c:chart xmlns:r="http://schemas.openxmlformats.org/officeDocument/2006/relationships" xmlns:c="http://schemas.openxmlformats.org/drawingml/2006/chart" r:id="Re372421c21cd467a"/>
           </a:graphicData>
         </a:graphic>
       </p:graphicFrame>
@@ -6588,7 +6588,7 @@
           <p:cNvPr id="5" name="">
             <a:extLst xmlns:a="http://schemas.openxmlformats.org/drawingml/2006/main">
               <a:ext uri="{FF2B5EF4-FFF2-40B4-BE49-F238E27FC236}">
-                <a16:creationId xmlns:a16="http://schemas.microsoft.com/office/drawing/2014/main" id="{2BCB3F66-A12F-4ACD-B5FC-0D5418C5320E}"/>
+                <a16:creationId xmlns:a16="http://schemas.microsoft.com/office/drawing/2014/main" id="{4665A68D-E033-4495-BD48-73D250FE84EC}"/>
               </a:ext>
             </a:extLst>
           </p:cNvPr>
@@ -6656,7 +6656,7 @@
           <p:cNvPr id="6" name="">
             <a:extLst xmlns:a="http://schemas.openxmlformats.org/drawingml/2006/main">
               <a:ext uri="{FF2B5EF4-FFF2-40B4-BE49-F238E27FC236}">
-                <a16:creationId xmlns:a16="http://schemas.microsoft.com/office/drawing/2014/main" id="{B60B42E5-DB9C-4FB4-96DA-DB8B653387D9}"/>
+                <a16:creationId xmlns:a16="http://schemas.microsoft.com/office/drawing/2014/main" id="{E01D63A0-ED12-40CD-B6EB-20DB6375BC34}"/>
               </a:ext>
             </a:extLst>
           </p:cNvPr>
@@ -6724,7 +6724,7 @@
           <p:cNvPr id="7" name="">
             <a:extLst xmlns:a="http://schemas.openxmlformats.org/drawingml/2006/main">
               <a:ext uri="{FF2B5EF4-FFF2-40B4-BE49-F238E27FC236}">
-                <a16:creationId xmlns:a16="http://schemas.microsoft.com/office/drawing/2014/main" id="{9C8839FC-B938-489F-AB71-07F693D45E54}"/>
+                <a16:creationId xmlns:a16="http://schemas.microsoft.com/office/drawing/2014/main" id="{F67D80C0-F947-4C47-A5AA-00C5BE91517C}"/>
               </a:ext>
             </a:extLst>
           </p:cNvPr>
@@ -6792,7 +6792,7 @@
           <p:cNvPr id="8" name="">
             <a:extLst xmlns:a="http://schemas.openxmlformats.org/drawingml/2006/main">
               <a:ext uri="{FF2B5EF4-FFF2-40B4-BE49-F238E27FC236}">
-                <a16:creationId xmlns:a16="http://schemas.microsoft.com/office/drawing/2014/main" id="{FFE682FB-6EFE-416C-B599-57555D3D2923}"/>
+                <a16:creationId xmlns:a16="http://schemas.microsoft.com/office/drawing/2014/main" id="{01F4198F-66EE-431B-B984-40618D59E920}"/>
               </a:ext>
             </a:extLst>
           </p:cNvPr>
@@ -6858,7 +6858,7 @@
     </p:spTree>
     <p:extLst>
       <p:ext uri="{BB962C8B-B14F-4D97-AF65-F5344CB8AC3E}">
-        <p14:creationId xmlns:p14="http://schemas.microsoft.com/office/powerpoint/2010/main" val="427587622"/>
+        <p14:creationId xmlns:p14="http://schemas.microsoft.com/office/powerpoint/2010/main" val="1539722329"/>
       </p:ext>
     </p:extLst>
   </p:cSld>
@@ -6889,7 +6889,7 @@
           <p:cNvPr id="8" name="">
             <a:extLst xmlns:a="http://schemas.openxmlformats.org/drawingml/2006/main">
               <a:ext uri="{FF2B5EF4-FFF2-40B4-BE49-F238E27FC236}">
-                <a16:creationId xmlns:a16="http://schemas.microsoft.com/office/drawing/2014/main" id="{7A5200C5-5EAA-41BA-87BF-3006803CC48A}"/>
+                <a16:creationId xmlns:a16="http://schemas.microsoft.com/office/drawing/2014/main" id="{B0F0DE5D-2F02-4884-BCE8-7AD528AB4C16}"/>
               </a:ext>
             </a:extLst>
           </p:cNvPr>
@@ -6957,7 +6957,7 @@
           <p:cNvPr id="2" name="">
             <a:extLst xmlns:a="http://schemas.openxmlformats.org/drawingml/2006/main">
               <a:ext uri="{FF2B5EF4-FFF2-40B4-BE49-F238E27FC236}">
-                <a16:creationId xmlns:a16="http://schemas.microsoft.com/office/drawing/2014/main" id="{FA4F55BC-99E2-4C3A-9AFF-532672F20897}"/>
+                <a16:creationId xmlns:a16="http://schemas.microsoft.com/office/drawing/2014/main" id="{BED03DDB-334B-49ED-824E-94FDEB63ECA4}"/>
               </a:ext>
             </a:extLst>
           </p:cNvPr>
@@ -6990,7 +6990,7 @@
           <p:cNvPr id="3" name="">
             <a:extLst xmlns:a="http://schemas.openxmlformats.org/drawingml/2006/main">
               <a:ext uri="{FF2B5EF4-FFF2-40B4-BE49-F238E27FC236}">
-                <a16:creationId xmlns:a16="http://schemas.microsoft.com/office/drawing/2014/main" id="{0E18A18A-3707-4D7A-B3AE-83EF09E2DEA2}"/>
+                <a16:creationId xmlns:a16="http://schemas.microsoft.com/office/drawing/2014/main" id="{D557591F-E83A-46A1-BDD7-63D39C01CB51}"/>
               </a:ext>
             </a:extLst>
           </p:cNvPr>
@@ -7058,7 +7058,7 @@
           <p:cNvPr id="4" name="Chart">
             <a:extLst xmlns:a="http://schemas.openxmlformats.org/drawingml/2006/main">
               <a:ext uri="{FF2B5EF4-FFF2-40B4-BE49-F238E27FC236}">
-                <a16:creationId xmlns:a16="http://schemas.microsoft.com/office/drawing/2014/main" id="{72DFC777-9788-4E37-938F-3AA41A76A8F5}"/>
+                <a16:creationId xmlns:a16="http://schemas.microsoft.com/office/drawing/2014/main" id="{01FF5B7A-A31B-49F8-A3EC-12805E08ACFA}"/>
               </a:ext>
             </a:extLst>
           </p:cNvPr>
@@ -7071,7 +7071,7 @@
         </p:xfrm>
         <a:graphic xmlns:a="http://schemas.openxmlformats.org/drawingml/2006/main">
           <a:graphicData uri="http://schemas.openxmlformats.org/drawingml/2006/chart">
-            <c:chart xmlns:r="http://schemas.openxmlformats.org/officeDocument/2006/relationships" xmlns:c="http://schemas.openxmlformats.org/drawingml/2006/chart" r:id="Rdaf38afe2f5f4be2"/>
+            <c:chart xmlns:r="http://schemas.openxmlformats.org/officeDocument/2006/relationships" xmlns:c="http://schemas.openxmlformats.org/drawingml/2006/chart" r:id="R9d1e97846c094507"/>
           </a:graphicData>
         </a:graphic>
       </p:graphicFrame>
@@ -7080,7 +7080,7 @@
           <p:cNvPr id="5" name="">
             <a:extLst xmlns:a="http://schemas.openxmlformats.org/drawingml/2006/main">
               <a:ext uri="{FF2B5EF4-FFF2-40B4-BE49-F238E27FC236}">
-                <a16:creationId xmlns:a16="http://schemas.microsoft.com/office/drawing/2014/main" id="{233CD499-F171-4ECF-B757-63CF01724035}"/>
+                <a16:creationId xmlns:a16="http://schemas.microsoft.com/office/drawing/2014/main" id="{989A40C2-8872-4746-8A16-F09FCD21406A}"/>
               </a:ext>
             </a:extLst>
           </p:cNvPr>
@@ -7148,7 +7148,7 @@
           <p:cNvPr id="6" name="">
             <a:extLst xmlns:a="http://schemas.openxmlformats.org/drawingml/2006/main">
               <a:ext uri="{FF2B5EF4-FFF2-40B4-BE49-F238E27FC236}">
-                <a16:creationId xmlns:a16="http://schemas.microsoft.com/office/drawing/2014/main" id="{03CE34C7-E9E0-4556-A06F-D07E07A830B7}"/>
+                <a16:creationId xmlns:a16="http://schemas.microsoft.com/office/drawing/2014/main" id="{C4588379-CF65-498C-B65A-BF26B09ABABC}"/>
               </a:ext>
             </a:extLst>
           </p:cNvPr>
@@ -7216,7 +7216,7 @@
           <p:cNvPr id="7" name="">
             <a:extLst xmlns:a="http://schemas.openxmlformats.org/drawingml/2006/main">
               <a:ext uri="{FF2B5EF4-FFF2-40B4-BE49-F238E27FC236}">
-                <a16:creationId xmlns:a16="http://schemas.microsoft.com/office/drawing/2014/main" id="{9A561395-9961-426A-B08F-A9D4783BDCC4}"/>
+                <a16:creationId xmlns:a16="http://schemas.microsoft.com/office/drawing/2014/main" id="{4F86C449-3976-48A4-BC9C-20BA4095EB99}"/>
               </a:ext>
             </a:extLst>
           </p:cNvPr>
@@ -7282,7 +7282,7 @@
     </p:spTree>
     <p:extLst>
       <p:ext uri="{BB962C8B-B14F-4D97-AF65-F5344CB8AC3E}">
-        <p14:creationId xmlns:p14="http://schemas.microsoft.com/office/powerpoint/2010/main" val="443072796"/>
+        <p14:creationId xmlns:p14="http://schemas.microsoft.com/office/powerpoint/2010/main" val="444506110"/>
       </p:ext>
     </p:extLst>
   </p:cSld>
@@ -7313,7 +7313,7 @@
           <p:cNvPr id="9" name="">
             <a:extLst xmlns:a="http://schemas.openxmlformats.org/drawingml/2006/main">
               <a:ext uri="{FF2B5EF4-FFF2-40B4-BE49-F238E27FC236}">
-                <a16:creationId xmlns:a16="http://schemas.microsoft.com/office/drawing/2014/main" id="{C4DAA31F-5391-44F6-BEEA-6B443FB8C97D}"/>
+                <a16:creationId xmlns:a16="http://schemas.microsoft.com/office/drawing/2014/main" id="{CF90330C-4331-426E-B911-36A650AE6A17}"/>
               </a:ext>
             </a:extLst>
           </p:cNvPr>
@@ -7381,7 +7381,7 @@
           <p:cNvPr id="2" name="">
             <a:extLst xmlns:a="http://schemas.openxmlformats.org/drawingml/2006/main">
               <a:ext uri="{FF2B5EF4-FFF2-40B4-BE49-F238E27FC236}">
-                <a16:creationId xmlns:a16="http://schemas.microsoft.com/office/drawing/2014/main" id="{E20E7D6B-057B-4610-8941-A57C81BA90B0}"/>
+                <a16:creationId xmlns:a16="http://schemas.microsoft.com/office/drawing/2014/main" id="{DCB3C486-221D-4037-9C62-3B963BFD308D}"/>
               </a:ext>
             </a:extLst>
           </p:cNvPr>
@@ -7414,7 +7414,7 @@
           <p:cNvPr id="3" name="">
             <a:extLst xmlns:a="http://schemas.openxmlformats.org/drawingml/2006/main">
               <a:ext uri="{FF2B5EF4-FFF2-40B4-BE49-F238E27FC236}">
-                <a16:creationId xmlns:a16="http://schemas.microsoft.com/office/drawing/2014/main" id="{BEEB76B3-6A35-4D36-A0F6-97E4E36C309E}"/>
+                <a16:creationId xmlns:a16="http://schemas.microsoft.com/office/drawing/2014/main" id="{A5D5056D-405C-4C06-86F8-2EB740B8E2D7}"/>
               </a:ext>
             </a:extLst>
           </p:cNvPr>
@@ -7482,7 +7482,7 @@
           <p:cNvPr id="4" name="">
             <a:extLst xmlns:a="http://schemas.openxmlformats.org/drawingml/2006/main">
               <a:ext uri="{FF2B5EF4-FFF2-40B4-BE49-F238E27FC236}">
-                <a16:creationId xmlns:a16="http://schemas.microsoft.com/office/drawing/2014/main" id="{931AE8E2-0C9D-444D-ACB1-B0B06EF4BA4E}"/>
+                <a16:creationId xmlns:a16="http://schemas.microsoft.com/office/drawing/2014/main" id="{8E21BE9F-42A3-4D0D-92F7-05F1543C9EAC}"/>
               </a:ext>
             </a:extLst>
           </p:cNvPr>
@@ -7492,7 +7492,7 @@
           <p:nvPr/>
         </p:nvPicPr>
         <p:blipFill>
-          <a:blip xmlns:r="http://schemas.openxmlformats.org/officeDocument/2006/relationships" xmlns:a="http://schemas.openxmlformats.org/drawingml/2006/main" r:embed="R576f6f3cb61044a5"/>
+          <a:blip xmlns:r="http://schemas.openxmlformats.org/officeDocument/2006/relationships" xmlns:a="http://schemas.openxmlformats.org/drawingml/2006/main" r:embed="Ra2e215359c914579"/>
           <a:stretch xmlns:a="http://schemas.openxmlformats.org/drawingml/2006/main"/>
         </p:blipFill>
         <p:spPr>
@@ -7510,7 +7510,7 @@
           <p:cNvPr id="5" name="">
             <a:extLst xmlns:a="http://schemas.openxmlformats.org/drawingml/2006/main">
               <a:ext uri="{FF2B5EF4-FFF2-40B4-BE49-F238E27FC236}">
-                <a16:creationId xmlns:a16="http://schemas.microsoft.com/office/drawing/2014/main" id="{AEDDB37B-D27F-4E08-ABE8-378A65051B67}"/>
+                <a16:creationId xmlns:a16="http://schemas.microsoft.com/office/drawing/2014/main" id="{E535A919-64C1-4D55-AC69-80C05B3DB933}"/>
               </a:ext>
             </a:extLst>
           </p:cNvPr>
@@ -7578,7 +7578,7 @@
           <p:cNvPr id="6" name="">
             <a:extLst xmlns:a="http://schemas.openxmlformats.org/drawingml/2006/main">
               <a:ext uri="{FF2B5EF4-FFF2-40B4-BE49-F238E27FC236}">
-                <a16:creationId xmlns:a16="http://schemas.microsoft.com/office/drawing/2014/main" id="{529B961A-606B-4169-B132-14E45F9231B3}"/>
+                <a16:creationId xmlns:a16="http://schemas.microsoft.com/office/drawing/2014/main" id="{E06DBD71-9116-4E9E-9776-32666ACC1545}"/>
               </a:ext>
             </a:extLst>
           </p:cNvPr>
@@ -7646,7 +7646,7 @@
           <p:cNvPr id="7" name="">
             <a:extLst xmlns:a="http://schemas.openxmlformats.org/drawingml/2006/main">
               <a:ext uri="{FF2B5EF4-FFF2-40B4-BE49-F238E27FC236}">
-                <a16:creationId xmlns:a16="http://schemas.microsoft.com/office/drawing/2014/main" id="{60BDA942-0675-4E5A-98F8-4AD03BABFE24}"/>
+                <a16:creationId xmlns:a16="http://schemas.microsoft.com/office/drawing/2014/main" id="{A655C3FE-D542-45DD-8C0B-91550CC3C761}"/>
               </a:ext>
             </a:extLst>
           </p:cNvPr>
@@ -7714,7 +7714,7 @@
           <p:cNvPr id="8" name="">
             <a:extLst xmlns:a="http://schemas.openxmlformats.org/drawingml/2006/main">
               <a:ext uri="{FF2B5EF4-FFF2-40B4-BE49-F238E27FC236}">
-                <a16:creationId xmlns:a16="http://schemas.microsoft.com/office/drawing/2014/main" id="{37605021-79D4-4C3D-B33C-83DBEE4E9B06}"/>
+                <a16:creationId xmlns:a16="http://schemas.microsoft.com/office/drawing/2014/main" id="{3B2CF939-B86C-4993-8478-460D958C1DA4}"/>
               </a:ext>
             </a:extLst>
           </p:cNvPr>
@@ -7780,7 +7780,7 @@
     </p:spTree>
     <p:extLst>
       <p:ext uri="{BB962C8B-B14F-4D97-AF65-F5344CB8AC3E}">
-        <p14:creationId xmlns:p14="http://schemas.microsoft.com/office/powerpoint/2010/main" val="936075113"/>
+        <p14:creationId xmlns:p14="http://schemas.microsoft.com/office/powerpoint/2010/main" val="1682166347"/>
       </p:ext>
     </p:extLst>
   </p:cSld>
@@ -7811,7 +7811,7 @@
           <p:cNvPr id="12" name="">
             <a:extLst xmlns:a="http://schemas.openxmlformats.org/drawingml/2006/main">
               <a:ext uri="{FF2B5EF4-FFF2-40B4-BE49-F238E27FC236}">
-                <a16:creationId xmlns:a16="http://schemas.microsoft.com/office/drawing/2014/main" id="{44F50FC7-C259-4CAF-B577-CB9E2F4963A8}"/>
+                <a16:creationId xmlns:a16="http://schemas.microsoft.com/office/drawing/2014/main" id="{E26528E4-D336-440B-9212-4391C39022C7}"/>
               </a:ext>
             </a:extLst>
           </p:cNvPr>
@@ -7879,7 +7879,7 @@
           <p:cNvPr id="2" name="">
             <a:extLst xmlns:a="http://schemas.openxmlformats.org/drawingml/2006/main">
               <a:ext uri="{FF2B5EF4-FFF2-40B4-BE49-F238E27FC236}">
-                <a16:creationId xmlns:a16="http://schemas.microsoft.com/office/drawing/2014/main" id="{11D7129A-1BF3-447B-B0FA-79D1918A9EA5}"/>
+                <a16:creationId xmlns:a16="http://schemas.microsoft.com/office/drawing/2014/main" id="{411EF19C-5489-4DA2-870C-4B2A6E529191}"/>
               </a:ext>
             </a:extLst>
           </p:cNvPr>
@@ -7912,7 +7912,7 @@
           <p:cNvPr id="3" name="">
             <a:extLst xmlns:a="http://schemas.openxmlformats.org/drawingml/2006/main">
               <a:ext uri="{FF2B5EF4-FFF2-40B4-BE49-F238E27FC236}">
-                <a16:creationId xmlns:a16="http://schemas.microsoft.com/office/drawing/2014/main" id="{66DE35C3-1668-4414-9E95-8E4D15BEF101}"/>
+                <a16:creationId xmlns:a16="http://schemas.microsoft.com/office/drawing/2014/main" id="{DF231935-FB88-48A5-A953-149B1897A06F}"/>
               </a:ext>
             </a:extLst>
           </p:cNvPr>
@@ -7980,7 +7980,7 @@
           <p:cNvPr id="4" name="">
             <a:extLst xmlns:a="http://schemas.openxmlformats.org/drawingml/2006/main">
               <a:ext uri="{FF2B5EF4-FFF2-40B4-BE49-F238E27FC236}">
-                <a16:creationId xmlns:a16="http://schemas.microsoft.com/office/drawing/2014/main" id="{A9A0F71A-BB86-412E-9EFB-B8FE7CAACED8}"/>
+                <a16:creationId xmlns:a16="http://schemas.microsoft.com/office/drawing/2014/main" id="{E414DFF5-CF7B-4FA8-A5C6-C5BA9D7A7BD1}"/>
               </a:ext>
             </a:extLst>
           </p:cNvPr>
@@ -7990,7 +7990,7 @@
           <p:nvPr/>
         </p:nvPicPr>
         <p:blipFill>
-          <a:blip xmlns:r="http://schemas.openxmlformats.org/officeDocument/2006/relationships" xmlns:a="http://schemas.openxmlformats.org/drawingml/2006/main" r:embed="Rf3bd1699ad5341dc"/>
+          <a:blip xmlns:r="http://schemas.openxmlformats.org/officeDocument/2006/relationships" xmlns:a="http://schemas.openxmlformats.org/drawingml/2006/main" r:embed="R02d1c1f5d57c45c1"/>
           <a:stretch xmlns:a="http://schemas.openxmlformats.org/drawingml/2006/main"/>
         </p:blipFill>
         <p:spPr>
@@ -8008,7 +8008,7 @@
           <p:cNvPr id="5" name="">
             <a:extLst xmlns:a="http://schemas.openxmlformats.org/drawingml/2006/main">
               <a:ext uri="{FF2B5EF4-FFF2-40B4-BE49-F238E27FC236}">
-                <a16:creationId xmlns:a16="http://schemas.microsoft.com/office/drawing/2014/main" id="{13279A73-1726-41EA-8015-2880626329AB}"/>
+                <a16:creationId xmlns:a16="http://schemas.microsoft.com/office/drawing/2014/main" id="{1EAB4CF6-E486-4231-A707-3BA67A2A6D77}"/>
               </a:ext>
             </a:extLst>
           </p:cNvPr>
@@ -8076,7 +8076,7 @@
           <p:cNvPr id="6" name="">
             <a:extLst xmlns:a="http://schemas.openxmlformats.org/drawingml/2006/main">
               <a:ext uri="{FF2B5EF4-FFF2-40B4-BE49-F238E27FC236}">
-                <a16:creationId xmlns:a16="http://schemas.microsoft.com/office/drawing/2014/main" id="{52767820-A484-416F-8F84-54E8120D79A8}"/>
+                <a16:creationId xmlns:a16="http://schemas.microsoft.com/office/drawing/2014/main" id="{B02FFA35-5554-4591-B54C-0A38EE4A5EEB}"/>
               </a:ext>
             </a:extLst>
           </p:cNvPr>
@@ -8144,7 +8144,7 @@
           <p:cNvPr id="7" name="">
             <a:extLst xmlns:a="http://schemas.openxmlformats.org/drawingml/2006/main">
               <a:ext uri="{FF2B5EF4-FFF2-40B4-BE49-F238E27FC236}">
-                <a16:creationId xmlns:a16="http://schemas.microsoft.com/office/drawing/2014/main" id="{537BD491-03B6-4DB8-843D-C7ABC0ADE7B9}"/>
+                <a16:creationId xmlns:a16="http://schemas.microsoft.com/office/drawing/2014/main" id="{4424D809-BF6D-4A83-B1A7-FFFD7692FDDF}"/>
               </a:ext>
             </a:extLst>
           </p:cNvPr>
@@ -8212,7 +8212,7 @@
           <p:cNvPr id="8" name="">
             <a:extLst xmlns:a="http://schemas.openxmlformats.org/drawingml/2006/main">
               <a:ext uri="{FF2B5EF4-FFF2-40B4-BE49-F238E27FC236}">
-                <a16:creationId xmlns:a16="http://schemas.microsoft.com/office/drawing/2014/main" id="{28E5CA78-C909-4968-8F46-BF8066597CE0}"/>
+                <a16:creationId xmlns:a16="http://schemas.microsoft.com/office/drawing/2014/main" id="{FDC318EB-1412-4A0B-974B-A110D18FA7A6}"/>
               </a:ext>
             </a:extLst>
           </p:cNvPr>
@@ -8280,7 +8280,7 @@
           <p:cNvPr id="9" name="">
             <a:extLst xmlns:a="http://schemas.openxmlformats.org/drawingml/2006/main">
               <a:ext uri="{FF2B5EF4-FFF2-40B4-BE49-F238E27FC236}">
-                <a16:creationId xmlns:a16="http://schemas.microsoft.com/office/drawing/2014/main" id="{D7935C92-6FF2-4D9F-AED4-96BDF1BA3549}"/>
+                <a16:creationId xmlns:a16="http://schemas.microsoft.com/office/drawing/2014/main" id="{FF45FD9A-96A9-4668-9378-EA2EBA0BE775}"/>
               </a:ext>
             </a:extLst>
           </p:cNvPr>
@@ -8313,7 +8313,7 @@
           <p:cNvPr id="10" name="">
             <a:extLst xmlns:a="http://schemas.openxmlformats.org/drawingml/2006/main">
               <a:ext uri="{FF2B5EF4-FFF2-40B4-BE49-F238E27FC236}">
-                <a16:creationId xmlns:a16="http://schemas.microsoft.com/office/drawing/2014/main" id="{372CBE67-07F8-4C9B-9CF6-FF704DA11A6C}"/>
+                <a16:creationId xmlns:a16="http://schemas.microsoft.com/office/drawing/2014/main" id="{D83E475C-0455-4D11-AFF3-29F342AC1374}"/>
               </a:ext>
             </a:extLst>
           </p:cNvPr>
@@ -8381,7 +8381,7 @@
           <p:cNvPr id="11" name="">
             <a:extLst xmlns:a="http://schemas.openxmlformats.org/drawingml/2006/main">
               <a:ext uri="{FF2B5EF4-FFF2-40B4-BE49-F238E27FC236}">
-                <a16:creationId xmlns:a16="http://schemas.microsoft.com/office/drawing/2014/main" id="{E7F08FEF-F7E6-4FFE-B158-A3F7AF4C0F7A}"/>
+                <a16:creationId xmlns:a16="http://schemas.microsoft.com/office/drawing/2014/main" id="{7836A7CD-6F96-4647-93EA-30C1DB8B167C}"/>
               </a:ext>
             </a:extLst>
           </p:cNvPr>
@@ -8447,7 +8447,7 @@
     </p:spTree>
     <p:extLst>
       <p:ext uri="{BB962C8B-B14F-4D97-AF65-F5344CB8AC3E}">
-        <p14:creationId xmlns:p14="http://schemas.microsoft.com/office/powerpoint/2010/main" val="370802295"/>
+        <p14:creationId xmlns:p14="http://schemas.microsoft.com/office/powerpoint/2010/main" val="1666554938"/>
       </p:ext>
     </p:extLst>
   </p:cSld>
@@ -8478,7 +8478,7 @@
           <p:cNvPr id="20" name="">
             <a:extLst xmlns:a="http://schemas.openxmlformats.org/drawingml/2006/main">
               <a:ext uri="{FF2B5EF4-FFF2-40B4-BE49-F238E27FC236}">
-                <a16:creationId xmlns:a16="http://schemas.microsoft.com/office/drawing/2014/main" id="{F18E19AF-090C-437D-BACC-5CEC2D42BF94}"/>
+                <a16:creationId xmlns:a16="http://schemas.microsoft.com/office/drawing/2014/main" id="{72A55A6E-78E3-4845-9AB9-ECF0D424839A}"/>
               </a:ext>
             </a:extLst>
           </p:cNvPr>
@@ -8546,7 +8546,7 @@
           <p:cNvPr id="2" name="">
             <a:extLst xmlns:a="http://schemas.openxmlformats.org/drawingml/2006/main">
               <a:ext uri="{FF2B5EF4-FFF2-40B4-BE49-F238E27FC236}">
-                <a16:creationId xmlns:a16="http://schemas.microsoft.com/office/drawing/2014/main" id="{A6DC84A9-036C-4A12-9701-7661F881F92B}"/>
+                <a16:creationId xmlns:a16="http://schemas.microsoft.com/office/drawing/2014/main" id="{CAE60FFD-A151-4DC9-A056-F1AC84D7B17C}"/>
               </a:ext>
             </a:extLst>
           </p:cNvPr>
@@ -8579,7 +8579,7 @@
           <p:cNvPr id="3" name="">
             <a:extLst xmlns:a="http://schemas.openxmlformats.org/drawingml/2006/main">
               <a:ext uri="{FF2B5EF4-FFF2-40B4-BE49-F238E27FC236}">
-                <a16:creationId xmlns:a16="http://schemas.microsoft.com/office/drawing/2014/main" id="{5BD8BBAE-783C-4336-B0C4-4A9F6E4FBC22}"/>
+                <a16:creationId xmlns:a16="http://schemas.microsoft.com/office/drawing/2014/main" id="{1B92557C-155F-45D8-97F7-2847D1B6DE50}"/>
               </a:ext>
             </a:extLst>
           </p:cNvPr>
@@ -8647,7 +8647,7 @@
           <p:cNvPr id="4" name="">
             <a:extLst xmlns:a="http://schemas.openxmlformats.org/drawingml/2006/main">
               <a:ext uri="{FF2B5EF4-FFF2-40B4-BE49-F238E27FC236}">
-                <a16:creationId xmlns:a16="http://schemas.microsoft.com/office/drawing/2014/main" id="{6360AD7D-509C-4B4D-8FD2-DBBCF62EE34C}"/>
+                <a16:creationId xmlns:a16="http://schemas.microsoft.com/office/drawing/2014/main" id="{16752431-D400-4A7F-9C93-62EF55685879}"/>
               </a:ext>
             </a:extLst>
           </p:cNvPr>
@@ -8682,7 +8682,7 @@
           <p:cNvPr id="5" name="">
             <a:extLst xmlns:a="http://schemas.openxmlformats.org/drawingml/2006/main">
               <a:ext uri="{FF2B5EF4-FFF2-40B4-BE49-F238E27FC236}">
-                <a16:creationId xmlns:a16="http://schemas.microsoft.com/office/drawing/2014/main" id="{B4824E80-BA49-4DE6-9C24-01DFA2FCE28A}"/>
+                <a16:creationId xmlns:a16="http://schemas.microsoft.com/office/drawing/2014/main" id="{A067CB08-C3EC-408D-AB8B-239CFE206BB8}"/>
               </a:ext>
             </a:extLst>
           </p:cNvPr>
@@ -8750,7 +8750,7 @@
           <p:cNvPr id="6" name="">
             <a:extLst xmlns:a="http://schemas.openxmlformats.org/drawingml/2006/main">
               <a:ext uri="{FF2B5EF4-FFF2-40B4-BE49-F238E27FC236}">
-                <a16:creationId xmlns:a16="http://schemas.microsoft.com/office/drawing/2014/main" id="{690C47C0-979F-4A17-8BF6-8854D0FC2495}"/>
+                <a16:creationId xmlns:a16="http://schemas.microsoft.com/office/drawing/2014/main" id="{70A0206B-DCAF-4314-999C-0A7C4C225055}"/>
               </a:ext>
             </a:extLst>
           </p:cNvPr>
@@ -8818,7 +8818,7 @@
           <p:cNvPr id="7" name="">
             <a:extLst xmlns:a="http://schemas.openxmlformats.org/drawingml/2006/main">
               <a:ext uri="{FF2B5EF4-FFF2-40B4-BE49-F238E27FC236}">
-                <a16:creationId xmlns:a16="http://schemas.microsoft.com/office/drawing/2014/main" id="{14E79167-66EF-4366-B737-7BEEAD6709BC}"/>
+                <a16:creationId xmlns:a16="http://schemas.microsoft.com/office/drawing/2014/main" id="{721DD8BF-9E57-4166-8625-060AE1770CBA}"/>
               </a:ext>
             </a:extLst>
           </p:cNvPr>
@@ -8851,7 +8851,7 @@
           <p:cNvPr id="8" name="">
             <a:extLst xmlns:a="http://schemas.openxmlformats.org/drawingml/2006/main">
               <a:ext uri="{FF2B5EF4-FFF2-40B4-BE49-F238E27FC236}">
-                <a16:creationId xmlns:a16="http://schemas.microsoft.com/office/drawing/2014/main" id="{6DF07008-81F4-4026-A3EB-85427A6635CF}"/>
+                <a16:creationId xmlns:a16="http://schemas.microsoft.com/office/drawing/2014/main" id="{8FB9EBCC-F178-4904-B1E1-239D571FA058}"/>
               </a:ext>
             </a:extLst>
           </p:cNvPr>
@@ -8886,7 +8886,7 @@
           <p:cNvPr id="9" name="">
             <a:extLst xmlns:a="http://schemas.openxmlformats.org/drawingml/2006/main">
               <a:ext uri="{FF2B5EF4-FFF2-40B4-BE49-F238E27FC236}">
-                <a16:creationId xmlns:a16="http://schemas.microsoft.com/office/drawing/2014/main" id="{BEF139D2-C3D0-4C70-BE04-92BC6C75647B}"/>
+                <a16:creationId xmlns:a16="http://schemas.microsoft.com/office/drawing/2014/main" id="{13D9AB4B-70F5-4C71-A3B1-8C94F198FD7F}"/>
               </a:ext>
             </a:extLst>
           </p:cNvPr>
@@ -8954,7 +8954,7 @@
           <p:cNvPr id="10" name="">
             <a:extLst xmlns:a="http://schemas.openxmlformats.org/drawingml/2006/main">
               <a:ext uri="{FF2B5EF4-FFF2-40B4-BE49-F238E27FC236}">
-                <a16:creationId xmlns:a16="http://schemas.microsoft.com/office/drawing/2014/main" id="{AB5C4C1E-B2F2-49F6-8205-6161C39BDE39}"/>
+                <a16:creationId xmlns:a16="http://schemas.microsoft.com/office/drawing/2014/main" id="{E260A1FD-A121-449C-A2D6-2A663551ACE6}"/>
               </a:ext>
             </a:extLst>
           </p:cNvPr>
@@ -9022,7 +9022,7 @@
           <p:cNvPr id="11" name="">
             <a:extLst xmlns:a="http://schemas.openxmlformats.org/drawingml/2006/main">
               <a:ext uri="{FF2B5EF4-FFF2-40B4-BE49-F238E27FC236}">
-                <a16:creationId xmlns:a16="http://schemas.microsoft.com/office/drawing/2014/main" id="{34A0D32E-A184-4AFC-9905-1D98F8521120}"/>
+                <a16:creationId xmlns:a16="http://schemas.microsoft.com/office/drawing/2014/main" id="{526AB9EB-8536-4165-8DA8-B7017E2B505C}"/>
               </a:ext>
             </a:extLst>
           </p:cNvPr>
@@ -9055,7 +9055,7 @@
           <p:cNvPr id="12" name="">
             <a:extLst xmlns:a="http://schemas.openxmlformats.org/drawingml/2006/main">
               <a:ext uri="{FF2B5EF4-FFF2-40B4-BE49-F238E27FC236}">
-                <a16:creationId xmlns:a16="http://schemas.microsoft.com/office/drawing/2014/main" id="{68858A9E-D539-4B5B-9AC8-A2C3CF7A8182}"/>
+                <a16:creationId xmlns:a16="http://schemas.microsoft.com/office/drawing/2014/main" id="{32A7B050-1F5C-4F30-B5E0-A8BF75681342}"/>
               </a:ext>
             </a:extLst>
           </p:cNvPr>
@@ -9090,7 +9090,7 @@
           <p:cNvPr id="13" name="">
             <a:extLst xmlns:a="http://schemas.openxmlformats.org/drawingml/2006/main">
               <a:ext uri="{FF2B5EF4-FFF2-40B4-BE49-F238E27FC236}">
-                <a16:creationId xmlns:a16="http://schemas.microsoft.com/office/drawing/2014/main" id="{CC076F75-38EA-4F0D-855E-E7D3692CC1C5}"/>
+                <a16:creationId xmlns:a16="http://schemas.microsoft.com/office/drawing/2014/main" id="{A3C91CEB-C585-4348-AFE8-A3AC43BA322F}"/>
               </a:ext>
             </a:extLst>
           </p:cNvPr>
@@ -9158,7 +9158,7 @@
           <p:cNvPr id="14" name="">
             <a:extLst xmlns:a="http://schemas.openxmlformats.org/drawingml/2006/main">
               <a:ext uri="{FF2B5EF4-FFF2-40B4-BE49-F238E27FC236}">
-                <a16:creationId xmlns:a16="http://schemas.microsoft.com/office/drawing/2014/main" id="{F96BB327-FE64-480B-B248-E6682B09F18B}"/>
+                <a16:creationId xmlns:a16="http://schemas.microsoft.com/office/drawing/2014/main" id="{62840F3D-4032-47C8-9EE3-566861E696C7}"/>
               </a:ext>
             </a:extLst>
           </p:cNvPr>
@@ -9226,7 +9226,7 @@
           <p:cNvPr id="15" name="">
             <a:extLst xmlns:a="http://schemas.openxmlformats.org/drawingml/2006/main">
               <a:ext uri="{FF2B5EF4-FFF2-40B4-BE49-F238E27FC236}">
-                <a16:creationId xmlns:a16="http://schemas.microsoft.com/office/drawing/2014/main" id="{4B29C847-2F32-475C-919D-E66ABA8A1E10}"/>
+                <a16:creationId xmlns:a16="http://schemas.microsoft.com/office/drawing/2014/main" id="{52FAEEFA-29E9-4093-8D35-47FDC63678C3}"/>
               </a:ext>
             </a:extLst>
           </p:cNvPr>
@@ -9259,7 +9259,7 @@
           <p:cNvPr id="16" name="">
             <a:extLst xmlns:a="http://schemas.openxmlformats.org/drawingml/2006/main">
               <a:ext uri="{FF2B5EF4-FFF2-40B4-BE49-F238E27FC236}">
-                <a16:creationId xmlns:a16="http://schemas.microsoft.com/office/drawing/2014/main" id="{9C5544B7-2E1A-41B9-8B41-4F823325F5CD}"/>
+                <a16:creationId xmlns:a16="http://schemas.microsoft.com/office/drawing/2014/main" id="{8EB5ACD9-11B3-4CF3-9EAD-305D81ECF120}"/>
               </a:ext>
             </a:extLst>
           </p:cNvPr>
@@ -9294,7 +9294,7 @@
           <p:cNvPr id="17" name="">
             <a:extLst xmlns:a="http://schemas.openxmlformats.org/drawingml/2006/main">
               <a:ext uri="{FF2B5EF4-FFF2-40B4-BE49-F238E27FC236}">
-                <a16:creationId xmlns:a16="http://schemas.microsoft.com/office/drawing/2014/main" id="{4AEEB2ED-FAC0-4949-9382-BC4E5718C901}"/>
+                <a16:creationId xmlns:a16="http://schemas.microsoft.com/office/drawing/2014/main" id="{0AB3E047-1564-4DF4-9661-C8F9AA6994BA}"/>
               </a:ext>
             </a:extLst>
           </p:cNvPr>
@@ -9362,7 +9362,7 @@
           <p:cNvPr id="18" name="">
             <a:extLst xmlns:a="http://schemas.openxmlformats.org/drawingml/2006/main">
               <a:ext uri="{FF2B5EF4-FFF2-40B4-BE49-F238E27FC236}">
-                <a16:creationId xmlns:a16="http://schemas.microsoft.com/office/drawing/2014/main" id="{6A48B074-99DB-4E7D-8125-1CA9CCD464F3}"/>
+                <a16:creationId xmlns:a16="http://schemas.microsoft.com/office/drawing/2014/main" id="{01BA18ED-2685-4A36-8484-52F33C78D196}"/>
               </a:ext>
             </a:extLst>
           </p:cNvPr>
@@ -9430,7 +9430,7 @@
           <p:cNvPr id="19" name="">
             <a:extLst xmlns:a="http://schemas.openxmlformats.org/drawingml/2006/main">
               <a:ext uri="{FF2B5EF4-FFF2-40B4-BE49-F238E27FC236}">
-                <a16:creationId xmlns:a16="http://schemas.microsoft.com/office/drawing/2014/main" id="{E0A4E7D5-A38A-45ED-B2AE-F678A2ECF491}"/>
+                <a16:creationId xmlns:a16="http://schemas.microsoft.com/office/drawing/2014/main" id="{BA7CA13F-0F32-4236-A16B-115D0CD9D3C5}"/>
               </a:ext>
             </a:extLst>
           </p:cNvPr>
@@ -9496,7 +9496,7 @@
     </p:spTree>
     <p:extLst>
       <p:ext uri="{BB962C8B-B14F-4D97-AF65-F5344CB8AC3E}">
-        <p14:creationId xmlns:p14="http://schemas.microsoft.com/office/powerpoint/2010/main" val="2109096887"/>
+        <p14:creationId xmlns:p14="http://schemas.microsoft.com/office/powerpoint/2010/main" val="836004205"/>
       </p:ext>
     </p:extLst>
   </p:cSld>
@@ -9527,7 +9527,7 @@
           <p:cNvPr id="14" name="">
             <a:extLst xmlns:a="http://schemas.openxmlformats.org/drawingml/2006/main">
               <a:ext uri="{FF2B5EF4-FFF2-40B4-BE49-F238E27FC236}">
-                <a16:creationId xmlns:a16="http://schemas.microsoft.com/office/drawing/2014/main" id="{39C43CAA-DF06-4356-9F6D-0B83CA4D861E}"/>
+                <a16:creationId xmlns:a16="http://schemas.microsoft.com/office/drawing/2014/main" id="{FC95B735-A53B-4373-89CA-D838892727E8}"/>
               </a:ext>
             </a:extLst>
           </p:cNvPr>
@@ -9595,7 +9595,7 @@
           <p:cNvPr id="2" name="">
             <a:extLst xmlns:a="http://schemas.openxmlformats.org/drawingml/2006/main">
               <a:ext uri="{FF2B5EF4-FFF2-40B4-BE49-F238E27FC236}">
-                <a16:creationId xmlns:a16="http://schemas.microsoft.com/office/drawing/2014/main" id="{50F68E75-A001-4143-9FDA-F16CA9395F4A}"/>
+                <a16:creationId xmlns:a16="http://schemas.microsoft.com/office/drawing/2014/main" id="{1A20B3BD-1E3C-4EF3-A17A-A96A3C8EF6D0}"/>
               </a:ext>
             </a:extLst>
           </p:cNvPr>
@@ -9628,7 +9628,7 @@
           <p:cNvPr id="3" name="">
             <a:extLst xmlns:a="http://schemas.openxmlformats.org/drawingml/2006/main">
               <a:ext uri="{FF2B5EF4-FFF2-40B4-BE49-F238E27FC236}">
-                <a16:creationId xmlns:a16="http://schemas.microsoft.com/office/drawing/2014/main" id="{2802B93C-F0C6-4AA8-AFC9-69565133BE1E}"/>
+                <a16:creationId xmlns:a16="http://schemas.microsoft.com/office/drawing/2014/main" id="{3FA18AF5-A496-4BA9-8789-5DE895F4D590}"/>
               </a:ext>
             </a:extLst>
           </p:cNvPr>
@@ -9696,7 +9696,7 @@
           <p:cNvPr id="4" name="">
             <a:extLst xmlns:a="http://schemas.openxmlformats.org/drawingml/2006/main">
               <a:ext uri="{FF2B5EF4-FFF2-40B4-BE49-F238E27FC236}">
-                <a16:creationId xmlns:a16="http://schemas.microsoft.com/office/drawing/2014/main" id="{86DF7D5E-F13F-4B51-B24C-614D60AA34FC}"/>
+                <a16:creationId xmlns:a16="http://schemas.microsoft.com/office/drawing/2014/main" id="{AFE39FD9-01E9-4506-8FA5-11A7F110CE8B}"/>
               </a:ext>
             </a:extLst>
           </p:cNvPr>
@@ -9731,7 +9731,7 @@
           <p:cNvPr id="5" name="">
             <a:extLst xmlns:a="http://schemas.openxmlformats.org/drawingml/2006/main">
               <a:ext uri="{FF2B5EF4-FFF2-40B4-BE49-F238E27FC236}">
-                <a16:creationId xmlns:a16="http://schemas.microsoft.com/office/drawing/2014/main" id="{8419A748-AA41-45C8-BCE7-B8DC2D792498}"/>
+                <a16:creationId xmlns:a16="http://schemas.microsoft.com/office/drawing/2014/main" id="{94CF1F09-106F-49FB-88FF-880B474C73A7}"/>
               </a:ext>
             </a:extLst>
           </p:cNvPr>
@@ -9799,7 +9799,7 @@
           <p:cNvPr id="6" name="">
             <a:extLst xmlns:a="http://schemas.openxmlformats.org/drawingml/2006/main">
               <a:ext uri="{FF2B5EF4-FFF2-40B4-BE49-F238E27FC236}">
-                <a16:creationId xmlns:a16="http://schemas.microsoft.com/office/drawing/2014/main" id="{8BEE0780-9C2F-45AE-A435-45A18B7EFE4C}"/>
+                <a16:creationId xmlns:a16="http://schemas.microsoft.com/office/drawing/2014/main" id="{F6927CFE-B911-4BA2-92AD-49C050DE2B87}"/>
               </a:ext>
             </a:extLst>
           </p:cNvPr>
@@ -9834,7 +9834,7 @@
           <p:cNvPr id="7" name="">
             <a:extLst xmlns:a="http://schemas.openxmlformats.org/drawingml/2006/main">
               <a:ext uri="{FF2B5EF4-FFF2-40B4-BE49-F238E27FC236}">
-                <a16:creationId xmlns:a16="http://schemas.microsoft.com/office/drawing/2014/main" id="{AA15511D-F80E-40F7-943F-32E035B18D45}"/>
+                <a16:creationId xmlns:a16="http://schemas.microsoft.com/office/drawing/2014/main" id="{D53ED601-F62D-477A-A52D-4C15BB7F7645}"/>
               </a:ext>
             </a:extLst>
           </p:cNvPr>
@@ -9902,7 +9902,7 @@
           <p:cNvPr id="8" name="">
             <a:extLst xmlns:a="http://schemas.openxmlformats.org/drawingml/2006/main">
               <a:ext uri="{FF2B5EF4-FFF2-40B4-BE49-F238E27FC236}">
-                <a16:creationId xmlns:a16="http://schemas.microsoft.com/office/drawing/2014/main" id="{12A649F7-2B51-46F3-95E7-6DAA3DA5937C}"/>
+                <a16:creationId xmlns:a16="http://schemas.microsoft.com/office/drawing/2014/main" id="{DE438A3D-70B9-4A9D-800C-494973E550B2}"/>
               </a:ext>
             </a:extLst>
           </p:cNvPr>
@@ -9937,7 +9937,7 @@
           <p:cNvPr id="9" name="">
             <a:extLst xmlns:a="http://schemas.openxmlformats.org/drawingml/2006/main">
               <a:ext uri="{FF2B5EF4-FFF2-40B4-BE49-F238E27FC236}">
-                <a16:creationId xmlns:a16="http://schemas.microsoft.com/office/drawing/2014/main" id="{6F33E955-13E5-4AC5-9D60-64814A2AEDB1}"/>
+                <a16:creationId xmlns:a16="http://schemas.microsoft.com/office/drawing/2014/main" id="{8443863D-8920-47D5-BD14-05DD4D15C0FE}"/>
               </a:ext>
             </a:extLst>
           </p:cNvPr>
@@ -10005,7 +10005,7 @@
           <p:cNvPr id="10" name="">
             <a:extLst xmlns:a="http://schemas.openxmlformats.org/drawingml/2006/main">
               <a:ext uri="{FF2B5EF4-FFF2-40B4-BE49-F238E27FC236}">
-                <a16:creationId xmlns:a16="http://schemas.microsoft.com/office/drawing/2014/main" id="{B2FE52A9-2A70-418C-905E-AC50C18FC0F6}"/>
+                <a16:creationId xmlns:a16="http://schemas.microsoft.com/office/drawing/2014/main" id="{3BA7ED78-8176-460F-822E-F33EDE51476D}"/>
               </a:ext>
             </a:extLst>
           </p:cNvPr>
@@ -10038,7 +10038,7 @@
           <p:cNvPr id="11" name="">
             <a:extLst xmlns:a="http://schemas.openxmlformats.org/drawingml/2006/main">
               <a:ext uri="{FF2B5EF4-FFF2-40B4-BE49-F238E27FC236}">
-                <a16:creationId xmlns:a16="http://schemas.microsoft.com/office/drawing/2014/main" id="{88E91D17-ABAB-40FD-B828-FF06D4D123A4}"/>
+                <a16:creationId xmlns:a16="http://schemas.microsoft.com/office/drawing/2014/main" id="{353DFB0A-A957-4150-9A65-A6FF858C9B96}"/>
               </a:ext>
             </a:extLst>
           </p:cNvPr>
@@ -10106,7 +10106,7 @@
           <p:cNvPr id="12" name="">
             <a:extLst xmlns:a="http://schemas.openxmlformats.org/drawingml/2006/main">
               <a:ext uri="{FF2B5EF4-FFF2-40B4-BE49-F238E27FC236}">
-                <a16:creationId xmlns:a16="http://schemas.microsoft.com/office/drawing/2014/main" id="{E8B61601-170D-43F1-A6CE-99444F851D38}"/>
+                <a16:creationId xmlns:a16="http://schemas.microsoft.com/office/drawing/2014/main" id="{0DE31CA3-9FC4-40AE-9A4D-36F43E090A0D}"/>
               </a:ext>
             </a:extLst>
           </p:cNvPr>
@@ -10243,7 +10243,7 @@
           <p:cNvPr id="13" name="">
             <a:extLst xmlns:a="http://schemas.openxmlformats.org/drawingml/2006/main">
               <a:ext uri="{FF2B5EF4-FFF2-40B4-BE49-F238E27FC236}">
-                <a16:creationId xmlns:a16="http://schemas.microsoft.com/office/drawing/2014/main" id="{F511B9D8-7187-427D-B151-E7B3C7276EE9}"/>
+                <a16:creationId xmlns:a16="http://schemas.microsoft.com/office/drawing/2014/main" id="{6B96DE3F-11EE-4053-AD36-09C3FDF9D6E9}"/>
               </a:ext>
             </a:extLst>
           </p:cNvPr>
@@ -10309,7 +10309,7 @@
     </p:spTree>
     <p:extLst>
       <p:ext uri="{BB962C8B-B14F-4D97-AF65-F5344CB8AC3E}">
-        <p14:creationId xmlns:p14="http://schemas.microsoft.com/office/powerpoint/2010/main" val="2075002143"/>
+        <p14:creationId xmlns:p14="http://schemas.microsoft.com/office/powerpoint/2010/main" val="870063554"/>
       </p:ext>
     </p:extLst>
   </p:cSld>
@@ -10340,7 +10340,7 @@
           <p:cNvPr id="8" name="">
             <a:extLst xmlns:a="http://schemas.openxmlformats.org/drawingml/2006/main">
               <a:ext uri="{FF2B5EF4-FFF2-40B4-BE49-F238E27FC236}">
-                <a16:creationId xmlns:a16="http://schemas.microsoft.com/office/drawing/2014/main" id="{46C41532-D47C-4498-9AFB-D285CEBADE4A}"/>
+                <a16:creationId xmlns:a16="http://schemas.microsoft.com/office/drawing/2014/main" id="{51F117B9-06FF-4BA2-BC60-A7C021F708EA}"/>
               </a:ext>
             </a:extLst>
           </p:cNvPr>
@@ -10408,7 +10408,7 @@
           <p:cNvPr id="2" name="">
             <a:extLst xmlns:a="http://schemas.openxmlformats.org/drawingml/2006/main">
               <a:ext uri="{FF2B5EF4-FFF2-40B4-BE49-F238E27FC236}">
-                <a16:creationId xmlns:a16="http://schemas.microsoft.com/office/drawing/2014/main" id="{88CBFD3B-BAE1-4897-A574-303FD79B2BE4}"/>
+                <a16:creationId xmlns:a16="http://schemas.microsoft.com/office/drawing/2014/main" id="{433080F1-E119-4EFB-AE32-AFE2D6DE312E}"/>
               </a:ext>
             </a:extLst>
           </p:cNvPr>
@@ -10441,7 +10441,7 @@
           <p:cNvPr id="3" name="">
             <a:extLst xmlns:a="http://schemas.openxmlformats.org/drawingml/2006/main">
               <a:ext uri="{FF2B5EF4-FFF2-40B4-BE49-F238E27FC236}">
-                <a16:creationId xmlns:a16="http://schemas.microsoft.com/office/drawing/2014/main" id="{AC37B181-F59C-4C07-8E1C-B667E4215CEE}"/>
+                <a16:creationId xmlns:a16="http://schemas.microsoft.com/office/drawing/2014/main" id="{BC98E4BB-1610-447F-B5F2-523A76FCAA38}"/>
               </a:ext>
             </a:extLst>
           </p:cNvPr>
@@ -10509,7 +10509,7 @@
           <p:cNvPr id="4" name="">
             <a:extLst xmlns:a="http://schemas.openxmlformats.org/drawingml/2006/main">
               <a:ext uri="{FF2B5EF4-FFF2-40B4-BE49-F238E27FC236}">
-                <a16:creationId xmlns:a16="http://schemas.microsoft.com/office/drawing/2014/main" id="{B961985A-6DAF-41A0-AB22-795279CB0EB5}"/>
+                <a16:creationId xmlns:a16="http://schemas.microsoft.com/office/drawing/2014/main" id="{00BFE3CD-E5CE-4FD1-87E6-385D488EC8D4}"/>
               </a:ext>
             </a:extLst>
           </p:cNvPr>
@@ -10689,7 +10689,7 @@
           <p:cNvPr id="5" name="">
             <a:extLst xmlns:a="http://schemas.openxmlformats.org/drawingml/2006/main">
               <a:ext uri="{FF2B5EF4-FFF2-40B4-BE49-F238E27FC236}">
-                <a16:creationId xmlns:a16="http://schemas.microsoft.com/office/drawing/2014/main" id="{3659CADF-71A1-4783-833A-A96241AAF239}"/>
+                <a16:creationId xmlns:a16="http://schemas.microsoft.com/office/drawing/2014/main" id="{B41B6CCC-AE12-4298-9035-5BB78A513F73}"/>
               </a:ext>
             </a:extLst>
           </p:cNvPr>
@@ -10722,7 +10722,7 @@
           <p:cNvPr id="6" name="">
             <a:extLst xmlns:a="http://schemas.openxmlformats.org/drawingml/2006/main">
               <a:ext uri="{FF2B5EF4-FFF2-40B4-BE49-F238E27FC236}">
-                <a16:creationId xmlns:a16="http://schemas.microsoft.com/office/drawing/2014/main" id="{4CC03645-59A7-43C0-9788-E2CB5C3C42A1}"/>
+                <a16:creationId xmlns:a16="http://schemas.microsoft.com/office/drawing/2014/main" id="{B6D82961-0E0C-456C-91DB-BF81E32C1882}"/>
               </a:ext>
             </a:extLst>
           </p:cNvPr>
@@ -10790,7 +10790,7 @@
           <p:cNvPr id="7" name="">
             <a:extLst xmlns:a="http://schemas.openxmlformats.org/drawingml/2006/main">
               <a:ext uri="{FF2B5EF4-FFF2-40B4-BE49-F238E27FC236}">
-                <a16:creationId xmlns:a16="http://schemas.microsoft.com/office/drawing/2014/main" id="{959CA48D-EB9A-40C3-93FC-6B1E436542AD}"/>
+                <a16:creationId xmlns:a16="http://schemas.microsoft.com/office/drawing/2014/main" id="{96984D7F-23FB-442E-96A2-674D665FE2D6}"/>
               </a:ext>
             </a:extLst>
           </p:cNvPr>
@@ -10856,7 +10856,7 @@
     </p:spTree>
     <p:extLst>
       <p:ext uri="{BB962C8B-B14F-4D97-AF65-F5344CB8AC3E}">
-        <p14:creationId xmlns:p14="http://schemas.microsoft.com/office/powerpoint/2010/main" val="382861867"/>
+        <p14:creationId xmlns:p14="http://schemas.microsoft.com/office/powerpoint/2010/main" val="1942901431"/>
       </p:ext>
     </p:extLst>
   </p:cSld>
@@ -10887,7 +10887,7 @@
           <p:cNvPr id="15" name="">
             <a:extLst xmlns:a="http://schemas.openxmlformats.org/drawingml/2006/main">
               <a:ext uri="{FF2B5EF4-FFF2-40B4-BE49-F238E27FC236}">
-                <a16:creationId xmlns:a16="http://schemas.microsoft.com/office/drawing/2014/main" id="{60613D0E-9C3D-4FA3-B2C9-F0A98B0F1C11}"/>
+                <a16:creationId xmlns:a16="http://schemas.microsoft.com/office/drawing/2014/main" id="{CC252EC9-72C4-46AC-B20F-9A93C7095FFF}"/>
               </a:ext>
             </a:extLst>
           </p:cNvPr>
@@ -10955,7 +10955,7 @@
           <p:cNvPr id="2" name="">
             <a:extLst xmlns:a="http://schemas.openxmlformats.org/drawingml/2006/main">
               <a:ext uri="{FF2B5EF4-FFF2-40B4-BE49-F238E27FC236}">
-                <a16:creationId xmlns:a16="http://schemas.microsoft.com/office/drawing/2014/main" id="{8DF46EDB-D6F2-428E-9E48-40F6BA6C7F4A}"/>
+                <a16:creationId xmlns:a16="http://schemas.microsoft.com/office/drawing/2014/main" id="{5FC91259-EC14-4C69-8D55-AC25B6499E0E}"/>
               </a:ext>
             </a:extLst>
           </p:cNvPr>
@@ -10988,7 +10988,7 @@
           <p:cNvPr id="3" name="">
             <a:extLst xmlns:a="http://schemas.openxmlformats.org/drawingml/2006/main">
               <a:ext uri="{FF2B5EF4-FFF2-40B4-BE49-F238E27FC236}">
-                <a16:creationId xmlns:a16="http://schemas.microsoft.com/office/drawing/2014/main" id="{2257099B-8091-4C48-926A-A5D49CB30430}"/>
+                <a16:creationId xmlns:a16="http://schemas.microsoft.com/office/drawing/2014/main" id="{C1880B38-9620-484A-8BF6-AB5B3B71B113}"/>
               </a:ext>
             </a:extLst>
           </p:cNvPr>
@@ -11056,7 +11056,7 @@
           <p:cNvPr id="4" name="">
             <a:extLst xmlns:a="http://schemas.openxmlformats.org/drawingml/2006/main">
               <a:ext uri="{FF2B5EF4-FFF2-40B4-BE49-F238E27FC236}">
-                <a16:creationId xmlns:a16="http://schemas.microsoft.com/office/drawing/2014/main" id="{6C97E659-A7DB-4690-83D6-E1A4E694B5B7}"/>
+                <a16:creationId xmlns:a16="http://schemas.microsoft.com/office/drawing/2014/main" id="{B76495DC-59EC-48F1-B9ED-591EEF2D3584}"/>
               </a:ext>
             </a:extLst>
           </p:cNvPr>
@@ -11124,7 +11124,7 @@
           <p:cNvPr id="5" name="">
             <a:extLst xmlns:a="http://schemas.openxmlformats.org/drawingml/2006/main">
               <a:ext uri="{FF2B5EF4-FFF2-40B4-BE49-F238E27FC236}">
-                <a16:creationId xmlns:a16="http://schemas.microsoft.com/office/drawing/2014/main" id="{7D5C180D-81C0-4D9C-B53B-B5E30DCF6790}"/>
+                <a16:creationId xmlns:a16="http://schemas.microsoft.com/office/drawing/2014/main" id="{9C4B8BB9-50E3-4C8E-8D02-2B07A258B598}"/>
               </a:ext>
             </a:extLst>
           </p:cNvPr>
@@ -11159,7 +11159,7 @@
           <p:cNvPr id="6" name="">
             <a:extLst xmlns:a="http://schemas.openxmlformats.org/drawingml/2006/main">
               <a:ext uri="{FF2B5EF4-FFF2-40B4-BE49-F238E27FC236}">
-                <a16:creationId xmlns:a16="http://schemas.microsoft.com/office/drawing/2014/main" id="{FE1A81A7-B74A-4AE2-8952-DDD94F5AC486}"/>
+                <a16:creationId xmlns:a16="http://schemas.microsoft.com/office/drawing/2014/main" id="{5620730F-DBE5-4DFA-AC6E-A6AE63EE5E6B}"/>
               </a:ext>
             </a:extLst>
           </p:cNvPr>
@@ -11227,7 +11227,7 @@
           <p:cNvPr id="7" name="">
             <a:extLst xmlns:a="http://schemas.openxmlformats.org/drawingml/2006/main">
               <a:ext uri="{FF2B5EF4-FFF2-40B4-BE49-F238E27FC236}">
-                <a16:creationId xmlns:a16="http://schemas.microsoft.com/office/drawing/2014/main" id="{61344C5D-0AE2-4964-A6D6-C598002DC3C7}"/>
+                <a16:creationId xmlns:a16="http://schemas.microsoft.com/office/drawing/2014/main" id="{381088B6-8944-46F8-8C94-4486ECA4D3B9}"/>
               </a:ext>
             </a:extLst>
           </p:cNvPr>
@@ -11262,7 +11262,7 @@
           <p:cNvPr id="8" name="">
             <a:extLst xmlns:a="http://schemas.openxmlformats.org/drawingml/2006/main">
               <a:ext uri="{FF2B5EF4-FFF2-40B4-BE49-F238E27FC236}">
-                <a16:creationId xmlns:a16="http://schemas.microsoft.com/office/drawing/2014/main" id="{F0BF8950-32C9-4F88-B66F-7E035A19C5AC}"/>
+                <a16:creationId xmlns:a16="http://schemas.microsoft.com/office/drawing/2014/main" id="{D3EFE768-F9E0-4687-BF7E-C44318E8EA3F}"/>
               </a:ext>
             </a:extLst>
           </p:cNvPr>
@@ -11330,7 +11330,7 @@
           <p:cNvPr id="9" name="">
             <a:extLst xmlns:a="http://schemas.openxmlformats.org/drawingml/2006/main">
               <a:ext uri="{FF2B5EF4-FFF2-40B4-BE49-F238E27FC236}">
-                <a16:creationId xmlns:a16="http://schemas.microsoft.com/office/drawing/2014/main" id="{A6403366-68EC-4406-9A05-73C500C37149}"/>
+                <a16:creationId xmlns:a16="http://schemas.microsoft.com/office/drawing/2014/main" id="{F204BEFD-D8B0-4B94-BD9D-288CDCE92608}"/>
               </a:ext>
             </a:extLst>
           </p:cNvPr>
@@ -11365,7 +11365,7 @@
           <p:cNvPr id="10" name="">
             <a:extLst xmlns:a="http://schemas.openxmlformats.org/drawingml/2006/main">
               <a:ext uri="{FF2B5EF4-FFF2-40B4-BE49-F238E27FC236}">
-                <a16:creationId xmlns:a16="http://schemas.microsoft.com/office/drawing/2014/main" id="{6D5873C6-40F4-4767-BA3E-5F7727078525}"/>
+                <a16:creationId xmlns:a16="http://schemas.microsoft.com/office/drawing/2014/main" id="{DE3B14BB-2CC3-42C9-A1CA-026BF3B9A1E0}"/>
               </a:ext>
             </a:extLst>
           </p:cNvPr>
@@ -11433,7 +11433,7 @@
           <p:cNvPr id="11" name="">
             <a:extLst xmlns:a="http://schemas.openxmlformats.org/drawingml/2006/main">
               <a:ext uri="{FF2B5EF4-FFF2-40B4-BE49-F238E27FC236}">
-                <a16:creationId xmlns:a16="http://schemas.microsoft.com/office/drawing/2014/main" id="{73727DF8-50A4-453F-BAF8-6A0CB32BAF97}"/>
+                <a16:creationId xmlns:a16="http://schemas.microsoft.com/office/drawing/2014/main" id="{E63DF977-B156-446C-B024-262036206698}"/>
               </a:ext>
             </a:extLst>
           </p:cNvPr>
@@ -11468,7 +11468,7 @@
           <p:cNvPr id="12" name="">
             <a:extLst xmlns:a="http://schemas.openxmlformats.org/drawingml/2006/main">
               <a:ext uri="{FF2B5EF4-FFF2-40B4-BE49-F238E27FC236}">
-                <a16:creationId xmlns:a16="http://schemas.microsoft.com/office/drawing/2014/main" id="{0C387C20-9BA3-412F-B9EB-D643E8CF4A5E}"/>
+                <a16:creationId xmlns:a16="http://schemas.microsoft.com/office/drawing/2014/main" id="{3F15405E-AF43-4B5E-B3B5-6820A6DAACF8}"/>
               </a:ext>
             </a:extLst>
           </p:cNvPr>
@@ -11536,7 +11536,7 @@
           <p:cNvPr id="13" name="">
             <a:extLst xmlns:a="http://schemas.openxmlformats.org/drawingml/2006/main">
               <a:ext uri="{FF2B5EF4-FFF2-40B4-BE49-F238E27FC236}">
-                <a16:creationId xmlns:a16="http://schemas.microsoft.com/office/drawing/2014/main" id="{7FE1450D-1E1F-45D0-996C-8FCACA01A159}"/>
+                <a16:creationId xmlns:a16="http://schemas.microsoft.com/office/drawing/2014/main" id="{73328821-B7AA-4EC5-98FB-9C8ECF880AB0}"/>
               </a:ext>
             </a:extLst>
           </p:cNvPr>
@@ -11604,7 +11604,7 @@
           <p:cNvPr id="14" name="">
             <a:extLst xmlns:a="http://schemas.openxmlformats.org/drawingml/2006/main">
               <a:ext uri="{FF2B5EF4-FFF2-40B4-BE49-F238E27FC236}">
-                <a16:creationId xmlns:a16="http://schemas.microsoft.com/office/drawing/2014/main" id="{9EF66FC2-FE75-4745-9645-56B10EC6E6BA}"/>
+                <a16:creationId xmlns:a16="http://schemas.microsoft.com/office/drawing/2014/main" id="{ED5394EB-5959-4924-BFB8-EA5E3B50EB85}"/>
               </a:ext>
             </a:extLst>
           </p:cNvPr>
@@ -11670,7 +11670,7 @@
     </p:spTree>
     <p:extLst>
       <p:ext uri="{BB962C8B-B14F-4D97-AF65-F5344CB8AC3E}">
-        <p14:creationId xmlns:p14="http://schemas.microsoft.com/office/powerpoint/2010/main" val="1654291578"/>
+        <p14:creationId xmlns:p14="http://schemas.microsoft.com/office/powerpoint/2010/main" val="1335205120"/>
       </p:ext>
     </p:extLst>
   </p:cSld>
@@ -11701,7 +11701,7 @@
           <p:cNvPr id="34" name="">
             <a:extLst xmlns:a="http://schemas.openxmlformats.org/drawingml/2006/main">
               <a:ext uri="{FF2B5EF4-FFF2-40B4-BE49-F238E27FC236}">
-                <a16:creationId xmlns:a16="http://schemas.microsoft.com/office/drawing/2014/main" id="{5DEC66E1-EDB5-4473-9EC8-86235E6869EA}"/>
+                <a16:creationId xmlns:a16="http://schemas.microsoft.com/office/drawing/2014/main" id="{8EE2CE52-2233-4FFF-917E-3DC9F3F47AD2}"/>
               </a:ext>
             </a:extLst>
           </p:cNvPr>
@@ -11769,7 +11769,7 @@
           <p:cNvPr id="2" name="">
             <a:extLst xmlns:a="http://schemas.openxmlformats.org/drawingml/2006/main">
               <a:ext uri="{FF2B5EF4-FFF2-40B4-BE49-F238E27FC236}">
-                <a16:creationId xmlns:a16="http://schemas.microsoft.com/office/drawing/2014/main" id="{4521AA9B-259D-4606-8236-EBA94C853B30}"/>
+                <a16:creationId xmlns:a16="http://schemas.microsoft.com/office/drawing/2014/main" id="{0C10FBD0-A5B5-4A64-94F6-DE208C9EC2BC}"/>
               </a:ext>
             </a:extLst>
           </p:cNvPr>
@@ -11802,7 +11802,7 @@
           <p:cNvPr id="3" name="">
             <a:extLst xmlns:a="http://schemas.openxmlformats.org/drawingml/2006/main">
               <a:ext uri="{FF2B5EF4-FFF2-40B4-BE49-F238E27FC236}">
-                <a16:creationId xmlns:a16="http://schemas.microsoft.com/office/drawing/2014/main" id="{E74DDCAE-725F-4AEC-8331-6474FCA7B06B}"/>
+                <a16:creationId xmlns:a16="http://schemas.microsoft.com/office/drawing/2014/main" id="{C92F65C5-8B2B-437E-A123-E766DA75E8BB}"/>
               </a:ext>
             </a:extLst>
           </p:cNvPr>
@@ -11870,7 +11870,7 @@
           <p:cNvPr id="4" name="">
             <a:extLst xmlns:a="http://schemas.openxmlformats.org/drawingml/2006/main">
               <a:ext uri="{FF2B5EF4-FFF2-40B4-BE49-F238E27FC236}">
-                <a16:creationId xmlns:a16="http://schemas.microsoft.com/office/drawing/2014/main" id="{74B44A1E-D4D7-4DC7-ADB1-504EB14CD095}"/>
+                <a16:creationId xmlns:a16="http://schemas.microsoft.com/office/drawing/2014/main" id="{4F6736E1-C0E7-4658-81BF-B6948DCB3CB8}"/>
               </a:ext>
             </a:extLst>
           </p:cNvPr>
@@ -11905,7 +11905,7 @@
           <p:cNvPr id="5" name="">
             <a:extLst xmlns:a="http://schemas.openxmlformats.org/drawingml/2006/main">
               <a:ext uri="{FF2B5EF4-FFF2-40B4-BE49-F238E27FC236}">
-                <a16:creationId xmlns:a16="http://schemas.microsoft.com/office/drawing/2014/main" id="{BD5B4463-D006-49F3-AC3A-EBE5A615576F}"/>
+                <a16:creationId xmlns:a16="http://schemas.microsoft.com/office/drawing/2014/main" id="{9B3D999B-8C56-40EB-9AA0-A58495C51227}"/>
               </a:ext>
             </a:extLst>
           </p:cNvPr>
@@ -11973,7 +11973,7 @@
           <p:cNvPr id="6" name="">
             <a:extLst xmlns:a="http://schemas.openxmlformats.org/drawingml/2006/main">
               <a:ext uri="{FF2B5EF4-FFF2-40B4-BE49-F238E27FC236}">
-                <a16:creationId xmlns:a16="http://schemas.microsoft.com/office/drawing/2014/main" id="{92D9FF40-2DF9-46E9-ADF8-3FC638DCB043}"/>
+                <a16:creationId xmlns:a16="http://schemas.microsoft.com/office/drawing/2014/main" id="{A1D36017-9E02-44A9-A9AC-6895F83E7B71}"/>
               </a:ext>
             </a:extLst>
           </p:cNvPr>
@@ -12041,7 +12041,7 @@
           <p:cNvPr id="7" name="">
             <a:extLst xmlns:a="http://schemas.openxmlformats.org/drawingml/2006/main">
               <a:ext uri="{FF2B5EF4-FFF2-40B4-BE49-F238E27FC236}">
-                <a16:creationId xmlns:a16="http://schemas.microsoft.com/office/drawing/2014/main" id="{51410D4F-DAA6-42EF-8B99-608A1EE79458}"/>
+                <a16:creationId xmlns:a16="http://schemas.microsoft.com/office/drawing/2014/main" id="{83C02F48-3801-4818-946C-66FAA7B3E479}"/>
               </a:ext>
             </a:extLst>
           </p:cNvPr>
@@ -12074,7 +12074,7 @@
           <p:cNvPr id="8" name="">
             <a:extLst xmlns:a="http://schemas.openxmlformats.org/drawingml/2006/main">
               <a:ext uri="{FF2B5EF4-FFF2-40B4-BE49-F238E27FC236}">
-                <a16:creationId xmlns:a16="http://schemas.microsoft.com/office/drawing/2014/main" id="{77E42A3E-AA7D-4F8C-A00D-376960EFBD05}"/>
+                <a16:creationId xmlns:a16="http://schemas.microsoft.com/office/drawing/2014/main" id="{4B365CDF-A5FB-4C56-A010-FEB87AB5660B}"/>
               </a:ext>
             </a:extLst>
           </p:cNvPr>
@@ -12106,7 +12106,7 @@
           <p:cNvPr id="9" name="">
             <a:extLst xmlns:a="http://schemas.openxmlformats.org/drawingml/2006/main">
               <a:ext uri="{FF2B5EF4-FFF2-40B4-BE49-F238E27FC236}">
-                <a16:creationId xmlns:a16="http://schemas.microsoft.com/office/drawing/2014/main" id="{5295F1B7-1B34-4F72-8FAB-DAE106E9498A}"/>
+                <a16:creationId xmlns:a16="http://schemas.microsoft.com/office/drawing/2014/main" id="{E64C92C9-18BF-41E9-AF23-39CF79FB8BC3}"/>
               </a:ext>
             </a:extLst>
           </p:cNvPr>
@@ -12141,7 +12141,7 @@
           <p:cNvPr id="10" name="">
             <a:extLst xmlns:a="http://schemas.openxmlformats.org/drawingml/2006/main">
               <a:ext uri="{FF2B5EF4-FFF2-40B4-BE49-F238E27FC236}">
-                <a16:creationId xmlns:a16="http://schemas.microsoft.com/office/drawing/2014/main" id="{02DA3788-30E6-44C3-B3DB-87CBFD19B652}"/>
+                <a16:creationId xmlns:a16="http://schemas.microsoft.com/office/drawing/2014/main" id="{77C4F3BB-CA53-42B8-8838-A31F5C51C90F}"/>
               </a:ext>
             </a:extLst>
           </p:cNvPr>
@@ -12209,7 +12209,7 @@
           <p:cNvPr id="11" name="">
             <a:extLst xmlns:a="http://schemas.openxmlformats.org/drawingml/2006/main">
               <a:ext uri="{FF2B5EF4-FFF2-40B4-BE49-F238E27FC236}">
-                <a16:creationId xmlns:a16="http://schemas.microsoft.com/office/drawing/2014/main" id="{FD517390-A503-41D2-B4DE-C96AC8902FDD}"/>
+                <a16:creationId xmlns:a16="http://schemas.microsoft.com/office/drawing/2014/main" id="{219A0A82-8815-4017-A851-BFAD699E5548}"/>
               </a:ext>
             </a:extLst>
           </p:cNvPr>
@@ -12277,7 +12277,7 @@
           <p:cNvPr id="12" name="">
             <a:extLst xmlns:a="http://schemas.openxmlformats.org/drawingml/2006/main">
               <a:ext uri="{FF2B5EF4-FFF2-40B4-BE49-F238E27FC236}">
-                <a16:creationId xmlns:a16="http://schemas.microsoft.com/office/drawing/2014/main" id="{BCC6274E-FCD6-4D61-BF84-F76B862F87F0}"/>
+                <a16:creationId xmlns:a16="http://schemas.microsoft.com/office/drawing/2014/main" id="{F73B6EF6-9F2D-426D-A0B0-365DC2C46518}"/>
               </a:ext>
             </a:extLst>
           </p:cNvPr>
@@ -12310,7 +12310,7 @@
           <p:cNvPr id="13" name="">
             <a:extLst xmlns:a="http://schemas.openxmlformats.org/drawingml/2006/main">
               <a:ext uri="{FF2B5EF4-FFF2-40B4-BE49-F238E27FC236}">
-                <a16:creationId xmlns:a16="http://schemas.microsoft.com/office/drawing/2014/main" id="{E57EDFEA-B7D2-4C7A-BF38-9E8A0D70543B}"/>
+                <a16:creationId xmlns:a16="http://schemas.microsoft.com/office/drawing/2014/main" id="{FC1655EC-6A66-414F-ACFC-30A57D2FC662}"/>
               </a:ext>
             </a:extLst>
           </p:cNvPr>
@@ -12342,7 +12342,7 @@
           <p:cNvPr id="14" name="">
             <a:extLst xmlns:a="http://schemas.openxmlformats.org/drawingml/2006/main">
               <a:ext uri="{FF2B5EF4-FFF2-40B4-BE49-F238E27FC236}">
-                <a16:creationId xmlns:a16="http://schemas.microsoft.com/office/drawing/2014/main" id="{EC7C12E6-47CB-4C2A-BFC5-6993C1556801}"/>
+                <a16:creationId xmlns:a16="http://schemas.microsoft.com/office/drawing/2014/main" id="{FDEEA73D-0C9B-4418-AB7A-11276BF426B7}"/>
               </a:ext>
             </a:extLst>
           </p:cNvPr>
@@ -12377,7 +12377,7 @@
           <p:cNvPr id="15" name="">
             <a:extLst xmlns:a="http://schemas.openxmlformats.org/drawingml/2006/main">
               <a:ext uri="{FF2B5EF4-FFF2-40B4-BE49-F238E27FC236}">
-                <a16:creationId xmlns:a16="http://schemas.microsoft.com/office/drawing/2014/main" id="{F4F21BFD-DFC3-4872-BE00-D88D1C2BE71F}"/>
+                <a16:creationId xmlns:a16="http://schemas.microsoft.com/office/drawing/2014/main" id="{BDC9EA7B-4FC9-49A9-B624-804942D9DCBC}"/>
               </a:ext>
             </a:extLst>
           </p:cNvPr>
@@ -12445,7 +12445,7 @@
           <p:cNvPr id="16" name="">
             <a:extLst xmlns:a="http://schemas.openxmlformats.org/drawingml/2006/main">
               <a:ext uri="{FF2B5EF4-FFF2-40B4-BE49-F238E27FC236}">
-                <a16:creationId xmlns:a16="http://schemas.microsoft.com/office/drawing/2014/main" id="{2729589A-2354-493E-B010-75B2BFB88199}"/>
+                <a16:creationId xmlns:a16="http://schemas.microsoft.com/office/drawing/2014/main" id="{8C678EAB-0ABB-4E81-B622-5EFB56C1312F}"/>
               </a:ext>
             </a:extLst>
           </p:cNvPr>
@@ -12513,7 +12513,7 @@
           <p:cNvPr id="17" name="">
             <a:extLst xmlns:a="http://schemas.openxmlformats.org/drawingml/2006/main">
               <a:ext uri="{FF2B5EF4-FFF2-40B4-BE49-F238E27FC236}">
-                <a16:creationId xmlns:a16="http://schemas.microsoft.com/office/drawing/2014/main" id="{1B49FA24-64D5-4577-8E7A-6FF65EE3E320}"/>
+                <a16:creationId xmlns:a16="http://schemas.microsoft.com/office/drawing/2014/main" id="{CC9D049F-8C75-4ECB-81B3-F221CD4BFE65}"/>
               </a:ext>
             </a:extLst>
           </p:cNvPr>
@@ -12546,7 +12546,7 @@
           <p:cNvPr id="18" name="">
             <a:extLst xmlns:a="http://schemas.openxmlformats.org/drawingml/2006/main">
               <a:ext uri="{FF2B5EF4-FFF2-40B4-BE49-F238E27FC236}">
-                <a16:creationId xmlns:a16="http://schemas.microsoft.com/office/drawing/2014/main" id="{FDB7B69E-2D6D-4593-BA0E-097646893BCA}"/>
+                <a16:creationId xmlns:a16="http://schemas.microsoft.com/office/drawing/2014/main" id="{945E3C3F-7D79-4A8A-AAD1-8B99D43A53A3}"/>
               </a:ext>
             </a:extLst>
           </p:cNvPr>
@@ -12578,7 +12578,7 @@
           <p:cNvPr id="19" name="">
             <a:extLst xmlns:a="http://schemas.openxmlformats.org/drawingml/2006/main">
               <a:ext uri="{FF2B5EF4-FFF2-40B4-BE49-F238E27FC236}">
-                <a16:creationId xmlns:a16="http://schemas.microsoft.com/office/drawing/2014/main" id="{75A05778-98C3-4628-933C-177259BA892A}"/>
+                <a16:creationId xmlns:a16="http://schemas.microsoft.com/office/drawing/2014/main" id="{5F8DF00C-7A83-4C1C-A767-65F4DA15869F}"/>
               </a:ext>
             </a:extLst>
           </p:cNvPr>
@@ -12613,7 +12613,7 @@
           <p:cNvPr id="20" name="">
             <a:extLst xmlns:a="http://schemas.openxmlformats.org/drawingml/2006/main">
               <a:ext uri="{FF2B5EF4-FFF2-40B4-BE49-F238E27FC236}">
-                <a16:creationId xmlns:a16="http://schemas.microsoft.com/office/drawing/2014/main" id="{3D511E8E-C30E-4AAC-A2D5-87F9719B1DC9}"/>
+                <a16:creationId xmlns:a16="http://schemas.microsoft.com/office/drawing/2014/main" id="{2E24E0E9-1AA9-4563-A65A-D0C31AF5D8CE}"/>
               </a:ext>
             </a:extLst>
           </p:cNvPr>
@@ -12681,7 +12681,7 @@
           <p:cNvPr id="21" name="">
             <a:extLst xmlns:a="http://schemas.openxmlformats.org/drawingml/2006/main">
               <a:ext uri="{FF2B5EF4-FFF2-40B4-BE49-F238E27FC236}">
-                <a16:creationId xmlns:a16="http://schemas.microsoft.com/office/drawing/2014/main" id="{8019D741-E2C9-4B31-BF6D-03D1AFA3FCDD}"/>
+                <a16:creationId xmlns:a16="http://schemas.microsoft.com/office/drawing/2014/main" id="{8118856E-DC4C-4FC0-BA9F-1DA117ABA646}"/>
               </a:ext>
             </a:extLst>
           </p:cNvPr>
@@ -12749,7 +12749,7 @@
           <p:cNvPr id="22" name="">
             <a:extLst xmlns:a="http://schemas.openxmlformats.org/drawingml/2006/main">
               <a:ext uri="{FF2B5EF4-FFF2-40B4-BE49-F238E27FC236}">
-                <a16:creationId xmlns:a16="http://schemas.microsoft.com/office/drawing/2014/main" id="{588B6DA6-52F2-4F10-8C42-B5E9F4A8DBFC}"/>
+                <a16:creationId xmlns:a16="http://schemas.microsoft.com/office/drawing/2014/main" id="{4DD96798-7DE6-43AB-84D5-8716DDC48C6B}"/>
               </a:ext>
             </a:extLst>
           </p:cNvPr>
@@ -12782,7 +12782,7 @@
           <p:cNvPr id="23" name="">
             <a:extLst xmlns:a="http://schemas.openxmlformats.org/drawingml/2006/main">
               <a:ext uri="{FF2B5EF4-FFF2-40B4-BE49-F238E27FC236}">
-                <a16:creationId xmlns:a16="http://schemas.microsoft.com/office/drawing/2014/main" id="{AF58FA7B-4795-499F-AD53-107EE6D061D8}"/>
+                <a16:creationId xmlns:a16="http://schemas.microsoft.com/office/drawing/2014/main" id="{0B2932C3-0F7C-47AA-B8A6-88282F580305}"/>
               </a:ext>
             </a:extLst>
           </p:cNvPr>
@@ -12814,7 +12814,7 @@
           <p:cNvPr id="24" name="">
             <a:extLst xmlns:a="http://schemas.openxmlformats.org/drawingml/2006/main">
               <a:ext uri="{FF2B5EF4-FFF2-40B4-BE49-F238E27FC236}">
-                <a16:creationId xmlns:a16="http://schemas.microsoft.com/office/drawing/2014/main" id="{8475A168-8164-406D-ACD9-A2D8368D6354}"/>
+                <a16:creationId xmlns:a16="http://schemas.microsoft.com/office/drawing/2014/main" id="{0377A9C2-328D-4C9B-8F8F-131DF70005F6}"/>
               </a:ext>
             </a:extLst>
           </p:cNvPr>
@@ -12849,7 +12849,7 @@
           <p:cNvPr id="25" name="">
             <a:extLst xmlns:a="http://schemas.openxmlformats.org/drawingml/2006/main">
               <a:ext uri="{FF2B5EF4-FFF2-40B4-BE49-F238E27FC236}">
-                <a16:creationId xmlns:a16="http://schemas.microsoft.com/office/drawing/2014/main" id="{9F2D017D-6C56-46D3-9840-82B861DF6C1A}"/>
+                <a16:creationId xmlns:a16="http://schemas.microsoft.com/office/drawing/2014/main" id="{06B415F5-3F3B-4034-9692-9EB77EFBC2FA}"/>
               </a:ext>
             </a:extLst>
           </p:cNvPr>
@@ -12917,7 +12917,7 @@
           <p:cNvPr id="26" name="">
             <a:extLst xmlns:a="http://schemas.openxmlformats.org/drawingml/2006/main">
               <a:ext uri="{FF2B5EF4-FFF2-40B4-BE49-F238E27FC236}">
-                <a16:creationId xmlns:a16="http://schemas.microsoft.com/office/drawing/2014/main" id="{35EB709D-E849-4ADF-80B5-2479582C71B9}"/>
+                <a16:creationId xmlns:a16="http://schemas.microsoft.com/office/drawing/2014/main" id="{39F5BE9B-B8C8-4C6E-B620-2533DE045065}"/>
               </a:ext>
             </a:extLst>
           </p:cNvPr>
@@ -12985,7 +12985,7 @@
           <p:cNvPr id="27" name="">
             <a:extLst xmlns:a="http://schemas.openxmlformats.org/drawingml/2006/main">
               <a:ext uri="{FF2B5EF4-FFF2-40B4-BE49-F238E27FC236}">
-                <a16:creationId xmlns:a16="http://schemas.microsoft.com/office/drawing/2014/main" id="{D7BC612C-F07B-44FF-8778-A83449144A2B}"/>
+                <a16:creationId xmlns:a16="http://schemas.microsoft.com/office/drawing/2014/main" id="{9D16DFAA-F671-41A7-99BB-3BC4EFE178B9}"/>
               </a:ext>
             </a:extLst>
           </p:cNvPr>
@@ -13018,7 +13018,7 @@
           <p:cNvPr id="28" name="">
             <a:extLst xmlns:a="http://schemas.openxmlformats.org/drawingml/2006/main">
               <a:ext uri="{FF2B5EF4-FFF2-40B4-BE49-F238E27FC236}">
-                <a16:creationId xmlns:a16="http://schemas.microsoft.com/office/drawing/2014/main" id="{4939F5B7-AAB0-4612-9CBA-5D9C9FB360B1}"/>
+                <a16:creationId xmlns:a16="http://schemas.microsoft.com/office/drawing/2014/main" id="{E2F55E5A-CB5E-4F92-8CF8-25DD15D67930}"/>
               </a:ext>
             </a:extLst>
           </p:cNvPr>
@@ -13050,7 +13050,7 @@
           <p:cNvPr id="29" name="">
             <a:extLst xmlns:a="http://schemas.openxmlformats.org/drawingml/2006/main">
               <a:ext uri="{FF2B5EF4-FFF2-40B4-BE49-F238E27FC236}">
-                <a16:creationId xmlns:a16="http://schemas.microsoft.com/office/drawing/2014/main" id="{5F676C57-0782-4FBA-846B-DB5AAA03E522}"/>
+                <a16:creationId xmlns:a16="http://schemas.microsoft.com/office/drawing/2014/main" id="{83229A1E-F23F-42FE-B923-0B3E6E0E3DC3}"/>
               </a:ext>
             </a:extLst>
           </p:cNvPr>
@@ -13085,7 +13085,7 @@
           <p:cNvPr id="30" name="">
             <a:extLst xmlns:a="http://schemas.openxmlformats.org/drawingml/2006/main">
               <a:ext uri="{FF2B5EF4-FFF2-40B4-BE49-F238E27FC236}">
-                <a16:creationId xmlns:a16="http://schemas.microsoft.com/office/drawing/2014/main" id="{745951A2-8907-4868-8DC3-8691271B710D}"/>
+                <a16:creationId xmlns:a16="http://schemas.microsoft.com/office/drawing/2014/main" id="{4B8AFD77-9CA2-4844-B93F-8F1DAE26B439}"/>
               </a:ext>
             </a:extLst>
           </p:cNvPr>
@@ -13153,7 +13153,7 @@
           <p:cNvPr id="31" name="">
             <a:extLst xmlns:a="http://schemas.openxmlformats.org/drawingml/2006/main">
               <a:ext uri="{FF2B5EF4-FFF2-40B4-BE49-F238E27FC236}">
-                <a16:creationId xmlns:a16="http://schemas.microsoft.com/office/drawing/2014/main" id="{3D930BF8-5C39-434D-B857-726C635C15C4}"/>
+                <a16:creationId xmlns:a16="http://schemas.microsoft.com/office/drawing/2014/main" id="{EF051A8D-E3BE-4991-A794-2EFE8CB0FF45}"/>
               </a:ext>
             </a:extLst>
           </p:cNvPr>
@@ -13221,7 +13221,7 @@
           <p:cNvPr id="32" name="">
             <a:extLst xmlns:a="http://schemas.openxmlformats.org/drawingml/2006/main">
               <a:ext uri="{FF2B5EF4-FFF2-40B4-BE49-F238E27FC236}">
-                <a16:creationId xmlns:a16="http://schemas.microsoft.com/office/drawing/2014/main" id="{2982BC36-B021-4787-9956-BDEFBE7ECDE6}"/>
+                <a16:creationId xmlns:a16="http://schemas.microsoft.com/office/drawing/2014/main" id="{E24ED5AC-649A-44D7-A49D-C10F42BF61C6}"/>
               </a:ext>
             </a:extLst>
           </p:cNvPr>
@@ -13289,7 +13289,7 @@
           <p:cNvPr id="33" name="">
             <a:extLst xmlns:a="http://schemas.openxmlformats.org/drawingml/2006/main">
               <a:ext uri="{FF2B5EF4-FFF2-40B4-BE49-F238E27FC236}">
-                <a16:creationId xmlns:a16="http://schemas.microsoft.com/office/drawing/2014/main" id="{A286A2FF-AEE4-4C88-863D-184DEE2F2D87}"/>
+                <a16:creationId xmlns:a16="http://schemas.microsoft.com/office/drawing/2014/main" id="{798EBF8C-9825-41AB-90C2-D3921301EBA5}"/>
               </a:ext>
             </a:extLst>
           </p:cNvPr>
@@ -13355,7 +13355,7 @@
     </p:spTree>
     <p:extLst>
       <p:ext uri="{BB962C8B-B14F-4D97-AF65-F5344CB8AC3E}">
-        <p14:creationId xmlns:p14="http://schemas.microsoft.com/office/powerpoint/2010/main" val="1929099694"/>
+        <p14:creationId xmlns:p14="http://schemas.microsoft.com/office/powerpoint/2010/main" val="21772793"/>
       </p:ext>
     </p:extLst>
   </p:cSld>
@@ -13386,7 +13386,7 @@
           <p:cNvPr id="60" name="">
             <a:extLst xmlns:a="http://schemas.openxmlformats.org/drawingml/2006/main">
               <a:ext uri="{FF2B5EF4-FFF2-40B4-BE49-F238E27FC236}">
-                <a16:creationId xmlns:a16="http://schemas.microsoft.com/office/drawing/2014/main" id="{EEA9365C-9B49-406A-BEF3-0BFB6DD6DE39}"/>
+                <a16:creationId xmlns:a16="http://schemas.microsoft.com/office/drawing/2014/main" id="{32E5984E-24A2-4FEE-B8E8-5381C29413EB}"/>
               </a:ext>
             </a:extLst>
           </p:cNvPr>
@@ -13454,7 +13454,7 @@
           <p:cNvPr id="2" name="">
             <a:extLst xmlns:a="http://schemas.openxmlformats.org/drawingml/2006/main">
               <a:ext uri="{FF2B5EF4-FFF2-40B4-BE49-F238E27FC236}">
-                <a16:creationId xmlns:a16="http://schemas.microsoft.com/office/drawing/2014/main" id="{7DE48FCE-701B-4E77-99D8-DC1E8965345A}"/>
+                <a16:creationId xmlns:a16="http://schemas.microsoft.com/office/drawing/2014/main" id="{B06C7200-7C30-4D83-B165-96E62E07604F}"/>
               </a:ext>
             </a:extLst>
           </p:cNvPr>
@@ -13487,7 +13487,7 @@
           <p:cNvPr id="3" name="">
             <a:extLst xmlns:a="http://schemas.openxmlformats.org/drawingml/2006/main">
               <a:ext uri="{FF2B5EF4-FFF2-40B4-BE49-F238E27FC236}">
-                <a16:creationId xmlns:a16="http://schemas.microsoft.com/office/drawing/2014/main" id="{97101BF0-A646-4FB1-BC74-E6F7047AE22F}"/>
+                <a16:creationId xmlns:a16="http://schemas.microsoft.com/office/drawing/2014/main" id="{0D788B5A-4AC2-4509-99EA-39AF11ACBB7F}"/>
               </a:ext>
             </a:extLst>
           </p:cNvPr>
@@ -13555,7 +13555,7 @@
           <p:cNvPr id="4" name="">
             <a:extLst xmlns:a="http://schemas.openxmlformats.org/drawingml/2006/main">
               <a:ext uri="{FF2B5EF4-FFF2-40B4-BE49-F238E27FC236}">
-                <a16:creationId xmlns:a16="http://schemas.microsoft.com/office/drawing/2014/main" id="{E4D1E6A7-BCE8-428A-8391-DC568982A870}"/>
+                <a16:creationId xmlns:a16="http://schemas.microsoft.com/office/drawing/2014/main" id="{A2C894B0-5961-4BDA-ACD9-555DDE5A4C38}"/>
               </a:ext>
             </a:extLst>
           </p:cNvPr>
@@ -13623,7 +13623,7 @@
           <p:cNvPr id="5" name="">
             <a:extLst xmlns:a="http://schemas.openxmlformats.org/drawingml/2006/main">
               <a:ext uri="{FF2B5EF4-FFF2-40B4-BE49-F238E27FC236}">
-                <a16:creationId xmlns:a16="http://schemas.microsoft.com/office/drawing/2014/main" id="{9D86C236-5E3C-4627-A725-6A27E92829CA}"/>
+                <a16:creationId xmlns:a16="http://schemas.microsoft.com/office/drawing/2014/main" id="{F68A94AF-F8E6-4025-94C6-923726268189}"/>
               </a:ext>
             </a:extLst>
           </p:cNvPr>
@@ -13653,7 +13653,7 @@
           <p:cNvPr id="6" name="">
             <a:extLst xmlns:a="http://schemas.openxmlformats.org/drawingml/2006/main">
               <a:ext uri="{FF2B5EF4-FFF2-40B4-BE49-F238E27FC236}">
-                <a16:creationId xmlns:a16="http://schemas.microsoft.com/office/drawing/2014/main" id="{62AB8CF5-AC0A-4043-9DA3-719635380CBF}"/>
+                <a16:creationId xmlns:a16="http://schemas.microsoft.com/office/drawing/2014/main" id="{6EDAC711-2D16-401F-A2D3-F8A9A9DDD54D}"/>
               </a:ext>
             </a:extLst>
           </p:cNvPr>
@@ -13683,7 +13683,7 @@
           <p:cNvPr id="7" name="">
             <a:extLst xmlns:a="http://schemas.openxmlformats.org/drawingml/2006/main">
               <a:ext uri="{FF2B5EF4-FFF2-40B4-BE49-F238E27FC236}">
-                <a16:creationId xmlns:a16="http://schemas.microsoft.com/office/drawing/2014/main" id="{F279436E-38FD-4C05-A3A9-22A4EBD376EC}"/>
+                <a16:creationId xmlns:a16="http://schemas.microsoft.com/office/drawing/2014/main" id="{75370462-7B64-4C15-8AF7-E178C48CF876}"/>
               </a:ext>
             </a:extLst>
           </p:cNvPr>
@@ -13713,7 +13713,7 @@
           <p:cNvPr id="8" name="">
             <a:extLst xmlns:a="http://schemas.openxmlformats.org/drawingml/2006/main">
               <a:ext uri="{FF2B5EF4-FFF2-40B4-BE49-F238E27FC236}">
-                <a16:creationId xmlns:a16="http://schemas.microsoft.com/office/drawing/2014/main" id="{7C8BE3B7-BD6A-444C-B99B-0BF011B08FC2}"/>
+                <a16:creationId xmlns:a16="http://schemas.microsoft.com/office/drawing/2014/main" id="{E51E9648-F6F2-40C6-AFBB-94F9B9563ED4}"/>
               </a:ext>
             </a:extLst>
           </p:cNvPr>
@@ -13743,7 +13743,7 @@
           <p:cNvPr id="9" name="">
             <a:extLst xmlns:a="http://schemas.openxmlformats.org/drawingml/2006/main">
               <a:ext uri="{FF2B5EF4-FFF2-40B4-BE49-F238E27FC236}">
-                <a16:creationId xmlns:a16="http://schemas.microsoft.com/office/drawing/2014/main" id="{E0DF100B-6E2E-4C37-8152-2A6D00D60EAE}"/>
+                <a16:creationId xmlns:a16="http://schemas.microsoft.com/office/drawing/2014/main" id="{907A15B2-663A-4B4F-B6DD-A26909DD1118}"/>
               </a:ext>
             </a:extLst>
           </p:cNvPr>
@@ -13773,7 +13773,7 @@
           <p:cNvPr id="10" name="">
             <a:extLst xmlns:a="http://schemas.openxmlformats.org/drawingml/2006/main">
               <a:ext uri="{FF2B5EF4-FFF2-40B4-BE49-F238E27FC236}">
-                <a16:creationId xmlns:a16="http://schemas.microsoft.com/office/drawing/2014/main" id="{9C3B20FE-EF54-4869-B008-14860532B81B}"/>
+                <a16:creationId xmlns:a16="http://schemas.microsoft.com/office/drawing/2014/main" id="{83ED2E90-F932-412E-B498-56C14B547A2E}"/>
               </a:ext>
             </a:extLst>
           </p:cNvPr>
@@ -13803,7 +13803,7 @@
           <p:cNvPr id="11" name="">
             <a:extLst xmlns:a="http://schemas.openxmlformats.org/drawingml/2006/main">
               <a:ext uri="{FF2B5EF4-FFF2-40B4-BE49-F238E27FC236}">
-                <a16:creationId xmlns:a16="http://schemas.microsoft.com/office/drawing/2014/main" id="{6BD537FC-D2F7-4109-BF8A-2076D9C43A63}"/>
+                <a16:creationId xmlns:a16="http://schemas.microsoft.com/office/drawing/2014/main" id="{8340BE55-890E-437D-97EF-42825E79CE8C}"/>
               </a:ext>
             </a:extLst>
           </p:cNvPr>
@@ -13833,7 +13833,7 @@
           <p:cNvPr id="12" name="">
             <a:extLst xmlns:a="http://schemas.openxmlformats.org/drawingml/2006/main">
               <a:ext uri="{FF2B5EF4-FFF2-40B4-BE49-F238E27FC236}">
-                <a16:creationId xmlns:a16="http://schemas.microsoft.com/office/drawing/2014/main" id="{D3EBAB7B-1793-4C81-9F66-ECF7B6C23BB1}"/>
+                <a16:creationId xmlns:a16="http://schemas.microsoft.com/office/drawing/2014/main" id="{DF57DC9D-A2F1-4B39-9C7F-15D4AFA9EC60}"/>
               </a:ext>
             </a:extLst>
           </p:cNvPr>
@@ -13863,7 +13863,7 @@
           <p:cNvPr id="13" name="">
             <a:extLst xmlns:a="http://schemas.openxmlformats.org/drawingml/2006/main">
               <a:ext uri="{FF2B5EF4-FFF2-40B4-BE49-F238E27FC236}">
-                <a16:creationId xmlns:a16="http://schemas.microsoft.com/office/drawing/2014/main" id="{4B4BA860-3FA7-40A6-9A66-57E5026CC52F}"/>
+                <a16:creationId xmlns:a16="http://schemas.microsoft.com/office/drawing/2014/main" id="{09BBC44E-0180-4844-88DE-578EE3727E0B}"/>
               </a:ext>
             </a:extLst>
           </p:cNvPr>
@@ -13893,7 +13893,7 @@
           <p:cNvPr id="14" name="">
             <a:extLst xmlns:a="http://schemas.openxmlformats.org/drawingml/2006/main">
               <a:ext uri="{FF2B5EF4-FFF2-40B4-BE49-F238E27FC236}">
-                <a16:creationId xmlns:a16="http://schemas.microsoft.com/office/drawing/2014/main" id="{D791401B-5AC8-4974-9FA0-07AF44DC7A5F}"/>
+                <a16:creationId xmlns:a16="http://schemas.microsoft.com/office/drawing/2014/main" id="{20CAB759-2408-4D98-9779-3FE5AD57DF6F}"/>
               </a:ext>
             </a:extLst>
           </p:cNvPr>
@@ -13923,7 +13923,7 @@
           <p:cNvPr id="15" name="">
             <a:extLst xmlns:a="http://schemas.openxmlformats.org/drawingml/2006/main">
               <a:ext uri="{FF2B5EF4-FFF2-40B4-BE49-F238E27FC236}">
-                <a16:creationId xmlns:a16="http://schemas.microsoft.com/office/drawing/2014/main" id="{F8F8A80B-B446-4232-9D27-04EAE8093502}"/>
+                <a16:creationId xmlns:a16="http://schemas.microsoft.com/office/drawing/2014/main" id="{FC2F9D63-345A-465E-999D-D42E9C59815E}"/>
               </a:ext>
             </a:extLst>
           </p:cNvPr>
@@ -13953,7 +13953,7 @@
           <p:cNvPr id="16" name="">
             <a:extLst xmlns:a="http://schemas.openxmlformats.org/drawingml/2006/main">
               <a:ext uri="{FF2B5EF4-FFF2-40B4-BE49-F238E27FC236}">
-                <a16:creationId xmlns:a16="http://schemas.microsoft.com/office/drawing/2014/main" id="{619D4F5D-A51C-4863-A6F9-5251AB8D0004}"/>
+                <a16:creationId xmlns:a16="http://schemas.microsoft.com/office/drawing/2014/main" id="{C9FB0BAD-86C0-4EDC-A229-213F99F3E5F7}"/>
               </a:ext>
             </a:extLst>
           </p:cNvPr>
@@ -13983,7 +13983,7 @@
           <p:cNvPr id="17" name="">
             <a:extLst xmlns:a="http://schemas.openxmlformats.org/drawingml/2006/main">
               <a:ext uri="{FF2B5EF4-FFF2-40B4-BE49-F238E27FC236}">
-                <a16:creationId xmlns:a16="http://schemas.microsoft.com/office/drawing/2014/main" id="{7E0881FE-7249-42A9-9658-8320B95C57E2}"/>
+                <a16:creationId xmlns:a16="http://schemas.microsoft.com/office/drawing/2014/main" id="{E112A2B0-CE65-4AFC-A0F5-9DD0424CB82E}"/>
               </a:ext>
             </a:extLst>
           </p:cNvPr>
@@ -14013,7 +14013,7 @@
           <p:cNvPr id="18" name="">
             <a:extLst xmlns:a="http://schemas.openxmlformats.org/drawingml/2006/main">
               <a:ext uri="{FF2B5EF4-FFF2-40B4-BE49-F238E27FC236}">
-                <a16:creationId xmlns:a16="http://schemas.microsoft.com/office/drawing/2014/main" id="{5D322E8C-28E9-4181-95CD-2C6EFE97A1B3}"/>
+                <a16:creationId xmlns:a16="http://schemas.microsoft.com/office/drawing/2014/main" id="{B57AEA40-73E3-4D32-B4FB-FE2A71BB61D4}"/>
               </a:ext>
             </a:extLst>
           </p:cNvPr>
@@ -14043,7 +14043,7 @@
           <p:cNvPr id="19" name="">
             <a:extLst xmlns:a="http://schemas.openxmlformats.org/drawingml/2006/main">
               <a:ext uri="{FF2B5EF4-FFF2-40B4-BE49-F238E27FC236}">
-                <a16:creationId xmlns:a16="http://schemas.microsoft.com/office/drawing/2014/main" id="{395352EA-A476-4E44-A347-3D1B99AED518}"/>
+                <a16:creationId xmlns:a16="http://schemas.microsoft.com/office/drawing/2014/main" id="{1B47C7AE-8F5A-4AF0-97F9-3C76689FF47A}"/>
               </a:ext>
             </a:extLst>
           </p:cNvPr>
@@ -14073,7 +14073,7 @@
           <p:cNvPr id="20" name="">
             <a:extLst xmlns:a="http://schemas.openxmlformats.org/drawingml/2006/main">
               <a:ext uri="{FF2B5EF4-FFF2-40B4-BE49-F238E27FC236}">
-                <a16:creationId xmlns:a16="http://schemas.microsoft.com/office/drawing/2014/main" id="{68345BCA-5F11-4281-9438-B44D59918C71}"/>
+                <a16:creationId xmlns:a16="http://schemas.microsoft.com/office/drawing/2014/main" id="{46DFF46B-744A-4140-B756-1FDD781E699F}"/>
               </a:ext>
             </a:extLst>
           </p:cNvPr>
@@ -14103,7 +14103,7 @@
           <p:cNvPr id="21" name="">
             <a:extLst xmlns:a="http://schemas.openxmlformats.org/drawingml/2006/main">
               <a:ext uri="{FF2B5EF4-FFF2-40B4-BE49-F238E27FC236}">
-                <a16:creationId xmlns:a16="http://schemas.microsoft.com/office/drawing/2014/main" id="{6E96E865-5B9A-4A3D-8A72-EE54057BD492}"/>
+                <a16:creationId xmlns:a16="http://schemas.microsoft.com/office/drawing/2014/main" id="{1413043D-B8B0-4ECB-9494-0970CEE30E14}"/>
               </a:ext>
             </a:extLst>
           </p:cNvPr>
@@ -14133,7 +14133,7 @@
           <p:cNvPr id="22" name="">
             <a:extLst xmlns:a="http://schemas.openxmlformats.org/drawingml/2006/main">
               <a:ext uri="{FF2B5EF4-FFF2-40B4-BE49-F238E27FC236}">
-                <a16:creationId xmlns:a16="http://schemas.microsoft.com/office/drawing/2014/main" id="{14435CCA-8D4C-438F-8EE5-286B8ECD5FEE}"/>
+                <a16:creationId xmlns:a16="http://schemas.microsoft.com/office/drawing/2014/main" id="{BE92EF01-FDBD-45C8-B865-6C3C6EE4FA41}"/>
               </a:ext>
             </a:extLst>
           </p:cNvPr>
@@ -14163,7 +14163,7 @@
           <p:cNvPr id="23" name="">
             <a:extLst xmlns:a="http://schemas.openxmlformats.org/drawingml/2006/main">
               <a:ext uri="{FF2B5EF4-FFF2-40B4-BE49-F238E27FC236}">
-                <a16:creationId xmlns:a16="http://schemas.microsoft.com/office/drawing/2014/main" id="{0A934EF3-559E-4299-BF08-3540166429E5}"/>
+                <a16:creationId xmlns:a16="http://schemas.microsoft.com/office/drawing/2014/main" id="{8F6693B2-FB64-4838-9E01-FF7A72B9D95A}"/>
               </a:ext>
             </a:extLst>
           </p:cNvPr>
@@ -14193,7 +14193,7 @@
           <p:cNvPr id="24" name="">
             <a:extLst xmlns:a="http://schemas.openxmlformats.org/drawingml/2006/main">
               <a:ext uri="{FF2B5EF4-FFF2-40B4-BE49-F238E27FC236}">
-                <a16:creationId xmlns:a16="http://schemas.microsoft.com/office/drawing/2014/main" id="{A28C0FC3-68E2-4F7B-82B4-C7DB41EF2807}"/>
+                <a16:creationId xmlns:a16="http://schemas.microsoft.com/office/drawing/2014/main" id="{BE797879-50A8-49CB-B912-8D5174A33A24}"/>
               </a:ext>
             </a:extLst>
           </p:cNvPr>
@@ -14223,7 +14223,7 @@
           <p:cNvPr id="25" name="">
             <a:extLst xmlns:a="http://schemas.openxmlformats.org/drawingml/2006/main">
               <a:ext uri="{FF2B5EF4-FFF2-40B4-BE49-F238E27FC236}">
-                <a16:creationId xmlns:a16="http://schemas.microsoft.com/office/drawing/2014/main" id="{BF70EB8B-52D4-4E63-A2DC-A7860A8E920B}"/>
+                <a16:creationId xmlns:a16="http://schemas.microsoft.com/office/drawing/2014/main" id="{E0D38E61-7AA2-4AAC-AC6B-587C96F36F21}"/>
               </a:ext>
             </a:extLst>
           </p:cNvPr>
@@ -14253,7 +14253,7 @@
           <p:cNvPr id="26" name="">
             <a:extLst xmlns:a="http://schemas.openxmlformats.org/drawingml/2006/main">
               <a:ext uri="{FF2B5EF4-FFF2-40B4-BE49-F238E27FC236}">
-                <a16:creationId xmlns:a16="http://schemas.microsoft.com/office/drawing/2014/main" id="{C359323E-BA70-4298-9246-5E694E5D2F92}"/>
+                <a16:creationId xmlns:a16="http://schemas.microsoft.com/office/drawing/2014/main" id="{9F15A385-2A76-45FC-9B8D-097F99314D2F}"/>
               </a:ext>
             </a:extLst>
           </p:cNvPr>
@@ -14283,7 +14283,7 @@
           <p:cNvPr id="27" name="">
             <a:extLst xmlns:a="http://schemas.openxmlformats.org/drawingml/2006/main">
               <a:ext uri="{FF2B5EF4-FFF2-40B4-BE49-F238E27FC236}">
-                <a16:creationId xmlns:a16="http://schemas.microsoft.com/office/drawing/2014/main" id="{89DEEDE2-92C0-4ED6-89A1-275563702102}"/>
+                <a16:creationId xmlns:a16="http://schemas.microsoft.com/office/drawing/2014/main" id="{2A440EF1-9FE0-48BB-A27B-E625CDDBC611}"/>
               </a:ext>
             </a:extLst>
           </p:cNvPr>
@@ -14313,7 +14313,7 @@
           <p:cNvPr id="28" name="">
             <a:extLst xmlns:a="http://schemas.openxmlformats.org/drawingml/2006/main">
               <a:ext uri="{FF2B5EF4-FFF2-40B4-BE49-F238E27FC236}">
-                <a16:creationId xmlns:a16="http://schemas.microsoft.com/office/drawing/2014/main" id="{F835719F-F307-404A-8BB7-7599B200D87B}"/>
+                <a16:creationId xmlns:a16="http://schemas.microsoft.com/office/drawing/2014/main" id="{387988D4-4F58-4B7D-A693-92DEBB303F17}"/>
               </a:ext>
             </a:extLst>
           </p:cNvPr>
@@ -14343,7 +14343,7 @@
           <p:cNvPr id="29" name="">
             <a:extLst xmlns:a="http://schemas.openxmlformats.org/drawingml/2006/main">
               <a:ext uri="{FF2B5EF4-FFF2-40B4-BE49-F238E27FC236}">
-                <a16:creationId xmlns:a16="http://schemas.microsoft.com/office/drawing/2014/main" id="{EBB8E57B-EF2A-4269-8F6A-BCA4DF90FB53}"/>
+                <a16:creationId xmlns:a16="http://schemas.microsoft.com/office/drawing/2014/main" id="{A281ABCB-158D-44CD-A8D3-3FCBF52BE24E}"/>
               </a:ext>
             </a:extLst>
           </p:cNvPr>
@@ -14373,7 +14373,7 @@
           <p:cNvPr id="30" name="">
             <a:extLst xmlns:a="http://schemas.openxmlformats.org/drawingml/2006/main">
               <a:ext uri="{FF2B5EF4-FFF2-40B4-BE49-F238E27FC236}">
-                <a16:creationId xmlns:a16="http://schemas.microsoft.com/office/drawing/2014/main" id="{D415A6BD-B316-4CFD-9AD6-B02D5C588235}"/>
+                <a16:creationId xmlns:a16="http://schemas.microsoft.com/office/drawing/2014/main" id="{4D3C4D41-4621-4B18-9196-A2D677436F74}"/>
               </a:ext>
             </a:extLst>
           </p:cNvPr>
@@ -14441,7 +14441,7 @@
           <p:cNvPr id="31" name="">
             <a:extLst xmlns:a="http://schemas.openxmlformats.org/drawingml/2006/main">
               <a:ext uri="{FF2B5EF4-FFF2-40B4-BE49-F238E27FC236}">
-                <a16:creationId xmlns:a16="http://schemas.microsoft.com/office/drawing/2014/main" id="{19B894B6-37A8-4C71-9221-C56C5D91C5C7}"/>
+                <a16:creationId xmlns:a16="http://schemas.microsoft.com/office/drawing/2014/main" id="{C2D0D09F-8B8A-4C1B-8089-AFB23230ED5D}"/>
               </a:ext>
             </a:extLst>
           </p:cNvPr>
@@ -14509,7 +14509,7 @@
           <p:cNvPr id="32" name="">
             <a:extLst xmlns:a="http://schemas.openxmlformats.org/drawingml/2006/main">
               <a:ext uri="{FF2B5EF4-FFF2-40B4-BE49-F238E27FC236}">
-                <a16:creationId xmlns:a16="http://schemas.microsoft.com/office/drawing/2014/main" id="{4F13AC6F-5E1C-4BBD-922E-158A33A83D26}"/>
+                <a16:creationId xmlns:a16="http://schemas.microsoft.com/office/drawing/2014/main" id="{735233BE-3B31-4F52-B761-957D32F9F3EE}"/>
               </a:ext>
             </a:extLst>
           </p:cNvPr>
@@ -14539,7 +14539,7 @@
           <p:cNvPr id="33" name="">
             <a:extLst xmlns:a="http://schemas.openxmlformats.org/drawingml/2006/main">
               <a:ext uri="{FF2B5EF4-FFF2-40B4-BE49-F238E27FC236}">
-                <a16:creationId xmlns:a16="http://schemas.microsoft.com/office/drawing/2014/main" id="{413AAB13-D702-4547-94F8-58B038440AF8}"/>
+                <a16:creationId xmlns:a16="http://schemas.microsoft.com/office/drawing/2014/main" id="{9BF89AF7-650E-45CA-A5BE-AF5FCFA4B99F}"/>
               </a:ext>
             </a:extLst>
           </p:cNvPr>
@@ -14569,7 +14569,7 @@
           <p:cNvPr id="34" name="">
             <a:extLst xmlns:a="http://schemas.openxmlformats.org/drawingml/2006/main">
               <a:ext uri="{FF2B5EF4-FFF2-40B4-BE49-F238E27FC236}">
-                <a16:creationId xmlns:a16="http://schemas.microsoft.com/office/drawing/2014/main" id="{7AEA6073-37BF-45B0-B3DE-B69725A0FCE7}"/>
+                <a16:creationId xmlns:a16="http://schemas.microsoft.com/office/drawing/2014/main" id="{F8AF67A5-0F50-4D20-A6AE-4E3519696718}"/>
               </a:ext>
             </a:extLst>
           </p:cNvPr>
@@ -14599,7 +14599,7 @@
           <p:cNvPr id="35" name="">
             <a:extLst xmlns:a="http://schemas.openxmlformats.org/drawingml/2006/main">
               <a:ext uri="{FF2B5EF4-FFF2-40B4-BE49-F238E27FC236}">
-                <a16:creationId xmlns:a16="http://schemas.microsoft.com/office/drawing/2014/main" id="{1990509A-6054-44A1-B17C-B3B78C6EB06A}"/>
+                <a16:creationId xmlns:a16="http://schemas.microsoft.com/office/drawing/2014/main" id="{F19333B6-75CC-466E-8A64-D6E9A7E1EC75}"/>
               </a:ext>
             </a:extLst>
           </p:cNvPr>
@@ -14629,7 +14629,7 @@
           <p:cNvPr id="36" name="">
             <a:extLst xmlns:a="http://schemas.openxmlformats.org/drawingml/2006/main">
               <a:ext uri="{FF2B5EF4-FFF2-40B4-BE49-F238E27FC236}">
-                <a16:creationId xmlns:a16="http://schemas.microsoft.com/office/drawing/2014/main" id="{97EB7CB0-12F9-4A9B-BA56-7B2ED8B38D91}"/>
+                <a16:creationId xmlns:a16="http://schemas.microsoft.com/office/drawing/2014/main" id="{AC2FBEBC-5608-446F-87E1-32C5C3A0859B}"/>
               </a:ext>
             </a:extLst>
           </p:cNvPr>
@@ -14659,7 +14659,7 @@
           <p:cNvPr id="37" name="">
             <a:extLst xmlns:a="http://schemas.openxmlformats.org/drawingml/2006/main">
               <a:ext uri="{FF2B5EF4-FFF2-40B4-BE49-F238E27FC236}">
-                <a16:creationId xmlns:a16="http://schemas.microsoft.com/office/drawing/2014/main" id="{FF6A530D-1046-4A80-97BB-D8B0C7BE29EC}"/>
+                <a16:creationId xmlns:a16="http://schemas.microsoft.com/office/drawing/2014/main" id="{45DC8A7C-6C81-49E5-9FC6-5CAD7E28E0F2}"/>
               </a:ext>
             </a:extLst>
           </p:cNvPr>
@@ -14689,7 +14689,7 @@
           <p:cNvPr id="38" name="">
             <a:extLst xmlns:a="http://schemas.openxmlformats.org/drawingml/2006/main">
               <a:ext uri="{FF2B5EF4-FFF2-40B4-BE49-F238E27FC236}">
-                <a16:creationId xmlns:a16="http://schemas.microsoft.com/office/drawing/2014/main" id="{8369F40E-65E2-4B44-B7E0-F312E8FEBF0C}"/>
+                <a16:creationId xmlns:a16="http://schemas.microsoft.com/office/drawing/2014/main" id="{647680C0-6DF6-4EDA-9A94-DD7B8BB62457}"/>
               </a:ext>
             </a:extLst>
           </p:cNvPr>
@@ -14719,7 +14719,7 @@
           <p:cNvPr id="39" name="">
             <a:extLst xmlns:a="http://schemas.openxmlformats.org/drawingml/2006/main">
               <a:ext uri="{FF2B5EF4-FFF2-40B4-BE49-F238E27FC236}">
-                <a16:creationId xmlns:a16="http://schemas.microsoft.com/office/drawing/2014/main" id="{90A3AFDB-7F19-48D2-9777-C340A1B21702}"/>
+                <a16:creationId xmlns:a16="http://schemas.microsoft.com/office/drawing/2014/main" id="{58FE1C2D-731D-48CE-A34C-AABF15D51475}"/>
               </a:ext>
             </a:extLst>
           </p:cNvPr>
@@ -14749,7 +14749,7 @@
           <p:cNvPr id="40" name="">
             <a:extLst xmlns:a="http://schemas.openxmlformats.org/drawingml/2006/main">
               <a:ext uri="{FF2B5EF4-FFF2-40B4-BE49-F238E27FC236}">
-                <a16:creationId xmlns:a16="http://schemas.microsoft.com/office/drawing/2014/main" id="{15FB0CD7-1B94-4A4D-BB97-63D860EA26EC}"/>
+                <a16:creationId xmlns:a16="http://schemas.microsoft.com/office/drawing/2014/main" id="{3D30BC54-D1D8-477F-B84E-626CF5125402}"/>
               </a:ext>
             </a:extLst>
           </p:cNvPr>
@@ -14779,7 +14779,7 @@
           <p:cNvPr id="41" name="">
             <a:extLst xmlns:a="http://schemas.openxmlformats.org/drawingml/2006/main">
               <a:ext uri="{FF2B5EF4-FFF2-40B4-BE49-F238E27FC236}">
-                <a16:creationId xmlns:a16="http://schemas.microsoft.com/office/drawing/2014/main" id="{8152EC0E-6D80-4AA6-8ACD-26FF025622B2}"/>
+                <a16:creationId xmlns:a16="http://schemas.microsoft.com/office/drawing/2014/main" id="{8757AC7A-7ACE-4E4F-A552-B9160ECCBCDD}"/>
               </a:ext>
             </a:extLst>
           </p:cNvPr>
@@ -14809,7 +14809,7 @@
           <p:cNvPr id="42" name="">
             <a:extLst xmlns:a="http://schemas.openxmlformats.org/drawingml/2006/main">
               <a:ext uri="{FF2B5EF4-FFF2-40B4-BE49-F238E27FC236}">
-                <a16:creationId xmlns:a16="http://schemas.microsoft.com/office/drawing/2014/main" id="{C1FB547F-93D3-4B94-801A-902E96452ECE}"/>
+                <a16:creationId xmlns:a16="http://schemas.microsoft.com/office/drawing/2014/main" id="{25A90978-D271-44A7-94DF-F8712D81094F}"/>
               </a:ext>
             </a:extLst>
           </p:cNvPr>
@@ -14839,7 +14839,7 @@
           <p:cNvPr id="43" name="">
             <a:extLst xmlns:a="http://schemas.openxmlformats.org/drawingml/2006/main">
               <a:ext uri="{FF2B5EF4-FFF2-40B4-BE49-F238E27FC236}">
-                <a16:creationId xmlns:a16="http://schemas.microsoft.com/office/drawing/2014/main" id="{CF74E780-1CC5-43CF-AE08-8C9FC716A873}"/>
+                <a16:creationId xmlns:a16="http://schemas.microsoft.com/office/drawing/2014/main" id="{36BE59D2-89AC-4750-8AF6-8F70CD93671C}"/>
               </a:ext>
             </a:extLst>
           </p:cNvPr>
@@ -14869,7 +14869,7 @@
           <p:cNvPr id="44" name="">
             <a:extLst xmlns:a="http://schemas.openxmlformats.org/drawingml/2006/main">
               <a:ext uri="{FF2B5EF4-FFF2-40B4-BE49-F238E27FC236}">
-                <a16:creationId xmlns:a16="http://schemas.microsoft.com/office/drawing/2014/main" id="{480162F0-56B2-49FE-BDBC-EE67034D58B4}"/>
+                <a16:creationId xmlns:a16="http://schemas.microsoft.com/office/drawing/2014/main" id="{7A6E0A99-170F-4E4B-A85D-500DEBD90CA2}"/>
               </a:ext>
             </a:extLst>
           </p:cNvPr>
@@ -14899,7 +14899,7 @@
           <p:cNvPr id="45" name="">
             <a:extLst xmlns:a="http://schemas.openxmlformats.org/drawingml/2006/main">
               <a:ext uri="{FF2B5EF4-FFF2-40B4-BE49-F238E27FC236}">
-                <a16:creationId xmlns:a16="http://schemas.microsoft.com/office/drawing/2014/main" id="{A060AAF4-C9B5-458F-AA7E-6F0421ED7898}"/>
+                <a16:creationId xmlns:a16="http://schemas.microsoft.com/office/drawing/2014/main" id="{F7A931F3-BF04-4508-B3F8-531D00907595}"/>
               </a:ext>
             </a:extLst>
           </p:cNvPr>
@@ -14929,7 +14929,7 @@
           <p:cNvPr id="46" name="">
             <a:extLst xmlns:a="http://schemas.openxmlformats.org/drawingml/2006/main">
               <a:ext uri="{FF2B5EF4-FFF2-40B4-BE49-F238E27FC236}">
-                <a16:creationId xmlns:a16="http://schemas.microsoft.com/office/drawing/2014/main" id="{831273AD-404C-4CB7-9853-16E300F4BB65}"/>
+                <a16:creationId xmlns:a16="http://schemas.microsoft.com/office/drawing/2014/main" id="{CEC05DB3-1FDF-44CB-855A-5925FE8FFFCD}"/>
               </a:ext>
             </a:extLst>
           </p:cNvPr>
@@ -14959,7 +14959,7 @@
           <p:cNvPr id="47" name="">
             <a:extLst xmlns:a="http://schemas.openxmlformats.org/drawingml/2006/main">
               <a:ext uri="{FF2B5EF4-FFF2-40B4-BE49-F238E27FC236}">
-                <a16:creationId xmlns:a16="http://schemas.microsoft.com/office/drawing/2014/main" id="{EF9BFB04-42BB-44AF-9976-593E272845D8}"/>
+                <a16:creationId xmlns:a16="http://schemas.microsoft.com/office/drawing/2014/main" id="{0EA13E64-35C4-4E2B-8A09-65F17775D1D8}"/>
               </a:ext>
             </a:extLst>
           </p:cNvPr>
@@ -14989,7 +14989,7 @@
           <p:cNvPr id="48" name="">
             <a:extLst xmlns:a="http://schemas.openxmlformats.org/drawingml/2006/main">
               <a:ext uri="{FF2B5EF4-FFF2-40B4-BE49-F238E27FC236}">
-                <a16:creationId xmlns:a16="http://schemas.microsoft.com/office/drawing/2014/main" id="{07C663B6-5A51-4E53-BA27-7FB412160FF7}"/>
+                <a16:creationId xmlns:a16="http://schemas.microsoft.com/office/drawing/2014/main" id="{947289C3-6695-4415-BF4D-5F86E85DE7EA}"/>
               </a:ext>
             </a:extLst>
           </p:cNvPr>
@@ -15019,7 +15019,7 @@
           <p:cNvPr id="49" name="">
             <a:extLst xmlns:a="http://schemas.openxmlformats.org/drawingml/2006/main">
               <a:ext uri="{FF2B5EF4-FFF2-40B4-BE49-F238E27FC236}">
-                <a16:creationId xmlns:a16="http://schemas.microsoft.com/office/drawing/2014/main" id="{2E7376A2-F1B8-48D6-92CE-FB0F534AC860}"/>
+                <a16:creationId xmlns:a16="http://schemas.microsoft.com/office/drawing/2014/main" id="{7FF9CF03-6849-4EB7-84B7-61D99720A2A2}"/>
               </a:ext>
             </a:extLst>
           </p:cNvPr>
@@ -15049,7 +15049,7 @@
           <p:cNvPr id="50" name="">
             <a:extLst xmlns:a="http://schemas.openxmlformats.org/drawingml/2006/main">
               <a:ext uri="{FF2B5EF4-FFF2-40B4-BE49-F238E27FC236}">
-                <a16:creationId xmlns:a16="http://schemas.microsoft.com/office/drawing/2014/main" id="{3AD542EF-E197-464B-B0F1-6DC2DB875AB0}"/>
+                <a16:creationId xmlns:a16="http://schemas.microsoft.com/office/drawing/2014/main" id="{FBF7157D-8035-4AF9-9B4F-875F06F0E72A}"/>
               </a:ext>
             </a:extLst>
           </p:cNvPr>
@@ -15079,7 +15079,7 @@
           <p:cNvPr id="51" name="">
             <a:extLst xmlns:a="http://schemas.openxmlformats.org/drawingml/2006/main">
               <a:ext uri="{FF2B5EF4-FFF2-40B4-BE49-F238E27FC236}">
-                <a16:creationId xmlns:a16="http://schemas.microsoft.com/office/drawing/2014/main" id="{41F62B45-2E26-43A0-94E7-B0087BBAE01B}"/>
+                <a16:creationId xmlns:a16="http://schemas.microsoft.com/office/drawing/2014/main" id="{7577E895-8BB3-41D0-9102-41E1540645D9}"/>
               </a:ext>
             </a:extLst>
           </p:cNvPr>
@@ -15109,7 +15109,7 @@
           <p:cNvPr id="52" name="">
             <a:extLst xmlns:a="http://schemas.openxmlformats.org/drawingml/2006/main">
               <a:ext uri="{FF2B5EF4-FFF2-40B4-BE49-F238E27FC236}">
-                <a16:creationId xmlns:a16="http://schemas.microsoft.com/office/drawing/2014/main" id="{339BA4C2-051D-4182-BD47-AD2E764F7F33}"/>
+                <a16:creationId xmlns:a16="http://schemas.microsoft.com/office/drawing/2014/main" id="{FE6006A7-86FB-4887-B7A3-D5DA42B3DEB4}"/>
               </a:ext>
             </a:extLst>
           </p:cNvPr>
@@ -15139,7 +15139,7 @@
           <p:cNvPr id="53" name="">
             <a:extLst xmlns:a="http://schemas.openxmlformats.org/drawingml/2006/main">
               <a:ext uri="{FF2B5EF4-FFF2-40B4-BE49-F238E27FC236}">
-                <a16:creationId xmlns:a16="http://schemas.microsoft.com/office/drawing/2014/main" id="{8CC8F6EE-3FD1-4F89-B6B9-DA56B76F29F7}"/>
+                <a16:creationId xmlns:a16="http://schemas.microsoft.com/office/drawing/2014/main" id="{FA31901B-7C89-4060-83DF-03C7D9D04187}"/>
               </a:ext>
             </a:extLst>
           </p:cNvPr>
@@ -15169,7 +15169,7 @@
           <p:cNvPr id="54" name="">
             <a:extLst xmlns:a="http://schemas.openxmlformats.org/drawingml/2006/main">
               <a:ext uri="{FF2B5EF4-FFF2-40B4-BE49-F238E27FC236}">
-                <a16:creationId xmlns:a16="http://schemas.microsoft.com/office/drawing/2014/main" id="{5ADB7760-77A8-4537-897B-4206069E8D16}"/>
+                <a16:creationId xmlns:a16="http://schemas.microsoft.com/office/drawing/2014/main" id="{7B637714-B6B0-4A79-B7D3-25864E2C2046}"/>
               </a:ext>
             </a:extLst>
           </p:cNvPr>
@@ -15199,7 +15199,7 @@
           <p:cNvPr id="55" name="">
             <a:extLst xmlns:a="http://schemas.openxmlformats.org/drawingml/2006/main">
               <a:ext uri="{FF2B5EF4-FFF2-40B4-BE49-F238E27FC236}">
-                <a16:creationId xmlns:a16="http://schemas.microsoft.com/office/drawing/2014/main" id="{16086EAC-C324-488C-824D-D1A3BC995D2B}"/>
+                <a16:creationId xmlns:a16="http://schemas.microsoft.com/office/drawing/2014/main" id="{E4F698D6-4D23-4318-B0E4-530CDE06C0C0}"/>
               </a:ext>
             </a:extLst>
           </p:cNvPr>
@@ -15229,7 +15229,7 @@
           <p:cNvPr id="56" name="">
             <a:extLst xmlns:a="http://schemas.openxmlformats.org/drawingml/2006/main">
               <a:ext uri="{FF2B5EF4-FFF2-40B4-BE49-F238E27FC236}">
-                <a16:creationId xmlns:a16="http://schemas.microsoft.com/office/drawing/2014/main" id="{C37E4BC6-A153-4129-9588-A2975C01043B}"/>
+                <a16:creationId xmlns:a16="http://schemas.microsoft.com/office/drawing/2014/main" id="{62D3C5BA-8E95-4412-9A78-8A4E804CF21C}"/>
               </a:ext>
             </a:extLst>
           </p:cNvPr>
@@ -15259,7 +15259,7 @@
           <p:cNvPr id="57" name="">
             <a:extLst xmlns:a="http://schemas.openxmlformats.org/drawingml/2006/main">
               <a:ext uri="{FF2B5EF4-FFF2-40B4-BE49-F238E27FC236}">
-                <a16:creationId xmlns:a16="http://schemas.microsoft.com/office/drawing/2014/main" id="{2F24C4AB-59E9-4FAF-94BC-4199AD5DE6D8}"/>
+                <a16:creationId xmlns:a16="http://schemas.microsoft.com/office/drawing/2014/main" id="{39891AEA-A266-400F-BF96-51931F5D6D47}"/>
               </a:ext>
             </a:extLst>
           </p:cNvPr>
@@ -15327,7 +15327,7 @@
           <p:cNvPr id="58" name="">
             <a:extLst xmlns:a="http://schemas.openxmlformats.org/drawingml/2006/main">
               <a:ext uri="{FF2B5EF4-FFF2-40B4-BE49-F238E27FC236}">
-                <a16:creationId xmlns:a16="http://schemas.microsoft.com/office/drawing/2014/main" id="{AF2E88FF-1036-4DB2-A2CE-3CE555543DB3}"/>
+                <a16:creationId xmlns:a16="http://schemas.microsoft.com/office/drawing/2014/main" id="{57886DC2-5AE2-4D56-A7C2-43B984680229}"/>
               </a:ext>
             </a:extLst>
           </p:cNvPr>
@@ -15360,7 +15360,7 @@
           <p:cNvPr id="59" name="">
             <a:extLst xmlns:a="http://schemas.openxmlformats.org/drawingml/2006/main">
               <a:ext uri="{FF2B5EF4-FFF2-40B4-BE49-F238E27FC236}">
-                <a16:creationId xmlns:a16="http://schemas.microsoft.com/office/drawing/2014/main" id="{74D74F17-2D4E-4EF2-B239-96D385CBD59F}"/>
+                <a16:creationId xmlns:a16="http://schemas.microsoft.com/office/drawing/2014/main" id="{80F8AC4E-C7DF-418F-A1C8-AC3963EF7733}"/>
               </a:ext>
             </a:extLst>
           </p:cNvPr>
@@ -15426,7 +15426,7 @@
     </p:spTree>
     <p:extLst>
       <p:ext uri="{BB962C8B-B14F-4D97-AF65-F5344CB8AC3E}">
-        <p14:creationId xmlns:p14="http://schemas.microsoft.com/office/powerpoint/2010/main" val="1431803785"/>
+        <p14:creationId xmlns:p14="http://schemas.microsoft.com/office/powerpoint/2010/main" val="236379777"/>
       </p:ext>
     </p:extLst>
   </p:cSld>
@@ -15454,10 +15454,10 @@
       </p:grpSpPr>
       <p:sp>
         <p:nvSpPr>
-          <p:cNvPr id="73" name="">
-            <a:extLst xmlns:a="http://schemas.openxmlformats.org/drawingml/2006/main">
-              <a:ext uri="{FF2B5EF4-FFF2-40B4-BE49-F238E27FC236}">
-                <a16:creationId xmlns:a16="http://schemas.microsoft.com/office/drawing/2014/main" id="{308CD8F7-0F38-4F0D-9E47-7BDE50897788}"/>
+          <p:cNvPr id="90" name="">
+            <a:extLst xmlns:a="http://schemas.openxmlformats.org/drawingml/2006/main">
+              <a:ext uri="{FF2B5EF4-FFF2-40B4-BE49-F238E27FC236}">
+                <a16:creationId xmlns:a16="http://schemas.microsoft.com/office/drawing/2014/main" id="{12FA06BB-703E-4636-8BF1-A2E21E3479E6}"/>
               </a:ext>
             </a:extLst>
           </p:cNvPr>
@@ -15515,7 +15515,7 @@
                 <a:ea typeface="Arial"/>
                 <a:cs typeface="Arial"/>
               </a:rPr>
-              <a:t>Depthwise и pointwise</a:t>
+              <a:t>Depthwise + pointwise: два разных действия</a:t>
             </a:r>
           </a:p>
         </p:txBody>
@@ -15525,7 +15525,7 @@
           <p:cNvPr id="2" name="">
             <a:extLst xmlns:a="http://schemas.openxmlformats.org/drawingml/2006/main">
               <a:ext uri="{FF2B5EF4-FFF2-40B4-BE49-F238E27FC236}">
-                <a16:creationId xmlns:a16="http://schemas.microsoft.com/office/drawing/2014/main" id="{B3FCFC1E-EDAC-4461-B377-404713D3FF0D}"/>
+                <a16:creationId xmlns:a16="http://schemas.microsoft.com/office/drawing/2014/main" id="{7FCC92AA-A75C-43EF-8CC4-63E30B6C399A}"/>
               </a:ext>
             </a:extLst>
           </p:cNvPr>
@@ -15558,7 +15558,7 @@
           <p:cNvPr id="3" name="">
             <a:extLst xmlns:a="http://schemas.openxmlformats.org/drawingml/2006/main">
               <a:ext uri="{FF2B5EF4-FFF2-40B4-BE49-F238E27FC236}">
-                <a16:creationId xmlns:a16="http://schemas.microsoft.com/office/drawing/2014/main" id="{32C77D85-F23C-4911-A22C-8CC4839127DA}"/>
+                <a16:creationId xmlns:a16="http://schemas.microsoft.com/office/drawing/2014/main" id="{3FA9FEA8-BBB6-4BE8-A646-AC02FDD5A78E}"/>
               </a:ext>
             </a:extLst>
           </p:cNvPr>
@@ -15626,7 +15626,7 @@
           <p:cNvPr id="4" name="">
             <a:extLst xmlns:a="http://schemas.openxmlformats.org/drawingml/2006/main">
               <a:ext uri="{FF2B5EF4-FFF2-40B4-BE49-F238E27FC236}">
-                <a16:creationId xmlns:a16="http://schemas.microsoft.com/office/drawing/2014/main" id="{E5A82E28-9178-448D-8730-48155A1B5B54}"/>
+                <a16:creationId xmlns:a16="http://schemas.microsoft.com/office/drawing/2014/main" id="{2829AF07-C432-46EB-BDE6-01D53ADDE1FF}"/>
               </a:ext>
             </a:extLst>
           </p:cNvPr>
@@ -15638,7 +15638,7 @@
         <p:spPr>
           <a:xfrm xmlns:a="http://schemas.openxmlformats.org/drawingml/2006/main">
             <a:off x="723900" y="1466850"/>
-            <a:ext cx="9334500" cy="342900"/>
+            <a:ext cx="5048250" cy="323850"/>
           </a:xfrm>
           <a:prstGeom xmlns:a="http://schemas.openxmlformats.org/drawingml/2006/main" prst="rect">
             <a:avLst/>
@@ -15684,7 +15684,7 @@
                 <a:ea typeface="Arial"/>
                 <a:cs typeface="Arial"/>
               </a:rPr>
-              <a:t>1. Depthwise 3×3: отдельный фильтр для каждого канала</a:t>
+              <a:t>Depthwise 3×3: смотрит на соседние пиксели</a:t>
             </a:r>
           </a:p>
         </p:txBody>
@@ -15694,23 +15694,91 @@
           <p:cNvPr id="5" name="">
             <a:extLst xmlns:a="http://schemas.openxmlformats.org/drawingml/2006/main">
               <a:ext uri="{FF2B5EF4-FFF2-40B4-BE49-F238E27FC236}">
-                <a16:creationId xmlns:a16="http://schemas.microsoft.com/office/drawing/2014/main" id="{399C66F8-15F1-4214-8FB0-A0423B81FF77}"/>
-              </a:ext>
-            </a:extLst>
-          </p:cNvPr>
-          <p:cNvSpPr>
-            <a:spLocks xmlns:a="http://schemas.openxmlformats.org/drawingml/2006/main" noGrp="1"/>
-          </p:cNvSpPr>
-          <p:nvPr/>
-        </p:nvSpPr>
-        <p:spPr>
-          <a:xfrm xmlns:a="http://schemas.openxmlformats.org/drawingml/2006/main">
-            <a:off x="933450" y="2266950"/>
-            <a:ext cx="781050" cy="781050"/>
+                <a16:creationId xmlns:a16="http://schemas.microsoft.com/office/drawing/2014/main" id="{006BE5BA-43A1-47BC-822A-0F3E9865A536}"/>
+              </a:ext>
+            </a:extLst>
+          </p:cNvPr>
+          <p:cNvSpPr>
+            <a:spLocks xmlns:a="http://schemas.openxmlformats.org/drawingml/2006/main" noGrp="1"/>
+          </p:cNvSpPr>
+          <p:nvPr/>
+        </p:nvSpPr>
+        <p:spPr>
+          <a:xfrm xmlns:a="http://schemas.openxmlformats.org/drawingml/2006/main">
+            <a:off x="723900" y="1809750"/>
+            <a:ext cx="4953000" cy="228600"/>
+          </a:xfrm>
+          <a:prstGeom xmlns:a="http://schemas.openxmlformats.org/drawingml/2006/main" prst="rect">
+            <a:avLst/>
+          </a:prstGeom>
+          <a:noFill xmlns:a="http://schemas.openxmlformats.org/drawingml/2006/main"/>
+          <a:ln xmlns:a="http://schemas.openxmlformats.org/drawingml/2006/main" w="0">
+            <a:noFill/>
+          </a:ln>
+        </p:spPr>
+        <p:txBody>
+          <a:bodyPr xmlns:a="http://schemas.openxmlformats.org/drawingml/2006/main">
+            <a:noAutofit/>
+          </a:bodyPr>
+          <a:lstStyle xmlns:a="http://schemas.openxmlformats.org/drawingml/2006/main">
+            <a:defPPr algn="l">
+              <a:defRPr sz="1200" b="0">
+                <a:solidFill>
+                  <a:srgbClr val="596273"/>
+                </a:solidFill>
+                <a:latin typeface="Arial"/>
+                <a:ea typeface="Arial"/>
+                <a:cs typeface="Arial"/>
+              </a:defRPr>
+            </a:defPPr>
+          </a:lstStyle>
+          <a:p xmlns:a="http://schemas.openxmlformats.org/drawingml/2006/main">
+            <a:pPr algn="l">
+              <a:defRPr sz="1200" b="0">
+                <a:solidFill>
+                  <a:srgbClr val="596273"/>
+                </a:solidFill>
+                <a:latin typeface="Arial"/>
+                <a:ea typeface="Arial"/>
+                <a:cs typeface="Arial"/>
+              </a:defRPr>
+            </a:pPr>
+            <a:r>
+              <a:rPr sz="1200" b="0">
+                <a:solidFill>
+                  <a:srgbClr val="596273"/>
+                </a:solidFill>
+                <a:latin typeface="Arial"/>
+                <a:ea typeface="Arial"/>
+                <a:cs typeface="Arial"/>
+              </a:rPr>
+              <a:t>но каждый канал обрабатывает отдельно</a:t>
+            </a:r>
+          </a:p>
+        </p:txBody>
+      </p:sp>
+      <p:sp>
+        <p:nvSpPr>
+          <p:cNvPr id="6" name="">
+            <a:extLst xmlns:a="http://schemas.openxmlformats.org/drawingml/2006/main">
+              <a:ext uri="{FF2B5EF4-FFF2-40B4-BE49-F238E27FC236}">
+                <a16:creationId xmlns:a16="http://schemas.microsoft.com/office/drawing/2014/main" id="{B5299927-A0F9-42BA-951D-9D32D20A6648}"/>
+              </a:ext>
+            </a:extLst>
+          </p:cNvPr>
+          <p:cNvSpPr>
+            <a:spLocks xmlns:a="http://schemas.openxmlformats.org/drawingml/2006/main" noGrp="1"/>
+          </p:cNvSpPr>
+          <p:nvPr/>
+        </p:nvSpPr>
+        <p:spPr>
+          <a:xfrm xmlns:a="http://schemas.openxmlformats.org/drawingml/2006/main">
+            <a:off x="895350" y="2343150"/>
+            <a:ext cx="590550" cy="590550"/>
           </a:xfrm>
           <a:prstGeom xmlns:a="http://schemas.openxmlformats.org/drawingml/2006/main" prst="roundRect">
             <a:avLst>
-              <a:gd name="adj" fmla="val 9756"/>
+              <a:gd name="adj" fmla="val 11290"/>
             </a:avLst>
           </a:prstGeom>
           <a:solidFill xmlns:a="http://schemas.openxmlformats.org/drawingml/2006/main">
@@ -15726,22 +15794,22 @@
       </p:sp>
       <p:sp>
         <p:nvSpPr>
-          <p:cNvPr id="6" name="">
-            <a:extLst xmlns:a="http://schemas.openxmlformats.org/drawingml/2006/main">
-              <a:ext uri="{FF2B5EF4-FFF2-40B4-BE49-F238E27FC236}">
-                <a16:creationId xmlns:a16="http://schemas.microsoft.com/office/drawing/2014/main" id="{10E52DF6-00DA-4C4F-AC64-84D962DB5559}"/>
-              </a:ext>
-            </a:extLst>
-          </p:cNvPr>
-          <p:cNvSpPr>
-            <a:spLocks xmlns:a="http://schemas.openxmlformats.org/drawingml/2006/main" noGrp="1"/>
-          </p:cNvSpPr>
-          <p:nvPr/>
-        </p:nvSpPr>
-        <p:spPr>
-          <a:xfrm xmlns:a="http://schemas.openxmlformats.org/drawingml/2006/main">
-            <a:off x="1009650" y="2438400"/>
-            <a:ext cx="628650" cy="19050"/>
+          <p:cNvPr id="7" name="">
+            <a:extLst xmlns:a="http://schemas.openxmlformats.org/drawingml/2006/main">
+              <a:ext uri="{FF2B5EF4-FFF2-40B4-BE49-F238E27FC236}">
+                <a16:creationId xmlns:a16="http://schemas.microsoft.com/office/drawing/2014/main" id="{A70DE0BE-8B80-42B5-8B80-A42B58AD4250}"/>
+              </a:ext>
+            </a:extLst>
+          </p:cNvPr>
+          <p:cNvSpPr>
+            <a:spLocks xmlns:a="http://schemas.openxmlformats.org/drawingml/2006/main" noGrp="1"/>
+          </p:cNvSpPr>
+          <p:nvPr/>
+        </p:nvSpPr>
+        <p:spPr>
+          <a:xfrm xmlns:a="http://schemas.openxmlformats.org/drawingml/2006/main">
+            <a:off x="971550" y="2505075"/>
+            <a:ext cx="438150" cy="19050"/>
           </a:xfrm>
           <a:prstGeom xmlns:a="http://schemas.openxmlformats.org/drawingml/2006/main" prst="rect">
             <a:avLst/>
@@ -15759,22 +15827,22 @@
       </p:sp>
       <p:sp>
         <p:nvSpPr>
-          <p:cNvPr id="7" name="">
-            <a:extLst xmlns:a="http://schemas.openxmlformats.org/drawingml/2006/main">
-              <a:ext uri="{FF2B5EF4-FFF2-40B4-BE49-F238E27FC236}">
-                <a16:creationId xmlns:a16="http://schemas.microsoft.com/office/drawing/2014/main" id="{5A403F11-EB42-46CB-B974-3C410DEEF245}"/>
-              </a:ext>
-            </a:extLst>
-          </p:cNvPr>
-          <p:cNvSpPr>
-            <a:spLocks xmlns:a="http://schemas.openxmlformats.org/drawingml/2006/main" noGrp="1"/>
-          </p:cNvSpPr>
-          <p:nvPr/>
-        </p:nvSpPr>
-        <p:spPr>
-          <a:xfrm xmlns:a="http://schemas.openxmlformats.org/drawingml/2006/main">
-            <a:off x="1009650" y="2609850"/>
-            <a:ext cx="628650" cy="19050"/>
+          <p:cNvPr id="8" name="">
+            <a:extLst xmlns:a="http://schemas.openxmlformats.org/drawingml/2006/main">
+              <a:ext uri="{FF2B5EF4-FFF2-40B4-BE49-F238E27FC236}">
+                <a16:creationId xmlns:a16="http://schemas.microsoft.com/office/drawing/2014/main" id="{252EC313-6D56-4EC2-B425-76EDAC66FAE0}"/>
+              </a:ext>
+            </a:extLst>
+          </p:cNvPr>
+          <p:cNvSpPr>
+            <a:spLocks xmlns:a="http://schemas.openxmlformats.org/drawingml/2006/main" noGrp="1"/>
+          </p:cNvSpPr>
+          <p:nvPr/>
+        </p:nvSpPr>
+        <p:spPr>
+          <a:xfrm xmlns:a="http://schemas.openxmlformats.org/drawingml/2006/main">
+            <a:off x="971550" y="2638425"/>
+            <a:ext cx="438150" cy="19050"/>
           </a:xfrm>
           <a:prstGeom xmlns:a="http://schemas.openxmlformats.org/drawingml/2006/main" prst="rect">
             <a:avLst/>
@@ -15792,22 +15860,22 @@
       </p:sp>
       <p:sp>
         <p:nvSpPr>
-          <p:cNvPr id="8" name="">
-            <a:extLst xmlns:a="http://schemas.openxmlformats.org/drawingml/2006/main">
-              <a:ext uri="{FF2B5EF4-FFF2-40B4-BE49-F238E27FC236}">
-                <a16:creationId xmlns:a16="http://schemas.microsoft.com/office/drawing/2014/main" id="{666E3A2B-79E0-4505-BD44-898C1D7A1391}"/>
-              </a:ext>
-            </a:extLst>
-          </p:cNvPr>
-          <p:cNvSpPr>
-            <a:spLocks xmlns:a="http://schemas.openxmlformats.org/drawingml/2006/main" noGrp="1"/>
-          </p:cNvSpPr>
-          <p:nvPr/>
-        </p:nvSpPr>
-        <p:spPr>
-          <a:xfrm xmlns:a="http://schemas.openxmlformats.org/drawingml/2006/main">
-            <a:off x="1009650" y="2781300"/>
-            <a:ext cx="628650" cy="19050"/>
+          <p:cNvPr id="9" name="">
+            <a:extLst xmlns:a="http://schemas.openxmlformats.org/drawingml/2006/main">
+              <a:ext uri="{FF2B5EF4-FFF2-40B4-BE49-F238E27FC236}">
+                <a16:creationId xmlns:a16="http://schemas.microsoft.com/office/drawing/2014/main" id="{00CB5F49-631F-4F8C-85CB-4357FB50DB47}"/>
+              </a:ext>
+            </a:extLst>
+          </p:cNvPr>
+          <p:cNvSpPr>
+            <a:spLocks xmlns:a="http://schemas.openxmlformats.org/drawingml/2006/main" noGrp="1"/>
+          </p:cNvSpPr>
+          <p:nvPr/>
+        </p:nvSpPr>
+        <p:spPr>
+          <a:xfrm xmlns:a="http://schemas.openxmlformats.org/drawingml/2006/main">
+            <a:off x="971550" y="2771775"/>
+            <a:ext cx="438150" cy="19050"/>
           </a:xfrm>
           <a:prstGeom xmlns:a="http://schemas.openxmlformats.org/drawingml/2006/main" prst="rect">
             <a:avLst/>
@@ -15825,22 +15893,22 @@
       </p:sp>
       <p:sp>
         <p:nvSpPr>
-          <p:cNvPr id="9" name="">
-            <a:extLst xmlns:a="http://schemas.openxmlformats.org/drawingml/2006/main">
-              <a:ext uri="{FF2B5EF4-FFF2-40B4-BE49-F238E27FC236}">
-                <a16:creationId xmlns:a16="http://schemas.microsoft.com/office/drawing/2014/main" id="{379D267B-28EA-451F-959E-CE4384931B3F}"/>
-              </a:ext>
-            </a:extLst>
-          </p:cNvPr>
-          <p:cNvSpPr>
-            <a:spLocks xmlns:a="http://schemas.openxmlformats.org/drawingml/2006/main" noGrp="1"/>
-          </p:cNvSpPr>
-          <p:nvPr/>
-        </p:nvSpPr>
-        <p:spPr>
-          <a:xfrm xmlns:a="http://schemas.openxmlformats.org/drawingml/2006/main">
-            <a:off x="933450" y="3133725"/>
-            <a:ext cx="781050" cy="228600"/>
+          <p:cNvPr id="10" name="">
+            <a:extLst xmlns:a="http://schemas.openxmlformats.org/drawingml/2006/main">
+              <a:ext uri="{FF2B5EF4-FFF2-40B4-BE49-F238E27FC236}">
+                <a16:creationId xmlns:a16="http://schemas.microsoft.com/office/drawing/2014/main" id="{3D47A46C-D8DB-4833-AFEC-610C859566D0}"/>
+              </a:ext>
+            </a:extLst>
+          </p:cNvPr>
+          <p:cNvSpPr>
+            <a:spLocks xmlns:a="http://schemas.openxmlformats.org/drawingml/2006/main" noGrp="1"/>
+          </p:cNvSpPr>
+          <p:nvPr/>
+        </p:nvSpPr>
+        <p:spPr>
+          <a:xfrm xmlns:a="http://schemas.openxmlformats.org/drawingml/2006/main">
+            <a:off x="895350" y="3009900"/>
+            <a:ext cx="590550" cy="190500"/>
           </a:xfrm>
           <a:prstGeom xmlns:a="http://schemas.openxmlformats.org/drawingml/2006/main" prst="rect">
             <a:avLst/>
@@ -15893,34 +15961,99 @@
       </p:sp>
       <p:sp>
         <p:nvSpPr>
-          <p:cNvPr id="10" name="">
-            <a:extLst xmlns:a="http://schemas.openxmlformats.org/drawingml/2006/main">
-              <a:ext uri="{FF2B5EF4-FFF2-40B4-BE49-F238E27FC236}">
-                <a16:creationId xmlns:a16="http://schemas.microsoft.com/office/drawing/2014/main" id="{5F9C1CDD-A8B5-407A-90AE-C51A57320F73}"/>
-              </a:ext>
-            </a:extLst>
-          </p:cNvPr>
-          <p:cNvSpPr>
-            <a:spLocks xmlns:a="http://schemas.openxmlformats.org/drawingml/2006/main" noGrp="1"/>
-          </p:cNvSpPr>
-          <p:nvPr/>
-        </p:nvSpPr>
-        <p:spPr>
-          <a:xfrm xmlns:a="http://schemas.openxmlformats.org/drawingml/2006/main">
-            <a:off x="2000250" y="2266950"/>
-            <a:ext cx="781050" cy="781050"/>
+          <p:cNvPr id="11" name="">
+            <a:extLst xmlns:a="http://schemas.openxmlformats.org/drawingml/2006/main">
+              <a:ext uri="{FF2B5EF4-FFF2-40B4-BE49-F238E27FC236}">
+                <a16:creationId xmlns:a16="http://schemas.microsoft.com/office/drawing/2014/main" id="{0EE26BED-EBE7-45BF-97E3-B523C337231E}"/>
+              </a:ext>
+            </a:extLst>
+          </p:cNvPr>
+          <p:cNvSpPr>
+            <a:spLocks xmlns:a="http://schemas.openxmlformats.org/drawingml/2006/main" noGrp="1"/>
+          </p:cNvSpPr>
+          <p:nvPr/>
+        </p:nvSpPr>
+        <p:spPr>
+          <a:xfrm xmlns:a="http://schemas.openxmlformats.org/drawingml/2006/main">
+            <a:off x="1619250" y="2638425"/>
+            <a:ext cx="723900" cy="28575"/>
+          </a:xfrm>
+          <a:prstGeom xmlns:a="http://schemas.openxmlformats.org/drawingml/2006/main" prst="rect">
+            <a:avLst/>
+          </a:prstGeom>
+          <a:solidFill xmlns:a="http://schemas.openxmlformats.org/drawingml/2006/main">
+            <a:srgbClr val="0F9D8A"/>
+          </a:solidFill>
+          <a:ln xmlns:a="http://schemas.openxmlformats.org/drawingml/2006/main" w="9525">
+            <a:solidFill>
+              <a:srgbClr val="0F9D8A"/>
+            </a:solidFill>
+            <a:prstDash val="solid"/>
+          </a:ln>
+        </p:spPr>
+      </p:sp>
+      <p:sp>
+        <p:nvSpPr>
+          <p:cNvPr id="12" name="">
+            <a:extLst xmlns:a="http://schemas.openxmlformats.org/drawingml/2006/main">
+              <a:ext uri="{FF2B5EF4-FFF2-40B4-BE49-F238E27FC236}">
+                <a16:creationId xmlns:a16="http://schemas.microsoft.com/office/drawing/2014/main" id="{F0F3B6BB-51C2-448E-B235-CC9200A0B33C}"/>
+              </a:ext>
+            </a:extLst>
+          </p:cNvPr>
+          <p:cNvSpPr>
+            <a:spLocks xmlns:a="http://schemas.openxmlformats.org/drawingml/2006/main" noGrp="1"/>
+          </p:cNvSpPr>
+          <p:nvPr/>
+        </p:nvSpPr>
+        <p:spPr>
+          <a:xfrm xmlns:a="http://schemas.openxmlformats.org/drawingml/2006/main">
+            <a:off x="2266950" y="2581275"/>
+            <a:ext cx="133350" cy="142875"/>
+          </a:xfrm>
+          <a:prstGeom xmlns:a="http://schemas.openxmlformats.org/drawingml/2006/main" prst="triangle">
+            <a:avLst/>
+          </a:prstGeom>
+          <a:solidFill xmlns:a="http://schemas.openxmlformats.org/drawingml/2006/main">
+            <a:srgbClr val="0F9D8A"/>
+          </a:solidFill>
+          <a:ln xmlns:a="http://schemas.openxmlformats.org/drawingml/2006/main" w="0">
+            <a:solidFill>
+              <a:srgbClr val="0F9D8A"/>
+            </a:solidFill>
+          </a:ln>
+        </p:spPr>
+      </p:sp>
+      <p:sp>
+        <p:nvSpPr>
+          <p:cNvPr id="13" name="">
+            <a:extLst xmlns:a="http://schemas.openxmlformats.org/drawingml/2006/main">
+              <a:ext uri="{FF2B5EF4-FFF2-40B4-BE49-F238E27FC236}">
+                <a16:creationId xmlns:a16="http://schemas.microsoft.com/office/drawing/2014/main" id="{2E2A2DDA-CD4C-41F3-BAF4-7A9F871F2812}"/>
+              </a:ext>
+            </a:extLst>
+          </p:cNvPr>
+          <p:cNvSpPr>
+            <a:spLocks xmlns:a="http://schemas.openxmlformats.org/drawingml/2006/main" noGrp="1"/>
+          </p:cNvSpPr>
+          <p:nvPr/>
+        </p:nvSpPr>
+        <p:spPr>
+          <a:xfrm xmlns:a="http://schemas.openxmlformats.org/drawingml/2006/main">
+            <a:off x="2514600" y="2428875"/>
+            <a:ext cx="685800" cy="419100"/>
           </a:xfrm>
           <a:prstGeom xmlns:a="http://schemas.openxmlformats.org/drawingml/2006/main" prst="roundRect">
             <a:avLst>
-              <a:gd name="adj" fmla="val 9756"/>
+              <a:gd name="adj" fmla="val 15909"/>
             </a:avLst>
           </a:prstGeom>
           <a:solidFill xmlns:a="http://schemas.openxmlformats.org/drawingml/2006/main">
-            <a:srgbClr val="F0EAFE"/>
+            <a:srgbClr val="0F9D8A"/>
           </a:solidFill>
           <a:ln xmlns:a="http://schemas.openxmlformats.org/drawingml/2006/main" w="9525">
             <a:solidFill>
-              <a:srgbClr val="F0EAFE"/>
+              <a:srgbClr val="0F9D8A"/>
             </a:solidFill>
             <a:prstDash val="solid"/>
           </a:ln>
@@ -15928,121 +16061,22 @@
       </p:sp>
       <p:sp>
         <p:nvSpPr>
-          <p:cNvPr id="11" name="">
-            <a:extLst xmlns:a="http://schemas.openxmlformats.org/drawingml/2006/main">
-              <a:ext uri="{FF2B5EF4-FFF2-40B4-BE49-F238E27FC236}">
-                <a16:creationId xmlns:a16="http://schemas.microsoft.com/office/drawing/2014/main" id="{676C81B0-E2C5-4C07-B928-C7A55DD1F587}"/>
-              </a:ext>
-            </a:extLst>
-          </p:cNvPr>
-          <p:cNvSpPr>
-            <a:spLocks xmlns:a="http://schemas.openxmlformats.org/drawingml/2006/main" noGrp="1"/>
-          </p:cNvSpPr>
-          <p:nvPr/>
-        </p:nvSpPr>
-        <p:spPr>
-          <a:xfrm xmlns:a="http://schemas.openxmlformats.org/drawingml/2006/main">
-            <a:off x="2076450" y="2438400"/>
-            <a:ext cx="628650" cy="19050"/>
-          </a:xfrm>
-          <a:prstGeom xmlns:a="http://schemas.openxmlformats.org/drawingml/2006/main" prst="rect">
-            <a:avLst/>
-          </a:prstGeom>
-          <a:solidFill xmlns:a="http://schemas.openxmlformats.org/drawingml/2006/main">
-            <a:srgbClr val="FFFFFF"/>
-          </a:solidFill>
-          <a:ln xmlns:a="http://schemas.openxmlformats.org/drawingml/2006/main" w="9525">
-            <a:solidFill>
-              <a:srgbClr val="FFFFFF"/>
-            </a:solidFill>
-            <a:prstDash val="solid"/>
-          </a:ln>
-        </p:spPr>
-      </p:sp>
-      <p:sp>
-        <p:nvSpPr>
-          <p:cNvPr id="12" name="">
-            <a:extLst xmlns:a="http://schemas.openxmlformats.org/drawingml/2006/main">
-              <a:ext uri="{FF2B5EF4-FFF2-40B4-BE49-F238E27FC236}">
-                <a16:creationId xmlns:a16="http://schemas.microsoft.com/office/drawing/2014/main" id="{B2F74317-F236-423B-B006-E8A6BA683CA8}"/>
-              </a:ext>
-            </a:extLst>
-          </p:cNvPr>
-          <p:cNvSpPr>
-            <a:spLocks xmlns:a="http://schemas.openxmlformats.org/drawingml/2006/main" noGrp="1"/>
-          </p:cNvSpPr>
-          <p:nvPr/>
-        </p:nvSpPr>
-        <p:spPr>
-          <a:xfrm xmlns:a="http://schemas.openxmlformats.org/drawingml/2006/main">
-            <a:off x="2076450" y="2609850"/>
-            <a:ext cx="628650" cy="19050"/>
-          </a:xfrm>
-          <a:prstGeom xmlns:a="http://schemas.openxmlformats.org/drawingml/2006/main" prst="rect">
-            <a:avLst/>
-          </a:prstGeom>
-          <a:solidFill xmlns:a="http://schemas.openxmlformats.org/drawingml/2006/main">
-            <a:srgbClr val="FFFFFF"/>
-          </a:solidFill>
-          <a:ln xmlns:a="http://schemas.openxmlformats.org/drawingml/2006/main" w="9525">
-            <a:solidFill>
-              <a:srgbClr val="FFFFFF"/>
-            </a:solidFill>
-            <a:prstDash val="solid"/>
-          </a:ln>
-        </p:spPr>
-      </p:sp>
-      <p:sp>
-        <p:nvSpPr>
-          <p:cNvPr id="13" name="">
-            <a:extLst xmlns:a="http://schemas.openxmlformats.org/drawingml/2006/main">
-              <a:ext uri="{FF2B5EF4-FFF2-40B4-BE49-F238E27FC236}">
-                <a16:creationId xmlns:a16="http://schemas.microsoft.com/office/drawing/2014/main" id="{2E825F6E-45DC-4814-B8AB-CA70040EBCCF}"/>
-              </a:ext>
-            </a:extLst>
-          </p:cNvPr>
-          <p:cNvSpPr>
-            <a:spLocks xmlns:a="http://schemas.openxmlformats.org/drawingml/2006/main" noGrp="1"/>
-          </p:cNvSpPr>
-          <p:nvPr/>
-        </p:nvSpPr>
-        <p:spPr>
-          <a:xfrm xmlns:a="http://schemas.openxmlformats.org/drawingml/2006/main">
-            <a:off x="2076450" y="2781300"/>
-            <a:ext cx="628650" cy="19050"/>
-          </a:xfrm>
-          <a:prstGeom xmlns:a="http://schemas.openxmlformats.org/drawingml/2006/main" prst="rect">
-            <a:avLst/>
-          </a:prstGeom>
-          <a:solidFill xmlns:a="http://schemas.openxmlformats.org/drawingml/2006/main">
-            <a:srgbClr val="FFFFFF"/>
-          </a:solidFill>
-          <a:ln xmlns:a="http://schemas.openxmlformats.org/drawingml/2006/main" w="9525">
-            <a:solidFill>
-              <a:srgbClr val="FFFFFF"/>
-            </a:solidFill>
-            <a:prstDash val="solid"/>
-          </a:ln>
-        </p:spPr>
-      </p:sp>
-      <p:sp>
-        <p:nvSpPr>
           <p:cNvPr id="14" name="">
             <a:extLst xmlns:a="http://schemas.openxmlformats.org/drawingml/2006/main">
               <a:ext uri="{FF2B5EF4-FFF2-40B4-BE49-F238E27FC236}">
-                <a16:creationId xmlns:a16="http://schemas.microsoft.com/office/drawing/2014/main" id="{C95FB9F4-8D4B-4411-AD9D-439A5CBA847C}"/>
-              </a:ext>
-            </a:extLst>
-          </p:cNvPr>
-          <p:cNvSpPr>
-            <a:spLocks xmlns:a="http://schemas.openxmlformats.org/drawingml/2006/main" noGrp="1"/>
-          </p:cNvSpPr>
-          <p:nvPr/>
-        </p:nvSpPr>
-        <p:spPr>
-          <a:xfrm xmlns:a="http://schemas.openxmlformats.org/drawingml/2006/main">
-            <a:off x="2000250" y="3133725"/>
-            <a:ext cx="781050" cy="228600"/>
+                <a16:creationId xmlns:a16="http://schemas.microsoft.com/office/drawing/2014/main" id="{4620A870-C8E5-45B6-9D9F-233FEAF81A8A}"/>
+              </a:ext>
+            </a:extLst>
+          </p:cNvPr>
+          <p:cNvSpPr>
+            <a:spLocks xmlns:a="http://schemas.openxmlformats.org/drawingml/2006/main" noGrp="1"/>
+          </p:cNvSpPr>
+          <p:nvPr/>
+        </p:nvSpPr>
+        <p:spPr>
+          <a:xfrm xmlns:a="http://schemas.openxmlformats.org/drawingml/2006/main">
+            <a:off x="2514600" y="2524125"/>
+            <a:ext cx="685800" cy="209550"/>
           </a:xfrm>
           <a:prstGeom xmlns:a="http://schemas.openxmlformats.org/drawingml/2006/main" prst="rect">
             <a:avLst/>
@@ -16088,7 +16122,7 @@
                 <a:ea typeface="Arial"/>
                 <a:cs typeface="Arial"/>
               </a:rPr>
-              <a:t>C2</a:t>
+              <a:t>3×3</a:t>
             </a:r>
           </a:p>
         </p:txBody>
@@ -16098,31 +16132,96 @@
           <p:cNvPr id="15" name="">
             <a:extLst xmlns:a="http://schemas.openxmlformats.org/drawingml/2006/main">
               <a:ext uri="{FF2B5EF4-FFF2-40B4-BE49-F238E27FC236}">
-                <a16:creationId xmlns:a16="http://schemas.microsoft.com/office/drawing/2014/main" id="{79898B14-D0B5-46FD-B3A0-855DDD9A263F}"/>
-              </a:ext>
-            </a:extLst>
-          </p:cNvPr>
-          <p:cNvSpPr>
-            <a:spLocks xmlns:a="http://schemas.openxmlformats.org/drawingml/2006/main" noGrp="1"/>
-          </p:cNvSpPr>
-          <p:nvPr/>
-        </p:nvSpPr>
-        <p:spPr>
-          <a:xfrm xmlns:a="http://schemas.openxmlformats.org/drawingml/2006/main">
-            <a:off x="3067050" y="2266950"/>
-            <a:ext cx="781050" cy="781050"/>
+                <a16:creationId xmlns:a16="http://schemas.microsoft.com/office/drawing/2014/main" id="{57F4B4AD-500D-48A3-990C-13B746A745F5}"/>
+              </a:ext>
+            </a:extLst>
+          </p:cNvPr>
+          <p:cNvSpPr>
+            <a:spLocks xmlns:a="http://schemas.openxmlformats.org/drawingml/2006/main" noGrp="1"/>
+          </p:cNvSpPr>
+          <p:nvPr/>
+        </p:nvSpPr>
+        <p:spPr>
+          <a:xfrm xmlns:a="http://schemas.openxmlformats.org/drawingml/2006/main">
+            <a:off x="3352800" y="2638425"/>
+            <a:ext cx="723900" cy="28575"/>
+          </a:xfrm>
+          <a:prstGeom xmlns:a="http://schemas.openxmlformats.org/drawingml/2006/main" prst="rect">
+            <a:avLst/>
+          </a:prstGeom>
+          <a:solidFill xmlns:a="http://schemas.openxmlformats.org/drawingml/2006/main">
+            <a:srgbClr val="0F9D8A"/>
+          </a:solidFill>
+          <a:ln xmlns:a="http://schemas.openxmlformats.org/drawingml/2006/main" w="9525">
+            <a:solidFill>
+              <a:srgbClr val="0F9D8A"/>
+            </a:solidFill>
+            <a:prstDash val="solid"/>
+          </a:ln>
+        </p:spPr>
+      </p:sp>
+      <p:sp>
+        <p:nvSpPr>
+          <p:cNvPr id="16" name="">
+            <a:extLst xmlns:a="http://schemas.openxmlformats.org/drawingml/2006/main">
+              <a:ext uri="{FF2B5EF4-FFF2-40B4-BE49-F238E27FC236}">
+                <a16:creationId xmlns:a16="http://schemas.microsoft.com/office/drawing/2014/main" id="{C0323532-93F5-4B0A-B7D0-6AAF216F44B2}"/>
+              </a:ext>
+            </a:extLst>
+          </p:cNvPr>
+          <p:cNvSpPr>
+            <a:spLocks xmlns:a="http://schemas.openxmlformats.org/drawingml/2006/main" noGrp="1"/>
+          </p:cNvSpPr>
+          <p:nvPr/>
+        </p:nvSpPr>
+        <p:spPr>
+          <a:xfrm xmlns:a="http://schemas.openxmlformats.org/drawingml/2006/main">
+            <a:off x="4000500" y="2581275"/>
+            <a:ext cx="133350" cy="142875"/>
+          </a:xfrm>
+          <a:prstGeom xmlns:a="http://schemas.openxmlformats.org/drawingml/2006/main" prst="triangle">
+            <a:avLst/>
+          </a:prstGeom>
+          <a:solidFill xmlns:a="http://schemas.openxmlformats.org/drawingml/2006/main">
+            <a:srgbClr val="0F9D8A"/>
+          </a:solidFill>
+          <a:ln xmlns:a="http://schemas.openxmlformats.org/drawingml/2006/main" w="0">
+            <a:solidFill>
+              <a:srgbClr val="0F9D8A"/>
+            </a:solidFill>
+          </a:ln>
+        </p:spPr>
+      </p:sp>
+      <p:sp>
+        <p:nvSpPr>
+          <p:cNvPr id="17" name="">
+            <a:extLst xmlns:a="http://schemas.openxmlformats.org/drawingml/2006/main">
+              <a:ext uri="{FF2B5EF4-FFF2-40B4-BE49-F238E27FC236}">
+                <a16:creationId xmlns:a16="http://schemas.microsoft.com/office/drawing/2014/main" id="{56239B20-1A00-4693-838E-B106BE2C725F}"/>
+              </a:ext>
+            </a:extLst>
+          </p:cNvPr>
+          <p:cNvSpPr>
+            <a:spLocks xmlns:a="http://schemas.openxmlformats.org/drawingml/2006/main" noGrp="1"/>
+          </p:cNvSpPr>
+          <p:nvPr/>
+        </p:nvSpPr>
+        <p:spPr>
+          <a:xfrm xmlns:a="http://schemas.openxmlformats.org/drawingml/2006/main">
+            <a:off x="4267200" y="2343150"/>
+            <a:ext cx="590550" cy="590550"/>
           </a:xfrm>
           <a:prstGeom xmlns:a="http://schemas.openxmlformats.org/drawingml/2006/main" prst="roundRect">
             <a:avLst>
-              <a:gd name="adj" fmla="val 9756"/>
+              <a:gd name="adj" fmla="val 11290"/>
             </a:avLst>
           </a:prstGeom>
           <a:solidFill xmlns:a="http://schemas.openxmlformats.org/drawingml/2006/main">
-            <a:srgbClr val="E7F7F4"/>
+            <a:srgbClr val="EAF2FF"/>
           </a:solidFill>
           <a:ln xmlns:a="http://schemas.openxmlformats.org/drawingml/2006/main" w="9525">
             <a:solidFill>
-              <a:srgbClr val="E7F7F4"/>
+              <a:srgbClr val="EAF2FF"/>
             </a:solidFill>
             <a:prstDash val="solid"/>
           </a:ln>
@@ -16130,22 +16229,22 @@
       </p:sp>
       <p:sp>
         <p:nvSpPr>
-          <p:cNvPr id="16" name="">
-            <a:extLst xmlns:a="http://schemas.openxmlformats.org/drawingml/2006/main">
-              <a:ext uri="{FF2B5EF4-FFF2-40B4-BE49-F238E27FC236}">
-                <a16:creationId xmlns:a16="http://schemas.microsoft.com/office/drawing/2014/main" id="{22BDD0C5-E9A3-4BA7-AD64-3B4EBFD89507}"/>
-              </a:ext>
-            </a:extLst>
-          </p:cNvPr>
-          <p:cNvSpPr>
-            <a:spLocks xmlns:a="http://schemas.openxmlformats.org/drawingml/2006/main" noGrp="1"/>
-          </p:cNvSpPr>
-          <p:nvPr/>
-        </p:nvSpPr>
-        <p:spPr>
-          <a:xfrm xmlns:a="http://schemas.openxmlformats.org/drawingml/2006/main">
-            <a:off x="3143250" y="2438400"/>
-            <a:ext cx="628650" cy="19050"/>
+          <p:cNvPr id="18" name="">
+            <a:extLst xmlns:a="http://schemas.openxmlformats.org/drawingml/2006/main">
+              <a:ext uri="{FF2B5EF4-FFF2-40B4-BE49-F238E27FC236}">
+                <a16:creationId xmlns:a16="http://schemas.microsoft.com/office/drawing/2014/main" id="{69CFCF19-64C2-494C-AF84-03BD20E404A1}"/>
+              </a:ext>
+            </a:extLst>
+          </p:cNvPr>
+          <p:cNvSpPr>
+            <a:spLocks xmlns:a="http://schemas.openxmlformats.org/drawingml/2006/main" noGrp="1"/>
+          </p:cNvSpPr>
+          <p:nvPr/>
+        </p:nvSpPr>
+        <p:spPr>
+          <a:xfrm xmlns:a="http://schemas.openxmlformats.org/drawingml/2006/main">
+            <a:off x="4343400" y="2505075"/>
+            <a:ext cx="438150" cy="19050"/>
           </a:xfrm>
           <a:prstGeom xmlns:a="http://schemas.openxmlformats.org/drawingml/2006/main" prst="rect">
             <a:avLst/>
@@ -16163,22 +16262,22 @@
       </p:sp>
       <p:sp>
         <p:nvSpPr>
-          <p:cNvPr id="17" name="">
-            <a:extLst xmlns:a="http://schemas.openxmlformats.org/drawingml/2006/main">
-              <a:ext uri="{FF2B5EF4-FFF2-40B4-BE49-F238E27FC236}">
-                <a16:creationId xmlns:a16="http://schemas.microsoft.com/office/drawing/2014/main" id="{DF09BBAD-1CAC-48CD-B528-37E00D857239}"/>
-              </a:ext>
-            </a:extLst>
-          </p:cNvPr>
-          <p:cNvSpPr>
-            <a:spLocks xmlns:a="http://schemas.openxmlformats.org/drawingml/2006/main" noGrp="1"/>
-          </p:cNvSpPr>
-          <p:nvPr/>
-        </p:nvSpPr>
-        <p:spPr>
-          <a:xfrm xmlns:a="http://schemas.openxmlformats.org/drawingml/2006/main">
-            <a:off x="3143250" y="2609850"/>
-            <a:ext cx="628650" cy="19050"/>
+          <p:cNvPr id="19" name="">
+            <a:extLst xmlns:a="http://schemas.openxmlformats.org/drawingml/2006/main">
+              <a:ext uri="{FF2B5EF4-FFF2-40B4-BE49-F238E27FC236}">
+                <a16:creationId xmlns:a16="http://schemas.microsoft.com/office/drawing/2014/main" id="{9ED26E0D-D898-4B11-BD84-3E6A03769495}"/>
+              </a:ext>
+            </a:extLst>
+          </p:cNvPr>
+          <p:cNvSpPr>
+            <a:spLocks xmlns:a="http://schemas.openxmlformats.org/drawingml/2006/main" noGrp="1"/>
+          </p:cNvSpPr>
+          <p:nvPr/>
+        </p:nvSpPr>
+        <p:spPr>
+          <a:xfrm xmlns:a="http://schemas.openxmlformats.org/drawingml/2006/main">
+            <a:off x="4343400" y="2638425"/>
+            <a:ext cx="438150" cy="19050"/>
           </a:xfrm>
           <a:prstGeom xmlns:a="http://schemas.openxmlformats.org/drawingml/2006/main" prst="rect">
             <a:avLst/>
@@ -16196,22 +16295,22 @@
       </p:sp>
       <p:sp>
         <p:nvSpPr>
-          <p:cNvPr id="18" name="">
-            <a:extLst xmlns:a="http://schemas.openxmlformats.org/drawingml/2006/main">
-              <a:ext uri="{FF2B5EF4-FFF2-40B4-BE49-F238E27FC236}">
-                <a16:creationId xmlns:a16="http://schemas.microsoft.com/office/drawing/2014/main" id="{A4F86612-AB23-4576-986E-FBE347E10EE1}"/>
-              </a:ext>
-            </a:extLst>
-          </p:cNvPr>
-          <p:cNvSpPr>
-            <a:spLocks xmlns:a="http://schemas.openxmlformats.org/drawingml/2006/main" noGrp="1"/>
-          </p:cNvSpPr>
-          <p:nvPr/>
-        </p:nvSpPr>
-        <p:spPr>
-          <a:xfrm xmlns:a="http://schemas.openxmlformats.org/drawingml/2006/main">
-            <a:off x="3143250" y="2781300"/>
-            <a:ext cx="628650" cy="19050"/>
+          <p:cNvPr id="20" name="">
+            <a:extLst xmlns:a="http://schemas.openxmlformats.org/drawingml/2006/main">
+              <a:ext uri="{FF2B5EF4-FFF2-40B4-BE49-F238E27FC236}">
+                <a16:creationId xmlns:a16="http://schemas.microsoft.com/office/drawing/2014/main" id="{A06C94FA-012B-45DD-A767-6A376BB2ED9C}"/>
+              </a:ext>
+            </a:extLst>
+          </p:cNvPr>
+          <p:cNvSpPr>
+            <a:spLocks xmlns:a="http://schemas.openxmlformats.org/drawingml/2006/main" noGrp="1"/>
+          </p:cNvSpPr>
+          <p:nvPr/>
+        </p:nvSpPr>
+        <p:spPr>
+          <a:xfrm xmlns:a="http://schemas.openxmlformats.org/drawingml/2006/main">
+            <a:off x="4343400" y="2771775"/>
+            <a:ext cx="438150" cy="19050"/>
           </a:xfrm>
           <a:prstGeom xmlns:a="http://schemas.openxmlformats.org/drawingml/2006/main" prst="rect">
             <a:avLst/>
@@ -16229,22 +16328,22 @@
       </p:sp>
       <p:sp>
         <p:nvSpPr>
-          <p:cNvPr id="19" name="">
-            <a:extLst xmlns:a="http://schemas.openxmlformats.org/drawingml/2006/main">
-              <a:ext uri="{FF2B5EF4-FFF2-40B4-BE49-F238E27FC236}">
-                <a16:creationId xmlns:a16="http://schemas.microsoft.com/office/drawing/2014/main" id="{ACFDC6D9-344D-4907-844B-8D74D78BCDD0}"/>
-              </a:ext>
-            </a:extLst>
-          </p:cNvPr>
-          <p:cNvSpPr>
-            <a:spLocks xmlns:a="http://schemas.openxmlformats.org/drawingml/2006/main" noGrp="1"/>
-          </p:cNvSpPr>
-          <p:nvPr/>
-        </p:nvSpPr>
-        <p:spPr>
-          <a:xfrm xmlns:a="http://schemas.openxmlformats.org/drawingml/2006/main">
-            <a:off x="3067050" y="3133725"/>
-            <a:ext cx="781050" cy="228600"/>
+          <p:cNvPr id="21" name="">
+            <a:extLst xmlns:a="http://schemas.openxmlformats.org/drawingml/2006/main">
+              <a:ext uri="{FF2B5EF4-FFF2-40B4-BE49-F238E27FC236}">
+                <a16:creationId xmlns:a16="http://schemas.microsoft.com/office/drawing/2014/main" id="{A272BE5E-3738-4041-BDA5-F59A95399B9B}"/>
+              </a:ext>
+            </a:extLst>
+          </p:cNvPr>
+          <p:cNvSpPr>
+            <a:spLocks xmlns:a="http://schemas.openxmlformats.org/drawingml/2006/main" noGrp="1"/>
+          </p:cNvSpPr>
+          <p:nvPr/>
+        </p:nvSpPr>
+        <p:spPr>
+          <a:xfrm xmlns:a="http://schemas.openxmlformats.org/drawingml/2006/main">
+            <a:off x="4267200" y="3009900"/>
+            <a:ext cx="590550" cy="190500"/>
           </a:xfrm>
           <a:prstGeom xmlns:a="http://schemas.openxmlformats.org/drawingml/2006/main" prst="rect">
             <a:avLst/>
@@ -16290,39 +16389,41 @@
                 <a:ea typeface="Arial"/>
                 <a:cs typeface="Arial"/>
               </a:rPr>
-              <a:t>C3</a:t>
+              <a:t>C1</a:t>
             </a:r>
           </a:p>
         </p:txBody>
       </p:sp>
       <p:sp>
         <p:nvSpPr>
-          <p:cNvPr id="20" name="">
-            <a:extLst xmlns:a="http://schemas.openxmlformats.org/drawingml/2006/main">
-              <a:ext uri="{FF2B5EF4-FFF2-40B4-BE49-F238E27FC236}">
-                <a16:creationId xmlns:a16="http://schemas.microsoft.com/office/drawing/2014/main" id="{D36B8B00-5C34-4945-AD76-A52FE78FCCF0}"/>
-              </a:ext>
-            </a:extLst>
-          </p:cNvPr>
-          <p:cNvSpPr>
-            <a:spLocks xmlns:a="http://schemas.openxmlformats.org/drawingml/2006/main" noGrp="1"/>
-          </p:cNvSpPr>
-          <p:nvPr/>
-        </p:nvSpPr>
-        <p:spPr>
-          <a:xfrm xmlns:a="http://schemas.openxmlformats.org/drawingml/2006/main">
-            <a:off x="4171950" y="2647950"/>
-            <a:ext cx="914400" cy="28575"/>
-          </a:xfrm>
-          <a:prstGeom xmlns:a="http://schemas.openxmlformats.org/drawingml/2006/main" prst="rect">
-            <a:avLst/>
+          <p:cNvPr id="22" name="">
+            <a:extLst xmlns:a="http://schemas.openxmlformats.org/drawingml/2006/main">
+              <a:ext uri="{FF2B5EF4-FFF2-40B4-BE49-F238E27FC236}">
+                <a16:creationId xmlns:a16="http://schemas.microsoft.com/office/drawing/2014/main" id="{70CD008E-9C2E-41C3-B6DE-6134647C5E20}"/>
+              </a:ext>
+            </a:extLst>
+          </p:cNvPr>
+          <p:cNvSpPr>
+            <a:spLocks xmlns:a="http://schemas.openxmlformats.org/drawingml/2006/main" noGrp="1"/>
+          </p:cNvSpPr>
+          <p:nvPr/>
+        </p:nvSpPr>
+        <p:spPr>
+          <a:xfrm xmlns:a="http://schemas.openxmlformats.org/drawingml/2006/main">
+            <a:off x="895350" y="3257550"/>
+            <a:ext cx="590550" cy="590550"/>
+          </a:xfrm>
+          <a:prstGeom xmlns:a="http://schemas.openxmlformats.org/drawingml/2006/main" prst="roundRect">
+            <a:avLst>
+              <a:gd name="adj" fmla="val 11290"/>
+            </a:avLst>
           </a:prstGeom>
           <a:solidFill xmlns:a="http://schemas.openxmlformats.org/drawingml/2006/main">
-            <a:srgbClr val="0F9D8A"/>
+            <a:srgbClr val="F0EAFE"/>
           </a:solidFill>
           <a:ln xmlns:a="http://schemas.openxmlformats.org/drawingml/2006/main" w="9525">
             <a:solidFill>
-              <a:srgbClr val="0F9D8A"/>
+              <a:srgbClr val="F0EAFE"/>
             </a:solidFill>
             <a:prstDash val="solid"/>
           </a:ln>
@@ -16330,66 +16431,32 @@
       </p:sp>
       <p:sp>
         <p:nvSpPr>
-          <p:cNvPr id="21" name="">
-            <a:extLst xmlns:a="http://schemas.openxmlformats.org/drawingml/2006/main">
-              <a:ext uri="{FF2B5EF4-FFF2-40B4-BE49-F238E27FC236}">
-                <a16:creationId xmlns:a16="http://schemas.microsoft.com/office/drawing/2014/main" id="{21A15D55-EA39-4306-BD7F-E25A6E65FDE8}"/>
-              </a:ext>
-            </a:extLst>
-          </p:cNvPr>
-          <p:cNvSpPr>
-            <a:spLocks xmlns:a="http://schemas.openxmlformats.org/drawingml/2006/main" noGrp="1"/>
-          </p:cNvSpPr>
-          <p:nvPr/>
-        </p:nvSpPr>
-        <p:spPr>
-          <a:xfrm xmlns:a="http://schemas.openxmlformats.org/drawingml/2006/main">
-            <a:off x="5010150" y="2590800"/>
-            <a:ext cx="133350" cy="142875"/>
-          </a:xfrm>
-          <a:prstGeom xmlns:a="http://schemas.openxmlformats.org/drawingml/2006/main" prst="triangle">
+          <p:cNvPr id="23" name="">
+            <a:extLst xmlns:a="http://schemas.openxmlformats.org/drawingml/2006/main">
+              <a:ext uri="{FF2B5EF4-FFF2-40B4-BE49-F238E27FC236}">
+                <a16:creationId xmlns:a16="http://schemas.microsoft.com/office/drawing/2014/main" id="{80F946B1-6F27-4319-9A02-AAE8758C5B2E}"/>
+              </a:ext>
+            </a:extLst>
+          </p:cNvPr>
+          <p:cNvSpPr>
+            <a:spLocks xmlns:a="http://schemas.openxmlformats.org/drawingml/2006/main" noGrp="1"/>
+          </p:cNvSpPr>
+          <p:nvPr/>
+        </p:nvSpPr>
+        <p:spPr>
+          <a:xfrm xmlns:a="http://schemas.openxmlformats.org/drawingml/2006/main">
+            <a:off x="971550" y="3419475"/>
+            <a:ext cx="438150" cy="19050"/>
+          </a:xfrm>
+          <a:prstGeom xmlns:a="http://schemas.openxmlformats.org/drawingml/2006/main" prst="rect">
             <a:avLst/>
           </a:prstGeom>
           <a:solidFill xmlns:a="http://schemas.openxmlformats.org/drawingml/2006/main">
-            <a:srgbClr val="0F9D8A"/>
-          </a:solidFill>
-          <a:ln xmlns:a="http://schemas.openxmlformats.org/drawingml/2006/main" w="0">
-            <a:solidFill>
-              <a:srgbClr val="0F9D8A"/>
-            </a:solidFill>
-          </a:ln>
-        </p:spPr>
-      </p:sp>
-      <p:sp>
-        <p:nvSpPr>
-          <p:cNvPr id="22" name="">
-            <a:extLst xmlns:a="http://schemas.openxmlformats.org/drawingml/2006/main">
-              <a:ext uri="{FF2B5EF4-FFF2-40B4-BE49-F238E27FC236}">
-                <a16:creationId xmlns:a16="http://schemas.microsoft.com/office/drawing/2014/main" id="{CF216BCC-6567-4C35-9C28-B8C42B821589}"/>
-              </a:ext>
-            </a:extLst>
-          </p:cNvPr>
-          <p:cNvSpPr>
-            <a:spLocks xmlns:a="http://schemas.openxmlformats.org/drawingml/2006/main" noGrp="1"/>
-          </p:cNvSpPr>
-          <p:nvPr/>
-        </p:nvSpPr>
-        <p:spPr>
-          <a:xfrm xmlns:a="http://schemas.openxmlformats.org/drawingml/2006/main">
-            <a:off x="5257800" y="2095500"/>
-            <a:ext cx="647700" cy="323850"/>
-          </a:xfrm>
-          <a:prstGeom xmlns:a="http://schemas.openxmlformats.org/drawingml/2006/main" prst="roundRect">
-            <a:avLst>
-              <a:gd name="adj" fmla="val 14706"/>
-            </a:avLst>
-          </a:prstGeom>
-          <a:solidFill xmlns:a="http://schemas.openxmlformats.org/drawingml/2006/main">
-            <a:srgbClr val="0F9D8A"/>
+            <a:srgbClr val="FFFFFF"/>
           </a:solidFill>
           <a:ln xmlns:a="http://schemas.openxmlformats.org/drawingml/2006/main" w="9525">
             <a:solidFill>
-              <a:srgbClr val="0F9D8A"/>
+              <a:srgbClr val="FFFFFF"/>
             </a:solidFill>
             <a:prstDash val="solid"/>
           </a:ln>
@@ -16397,22 +16464,88 @@
       </p:sp>
       <p:sp>
         <p:nvSpPr>
-          <p:cNvPr id="23" name="">
-            <a:extLst xmlns:a="http://schemas.openxmlformats.org/drawingml/2006/main">
-              <a:ext uri="{FF2B5EF4-FFF2-40B4-BE49-F238E27FC236}">
-                <a16:creationId xmlns:a16="http://schemas.microsoft.com/office/drawing/2014/main" id="{D82F46B6-733C-4B2B-A4C1-C42E3C69CC28}"/>
-              </a:ext>
-            </a:extLst>
-          </p:cNvPr>
-          <p:cNvSpPr>
-            <a:spLocks xmlns:a="http://schemas.openxmlformats.org/drawingml/2006/main" noGrp="1"/>
-          </p:cNvSpPr>
-          <p:nvPr/>
-        </p:nvSpPr>
-        <p:spPr>
-          <a:xfrm xmlns:a="http://schemas.openxmlformats.org/drawingml/2006/main">
-            <a:off x="5257800" y="2133600"/>
-            <a:ext cx="647700" cy="209550"/>
+          <p:cNvPr id="24" name="">
+            <a:extLst xmlns:a="http://schemas.openxmlformats.org/drawingml/2006/main">
+              <a:ext uri="{FF2B5EF4-FFF2-40B4-BE49-F238E27FC236}">
+                <a16:creationId xmlns:a16="http://schemas.microsoft.com/office/drawing/2014/main" id="{579EADFD-A6F2-4D48-90DA-DD95EA2FEA09}"/>
+              </a:ext>
+            </a:extLst>
+          </p:cNvPr>
+          <p:cNvSpPr>
+            <a:spLocks xmlns:a="http://schemas.openxmlformats.org/drawingml/2006/main" noGrp="1"/>
+          </p:cNvSpPr>
+          <p:nvPr/>
+        </p:nvSpPr>
+        <p:spPr>
+          <a:xfrm xmlns:a="http://schemas.openxmlformats.org/drawingml/2006/main">
+            <a:off x="971550" y="3552825"/>
+            <a:ext cx="438150" cy="19050"/>
+          </a:xfrm>
+          <a:prstGeom xmlns:a="http://schemas.openxmlformats.org/drawingml/2006/main" prst="rect">
+            <a:avLst/>
+          </a:prstGeom>
+          <a:solidFill xmlns:a="http://schemas.openxmlformats.org/drawingml/2006/main">
+            <a:srgbClr val="FFFFFF"/>
+          </a:solidFill>
+          <a:ln xmlns:a="http://schemas.openxmlformats.org/drawingml/2006/main" w="9525">
+            <a:solidFill>
+              <a:srgbClr val="FFFFFF"/>
+            </a:solidFill>
+            <a:prstDash val="solid"/>
+          </a:ln>
+        </p:spPr>
+      </p:sp>
+      <p:sp>
+        <p:nvSpPr>
+          <p:cNvPr id="25" name="">
+            <a:extLst xmlns:a="http://schemas.openxmlformats.org/drawingml/2006/main">
+              <a:ext uri="{FF2B5EF4-FFF2-40B4-BE49-F238E27FC236}">
+                <a16:creationId xmlns:a16="http://schemas.microsoft.com/office/drawing/2014/main" id="{0E009BF3-D23A-4522-AEB5-569787FDFECD}"/>
+              </a:ext>
+            </a:extLst>
+          </p:cNvPr>
+          <p:cNvSpPr>
+            <a:spLocks xmlns:a="http://schemas.openxmlformats.org/drawingml/2006/main" noGrp="1"/>
+          </p:cNvSpPr>
+          <p:nvPr/>
+        </p:nvSpPr>
+        <p:spPr>
+          <a:xfrm xmlns:a="http://schemas.openxmlformats.org/drawingml/2006/main">
+            <a:off x="971550" y="3686175"/>
+            <a:ext cx="438150" cy="19050"/>
+          </a:xfrm>
+          <a:prstGeom xmlns:a="http://schemas.openxmlformats.org/drawingml/2006/main" prst="rect">
+            <a:avLst/>
+          </a:prstGeom>
+          <a:solidFill xmlns:a="http://schemas.openxmlformats.org/drawingml/2006/main">
+            <a:srgbClr val="FFFFFF"/>
+          </a:solidFill>
+          <a:ln xmlns:a="http://schemas.openxmlformats.org/drawingml/2006/main" w="9525">
+            <a:solidFill>
+              <a:srgbClr val="FFFFFF"/>
+            </a:solidFill>
+            <a:prstDash val="solid"/>
+          </a:ln>
+        </p:spPr>
+      </p:sp>
+      <p:sp>
+        <p:nvSpPr>
+          <p:cNvPr id="26" name="">
+            <a:extLst xmlns:a="http://schemas.openxmlformats.org/drawingml/2006/main">
+              <a:ext uri="{FF2B5EF4-FFF2-40B4-BE49-F238E27FC236}">
+                <a16:creationId xmlns:a16="http://schemas.microsoft.com/office/drawing/2014/main" id="{683412B5-D29A-4B63-9BE3-54BCC380703D}"/>
+              </a:ext>
+            </a:extLst>
+          </p:cNvPr>
+          <p:cNvSpPr>
+            <a:spLocks xmlns:a="http://schemas.openxmlformats.org/drawingml/2006/main" noGrp="1"/>
+          </p:cNvSpPr>
+          <p:nvPr/>
+        </p:nvSpPr>
+        <p:spPr>
+          <a:xfrm xmlns:a="http://schemas.openxmlformats.org/drawingml/2006/main">
+            <a:off x="895350" y="3924300"/>
+            <a:ext cx="590550" cy="190500"/>
           </a:xfrm>
           <a:prstGeom xmlns:a="http://schemas.openxmlformats.org/drawingml/2006/main" prst="rect">
             <a:avLst/>
@@ -16458,34 +16591,32 @@
                 <a:ea typeface="Arial"/>
                 <a:cs typeface="Arial"/>
               </a:rPr>
-              <a:t>3×3</a:t>
+              <a:t>C2</a:t>
             </a:r>
           </a:p>
         </p:txBody>
       </p:sp>
       <p:sp>
         <p:nvSpPr>
-          <p:cNvPr id="24" name="">
-            <a:extLst xmlns:a="http://schemas.openxmlformats.org/drawingml/2006/main">
-              <a:ext uri="{FF2B5EF4-FFF2-40B4-BE49-F238E27FC236}">
-                <a16:creationId xmlns:a16="http://schemas.microsoft.com/office/drawing/2014/main" id="{D0F5B78A-E573-4B76-B02A-42A92D3BC351}"/>
-              </a:ext>
-            </a:extLst>
-          </p:cNvPr>
-          <p:cNvSpPr>
-            <a:spLocks xmlns:a="http://schemas.openxmlformats.org/drawingml/2006/main" noGrp="1"/>
-          </p:cNvSpPr>
-          <p:nvPr/>
-        </p:nvSpPr>
-        <p:spPr>
-          <a:xfrm xmlns:a="http://schemas.openxmlformats.org/drawingml/2006/main">
-            <a:off x="5257800" y="2552700"/>
-            <a:ext cx="647700" cy="323850"/>
-          </a:xfrm>
-          <a:prstGeom xmlns:a="http://schemas.openxmlformats.org/drawingml/2006/main" prst="roundRect">
-            <a:avLst>
-              <a:gd name="adj" fmla="val 14706"/>
-            </a:avLst>
+          <p:cNvPr id="27" name="">
+            <a:extLst xmlns:a="http://schemas.openxmlformats.org/drawingml/2006/main">
+              <a:ext uri="{FF2B5EF4-FFF2-40B4-BE49-F238E27FC236}">
+                <a16:creationId xmlns:a16="http://schemas.microsoft.com/office/drawing/2014/main" id="{F10EB87B-8000-4B5E-A839-E4CB8E95E36B}"/>
+              </a:ext>
+            </a:extLst>
+          </p:cNvPr>
+          <p:cNvSpPr>
+            <a:spLocks xmlns:a="http://schemas.openxmlformats.org/drawingml/2006/main" noGrp="1"/>
+          </p:cNvSpPr>
+          <p:nvPr/>
+        </p:nvSpPr>
+        <p:spPr>
+          <a:xfrm xmlns:a="http://schemas.openxmlformats.org/drawingml/2006/main">
+            <a:off x="1619250" y="3552825"/>
+            <a:ext cx="723900" cy="28575"/>
+          </a:xfrm>
+          <a:prstGeom xmlns:a="http://schemas.openxmlformats.org/drawingml/2006/main" prst="rect">
+            <a:avLst/>
           </a:prstGeom>
           <a:solidFill xmlns:a="http://schemas.openxmlformats.org/drawingml/2006/main">
             <a:srgbClr val="0F9D8A"/>
@@ -16500,22 +16631,89 @@
       </p:sp>
       <p:sp>
         <p:nvSpPr>
-          <p:cNvPr id="25" name="">
-            <a:extLst xmlns:a="http://schemas.openxmlformats.org/drawingml/2006/main">
-              <a:ext uri="{FF2B5EF4-FFF2-40B4-BE49-F238E27FC236}">
-                <a16:creationId xmlns:a16="http://schemas.microsoft.com/office/drawing/2014/main" id="{AAC871B5-388E-4EED-ADBA-D381ED686544}"/>
-              </a:ext>
-            </a:extLst>
-          </p:cNvPr>
-          <p:cNvSpPr>
-            <a:spLocks xmlns:a="http://schemas.openxmlformats.org/drawingml/2006/main" noGrp="1"/>
-          </p:cNvSpPr>
-          <p:nvPr/>
-        </p:nvSpPr>
-        <p:spPr>
-          <a:xfrm xmlns:a="http://schemas.openxmlformats.org/drawingml/2006/main">
-            <a:off x="5257800" y="2590800"/>
-            <a:ext cx="647700" cy="209550"/>
+          <p:cNvPr id="28" name="">
+            <a:extLst xmlns:a="http://schemas.openxmlformats.org/drawingml/2006/main">
+              <a:ext uri="{FF2B5EF4-FFF2-40B4-BE49-F238E27FC236}">
+                <a16:creationId xmlns:a16="http://schemas.microsoft.com/office/drawing/2014/main" id="{606E38C3-6698-4FDC-BC44-B74BEDAF612A}"/>
+              </a:ext>
+            </a:extLst>
+          </p:cNvPr>
+          <p:cNvSpPr>
+            <a:spLocks xmlns:a="http://schemas.openxmlformats.org/drawingml/2006/main" noGrp="1"/>
+          </p:cNvSpPr>
+          <p:nvPr/>
+        </p:nvSpPr>
+        <p:spPr>
+          <a:xfrm xmlns:a="http://schemas.openxmlformats.org/drawingml/2006/main">
+            <a:off x="2266950" y="3495675"/>
+            <a:ext cx="133350" cy="142875"/>
+          </a:xfrm>
+          <a:prstGeom xmlns:a="http://schemas.openxmlformats.org/drawingml/2006/main" prst="triangle">
+            <a:avLst/>
+          </a:prstGeom>
+          <a:solidFill xmlns:a="http://schemas.openxmlformats.org/drawingml/2006/main">
+            <a:srgbClr val="0F9D8A"/>
+          </a:solidFill>
+          <a:ln xmlns:a="http://schemas.openxmlformats.org/drawingml/2006/main" w="0">
+            <a:solidFill>
+              <a:srgbClr val="0F9D8A"/>
+            </a:solidFill>
+          </a:ln>
+        </p:spPr>
+      </p:sp>
+      <p:sp>
+        <p:nvSpPr>
+          <p:cNvPr id="29" name="">
+            <a:extLst xmlns:a="http://schemas.openxmlformats.org/drawingml/2006/main">
+              <a:ext uri="{FF2B5EF4-FFF2-40B4-BE49-F238E27FC236}">
+                <a16:creationId xmlns:a16="http://schemas.microsoft.com/office/drawing/2014/main" id="{E1A891DE-CE64-4939-AA9B-593A68D60C72}"/>
+              </a:ext>
+            </a:extLst>
+          </p:cNvPr>
+          <p:cNvSpPr>
+            <a:spLocks xmlns:a="http://schemas.openxmlformats.org/drawingml/2006/main" noGrp="1"/>
+          </p:cNvSpPr>
+          <p:nvPr/>
+        </p:nvSpPr>
+        <p:spPr>
+          <a:xfrm xmlns:a="http://schemas.openxmlformats.org/drawingml/2006/main">
+            <a:off x="2514600" y="3343275"/>
+            <a:ext cx="685800" cy="419100"/>
+          </a:xfrm>
+          <a:prstGeom xmlns:a="http://schemas.openxmlformats.org/drawingml/2006/main" prst="roundRect">
+            <a:avLst>
+              <a:gd name="adj" fmla="val 15909"/>
+            </a:avLst>
+          </a:prstGeom>
+          <a:solidFill xmlns:a="http://schemas.openxmlformats.org/drawingml/2006/main">
+            <a:srgbClr val="0F9D8A"/>
+          </a:solidFill>
+          <a:ln xmlns:a="http://schemas.openxmlformats.org/drawingml/2006/main" w="9525">
+            <a:solidFill>
+              <a:srgbClr val="0F9D8A"/>
+            </a:solidFill>
+            <a:prstDash val="solid"/>
+          </a:ln>
+        </p:spPr>
+      </p:sp>
+      <p:sp>
+        <p:nvSpPr>
+          <p:cNvPr id="30" name="">
+            <a:extLst xmlns:a="http://schemas.openxmlformats.org/drawingml/2006/main">
+              <a:ext uri="{FF2B5EF4-FFF2-40B4-BE49-F238E27FC236}">
+                <a16:creationId xmlns:a16="http://schemas.microsoft.com/office/drawing/2014/main" id="{AEEE360A-6451-4953-A937-78DDDBF7EA9E}"/>
+              </a:ext>
+            </a:extLst>
+          </p:cNvPr>
+          <p:cNvSpPr>
+            <a:spLocks xmlns:a="http://schemas.openxmlformats.org/drawingml/2006/main" noGrp="1"/>
+          </p:cNvSpPr>
+          <p:nvPr/>
+        </p:nvSpPr>
+        <p:spPr>
+          <a:xfrm xmlns:a="http://schemas.openxmlformats.org/drawingml/2006/main">
+            <a:off x="2514600" y="3438525"/>
+            <a:ext cx="685800" cy="209550"/>
           </a:xfrm>
           <a:prstGeom xmlns:a="http://schemas.openxmlformats.org/drawingml/2006/main" prst="rect">
             <a:avLst/>
@@ -16568,27 +16766,25 @@
       </p:sp>
       <p:sp>
         <p:nvSpPr>
-          <p:cNvPr id="26" name="">
-            <a:extLst xmlns:a="http://schemas.openxmlformats.org/drawingml/2006/main">
-              <a:ext uri="{FF2B5EF4-FFF2-40B4-BE49-F238E27FC236}">
-                <a16:creationId xmlns:a16="http://schemas.microsoft.com/office/drawing/2014/main" id="{D77983D8-9582-4302-A1B4-DED96C5C948A}"/>
-              </a:ext>
-            </a:extLst>
-          </p:cNvPr>
-          <p:cNvSpPr>
-            <a:spLocks xmlns:a="http://schemas.openxmlformats.org/drawingml/2006/main" noGrp="1"/>
-          </p:cNvSpPr>
-          <p:nvPr/>
-        </p:nvSpPr>
-        <p:spPr>
-          <a:xfrm xmlns:a="http://schemas.openxmlformats.org/drawingml/2006/main">
-            <a:off x="5257800" y="3009900"/>
-            <a:ext cx="647700" cy="323850"/>
-          </a:xfrm>
-          <a:prstGeom xmlns:a="http://schemas.openxmlformats.org/drawingml/2006/main" prst="roundRect">
-            <a:avLst>
-              <a:gd name="adj" fmla="val 14706"/>
-            </a:avLst>
+          <p:cNvPr id="31" name="">
+            <a:extLst xmlns:a="http://schemas.openxmlformats.org/drawingml/2006/main">
+              <a:ext uri="{FF2B5EF4-FFF2-40B4-BE49-F238E27FC236}">
+                <a16:creationId xmlns:a16="http://schemas.microsoft.com/office/drawing/2014/main" id="{6A46B803-BE0D-40B1-98FB-586B01BDA1E1}"/>
+              </a:ext>
+            </a:extLst>
+          </p:cNvPr>
+          <p:cNvSpPr>
+            <a:spLocks xmlns:a="http://schemas.openxmlformats.org/drawingml/2006/main" noGrp="1"/>
+          </p:cNvSpPr>
+          <p:nvPr/>
+        </p:nvSpPr>
+        <p:spPr>
+          <a:xfrm xmlns:a="http://schemas.openxmlformats.org/drawingml/2006/main">
+            <a:off x="3352800" y="3552825"/>
+            <a:ext cx="723900" cy="28575"/>
+          </a:xfrm>
+          <a:prstGeom xmlns:a="http://schemas.openxmlformats.org/drawingml/2006/main" prst="rect">
+            <a:avLst/>
           </a:prstGeom>
           <a:solidFill xmlns:a="http://schemas.openxmlformats.org/drawingml/2006/main">
             <a:srgbClr val="0F9D8A"/>
@@ -16603,22 +16799,188 @@
       </p:sp>
       <p:sp>
         <p:nvSpPr>
-          <p:cNvPr id="27" name="">
-            <a:extLst xmlns:a="http://schemas.openxmlformats.org/drawingml/2006/main">
-              <a:ext uri="{FF2B5EF4-FFF2-40B4-BE49-F238E27FC236}">
-                <a16:creationId xmlns:a16="http://schemas.microsoft.com/office/drawing/2014/main" id="{E7B18CC3-E4BF-4BF1-B01D-F35595A48656}"/>
-              </a:ext>
-            </a:extLst>
-          </p:cNvPr>
-          <p:cNvSpPr>
-            <a:spLocks xmlns:a="http://schemas.openxmlformats.org/drawingml/2006/main" noGrp="1"/>
-          </p:cNvSpPr>
-          <p:nvPr/>
-        </p:nvSpPr>
-        <p:spPr>
-          <a:xfrm xmlns:a="http://schemas.openxmlformats.org/drawingml/2006/main">
-            <a:off x="5257800" y="3048000"/>
-            <a:ext cx="647700" cy="209550"/>
+          <p:cNvPr id="32" name="">
+            <a:extLst xmlns:a="http://schemas.openxmlformats.org/drawingml/2006/main">
+              <a:ext uri="{FF2B5EF4-FFF2-40B4-BE49-F238E27FC236}">
+                <a16:creationId xmlns:a16="http://schemas.microsoft.com/office/drawing/2014/main" id="{2F1FEC1A-464E-4FE4-AC41-5C1AB20CD92B}"/>
+              </a:ext>
+            </a:extLst>
+          </p:cNvPr>
+          <p:cNvSpPr>
+            <a:spLocks xmlns:a="http://schemas.openxmlformats.org/drawingml/2006/main" noGrp="1"/>
+          </p:cNvSpPr>
+          <p:nvPr/>
+        </p:nvSpPr>
+        <p:spPr>
+          <a:xfrm xmlns:a="http://schemas.openxmlformats.org/drawingml/2006/main">
+            <a:off x="4000500" y="3495675"/>
+            <a:ext cx="133350" cy="142875"/>
+          </a:xfrm>
+          <a:prstGeom xmlns:a="http://schemas.openxmlformats.org/drawingml/2006/main" prst="triangle">
+            <a:avLst/>
+          </a:prstGeom>
+          <a:solidFill xmlns:a="http://schemas.openxmlformats.org/drawingml/2006/main">
+            <a:srgbClr val="0F9D8A"/>
+          </a:solidFill>
+          <a:ln xmlns:a="http://schemas.openxmlformats.org/drawingml/2006/main" w="0">
+            <a:solidFill>
+              <a:srgbClr val="0F9D8A"/>
+            </a:solidFill>
+          </a:ln>
+        </p:spPr>
+      </p:sp>
+      <p:sp>
+        <p:nvSpPr>
+          <p:cNvPr id="33" name="">
+            <a:extLst xmlns:a="http://schemas.openxmlformats.org/drawingml/2006/main">
+              <a:ext uri="{FF2B5EF4-FFF2-40B4-BE49-F238E27FC236}">
+                <a16:creationId xmlns:a16="http://schemas.microsoft.com/office/drawing/2014/main" id="{95A4D3DE-BF38-4A59-9B1B-286F7FB729C5}"/>
+              </a:ext>
+            </a:extLst>
+          </p:cNvPr>
+          <p:cNvSpPr>
+            <a:spLocks xmlns:a="http://schemas.openxmlformats.org/drawingml/2006/main" noGrp="1"/>
+          </p:cNvSpPr>
+          <p:nvPr/>
+        </p:nvSpPr>
+        <p:spPr>
+          <a:xfrm xmlns:a="http://schemas.openxmlformats.org/drawingml/2006/main">
+            <a:off x="4267200" y="3257550"/>
+            <a:ext cx="590550" cy="590550"/>
+          </a:xfrm>
+          <a:prstGeom xmlns:a="http://schemas.openxmlformats.org/drawingml/2006/main" prst="roundRect">
+            <a:avLst>
+              <a:gd name="adj" fmla="val 11290"/>
+            </a:avLst>
+          </a:prstGeom>
+          <a:solidFill xmlns:a="http://schemas.openxmlformats.org/drawingml/2006/main">
+            <a:srgbClr val="F0EAFE"/>
+          </a:solidFill>
+          <a:ln xmlns:a="http://schemas.openxmlformats.org/drawingml/2006/main" w="9525">
+            <a:solidFill>
+              <a:srgbClr val="F0EAFE"/>
+            </a:solidFill>
+            <a:prstDash val="solid"/>
+          </a:ln>
+        </p:spPr>
+      </p:sp>
+      <p:sp>
+        <p:nvSpPr>
+          <p:cNvPr id="34" name="">
+            <a:extLst xmlns:a="http://schemas.openxmlformats.org/drawingml/2006/main">
+              <a:ext uri="{FF2B5EF4-FFF2-40B4-BE49-F238E27FC236}">
+                <a16:creationId xmlns:a16="http://schemas.microsoft.com/office/drawing/2014/main" id="{F9054EF0-0241-45DF-93E5-59F669DBA6FB}"/>
+              </a:ext>
+            </a:extLst>
+          </p:cNvPr>
+          <p:cNvSpPr>
+            <a:spLocks xmlns:a="http://schemas.openxmlformats.org/drawingml/2006/main" noGrp="1"/>
+          </p:cNvSpPr>
+          <p:nvPr/>
+        </p:nvSpPr>
+        <p:spPr>
+          <a:xfrm xmlns:a="http://schemas.openxmlformats.org/drawingml/2006/main">
+            <a:off x="4343400" y="3419475"/>
+            <a:ext cx="438150" cy="19050"/>
+          </a:xfrm>
+          <a:prstGeom xmlns:a="http://schemas.openxmlformats.org/drawingml/2006/main" prst="rect">
+            <a:avLst/>
+          </a:prstGeom>
+          <a:solidFill xmlns:a="http://schemas.openxmlformats.org/drawingml/2006/main">
+            <a:srgbClr val="FFFFFF"/>
+          </a:solidFill>
+          <a:ln xmlns:a="http://schemas.openxmlformats.org/drawingml/2006/main" w="9525">
+            <a:solidFill>
+              <a:srgbClr val="FFFFFF"/>
+            </a:solidFill>
+            <a:prstDash val="solid"/>
+          </a:ln>
+        </p:spPr>
+      </p:sp>
+      <p:sp>
+        <p:nvSpPr>
+          <p:cNvPr id="35" name="">
+            <a:extLst xmlns:a="http://schemas.openxmlformats.org/drawingml/2006/main">
+              <a:ext uri="{FF2B5EF4-FFF2-40B4-BE49-F238E27FC236}">
+                <a16:creationId xmlns:a16="http://schemas.microsoft.com/office/drawing/2014/main" id="{7D3ACF2A-5641-4597-8956-536DF3D3069D}"/>
+              </a:ext>
+            </a:extLst>
+          </p:cNvPr>
+          <p:cNvSpPr>
+            <a:spLocks xmlns:a="http://schemas.openxmlformats.org/drawingml/2006/main" noGrp="1"/>
+          </p:cNvSpPr>
+          <p:nvPr/>
+        </p:nvSpPr>
+        <p:spPr>
+          <a:xfrm xmlns:a="http://schemas.openxmlformats.org/drawingml/2006/main">
+            <a:off x="4343400" y="3552825"/>
+            <a:ext cx="438150" cy="19050"/>
+          </a:xfrm>
+          <a:prstGeom xmlns:a="http://schemas.openxmlformats.org/drawingml/2006/main" prst="rect">
+            <a:avLst/>
+          </a:prstGeom>
+          <a:solidFill xmlns:a="http://schemas.openxmlformats.org/drawingml/2006/main">
+            <a:srgbClr val="FFFFFF"/>
+          </a:solidFill>
+          <a:ln xmlns:a="http://schemas.openxmlformats.org/drawingml/2006/main" w="9525">
+            <a:solidFill>
+              <a:srgbClr val="FFFFFF"/>
+            </a:solidFill>
+            <a:prstDash val="solid"/>
+          </a:ln>
+        </p:spPr>
+      </p:sp>
+      <p:sp>
+        <p:nvSpPr>
+          <p:cNvPr id="36" name="">
+            <a:extLst xmlns:a="http://schemas.openxmlformats.org/drawingml/2006/main">
+              <a:ext uri="{FF2B5EF4-FFF2-40B4-BE49-F238E27FC236}">
+                <a16:creationId xmlns:a16="http://schemas.microsoft.com/office/drawing/2014/main" id="{90DDCEC3-130E-4348-B63F-BF28EF36861C}"/>
+              </a:ext>
+            </a:extLst>
+          </p:cNvPr>
+          <p:cNvSpPr>
+            <a:spLocks xmlns:a="http://schemas.openxmlformats.org/drawingml/2006/main" noGrp="1"/>
+          </p:cNvSpPr>
+          <p:nvPr/>
+        </p:nvSpPr>
+        <p:spPr>
+          <a:xfrm xmlns:a="http://schemas.openxmlformats.org/drawingml/2006/main">
+            <a:off x="4343400" y="3686175"/>
+            <a:ext cx="438150" cy="19050"/>
+          </a:xfrm>
+          <a:prstGeom xmlns:a="http://schemas.openxmlformats.org/drawingml/2006/main" prst="rect">
+            <a:avLst/>
+          </a:prstGeom>
+          <a:solidFill xmlns:a="http://schemas.openxmlformats.org/drawingml/2006/main">
+            <a:srgbClr val="FFFFFF"/>
+          </a:solidFill>
+          <a:ln xmlns:a="http://schemas.openxmlformats.org/drawingml/2006/main" w="9525">
+            <a:solidFill>
+              <a:srgbClr val="FFFFFF"/>
+            </a:solidFill>
+            <a:prstDash val="solid"/>
+          </a:ln>
+        </p:spPr>
+      </p:sp>
+      <p:sp>
+        <p:nvSpPr>
+          <p:cNvPr id="37" name="">
+            <a:extLst xmlns:a="http://schemas.openxmlformats.org/drawingml/2006/main">
+              <a:ext uri="{FF2B5EF4-FFF2-40B4-BE49-F238E27FC236}">
+                <a16:creationId xmlns:a16="http://schemas.microsoft.com/office/drawing/2014/main" id="{8529145D-1D0F-43C1-BDCB-313217BBD016}"/>
+              </a:ext>
+            </a:extLst>
+          </p:cNvPr>
+          <p:cNvSpPr>
+            <a:spLocks xmlns:a="http://schemas.openxmlformats.org/drawingml/2006/main" noGrp="1"/>
+          </p:cNvSpPr>
+          <p:nvPr/>
+        </p:nvSpPr>
+        <p:spPr>
+          <a:xfrm xmlns:a="http://schemas.openxmlformats.org/drawingml/2006/main">
+            <a:off x="4267200" y="3924300"/>
+            <a:ext cx="590550" cy="190500"/>
           </a:xfrm>
           <a:prstGeom xmlns:a="http://schemas.openxmlformats.org/drawingml/2006/main" prst="rect">
             <a:avLst/>
@@ -16664,39 +17026,41 @@
                 <a:ea typeface="Arial"/>
                 <a:cs typeface="Arial"/>
               </a:rPr>
-              <a:t>3×3</a:t>
+              <a:t>C2</a:t>
             </a:r>
           </a:p>
         </p:txBody>
       </p:sp>
       <p:sp>
         <p:nvSpPr>
-          <p:cNvPr id="28" name="">
-            <a:extLst xmlns:a="http://schemas.openxmlformats.org/drawingml/2006/main">
-              <a:ext uri="{FF2B5EF4-FFF2-40B4-BE49-F238E27FC236}">
-                <a16:creationId xmlns:a16="http://schemas.microsoft.com/office/drawing/2014/main" id="{9F866CDF-70CE-43E6-B8BC-90F579E413A0}"/>
-              </a:ext>
-            </a:extLst>
-          </p:cNvPr>
-          <p:cNvSpPr>
-            <a:spLocks xmlns:a="http://schemas.openxmlformats.org/drawingml/2006/main" noGrp="1"/>
-          </p:cNvSpPr>
-          <p:nvPr/>
-        </p:nvSpPr>
-        <p:spPr>
-          <a:xfrm xmlns:a="http://schemas.openxmlformats.org/drawingml/2006/main">
-            <a:off x="6172200" y="2647950"/>
-            <a:ext cx="819150" cy="28575"/>
-          </a:xfrm>
-          <a:prstGeom xmlns:a="http://schemas.openxmlformats.org/drawingml/2006/main" prst="rect">
-            <a:avLst/>
+          <p:cNvPr id="38" name="">
+            <a:extLst xmlns:a="http://schemas.openxmlformats.org/drawingml/2006/main">
+              <a:ext uri="{FF2B5EF4-FFF2-40B4-BE49-F238E27FC236}">
+                <a16:creationId xmlns:a16="http://schemas.microsoft.com/office/drawing/2014/main" id="{67086721-6ADE-4754-8FF8-281E325E8917}"/>
+              </a:ext>
+            </a:extLst>
+          </p:cNvPr>
+          <p:cNvSpPr>
+            <a:spLocks xmlns:a="http://schemas.openxmlformats.org/drawingml/2006/main" noGrp="1"/>
+          </p:cNvSpPr>
+          <p:nvPr/>
+        </p:nvSpPr>
+        <p:spPr>
+          <a:xfrm xmlns:a="http://schemas.openxmlformats.org/drawingml/2006/main">
+            <a:off x="895350" y="4171950"/>
+            <a:ext cx="590550" cy="590550"/>
+          </a:xfrm>
+          <a:prstGeom xmlns:a="http://schemas.openxmlformats.org/drawingml/2006/main" prst="roundRect">
+            <a:avLst>
+              <a:gd name="adj" fmla="val 11290"/>
+            </a:avLst>
           </a:prstGeom>
           <a:solidFill xmlns:a="http://schemas.openxmlformats.org/drawingml/2006/main">
-            <a:srgbClr val="0F9D8A"/>
+            <a:srgbClr val="E7F7F4"/>
           </a:solidFill>
           <a:ln xmlns:a="http://schemas.openxmlformats.org/drawingml/2006/main" w="9525">
             <a:solidFill>
-              <a:srgbClr val="0F9D8A"/>
+              <a:srgbClr val="E7F7F4"/>
             </a:solidFill>
             <a:prstDash val="solid"/>
           </a:ln>
@@ -16704,89 +17068,22 @@
       </p:sp>
       <p:sp>
         <p:nvSpPr>
-          <p:cNvPr id="29" name="">
-            <a:extLst xmlns:a="http://schemas.openxmlformats.org/drawingml/2006/main">
-              <a:ext uri="{FF2B5EF4-FFF2-40B4-BE49-F238E27FC236}">
-                <a16:creationId xmlns:a16="http://schemas.microsoft.com/office/drawing/2014/main" id="{8F978F98-F73C-4EA0-84D9-96C790282943}"/>
-              </a:ext>
-            </a:extLst>
-          </p:cNvPr>
-          <p:cNvSpPr>
-            <a:spLocks xmlns:a="http://schemas.openxmlformats.org/drawingml/2006/main" noGrp="1"/>
-          </p:cNvSpPr>
-          <p:nvPr/>
-        </p:nvSpPr>
-        <p:spPr>
-          <a:xfrm xmlns:a="http://schemas.openxmlformats.org/drawingml/2006/main">
-            <a:off x="6915150" y="2590800"/>
-            <a:ext cx="133350" cy="142875"/>
-          </a:xfrm>
-          <a:prstGeom xmlns:a="http://schemas.openxmlformats.org/drawingml/2006/main" prst="triangle">
-            <a:avLst/>
-          </a:prstGeom>
-          <a:solidFill xmlns:a="http://schemas.openxmlformats.org/drawingml/2006/main">
-            <a:srgbClr val="0F9D8A"/>
-          </a:solidFill>
-          <a:ln xmlns:a="http://schemas.openxmlformats.org/drawingml/2006/main" w="0">
-            <a:solidFill>
-              <a:srgbClr val="0F9D8A"/>
-            </a:solidFill>
-          </a:ln>
-        </p:spPr>
-      </p:sp>
-      <p:sp>
-        <p:nvSpPr>
-          <p:cNvPr id="30" name="">
-            <a:extLst xmlns:a="http://schemas.openxmlformats.org/drawingml/2006/main">
-              <a:ext uri="{FF2B5EF4-FFF2-40B4-BE49-F238E27FC236}">
-                <a16:creationId xmlns:a16="http://schemas.microsoft.com/office/drawing/2014/main" id="{D831A952-6D9E-4307-8E6C-A6CA080D967B}"/>
-              </a:ext>
-            </a:extLst>
-          </p:cNvPr>
-          <p:cNvSpPr>
-            <a:spLocks xmlns:a="http://schemas.openxmlformats.org/drawingml/2006/main" noGrp="1"/>
-          </p:cNvSpPr>
-          <p:nvPr/>
-        </p:nvSpPr>
-        <p:spPr>
-          <a:xfrm xmlns:a="http://schemas.openxmlformats.org/drawingml/2006/main">
-            <a:off x="7181850" y="2266950"/>
-            <a:ext cx="781050" cy="781050"/>
-          </a:xfrm>
-          <a:prstGeom xmlns:a="http://schemas.openxmlformats.org/drawingml/2006/main" prst="roundRect">
-            <a:avLst>
-              <a:gd name="adj" fmla="val 9756"/>
-            </a:avLst>
-          </a:prstGeom>
-          <a:solidFill xmlns:a="http://schemas.openxmlformats.org/drawingml/2006/main">
-            <a:srgbClr val="EAF2FF"/>
-          </a:solidFill>
-          <a:ln xmlns:a="http://schemas.openxmlformats.org/drawingml/2006/main" w="9525">
-            <a:solidFill>
-              <a:srgbClr val="EAF2FF"/>
-            </a:solidFill>
-            <a:prstDash val="solid"/>
-          </a:ln>
-        </p:spPr>
-      </p:sp>
-      <p:sp>
-        <p:nvSpPr>
-          <p:cNvPr id="31" name="">
-            <a:extLst xmlns:a="http://schemas.openxmlformats.org/drawingml/2006/main">
-              <a:ext uri="{FF2B5EF4-FFF2-40B4-BE49-F238E27FC236}">
-                <a16:creationId xmlns:a16="http://schemas.microsoft.com/office/drawing/2014/main" id="{3F3363A6-3D4C-4691-9463-56F0C4F1D131}"/>
-              </a:ext>
-            </a:extLst>
-          </p:cNvPr>
-          <p:cNvSpPr>
-            <a:spLocks xmlns:a="http://schemas.openxmlformats.org/drawingml/2006/main" noGrp="1"/>
-          </p:cNvSpPr>
-          <p:nvPr/>
-        </p:nvSpPr>
-        <p:spPr>
-          <a:xfrm xmlns:a="http://schemas.openxmlformats.org/drawingml/2006/main">
-            <a:off x="7258050" y="2438400"/>
-            <a:ext cx="628650" cy="19050"/>
+          <p:cNvPr id="39" name="">
+            <a:extLst xmlns:a="http://schemas.openxmlformats.org/drawingml/2006/main">
+              <a:ext uri="{FF2B5EF4-FFF2-40B4-BE49-F238E27FC236}">
+                <a16:creationId xmlns:a16="http://schemas.microsoft.com/office/drawing/2014/main" id="{3CC2BD64-310B-4798-8B5C-FE61DA6748DF}"/>
+              </a:ext>
+            </a:extLst>
+          </p:cNvPr>
+          <p:cNvSpPr>
+            <a:spLocks xmlns:a="http://schemas.openxmlformats.org/drawingml/2006/main" noGrp="1"/>
+          </p:cNvSpPr>
+          <p:nvPr/>
+        </p:nvSpPr>
+        <p:spPr>
+          <a:xfrm xmlns:a="http://schemas.openxmlformats.org/drawingml/2006/main">
+            <a:off x="971550" y="4333875"/>
+            <a:ext cx="438150" cy="19050"/>
           </a:xfrm>
           <a:prstGeom xmlns:a="http://schemas.openxmlformats.org/drawingml/2006/main" prst="rect">
             <a:avLst/>
@@ -16804,22 +17101,22 @@
       </p:sp>
       <p:sp>
         <p:nvSpPr>
-          <p:cNvPr id="32" name="">
-            <a:extLst xmlns:a="http://schemas.openxmlformats.org/drawingml/2006/main">
-              <a:ext uri="{FF2B5EF4-FFF2-40B4-BE49-F238E27FC236}">
-                <a16:creationId xmlns:a16="http://schemas.microsoft.com/office/drawing/2014/main" id="{E423236C-A97C-4BE9-9ABB-3149E64E04D8}"/>
-              </a:ext>
-            </a:extLst>
-          </p:cNvPr>
-          <p:cNvSpPr>
-            <a:spLocks xmlns:a="http://schemas.openxmlformats.org/drawingml/2006/main" noGrp="1"/>
-          </p:cNvSpPr>
-          <p:nvPr/>
-        </p:nvSpPr>
-        <p:spPr>
-          <a:xfrm xmlns:a="http://schemas.openxmlformats.org/drawingml/2006/main">
-            <a:off x="7258050" y="2609850"/>
-            <a:ext cx="628650" cy="19050"/>
+          <p:cNvPr id="40" name="">
+            <a:extLst xmlns:a="http://schemas.openxmlformats.org/drawingml/2006/main">
+              <a:ext uri="{FF2B5EF4-FFF2-40B4-BE49-F238E27FC236}">
+                <a16:creationId xmlns:a16="http://schemas.microsoft.com/office/drawing/2014/main" id="{E31BA256-73D5-4300-A362-1F3D1D8AFE57}"/>
+              </a:ext>
+            </a:extLst>
+          </p:cNvPr>
+          <p:cNvSpPr>
+            <a:spLocks xmlns:a="http://schemas.openxmlformats.org/drawingml/2006/main" noGrp="1"/>
+          </p:cNvSpPr>
+          <p:nvPr/>
+        </p:nvSpPr>
+        <p:spPr>
+          <a:xfrm xmlns:a="http://schemas.openxmlformats.org/drawingml/2006/main">
+            <a:off x="971550" y="4467225"/>
+            <a:ext cx="438150" cy="19050"/>
           </a:xfrm>
           <a:prstGeom xmlns:a="http://schemas.openxmlformats.org/drawingml/2006/main" prst="rect">
             <a:avLst/>
@@ -16837,22 +17134,22 @@
       </p:sp>
       <p:sp>
         <p:nvSpPr>
-          <p:cNvPr id="33" name="">
-            <a:extLst xmlns:a="http://schemas.openxmlformats.org/drawingml/2006/main">
-              <a:ext uri="{FF2B5EF4-FFF2-40B4-BE49-F238E27FC236}">
-                <a16:creationId xmlns:a16="http://schemas.microsoft.com/office/drawing/2014/main" id="{0E44D4EF-F0E2-41DE-93D8-1A7E96378752}"/>
-              </a:ext>
-            </a:extLst>
-          </p:cNvPr>
-          <p:cNvSpPr>
-            <a:spLocks xmlns:a="http://schemas.openxmlformats.org/drawingml/2006/main" noGrp="1"/>
-          </p:cNvSpPr>
-          <p:nvPr/>
-        </p:nvSpPr>
-        <p:spPr>
-          <a:xfrm xmlns:a="http://schemas.openxmlformats.org/drawingml/2006/main">
-            <a:off x="7258050" y="2781300"/>
-            <a:ext cx="628650" cy="19050"/>
+          <p:cNvPr id="41" name="">
+            <a:extLst xmlns:a="http://schemas.openxmlformats.org/drawingml/2006/main">
+              <a:ext uri="{FF2B5EF4-FFF2-40B4-BE49-F238E27FC236}">
+                <a16:creationId xmlns:a16="http://schemas.microsoft.com/office/drawing/2014/main" id="{1F77474D-C7FC-436E-95F5-389347EF1398}"/>
+              </a:ext>
+            </a:extLst>
+          </p:cNvPr>
+          <p:cNvSpPr>
+            <a:spLocks xmlns:a="http://schemas.openxmlformats.org/drawingml/2006/main" noGrp="1"/>
+          </p:cNvSpPr>
+          <p:nvPr/>
+        </p:nvSpPr>
+        <p:spPr>
+          <a:xfrm xmlns:a="http://schemas.openxmlformats.org/drawingml/2006/main">
+            <a:off x="971550" y="4600575"/>
+            <a:ext cx="438150" cy="19050"/>
           </a:xfrm>
           <a:prstGeom xmlns:a="http://schemas.openxmlformats.org/drawingml/2006/main" prst="rect">
             <a:avLst/>
@@ -16870,22 +17167,22 @@
       </p:sp>
       <p:sp>
         <p:nvSpPr>
-          <p:cNvPr id="34" name="">
-            <a:extLst xmlns:a="http://schemas.openxmlformats.org/drawingml/2006/main">
-              <a:ext uri="{FF2B5EF4-FFF2-40B4-BE49-F238E27FC236}">
-                <a16:creationId xmlns:a16="http://schemas.microsoft.com/office/drawing/2014/main" id="{E392D215-3461-43C6-9F7E-8D8E9FAC88EF}"/>
-              </a:ext>
-            </a:extLst>
-          </p:cNvPr>
-          <p:cNvSpPr>
-            <a:spLocks xmlns:a="http://schemas.openxmlformats.org/drawingml/2006/main" noGrp="1"/>
-          </p:cNvSpPr>
-          <p:nvPr/>
-        </p:nvSpPr>
-        <p:spPr>
-          <a:xfrm xmlns:a="http://schemas.openxmlformats.org/drawingml/2006/main">
-            <a:off x="7181850" y="3133725"/>
-            <a:ext cx="781050" cy="228600"/>
+          <p:cNvPr id="42" name="">
+            <a:extLst xmlns:a="http://schemas.openxmlformats.org/drawingml/2006/main">
+              <a:ext uri="{FF2B5EF4-FFF2-40B4-BE49-F238E27FC236}">
+                <a16:creationId xmlns:a16="http://schemas.microsoft.com/office/drawing/2014/main" id="{5BD3DAC5-28E5-4108-B68C-FE233E2B84A7}"/>
+              </a:ext>
+            </a:extLst>
+          </p:cNvPr>
+          <p:cNvSpPr>
+            <a:spLocks xmlns:a="http://schemas.openxmlformats.org/drawingml/2006/main" noGrp="1"/>
+          </p:cNvSpPr>
+          <p:nvPr/>
+        </p:nvSpPr>
+        <p:spPr>
+          <a:xfrm xmlns:a="http://schemas.openxmlformats.org/drawingml/2006/main">
+            <a:off x="895350" y="4838700"/>
+            <a:ext cx="590550" cy="190500"/>
           </a:xfrm>
           <a:prstGeom xmlns:a="http://schemas.openxmlformats.org/drawingml/2006/main" prst="rect">
             <a:avLst/>
@@ -16931,41 +17228,106 @@
                 <a:ea typeface="Arial"/>
                 <a:cs typeface="Arial"/>
               </a:rPr>
-              <a:t>C1</a:t>
+              <a:t>C3</a:t>
             </a:r>
           </a:p>
         </p:txBody>
       </p:sp>
       <p:sp>
         <p:nvSpPr>
-          <p:cNvPr id="35" name="">
-            <a:extLst xmlns:a="http://schemas.openxmlformats.org/drawingml/2006/main">
-              <a:ext uri="{FF2B5EF4-FFF2-40B4-BE49-F238E27FC236}">
-                <a16:creationId xmlns:a16="http://schemas.microsoft.com/office/drawing/2014/main" id="{AF529406-FF65-440B-88C0-93688E0F9CA6}"/>
-              </a:ext>
-            </a:extLst>
-          </p:cNvPr>
-          <p:cNvSpPr>
-            <a:spLocks xmlns:a="http://schemas.openxmlformats.org/drawingml/2006/main" noGrp="1"/>
-          </p:cNvSpPr>
-          <p:nvPr/>
-        </p:nvSpPr>
-        <p:spPr>
-          <a:xfrm xmlns:a="http://schemas.openxmlformats.org/drawingml/2006/main">
-            <a:off x="8172450" y="2266950"/>
-            <a:ext cx="781050" cy="781050"/>
+          <p:cNvPr id="43" name="">
+            <a:extLst xmlns:a="http://schemas.openxmlformats.org/drawingml/2006/main">
+              <a:ext uri="{FF2B5EF4-FFF2-40B4-BE49-F238E27FC236}">
+                <a16:creationId xmlns:a16="http://schemas.microsoft.com/office/drawing/2014/main" id="{FE536AF9-67B6-455E-8024-9C97B5767F07}"/>
+              </a:ext>
+            </a:extLst>
+          </p:cNvPr>
+          <p:cNvSpPr>
+            <a:spLocks xmlns:a="http://schemas.openxmlformats.org/drawingml/2006/main" noGrp="1"/>
+          </p:cNvSpPr>
+          <p:nvPr/>
+        </p:nvSpPr>
+        <p:spPr>
+          <a:xfrm xmlns:a="http://schemas.openxmlformats.org/drawingml/2006/main">
+            <a:off x="1619250" y="4467225"/>
+            <a:ext cx="723900" cy="28575"/>
+          </a:xfrm>
+          <a:prstGeom xmlns:a="http://schemas.openxmlformats.org/drawingml/2006/main" prst="rect">
+            <a:avLst/>
+          </a:prstGeom>
+          <a:solidFill xmlns:a="http://schemas.openxmlformats.org/drawingml/2006/main">
+            <a:srgbClr val="0F9D8A"/>
+          </a:solidFill>
+          <a:ln xmlns:a="http://schemas.openxmlformats.org/drawingml/2006/main" w="9525">
+            <a:solidFill>
+              <a:srgbClr val="0F9D8A"/>
+            </a:solidFill>
+            <a:prstDash val="solid"/>
+          </a:ln>
+        </p:spPr>
+      </p:sp>
+      <p:sp>
+        <p:nvSpPr>
+          <p:cNvPr id="44" name="">
+            <a:extLst xmlns:a="http://schemas.openxmlformats.org/drawingml/2006/main">
+              <a:ext uri="{FF2B5EF4-FFF2-40B4-BE49-F238E27FC236}">
+                <a16:creationId xmlns:a16="http://schemas.microsoft.com/office/drawing/2014/main" id="{59431038-3CC4-4219-A2A3-92D4AB2F3F38}"/>
+              </a:ext>
+            </a:extLst>
+          </p:cNvPr>
+          <p:cNvSpPr>
+            <a:spLocks xmlns:a="http://schemas.openxmlformats.org/drawingml/2006/main" noGrp="1"/>
+          </p:cNvSpPr>
+          <p:nvPr/>
+        </p:nvSpPr>
+        <p:spPr>
+          <a:xfrm xmlns:a="http://schemas.openxmlformats.org/drawingml/2006/main">
+            <a:off x="2266950" y="4410075"/>
+            <a:ext cx="133350" cy="142875"/>
+          </a:xfrm>
+          <a:prstGeom xmlns:a="http://schemas.openxmlformats.org/drawingml/2006/main" prst="triangle">
+            <a:avLst/>
+          </a:prstGeom>
+          <a:solidFill xmlns:a="http://schemas.openxmlformats.org/drawingml/2006/main">
+            <a:srgbClr val="0F9D8A"/>
+          </a:solidFill>
+          <a:ln xmlns:a="http://schemas.openxmlformats.org/drawingml/2006/main" w="0">
+            <a:solidFill>
+              <a:srgbClr val="0F9D8A"/>
+            </a:solidFill>
+          </a:ln>
+        </p:spPr>
+      </p:sp>
+      <p:sp>
+        <p:nvSpPr>
+          <p:cNvPr id="45" name="">
+            <a:extLst xmlns:a="http://schemas.openxmlformats.org/drawingml/2006/main">
+              <a:ext uri="{FF2B5EF4-FFF2-40B4-BE49-F238E27FC236}">
+                <a16:creationId xmlns:a16="http://schemas.microsoft.com/office/drawing/2014/main" id="{FCFDEDFA-B7CA-41F6-B3F6-DBE3C91CDCDF}"/>
+              </a:ext>
+            </a:extLst>
+          </p:cNvPr>
+          <p:cNvSpPr>
+            <a:spLocks xmlns:a="http://schemas.openxmlformats.org/drawingml/2006/main" noGrp="1"/>
+          </p:cNvSpPr>
+          <p:nvPr/>
+        </p:nvSpPr>
+        <p:spPr>
+          <a:xfrm xmlns:a="http://schemas.openxmlformats.org/drawingml/2006/main">
+            <a:off x="2514600" y="4257675"/>
+            <a:ext cx="685800" cy="419100"/>
           </a:xfrm>
           <a:prstGeom xmlns:a="http://schemas.openxmlformats.org/drawingml/2006/main" prst="roundRect">
             <a:avLst>
-              <a:gd name="adj" fmla="val 9756"/>
+              <a:gd name="adj" fmla="val 15909"/>
             </a:avLst>
           </a:prstGeom>
           <a:solidFill xmlns:a="http://schemas.openxmlformats.org/drawingml/2006/main">
-            <a:srgbClr val="F0EAFE"/>
+            <a:srgbClr val="0F9D8A"/>
           </a:solidFill>
           <a:ln xmlns:a="http://schemas.openxmlformats.org/drawingml/2006/main" w="9525">
             <a:solidFill>
-              <a:srgbClr val="F0EAFE"/>
+              <a:srgbClr val="0F9D8A"/>
             </a:solidFill>
             <a:prstDash val="solid"/>
           </a:ln>
@@ -16973,121 +17335,22 @@
       </p:sp>
       <p:sp>
         <p:nvSpPr>
-          <p:cNvPr id="36" name="">
-            <a:extLst xmlns:a="http://schemas.openxmlformats.org/drawingml/2006/main">
-              <a:ext uri="{FF2B5EF4-FFF2-40B4-BE49-F238E27FC236}">
-                <a16:creationId xmlns:a16="http://schemas.microsoft.com/office/drawing/2014/main" id="{58DCF6F6-5DA1-4CA6-911F-A82B2306496B}"/>
-              </a:ext>
-            </a:extLst>
-          </p:cNvPr>
-          <p:cNvSpPr>
-            <a:spLocks xmlns:a="http://schemas.openxmlformats.org/drawingml/2006/main" noGrp="1"/>
-          </p:cNvSpPr>
-          <p:nvPr/>
-        </p:nvSpPr>
-        <p:spPr>
-          <a:xfrm xmlns:a="http://schemas.openxmlformats.org/drawingml/2006/main">
-            <a:off x="8248650" y="2438400"/>
-            <a:ext cx="628650" cy="19050"/>
-          </a:xfrm>
-          <a:prstGeom xmlns:a="http://schemas.openxmlformats.org/drawingml/2006/main" prst="rect">
-            <a:avLst/>
-          </a:prstGeom>
-          <a:solidFill xmlns:a="http://schemas.openxmlformats.org/drawingml/2006/main">
-            <a:srgbClr val="FFFFFF"/>
-          </a:solidFill>
-          <a:ln xmlns:a="http://schemas.openxmlformats.org/drawingml/2006/main" w="9525">
-            <a:solidFill>
-              <a:srgbClr val="FFFFFF"/>
-            </a:solidFill>
-            <a:prstDash val="solid"/>
-          </a:ln>
-        </p:spPr>
-      </p:sp>
-      <p:sp>
-        <p:nvSpPr>
-          <p:cNvPr id="37" name="">
-            <a:extLst xmlns:a="http://schemas.openxmlformats.org/drawingml/2006/main">
-              <a:ext uri="{FF2B5EF4-FFF2-40B4-BE49-F238E27FC236}">
-                <a16:creationId xmlns:a16="http://schemas.microsoft.com/office/drawing/2014/main" id="{798772E0-E23D-4596-80E9-54828C2ED5C6}"/>
-              </a:ext>
-            </a:extLst>
-          </p:cNvPr>
-          <p:cNvSpPr>
-            <a:spLocks xmlns:a="http://schemas.openxmlformats.org/drawingml/2006/main" noGrp="1"/>
-          </p:cNvSpPr>
-          <p:nvPr/>
-        </p:nvSpPr>
-        <p:spPr>
-          <a:xfrm xmlns:a="http://schemas.openxmlformats.org/drawingml/2006/main">
-            <a:off x="8248650" y="2609850"/>
-            <a:ext cx="628650" cy="19050"/>
-          </a:xfrm>
-          <a:prstGeom xmlns:a="http://schemas.openxmlformats.org/drawingml/2006/main" prst="rect">
-            <a:avLst/>
-          </a:prstGeom>
-          <a:solidFill xmlns:a="http://schemas.openxmlformats.org/drawingml/2006/main">
-            <a:srgbClr val="FFFFFF"/>
-          </a:solidFill>
-          <a:ln xmlns:a="http://schemas.openxmlformats.org/drawingml/2006/main" w="9525">
-            <a:solidFill>
-              <a:srgbClr val="FFFFFF"/>
-            </a:solidFill>
-            <a:prstDash val="solid"/>
-          </a:ln>
-        </p:spPr>
-      </p:sp>
-      <p:sp>
-        <p:nvSpPr>
-          <p:cNvPr id="38" name="">
-            <a:extLst xmlns:a="http://schemas.openxmlformats.org/drawingml/2006/main">
-              <a:ext uri="{FF2B5EF4-FFF2-40B4-BE49-F238E27FC236}">
-                <a16:creationId xmlns:a16="http://schemas.microsoft.com/office/drawing/2014/main" id="{14C05441-9A45-41F9-9920-CD43FFF008DA}"/>
-              </a:ext>
-            </a:extLst>
-          </p:cNvPr>
-          <p:cNvSpPr>
-            <a:spLocks xmlns:a="http://schemas.openxmlformats.org/drawingml/2006/main" noGrp="1"/>
-          </p:cNvSpPr>
-          <p:nvPr/>
-        </p:nvSpPr>
-        <p:spPr>
-          <a:xfrm xmlns:a="http://schemas.openxmlformats.org/drawingml/2006/main">
-            <a:off x="8248650" y="2781300"/>
-            <a:ext cx="628650" cy="19050"/>
-          </a:xfrm>
-          <a:prstGeom xmlns:a="http://schemas.openxmlformats.org/drawingml/2006/main" prst="rect">
-            <a:avLst/>
-          </a:prstGeom>
-          <a:solidFill xmlns:a="http://schemas.openxmlformats.org/drawingml/2006/main">
-            <a:srgbClr val="FFFFFF"/>
-          </a:solidFill>
-          <a:ln xmlns:a="http://schemas.openxmlformats.org/drawingml/2006/main" w="9525">
-            <a:solidFill>
-              <a:srgbClr val="FFFFFF"/>
-            </a:solidFill>
-            <a:prstDash val="solid"/>
-          </a:ln>
-        </p:spPr>
-      </p:sp>
-      <p:sp>
-        <p:nvSpPr>
-          <p:cNvPr id="39" name="">
-            <a:extLst xmlns:a="http://schemas.openxmlformats.org/drawingml/2006/main">
-              <a:ext uri="{FF2B5EF4-FFF2-40B4-BE49-F238E27FC236}">
-                <a16:creationId xmlns:a16="http://schemas.microsoft.com/office/drawing/2014/main" id="{B2EB7610-C557-4A5E-9F55-5F00EDEB9D55}"/>
-              </a:ext>
-            </a:extLst>
-          </p:cNvPr>
-          <p:cNvSpPr>
-            <a:spLocks xmlns:a="http://schemas.openxmlformats.org/drawingml/2006/main" noGrp="1"/>
-          </p:cNvSpPr>
-          <p:nvPr/>
-        </p:nvSpPr>
-        <p:spPr>
-          <a:xfrm xmlns:a="http://schemas.openxmlformats.org/drawingml/2006/main">
-            <a:off x="8172450" y="3133725"/>
-            <a:ext cx="781050" cy="228600"/>
+          <p:cNvPr id="46" name="">
+            <a:extLst xmlns:a="http://schemas.openxmlformats.org/drawingml/2006/main">
+              <a:ext uri="{FF2B5EF4-FFF2-40B4-BE49-F238E27FC236}">
+                <a16:creationId xmlns:a16="http://schemas.microsoft.com/office/drawing/2014/main" id="{B6123613-6074-4053-9E58-8AE9A038BC20}"/>
+              </a:ext>
+            </a:extLst>
+          </p:cNvPr>
+          <p:cNvSpPr>
+            <a:spLocks xmlns:a="http://schemas.openxmlformats.org/drawingml/2006/main" noGrp="1"/>
+          </p:cNvSpPr>
+          <p:nvPr/>
+        </p:nvSpPr>
+        <p:spPr>
+          <a:xfrm xmlns:a="http://schemas.openxmlformats.org/drawingml/2006/main">
+            <a:off x="2514600" y="4352925"/>
+            <a:ext cx="685800" cy="209550"/>
           </a:xfrm>
           <a:prstGeom xmlns:a="http://schemas.openxmlformats.org/drawingml/2006/main" prst="rect">
             <a:avLst/>
@@ -17133,33 +17396,98 @@
                 <a:ea typeface="Arial"/>
                 <a:cs typeface="Arial"/>
               </a:rPr>
-              <a:t>C2</a:t>
+              <a:t>3×3</a:t>
             </a:r>
           </a:p>
         </p:txBody>
       </p:sp>
       <p:sp>
         <p:nvSpPr>
-          <p:cNvPr id="40" name="">
-            <a:extLst xmlns:a="http://schemas.openxmlformats.org/drawingml/2006/main">
-              <a:ext uri="{FF2B5EF4-FFF2-40B4-BE49-F238E27FC236}">
-                <a16:creationId xmlns:a16="http://schemas.microsoft.com/office/drawing/2014/main" id="{62E898A3-9A14-4F1A-815D-EE6B89E38B6A}"/>
-              </a:ext>
-            </a:extLst>
-          </p:cNvPr>
-          <p:cNvSpPr>
-            <a:spLocks xmlns:a="http://schemas.openxmlformats.org/drawingml/2006/main" noGrp="1"/>
-          </p:cNvSpPr>
-          <p:nvPr/>
-        </p:nvSpPr>
-        <p:spPr>
-          <a:xfrm xmlns:a="http://schemas.openxmlformats.org/drawingml/2006/main">
-            <a:off x="9163050" y="2266950"/>
-            <a:ext cx="781050" cy="781050"/>
+          <p:cNvPr id="47" name="">
+            <a:extLst xmlns:a="http://schemas.openxmlformats.org/drawingml/2006/main">
+              <a:ext uri="{FF2B5EF4-FFF2-40B4-BE49-F238E27FC236}">
+                <a16:creationId xmlns:a16="http://schemas.microsoft.com/office/drawing/2014/main" id="{B0078606-695F-4B11-BBEF-21219DAE85FD}"/>
+              </a:ext>
+            </a:extLst>
+          </p:cNvPr>
+          <p:cNvSpPr>
+            <a:spLocks xmlns:a="http://schemas.openxmlformats.org/drawingml/2006/main" noGrp="1"/>
+          </p:cNvSpPr>
+          <p:nvPr/>
+        </p:nvSpPr>
+        <p:spPr>
+          <a:xfrm xmlns:a="http://schemas.openxmlformats.org/drawingml/2006/main">
+            <a:off x="3352800" y="4467225"/>
+            <a:ext cx="723900" cy="28575"/>
+          </a:xfrm>
+          <a:prstGeom xmlns:a="http://schemas.openxmlformats.org/drawingml/2006/main" prst="rect">
+            <a:avLst/>
+          </a:prstGeom>
+          <a:solidFill xmlns:a="http://schemas.openxmlformats.org/drawingml/2006/main">
+            <a:srgbClr val="0F9D8A"/>
+          </a:solidFill>
+          <a:ln xmlns:a="http://schemas.openxmlformats.org/drawingml/2006/main" w="9525">
+            <a:solidFill>
+              <a:srgbClr val="0F9D8A"/>
+            </a:solidFill>
+            <a:prstDash val="solid"/>
+          </a:ln>
+        </p:spPr>
+      </p:sp>
+      <p:sp>
+        <p:nvSpPr>
+          <p:cNvPr id="48" name="">
+            <a:extLst xmlns:a="http://schemas.openxmlformats.org/drawingml/2006/main">
+              <a:ext uri="{FF2B5EF4-FFF2-40B4-BE49-F238E27FC236}">
+                <a16:creationId xmlns:a16="http://schemas.microsoft.com/office/drawing/2014/main" id="{4230B249-7E41-4BF6-A15C-1CD0950FD144}"/>
+              </a:ext>
+            </a:extLst>
+          </p:cNvPr>
+          <p:cNvSpPr>
+            <a:spLocks xmlns:a="http://schemas.openxmlformats.org/drawingml/2006/main" noGrp="1"/>
+          </p:cNvSpPr>
+          <p:nvPr/>
+        </p:nvSpPr>
+        <p:spPr>
+          <a:xfrm xmlns:a="http://schemas.openxmlformats.org/drawingml/2006/main">
+            <a:off x="4000500" y="4410075"/>
+            <a:ext cx="133350" cy="142875"/>
+          </a:xfrm>
+          <a:prstGeom xmlns:a="http://schemas.openxmlformats.org/drawingml/2006/main" prst="triangle">
+            <a:avLst/>
+          </a:prstGeom>
+          <a:solidFill xmlns:a="http://schemas.openxmlformats.org/drawingml/2006/main">
+            <a:srgbClr val="0F9D8A"/>
+          </a:solidFill>
+          <a:ln xmlns:a="http://schemas.openxmlformats.org/drawingml/2006/main" w="0">
+            <a:solidFill>
+              <a:srgbClr val="0F9D8A"/>
+            </a:solidFill>
+          </a:ln>
+        </p:spPr>
+      </p:sp>
+      <p:sp>
+        <p:nvSpPr>
+          <p:cNvPr id="49" name="">
+            <a:extLst xmlns:a="http://schemas.openxmlformats.org/drawingml/2006/main">
+              <a:ext uri="{FF2B5EF4-FFF2-40B4-BE49-F238E27FC236}">
+                <a16:creationId xmlns:a16="http://schemas.microsoft.com/office/drawing/2014/main" id="{40380594-58BE-49DA-979A-86099BA1E2C7}"/>
+              </a:ext>
+            </a:extLst>
+          </p:cNvPr>
+          <p:cNvSpPr>
+            <a:spLocks xmlns:a="http://schemas.openxmlformats.org/drawingml/2006/main" noGrp="1"/>
+          </p:cNvSpPr>
+          <p:nvPr/>
+        </p:nvSpPr>
+        <p:spPr>
+          <a:xfrm xmlns:a="http://schemas.openxmlformats.org/drawingml/2006/main">
+            <a:off x="4267200" y="4171950"/>
+            <a:ext cx="590550" cy="590550"/>
           </a:xfrm>
           <a:prstGeom xmlns:a="http://schemas.openxmlformats.org/drawingml/2006/main" prst="roundRect">
             <a:avLst>
-              <a:gd name="adj" fmla="val 9756"/>
+              <a:gd name="adj" fmla="val 11290"/>
             </a:avLst>
           </a:prstGeom>
           <a:solidFill xmlns:a="http://schemas.openxmlformats.org/drawingml/2006/main">
@@ -17175,22 +17503,22 @@
       </p:sp>
       <p:sp>
         <p:nvSpPr>
-          <p:cNvPr id="41" name="">
-            <a:extLst xmlns:a="http://schemas.openxmlformats.org/drawingml/2006/main">
-              <a:ext uri="{FF2B5EF4-FFF2-40B4-BE49-F238E27FC236}">
-                <a16:creationId xmlns:a16="http://schemas.microsoft.com/office/drawing/2014/main" id="{731704D4-54AC-483A-B8D8-D9A8DCB747C4}"/>
-              </a:ext>
-            </a:extLst>
-          </p:cNvPr>
-          <p:cNvSpPr>
-            <a:spLocks xmlns:a="http://schemas.openxmlformats.org/drawingml/2006/main" noGrp="1"/>
-          </p:cNvSpPr>
-          <p:nvPr/>
-        </p:nvSpPr>
-        <p:spPr>
-          <a:xfrm xmlns:a="http://schemas.openxmlformats.org/drawingml/2006/main">
-            <a:off x="9239250" y="2438400"/>
-            <a:ext cx="628650" cy="19050"/>
+          <p:cNvPr id="50" name="">
+            <a:extLst xmlns:a="http://schemas.openxmlformats.org/drawingml/2006/main">
+              <a:ext uri="{FF2B5EF4-FFF2-40B4-BE49-F238E27FC236}">
+                <a16:creationId xmlns:a16="http://schemas.microsoft.com/office/drawing/2014/main" id="{A46A7A11-EB66-4041-9030-711E445BF228}"/>
+              </a:ext>
+            </a:extLst>
+          </p:cNvPr>
+          <p:cNvSpPr>
+            <a:spLocks xmlns:a="http://schemas.openxmlformats.org/drawingml/2006/main" noGrp="1"/>
+          </p:cNvSpPr>
+          <p:nvPr/>
+        </p:nvSpPr>
+        <p:spPr>
+          <a:xfrm xmlns:a="http://schemas.openxmlformats.org/drawingml/2006/main">
+            <a:off x="4343400" y="4333875"/>
+            <a:ext cx="438150" cy="19050"/>
           </a:xfrm>
           <a:prstGeom xmlns:a="http://schemas.openxmlformats.org/drawingml/2006/main" prst="rect">
             <a:avLst/>
@@ -17208,22 +17536,22 @@
       </p:sp>
       <p:sp>
         <p:nvSpPr>
-          <p:cNvPr id="42" name="">
-            <a:extLst xmlns:a="http://schemas.openxmlformats.org/drawingml/2006/main">
-              <a:ext uri="{FF2B5EF4-FFF2-40B4-BE49-F238E27FC236}">
-                <a16:creationId xmlns:a16="http://schemas.microsoft.com/office/drawing/2014/main" id="{3B42AF93-8A07-4DEA-967F-94EA4EF03F40}"/>
-              </a:ext>
-            </a:extLst>
-          </p:cNvPr>
-          <p:cNvSpPr>
-            <a:spLocks xmlns:a="http://schemas.openxmlformats.org/drawingml/2006/main" noGrp="1"/>
-          </p:cNvSpPr>
-          <p:nvPr/>
-        </p:nvSpPr>
-        <p:spPr>
-          <a:xfrm xmlns:a="http://schemas.openxmlformats.org/drawingml/2006/main">
-            <a:off x="9239250" y="2609850"/>
-            <a:ext cx="628650" cy="19050"/>
+          <p:cNvPr id="51" name="">
+            <a:extLst xmlns:a="http://schemas.openxmlformats.org/drawingml/2006/main">
+              <a:ext uri="{FF2B5EF4-FFF2-40B4-BE49-F238E27FC236}">
+                <a16:creationId xmlns:a16="http://schemas.microsoft.com/office/drawing/2014/main" id="{695370CD-BB5D-493A-AF8E-53ED56E2A096}"/>
+              </a:ext>
+            </a:extLst>
+          </p:cNvPr>
+          <p:cNvSpPr>
+            <a:spLocks xmlns:a="http://schemas.openxmlformats.org/drawingml/2006/main" noGrp="1"/>
+          </p:cNvSpPr>
+          <p:nvPr/>
+        </p:nvSpPr>
+        <p:spPr>
+          <a:xfrm xmlns:a="http://schemas.openxmlformats.org/drawingml/2006/main">
+            <a:off x="4343400" y="4467225"/>
+            <a:ext cx="438150" cy="19050"/>
           </a:xfrm>
           <a:prstGeom xmlns:a="http://schemas.openxmlformats.org/drawingml/2006/main" prst="rect">
             <a:avLst/>
@@ -17241,22 +17569,22 @@
       </p:sp>
       <p:sp>
         <p:nvSpPr>
-          <p:cNvPr id="43" name="">
-            <a:extLst xmlns:a="http://schemas.openxmlformats.org/drawingml/2006/main">
-              <a:ext uri="{FF2B5EF4-FFF2-40B4-BE49-F238E27FC236}">
-                <a16:creationId xmlns:a16="http://schemas.microsoft.com/office/drawing/2014/main" id="{2BE81DE2-5757-4064-8931-A7AC6FD8B8D6}"/>
-              </a:ext>
-            </a:extLst>
-          </p:cNvPr>
-          <p:cNvSpPr>
-            <a:spLocks xmlns:a="http://schemas.openxmlformats.org/drawingml/2006/main" noGrp="1"/>
-          </p:cNvSpPr>
-          <p:nvPr/>
-        </p:nvSpPr>
-        <p:spPr>
-          <a:xfrm xmlns:a="http://schemas.openxmlformats.org/drawingml/2006/main">
-            <a:off x="9239250" y="2781300"/>
-            <a:ext cx="628650" cy="19050"/>
+          <p:cNvPr id="52" name="">
+            <a:extLst xmlns:a="http://schemas.openxmlformats.org/drawingml/2006/main">
+              <a:ext uri="{FF2B5EF4-FFF2-40B4-BE49-F238E27FC236}">
+                <a16:creationId xmlns:a16="http://schemas.microsoft.com/office/drawing/2014/main" id="{9FE07E15-DD37-4768-9519-9893D576D62E}"/>
+              </a:ext>
+            </a:extLst>
+          </p:cNvPr>
+          <p:cNvSpPr>
+            <a:spLocks xmlns:a="http://schemas.openxmlformats.org/drawingml/2006/main" noGrp="1"/>
+          </p:cNvSpPr>
+          <p:nvPr/>
+        </p:nvSpPr>
+        <p:spPr>
+          <a:xfrm xmlns:a="http://schemas.openxmlformats.org/drawingml/2006/main">
+            <a:off x="4343400" y="4600575"/>
+            <a:ext cx="438150" cy="19050"/>
           </a:xfrm>
           <a:prstGeom xmlns:a="http://schemas.openxmlformats.org/drawingml/2006/main" prst="rect">
             <a:avLst/>
@@ -17274,22 +17602,22 @@
       </p:sp>
       <p:sp>
         <p:nvSpPr>
-          <p:cNvPr id="44" name="">
-            <a:extLst xmlns:a="http://schemas.openxmlformats.org/drawingml/2006/main">
-              <a:ext uri="{FF2B5EF4-FFF2-40B4-BE49-F238E27FC236}">
-                <a16:creationId xmlns:a16="http://schemas.microsoft.com/office/drawing/2014/main" id="{05B419FF-9E03-4D73-BD06-F60790A0EBCE}"/>
-              </a:ext>
-            </a:extLst>
-          </p:cNvPr>
-          <p:cNvSpPr>
-            <a:spLocks xmlns:a="http://schemas.openxmlformats.org/drawingml/2006/main" noGrp="1"/>
-          </p:cNvSpPr>
-          <p:nvPr/>
-        </p:nvSpPr>
-        <p:spPr>
-          <a:xfrm xmlns:a="http://schemas.openxmlformats.org/drawingml/2006/main">
-            <a:off x="9163050" y="3133725"/>
-            <a:ext cx="781050" cy="228600"/>
+          <p:cNvPr id="53" name="">
+            <a:extLst xmlns:a="http://schemas.openxmlformats.org/drawingml/2006/main">
+              <a:ext uri="{FF2B5EF4-FFF2-40B4-BE49-F238E27FC236}">
+                <a16:creationId xmlns:a16="http://schemas.microsoft.com/office/drawing/2014/main" id="{7111E83C-C04E-4953-ACC6-FFB8FB98CC56}"/>
+              </a:ext>
+            </a:extLst>
+          </p:cNvPr>
+          <p:cNvSpPr>
+            <a:spLocks xmlns:a="http://schemas.openxmlformats.org/drawingml/2006/main" noGrp="1"/>
+          </p:cNvSpPr>
+          <p:nvPr/>
+        </p:nvSpPr>
+        <p:spPr>
+          <a:xfrm xmlns:a="http://schemas.openxmlformats.org/drawingml/2006/main">
+            <a:off x="4267200" y="4838700"/>
+            <a:ext cx="590550" cy="190500"/>
           </a:xfrm>
           <a:prstGeom xmlns:a="http://schemas.openxmlformats.org/drawingml/2006/main" prst="rect">
             <a:avLst/>
@@ -17342,22 +17670,90 @@
       </p:sp>
       <p:sp>
         <p:nvSpPr>
-          <p:cNvPr id="45" name="">
-            <a:extLst xmlns:a="http://schemas.openxmlformats.org/drawingml/2006/main">
-              <a:ext uri="{FF2B5EF4-FFF2-40B4-BE49-F238E27FC236}">
-                <a16:creationId xmlns:a16="http://schemas.microsoft.com/office/drawing/2014/main" id="{C7786EBB-D805-4021-B525-39E189923E11}"/>
-              </a:ext>
-            </a:extLst>
-          </p:cNvPr>
-          <p:cNvSpPr>
-            <a:spLocks xmlns:a="http://schemas.openxmlformats.org/drawingml/2006/main" noGrp="1"/>
-          </p:cNvSpPr>
-          <p:nvPr/>
-        </p:nvSpPr>
-        <p:spPr>
-          <a:xfrm xmlns:a="http://schemas.openxmlformats.org/drawingml/2006/main">
-            <a:off x="723900" y="3924300"/>
-            <a:ext cx="10096500" cy="19050"/>
+          <p:cNvPr id="54" name="">
+            <a:extLst xmlns:a="http://schemas.openxmlformats.org/drawingml/2006/main">
+              <a:ext uri="{FF2B5EF4-FFF2-40B4-BE49-F238E27FC236}">
+                <a16:creationId xmlns:a16="http://schemas.microsoft.com/office/drawing/2014/main" id="{822F2814-F23E-43C7-879A-3D3AD5FFF31A}"/>
+              </a:ext>
+            </a:extLst>
+          </p:cNvPr>
+          <p:cNvSpPr>
+            <a:spLocks xmlns:a="http://schemas.openxmlformats.org/drawingml/2006/main" noGrp="1"/>
+          </p:cNvSpPr>
+          <p:nvPr/>
+        </p:nvSpPr>
+        <p:spPr>
+          <a:xfrm xmlns:a="http://schemas.openxmlformats.org/drawingml/2006/main">
+            <a:off x="723900" y="5238750"/>
+            <a:ext cx="4762500" cy="247650"/>
+          </a:xfrm>
+          <a:prstGeom xmlns:a="http://schemas.openxmlformats.org/drawingml/2006/main" prst="rect">
+            <a:avLst/>
+          </a:prstGeom>
+          <a:noFill xmlns:a="http://schemas.openxmlformats.org/drawingml/2006/main"/>
+          <a:ln xmlns:a="http://schemas.openxmlformats.org/drawingml/2006/main" w="0">
+            <a:noFill/>
+          </a:ln>
+        </p:spPr>
+        <p:txBody>
+          <a:bodyPr xmlns:a="http://schemas.openxmlformats.org/drawingml/2006/main">
+            <a:noAutofit/>
+          </a:bodyPr>
+          <a:lstStyle xmlns:a="http://schemas.openxmlformats.org/drawingml/2006/main">
+            <a:defPPr algn="ctr">
+              <a:defRPr sz="1200" b="0">
+                <a:solidFill>
+                  <a:srgbClr val="596273"/>
+                </a:solidFill>
+                <a:latin typeface="Arial"/>
+                <a:ea typeface="Arial"/>
+                <a:cs typeface="Arial"/>
+              </a:defRPr>
+            </a:defPPr>
+          </a:lstStyle>
+          <a:p xmlns:a="http://schemas.openxmlformats.org/drawingml/2006/main">
+            <a:pPr algn="ctr">
+              <a:defRPr sz="1200" b="0">
+                <a:solidFill>
+                  <a:srgbClr val="596273"/>
+                </a:solidFill>
+                <a:latin typeface="Arial"/>
+                <a:ea typeface="Arial"/>
+                <a:cs typeface="Arial"/>
+              </a:defRPr>
+            </a:pPr>
+            <a:r>
+              <a:rPr sz="1200" b="0">
+                <a:solidFill>
+                  <a:srgbClr val="596273"/>
+                </a:solidFill>
+                <a:latin typeface="Arial"/>
+                <a:ea typeface="Arial"/>
+                <a:cs typeface="Arial"/>
+              </a:rPr>
+              <a:t>C1 → C1, C2 → C2, C3 → C3</a:t>
+            </a:r>
+          </a:p>
+        </p:txBody>
+      </p:sp>
+      <p:sp>
+        <p:nvSpPr>
+          <p:cNvPr id="55" name="">
+            <a:extLst xmlns:a="http://schemas.openxmlformats.org/drawingml/2006/main">
+              <a:ext uri="{FF2B5EF4-FFF2-40B4-BE49-F238E27FC236}">
+                <a16:creationId xmlns:a16="http://schemas.microsoft.com/office/drawing/2014/main" id="{3AAE4016-40BB-4A6D-BE92-F6096786C155}"/>
+              </a:ext>
+            </a:extLst>
+          </p:cNvPr>
+          <p:cNvSpPr>
+            <a:spLocks xmlns:a="http://schemas.openxmlformats.org/drawingml/2006/main" noGrp="1"/>
+          </p:cNvSpPr>
+          <p:nvPr/>
+        </p:nvSpPr>
+        <p:spPr>
+          <a:xfrm xmlns:a="http://schemas.openxmlformats.org/drawingml/2006/main">
+            <a:off x="6096000" y="1466850"/>
+            <a:ext cx="19050" cy="4076700"/>
           </a:xfrm>
           <a:prstGeom xmlns:a="http://schemas.openxmlformats.org/drawingml/2006/main" prst="rect">
             <a:avLst/>
@@ -17375,22 +17771,22 @@
       </p:sp>
       <p:sp>
         <p:nvSpPr>
-          <p:cNvPr id="46" name="">
-            <a:extLst xmlns:a="http://schemas.openxmlformats.org/drawingml/2006/main">
-              <a:ext uri="{FF2B5EF4-FFF2-40B4-BE49-F238E27FC236}">
-                <a16:creationId xmlns:a16="http://schemas.microsoft.com/office/drawing/2014/main" id="{A356684A-F564-4AAD-BEDD-DC0EEC054AD6}"/>
-              </a:ext>
-            </a:extLst>
-          </p:cNvPr>
-          <p:cNvSpPr>
-            <a:spLocks xmlns:a="http://schemas.openxmlformats.org/drawingml/2006/main" noGrp="1"/>
-          </p:cNvSpPr>
-          <p:nvPr/>
-        </p:nvSpPr>
-        <p:spPr>
-          <a:xfrm xmlns:a="http://schemas.openxmlformats.org/drawingml/2006/main">
-            <a:off x="723900" y="4191000"/>
-            <a:ext cx="9334500" cy="342900"/>
+          <p:cNvPr id="56" name="">
+            <a:extLst xmlns:a="http://schemas.openxmlformats.org/drawingml/2006/main">
+              <a:ext uri="{FF2B5EF4-FFF2-40B4-BE49-F238E27FC236}">
+                <a16:creationId xmlns:a16="http://schemas.microsoft.com/office/drawing/2014/main" id="{E94B34F8-2D36-4B43-BD7B-8F8DBE7A83B8}"/>
+              </a:ext>
+            </a:extLst>
+          </p:cNvPr>
+          <p:cNvSpPr>
+            <a:spLocks xmlns:a="http://schemas.openxmlformats.org/drawingml/2006/main" noGrp="1"/>
+          </p:cNvSpPr>
+          <p:nvPr/>
+        </p:nvSpPr>
+        <p:spPr>
+          <a:xfrm xmlns:a="http://schemas.openxmlformats.org/drawingml/2006/main">
+            <a:off x="6572250" y="1466850"/>
+            <a:ext cx="4381500" cy="323850"/>
           </a:xfrm>
           <a:prstGeom xmlns:a="http://schemas.openxmlformats.org/drawingml/2006/main" prst="rect">
             <a:avLst/>
@@ -17436,163 +17832,97 @@
                 <a:ea typeface="Arial"/>
                 <a:cs typeface="Arial"/>
               </a:rPr>
-              <a:t>2. Pointwise 1×1: смешивает каналы в каждой позиции</a:t>
+              <a:t>Pointwise 1×1: смешивает каналы</a:t>
             </a:r>
           </a:p>
         </p:txBody>
       </p:sp>
       <p:sp>
         <p:nvSpPr>
-          <p:cNvPr id="47" name="">
-            <a:extLst xmlns:a="http://schemas.openxmlformats.org/drawingml/2006/main">
-              <a:ext uri="{FF2B5EF4-FFF2-40B4-BE49-F238E27FC236}">
-                <a16:creationId xmlns:a16="http://schemas.microsoft.com/office/drawing/2014/main" id="{BCFB2C74-7394-47B9-899F-6C771F744C66}"/>
-              </a:ext>
-            </a:extLst>
-          </p:cNvPr>
-          <p:cNvSpPr>
-            <a:spLocks xmlns:a="http://schemas.openxmlformats.org/drawingml/2006/main" noGrp="1"/>
-          </p:cNvSpPr>
-          <p:nvPr/>
-        </p:nvSpPr>
-        <p:spPr>
-          <a:xfrm xmlns:a="http://schemas.openxmlformats.org/drawingml/2006/main">
-            <a:off x="2247900" y="4895850"/>
-            <a:ext cx="781050" cy="781050"/>
-          </a:xfrm>
-          <a:prstGeom xmlns:a="http://schemas.openxmlformats.org/drawingml/2006/main" prst="roundRect">
-            <a:avLst>
-              <a:gd name="adj" fmla="val 9756"/>
-            </a:avLst>
-          </a:prstGeom>
-          <a:solidFill xmlns:a="http://schemas.openxmlformats.org/drawingml/2006/main">
-            <a:srgbClr val="EAF2FF"/>
-          </a:solidFill>
-          <a:ln xmlns:a="http://schemas.openxmlformats.org/drawingml/2006/main" w="9525">
-            <a:solidFill>
-              <a:srgbClr val="EAF2FF"/>
-            </a:solidFill>
-            <a:prstDash val="solid"/>
-          </a:ln>
-        </p:spPr>
-      </p:sp>
-      <p:sp>
-        <p:nvSpPr>
-          <p:cNvPr id="48" name="">
-            <a:extLst xmlns:a="http://schemas.openxmlformats.org/drawingml/2006/main">
-              <a:ext uri="{FF2B5EF4-FFF2-40B4-BE49-F238E27FC236}">
-                <a16:creationId xmlns:a16="http://schemas.microsoft.com/office/drawing/2014/main" id="{39F0D17C-BF7B-4413-924C-82DDB4559290}"/>
-              </a:ext>
-            </a:extLst>
-          </p:cNvPr>
-          <p:cNvSpPr>
-            <a:spLocks xmlns:a="http://schemas.openxmlformats.org/drawingml/2006/main" noGrp="1"/>
-          </p:cNvSpPr>
-          <p:nvPr/>
-        </p:nvSpPr>
-        <p:spPr>
-          <a:xfrm xmlns:a="http://schemas.openxmlformats.org/drawingml/2006/main">
-            <a:off x="2324100" y="5067300"/>
-            <a:ext cx="628650" cy="19050"/>
+          <p:cNvPr id="57" name="">
+            <a:extLst xmlns:a="http://schemas.openxmlformats.org/drawingml/2006/main">
+              <a:ext uri="{FF2B5EF4-FFF2-40B4-BE49-F238E27FC236}">
+                <a16:creationId xmlns:a16="http://schemas.microsoft.com/office/drawing/2014/main" id="{94091992-DBBF-4F59-932A-7ECB100A1664}"/>
+              </a:ext>
+            </a:extLst>
+          </p:cNvPr>
+          <p:cNvSpPr>
+            <a:spLocks xmlns:a="http://schemas.openxmlformats.org/drawingml/2006/main" noGrp="1"/>
+          </p:cNvSpPr>
+          <p:nvPr/>
+        </p:nvSpPr>
+        <p:spPr>
+          <a:xfrm xmlns:a="http://schemas.openxmlformats.org/drawingml/2006/main">
+            <a:off x="6572250" y="1809750"/>
+            <a:ext cx="4381500" cy="228600"/>
           </a:xfrm>
           <a:prstGeom xmlns:a="http://schemas.openxmlformats.org/drawingml/2006/main" prst="rect">
             <a:avLst/>
           </a:prstGeom>
-          <a:solidFill xmlns:a="http://schemas.openxmlformats.org/drawingml/2006/main">
-            <a:srgbClr val="FFFFFF"/>
-          </a:solidFill>
-          <a:ln xmlns:a="http://schemas.openxmlformats.org/drawingml/2006/main" w="9525">
-            <a:solidFill>
-              <a:srgbClr val="FFFFFF"/>
-            </a:solidFill>
-            <a:prstDash val="solid"/>
-          </a:ln>
-        </p:spPr>
-      </p:sp>
-      <p:sp>
-        <p:nvSpPr>
-          <p:cNvPr id="49" name="">
-            <a:extLst xmlns:a="http://schemas.openxmlformats.org/drawingml/2006/main">
-              <a:ext uri="{FF2B5EF4-FFF2-40B4-BE49-F238E27FC236}">
-                <a16:creationId xmlns:a16="http://schemas.microsoft.com/office/drawing/2014/main" id="{1B6CBD54-424F-425D-BF6D-BC4B94322015}"/>
-              </a:ext>
-            </a:extLst>
-          </p:cNvPr>
-          <p:cNvSpPr>
-            <a:spLocks xmlns:a="http://schemas.openxmlformats.org/drawingml/2006/main" noGrp="1"/>
-          </p:cNvSpPr>
-          <p:nvPr/>
-        </p:nvSpPr>
-        <p:spPr>
-          <a:xfrm xmlns:a="http://schemas.openxmlformats.org/drawingml/2006/main">
-            <a:off x="2324100" y="5238750"/>
-            <a:ext cx="628650" cy="19050"/>
-          </a:xfrm>
-          <a:prstGeom xmlns:a="http://schemas.openxmlformats.org/drawingml/2006/main" prst="rect">
-            <a:avLst/>
-          </a:prstGeom>
-          <a:solidFill xmlns:a="http://schemas.openxmlformats.org/drawingml/2006/main">
-            <a:srgbClr val="FFFFFF"/>
-          </a:solidFill>
-          <a:ln xmlns:a="http://schemas.openxmlformats.org/drawingml/2006/main" w="9525">
-            <a:solidFill>
-              <a:srgbClr val="FFFFFF"/>
-            </a:solidFill>
-            <a:prstDash val="solid"/>
-          </a:ln>
-        </p:spPr>
-      </p:sp>
-      <p:sp>
-        <p:nvSpPr>
-          <p:cNvPr id="50" name="">
-            <a:extLst xmlns:a="http://schemas.openxmlformats.org/drawingml/2006/main">
-              <a:ext uri="{FF2B5EF4-FFF2-40B4-BE49-F238E27FC236}">
-                <a16:creationId xmlns:a16="http://schemas.microsoft.com/office/drawing/2014/main" id="{07C36C25-B698-4B17-9913-E30B3E5EA6D8}"/>
-              </a:ext>
-            </a:extLst>
-          </p:cNvPr>
-          <p:cNvSpPr>
-            <a:spLocks xmlns:a="http://schemas.openxmlformats.org/drawingml/2006/main" noGrp="1"/>
-          </p:cNvSpPr>
-          <p:nvPr/>
-        </p:nvSpPr>
-        <p:spPr>
-          <a:xfrm xmlns:a="http://schemas.openxmlformats.org/drawingml/2006/main">
-            <a:off x="2324100" y="5410200"/>
-            <a:ext cx="628650" cy="19050"/>
-          </a:xfrm>
-          <a:prstGeom xmlns:a="http://schemas.openxmlformats.org/drawingml/2006/main" prst="rect">
-            <a:avLst/>
-          </a:prstGeom>
-          <a:solidFill xmlns:a="http://schemas.openxmlformats.org/drawingml/2006/main">
-            <a:srgbClr val="FFFFFF"/>
-          </a:solidFill>
-          <a:ln xmlns:a="http://schemas.openxmlformats.org/drawingml/2006/main" w="9525">
-            <a:solidFill>
-              <a:srgbClr val="FFFFFF"/>
-            </a:solidFill>
-            <a:prstDash val="solid"/>
-          </a:ln>
-        </p:spPr>
-      </p:sp>
-      <p:sp>
-        <p:nvSpPr>
-          <p:cNvPr id="51" name="">
-            <a:extLst xmlns:a="http://schemas.openxmlformats.org/drawingml/2006/main">
-              <a:ext uri="{FF2B5EF4-FFF2-40B4-BE49-F238E27FC236}">
-                <a16:creationId xmlns:a16="http://schemas.microsoft.com/office/drawing/2014/main" id="{8907527D-B391-4F69-B1CF-1FA1935A70E0}"/>
-              </a:ext>
-            </a:extLst>
-          </p:cNvPr>
-          <p:cNvSpPr>
-            <a:spLocks xmlns:a="http://schemas.openxmlformats.org/drawingml/2006/main" noGrp="1"/>
-          </p:cNvSpPr>
-          <p:nvPr/>
-        </p:nvSpPr>
-        <p:spPr>
-          <a:xfrm xmlns:a="http://schemas.openxmlformats.org/drawingml/2006/main">
-            <a:off x="2247900" y="5762625"/>
-            <a:ext cx="781050" cy="228600"/>
+          <a:noFill xmlns:a="http://schemas.openxmlformats.org/drawingml/2006/main"/>
+          <a:ln xmlns:a="http://schemas.openxmlformats.org/drawingml/2006/main" w="0">
+            <a:noFill/>
+          </a:ln>
+        </p:spPr>
+        <p:txBody>
+          <a:bodyPr xmlns:a="http://schemas.openxmlformats.org/drawingml/2006/main">
+            <a:noAutofit/>
+          </a:bodyPr>
+          <a:lstStyle xmlns:a="http://schemas.openxmlformats.org/drawingml/2006/main">
+            <a:defPPr algn="l">
+              <a:defRPr sz="1200" b="0">
+                <a:solidFill>
+                  <a:srgbClr val="596273"/>
+                </a:solidFill>
+                <a:latin typeface="Arial"/>
+                <a:ea typeface="Arial"/>
+                <a:cs typeface="Arial"/>
+              </a:defRPr>
+            </a:defPPr>
+          </a:lstStyle>
+          <a:p xmlns:a="http://schemas.openxmlformats.org/drawingml/2006/main">
+            <a:pPr algn="l">
+              <a:defRPr sz="1200" b="0">
+                <a:solidFill>
+                  <a:srgbClr val="596273"/>
+                </a:solidFill>
+                <a:latin typeface="Arial"/>
+                <a:ea typeface="Arial"/>
+                <a:cs typeface="Arial"/>
+              </a:defRPr>
+            </a:pPr>
+            <a:r>
+              <a:rPr sz="1200" b="0">
+                <a:solidFill>
+                  <a:srgbClr val="596273"/>
+                </a:solidFill>
+                <a:latin typeface="Arial"/>
+                <a:ea typeface="Arial"/>
+                <a:cs typeface="Arial"/>
+              </a:rPr>
+              <a:t>в одной и той же позиции изображения</a:t>
+            </a:r>
+          </a:p>
+        </p:txBody>
+      </p:sp>
+      <p:sp>
+        <p:nvSpPr>
+          <p:cNvPr id="58" name="">
+            <a:extLst xmlns:a="http://schemas.openxmlformats.org/drawingml/2006/main">
+              <a:ext uri="{FF2B5EF4-FFF2-40B4-BE49-F238E27FC236}">
+                <a16:creationId xmlns:a16="http://schemas.microsoft.com/office/drawing/2014/main" id="{9F7B723D-529A-4DC0-A9C9-E1913E32BE90}"/>
+              </a:ext>
+            </a:extLst>
+          </p:cNvPr>
+          <p:cNvSpPr>
+            <a:spLocks xmlns:a="http://schemas.openxmlformats.org/drawingml/2006/main" noGrp="1"/>
+          </p:cNvSpPr>
+          <p:nvPr/>
+        </p:nvSpPr>
+        <p:spPr>
+          <a:xfrm xmlns:a="http://schemas.openxmlformats.org/drawingml/2006/main">
+            <a:off x="6705600" y="2571750"/>
+            <a:ext cx="476250" cy="228600"/>
           </a:xfrm>
           <a:prstGeom xmlns:a="http://schemas.openxmlformats.org/drawingml/2006/main" prst="rect">
             <a:avLst/>
@@ -17645,156 +17975,22 @@
       </p:sp>
       <p:sp>
         <p:nvSpPr>
-          <p:cNvPr id="52" name="">
-            <a:extLst xmlns:a="http://schemas.openxmlformats.org/drawingml/2006/main">
-              <a:ext uri="{FF2B5EF4-FFF2-40B4-BE49-F238E27FC236}">
-                <a16:creationId xmlns:a16="http://schemas.microsoft.com/office/drawing/2014/main" id="{92DC3B4F-574A-458C-BA29-18465EB139ED}"/>
-              </a:ext>
-            </a:extLst>
-          </p:cNvPr>
-          <p:cNvSpPr>
-            <a:spLocks xmlns:a="http://schemas.openxmlformats.org/drawingml/2006/main" noGrp="1"/>
-          </p:cNvSpPr>
-          <p:nvPr/>
-        </p:nvSpPr>
-        <p:spPr>
-          <a:xfrm xmlns:a="http://schemas.openxmlformats.org/drawingml/2006/main">
-            <a:off x="3219450" y="4895850"/>
-            <a:ext cx="781050" cy="781050"/>
-          </a:xfrm>
-          <a:prstGeom xmlns:a="http://schemas.openxmlformats.org/drawingml/2006/main" prst="roundRect">
-            <a:avLst>
-              <a:gd name="adj" fmla="val 9756"/>
-            </a:avLst>
-          </a:prstGeom>
-          <a:solidFill xmlns:a="http://schemas.openxmlformats.org/drawingml/2006/main">
-            <a:srgbClr val="F0EAFE"/>
-          </a:solidFill>
-          <a:ln xmlns:a="http://schemas.openxmlformats.org/drawingml/2006/main" w="9525">
-            <a:solidFill>
-              <a:srgbClr val="F0EAFE"/>
-            </a:solidFill>
-            <a:prstDash val="solid"/>
-          </a:ln>
-        </p:spPr>
-      </p:sp>
-      <p:sp>
-        <p:nvSpPr>
-          <p:cNvPr id="53" name="">
-            <a:extLst xmlns:a="http://schemas.openxmlformats.org/drawingml/2006/main">
-              <a:ext uri="{FF2B5EF4-FFF2-40B4-BE49-F238E27FC236}">
-                <a16:creationId xmlns:a16="http://schemas.microsoft.com/office/drawing/2014/main" id="{9EEFFE2D-588D-4AA4-B39A-61B01BF626DE}"/>
-              </a:ext>
-            </a:extLst>
-          </p:cNvPr>
-          <p:cNvSpPr>
-            <a:spLocks xmlns:a="http://schemas.openxmlformats.org/drawingml/2006/main" noGrp="1"/>
-          </p:cNvSpPr>
-          <p:nvPr/>
-        </p:nvSpPr>
-        <p:spPr>
-          <a:xfrm xmlns:a="http://schemas.openxmlformats.org/drawingml/2006/main">
-            <a:off x="3295650" y="5067300"/>
-            <a:ext cx="628650" cy="19050"/>
-          </a:xfrm>
-          <a:prstGeom xmlns:a="http://schemas.openxmlformats.org/drawingml/2006/main" prst="rect">
-            <a:avLst/>
-          </a:prstGeom>
-          <a:solidFill xmlns:a="http://schemas.openxmlformats.org/drawingml/2006/main">
-            <a:srgbClr val="FFFFFF"/>
-          </a:solidFill>
-          <a:ln xmlns:a="http://schemas.openxmlformats.org/drawingml/2006/main" w="9525">
-            <a:solidFill>
-              <a:srgbClr val="FFFFFF"/>
-            </a:solidFill>
-            <a:prstDash val="solid"/>
-          </a:ln>
-        </p:spPr>
-      </p:sp>
-      <p:sp>
-        <p:nvSpPr>
-          <p:cNvPr id="54" name="">
-            <a:extLst xmlns:a="http://schemas.openxmlformats.org/drawingml/2006/main">
-              <a:ext uri="{FF2B5EF4-FFF2-40B4-BE49-F238E27FC236}">
-                <a16:creationId xmlns:a16="http://schemas.microsoft.com/office/drawing/2014/main" id="{74C31C2D-70F2-405F-932C-51737D9A55D5}"/>
-              </a:ext>
-            </a:extLst>
-          </p:cNvPr>
-          <p:cNvSpPr>
-            <a:spLocks xmlns:a="http://schemas.openxmlformats.org/drawingml/2006/main" noGrp="1"/>
-          </p:cNvSpPr>
-          <p:nvPr/>
-        </p:nvSpPr>
-        <p:spPr>
-          <a:xfrm xmlns:a="http://schemas.openxmlformats.org/drawingml/2006/main">
-            <a:off x="3295650" y="5238750"/>
-            <a:ext cx="628650" cy="19050"/>
-          </a:xfrm>
-          <a:prstGeom xmlns:a="http://schemas.openxmlformats.org/drawingml/2006/main" prst="rect">
-            <a:avLst/>
-          </a:prstGeom>
-          <a:solidFill xmlns:a="http://schemas.openxmlformats.org/drawingml/2006/main">
-            <a:srgbClr val="FFFFFF"/>
-          </a:solidFill>
-          <a:ln xmlns:a="http://schemas.openxmlformats.org/drawingml/2006/main" w="9525">
-            <a:solidFill>
-              <a:srgbClr val="FFFFFF"/>
-            </a:solidFill>
-            <a:prstDash val="solid"/>
-          </a:ln>
-        </p:spPr>
-      </p:sp>
-      <p:sp>
-        <p:nvSpPr>
-          <p:cNvPr id="55" name="">
-            <a:extLst xmlns:a="http://schemas.openxmlformats.org/drawingml/2006/main">
-              <a:ext uri="{FF2B5EF4-FFF2-40B4-BE49-F238E27FC236}">
-                <a16:creationId xmlns:a16="http://schemas.microsoft.com/office/drawing/2014/main" id="{C7067F99-66ED-47C3-8E06-E7A3AD0D90C6}"/>
-              </a:ext>
-            </a:extLst>
-          </p:cNvPr>
-          <p:cNvSpPr>
-            <a:spLocks xmlns:a="http://schemas.openxmlformats.org/drawingml/2006/main" noGrp="1"/>
-          </p:cNvSpPr>
-          <p:nvPr/>
-        </p:nvSpPr>
-        <p:spPr>
-          <a:xfrm xmlns:a="http://schemas.openxmlformats.org/drawingml/2006/main">
-            <a:off x="3295650" y="5410200"/>
-            <a:ext cx="628650" cy="19050"/>
-          </a:xfrm>
-          <a:prstGeom xmlns:a="http://schemas.openxmlformats.org/drawingml/2006/main" prst="rect">
-            <a:avLst/>
-          </a:prstGeom>
-          <a:solidFill xmlns:a="http://schemas.openxmlformats.org/drawingml/2006/main">
-            <a:srgbClr val="FFFFFF"/>
-          </a:solidFill>
-          <a:ln xmlns:a="http://schemas.openxmlformats.org/drawingml/2006/main" w="9525">
-            <a:solidFill>
-              <a:srgbClr val="FFFFFF"/>
-            </a:solidFill>
-            <a:prstDash val="solid"/>
-          </a:ln>
-        </p:spPr>
-      </p:sp>
-      <p:sp>
-        <p:nvSpPr>
-          <p:cNvPr id="56" name="">
-            <a:extLst xmlns:a="http://schemas.openxmlformats.org/drawingml/2006/main">
-              <a:ext uri="{FF2B5EF4-FFF2-40B4-BE49-F238E27FC236}">
-                <a16:creationId xmlns:a16="http://schemas.microsoft.com/office/drawing/2014/main" id="{8E09D2AC-7EA5-41DE-A921-703020F4E696}"/>
-              </a:ext>
-            </a:extLst>
-          </p:cNvPr>
-          <p:cNvSpPr>
-            <a:spLocks xmlns:a="http://schemas.openxmlformats.org/drawingml/2006/main" noGrp="1"/>
-          </p:cNvSpPr>
-          <p:nvPr/>
-        </p:nvSpPr>
-        <p:spPr>
-          <a:xfrm xmlns:a="http://schemas.openxmlformats.org/drawingml/2006/main">
-            <a:off x="3219450" y="5762625"/>
-            <a:ext cx="781050" cy="228600"/>
+          <p:cNvPr id="59" name="">
+            <a:extLst xmlns:a="http://schemas.openxmlformats.org/drawingml/2006/main">
+              <a:ext uri="{FF2B5EF4-FFF2-40B4-BE49-F238E27FC236}">
+                <a16:creationId xmlns:a16="http://schemas.microsoft.com/office/drawing/2014/main" id="{A4C5E0E1-F6EB-4A66-BDCF-C4F6CC385686}"/>
+              </a:ext>
+            </a:extLst>
+          </p:cNvPr>
+          <p:cNvSpPr>
+            <a:spLocks xmlns:a="http://schemas.openxmlformats.org/drawingml/2006/main" noGrp="1"/>
+          </p:cNvSpPr>
+          <p:nvPr/>
+        </p:nvSpPr>
+        <p:spPr>
+          <a:xfrm xmlns:a="http://schemas.openxmlformats.org/drawingml/2006/main">
+            <a:off x="6705600" y="3200400"/>
+            <a:ext cx="476250" cy="228600"/>
           </a:xfrm>
           <a:prstGeom xmlns:a="http://schemas.openxmlformats.org/drawingml/2006/main" prst="rect">
             <a:avLst/>
@@ -17847,156 +18043,22 @@
       </p:sp>
       <p:sp>
         <p:nvSpPr>
-          <p:cNvPr id="57" name="">
-            <a:extLst xmlns:a="http://schemas.openxmlformats.org/drawingml/2006/main">
-              <a:ext uri="{FF2B5EF4-FFF2-40B4-BE49-F238E27FC236}">
-                <a16:creationId xmlns:a16="http://schemas.microsoft.com/office/drawing/2014/main" id="{30F97A3D-EF73-4C2D-8102-39D3E41BE3FA}"/>
-              </a:ext>
-            </a:extLst>
-          </p:cNvPr>
-          <p:cNvSpPr>
-            <a:spLocks xmlns:a="http://schemas.openxmlformats.org/drawingml/2006/main" noGrp="1"/>
-          </p:cNvSpPr>
-          <p:nvPr/>
-        </p:nvSpPr>
-        <p:spPr>
-          <a:xfrm xmlns:a="http://schemas.openxmlformats.org/drawingml/2006/main">
-            <a:off x="4191000" y="4895850"/>
-            <a:ext cx="781050" cy="781050"/>
-          </a:xfrm>
-          <a:prstGeom xmlns:a="http://schemas.openxmlformats.org/drawingml/2006/main" prst="roundRect">
-            <a:avLst>
-              <a:gd name="adj" fmla="val 9756"/>
-            </a:avLst>
-          </a:prstGeom>
-          <a:solidFill xmlns:a="http://schemas.openxmlformats.org/drawingml/2006/main">
-            <a:srgbClr val="E7F7F4"/>
-          </a:solidFill>
-          <a:ln xmlns:a="http://schemas.openxmlformats.org/drawingml/2006/main" w="9525">
-            <a:solidFill>
-              <a:srgbClr val="E7F7F4"/>
-            </a:solidFill>
-            <a:prstDash val="solid"/>
-          </a:ln>
-        </p:spPr>
-      </p:sp>
-      <p:sp>
-        <p:nvSpPr>
-          <p:cNvPr id="58" name="">
-            <a:extLst xmlns:a="http://schemas.openxmlformats.org/drawingml/2006/main">
-              <a:ext uri="{FF2B5EF4-FFF2-40B4-BE49-F238E27FC236}">
-                <a16:creationId xmlns:a16="http://schemas.microsoft.com/office/drawing/2014/main" id="{F783D54B-B2DE-4F34-86AC-52F00A396667}"/>
-              </a:ext>
-            </a:extLst>
-          </p:cNvPr>
-          <p:cNvSpPr>
-            <a:spLocks xmlns:a="http://schemas.openxmlformats.org/drawingml/2006/main" noGrp="1"/>
-          </p:cNvSpPr>
-          <p:nvPr/>
-        </p:nvSpPr>
-        <p:spPr>
-          <a:xfrm xmlns:a="http://schemas.openxmlformats.org/drawingml/2006/main">
-            <a:off x="4267200" y="5067300"/>
-            <a:ext cx="628650" cy="19050"/>
-          </a:xfrm>
-          <a:prstGeom xmlns:a="http://schemas.openxmlformats.org/drawingml/2006/main" prst="rect">
-            <a:avLst/>
-          </a:prstGeom>
-          <a:solidFill xmlns:a="http://schemas.openxmlformats.org/drawingml/2006/main">
-            <a:srgbClr val="FFFFFF"/>
-          </a:solidFill>
-          <a:ln xmlns:a="http://schemas.openxmlformats.org/drawingml/2006/main" w="9525">
-            <a:solidFill>
-              <a:srgbClr val="FFFFFF"/>
-            </a:solidFill>
-            <a:prstDash val="solid"/>
-          </a:ln>
-        </p:spPr>
-      </p:sp>
-      <p:sp>
-        <p:nvSpPr>
-          <p:cNvPr id="59" name="">
-            <a:extLst xmlns:a="http://schemas.openxmlformats.org/drawingml/2006/main">
-              <a:ext uri="{FF2B5EF4-FFF2-40B4-BE49-F238E27FC236}">
-                <a16:creationId xmlns:a16="http://schemas.microsoft.com/office/drawing/2014/main" id="{2D52998B-0A8D-4813-9915-2038703CBC38}"/>
-              </a:ext>
-            </a:extLst>
-          </p:cNvPr>
-          <p:cNvSpPr>
-            <a:spLocks xmlns:a="http://schemas.openxmlformats.org/drawingml/2006/main" noGrp="1"/>
-          </p:cNvSpPr>
-          <p:nvPr/>
-        </p:nvSpPr>
-        <p:spPr>
-          <a:xfrm xmlns:a="http://schemas.openxmlformats.org/drawingml/2006/main">
-            <a:off x="4267200" y="5238750"/>
-            <a:ext cx="628650" cy="19050"/>
-          </a:xfrm>
-          <a:prstGeom xmlns:a="http://schemas.openxmlformats.org/drawingml/2006/main" prst="rect">
-            <a:avLst/>
-          </a:prstGeom>
-          <a:solidFill xmlns:a="http://schemas.openxmlformats.org/drawingml/2006/main">
-            <a:srgbClr val="FFFFFF"/>
-          </a:solidFill>
-          <a:ln xmlns:a="http://schemas.openxmlformats.org/drawingml/2006/main" w="9525">
-            <a:solidFill>
-              <a:srgbClr val="FFFFFF"/>
-            </a:solidFill>
-            <a:prstDash val="solid"/>
-          </a:ln>
-        </p:spPr>
-      </p:sp>
-      <p:sp>
-        <p:nvSpPr>
           <p:cNvPr id="60" name="">
             <a:extLst xmlns:a="http://schemas.openxmlformats.org/drawingml/2006/main">
               <a:ext uri="{FF2B5EF4-FFF2-40B4-BE49-F238E27FC236}">
-                <a16:creationId xmlns:a16="http://schemas.microsoft.com/office/drawing/2014/main" id="{5CF10718-9CDD-4AB5-8ED5-779FD6867384}"/>
-              </a:ext>
-            </a:extLst>
-          </p:cNvPr>
-          <p:cNvSpPr>
-            <a:spLocks xmlns:a="http://schemas.openxmlformats.org/drawingml/2006/main" noGrp="1"/>
-          </p:cNvSpPr>
-          <p:nvPr/>
-        </p:nvSpPr>
-        <p:spPr>
-          <a:xfrm xmlns:a="http://schemas.openxmlformats.org/drawingml/2006/main">
-            <a:off x="4267200" y="5410200"/>
-            <a:ext cx="628650" cy="19050"/>
-          </a:xfrm>
-          <a:prstGeom xmlns:a="http://schemas.openxmlformats.org/drawingml/2006/main" prst="rect">
-            <a:avLst/>
-          </a:prstGeom>
-          <a:solidFill xmlns:a="http://schemas.openxmlformats.org/drawingml/2006/main">
-            <a:srgbClr val="FFFFFF"/>
-          </a:solidFill>
-          <a:ln xmlns:a="http://schemas.openxmlformats.org/drawingml/2006/main" w="9525">
-            <a:solidFill>
-              <a:srgbClr val="FFFFFF"/>
-            </a:solidFill>
-            <a:prstDash val="solid"/>
-          </a:ln>
-        </p:spPr>
-      </p:sp>
-      <p:sp>
-        <p:nvSpPr>
-          <p:cNvPr id="61" name="">
-            <a:extLst xmlns:a="http://schemas.openxmlformats.org/drawingml/2006/main">
-              <a:ext uri="{FF2B5EF4-FFF2-40B4-BE49-F238E27FC236}">
-                <a16:creationId xmlns:a16="http://schemas.microsoft.com/office/drawing/2014/main" id="{AC053865-FB00-42FE-82EE-7396A3F189D9}"/>
-              </a:ext>
-            </a:extLst>
-          </p:cNvPr>
-          <p:cNvSpPr>
-            <a:spLocks xmlns:a="http://schemas.openxmlformats.org/drawingml/2006/main" noGrp="1"/>
-          </p:cNvSpPr>
-          <p:nvPr/>
-        </p:nvSpPr>
-        <p:spPr>
-          <a:xfrm xmlns:a="http://schemas.openxmlformats.org/drawingml/2006/main">
-            <a:off x="4191000" y="5762625"/>
-            <a:ext cx="781050" cy="228600"/>
+                <a16:creationId xmlns:a16="http://schemas.microsoft.com/office/drawing/2014/main" id="{D1CF1359-D831-4085-B8B0-1A4C2E7A76C4}"/>
+              </a:ext>
+            </a:extLst>
+          </p:cNvPr>
+          <p:cNvSpPr>
+            <a:spLocks xmlns:a="http://schemas.openxmlformats.org/drawingml/2006/main" noGrp="1"/>
+          </p:cNvSpPr>
+          <p:nvPr/>
+        </p:nvSpPr>
+        <p:spPr>
+          <a:xfrm xmlns:a="http://schemas.openxmlformats.org/drawingml/2006/main">
+            <a:off x="6705600" y="3829050"/>
+            <a:ext cx="476250" cy="228600"/>
           </a:xfrm>
           <a:prstGeom xmlns:a="http://schemas.openxmlformats.org/drawingml/2006/main" prst="rect">
             <a:avLst/>
@@ -18049,22 +18111,54 @@
       </p:sp>
       <p:sp>
         <p:nvSpPr>
+          <p:cNvPr id="61" name="">
+            <a:extLst xmlns:a="http://schemas.openxmlformats.org/drawingml/2006/main">
+              <a:ext uri="{FF2B5EF4-FFF2-40B4-BE49-F238E27FC236}">
+                <a16:creationId xmlns:a16="http://schemas.microsoft.com/office/drawing/2014/main" id="{296AB645-1D24-439B-A48C-CC24D4555516}"/>
+              </a:ext>
+            </a:extLst>
+          </p:cNvPr>
+          <p:cNvSpPr>
+            <a:spLocks xmlns:a="http://schemas.openxmlformats.org/drawingml/2006/main" noGrp="1"/>
+          </p:cNvSpPr>
+          <p:nvPr/>
+        </p:nvSpPr>
+        <p:spPr>
+          <a:xfrm xmlns:a="http://schemas.openxmlformats.org/drawingml/2006/main">
+            <a:off x="7372350" y="2571750"/>
+            <a:ext cx="228600" cy="228600"/>
+          </a:xfrm>
+          <a:prstGeom xmlns:a="http://schemas.openxmlformats.org/drawingml/2006/main" prst="ellipse">
+            <a:avLst/>
+          </a:prstGeom>
+          <a:solidFill xmlns:a="http://schemas.openxmlformats.org/drawingml/2006/main">
+            <a:srgbClr val="2563EB"/>
+          </a:solidFill>
+          <a:ln xmlns:a="http://schemas.openxmlformats.org/drawingml/2006/main" w="0">
+            <a:solidFill>
+              <a:srgbClr val="2563EB"/>
+            </a:solidFill>
+          </a:ln>
+        </p:spPr>
+      </p:sp>
+      <p:sp>
+        <p:nvSpPr>
           <p:cNvPr id="62" name="">
             <a:extLst xmlns:a="http://schemas.openxmlformats.org/drawingml/2006/main">
               <a:ext uri="{FF2B5EF4-FFF2-40B4-BE49-F238E27FC236}">
-                <a16:creationId xmlns:a16="http://schemas.microsoft.com/office/drawing/2014/main" id="{E1F63974-4A87-48A0-90A5-13F31D5C30D6}"/>
-              </a:ext>
-            </a:extLst>
-          </p:cNvPr>
-          <p:cNvSpPr>
-            <a:spLocks xmlns:a="http://schemas.openxmlformats.org/drawingml/2006/main" noGrp="1"/>
-          </p:cNvSpPr>
-          <p:nvPr/>
-        </p:nvSpPr>
-        <p:spPr>
-          <a:xfrm xmlns:a="http://schemas.openxmlformats.org/drawingml/2006/main">
-            <a:off x="5219700" y="5276850"/>
-            <a:ext cx="914400" cy="28575"/>
+                <a16:creationId xmlns:a16="http://schemas.microsoft.com/office/drawing/2014/main" id="{61B71C51-C57C-4166-9AFB-F216D4E81C3D}"/>
+              </a:ext>
+            </a:extLst>
+          </p:cNvPr>
+          <p:cNvSpPr>
+            <a:spLocks xmlns:a="http://schemas.openxmlformats.org/drawingml/2006/main" noGrp="1"/>
+          </p:cNvSpPr>
+          <p:nvPr/>
+        </p:nvSpPr>
+        <p:spPr>
+          <a:xfrm xmlns:a="http://schemas.openxmlformats.org/drawingml/2006/main">
+            <a:off x="7677150" y="2686050"/>
+            <a:ext cx="742950" cy="28575"/>
           </a:xfrm>
           <a:prstGeom xmlns:a="http://schemas.openxmlformats.org/drawingml/2006/main" prst="rect">
             <a:avLst/>
@@ -18085,18 +18179,18 @@
           <p:cNvPr id="63" name="">
             <a:extLst xmlns:a="http://schemas.openxmlformats.org/drawingml/2006/main">
               <a:ext uri="{FF2B5EF4-FFF2-40B4-BE49-F238E27FC236}">
-                <a16:creationId xmlns:a16="http://schemas.microsoft.com/office/drawing/2014/main" id="{E7C500B0-90CC-4EAF-BBFC-370AD478CC91}"/>
-              </a:ext>
-            </a:extLst>
-          </p:cNvPr>
-          <p:cNvSpPr>
-            <a:spLocks xmlns:a="http://schemas.openxmlformats.org/drawingml/2006/main" noGrp="1"/>
-          </p:cNvSpPr>
-          <p:nvPr/>
-        </p:nvSpPr>
-        <p:spPr>
-          <a:xfrm xmlns:a="http://schemas.openxmlformats.org/drawingml/2006/main">
-            <a:off x="6057900" y="5219700"/>
+                <a16:creationId xmlns:a16="http://schemas.microsoft.com/office/drawing/2014/main" id="{B83027A4-73BB-4656-857B-9DD50A74A1B4}"/>
+              </a:ext>
+            </a:extLst>
+          </p:cNvPr>
+          <p:cNvSpPr>
+            <a:spLocks xmlns:a="http://schemas.openxmlformats.org/drawingml/2006/main" noGrp="1"/>
+          </p:cNvSpPr>
+          <p:nvPr/>
+        </p:nvSpPr>
+        <p:spPr>
+          <a:xfrm xmlns:a="http://schemas.openxmlformats.org/drawingml/2006/main">
+            <a:off x="8343900" y="2628900"/>
             <a:ext cx="133350" cy="142875"/>
           </a:xfrm>
           <a:prstGeom xmlns:a="http://schemas.openxmlformats.org/drawingml/2006/main" prst="triangle">
@@ -18117,24 +18211,54 @@
           <p:cNvPr id="64" name="">
             <a:extLst xmlns:a="http://schemas.openxmlformats.org/drawingml/2006/main">
               <a:ext uri="{FF2B5EF4-FFF2-40B4-BE49-F238E27FC236}">
-                <a16:creationId xmlns:a16="http://schemas.microsoft.com/office/drawing/2014/main" id="{18B35200-102D-4466-BB6A-4E38B3242984}"/>
-              </a:ext>
-            </a:extLst>
-          </p:cNvPr>
-          <p:cNvSpPr>
-            <a:spLocks xmlns:a="http://schemas.openxmlformats.org/drawingml/2006/main" noGrp="1"/>
-          </p:cNvSpPr>
-          <p:nvPr/>
-        </p:nvSpPr>
-        <p:spPr>
-          <a:xfrm xmlns:a="http://schemas.openxmlformats.org/drawingml/2006/main">
-            <a:off x="6438900" y="4876800"/>
-            <a:ext cx="838200" cy="742950"/>
-          </a:xfrm>
-          <a:prstGeom xmlns:a="http://schemas.openxmlformats.org/drawingml/2006/main" prst="roundRect">
-            <a:avLst>
-              <a:gd name="adj" fmla="val 10256"/>
-            </a:avLst>
+                <a16:creationId xmlns:a16="http://schemas.microsoft.com/office/drawing/2014/main" id="{804EEC46-E0CA-4FC9-AE7E-DE9EA03F8DDC}"/>
+              </a:ext>
+            </a:extLst>
+          </p:cNvPr>
+          <p:cNvSpPr>
+            <a:spLocks xmlns:a="http://schemas.openxmlformats.org/drawingml/2006/main" noGrp="1"/>
+          </p:cNvSpPr>
+          <p:nvPr/>
+        </p:nvSpPr>
+        <p:spPr>
+          <a:xfrm xmlns:a="http://schemas.openxmlformats.org/drawingml/2006/main">
+            <a:off x="7372350" y="3200400"/>
+            <a:ext cx="228600" cy="228600"/>
+          </a:xfrm>
+          <a:prstGeom xmlns:a="http://schemas.openxmlformats.org/drawingml/2006/main" prst="ellipse">
+            <a:avLst/>
+          </a:prstGeom>
+          <a:solidFill xmlns:a="http://schemas.openxmlformats.org/drawingml/2006/main">
+            <a:srgbClr val="7C3AED"/>
+          </a:solidFill>
+          <a:ln xmlns:a="http://schemas.openxmlformats.org/drawingml/2006/main" w="0">
+            <a:solidFill>
+              <a:srgbClr val="7C3AED"/>
+            </a:solidFill>
+          </a:ln>
+        </p:spPr>
+      </p:sp>
+      <p:sp>
+        <p:nvSpPr>
+          <p:cNvPr id="65" name="">
+            <a:extLst xmlns:a="http://schemas.openxmlformats.org/drawingml/2006/main">
+              <a:ext uri="{FF2B5EF4-FFF2-40B4-BE49-F238E27FC236}">
+                <a16:creationId xmlns:a16="http://schemas.microsoft.com/office/drawing/2014/main" id="{EA2AB79E-01A4-4DF1-892F-374CBF64E830}"/>
+              </a:ext>
+            </a:extLst>
+          </p:cNvPr>
+          <p:cNvSpPr>
+            <a:spLocks xmlns:a="http://schemas.openxmlformats.org/drawingml/2006/main" noGrp="1"/>
+          </p:cNvSpPr>
+          <p:nvPr/>
+        </p:nvSpPr>
+        <p:spPr>
+          <a:xfrm xmlns:a="http://schemas.openxmlformats.org/drawingml/2006/main">
+            <a:off x="7677150" y="3314700"/>
+            <a:ext cx="742950" cy="28575"/>
+          </a:xfrm>
+          <a:prstGeom xmlns:a="http://schemas.openxmlformats.org/drawingml/2006/main" prst="rect">
+            <a:avLst/>
           </a:prstGeom>
           <a:solidFill xmlns:a="http://schemas.openxmlformats.org/drawingml/2006/main">
             <a:srgbClr val="7C3AED"/>
@@ -18149,22 +18273,821 @@
       </p:sp>
       <p:sp>
         <p:nvSpPr>
-          <p:cNvPr id="65" name="">
-            <a:extLst xmlns:a="http://schemas.openxmlformats.org/drawingml/2006/main">
-              <a:ext uri="{FF2B5EF4-FFF2-40B4-BE49-F238E27FC236}">
-                <a16:creationId xmlns:a16="http://schemas.microsoft.com/office/drawing/2014/main" id="{F2E02E67-0E8D-496B-B64B-B0742CDDA148}"/>
-              </a:ext>
-            </a:extLst>
-          </p:cNvPr>
-          <p:cNvSpPr>
-            <a:spLocks xmlns:a="http://schemas.openxmlformats.org/drawingml/2006/main" noGrp="1"/>
-          </p:cNvSpPr>
-          <p:nvPr/>
-        </p:nvSpPr>
-        <p:spPr>
-          <a:xfrm xmlns:a="http://schemas.openxmlformats.org/drawingml/2006/main">
-            <a:off x="6438900" y="5105400"/>
-            <a:ext cx="838200" cy="285750"/>
+          <p:cNvPr id="66" name="">
+            <a:extLst xmlns:a="http://schemas.openxmlformats.org/drawingml/2006/main">
+              <a:ext uri="{FF2B5EF4-FFF2-40B4-BE49-F238E27FC236}">
+                <a16:creationId xmlns:a16="http://schemas.microsoft.com/office/drawing/2014/main" id="{96AEC20C-2077-4FDA-93FE-233A30F0949D}"/>
+              </a:ext>
+            </a:extLst>
+          </p:cNvPr>
+          <p:cNvSpPr>
+            <a:spLocks xmlns:a="http://schemas.openxmlformats.org/drawingml/2006/main" noGrp="1"/>
+          </p:cNvSpPr>
+          <p:nvPr/>
+        </p:nvSpPr>
+        <p:spPr>
+          <a:xfrm xmlns:a="http://schemas.openxmlformats.org/drawingml/2006/main">
+            <a:off x="8343900" y="3257550"/>
+            <a:ext cx="133350" cy="142875"/>
+          </a:xfrm>
+          <a:prstGeom xmlns:a="http://schemas.openxmlformats.org/drawingml/2006/main" prst="triangle">
+            <a:avLst/>
+          </a:prstGeom>
+          <a:solidFill xmlns:a="http://schemas.openxmlformats.org/drawingml/2006/main">
+            <a:srgbClr val="7C3AED"/>
+          </a:solidFill>
+          <a:ln xmlns:a="http://schemas.openxmlformats.org/drawingml/2006/main" w="0">
+            <a:solidFill>
+              <a:srgbClr val="7C3AED"/>
+            </a:solidFill>
+          </a:ln>
+        </p:spPr>
+      </p:sp>
+      <p:sp>
+        <p:nvSpPr>
+          <p:cNvPr id="67" name="">
+            <a:extLst xmlns:a="http://schemas.openxmlformats.org/drawingml/2006/main">
+              <a:ext uri="{FF2B5EF4-FFF2-40B4-BE49-F238E27FC236}">
+                <a16:creationId xmlns:a16="http://schemas.microsoft.com/office/drawing/2014/main" id="{6A2DFFFC-21BE-4FBD-9782-C78401A3D29A}"/>
+              </a:ext>
+            </a:extLst>
+          </p:cNvPr>
+          <p:cNvSpPr>
+            <a:spLocks xmlns:a="http://schemas.openxmlformats.org/drawingml/2006/main" noGrp="1"/>
+          </p:cNvSpPr>
+          <p:nvPr/>
+        </p:nvSpPr>
+        <p:spPr>
+          <a:xfrm xmlns:a="http://schemas.openxmlformats.org/drawingml/2006/main">
+            <a:off x="7372350" y="3829050"/>
+            <a:ext cx="228600" cy="228600"/>
+          </a:xfrm>
+          <a:prstGeom xmlns:a="http://schemas.openxmlformats.org/drawingml/2006/main" prst="ellipse">
+            <a:avLst/>
+          </a:prstGeom>
+          <a:solidFill xmlns:a="http://schemas.openxmlformats.org/drawingml/2006/main">
+            <a:srgbClr val="0F9D8A"/>
+          </a:solidFill>
+          <a:ln xmlns:a="http://schemas.openxmlformats.org/drawingml/2006/main" w="0">
+            <a:solidFill>
+              <a:srgbClr val="0F9D8A"/>
+            </a:solidFill>
+          </a:ln>
+        </p:spPr>
+      </p:sp>
+      <p:sp>
+        <p:nvSpPr>
+          <p:cNvPr id="68" name="">
+            <a:extLst xmlns:a="http://schemas.openxmlformats.org/drawingml/2006/main">
+              <a:ext uri="{FF2B5EF4-FFF2-40B4-BE49-F238E27FC236}">
+                <a16:creationId xmlns:a16="http://schemas.microsoft.com/office/drawing/2014/main" id="{740991DE-CADB-4203-8C40-D8A8696A632B}"/>
+              </a:ext>
+            </a:extLst>
+          </p:cNvPr>
+          <p:cNvSpPr>
+            <a:spLocks xmlns:a="http://schemas.openxmlformats.org/drawingml/2006/main" noGrp="1"/>
+          </p:cNvSpPr>
+          <p:nvPr/>
+        </p:nvSpPr>
+        <p:spPr>
+          <a:xfrm xmlns:a="http://schemas.openxmlformats.org/drawingml/2006/main">
+            <a:off x="7677150" y="3943350"/>
+            <a:ext cx="742950" cy="28575"/>
+          </a:xfrm>
+          <a:prstGeom xmlns:a="http://schemas.openxmlformats.org/drawingml/2006/main" prst="rect">
+            <a:avLst/>
+          </a:prstGeom>
+          <a:solidFill xmlns:a="http://schemas.openxmlformats.org/drawingml/2006/main">
+            <a:srgbClr val="7C3AED"/>
+          </a:solidFill>
+          <a:ln xmlns:a="http://schemas.openxmlformats.org/drawingml/2006/main" w="9525">
+            <a:solidFill>
+              <a:srgbClr val="7C3AED"/>
+            </a:solidFill>
+            <a:prstDash val="solid"/>
+          </a:ln>
+        </p:spPr>
+      </p:sp>
+      <p:sp>
+        <p:nvSpPr>
+          <p:cNvPr id="69" name="">
+            <a:extLst xmlns:a="http://schemas.openxmlformats.org/drawingml/2006/main">
+              <a:ext uri="{FF2B5EF4-FFF2-40B4-BE49-F238E27FC236}">
+                <a16:creationId xmlns:a16="http://schemas.microsoft.com/office/drawing/2014/main" id="{4EDA0493-EE6D-4975-9417-2F703BBDF488}"/>
+              </a:ext>
+            </a:extLst>
+          </p:cNvPr>
+          <p:cNvSpPr>
+            <a:spLocks xmlns:a="http://schemas.openxmlformats.org/drawingml/2006/main" noGrp="1"/>
+          </p:cNvSpPr>
+          <p:nvPr/>
+        </p:nvSpPr>
+        <p:spPr>
+          <a:xfrm xmlns:a="http://schemas.openxmlformats.org/drawingml/2006/main">
+            <a:off x="8343900" y="3886200"/>
+            <a:ext cx="133350" cy="142875"/>
+          </a:xfrm>
+          <a:prstGeom xmlns:a="http://schemas.openxmlformats.org/drawingml/2006/main" prst="triangle">
+            <a:avLst/>
+          </a:prstGeom>
+          <a:solidFill xmlns:a="http://schemas.openxmlformats.org/drawingml/2006/main">
+            <a:srgbClr val="7C3AED"/>
+          </a:solidFill>
+          <a:ln xmlns:a="http://schemas.openxmlformats.org/drawingml/2006/main" w="0">
+            <a:solidFill>
+              <a:srgbClr val="7C3AED"/>
+            </a:solidFill>
+          </a:ln>
+        </p:spPr>
+      </p:sp>
+      <p:sp>
+        <p:nvSpPr>
+          <p:cNvPr id="70" name="">
+            <a:extLst xmlns:a="http://schemas.openxmlformats.org/drawingml/2006/main">
+              <a:ext uri="{FF2B5EF4-FFF2-40B4-BE49-F238E27FC236}">
+                <a16:creationId xmlns:a16="http://schemas.microsoft.com/office/drawing/2014/main" id="{BB911FE0-0DBB-4468-94FC-462E0D3191C9}"/>
+              </a:ext>
+            </a:extLst>
+          </p:cNvPr>
+          <p:cNvSpPr>
+            <a:spLocks xmlns:a="http://schemas.openxmlformats.org/drawingml/2006/main" noGrp="1"/>
+          </p:cNvSpPr>
+          <p:nvPr/>
+        </p:nvSpPr>
+        <p:spPr>
+          <a:xfrm xmlns:a="http://schemas.openxmlformats.org/drawingml/2006/main">
+            <a:off x="8420100" y="2686050"/>
+            <a:ext cx="28575" cy="1257300"/>
+          </a:xfrm>
+          <a:prstGeom xmlns:a="http://schemas.openxmlformats.org/drawingml/2006/main" prst="rect">
+            <a:avLst/>
+          </a:prstGeom>
+          <a:solidFill xmlns:a="http://schemas.openxmlformats.org/drawingml/2006/main">
+            <a:srgbClr val="7C3AED"/>
+          </a:solidFill>
+          <a:ln xmlns:a="http://schemas.openxmlformats.org/drawingml/2006/main" w="9525">
+            <a:solidFill>
+              <a:srgbClr val="7C3AED"/>
+            </a:solidFill>
+            <a:prstDash val="solid"/>
+          </a:ln>
+        </p:spPr>
+      </p:sp>
+      <p:sp>
+        <p:nvSpPr>
+          <p:cNvPr id="71" name="">
+            <a:extLst xmlns:a="http://schemas.openxmlformats.org/drawingml/2006/main">
+              <a:ext uri="{FF2B5EF4-FFF2-40B4-BE49-F238E27FC236}">
+                <a16:creationId xmlns:a16="http://schemas.microsoft.com/office/drawing/2014/main" id="{94E4265B-9DF8-4521-92AA-24EA35233F38}"/>
+              </a:ext>
+            </a:extLst>
+          </p:cNvPr>
+          <p:cNvSpPr>
+            <a:spLocks xmlns:a="http://schemas.openxmlformats.org/drawingml/2006/main" noGrp="1"/>
+          </p:cNvSpPr>
+          <p:nvPr/>
+        </p:nvSpPr>
+        <p:spPr>
+          <a:xfrm xmlns:a="http://schemas.openxmlformats.org/drawingml/2006/main">
+            <a:off x="8448675" y="3343275"/>
+            <a:ext cx="123825" cy="28575"/>
+          </a:xfrm>
+          <a:prstGeom xmlns:a="http://schemas.openxmlformats.org/drawingml/2006/main" prst="rect">
+            <a:avLst/>
+          </a:prstGeom>
+          <a:solidFill xmlns:a="http://schemas.openxmlformats.org/drawingml/2006/main">
+            <a:srgbClr val="7C3AED"/>
+          </a:solidFill>
+          <a:ln xmlns:a="http://schemas.openxmlformats.org/drawingml/2006/main" w="9525">
+            <a:solidFill>
+              <a:srgbClr val="7C3AED"/>
+            </a:solidFill>
+            <a:prstDash val="solid"/>
+          </a:ln>
+        </p:spPr>
+      </p:sp>
+      <p:sp>
+        <p:nvSpPr>
+          <p:cNvPr id="72" name="">
+            <a:extLst xmlns:a="http://schemas.openxmlformats.org/drawingml/2006/main">
+              <a:ext uri="{FF2B5EF4-FFF2-40B4-BE49-F238E27FC236}">
+                <a16:creationId xmlns:a16="http://schemas.microsoft.com/office/drawing/2014/main" id="{CBFC170D-758B-455F-AE6B-00A441CD924A}"/>
+              </a:ext>
+            </a:extLst>
+          </p:cNvPr>
+          <p:cNvSpPr>
+            <a:spLocks xmlns:a="http://schemas.openxmlformats.org/drawingml/2006/main" noGrp="1"/>
+          </p:cNvSpPr>
+          <p:nvPr/>
+        </p:nvSpPr>
+        <p:spPr>
+          <a:xfrm xmlns:a="http://schemas.openxmlformats.org/drawingml/2006/main">
+            <a:off x="8496300" y="3286125"/>
+            <a:ext cx="133350" cy="142875"/>
+          </a:xfrm>
+          <a:prstGeom xmlns:a="http://schemas.openxmlformats.org/drawingml/2006/main" prst="triangle">
+            <a:avLst/>
+          </a:prstGeom>
+          <a:solidFill xmlns:a="http://schemas.openxmlformats.org/drawingml/2006/main">
+            <a:srgbClr val="7C3AED"/>
+          </a:solidFill>
+          <a:ln xmlns:a="http://schemas.openxmlformats.org/drawingml/2006/main" w="0">
+            <a:solidFill>
+              <a:srgbClr val="7C3AED"/>
+            </a:solidFill>
+          </a:ln>
+        </p:spPr>
+      </p:sp>
+      <p:sp>
+        <p:nvSpPr>
+          <p:cNvPr id="73" name="">
+            <a:extLst xmlns:a="http://schemas.openxmlformats.org/drawingml/2006/main">
+              <a:ext uri="{FF2B5EF4-FFF2-40B4-BE49-F238E27FC236}">
+                <a16:creationId xmlns:a16="http://schemas.microsoft.com/office/drawing/2014/main" id="{4F33A6C0-0E0C-4DB2-BCFF-ED94013F9325}"/>
+              </a:ext>
+            </a:extLst>
+          </p:cNvPr>
+          <p:cNvSpPr>
+            <a:spLocks xmlns:a="http://schemas.openxmlformats.org/drawingml/2006/main" noGrp="1"/>
+          </p:cNvSpPr>
+          <p:nvPr/>
+        </p:nvSpPr>
+        <p:spPr>
+          <a:xfrm xmlns:a="http://schemas.openxmlformats.org/drawingml/2006/main">
+            <a:off x="8572500" y="3143250"/>
+            <a:ext cx="685800" cy="419100"/>
+          </a:xfrm>
+          <a:prstGeom xmlns:a="http://schemas.openxmlformats.org/drawingml/2006/main" prst="roundRect">
+            <a:avLst>
+              <a:gd name="adj" fmla="val 15909"/>
+            </a:avLst>
+          </a:prstGeom>
+          <a:solidFill xmlns:a="http://schemas.openxmlformats.org/drawingml/2006/main">
+            <a:srgbClr val="7C3AED"/>
+          </a:solidFill>
+          <a:ln xmlns:a="http://schemas.openxmlformats.org/drawingml/2006/main" w="9525">
+            <a:solidFill>
+              <a:srgbClr val="7C3AED"/>
+            </a:solidFill>
+            <a:prstDash val="solid"/>
+          </a:ln>
+        </p:spPr>
+      </p:sp>
+      <p:sp>
+        <p:nvSpPr>
+          <p:cNvPr id="74" name="">
+            <a:extLst xmlns:a="http://schemas.openxmlformats.org/drawingml/2006/main">
+              <a:ext uri="{FF2B5EF4-FFF2-40B4-BE49-F238E27FC236}">
+                <a16:creationId xmlns:a16="http://schemas.microsoft.com/office/drawing/2014/main" id="{7E46C7CA-E3E5-4A17-8028-A2F2FA38EDA8}"/>
+              </a:ext>
+            </a:extLst>
+          </p:cNvPr>
+          <p:cNvSpPr>
+            <a:spLocks xmlns:a="http://schemas.openxmlformats.org/drawingml/2006/main" noGrp="1"/>
+          </p:cNvSpPr>
+          <p:nvPr/>
+        </p:nvSpPr>
+        <p:spPr>
+          <a:xfrm xmlns:a="http://schemas.openxmlformats.org/drawingml/2006/main">
+            <a:off x="8572500" y="3238500"/>
+            <a:ext cx="685800" cy="209550"/>
+          </a:xfrm>
+          <a:prstGeom xmlns:a="http://schemas.openxmlformats.org/drawingml/2006/main" prst="rect">
+            <a:avLst/>
+          </a:prstGeom>
+          <a:noFill xmlns:a="http://schemas.openxmlformats.org/drawingml/2006/main"/>
+          <a:ln xmlns:a="http://schemas.openxmlformats.org/drawingml/2006/main" w="0">
+            <a:noFill/>
+          </a:ln>
+        </p:spPr>
+        <p:txBody>
+          <a:bodyPr xmlns:a="http://schemas.openxmlformats.org/drawingml/2006/main">
+            <a:noAutofit/>
+          </a:bodyPr>
+          <a:lstStyle xmlns:a="http://schemas.openxmlformats.org/drawingml/2006/main">
+            <a:defPPr algn="ctr">
+              <a:defRPr sz="1200" b="0">
+                <a:solidFill>
+                  <a:srgbClr val="596273"/>
+                </a:solidFill>
+                <a:latin typeface="Arial"/>
+                <a:ea typeface="Arial"/>
+                <a:cs typeface="Arial"/>
+              </a:defRPr>
+            </a:defPPr>
+          </a:lstStyle>
+          <a:p xmlns:a="http://schemas.openxmlformats.org/drawingml/2006/main">
+            <a:pPr algn="ctr">
+              <a:defRPr sz="1200" b="0">
+                <a:solidFill>
+                  <a:srgbClr val="596273"/>
+                </a:solidFill>
+                <a:latin typeface="Arial"/>
+                <a:ea typeface="Arial"/>
+                <a:cs typeface="Arial"/>
+              </a:defRPr>
+            </a:pPr>
+            <a:r>
+              <a:rPr sz="1200" b="0">
+                <a:solidFill>
+                  <a:srgbClr val="596273"/>
+                </a:solidFill>
+                <a:latin typeface="Arial"/>
+                <a:ea typeface="Arial"/>
+                <a:cs typeface="Arial"/>
+              </a:rPr>
+              <a:t>1×1</a:t>
+            </a:r>
+          </a:p>
+        </p:txBody>
+      </p:sp>
+      <p:sp>
+        <p:nvSpPr>
+          <p:cNvPr id="75" name="">
+            <a:extLst xmlns:a="http://schemas.openxmlformats.org/drawingml/2006/main">
+              <a:ext uri="{FF2B5EF4-FFF2-40B4-BE49-F238E27FC236}">
+                <a16:creationId xmlns:a16="http://schemas.microsoft.com/office/drawing/2014/main" id="{3C89C08B-6155-480B-9BD9-65DBECC12EE9}"/>
+              </a:ext>
+            </a:extLst>
+          </p:cNvPr>
+          <p:cNvSpPr>
+            <a:spLocks xmlns:a="http://schemas.openxmlformats.org/drawingml/2006/main" noGrp="1"/>
+          </p:cNvSpPr>
+          <p:nvPr/>
+        </p:nvSpPr>
+        <p:spPr>
+          <a:xfrm xmlns:a="http://schemas.openxmlformats.org/drawingml/2006/main">
+            <a:off x="9258300" y="3343275"/>
+            <a:ext cx="1047750" cy="28575"/>
+          </a:xfrm>
+          <a:prstGeom xmlns:a="http://schemas.openxmlformats.org/drawingml/2006/main" prst="rect">
+            <a:avLst/>
+          </a:prstGeom>
+          <a:solidFill xmlns:a="http://schemas.openxmlformats.org/drawingml/2006/main">
+            <a:srgbClr val="7C3AED"/>
+          </a:solidFill>
+          <a:ln xmlns:a="http://schemas.openxmlformats.org/drawingml/2006/main" w="9525">
+            <a:solidFill>
+              <a:srgbClr val="7C3AED"/>
+            </a:solidFill>
+            <a:prstDash val="solid"/>
+          </a:ln>
+        </p:spPr>
+      </p:sp>
+      <p:sp>
+        <p:nvSpPr>
+          <p:cNvPr id="76" name="">
+            <a:extLst xmlns:a="http://schemas.openxmlformats.org/drawingml/2006/main">
+              <a:ext uri="{FF2B5EF4-FFF2-40B4-BE49-F238E27FC236}">
+                <a16:creationId xmlns:a16="http://schemas.microsoft.com/office/drawing/2014/main" id="{2EE908C3-9338-4773-B48E-66B8AE19B9C5}"/>
+              </a:ext>
+            </a:extLst>
+          </p:cNvPr>
+          <p:cNvSpPr>
+            <a:spLocks xmlns:a="http://schemas.openxmlformats.org/drawingml/2006/main" noGrp="1"/>
+          </p:cNvSpPr>
+          <p:nvPr/>
+        </p:nvSpPr>
+        <p:spPr>
+          <a:xfrm xmlns:a="http://schemas.openxmlformats.org/drawingml/2006/main">
+            <a:off x="10229850" y="3286125"/>
+            <a:ext cx="133350" cy="142875"/>
+          </a:xfrm>
+          <a:prstGeom xmlns:a="http://schemas.openxmlformats.org/drawingml/2006/main" prst="triangle">
+            <a:avLst/>
+          </a:prstGeom>
+          <a:solidFill xmlns:a="http://schemas.openxmlformats.org/drawingml/2006/main">
+            <a:srgbClr val="7C3AED"/>
+          </a:solidFill>
+          <a:ln xmlns:a="http://schemas.openxmlformats.org/drawingml/2006/main" w="0">
+            <a:solidFill>
+              <a:srgbClr val="7C3AED"/>
+            </a:solidFill>
+          </a:ln>
+        </p:spPr>
+      </p:sp>
+      <p:sp>
+        <p:nvSpPr>
+          <p:cNvPr id="77" name="">
+            <a:extLst xmlns:a="http://schemas.openxmlformats.org/drawingml/2006/main">
+              <a:ext uri="{FF2B5EF4-FFF2-40B4-BE49-F238E27FC236}">
+                <a16:creationId xmlns:a16="http://schemas.microsoft.com/office/drawing/2014/main" id="{0A10FE0E-7122-4A0C-8838-9E98D3F3DFA8}"/>
+              </a:ext>
+            </a:extLst>
+          </p:cNvPr>
+          <p:cNvSpPr>
+            <a:spLocks xmlns:a="http://schemas.openxmlformats.org/drawingml/2006/main" noGrp="1"/>
+          </p:cNvSpPr>
+          <p:nvPr/>
+        </p:nvSpPr>
+        <p:spPr>
+          <a:xfrm xmlns:a="http://schemas.openxmlformats.org/drawingml/2006/main">
+            <a:off x="10382250" y="3028950"/>
+            <a:ext cx="590550" cy="590550"/>
+          </a:xfrm>
+          <a:prstGeom xmlns:a="http://schemas.openxmlformats.org/drawingml/2006/main" prst="roundRect">
+            <a:avLst>
+              <a:gd name="adj" fmla="val 11290"/>
+            </a:avLst>
+          </a:prstGeom>
+          <a:solidFill xmlns:a="http://schemas.openxmlformats.org/drawingml/2006/main">
+            <a:srgbClr val="EAF2FF"/>
+          </a:solidFill>
+          <a:ln xmlns:a="http://schemas.openxmlformats.org/drawingml/2006/main" w="9525">
+            <a:solidFill>
+              <a:srgbClr val="EAF2FF"/>
+            </a:solidFill>
+            <a:prstDash val="solid"/>
+          </a:ln>
+        </p:spPr>
+      </p:sp>
+      <p:sp>
+        <p:nvSpPr>
+          <p:cNvPr id="78" name="">
+            <a:extLst xmlns:a="http://schemas.openxmlformats.org/drawingml/2006/main">
+              <a:ext uri="{FF2B5EF4-FFF2-40B4-BE49-F238E27FC236}">
+                <a16:creationId xmlns:a16="http://schemas.microsoft.com/office/drawing/2014/main" id="{72572DD9-9838-45BE-8F97-0EEB1E2F227B}"/>
+              </a:ext>
+            </a:extLst>
+          </p:cNvPr>
+          <p:cNvSpPr>
+            <a:spLocks xmlns:a="http://schemas.openxmlformats.org/drawingml/2006/main" noGrp="1"/>
+          </p:cNvSpPr>
+          <p:nvPr/>
+        </p:nvSpPr>
+        <p:spPr>
+          <a:xfrm xmlns:a="http://schemas.openxmlformats.org/drawingml/2006/main">
+            <a:off x="10458450" y="3190875"/>
+            <a:ext cx="438150" cy="19050"/>
+          </a:xfrm>
+          <a:prstGeom xmlns:a="http://schemas.openxmlformats.org/drawingml/2006/main" prst="rect">
+            <a:avLst/>
+          </a:prstGeom>
+          <a:solidFill xmlns:a="http://schemas.openxmlformats.org/drawingml/2006/main">
+            <a:srgbClr val="FFFFFF"/>
+          </a:solidFill>
+          <a:ln xmlns:a="http://schemas.openxmlformats.org/drawingml/2006/main" w="9525">
+            <a:solidFill>
+              <a:srgbClr val="FFFFFF"/>
+            </a:solidFill>
+            <a:prstDash val="solid"/>
+          </a:ln>
+        </p:spPr>
+      </p:sp>
+      <p:sp>
+        <p:nvSpPr>
+          <p:cNvPr id="79" name="">
+            <a:extLst xmlns:a="http://schemas.openxmlformats.org/drawingml/2006/main">
+              <a:ext uri="{FF2B5EF4-FFF2-40B4-BE49-F238E27FC236}">
+                <a16:creationId xmlns:a16="http://schemas.microsoft.com/office/drawing/2014/main" id="{E7ACBE1F-6886-424C-A6DE-A6C1E3561AA4}"/>
+              </a:ext>
+            </a:extLst>
+          </p:cNvPr>
+          <p:cNvSpPr>
+            <a:spLocks xmlns:a="http://schemas.openxmlformats.org/drawingml/2006/main" noGrp="1"/>
+          </p:cNvSpPr>
+          <p:nvPr/>
+        </p:nvSpPr>
+        <p:spPr>
+          <a:xfrm xmlns:a="http://schemas.openxmlformats.org/drawingml/2006/main">
+            <a:off x="10458450" y="3324225"/>
+            <a:ext cx="438150" cy="19050"/>
+          </a:xfrm>
+          <a:prstGeom xmlns:a="http://schemas.openxmlformats.org/drawingml/2006/main" prst="rect">
+            <a:avLst/>
+          </a:prstGeom>
+          <a:solidFill xmlns:a="http://schemas.openxmlformats.org/drawingml/2006/main">
+            <a:srgbClr val="FFFFFF"/>
+          </a:solidFill>
+          <a:ln xmlns:a="http://schemas.openxmlformats.org/drawingml/2006/main" w="9525">
+            <a:solidFill>
+              <a:srgbClr val="FFFFFF"/>
+            </a:solidFill>
+            <a:prstDash val="solid"/>
+          </a:ln>
+        </p:spPr>
+      </p:sp>
+      <p:sp>
+        <p:nvSpPr>
+          <p:cNvPr id="80" name="">
+            <a:extLst xmlns:a="http://schemas.openxmlformats.org/drawingml/2006/main">
+              <a:ext uri="{FF2B5EF4-FFF2-40B4-BE49-F238E27FC236}">
+                <a16:creationId xmlns:a16="http://schemas.microsoft.com/office/drawing/2014/main" id="{B6324CFC-BB85-424C-8179-FFA87D494AB9}"/>
+              </a:ext>
+            </a:extLst>
+          </p:cNvPr>
+          <p:cNvSpPr>
+            <a:spLocks xmlns:a="http://schemas.openxmlformats.org/drawingml/2006/main" noGrp="1"/>
+          </p:cNvSpPr>
+          <p:nvPr/>
+        </p:nvSpPr>
+        <p:spPr>
+          <a:xfrm xmlns:a="http://schemas.openxmlformats.org/drawingml/2006/main">
+            <a:off x="10458450" y="3457575"/>
+            <a:ext cx="438150" cy="19050"/>
+          </a:xfrm>
+          <a:prstGeom xmlns:a="http://schemas.openxmlformats.org/drawingml/2006/main" prst="rect">
+            <a:avLst/>
+          </a:prstGeom>
+          <a:solidFill xmlns:a="http://schemas.openxmlformats.org/drawingml/2006/main">
+            <a:srgbClr val="FFFFFF"/>
+          </a:solidFill>
+          <a:ln xmlns:a="http://schemas.openxmlformats.org/drawingml/2006/main" w="9525">
+            <a:solidFill>
+              <a:srgbClr val="FFFFFF"/>
+            </a:solidFill>
+            <a:prstDash val="solid"/>
+          </a:ln>
+        </p:spPr>
+      </p:sp>
+      <p:sp>
+        <p:nvSpPr>
+          <p:cNvPr id="81" name="">
+            <a:extLst xmlns:a="http://schemas.openxmlformats.org/drawingml/2006/main">
+              <a:ext uri="{FF2B5EF4-FFF2-40B4-BE49-F238E27FC236}">
+                <a16:creationId xmlns:a16="http://schemas.microsoft.com/office/drawing/2014/main" id="{7D38389F-24A7-4D13-93EF-1DFF8323AF8C}"/>
+              </a:ext>
+            </a:extLst>
+          </p:cNvPr>
+          <p:cNvSpPr>
+            <a:spLocks xmlns:a="http://schemas.openxmlformats.org/drawingml/2006/main" noGrp="1"/>
+          </p:cNvSpPr>
+          <p:nvPr/>
+        </p:nvSpPr>
+        <p:spPr>
+          <a:xfrm xmlns:a="http://schemas.openxmlformats.org/drawingml/2006/main">
+            <a:off x="10382250" y="3695700"/>
+            <a:ext cx="590550" cy="190500"/>
+          </a:xfrm>
+          <a:prstGeom xmlns:a="http://schemas.openxmlformats.org/drawingml/2006/main" prst="rect">
+            <a:avLst/>
+          </a:prstGeom>
+          <a:noFill xmlns:a="http://schemas.openxmlformats.org/drawingml/2006/main"/>
+          <a:ln xmlns:a="http://schemas.openxmlformats.org/drawingml/2006/main" w="0">
+            <a:noFill/>
+          </a:ln>
+        </p:spPr>
+        <p:txBody>
+          <a:bodyPr xmlns:a="http://schemas.openxmlformats.org/drawingml/2006/main">
+            <a:noAutofit/>
+          </a:bodyPr>
+          <a:lstStyle xmlns:a="http://schemas.openxmlformats.org/drawingml/2006/main">
+            <a:defPPr algn="ctr">
+              <a:defRPr sz="1200" b="0">
+                <a:solidFill>
+                  <a:srgbClr val="596273"/>
+                </a:solidFill>
+                <a:latin typeface="Arial"/>
+                <a:ea typeface="Arial"/>
+                <a:cs typeface="Arial"/>
+              </a:defRPr>
+            </a:defPPr>
+          </a:lstStyle>
+          <a:p xmlns:a="http://schemas.openxmlformats.org/drawingml/2006/main">
+            <a:pPr algn="ctr">
+              <a:defRPr sz="1200" b="0">
+                <a:solidFill>
+                  <a:srgbClr val="596273"/>
+                </a:solidFill>
+                <a:latin typeface="Arial"/>
+                <a:ea typeface="Arial"/>
+                <a:cs typeface="Arial"/>
+              </a:defRPr>
+            </a:pPr>
+            <a:r>
+              <a:rPr sz="1200" b="0">
+                <a:solidFill>
+                  <a:srgbClr val="596273"/>
+                </a:solidFill>
+                <a:latin typeface="Arial"/>
+                <a:ea typeface="Arial"/>
+                <a:cs typeface="Arial"/>
+              </a:rPr>
+              <a:t>O1</a:t>
+            </a:r>
+          </a:p>
+        </p:txBody>
+      </p:sp>
+      <p:sp>
+        <p:nvSpPr>
+          <p:cNvPr id="82" name="">
+            <a:extLst xmlns:a="http://schemas.openxmlformats.org/drawingml/2006/main">
+              <a:ext uri="{FF2B5EF4-FFF2-40B4-BE49-F238E27FC236}">
+                <a16:creationId xmlns:a16="http://schemas.microsoft.com/office/drawing/2014/main" id="{34E8199C-91E9-4BAF-89B3-81EE98860200}"/>
+              </a:ext>
+            </a:extLst>
+          </p:cNvPr>
+          <p:cNvSpPr>
+            <a:spLocks xmlns:a="http://schemas.openxmlformats.org/drawingml/2006/main" noGrp="1"/>
+          </p:cNvSpPr>
+          <p:nvPr/>
+        </p:nvSpPr>
+        <p:spPr>
+          <a:xfrm xmlns:a="http://schemas.openxmlformats.org/drawingml/2006/main">
+            <a:off x="10382250" y="3829050"/>
+            <a:ext cx="590550" cy="590550"/>
+          </a:xfrm>
+          <a:prstGeom xmlns:a="http://schemas.openxmlformats.org/drawingml/2006/main" prst="roundRect">
+            <a:avLst>
+              <a:gd name="adj" fmla="val 11290"/>
+            </a:avLst>
+          </a:prstGeom>
+          <a:solidFill xmlns:a="http://schemas.openxmlformats.org/drawingml/2006/main">
+            <a:srgbClr val="F0EAFE"/>
+          </a:solidFill>
+          <a:ln xmlns:a="http://schemas.openxmlformats.org/drawingml/2006/main" w="9525">
+            <a:solidFill>
+              <a:srgbClr val="F0EAFE"/>
+            </a:solidFill>
+            <a:prstDash val="solid"/>
+          </a:ln>
+        </p:spPr>
+      </p:sp>
+      <p:sp>
+        <p:nvSpPr>
+          <p:cNvPr id="83" name="">
+            <a:extLst xmlns:a="http://schemas.openxmlformats.org/drawingml/2006/main">
+              <a:ext uri="{FF2B5EF4-FFF2-40B4-BE49-F238E27FC236}">
+                <a16:creationId xmlns:a16="http://schemas.microsoft.com/office/drawing/2014/main" id="{2AE0A370-EA0E-4CAE-8264-B52F9E30DAD8}"/>
+              </a:ext>
+            </a:extLst>
+          </p:cNvPr>
+          <p:cNvSpPr>
+            <a:spLocks xmlns:a="http://schemas.openxmlformats.org/drawingml/2006/main" noGrp="1"/>
+          </p:cNvSpPr>
+          <p:nvPr/>
+        </p:nvSpPr>
+        <p:spPr>
+          <a:xfrm xmlns:a="http://schemas.openxmlformats.org/drawingml/2006/main">
+            <a:off x="10458450" y="3990975"/>
+            <a:ext cx="438150" cy="19050"/>
+          </a:xfrm>
+          <a:prstGeom xmlns:a="http://schemas.openxmlformats.org/drawingml/2006/main" prst="rect">
+            <a:avLst/>
+          </a:prstGeom>
+          <a:solidFill xmlns:a="http://schemas.openxmlformats.org/drawingml/2006/main">
+            <a:srgbClr val="FFFFFF"/>
+          </a:solidFill>
+          <a:ln xmlns:a="http://schemas.openxmlformats.org/drawingml/2006/main" w="9525">
+            <a:solidFill>
+              <a:srgbClr val="FFFFFF"/>
+            </a:solidFill>
+            <a:prstDash val="solid"/>
+          </a:ln>
+        </p:spPr>
+      </p:sp>
+      <p:sp>
+        <p:nvSpPr>
+          <p:cNvPr id="84" name="">
+            <a:extLst xmlns:a="http://schemas.openxmlformats.org/drawingml/2006/main">
+              <a:ext uri="{FF2B5EF4-FFF2-40B4-BE49-F238E27FC236}">
+                <a16:creationId xmlns:a16="http://schemas.microsoft.com/office/drawing/2014/main" id="{75E12B68-FBC0-4235-BB1D-701832FA451F}"/>
+              </a:ext>
+            </a:extLst>
+          </p:cNvPr>
+          <p:cNvSpPr>
+            <a:spLocks xmlns:a="http://schemas.openxmlformats.org/drawingml/2006/main" noGrp="1"/>
+          </p:cNvSpPr>
+          <p:nvPr/>
+        </p:nvSpPr>
+        <p:spPr>
+          <a:xfrm xmlns:a="http://schemas.openxmlformats.org/drawingml/2006/main">
+            <a:off x="10458450" y="4124325"/>
+            <a:ext cx="438150" cy="19050"/>
+          </a:xfrm>
+          <a:prstGeom xmlns:a="http://schemas.openxmlformats.org/drawingml/2006/main" prst="rect">
+            <a:avLst/>
+          </a:prstGeom>
+          <a:solidFill xmlns:a="http://schemas.openxmlformats.org/drawingml/2006/main">
+            <a:srgbClr val="FFFFFF"/>
+          </a:solidFill>
+          <a:ln xmlns:a="http://schemas.openxmlformats.org/drawingml/2006/main" w="9525">
+            <a:solidFill>
+              <a:srgbClr val="FFFFFF"/>
+            </a:solidFill>
+            <a:prstDash val="solid"/>
+          </a:ln>
+        </p:spPr>
+      </p:sp>
+      <p:sp>
+        <p:nvSpPr>
+          <p:cNvPr id="85" name="">
+            <a:extLst xmlns:a="http://schemas.openxmlformats.org/drawingml/2006/main">
+              <a:ext uri="{FF2B5EF4-FFF2-40B4-BE49-F238E27FC236}">
+                <a16:creationId xmlns:a16="http://schemas.microsoft.com/office/drawing/2014/main" id="{392C3D47-5AF7-4CFA-9951-A5A0491B40F8}"/>
+              </a:ext>
+            </a:extLst>
+          </p:cNvPr>
+          <p:cNvSpPr>
+            <a:spLocks xmlns:a="http://schemas.openxmlformats.org/drawingml/2006/main" noGrp="1"/>
+          </p:cNvSpPr>
+          <p:nvPr/>
+        </p:nvSpPr>
+        <p:spPr>
+          <a:xfrm xmlns:a="http://schemas.openxmlformats.org/drawingml/2006/main">
+            <a:off x="10458450" y="4257675"/>
+            <a:ext cx="438150" cy="19050"/>
+          </a:xfrm>
+          <a:prstGeom xmlns:a="http://schemas.openxmlformats.org/drawingml/2006/main" prst="rect">
+            <a:avLst/>
+          </a:prstGeom>
+          <a:solidFill xmlns:a="http://schemas.openxmlformats.org/drawingml/2006/main">
+            <a:srgbClr val="FFFFFF"/>
+          </a:solidFill>
+          <a:ln xmlns:a="http://schemas.openxmlformats.org/drawingml/2006/main" w="9525">
+            <a:solidFill>
+              <a:srgbClr val="FFFFFF"/>
+            </a:solidFill>
+            <a:prstDash val="solid"/>
+          </a:ln>
+        </p:spPr>
+      </p:sp>
+      <p:sp>
+        <p:nvSpPr>
+          <p:cNvPr id="86" name="">
+            <a:extLst xmlns:a="http://schemas.openxmlformats.org/drawingml/2006/main">
+              <a:ext uri="{FF2B5EF4-FFF2-40B4-BE49-F238E27FC236}">
+                <a16:creationId xmlns:a16="http://schemas.microsoft.com/office/drawing/2014/main" id="{2B74BE98-BB67-453A-8DBA-0AFD1DB024FE}"/>
+              </a:ext>
+            </a:extLst>
+          </p:cNvPr>
+          <p:cNvSpPr>
+            <a:spLocks xmlns:a="http://schemas.openxmlformats.org/drawingml/2006/main" noGrp="1"/>
+          </p:cNvSpPr>
+          <p:nvPr/>
+        </p:nvSpPr>
+        <p:spPr>
+          <a:xfrm xmlns:a="http://schemas.openxmlformats.org/drawingml/2006/main">
+            <a:off x="10382250" y="4495800"/>
+            <a:ext cx="590550" cy="190500"/>
+          </a:xfrm>
+          <a:prstGeom xmlns:a="http://schemas.openxmlformats.org/drawingml/2006/main" prst="rect">
+            <a:avLst/>
+          </a:prstGeom>
+          <a:noFill xmlns:a="http://schemas.openxmlformats.org/drawingml/2006/main"/>
+          <a:ln xmlns:a="http://schemas.openxmlformats.org/drawingml/2006/main" w="0">
+            <a:noFill/>
+          </a:ln>
+        </p:spPr>
+        <p:txBody>
+          <a:bodyPr xmlns:a="http://schemas.openxmlformats.org/drawingml/2006/main">
+            <a:noAutofit/>
+          </a:bodyPr>
+          <a:lstStyle xmlns:a="http://schemas.openxmlformats.org/drawingml/2006/main">
+            <a:defPPr algn="ctr">
+              <a:defRPr sz="1200" b="0">
+                <a:solidFill>
+                  <a:srgbClr val="596273"/>
+                </a:solidFill>
+                <a:latin typeface="Arial"/>
+                <a:ea typeface="Arial"/>
+                <a:cs typeface="Arial"/>
+              </a:defRPr>
+            </a:defPPr>
+          </a:lstStyle>
+          <a:p xmlns:a="http://schemas.openxmlformats.org/drawingml/2006/main">
+            <a:pPr algn="ctr">
+              <a:defRPr sz="1200" b="0">
+                <a:solidFill>
+                  <a:srgbClr val="596273"/>
+                </a:solidFill>
+                <a:latin typeface="Arial"/>
+                <a:ea typeface="Arial"/>
+                <a:cs typeface="Arial"/>
+              </a:defRPr>
+            </a:pPr>
+            <a:r>
+              <a:rPr sz="1200" b="0">
+                <a:solidFill>
+                  <a:srgbClr val="596273"/>
+                </a:solidFill>
+                <a:latin typeface="Arial"/>
+                <a:ea typeface="Arial"/>
+                <a:cs typeface="Arial"/>
+              </a:rPr>
+              <a:t>O2</a:t>
+            </a:r>
+          </a:p>
+        </p:txBody>
+      </p:sp>
+      <p:sp>
+        <p:nvSpPr>
+          <p:cNvPr id="87" name="">
+            <a:extLst xmlns:a="http://schemas.openxmlformats.org/drawingml/2006/main">
+              <a:ext uri="{FF2B5EF4-FFF2-40B4-BE49-F238E27FC236}">
+                <a16:creationId xmlns:a16="http://schemas.microsoft.com/office/drawing/2014/main" id="{8953C3F7-DF4A-44EA-8C59-89F2C6264BE5}"/>
+              </a:ext>
+            </a:extLst>
+          </p:cNvPr>
+          <p:cNvSpPr>
+            <a:spLocks xmlns:a="http://schemas.openxmlformats.org/drawingml/2006/main" noGrp="1"/>
+          </p:cNvSpPr>
+          <p:nvPr/>
+        </p:nvSpPr>
+        <p:spPr>
+          <a:xfrm xmlns:a="http://schemas.openxmlformats.org/drawingml/2006/main">
+            <a:off x="10572750" y="4629150"/>
+            <a:ext cx="228600" cy="228600"/>
           </a:xfrm>
           <a:prstGeom xmlns:a="http://schemas.openxmlformats.org/drawingml/2006/main" prst="rect">
             <a:avLst/>
@@ -18210,228 +19133,29 @@
                 <a:ea typeface="Arial"/>
                 <a:cs typeface="Arial"/>
               </a:rPr>
-              <a:t>1×1</a:t>
+              <a:t>…</a:t>
             </a:r>
           </a:p>
         </p:txBody>
       </p:sp>
       <p:sp>
         <p:nvSpPr>
-          <p:cNvPr id="66" name="">
-            <a:extLst xmlns:a="http://schemas.openxmlformats.org/drawingml/2006/main">
-              <a:ext uri="{FF2B5EF4-FFF2-40B4-BE49-F238E27FC236}">
-                <a16:creationId xmlns:a16="http://schemas.microsoft.com/office/drawing/2014/main" id="{B6B2E53D-6155-40EC-9835-17F945687B8A}"/>
-              </a:ext>
-            </a:extLst>
-          </p:cNvPr>
-          <p:cNvSpPr>
-            <a:spLocks xmlns:a="http://schemas.openxmlformats.org/drawingml/2006/main" noGrp="1"/>
-          </p:cNvSpPr>
-          <p:nvPr/>
-        </p:nvSpPr>
-        <p:spPr>
-          <a:xfrm xmlns:a="http://schemas.openxmlformats.org/drawingml/2006/main">
-            <a:off x="7543800" y="5276850"/>
-            <a:ext cx="914400" cy="28575"/>
-          </a:xfrm>
-          <a:prstGeom xmlns:a="http://schemas.openxmlformats.org/drawingml/2006/main" prst="rect">
-            <a:avLst/>
-          </a:prstGeom>
-          <a:solidFill xmlns:a="http://schemas.openxmlformats.org/drawingml/2006/main">
-            <a:srgbClr val="7C3AED"/>
-          </a:solidFill>
-          <a:ln xmlns:a="http://schemas.openxmlformats.org/drawingml/2006/main" w="9525">
-            <a:solidFill>
-              <a:srgbClr val="7C3AED"/>
-            </a:solidFill>
-            <a:prstDash val="solid"/>
-          </a:ln>
-        </p:spPr>
-      </p:sp>
-      <p:sp>
-        <p:nvSpPr>
-          <p:cNvPr id="67" name="">
-            <a:extLst xmlns:a="http://schemas.openxmlformats.org/drawingml/2006/main">
-              <a:ext uri="{FF2B5EF4-FFF2-40B4-BE49-F238E27FC236}">
-                <a16:creationId xmlns:a16="http://schemas.microsoft.com/office/drawing/2014/main" id="{7D47A649-93AC-456E-A9B2-55E5DB48A979}"/>
-              </a:ext>
-            </a:extLst>
-          </p:cNvPr>
-          <p:cNvSpPr>
-            <a:spLocks xmlns:a="http://schemas.openxmlformats.org/drawingml/2006/main" noGrp="1"/>
-          </p:cNvSpPr>
-          <p:nvPr/>
-        </p:nvSpPr>
-        <p:spPr>
-          <a:xfrm xmlns:a="http://schemas.openxmlformats.org/drawingml/2006/main">
-            <a:off x="8382000" y="5219700"/>
-            <a:ext cx="133350" cy="142875"/>
-          </a:xfrm>
-          <a:prstGeom xmlns:a="http://schemas.openxmlformats.org/drawingml/2006/main" prst="triangle">
-            <a:avLst/>
-          </a:prstGeom>
-          <a:solidFill xmlns:a="http://schemas.openxmlformats.org/drawingml/2006/main">
-            <a:srgbClr val="7C3AED"/>
-          </a:solidFill>
-          <a:ln xmlns:a="http://schemas.openxmlformats.org/drawingml/2006/main" w="0">
-            <a:solidFill>
-              <a:srgbClr val="7C3AED"/>
-            </a:solidFill>
-          </a:ln>
-        </p:spPr>
-      </p:sp>
-      <p:sp>
-        <p:nvSpPr>
-          <p:cNvPr id="68" name="">
-            <a:extLst xmlns:a="http://schemas.openxmlformats.org/drawingml/2006/main">
-              <a:ext uri="{FF2B5EF4-FFF2-40B4-BE49-F238E27FC236}">
-                <a16:creationId xmlns:a16="http://schemas.microsoft.com/office/drawing/2014/main" id="{77E84900-6288-49A1-B2FD-E3858547EF67}"/>
-              </a:ext>
-            </a:extLst>
-          </p:cNvPr>
-          <p:cNvSpPr>
-            <a:spLocks xmlns:a="http://schemas.openxmlformats.org/drawingml/2006/main" noGrp="1"/>
-          </p:cNvSpPr>
-          <p:nvPr/>
-        </p:nvSpPr>
-        <p:spPr>
-          <a:xfrm xmlns:a="http://schemas.openxmlformats.org/drawingml/2006/main">
-            <a:off x="8820150" y="4876800"/>
-            <a:ext cx="781050" cy="781050"/>
-          </a:xfrm>
-          <a:prstGeom xmlns:a="http://schemas.openxmlformats.org/drawingml/2006/main" prst="roundRect">
-            <a:avLst>
-              <a:gd name="adj" fmla="val 9756"/>
-            </a:avLst>
-          </a:prstGeom>
-          <a:solidFill xmlns:a="http://schemas.openxmlformats.org/drawingml/2006/main">
-            <a:srgbClr val="FBE9E4"/>
-          </a:solidFill>
-          <a:ln xmlns:a="http://schemas.openxmlformats.org/drawingml/2006/main" w="9525">
-            <a:solidFill>
-              <a:srgbClr val="FBE9E4"/>
-            </a:solidFill>
-            <a:prstDash val="solid"/>
-          </a:ln>
-        </p:spPr>
-      </p:sp>
-      <p:sp>
-        <p:nvSpPr>
-          <p:cNvPr id="69" name="">
-            <a:extLst xmlns:a="http://schemas.openxmlformats.org/drawingml/2006/main">
-              <a:ext uri="{FF2B5EF4-FFF2-40B4-BE49-F238E27FC236}">
-                <a16:creationId xmlns:a16="http://schemas.microsoft.com/office/drawing/2014/main" id="{E2B85E98-59DF-425C-B5DE-D86DE353F5CE}"/>
-              </a:ext>
-            </a:extLst>
-          </p:cNvPr>
-          <p:cNvSpPr>
-            <a:spLocks xmlns:a="http://schemas.openxmlformats.org/drawingml/2006/main" noGrp="1"/>
-          </p:cNvSpPr>
-          <p:nvPr/>
-        </p:nvSpPr>
-        <p:spPr>
-          <a:xfrm xmlns:a="http://schemas.openxmlformats.org/drawingml/2006/main">
-            <a:off x="8896350" y="5048250"/>
-            <a:ext cx="628650" cy="19050"/>
-          </a:xfrm>
-          <a:prstGeom xmlns:a="http://schemas.openxmlformats.org/drawingml/2006/main" prst="rect">
-            <a:avLst/>
-          </a:prstGeom>
-          <a:solidFill xmlns:a="http://schemas.openxmlformats.org/drawingml/2006/main">
-            <a:srgbClr val="FFFFFF"/>
-          </a:solidFill>
-          <a:ln xmlns:a="http://schemas.openxmlformats.org/drawingml/2006/main" w="9525">
-            <a:solidFill>
-              <a:srgbClr val="FFFFFF"/>
-            </a:solidFill>
-            <a:prstDash val="solid"/>
-          </a:ln>
-        </p:spPr>
-      </p:sp>
-      <p:sp>
-        <p:nvSpPr>
-          <p:cNvPr id="70" name="">
-            <a:extLst xmlns:a="http://schemas.openxmlformats.org/drawingml/2006/main">
-              <a:ext uri="{FF2B5EF4-FFF2-40B4-BE49-F238E27FC236}">
-                <a16:creationId xmlns:a16="http://schemas.microsoft.com/office/drawing/2014/main" id="{B59263D2-8C31-49AD-B4EE-394F6666FA66}"/>
-              </a:ext>
-            </a:extLst>
-          </p:cNvPr>
-          <p:cNvSpPr>
-            <a:spLocks xmlns:a="http://schemas.openxmlformats.org/drawingml/2006/main" noGrp="1"/>
-          </p:cNvSpPr>
-          <p:nvPr/>
-        </p:nvSpPr>
-        <p:spPr>
-          <a:xfrm xmlns:a="http://schemas.openxmlformats.org/drawingml/2006/main">
-            <a:off x="8896350" y="5219700"/>
-            <a:ext cx="628650" cy="19050"/>
-          </a:xfrm>
-          <a:prstGeom xmlns:a="http://schemas.openxmlformats.org/drawingml/2006/main" prst="rect">
-            <a:avLst/>
-          </a:prstGeom>
-          <a:solidFill xmlns:a="http://schemas.openxmlformats.org/drawingml/2006/main">
-            <a:srgbClr val="FFFFFF"/>
-          </a:solidFill>
-          <a:ln xmlns:a="http://schemas.openxmlformats.org/drawingml/2006/main" w="9525">
-            <a:solidFill>
-              <a:srgbClr val="FFFFFF"/>
-            </a:solidFill>
-            <a:prstDash val="solid"/>
-          </a:ln>
-        </p:spPr>
-      </p:sp>
-      <p:sp>
-        <p:nvSpPr>
-          <p:cNvPr id="71" name="">
-            <a:extLst xmlns:a="http://schemas.openxmlformats.org/drawingml/2006/main">
-              <a:ext uri="{FF2B5EF4-FFF2-40B4-BE49-F238E27FC236}">
-                <a16:creationId xmlns:a16="http://schemas.microsoft.com/office/drawing/2014/main" id="{1A4013D7-9780-4295-A20F-7D948334B197}"/>
-              </a:ext>
-            </a:extLst>
-          </p:cNvPr>
-          <p:cNvSpPr>
-            <a:spLocks xmlns:a="http://schemas.openxmlformats.org/drawingml/2006/main" noGrp="1"/>
-          </p:cNvSpPr>
-          <p:nvPr/>
-        </p:nvSpPr>
-        <p:spPr>
-          <a:xfrm xmlns:a="http://schemas.openxmlformats.org/drawingml/2006/main">
-            <a:off x="8896350" y="5391150"/>
-            <a:ext cx="628650" cy="19050"/>
-          </a:xfrm>
-          <a:prstGeom xmlns:a="http://schemas.openxmlformats.org/drawingml/2006/main" prst="rect">
-            <a:avLst/>
-          </a:prstGeom>
-          <a:solidFill xmlns:a="http://schemas.openxmlformats.org/drawingml/2006/main">
-            <a:srgbClr val="FFFFFF"/>
-          </a:solidFill>
-          <a:ln xmlns:a="http://schemas.openxmlformats.org/drawingml/2006/main" w="9525">
-            <a:solidFill>
-              <a:srgbClr val="FFFFFF"/>
-            </a:solidFill>
-            <a:prstDash val="solid"/>
-          </a:ln>
-        </p:spPr>
-      </p:sp>
-      <p:sp>
-        <p:nvSpPr>
-          <p:cNvPr id="72" name="">
-            <a:extLst xmlns:a="http://schemas.openxmlformats.org/drawingml/2006/main">
-              <a:ext uri="{FF2B5EF4-FFF2-40B4-BE49-F238E27FC236}">
-                <a16:creationId xmlns:a16="http://schemas.microsoft.com/office/drawing/2014/main" id="{8D6988E2-804F-478F-B0A8-052679049357}"/>
-              </a:ext>
-            </a:extLst>
-          </p:cNvPr>
-          <p:cNvSpPr>
-            <a:spLocks xmlns:a="http://schemas.openxmlformats.org/drawingml/2006/main" noGrp="1"/>
-          </p:cNvSpPr>
-          <p:nvPr/>
-        </p:nvSpPr>
-        <p:spPr>
-          <a:xfrm xmlns:a="http://schemas.openxmlformats.org/drawingml/2006/main">
-            <a:off x="8820150" y="5743575"/>
-            <a:ext cx="781050" cy="228600"/>
+          <p:cNvPr id="88" name="">
+            <a:extLst xmlns:a="http://schemas.openxmlformats.org/drawingml/2006/main">
+              <a:ext uri="{FF2B5EF4-FFF2-40B4-BE49-F238E27FC236}">
+                <a16:creationId xmlns:a16="http://schemas.microsoft.com/office/drawing/2014/main" id="{2331ABC3-F523-4903-BDF0-682C44EA069B}"/>
+              </a:ext>
+            </a:extLst>
+          </p:cNvPr>
+          <p:cNvSpPr>
+            <a:spLocks xmlns:a="http://schemas.openxmlformats.org/drawingml/2006/main" noGrp="1"/>
+          </p:cNvSpPr>
+          <p:nvPr/>
+        </p:nvSpPr>
+        <p:spPr>
+          <a:xfrm xmlns:a="http://schemas.openxmlformats.org/drawingml/2006/main">
+            <a:off x="6572250" y="5238750"/>
+            <a:ext cx="4381500" cy="247650"/>
           </a:xfrm>
           <a:prstGeom xmlns:a="http://schemas.openxmlformats.org/drawingml/2006/main" prst="rect">
             <a:avLst/>
@@ -18477,15 +19201,83 @@
                 <a:ea typeface="Arial"/>
                 <a:cs typeface="Arial"/>
               </a:rPr>
-              <a:t>Cout</a:t>
+              <a:t>новые каналы O1, O2, …, Cout</a:t>
             </a:r>
           </a:p>
         </p:txBody>
       </p:sp>
+      <p:sp>
+        <p:nvSpPr>
+          <p:cNvPr id="89" name="">
+            <a:extLst xmlns:a="http://schemas.openxmlformats.org/drawingml/2006/main">
+              <a:ext uri="{FF2B5EF4-FFF2-40B4-BE49-F238E27FC236}">
+                <a16:creationId xmlns:a16="http://schemas.microsoft.com/office/drawing/2014/main" id="{60B86FA7-00B3-49EA-9608-B89BACE13DDA}"/>
+              </a:ext>
+            </a:extLst>
+          </p:cNvPr>
+          <p:cNvSpPr>
+            <a:spLocks xmlns:a="http://schemas.openxmlformats.org/drawingml/2006/main" noGrp="1"/>
+          </p:cNvSpPr>
+          <p:nvPr/>
+        </p:nvSpPr>
+        <p:spPr>
+          <a:xfrm xmlns:a="http://schemas.openxmlformats.org/drawingml/2006/main">
+            <a:off x="723900" y="5886450"/>
+            <a:ext cx="10096500" cy="323850"/>
+          </a:xfrm>
+          <a:prstGeom xmlns:a="http://schemas.openxmlformats.org/drawingml/2006/main" prst="rect">
+            <a:avLst/>
+          </a:prstGeom>
+          <a:noFill xmlns:a="http://schemas.openxmlformats.org/drawingml/2006/main"/>
+          <a:ln xmlns:a="http://schemas.openxmlformats.org/drawingml/2006/main" w="0">
+            <a:noFill/>
+          </a:ln>
+        </p:spPr>
+        <p:txBody>
+          <a:bodyPr xmlns:a="http://schemas.openxmlformats.org/drawingml/2006/main">
+            <a:noAutofit/>
+          </a:bodyPr>
+          <a:lstStyle xmlns:a="http://schemas.openxmlformats.org/drawingml/2006/main">
+            <a:defPPr algn="l">
+              <a:defRPr sz="1800" b="0">
+                <a:solidFill>
+                  <a:srgbClr val="111827"/>
+                </a:solidFill>
+                <a:latin typeface="Arial"/>
+                <a:ea typeface="Arial"/>
+                <a:cs typeface="Arial"/>
+              </a:defRPr>
+            </a:defPPr>
+          </a:lstStyle>
+          <a:p xmlns:a="http://schemas.openxmlformats.org/drawingml/2006/main">
+            <a:pPr algn="l">
+              <a:defRPr sz="1800" b="0">
+                <a:solidFill>
+                  <a:srgbClr val="111827"/>
+                </a:solidFill>
+                <a:latin typeface="Arial"/>
+                <a:ea typeface="Arial"/>
+                <a:cs typeface="Arial"/>
+              </a:defRPr>
+            </a:pPr>
+            <a:r>
+              <a:rPr sz="1800" b="0">
+                <a:solidFill>
+                  <a:srgbClr val="111827"/>
+                </a:solidFill>
+                <a:latin typeface="Arial"/>
+                <a:ea typeface="Arial"/>
+                <a:cs typeface="Arial"/>
+              </a:rPr>
+              <a:t>Итого: depthwise отвечает за пространство, pointwise — за связи между каналами</a:t>
+            </a:r>
+          </a:p>
+        </p:txBody>
+      </p:sp>
     </p:spTree>
     <p:extLst>
       <p:ext uri="{BB962C8B-B14F-4D97-AF65-F5344CB8AC3E}">
-        <p14:creationId xmlns:p14="http://schemas.microsoft.com/office/powerpoint/2010/main" val="1835869844"/>
+        <p14:creationId xmlns:p14="http://schemas.microsoft.com/office/powerpoint/2010/main" val="169101578"/>
       </p:ext>
     </p:extLst>
   </p:cSld>
@@ -18516,7 +19308,7 @@
           <p:cNvPr id="68" name="">
             <a:extLst xmlns:a="http://schemas.openxmlformats.org/drawingml/2006/main">
               <a:ext uri="{FF2B5EF4-FFF2-40B4-BE49-F238E27FC236}">
-                <a16:creationId xmlns:a16="http://schemas.microsoft.com/office/drawing/2014/main" id="{FC25B9CF-0AA7-4902-864F-2D811A42627B}"/>
+                <a16:creationId xmlns:a16="http://schemas.microsoft.com/office/drawing/2014/main" id="{2259D2C8-3A23-473A-825B-9D970794C309}"/>
               </a:ext>
             </a:extLst>
           </p:cNvPr>
@@ -18584,7 +19376,7 @@
           <p:cNvPr id="2" name="">
             <a:extLst xmlns:a="http://schemas.openxmlformats.org/drawingml/2006/main">
               <a:ext uri="{FF2B5EF4-FFF2-40B4-BE49-F238E27FC236}">
-                <a16:creationId xmlns:a16="http://schemas.microsoft.com/office/drawing/2014/main" id="{CDC4A299-1E15-4609-872F-57D922422391}"/>
+                <a16:creationId xmlns:a16="http://schemas.microsoft.com/office/drawing/2014/main" id="{80A579DF-1E9F-4900-BFAC-8B219C476B48}"/>
               </a:ext>
             </a:extLst>
           </p:cNvPr>
@@ -18617,7 +19409,7 @@
           <p:cNvPr id="3" name="">
             <a:extLst xmlns:a="http://schemas.openxmlformats.org/drawingml/2006/main">
               <a:ext uri="{FF2B5EF4-FFF2-40B4-BE49-F238E27FC236}">
-                <a16:creationId xmlns:a16="http://schemas.microsoft.com/office/drawing/2014/main" id="{69173FBD-1A47-4D9C-A5BD-E04CE1AD9E0D}"/>
+                <a16:creationId xmlns:a16="http://schemas.microsoft.com/office/drawing/2014/main" id="{9B6CA581-4D2C-4538-9CC8-F9344387C24A}"/>
               </a:ext>
             </a:extLst>
           </p:cNvPr>
@@ -18685,7 +19477,7 @@
           <p:cNvPr id="4" name="">
             <a:extLst xmlns:a="http://schemas.openxmlformats.org/drawingml/2006/main">
               <a:ext uri="{FF2B5EF4-FFF2-40B4-BE49-F238E27FC236}">
-                <a16:creationId xmlns:a16="http://schemas.microsoft.com/office/drawing/2014/main" id="{6C34D662-7631-4352-B0AC-4C01E6CBAA8C}"/>
+                <a16:creationId xmlns:a16="http://schemas.microsoft.com/office/drawing/2014/main" id="{D879FA53-D864-4A40-B49F-091FD7397BA2}"/>
               </a:ext>
             </a:extLst>
           </p:cNvPr>
@@ -18753,7 +19545,7 @@
           <p:cNvPr id="5" name="">
             <a:extLst xmlns:a="http://schemas.openxmlformats.org/drawingml/2006/main">
               <a:ext uri="{FF2B5EF4-FFF2-40B4-BE49-F238E27FC236}">
-                <a16:creationId xmlns:a16="http://schemas.microsoft.com/office/drawing/2014/main" id="{46030F10-431E-4111-88E7-E0719C902182}"/>
+                <a16:creationId xmlns:a16="http://schemas.microsoft.com/office/drawing/2014/main" id="{8F2A8FF7-6D47-4491-B4FC-4CD605916860}"/>
               </a:ext>
             </a:extLst>
           </p:cNvPr>
@@ -18783,7 +19575,7 @@
           <p:cNvPr id="6" name="">
             <a:extLst xmlns:a="http://schemas.openxmlformats.org/drawingml/2006/main">
               <a:ext uri="{FF2B5EF4-FFF2-40B4-BE49-F238E27FC236}">
-                <a16:creationId xmlns:a16="http://schemas.microsoft.com/office/drawing/2014/main" id="{9B768910-9B74-4C76-B6BC-6B0745CAE0AC}"/>
+                <a16:creationId xmlns:a16="http://schemas.microsoft.com/office/drawing/2014/main" id="{BF3EE176-972B-486A-98EF-E074CAA5D114}"/>
               </a:ext>
             </a:extLst>
           </p:cNvPr>
@@ -18813,7 +19605,7 @@
           <p:cNvPr id="7" name="">
             <a:extLst xmlns:a="http://schemas.openxmlformats.org/drawingml/2006/main">
               <a:ext uri="{FF2B5EF4-FFF2-40B4-BE49-F238E27FC236}">
-                <a16:creationId xmlns:a16="http://schemas.microsoft.com/office/drawing/2014/main" id="{D2514E5F-0928-4230-9326-A69D64629263}"/>
+                <a16:creationId xmlns:a16="http://schemas.microsoft.com/office/drawing/2014/main" id="{010CB30B-852A-4FE0-BDB4-B9028D5BBAD4}"/>
               </a:ext>
             </a:extLst>
           </p:cNvPr>
@@ -18843,7 +19635,7 @@
           <p:cNvPr id="8" name="">
             <a:extLst xmlns:a="http://schemas.openxmlformats.org/drawingml/2006/main">
               <a:ext uri="{FF2B5EF4-FFF2-40B4-BE49-F238E27FC236}">
-                <a16:creationId xmlns:a16="http://schemas.microsoft.com/office/drawing/2014/main" id="{2E9A9813-3D5A-4F11-A0FE-40D7F88127FA}"/>
+                <a16:creationId xmlns:a16="http://schemas.microsoft.com/office/drawing/2014/main" id="{8A02DA7F-DB6F-48AF-9DC2-2BDA7F6177ED}"/>
               </a:ext>
             </a:extLst>
           </p:cNvPr>
@@ -18873,7 +19665,7 @@
           <p:cNvPr id="9" name="">
             <a:extLst xmlns:a="http://schemas.openxmlformats.org/drawingml/2006/main">
               <a:ext uri="{FF2B5EF4-FFF2-40B4-BE49-F238E27FC236}">
-                <a16:creationId xmlns:a16="http://schemas.microsoft.com/office/drawing/2014/main" id="{EB1EDC7B-0BD2-4177-9BB6-A6C06E725491}"/>
+                <a16:creationId xmlns:a16="http://schemas.microsoft.com/office/drawing/2014/main" id="{9604AAAE-EA05-4D26-840B-0F53C2FCEE02}"/>
               </a:ext>
             </a:extLst>
           </p:cNvPr>
@@ -18903,7 +19695,7 @@
           <p:cNvPr id="10" name="">
             <a:extLst xmlns:a="http://schemas.openxmlformats.org/drawingml/2006/main">
               <a:ext uri="{FF2B5EF4-FFF2-40B4-BE49-F238E27FC236}">
-                <a16:creationId xmlns:a16="http://schemas.microsoft.com/office/drawing/2014/main" id="{D1A69F7A-B824-42C1-AF7F-097C14B2FC8C}"/>
+                <a16:creationId xmlns:a16="http://schemas.microsoft.com/office/drawing/2014/main" id="{25923445-65B0-449A-9B34-97084D4A4F17}"/>
               </a:ext>
             </a:extLst>
           </p:cNvPr>
@@ -18933,7 +19725,7 @@
           <p:cNvPr id="11" name="">
             <a:extLst xmlns:a="http://schemas.openxmlformats.org/drawingml/2006/main">
               <a:ext uri="{FF2B5EF4-FFF2-40B4-BE49-F238E27FC236}">
-                <a16:creationId xmlns:a16="http://schemas.microsoft.com/office/drawing/2014/main" id="{66DF5072-961D-4B6F-8B48-595E9CBE25A0}"/>
+                <a16:creationId xmlns:a16="http://schemas.microsoft.com/office/drawing/2014/main" id="{4BF69306-D275-4BC2-A312-86FA53B8C65B}"/>
               </a:ext>
             </a:extLst>
           </p:cNvPr>
@@ -18963,7 +19755,7 @@
           <p:cNvPr id="12" name="">
             <a:extLst xmlns:a="http://schemas.openxmlformats.org/drawingml/2006/main">
               <a:ext uri="{FF2B5EF4-FFF2-40B4-BE49-F238E27FC236}">
-                <a16:creationId xmlns:a16="http://schemas.microsoft.com/office/drawing/2014/main" id="{9EE07A18-CF5C-4471-ADEC-7C0CAE9A5522}"/>
+                <a16:creationId xmlns:a16="http://schemas.microsoft.com/office/drawing/2014/main" id="{67F98EC9-D44B-4312-9102-53643D9B6F93}"/>
               </a:ext>
             </a:extLst>
           </p:cNvPr>
@@ -18993,7 +19785,7 @@
           <p:cNvPr id="13" name="">
             <a:extLst xmlns:a="http://schemas.openxmlformats.org/drawingml/2006/main">
               <a:ext uri="{FF2B5EF4-FFF2-40B4-BE49-F238E27FC236}">
-                <a16:creationId xmlns:a16="http://schemas.microsoft.com/office/drawing/2014/main" id="{C8FD5E06-C0FD-4E5C-9CE0-0133EA1761C7}"/>
+                <a16:creationId xmlns:a16="http://schemas.microsoft.com/office/drawing/2014/main" id="{0D8C71C8-0A19-49D7-83C1-B0DD2608C351}"/>
               </a:ext>
             </a:extLst>
           </p:cNvPr>
@@ -19023,7 +19815,7 @@
           <p:cNvPr id="14" name="">
             <a:extLst xmlns:a="http://schemas.openxmlformats.org/drawingml/2006/main">
               <a:ext uri="{FF2B5EF4-FFF2-40B4-BE49-F238E27FC236}">
-                <a16:creationId xmlns:a16="http://schemas.microsoft.com/office/drawing/2014/main" id="{A3F8B50E-10F4-452F-8E2D-AFB6CB2A6CA7}"/>
+                <a16:creationId xmlns:a16="http://schemas.microsoft.com/office/drawing/2014/main" id="{E341AA3C-21D6-4514-B528-EA624C61E2EA}"/>
               </a:ext>
             </a:extLst>
           </p:cNvPr>
@@ -19053,7 +19845,7 @@
           <p:cNvPr id="15" name="">
             <a:extLst xmlns:a="http://schemas.openxmlformats.org/drawingml/2006/main">
               <a:ext uri="{FF2B5EF4-FFF2-40B4-BE49-F238E27FC236}">
-                <a16:creationId xmlns:a16="http://schemas.microsoft.com/office/drawing/2014/main" id="{44A9C1EE-97AA-483C-8CDB-98D75CA442AC}"/>
+                <a16:creationId xmlns:a16="http://schemas.microsoft.com/office/drawing/2014/main" id="{6C8FE653-FB71-4DF9-8224-DDD2B158C5B2}"/>
               </a:ext>
             </a:extLst>
           </p:cNvPr>
@@ -19083,7 +19875,7 @@
           <p:cNvPr id="16" name="">
             <a:extLst xmlns:a="http://schemas.openxmlformats.org/drawingml/2006/main">
               <a:ext uri="{FF2B5EF4-FFF2-40B4-BE49-F238E27FC236}">
-                <a16:creationId xmlns:a16="http://schemas.microsoft.com/office/drawing/2014/main" id="{30ED1DC7-E80E-4947-889D-F7C96911FDBD}"/>
+                <a16:creationId xmlns:a16="http://schemas.microsoft.com/office/drawing/2014/main" id="{938049DF-4A35-4A47-B3F4-A86FD71EE47C}"/>
               </a:ext>
             </a:extLst>
           </p:cNvPr>
@@ -19113,7 +19905,7 @@
           <p:cNvPr id="17" name="">
             <a:extLst xmlns:a="http://schemas.openxmlformats.org/drawingml/2006/main">
               <a:ext uri="{FF2B5EF4-FFF2-40B4-BE49-F238E27FC236}">
-                <a16:creationId xmlns:a16="http://schemas.microsoft.com/office/drawing/2014/main" id="{FEC1A52A-9DD9-445F-BF7A-D66673B0D322}"/>
+                <a16:creationId xmlns:a16="http://schemas.microsoft.com/office/drawing/2014/main" id="{B98987EC-1B37-465D-B30B-ED2F8BE729AE}"/>
               </a:ext>
             </a:extLst>
           </p:cNvPr>
@@ -19143,7 +19935,7 @@
           <p:cNvPr id="18" name="">
             <a:extLst xmlns:a="http://schemas.openxmlformats.org/drawingml/2006/main">
               <a:ext uri="{FF2B5EF4-FFF2-40B4-BE49-F238E27FC236}">
-                <a16:creationId xmlns:a16="http://schemas.microsoft.com/office/drawing/2014/main" id="{EF4A0771-B001-4B1F-BC49-34B9C54C3E04}"/>
+                <a16:creationId xmlns:a16="http://schemas.microsoft.com/office/drawing/2014/main" id="{51005443-5EA7-4438-8DB3-0507BE6B42A0}"/>
               </a:ext>
             </a:extLst>
           </p:cNvPr>
@@ -19173,7 +19965,7 @@
           <p:cNvPr id="19" name="">
             <a:extLst xmlns:a="http://schemas.openxmlformats.org/drawingml/2006/main">
               <a:ext uri="{FF2B5EF4-FFF2-40B4-BE49-F238E27FC236}">
-                <a16:creationId xmlns:a16="http://schemas.microsoft.com/office/drawing/2014/main" id="{65247C42-C467-4561-8E74-F9545FEE1565}"/>
+                <a16:creationId xmlns:a16="http://schemas.microsoft.com/office/drawing/2014/main" id="{67BC06C5-0150-44D1-A204-AC71C38F86E6}"/>
               </a:ext>
             </a:extLst>
           </p:cNvPr>
@@ -19203,7 +19995,7 @@
           <p:cNvPr id="20" name="">
             <a:extLst xmlns:a="http://schemas.openxmlformats.org/drawingml/2006/main">
               <a:ext uri="{FF2B5EF4-FFF2-40B4-BE49-F238E27FC236}">
-                <a16:creationId xmlns:a16="http://schemas.microsoft.com/office/drawing/2014/main" id="{59CC2936-280E-4E4A-BF23-986CF52A2F2E}"/>
+                <a16:creationId xmlns:a16="http://schemas.microsoft.com/office/drawing/2014/main" id="{8C539C2F-0B20-4A41-A411-910614E122A4}"/>
               </a:ext>
             </a:extLst>
           </p:cNvPr>
@@ -19233,7 +20025,7 @@
           <p:cNvPr id="21" name="">
             <a:extLst xmlns:a="http://schemas.openxmlformats.org/drawingml/2006/main">
               <a:ext uri="{FF2B5EF4-FFF2-40B4-BE49-F238E27FC236}">
-                <a16:creationId xmlns:a16="http://schemas.microsoft.com/office/drawing/2014/main" id="{31ABD855-0AA0-4D34-BD60-DD9B04DEE6B1}"/>
+                <a16:creationId xmlns:a16="http://schemas.microsoft.com/office/drawing/2014/main" id="{E6CA2C11-7257-467F-91B2-F6453AE000E7}"/>
               </a:ext>
             </a:extLst>
           </p:cNvPr>
@@ -19263,7 +20055,7 @@
           <p:cNvPr id="22" name="">
             <a:extLst xmlns:a="http://schemas.openxmlformats.org/drawingml/2006/main">
               <a:ext uri="{FF2B5EF4-FFF2-40B4-BE49-F238E27FC236}">
-                <a16:creationId xmlns:a16="http://schemas.microsoft.com/office/drawing/2014/main" id="{F1E21088-DCEE-4EEC-9595-075848A00C44}"/>
+                <a16:creationId xmlns:a16="http://schemas.microsoft.com/office/drawing/2014/main" id="{59F28AD2-DE40-43B0-A080-DCB219E796EA}"/>
               </a:ext>
             </a:extLst>
           </p:cNvPr>
@@ -19293,7 +20085,7 @@
           <p:cNvPr id="23" name="">
             <a:extLst xmlns:a="http://schemas.openxmlformats.org/drawingml/2006/main">
               <a:ext uri="{FF2B5EF4-FFF2-40B4-BE49-F238E27FC236}">
-                <a16:creationId xmlns:a16="http://schemas.microsoft.com/office/drawing/2014/main" id="{F23E1DE3-01FB-492F-918A-195FF043195B}"/>
+                <a16:creationId xmlns:a16="http://schemas.microsoft.com/office/drawing/2014/main" id="{D6F6A860-1BF5-43DC-8091-7FEDEE6CE2DC}"/>
               </a:ext>
             </a:extLst>
           </p:cNvPr>
@@ -19323,7 +20115,7 @@
           <p:cNvPr id="24" name="">
             <a:extLst xmlns:a="http://schemas.openxmlformats.org/drawingml/2006/main">
               <a:ext uri="{FF2B5EF4-FFF2-40B4-BE49-F238E27FC236}">
-                <a16:creationId xmlns:a16="http://schemas.microsoft.com/office/drawing/2014/main" id="{78CAF9F3-8CC8-4EDC-AC6A-BB87060407D3}"/>
+                <a16:creationId xmlns:a16="http://schemas.microsoft.com/office/drawing/2014/main" id="{206ACB7A-FF08-45A0-B261-6B8B8D512850}"/>
               </a:ext>
             </a:extLst>
           </p:cNvPr>
@@ -19353,7 +20145,7 @@
           <p:cNvPr id="25" name="">
             <a:extLst xmlns:a="http://schemas.openxmlformats.org/drawingml/2006/main">
               <a:ext uri="{FF2B5EF4-FFF2-40B4-BE49-F238E27FC236}">
-                <a16:creationId xmlns:a16="http://schemas.microsoft.com/office/drawing/2014/main" id="{2C4886EE-797C-430A-903B-2167817C63B9}"/>
+                <a16:creationId xmlns:a16="http://schemas.microsoft.com/office/drawing/2014/main" id="{1FC01F37-3BC2-4104-A014-E1198AD3407F}"/>
               </a:ext>
             </a:extLst>
           </p:cNvPr>
@@ -19383,7 +20175,7 @@
           <p:cNvPr id="26" name="">
             <a:extLst xmlns:a="http://schemas.openxmlformats.org/drawingml/2006/main">
               <a:ext uri="{FF2B5EF4-FFF2-40B4-BE49-F238E27FC236}">
-                <a16:creationId xmlns:a16="http://schemas.microsoft.com/office/drawing/2014/main" id="{0CA18D9C-BA11-4C6F-A8A7-3CE11645D2C3}"/>
+                <a16:creationId xmlns:a16="http://schemas.microsoft.com/office/drawing/2014/main" id="{5A7852DE-AAD0-4967-B7B4-2524DE0B95CA}"/>
               </a:ext>
             </a:extLst>
           </p:cNvPr>
@@ -19413,7 +20205,7 @@
           <p:cNvPr id="27" name="">
             <a:extLst xmlns:a="http://schemas.openxmlformats.org/drawingml/2006/main">
               <a:ext uri="{FF2B5EF4-FFF2-40B4-BE49-F238E27FC236}">
-                <a16:creationId xmlns:a16="http://schemas.microsoft.com/office/drawing/2014/main" id="{CDD68F56-69C7-4E5A-A1C2-B510192E249E}"/>
+                <a16:creationId xmlns:a16="http://schemas.microsoft.com/office/drawing/2014/main" id="{548D4889-AE02-4274-9092-6247F7066FFC}"/>
               </a:ext>
             </a:extLst>
           </p:cNvPr>
@@ -19443,7 +20235,7 @@
           <p:cNvPr id="28" name="">
             <a:extLst xmlns:a="http://schemas.openxmlformats.org/drawingml/2006/main">
               <a:ext uri="{FF2B5EF4-FFF2-40B4-BE49-F238E27FC236}">
-                <a16:creationId xmlns:a16="http://schemas.microsoft.com/office/drawing/2014/main" id="{41BBEA84-43C4-41BC-8DEA-F031593327E8}"/>
+                <a16:creationId xmlns:a16="http://schemas.microsoft.com/office/drawing/2014/main" id="{E90D60FF-4D86-4BA1-98B9-A50569113880}"/>
               </a:ext>
             </a:extLst>
           </p:cNvPr>
@@ -19473,7 +20265,7 @@
           <p:cNvPr id="29" name="">
             <a:extLst xmlns:a="http://schemas.openxmlformats.org/drawingml/2006/main">
               <a:ext uri="{FF2B5EF4-FFF2-40B4-BE49-F238E27FC236}">
-                <a16:creationId xmlns:a16="http://schemas.microsoft.com/office/drawing/2014/main" id="{3825DD1B-1A0C-484E-93A8-BBA97A0E410A}"/>
+                <a16:creationId xmlns:a16="http://schemas.microsoft.com/office/drawing/2014/main" id="{99EA79B8-AF16-47ED-A318-30B797F84663}"/>
               </a:ext>
             </a:extLst>
           </p:cNvPr>
@@ -19503,7 +20295,7 @@
           <p:cNvPr id="30" name="">
             <a:extLst xmlns:a="http://schemas.openxmlformats.org/drawingml/2006/main">
               <a:ext uri="{FF2B5EF4-FFF2-40B4-BE49-F238E27FC236}">
-                <a16:creationId xmlns:a16="http://schemas.microsoft.com/office/drawing/2014/main" id="{D0F4BF88-1DAA-44B3-9D34-6737A797A4F6}"/>
+                <a16:creationId xmlns:a16="http://schemas.microsoft.com/office/drawing/2014/main" id="{25E18A04-66C7-4C92-9968-2E1DE5A7398B}"/>
               </a:ext>
             </a:extLst>
           </p:cNvPr>
@@ -19571,7 +20363,7 @@
           <p:cNvPr id="31" name="">
             <a:extLst xmlns:a="http://schemas.openxmlformats.org/drawingml/2006/main">
               <a:ext uri="{FF2B5EF4-FFF2-40B4-BE49-F238E27FC236}">
-                <a16:creationId xmlns:a16="http://schemas.microsoft.com/office/drawing/2014/main" id="{5B5CC63F-CC08-429C-8923-266B4E2E5FC1}"/>
+                <a16:creationId xmlns:a16="http://schemas.microsoft.com/office/drawing/2014/main" id="{8425437C-E0D0-47CB-BCF7-4D7F680D67DF}"/>
               </a:ext>
             </a:extLst>
           </p:cNvPr>
@@ -19601,7 +20393,7 @@
           <p:cNvPr id="32" name="">
             <a:extLst xmlns:a="http://schemas.openxmlformats.org/drawingml/2006/main">
               <a:ext uri="{FF2B5EF4-FFF2-40B4-BE49-F238E27FC236}">
-                <a16:creationId xmlns:a16="http://schemas.microsoft.com/office/drawing/2014/main" id="{6676ADB4-BB9D-40A8-A7F8-4083B62977C9}"/>
+                <a16:creationId xmlns:a16="http://schemas.microsoft.com/office/drawing/2014/main" id="{2BF3E76F-C436-4991-B1F1-56665196A555}"/>
               </a:ext>
             </a:extLst>
           </p:cNvPr>
@@ -19631,7 +20423,7 @@
           <p:cNvPr id="33" name="">
             <a:extLst xmlns:a="http://schemas.openxmlformats.org/drawingml/2006/main">
               <a:ext uri="{FF2B5EF4-FFF2-40B4-BE49-F238E27FC236}">
-                <a16:creationId xmlns:a16="http://schemas.microsoft.com/office/drawing/2014/main" id="{33937FF2-7DCB-45AA-A56F-07FB7CE30B09}"/>
+                <a16:creationId xmlns:a16="http://schemas.microsoft.com/office/drawing/2014/main" id="{C5ACB260-6406-46E9-9EDF-1C38AF5941A4}"/>
               </a:ext>
             </a:extLst>
           </p:cNvPr>
@@ -19661,7 +20453,7 @@
           <p:cNvPr id="34" name="">
             <a:extLst xmlns:a="http://schemas.openxmlformats.org/drawingml/2006/main">
               <a:ext uri="{FF2B5EF4-FFF2-40B4-BE49-F238E27FC236}">
-                <a16:creationId xmlns:a16="http://schemas.microsoft.com/office/drawing/2014/main" id="{8E7BAB8F-73E5-456E-AE4E-21770C0D2D89}"/>
+                <a16:creationId xmlns:a16="http://schemas.microsoft.com/office/drawing/2014/main" id="{1900A77D-617D-45AD-BB07-6CD0C8680A65}"/>
               </a:ext>
             </a:extLst>
           </p:cNvPr>
@@ -19691,7 +20483,7 @@
           <p:cNvPr id="35" name="">
             <a:extLst xmlns:a="http://schemas.openxmlformats.org/drawingml/2006/main">
               <a:ext uri="{FF2B5EF4-FFF2-40B4-BE49-F238E27FC236}">
-                <a16:creationId xmlns:a16="http://schemas.microsoft.com/office/drawing/2014/main" id="{A2D434F5-CC55-4F82-A094-954E3170CF1C}"/>
+                <a16:creationId xmlns:a16="http://schemas.microsoft.com/office/drawing/2014/main" id="{5F0CE85C-768D-480F-8C76-6B522B5E7796}"/>
               </a:ext>
             </a:extLst>
           </p:cNvPr>
@@ -19721,7 +20513,7 @@
           <p:cNvPr id="36" name="">
             <a:extLst xmlns:a="http://schemas.openxmlformats.org/drawingml/2006/main">
               <a:ext uri="{FF2B5EF4-FFF2-40B4-BE49-F238E27FC236}">
-                <a16:creationId xmlns:a16="http://schemas.microsoft.com/office/drawing/2014/main" id="{063D8186-8797-4F00-AAD3-43D0CE0B189D}"/>
+                <a16:creationId xmlns:a16="http://schemas.microsoft.com/office/drawing/2014/main" id="{FB33135D-F419-4C45-BFC9-631B2DFDC096}"/>
               </a:ext>
             </a:extLst>
           </p:cNvPr>
@@ -19751,7 +20543,7 @@
           <p:cNvPr id="37" name="">
             <a:extLst xmlns:a="http://schemas.openxmlformats.org/drawingml/2006/main">
               <a:ext uri="{FF2B5EF4-FFF2-40B4-BE49-F238E27FC236}">
-                <a16:creationId xmlns:a16="http://schemas.microsoft.com/office/drawing/2014/main" id="{1B349077-37C2-4105-ABA3-B46D128D0592}"/>
+                <a16:creationId xmlns:a16="http://schemas.microsoft.com/office/drawing/2014/main" id="{8B2C7643-12E3-4AA4-A02E-9353C6E60072}"/>
               </a:ext>
             </a:extLst>
           </p:cNvPr>
@@ -19781,7 +20573,7 @@
           <p:cNvPr id="38" name="">
             <a:extLst xmlns:a="http://schemas.openxmlformats.org/drawingml/2006/main">
               <a:ext uri="{FF2B5EF4-FFF2-40B4-BE49-F238E27FC236}">
-                <a16:creationId xmlns:a16="http://schemas.microsoft.com/office/drawing/2014/main" id="{91663FD5-7484-4A1E-93BD-AC583C770FB0}"/>
+                <a16:creationId xmlns:a16="http://schemas.microsoft.com/office/drawing/2014/main" id="{5E7A9602-B418-4DB7-86FF-74689ECD9C08}"/>
               </a:ext>
             </a:extLst>
           </p:cNvPr>
@@ -19811,7 +20603,7 @@
           <p:cNvPr id="39" name="">
             <a:extLst xmlns:a="http://schemas.openxmlformats.org/drawingml/2006/main">
               <a:ext uri="{FF2B5EF4-FFF2-40B4-BE49-F238E27FC236}">
-                <a16:creationId xmlns:a16="http://schemas.microsoft.com/office/drawing/2014/main" id="{7798CD50-9956-4DF0-8942-7C5E8D1432F4}"/>
+                <a16:creationId xmlns:a16="http://schemas.microsoft.com/office/drawing/2014/main" id="{44E927C2-0EAD-4A11-A436-91C7C02E460A}"/>
               </a:ext>
             </a:extLst>
           </p:cNvPr>
@@ -19841,7 +20633,7 @@
           <p:cNvPr id="40" name="">
             <a:extLst xmlns:a="http://schemas.openxmlformats.org/drawingml/2006/main">
               <a:ext uri="{FF2B5EF4-FFF2-40B4-BE49-F238E27FC236}">
-                <a16:creationId xmlns:a16="http://schemas.microsoft.com/office/drawing/2014/main" id="{B1AEA424-9460-468D-B4CD-7A37461C3E1D}"/>
+                <a16:creationId xmlns:a16="http://schemas.microsoft.com/office/drawing/2014/main" id="{5A91FB46-26A0-4A4A-A09D-CD305D04753E}"/>
               </a:ext>
             </a:extLst>
           </p:cNvPr>
@@ -19871,7 +20663,7 @@
           <p:cNvPr id="41" name="">
             <a:extLst xmlns:a="http://schemas.openxmlformats.org/drawingml/2006/main">
               <a:ext uri="{FF2B5EF4-FFF2-40B4-BE49-F238E27FC236}">
-                <a16:creationId xmlns:a16="http://schemas.microsoft.com/office/drawing/2014/main" id="{A7BA529A-C1B5-4899-9A6E-E7C9C2D42945}"/>
+                <a16:creationId xmlns:a16="http://schemas.microsoft.com/office/drawing/2014/main" id="{1F69020D-44A9-49FB-8AC2-13968BC1AD46}"/>
               </a:ext>
             </a:extLst>
           </p:cNvPr>
@@ -19901,7 +20693,7 @@
           <p:cNvPr id="42" name="">
             <a:extLst xmlns:a="http://schemas.openxmlformats.org/drawingml/2006/main">
               <a:ext uri="{FF2B5EF4-FFF2-40B4-BE49-F238E27FC236}">
-                <a16:creationId xmlns:a16="http://schemas.microsoft.com/office/drawing/2014/main" id="{B608043D-5C09-4CA0-8DF9-15155058FFC8}"/>
+                <a16:creationId xmlns:a16="http://schemas.microsoft.com/office/drawing/2014/main" id="{10AE0097-5CB3-4C3D-9F44-04A1F245D36C}"/>
               </a:ext>
             </a:extLst>
           </p:cNvPr>
@@ -19931,7 +20723,7 @@
           <p:cNvPr id="43" name="">
             <a:extLst xmlns:a="http://schemas.openxmlformats.org/drawingml/2006/main">
               <a:ext uri="{FF2B5EF4-FFF2-40B4-BE49-F238E27FC236}">
-                <a16:creationId xmlns:a16="http://schemas.microsoft.com/office/drawing/2014/main" id="{0DDCFF50-2165-428B-A546-1781AF8CD642}"/>
+                <a16:creationId xmlns:a16="http://schemas.microsoft.com/office/drawing/2014/main" id="{E6EDA7ED-19FE-42A8-BD9F-F6DE66808129}"/>
               </a:ext>
             </a:extLst>
           </p:cNvPr>
@@ -19961,7 +20753,7 @@
           <p:cNvPr id="44" name="">
             <a:extLst xmlns:a="http://schemas.openxmlformats.org/drawingml/2006/main">
               <a:ext uri="{FF2B5EF4-FFF2-40B4-BE49-F238E27FC236}">
-                <a16:creationId xmlns:a16="http://schemas.microsoft.com/office/drawing/2014/main" id="{FDB5EFCC-E599-4353-BADA-DAACABBBC0D6}"/>
+                <a16:creationId xmlns:a16="http://schemas.microsoft.com/office/drawing/2014/main" id="{475C8CE5-45A2-40A9-8EE3-42E0CCA01ACC}"/>
               </a:ext>
             </a:extLst>
           </p:cNvPr>
@@ -19991,7 +20783,7 @@
           <p:cNvPr id="45" name="">
             <a:extLst xmlns:a="http://schemas.openxmlformats.org/drawingml/2006/main">
               <a:ext uri="{FF2B5EF4-FFF2-40B4-BE49-F238E27FC236}">
-                <a16:creationId xmlns:a16="http://schemas.microsoft.com/office/drawing/2014/main" id="{52C77D9E-E24F-46F8-BE9A-5BCE645495C4}"/>
+                <a16:creationId xmlns:a16="http://schemas.microsoft.com/office/drawing/2014/main" id="{7A2133D5-A58E-4757-970E-BEB959D194FE}"/>
               </a:ext>
             </a:extLst>
           </p:cNvPr>
@@ -20021,7 +20813,7 @@
           <p:cNvPr id="46" name="">
             <a:extLst xmlns:a="http://schemas.openxmlformats.org/drawingml/2006/main">
               <a:ext uri="{FF2B5EF4-FFF2-40B4-BE49-F238E27FC236}">
-                <a16:creationId xmlns:a16="http://schemas.microsoft.com/office/drawing/2014/main" id="{4553075D-A5A7-4F0D-85E2-51315A033B53}"/>
+                <a16:creationId xmlns:a16="http://schemas.microsoft.com/office/drawing/2014/main" id="{82526DC3-86FE-4E98-BDAF-84B11FF617B6}"/>
               </a:ext>
             </a:extLst>
           </p:cNvPr>
@@ -20051,7 +20843,7 @@
           <p:cNvPr id="47" name="">
             <a:extLst xmlns:a="http://schemas.openxmlformats.org/drawingml/2006/main">
               <a:ext uri="{FF2B5EF4-FFF2-40B4-BE49-F238E27FC236}">
-                <a16:creationId xmlns:a16="http://schemas.microsoft.com/office/drawing/2014/main" id="{145B486D-9CBF-4418-9937-2C6982F9FF77}"/>
+                <a16:creationId xmlns:a16="http://schemas.microsoft.com/office/drawing/2014/main" id="{EEDA0B9A-2245-4AD4-B434-E8234F439EBD}"/>
               </a:ext>
             </a:extLst>
           </p:cNvPr>
@@ -20081,7 +20873,7 @@
           <p:cNvPr id="48" name="">
             <a:extLst xmlns:a="http://schemas.openxmlformats.org/drawingml/2006/main">
               <a:ext uri="{FF2B5EF4-FFF2-40B4-BE49-F238E27FC236}">
-                <a16:creationId xmlns:a16="http://schemas.microsoft.com/office/drawing/2014/main" id="{9F9CD9E7-2874-4084-933C-3345A5608D87}"/>
+                <a16:creationId xmlns:a16="http://schemas.microsoft.com/office/drawing/2014/main" id="{F43CDEF1-FC38-4CD6-8740-B9C45E77EA36}"/>
               </a:ext>
             </a:extLst>
           </p:cNvPr>
@@ -20111,7 +20903,7 @@
           <p:cNvPr id="49" name="">
             <a:extLst xmlns:a="http://schemas.openxmlformats.org/drawingml/2006/main">
               <a:ext uri="{FF2B5EF4-FFF2-40B4-BE49-F238E27FC236}">
-                <a16:creationId xmlns:a16="http://schemas.microsoft.com/office/drawing/2014/main" id="{7F02BEB4-0BD6-40F6-AB81-BD9DF0BE5FFF}"/>
+                <a16:creationId xmlns:a16="http://schemas.microsoft.com/office/drawing/2014/main" id="{D04C1D78-EC34-4958-8016-E184BD33451A}"/>
               </a:ext>
             </a:extLst>
           </p:cNvPr>
@@ -20141,7 +20933,7 @@
           <p:cNvPr id="50" name="">
             <a:extLst xmlns:a="http://schemas.openxmlformats.org/drawingml/2006/main">
               <a:ext uri="{FF2B5EF4-FFF2-40B4-BE49-F238E27FC236}">
-                <a16:creationId xmlns:a16="http://schemas.microsoft.com/office/drawing/2014/main" id="{03AA4D8F-69EC-4FF7-952A-59DC2EF1D032}"/>
+                <a16:creationId xmlns:a16="http://schemas.microsoft.com/office/drawing/2014/main" id="{1F6830D0-E411-40E0-85CE-B8E58A269E53}"/>
               </a:ext>
             </a:extLst>
           </p:cNvPr>
@@ -20171,7 +20963,7 @@
           <p:cNvPr id="51" name="">
             <a:extLst xmlns:a="http://schemas.openxmlformats.org/drawingml/2006/main">
               <a:ext uri="{FF2B5EF4-FFF2-40B4-BE49-F238E27FC236}">
-                <a16:creationId xmlns:a16="http://schemas.microsoft.com/office/drawing/2014/main" id="{2632AFDC-9822-4740-A9ED-E8D16DF9D85A}"/>
+                <a16:creationId xmlns:a16="http://schemas.microsoft.com/office/drawing/2014/main" id="{1CFFD99F-0194-4917-B8FA-43A30F3D2DCE}"/>
               </a:ext>
             </a:extLst>
           </p:cNvPr>
@@ -20201,7 +20993,7 @@
           <p:cNvPr id="52" name="">
             <a:extLst xmlns:a="http://schemas.openxmlformats.org/drawingml/2006/main">
               <a:ext uri="{FF2B5EF4-FFF2-40B4-BE49-F238E27FC236}">
-                <a16:creationId xmlns:a16="http://schemas.microsoft.com/office/drawing/2014/main" id="{27A6474F-552F-4B7A-839A-BBEE2D128B4E}"/>
+                <a16:creationId xmlns:a16="http://schemas.microsoft.com/office/drawing/2014/main" id="{8EB5B844-6B02-4C66-A2B9-A4A938111872}"/>
               </a:ext>
             </a:extLst>
           </p:cNvPr>
@@ -20231,7 +21023,7 @@
           <p:cNvPr id="53" name="">
             <a:extLst xmlns:a="http://schemas.openxmlformats.org/drawingml/2006/main">
               <a:ext uri="{FF2B5EF4-FFF2-40B4-BE49-F238E27FC236}">
-                <a16:creationId xmlns:a16="http://schemas.microsoft.com/office/drawing/2014/main" id="{3340356A-28EE-424E-BAE5-2A40B07CCE6E}"/>
+                <a16:creationId xmlns:a16="http://schemas.microsoft.com/office/drawing/2014/main" id="{AA8B62DE-35B8-465D-9E44-5E5A6A7FF1F5}"/>
               </a:ext>
             </a:extLst>
           </p:cNvPr>
@@ -20261,7 +21053,7 @@
           <p:cNvPr id="54" name="">
             <a:extLst xmlns:a="http://schemas.openxmlformats.org/drawingml/2006/main">
               <a:ext uri="{FF2B5EF4-FFF2-40B4-BE49-F238E27FC236}">
-                <a16:creationId xmlns:a16="http://schemas.microsoft.com/office/drawing/2014/main" id="{7196D8FB-0F29-4047-8447-1EF9A5B8479A}"/>
+                <a16:creationId xmlns:a16="http://schemas.microsoft.com/office/drawing/2014/main" id="{50C70D6D-A675-42DC-B557-B0C008BD1BE2}"/>
               </a:ext>
             </a:extLst>
           </p:cNvPr>
@@ -20291,7 +21083,7 @@
           <p:cNvPr id="55" name="">
             <a:extLst xmlns:a="http://schemas.openxmlformats.org/drawingml/2006/main">
               <a:ext uri="{FF2B5EF4-FFF2-40B4-BE49-F238E27FC236}">
-                <a16:creationId xmlns:a16="http://schemas.microsoft.com/office/drawing/2014/main" id="{E648E6F1-21E7-443B-BF4F-25480E6321EB}"/>
+                <a16:creationId xmlns:a16="http://schemas.microsoft.com/office/drawing/2014/main" id="{42F74109-A579-4130-A57B-2A298828F5ED}"/>
               </a:ext>
             </a:extLst>
           </p:cNvPr>
@@ -20321,7 +21113,7 @@
           <p:cNvPr id="56" name="">
             <a:extLst xmlns:a="http://schemas.openxmlformats.org/drawingml/2006/main">
               <a:ext uri="{FF2B5EF4-FFF2-40B4-BE49-F238E27FC236}">
-                <a16:creationId xmlns:a16="http://schemas.microsoft.com/office/drawing/2014/main" id="{C6992334-C3C4-4125-B8F3-D99E672CE809}"/>
+                <a16:creationId xmlns:a16="http://schemas.microsoft.com/office/drawing/2014/main" id="{9AF591D8-5719-42FA-889D-862D23C2B252}"/>
               </a:ext>
             </a:extLst>
           </p:cNvPr>
@@ -20354,7 +21146,7 @@
           <p:cNvPr id="57" name="">
             <a:extLst xmlns:a="http://schemas.openxmlformats.org/drawingml/2006/main">
               <a:ext uri="{FF2B5EF4-FFF2-40B4-BE49-F238E27FC236}">
-                <a16:creationId xmlns:a16="http://schemas.microsoft.com/office/drawing/2014/main" id="{597815D1-FB03-4F99-AB93-7E439D0CBF2A}"/>
+                <a16:creationId xmlns:a16="http://schemas.microsoft.com/office/drawing/2014/main" id="{E0DA7F7F-72E5-46F9-926D-6B45A35B4295}"/>
               </a:ext>
             </a:extLst>
           </p:cNvPr>
@@ -20387,7 +21179,7 @@
           <p:cNvPr id="58" name="">
             <a:extLst xmlns:a="http://schemas.openxmlformats.org/drawingml/2006/main">
               <a:ext uri="{FF2B5EF4-FFF2-40B4-BE49-F238E27FC236}">
-                <a16:creationId xmlns:a16="http://schemas.microsoft.com/office/drawing/2014/main" id="{25C88D90-86CD-4B3E-B122-21BDB73F4E95}"/>
+                <a16:creationId xmlns:a16="http://schemas.microsoft.com/office/drawing/2014/main" id="{E46B7099-61B3-4D50-A724-8752B9061131}"/>
               </a:ext>
             </a:extLst>
           </p:cNvPr>
@@ -20420,7 +21212,7 @@
           <p:cNvPr id="59" name="">
             <a:extLst xmlns:a="http://schemas.openxmlformats.org/drawingml/2006/main">
               <a:ext uri="{FF2B5EF4-FFF2-40B4-BE49-F238E27FC236}">
-                <a16:creationId xmlns:a16="http://schemas.microsoft.com/office/drawing/2014/main" id="{EDCC4FC2-9CA8-4900-BF5A-CB30F3188336}"/>
+                <a16:creationId xmlns:a16="http://schemas.microsoft.com/office/drawing/2014/main" id="{8FE9F1E3-496C-4E9B-89B8-F38C9811B98B}"/>
               </a:ext>
             </a:extLst>
           </p:cNvPr>
@@ -20453,7 +21245,7 @@
           <p:cNvPr id="60" name="">
             <a:extLst xmlns:a="http://schemas.openxmlformats.org/drawingml/2006/main">
               <a:ext uri="{FF2B5EF4-FFF2-40B4-BE49-F238E27FC236}">
-                <a16:creationId xmlns:a16="http://schemas.microsoft.com/office/drawing/2014/main" id="{2C42A8D8-B2B6-4A1E-A3F5-ABCACB21A6B9}"/>
+                <a16:creationId xmlns:a16="http://schemas.microsoft.com/office/drawing/2014/main" id="{2CB63701-2A77-4DDE-ADBF-99C17DFD5851}"/>
               </a:ext>
             </a:extLst>
           </p:cNvPr>
@@ -20486,7 +21278,7 @@
           <p:cNvPr id="61" name="">
             <a:extLst xmlns:a="http://schemas.openxmlformats.org/drawingml/2006/main">
               <a:ext uri="{FF2B5EF4-FFF2-40B4-BE49-F238E27FC236}">
-                <a16:creationId xmlns:a16="http://schemas.microsoft.com/office/drawing/2014/main" id="{3FBA15F3-5B18-4929-8CAC-64526328A8EC}"/>
+                <a16:creationId xmlns:a16="http://schemas.microsoft.com/office/drawing/2014/main" id="{307CDAC7-38DC-4F3C-8EAC-8EE423C5EEE2}"/>
               </a:ext>
             </a:extLst>
           </p:cNvPr>
@@ -20519,7 +21311,7 @@
           <p:cNvPr id="62" name="">
             <a:extLst xmlns:a="http://schemas.openxmlformats.org/drawingml/2006/main">
               <a:ext uri="{FF2B5EF4-FFF2-40B4-BE49-F238E27FC236}">
-                <a16:creationId xmlns:a16="http://schemas.microsoft.com/office/drawing/2014/main" id="{166629CD-60FD-450C-860B-3C6E8A05DDFB}"/>
+                <a16:creationId xmlns:a16="http://schemas.microsoft.com/office/drawing/2014/main" id="{DDE45720-67BA-4F89-91F9-8166FD7F0666}"/>
               </a:ext>
             </a:extLst>
           </p:cNvPr>
@@ -20552,7 +21344,7 @@
           <p:cNvPr id="63" name="">
             <a:extLst xmlns:a="http://schemas.openxmlformats.org/drawingml/2006/main">
               <a:ext uri="{FF2B5EF4-FFF2-40B4-BE49-F238E27FC236}">
-                <a16:creationId xmlns:a16="http://schemas.microsoft.com/office/drawing/2014/main" id="{B05FEEAF-2CBC-4BDC-A594-9DFBC8DB0F38}"/>
+                <a16:creationId xmlns:a16="http://schemas.microsoft.com/office/drawing/2014/main" id="{32163E62-A89C-4ED0-9D4A-69A254D702E7}"/>
               </a:ext>
             </a:extLst>
           </p:cNvPr>
@@ -20585,7 +21377,7 @@
           <p:cNvPr id="64" name="">
             <a:extLst xmlns:a="http://schemas.openxmlformats.org/drawingml/2006/main">
               <a:ext uri="{FF2B5EF4-FFF2-40B4-BE49-F238E27FC236}">
-                <a16:creationId xmlns:a16="http://schemas.microsoft.com/office/drawing/2014/main" id="{2C9AEB09-750C-4639-BD4F-73EB3FCC3F01}"/>
+                <a16:creationId xmlns:a16="http://schemas.microsoft.com/office/drawing/2014/main" id="{A2888CEE-3E12-4B42-B0AA-DF37B6E80032}"/>
               </a:ext>
             </a:extLst>
           </p:cNvPr>
@@ -20618,7 +21410,7 @@
           <p:cNvPr id="65" name="">
             <a:extLst xmlns:a="http://schemas.openxmlformats.org/drawingml/2006/main">
               <a:ext uri="{FF2B5EF4-FFF2-40B4-BE49-F238E27FC236}">
-                <a16:creationId xmlns:a16="http://schemas.microsoft.com/office/drawing/2014/main" id="{D306B64E-8488-4054-9CF6-798E51634E2C}"/>
+                <a16:creationId xmlns:a16="http://schemas.microsoft.com/office/drawing/2014/main" id="{A04CCA7B-9DEB-4A32-9336-B1434BAF150B}"/>
               </a:ext>
             </a:extLst>
           </p:cNvPr>
@@ -20686,7 +21478,7 @@
           <p:cNvPr id="66" name="">
             <a:extLst xmlns:a="http://schemas.openxmlformats.org/drawingml/2006/main">
               <a:ext uri="{FF2B5EF4-FFF2-40B4-BE49-F238E27FC236}">
-                <a16:creationId xmlns:a16="http://schemas.microsoft.com/office/drawing/2014/main" id="{C56CBFF6-3199-4F19-9A09-DB9058B7FB35}"/>
+                <a16:creationId xmlns:a16="http://schemas.microsoft.com/office/drawing/2014/main" id="{64FC2CDA-87BB-44BF-BCEE-A8E2A3D05A4A}"/>
               </a:ext>
             </a:extLst>
           </p:cNvPr>
@@ -20754,7 +21546,7 @@
           <p:cNvPr id="67" name="">
             <a:extLst xmlns:a="http://schemas.openxmlformats.org/drawingml/2006/main">
               <a:ext uri="{FF2B5EF4-FFF2-40B4-BE49-F238E27FC236}">
-                <a16:creationId xmlns:a16="http://schemas.microsoft.com/office/drawing/2014/main" id="{54C06BDB-E1C1-44A5-B457-57C9C0E8C734}"/>
+                <a16:creationId xmlns:a16="http://schemas.microsoft.com/office/drawing/2014/main" id="{DF1C04B8-260A-41FF-8716-245672CA166C}"/>
               </a:ext>
             </a:extLst>
           </p:cNvPr>
@@ -20820,7 +21612,7 @@
     </p:spTree>
     <p:extLst>
       <p:ext uri="{BB962C8B-B14F-4D97-AF65-F5344CB8AC3E}">
-        <p14:creationId xmlns:p14="http://schemas.microsoft.com/office/powerpoint/2010/main" val="1627795121"/>
+        <p14:creationId xmlns:p14="http://schemas.microsoft.com/office/powerpoint/2010/main" val="764504658"/>
       </p:ext>
     </p:extLst>
   </p:cSld>
@@ -20851,7 +21643,7 @@
           <p:cNvPr id="8" name="">
             <a:extLst xmlns:a="http://schemas.openxmlformats.org/drawingml/2006/main">
               <a:ext uri="{FF2B5EF4-FFF2-40B4-BE49-F238E27FC236}">
-                <a16:creationId xmlns:a16="http://schemas.microsoft.com/office/drawing/2014/main" id="{C2C78679-93C2-45BE-B7A1-B418D4FB7FA3}"/>
+                <a16:creationId xmlns:a16="http://schemas.microsoft.com/office/drawing/2014/main" id="{B33BC0E6-9279-4DE3-A776-C6435C000A20}"/>
               </a:ext>
             </a:extLst>
           </p:cNvPr>
@@ -20919,7 +21711,7 @@
           <p:cNvPr id="2" name="">
             <a:extLst xmlns:a="http://schemas.openxmlformats.org/drawingml/2006/main">
               <a:ext uri="{FF2B5EF4-FFF2-40B4-BE49-F238E27FC236}">
-                <a16:creationId xmlns:a16="http://schemas.microsoft.com/office/drawing/2014/main" id="{20D806F7-E026-4F4F-A381-8816CA6BCF79}"/>
+                <a16:creationId xmlns:a16="http://schemas.microsoft.com/office/drawing/2014/main" id="{F0EBBD4D-72F6-4289-B34B-5189C8611699}"/>
               </a:ext>
             </a:extLst>
           </p:cNvPr>
@@ -20952,7 +21744,7 @@
           <p:cNvPr id="3" name="">
             <a:extLst xmlns:a="http://schemas.openxmlformats.org/drawingml/2006/main">
               <a:ext uri="{FF2B5EF4-FFF2-40B4-BE49-F238E27FC236}">
-                <a16:creationId xmlns:a16="http://schemas.microsoft.com/office/drawing/2014/main" id="{61CC17FF-7399-4295-82E5-C256908B2E64}"/>
+                <a16:creationId xmlns:a16="http://schemas.microsoft.com/office/drawing/2014/main" id="{6F7DC1C2-6A5D-4A3E-94AB-8F703598CF1B}"/>
               </a:ext>
             </a:extLst>
           </p:cNvPr>
@@ -21020,7 +21812,7 @@
           <p:cNvPr id="4" name="">
             <a:extLst xmlns:a="http://schemas.openxmlformats.org/drawingml/2006/main">
               <a:ext uri="{FF2B5EF4-FFF2-40B4-BE49-F238E27FC236}">
-                <a16:creationId xmlns:a16="http://schemas.microsoft.com/office/drawing/2014/main" id="{ABE84E71-54D4-4193-A3B4-68DA3EF05FD5}"/>
+                <a16:creationId xmlns:a16="http://schemas.microsoft.com/office/drawing/2014/main" id="{D30FB228-B186-4CE0-BD9F-02B842FB453B}"/>
               </a:ext>
             </a:extLst>
           </p:cNvPr>
@@ -21030,7 +21822,7 @@
           <p:nvPr/>
         </p:nvPicPr>
         <p:blipFill>
-          <a:blip xmlns:r="http://schemas.openxmlformats.org/officeDocument/2006/relationships" xmlns:a="http://schemas.openxmlformats.org/drawingml/2006/main" r:embed="R2c0518494c0d453d"/>
+          <a:blip xmlns:r="http://schemas.openxmlformats.org/officeDocument/2006/relationships" xmlns:a="http://schemas.openxmlformats.org/drawingml/2006/main" r:embed="Reb38cfc1ff9d4c57"/>
           <a:stretch xmlns:a="http://schemas.openxmlformats.org/drawingml/2006/main"/>
         </p:blipFill>
         <p:spPr>
@@ -21048,7 +21840,7 @@
           <p:cNvPr id="5" name="">
             <a:extLst xmlns:a="http://schemas.openxmlformats.org/drawingml/2006/main">
               <a:ext uri="{FF2B5EF4-FFF2-40B4-BE49-F238E27FC236}">
-                <a16:creationId xmlns:a16="http://schemas.microsoft.com/office/drawing/2014/main" id="{9DF93BFA-33D2-4DF3-90E2-FF46AC98AF7D}"/>
+                <a16:creationId xmlns:a16="http://schemas.microsoft.com/office/drawing/2014/main" id="{3332B391-2F4F-4FF3-B8CB-FC96B6138990}"/>
               </a:ext>
             </a:extLst>
           </p:cNvPr>
@@ -21116,7 +21908,7 @@
           <p:cNvPr id="6" name="">
             <a:extLst xmlns:a="http://schemas.openxmlformats.org/drawingml/2006/main">
               <a:ext uri="{FF2B5EF4-FFF2-40B4-BE49-F238E27FC236}">
-                <a16:creationId xmlns:a16="http://schemas.microsoft.com/office/drawing/2014/main" id="{FF37DD73-F1D3-4C1D-A1BF-2CE0A25058D3}"/>
+                <a16:creationId xmlns:a16="http://schemas.microsoft.com/office/drawing/2014/main" id="{F9930067-7856-4B45-8178-690A99CE9988}"/>
               </a:ext>
             </a:extLst>
           </p:cNvPr>
@@ -21184,7 +21976,7 @@
           <p:cNvPr id="7" name="">
             <a:extLst xmlns:a="http://schemas.openxmlformats.org/drawingml/2006/main">
               <a:ext uri="{FF2B5EF4-FFF2-40B4-BE49-F238E27FC236}">
-                <a16:creationId xmlns:a16="http://schemas.microsoft.com/office/drawing/2014/main" id="{E7A9E06B-9C5A-4F91-9EB8-FEF9E79788A6}"/>
+                <a16:creationId xmlns:a16="http://schemas.microsoft.com/office/drawing/2014/main" id="{A0C0F1C6-172D-4A8E-9C28-BEFA6B4AADA8}"/>
               </a:ext>
             </a:extLst>
           </p:cNvPr>
@@ -21250,7 +22042,7 @@
     </p:spTree>
     <p:extLst>
       <p:ext uri="{BB962C8B-B14F-4D97-AF65-F5344CB8AC3E}">
-        <p14:creationId xmlns:p14="http://schemas.microsoft.com/office/powerpoint/2010/main" val="1241051530"/>
+        <p14:creationId xmlns:p14="http://schemas.microsoft.com/office/powerpoint/2010/main" val="1099059147"/>
       </p:ext>
     </p:extLst>
   </p:cSld>
@@ -21281,7 +22073,7 @@
           <p:cNvPr id="19" name="">
             <a:extLst xmlns:a="http://schemas.openxmlformats.org/drawingml/2006/main">
               <a:ext uri="{FF2B5EF4-FFF2-40B4-BE49-F238E27FC236}">
-                <a16:creationId xmlns:a16="http://schemas.microsoft.com/office/drawing/2014/main" id="{0A434798-1F5F-4551-B009-4AC169AFF06A}"/>
+                <a16:creationId xmlns:a16="http://schemas.microsoft.com/office/drawing/2014/main" id="{176795E2-DF07-4FCF-AB8B-F536ABBB4946}"/>
               </a:ext>
             </a:extLst>
           </p:cNvPr>
@@ -21349,7 +22141,7 @@
           <p:cNvPr id="2" name="">
             <a:extLst xmlns:a="http://schemas.openxmlformats.org/drawingml/2006/main">
               <a:ext uri="{FF2B5EF4-FFF2-40B4-BE49-F238E27FC236}">
-                <a16:creationId xmlns:a16="http://schemas.microsoft.com/office/drawing/2014/main" id="{CF85264B-F43F-4779-910D-34870CCAE540}"/>
+                <a16:creationId xmlns:a16="http://schemas.microsoft.com/office/drawing/2014/main" id="{F60E4B03-B23D-4860-8E35-2F059DF8CCC3}"/>
               </a:ext>
             </a:extLst>
           </p:cNvPr>
@@ -21382,7 +22174,7 @@
           <p:cNvPr id="3" name="">
             <a:extLst xmlns:a="http://schemas.openxmlformats.org/drawingml/2006/main">
               <a:ext uri="{FF2B5EF4-FFF2-40B4-BE49-F238E27FC236}">
-                <a16:creationId xmlns:a16="http://schemas.microsoft.com/office/drawing/2014/main" id="{83DFDD21-63C5-4FF2-B659-676616378E87}"/>
+                <a16:creationId xmlns:a16="http://schemas.microsoft.com/office/drawing/2014/main" id="{7DC32EAC-13F8-403B-A677-C8A40483D986}"/>
               </a:ext>
             </a:extLst>
           </p:cNvPr>
@@ -21450,7 +22242,7 @@
           <p:cNvPr id="4" name="">
             <a:extLst xmlns:a="http://schemas.openxmlformats.org/drawingml/2006/main">
               <a:ext uri="{FF2B5EF4-FFF2-40B4-BE49-F238E27FC236}">
-                <a16:creationId xmlns:a16="http://schemas.microsoft.com/office/drawing/2014/main" id="{4C87C5EE-EBE1-47E9-963A-443239119CEF}"/>
+                <a16:creationId xmlns:a16="http://schemas.microsoft.com/office/drawing/2014/main" id="{0F49D93D-4FEE-4525-830B-5BA2E001095E}"/>
               </a:ext>
             </a:extLst>
           </p:cNvPr>
@@ -21485,7 +22277,7 @@
           <p:cNvPr id="5" name="">
             <a:extLst xmlns:a="http://schemas.openxmlformats.org/drawingml/2006/main">
               <a:ext uri="{FF2B5EF4-FFF2-40B4-BE49-F238E27FC236}">
-                <a16:creationId xmlns:a16="http://schemas.microsoft.com/office/drawing/2014/main" id="{FA09EE26-4FF9-4F43-AAF6-7F2901D75C71}"/>
+                <a16:creationId xmlns:a16="http://schemas.microsoft.com/office/drawing/2014/main" id="{6DDB0946-C20A-426F-AA26-F70C5AE092FB}"/>
               </a:ext>
             </a:extLst>
           </p:cNvPr>
@@ -21553,7 +22345,7 @@
           <p:cNvPr id="6" name="">
             <a:extLst xmlns:a="http://schemas.openxmlformats.org/drawingml/2006/main">
               <a:ext uri="{FF2B5EF4-FFF2-40B4-BE49-F238E27FC236}">
-                <a16:creationId xmlns:a16="http://schemas.microsoft.com/office/drawing/2014/main" id="{022E83C3-89A2-4593-B305-A607AB7DD3A5}"/>
+                <a16:creationId xmlns:a16="http://schemas.microsoft.com/office/drawing/2014/main" id="{D4E1BF93-0605-449F-9D2D-CC872EF8EF92}"/>
               </a:ext>
             </a:extLst>
           </p:cNvPr>
@@ -21621,7 +22413,7 @@
           <p:cNvPr id="7" name="">
             <a:extLst xmlns:a="http://schemas.openxmlformats.org/drawingml/2006/main">
               <a:ext uri="{FF2B5EF4-FFF2-40B4-BE49-F238E27FC236}">
-                <a16:creationId xmlns:a16="http://schemas.microsoft.com/office/drawing/2014/main" id="{3DB3418A-3ABD-42E7-B4A6-0F914978D5F8}"/>
+                <a16:creationId xmlns:a16="http://schemas.microsoft.com/office/drawing/2014/main" id="{F5B2A7EB-8F51-47EB-AEBE-67C3182599A6}"/>
               </a:ext>
             </a:extLst>
           </p:cNvPr>
@@ -21656,7 +22448,7 @@
           <p:cNvPr id="8" name="">
             <a:extLst xmlns:a="http://schemas.openxmlformats.org/drawingml/2006/main">
               <a:ext uri="{FF2B5EF4-FFF2-40B4-BE49-F238E27FC236}">
-                <a16:creationId xmlns:a16="http://schemas.microsoft.com/office/drawing/2014/main" id="{086C95FF-7C59-4838-8373-E2505BA6083A}"/>
+                <a16:creationId xmlns:a16="http://schemas.microsoft.com/office/drawing/2014/main" id="{A7CEDCD9-EAFD-42C4-A79B-5549C0B886FD}"/>
               </a:ext>
             </a:extLst>
           </p:cNvPr>
@@ -21724,7 +22516,7 @@
           <p:cNvPr id="9" name="">
             <a:extLst xmlns:a="http://schemas.openxmlformats.org/drawingml/2006/main">
               <a:ext uri="{FF2B5EF4-FFF2-40B4-BE49-F238E27FC236}">
-                <a16:creationId xmlns:a16="http://schemas.microsoft.com/office/drawing/2014/main" id="{1E5B8E6C-988C-45B3-A061-29BF10D28BC1}"/>
+                <a16:creationId xmlns:a16="http://schemas.microsoft.com/office/drawing/2014/main" id="{5E8E3FE9-234B-4639-9149-665FA84326A5}"/>
               </a:ext>
             </a:extLst>
           </p:cNvPr>
@@ -21792,7 +22584,7 @@
           <p:cNvPr id="10" name="">
             <a:extLst xmlns:a="http://schemas.openxmlformats.org/drawingml/2006/main">
               <a:ext uri="{FF2B5EF4-FFF2-40B4-BE49-F238E27FC236}">
-                <a16:creationId xmlns:a16="http://schemas.microsoft.com/office/drawing/2014/main" id="{FE3A1432-B832-4715-8796-FC97F83E782E}"/>
+                <a16:creationId xmlns:a16="http://schemas.microsoft.com/office/drawing/2014/main" id="{19E9E7DE-0F6E-47D0-991C-B8EA6283A921}"/>
               </a:ext>
             </a:extLst>
           </p:cNvPr>
@@ -21827,7 +22619,7 @@
           <p:cNvPr id="11" name="">
             <a:extLst xmlns:a="http://schemas.openxmlformats.org/drawingml/2006/main">
               <a:ext uri="{FF2B5EF4-FFF2-40B4-BE49-F238E27FC236}">
-                <a16:creationId xmlns:a16="http://schemas.microsoft.com/office/drawing/2014/main" id="{8A7F61B6-ABA3-4443-A934-E35D0F55BDD6}"/>
+                <a16:creationId xmlns:a16="http://schemas.microsoft.com/office/drawing/2014/main" id="{A9CC9B44-5870-477A-A94E-4AE3AB97937A}"/>
               </a:ext>
             </a:extLst>
           </p:cNvPr>
@@ -21895,7 +22687,7 @@
           <p:cNvPr id="12" name="">
             <a:extLst xmlns:a="http://schemas.openxmlformats.org/drawingml/2006/main">
               <a:ext uri="{FF2B5EF4-FFF2-40B4-BE49-F238E27FC236}">
-                <a16:creationId xmlns:a16="http://schemas.microsoft.com/office/drawing/2014/main" id="{26A38E98-CBA5-4201-93A0-5CD78C2928F6}"/>
+                <a16:creationId xmlns:a16="http://schemas.microsoft.com/office/drawing/2014/main" id="{7B81F970-869C-4034-A951-8D22DD245376}"/>
               </a:ext>
             </a:extLst>
           </p:cNvPr>
@@ -21963,7 +22755,7 @@
           <p:cNvPr id="13" name="">
             <a:extLst xmlns:a="http://schemas.openxmlformats.org/drawingml/2006/main">
               <a:ext uri="{FF2B5EF4-FFF2-40B4-BE49-F238E27FC236}">
-                <a16:creationId xmlns:a16="http://schemas.microsoft.com/office/drawing/2014/main" id="{EE51493E-BBDE-44E6-A8D9-4D88D61E5D81}"/>
+                <a16:creationId xmlns:a16="http://schemas.microsoft.com/office/drawing/2014/main" id="{BDB324C2-B285-40FB-BA33-665DCF37BBEF}"/>
               </a:ext>
             </a:extLst>
           </p:cNvPr>
@@ -21998,7 +22790,7 @@
           <p:cNvPr id="14" name="">
             <a:extLst xmlns:a="http://schemas.openxmlformats.org/drawingml/2006/main">
               <a:ext uri="{FF2B5EF4-FFF2-40B4-BE49-F238E27FC236}">
-                <a16:creationId xmlns:a16="http://schemas.microsoft.com/office/drawing/2014/main" id="{8ADC8F8C-B4DF-4F5E-BFEF-50608856CB36}"/>
+                <a16:creationId xmlns:a16="http://schemas.microsoft.com/office/drawing/2014/main" id="{B7D88E80-0F6D-4543-B7C4-8EB46CFAA6D8}"/>
               </a:ext>
             </a:extLst>
           </p:cNvPr>
@@ -22066,7 +22858,7 @@
           <p:cNvPr id="15" name="">
             <a:extLst xmlns:a="http://schemas.openxmlformats.org/drawingml/2006/main">
               <a:ext uri="{FF2B5EF4-FFF2-40B4-BE49-F238E27FC236}">
-                <a16:creationId xmlns:a16="http://schemas.microsoft.com/office/drawing/2014/main" id="{03ED2DA7-A729-4B0C-A302-6F048D145963}"/>
+                <a16:creationId xmlns:a16="http://schemas.microsoft.com/office/drawing/2014/main" id="{8ECC204F-91AD-4AA7-8BA2-C6AEE2D9F783}"/>
               </a:ext>
             </a:extLst>
           </p:cNvPr>
@@ -22134,7 +22926,7 @@
           <p:cNvPr id="16" name="">
             <a:extLst xmlns:a="http://schemas.openxmlformats.org/drawingml/2006/main">
               <a:ext uri="{FF2B5EF4-FFF2-40B4-BE49-F238E27FC236}">
-                <a16:creationId xmlns:a16="http://schemas.microsoft.com/office/drawing/2014/main" id="{2E040789-0240-4511-8B4F-89DE6D2CC039}"/>
+                <a16:creationId xmlns:a16="http://schemas.microsoft.com/office/drawing/2014/main" id="{C8753A1E-2003-4D9F-9D9F-D0576AC2BDE6}"/>
               </a:ext>
             </a:extLst>
           </p:cNvPr>
@@ -22202,7 +22994,7 @@
           <p:cNvPr id="17" name="">
             <a:extLst xmlns:a="http://schemas.openxmlformats.org/drawingml/2006/main">
               <a:ext uri="{FF2B5EF4-FFF2-40B4-BE49-F238E27FC236}">
-                <a16:creationId xmlns:a16="http://schemas.microsoft.com/office/drawing/2014/main" id="{308721CA-D5E8-4629-9CE9-F52AC91F6627}"/>
+                <a16:creationId xmlns:a16="http://schemas.microsoft.com/office/drawing/2014/main" id="{E60D2227-ACF6-442C-B22E-4B5F1AA82B06}"/>
               </a:ext>
             </a:extLst>
           </p:cNvPr>
@@ -22270,7 +23062,7 @@
           <p:cNvPr id="18" name="">
             <a:extLst xmlns:a="http://schemas.openxmlformats.org/drawingml/2006/main">
               <a:ext uri="{FF2B5EF4-FFF2-40B4-BE49-F238E27FC236}">
-                <a16:creationId xmlns:a16="http://schemas.microsoft.com/office/drawing/2014/main" id="{75B20D6A-118A-4A95-93CE-4726F5C62038}"/>
+                <a16:creationId xmlns:a16="http://schemas.microsoft.com/office/drawing/2014/main" id="{9F1C684D-5AF3-419A-82DF-F97EF277FEBD}"/>
               </a:ext>
             </a:extLst>
           </p:cNvPr>
@@ -22336,7 +23128,7 @@
     </p:spTree>
     <p:extLst>
       <p:ext uri="{BB962C8B-B14F-4D97-AF65-F5344CB8AC3E}">
-        <p14:creationId xmlns:p14="http://schemas.microsoft.com/office/powerpoint/2010/main" val="126082142"/>
+        <p14:creationId xmlns:p14="http://schemas.microsoft.com/office/powerpoint/2010/main" val="1214790472"/>
       </p:ext>
     </p:extLst>
   </p:cSld>
@@ -22367,7 +23159,7 @@
           <p:cNvPr id="10" name="">
             <a:extLst xmlns:a="http://schemas.openxmlformats.org/drawingml/2006/main">
               <a:ext uri="{FF2B5EF4-FFF2-40B4-BE49-F238E27FC236}">
-                <a16:creationId xmlns:a16="http://schemas.microsoft.com/office/drawing/2014/main" id="{26BCC4D8-A04C-4CD6-BF48-8646C609D6AD}"/>
+                <a16:creationId xmlns:a16="http://schemas.microsoft.com/office/drawing/2014/main" id="{4167076A-D89C-4AC3-9360-A77893E8D4A5}"/>
               </a:ext>
             </a:extLst>
           </p:cNvPr>
@@ -22435,7 +23227,7 @@
           <p:cNvPr id="2" name="">
             <a:extLst xmlns:a="http://schemas.openxmlformats.org/drawingml/2006/main">
               <a:ext uri="{FF2B5EF4-FFF2-40B4-BE49-F238E27FC236}">
-                <a16:creationId xmlns:a16="http://schemas.microsoft.com/office/drawing/2014/main" id="{75513757-B28C-44F4-89EF-CB7622A3B3AB}"/>
+                <a16:creationId xmlns:a16="http://schemas.microsoft.com/office/drawing/2014/main" id="{0EECC33C-AE16-4BBC-A82E-ACCD300DEA60}"/>
               </a:ext>
             </a:extLst>
           </p:cNvPr>
@@ -22468,7 +23260,7 @@
           <p:cNvPr id="3" name="">
             <a:extLst xmlns:a="http://schemas.openxmlformats.org/drawingml/2006/main">
               <a:ext uri="{FF2B5EF4-FFF2-40B4-BE49-F238E27FC236}">
-                <a16:creationId xmlns:a16="http://schemas.microsoft.com/office/drawing/2014/main" id="{5F5E2395-304E-4BB5-91F6-842492648709}"/>
+                <a16:creationId xmlns:a16="http://schemas.microsoft.com/office/drawing/2014/main" id="{92ACC3F8-6CA4-4F05-B6CB-9F2CCBF6DA73}"/>
               </a:ext>
             </a:extLst>
           </p:cNvPr>
@@ -22536,7 +23328,7 @@
           <p:cNvPr id="4" name="">
             <a:extLst xmlns:a="http://schemas.openxmlformats.org/drawingml/2006/main">
               <a:ext uri="{FF2B5EF4-FFF2-40B4-BE49-F238E27FC236}">
-                <a16:creationId xmlns:a16="http://schemas.microsoft.com/office/drawing/2014/main" id="{5651BD96-8827-4808-B2E0-31E592C4FD09}"/>
+                <a16:creationId xmlns:a16="http://schemas.microsoft.com/office/drawing/2014/main" id="{72426317-03CE-4561-9ED4-96BDDE918B6F}"/>
               </a:ext>
             </a:extLst>
           </p:cNvPr>
@@ -22604,7 +23396,7 @@
           <p:cNvPr id="5" name="Chart">
             <a:extLst xmlns:a="http://schemas.openxmlformats.org/drawingml/2006/main">
               <a:ext uri="{FF2B5EF4-FFF2-40B4-BE49-F238E27FC236}">
-                <a16:creationId xmlns:a16="http://schemas.microsoft.com/office/drawing/2014/main" id="{75525BB9-AFE9-4BF1-9192-021FCAC4675F}"/>
+                <a16:creationId xmlns:a16="http://schemas.microsoft.com/office/drawing/2014/main" id="{83724080-A92D-47E9-967D-B67D978004FF}"/>
               </a:ext>
             </a:extLst>
           </p:cNvPr>
@@ -22617,7 +23409,7 @@
         </p:xfrm>
         <a:graphic xmlns:a="http://schemas.openxmlformats.org/drawingml/2006/main">
           <a:graphicData uri="http://schemas.openxmlformats.org/drawingml/2006/chart">
-            <c:chart xmlns:r="http://schemas.openxmlformats.org/officeDocument/2006/relationships" xmlns:c="http://schemas.openxmlformats.org/drawingml/2006/chart" r:id="R66e807f6fb18481a"/>
+            <c:chart xmlns:r="http://schemas.openxmlformats.org/officeDocument/2006/relationships" xmlns:c="http://schemas.openxmlformats.org/drawingml/2006/chart" r:id="R17381299df574e3b"/>
           </a:graphicData>
         </a:graphic>
       </p:graphicFrame>
@@ -22626,7 +23418,7 @@
           <p:cNvPr id="6" name="">
             <a:extLst xmlns:a="http://schemas.openxmlformats.org/drawingml/2006/main">
               <a:ext uri="{FF2B5EF4-FFF2-40B4-BE49-F238E27FC236}">
-                <a16:creationId xmlns:a16="http://schemas.microsoft.com/office/drawing/2014/main" id="{C40EF3D6-EA39-4398-B645-E37B42000012}"/>
+                <a16:creationId xmlns:a16="http://schemas.microsoft.com/office/drawing/2014/main" id="{6F32E2DF-0C6D-44A5-9A01-79A9C800B5F7}"/>
               </a:ext>
             </a:extLst>
           </p:cNvPr>
@@ -22694,7 +23486,7 @@
           <p:cNvPr id="7" name="Chart">
             <a:extLst xmlns:a="http://schemas.openxmlformats.org/drawingml/2006/main">
               <a:ext uri="{FF2B5EF4-FFF2-40B4-BE49-F238E27FC236}">
-                <a16:creationId xmlns:a16="http://schemas.microsoft.com/office/drawing/2014/main" id="{AF1FD178-3315-498C-A956-986E33E557A7}"/>
+                <a16:creationId xmlns:a16="http://schemas.microsoft.com/office/drawing/2014/main" id="{94A75974-BF48-4252-A302-426453F8C9C4}"/>
               </a:ext>
             </a:extLst>
           </p:cNvPr>
@@ -22707,7 +23499,7 @@
         </p:xfrm>
         <a:graphic xmlns:a="http://schemas.openxmlformats.org/drawingml/2006/main">
           <a:graphicData uri="http://schemas.openxmlformats.org/drawingml/2006/chart">
-            <c:chart xmlns:r="http://schemas.openxmlformats.org/officeDocument/2006/relationships" xmlns:c="http://schemas.openxmlformats.org/drawingml/2006/chart" r:id="R1659c88385964cc4"/>
+            <c:chart xmlns:r="http://schemas.openxmlformats.org/officeDocument/2006/relationships" xmlns:c="http://schemas.openxmlformats.org/drawingml/2006/chart" r:id="R3821f66639104e68"/>
           </a:graphicData>
         </a:graphic>
       </p:graphicFrame>
@@ -22716,7 +23508,7 @@
           <p:cNvPr id="8" name="">
             <a:extLst xmlns:a="http://schemas.openxmlformats.org/drawingml/2006/main">
               <a:ext uri="{FF2B5EF4-FFF2-40B4-BE49-F238E27FC236}">
-                <a16:creationId xmlns:a16="http://schemas.microsoft.com/office/drawing/2014/main" id="{CDC58A2D-3246-4F65-8133-4FF3E1314CD0}"/>
+                <a16:creationId xmlns:a16="http://schemas.microsoft.com/office/drawing/2014/main" id="{B4B34E08-8122-430A-A9D4-44CE8E052B0A}"/>
               </a:ext>
             </a:extLst>
           </p:cNvPr>
@@ -22784,7 +23576,7 @@
           <p:cNvPr id="9" name="">
             <a:extLst xmlns:a="http://schemas.openxmlformats.org/drawingml/2006/main">
               <a:ext uri="{FF2B5EF4-FFF2-40B4-BE49-F238E27FC236}">
-                <a16:creationId xmlns:a16="http://schemas.microsoft.com/office/drawing/2014/main" id="{C792AD49-7DC2-4BFC-9F10-172123C6EE41}"/>
+                <a16:creationId xmlns:a16="http://schemas.microsoft.com/office/drawing/2014/main" id="{A33461DE-F99A-49E6-9A38-CD49EEA4F256}"/>
               </a:ext>
             </a:extLst>
           </p:cNvPr>
@@ -22850,7 +23642,7 @@
     </p:spTree>
     <p:extLst>
       <p:ext uri="{BB962C8B-B14F-4D97-AF65-F5344CB8AC3E}">
-        <p14:creationId xmlns:p14="http://schemas.microsoft.com/office/powerpoint/2010/main" val="227558279"/>
+        <p14:creationId xmlns:p14="http://schemas.microsoft.com/office/powerpoint/2010/main" val="1055225965"/>
       </p:ext>
     </p:extLst>
   </p:cSld>

--- a/deliverables/special_convolutions_cifar10_final.pptx
+++ b/deliverables/special_convolutions_cifar10_final.pptx
@@ -2,28 +2,28 @@
 <file path=ppt/presentation.xml><?xml version="1.0" encoding="utf-8"?>
 <p:presentation xmlns:p="http://schemas.openxmlformats.org/presentationml/2006/main">
   <p:sldMasterIdLst>
-    <p:sldMasterId xmlns:r="http://schemas.openxmlformats.org/officeDocument/2006/relationships" id="2147483648" r:id="R8f3ef2ef4d4440d3"/>
+    <p:sldMasterId xmlns:r="http://schemas.openxmlformats.org/officeDocument/2006/relationships" id="2147483648" r:id="Rb5678baf5613454d"/>
   </p:sldMasterIdLst>
   <p:notesMasterIdLst>
-    <p:notesMasterId xmlns:r="http://schemas.openxmlformats.org/officeDocument/2006/relationships" r:id="Rfd6adbc279b84726"/>
+    <p:notesMasterId xmlns:r="http://schemas.openxmlformats.org/officeDocument/2006/relationships" r:id="R36fe447b7da34557"/>
   </p:notesMasterIdLst>
   <p:sldIdLst>
-    <p:sldId xmlns:r="http://schemas.openxmlformats.org/officeDocument/2006/relationships" id="256" r:id="R7df4cd595d7148a0"/>
-    <p:sldId xmlns:r="http://schemas.openxmlformats.org/officeDocument/2006/relationships" id="257" r:id="R9c9549d0f3df4ae1"/>
-    <p:sldId xmlns:r="http://schemas.openxmlformats.org/officeDocument/2006/relationships" id="258" r:id="R2c5cc8a63d8b48da"/>
-    <p:sldId xmlns:r="http://schemas.openxmlformats.org/officeDocument/2006/relationships" id="259" r:id="R9f1851a162914a27"/>
-    <p:sldId xmlns:r="http://schemas.openxmlformats.org/officeDocument/2006/relationships" id="260" r:id="Re7c633f49ef14300"/>
-    <p:sldId xmlns:r="http://schemas.openxmlformats.org/officeDocument/2006/relationships" id="261" r:id="R092c97f3cda04ba5"/>
-    <p:sldId xmlns:r="http://schemas.openxmlformats.org/officeDocument/2006/relationships" id="262" r:id="Raf190fa78ba449fc"/>
-    <p:sldId xmlns:r="http://schemas.openxmlformats.org/officeDocument/2006/relationships" id="263" r:id="R2c0c69d6331f45b5"/>
-    <p:sldId xmlns:r="http://schemas.openxmlformats.org/officeDocument/2006/relationships" id="264" r:id="R7e2defbfedb041f1"/>
-    <p:sldId xmlns:r="http://schemas.openxmlformats.org/officeDocument/2006/relationships" id="265" r:id="Rbf3de31b99c247c4"/>
-    <p:sldId xmlns:r="http://schemas.openxmlformats.org/officeDocument/2006/relationships" id="266" r:id="Rc737745dec914386"/>
-    <p:sldId xmlns:r="http://schemas.openxmlformats.org/officeDocument/2006/relationships" id="267" r:id="R487dc37dce7546ad"/>
-    <p:sldId xmlns:r="http://schemas.openxmlformats.org/officeDocument/2006/relationships" id="268" r:id="R837f69fcfd734871"/>
-    <p:sldId xmlns:r="http://schemas.openxmlformats.org/officeDocument/2006/relationships" id="269" r:id="Rac73f2d627a04442"/>
-    <p:sldId xmlns:r="http://schemas.openxmlformats.org/officeDocument/2006/relationships" id="270" r:id="Ra36781e64356439e"/>
-    <p:sldId xmlns:r="http://schemas.openxmlformats.org/officeDocument/2006/relationships" id="271" r:id="R1ace0fd220b94c89"/>
+    <p:sldId xmlns:r="http://schemas.openxmlformats.org/officeDocument/2006/relationships" id="256" r:id="R19bc303a1a944ca4"/>
+    <p:sldId xmlns:r="http://schemas.openxmlformats.org/officeDocument/2006/relationships" id="257" r:id="R02f87ad59d0541c4"/>
+    <p:sldId xmlns:r="http://schemas.openxmlformats.org/officeDocument/2006/relationships" id="258" r:id="R7a0cf5796e064e8e"/>
+    <p:sldId xmlns:r="http://schemas.openxmlformats.org/officeDocument/2006/relationships" id="259" r:id="R1e274d18281d4ecb"/>
+    <p:sldId xmlns:r="http://schemas.openxmlformats.org/officeDocument/2006/relationships" id="260" r:id="R7525cb96918d4600"/>
+    <p:sldId xmlns:r="http://schemas.openxmlformats.org/officeDocument/2006/relationships" id="261" r:id="Re63b822c6b7143a2"/>
+    <p:sldId xmlns:r="http://schemas.openxmlformats.org/officeDocument/2006/relationships" id="262" r:id="Rdb2284435f374cc3"/>
+    <p:sldId xmlns:r="http://schemas.openxmlformats.org/officeDocument/2006/relationships" id="263" r:id="Rfe0e473dba514e58"/>
+    <p:sldId xmlns:r="http://schemas.openxmlformats.org/officeDocument/2006/relationships" id="264" r:id="R93660285e7bb4f35"/>
+    <p:sldId xmlns:r="http://schemas.openxmlformats.org/officeDocument/2006/relationships" id="265" r:id="R67da7b6442314471"/>
+    <p:sldId xmlns:r="http://schemas.openxmlformats.org/officeDocument/2006/relationships" id="266" r:id="R2cd8c21869fd40c3"/>
+    <p:sldId xmlns:r="http://schemas.openxmlformats.org/officeDocument/2006/relationships" id="267" r:id="R93d4dcfcebe44f91"/>
+    <p:sldId xmlns:r="http://schemas.openxmlformats.org/officeDocument/2006/relationships" id="268" r:id="Rb8921595e9d446bb"/>
+    <p:sldId xmlns:r="http://schemas.openxmlformats.org/officeDocument/2006/relationships" id="269" r:id="R606e0010f55b49f0"/>
+    <p:sldId xmlns:r="http://schemas.openxmlformats.org/officeDocument/2006/relationships" id="270" r:id="R94fdd2239a9d4131"/>
+    <p:sldId xmlns:r="http://schemas.openxmlformats.org/officeDocument/2006/relationships" id="271" r:id="Re18678ffc29a483f"/>
   </p:sldIdLst>
   <p:sldSz cx="12192000" cy="6858000"/>
   <p:notesSz cx="6858000" cy="9144000"/>
@@ -1538,7 +1538,7 @@
           <p:cNvPr id="3" name="Title">
             <a:extLst xmlns:a="http://schemas.openxmlformats.org/drawingml/2006/main">
               <a:ext uri="{FF2B5EF4-FFF2-40B4-BE49-F238E27FC236}">
-                <a16:creationId xmlns:a16="http://schemas.microsoft.com/office/drawing/2014/main" id="{1AEACC97-3F4F-48EC-A419-FCA987A04B47}"/>
+                <a16:creationId xmlns:a16="http://schemas.microsoft.com/office/drawing/2014/main" id="{CCCD5DFD-5F74-4103-887A-EFD8632F2CAA}"/>
               </a:ext>
             </a:extLst>
           </p:cNvPr>
@@ -1695,7 +1695,7 @@
           <p:cNvPr id="2" name="Subtitle">
             <a:extLst xmlns:a="http://schemas.openxmlformats.org/drawingml/2006/main">
               <a:ext uri="{FF2B5EF4-FFF2-40B4-BE49-F238E27FC236}">
-                <a16:creationId xmlns:a16="http://schemas.microsoft.com/office/drawing/2014/main" id="{E576BBEB-03E7-43EA-8D3F-766BFDD6AD6D}"/>
+                <a16:creationId xmlns:a16="http://schemas.microsoft.com/office/drawing/2014/main" id="{16529D13-46D3-4131-AF86-6D72042ACDEE}"/>
               </a:ext>
             </a:extLst>
           </p:cNvPr>
@@ -1869,7 +1869,7 @@
           <p:cNvPr id="2" name="Section title">
             <a:extLst xmlns:a="http://schemas.openxmlformats.org/drawingml/2006/main">
               <a:ext uri="{FF2B5EF4-FFF2-40B4-BE49-F238E27FC236}">
-                <a16:creationId xmlns:a16="http://schemas.microsoft.com/office/drawing/2014/main" id="{85DD3567-79F0-4F61-9434-0DB5A37B1038}"/>
+                <a16:creationId xmlns:a16="http://schemas.microsoft.com/office/drawing/2014/main" id="{06A1CFC0-71CE-4F70-A9F0-59A3526062EA}"/>
               </a:ext>
             </a:extLst>
           </p:cNvPr>
@@ -2043,7 +2043,7 @@
           <p:cNvPr id="3" name="Title">
             <a:extLst xmlns:a="http://schemas.openxmlformats.org/drawingml/2006/main">
               <a:ext uri="{FF2B5EF4-FFF2-40B4-BE49-F238E27FC236}">
-                <a16:creationId xmlns:a16="http://schemas.microsoft.com/office/drawing/2014/main" id="{1C6BE7A4-80C1-4778-81E8-98B30FAE3D7A}"/>
+                <a16:creationId xmlns:a16="http://schemas.microsoft.com/office/drawing/2014/main" id="{303CAEBC-A32D-4141-BD34-A24261E230DD}"/>
               </a:ext>
             </a:extLst>
           </p:cNvPr>
@@ -2200,7 +2200,7 @@
           <p:cNvPr id="2" name="Body">
             <a:extLst xmlns:a="http://schemas.openxmlformats.org/drawingml/2006/main">
               <a:ext uri="{FF2B5EF4-FFF2-40B4-BE49-F238E27FC236}">
-                <a16:creationId xmlns:a16="http://schemas.microsoft.com/office/drawing/2014/main" id="{090A909E-81A1-4D80-9DE4-E39900EB486F}"/>
+                <a16:creationId xmlns:a16="http://schemas.microsoft.com/office/drawing/2014/main" id="{2A06888E-B75F-4B7C-BFEE-849C56842EAA}"/>
               </a:ext>
             </a:extLst>
           </p:cNvPr>
@@ -2374,7 +2374,7 @@
           <p:cNvPr id="4" name="Title">
             <a:extLst xmlns:a="http://schemas.openxmlformats.org/drawingml/2006/main">
               <a:ext uri="{FF2B5EF4-FFF2-40B4-BE49-F238E27FC236}">
-                <a16:creationId xmlns:a16="http://schemas.microsoft.com/office/drawing/2014/main" id="{8E27DE8F-57D5-410F-95A8-656333E84023}"/>
+                <a16:creationId xmlns:a16="http://schemas.microsoft.com/office/drawing/2014/main" id="{D73934E4-2B57-49BC-9254-99DF8F6B6318}"/>
               </a:ext>
             </a:extLst>
           </p:cNvPr>
@@ -2531,7 +2531,7 @@
           <p:cNvPr id="2" name="Left column">
             <a:extLst xmlns:a="http://schemas.openxmlformats.org/drawingml/2006/main">
               <a:ext uri="{FF2B5EF4-FFF2-40B4-BE49-F238E27FC236}">
-                <a16:creationId xmlns:a16="http://schemas.microsoft.com/office/drawing/2014/main" id="{FB155760-AC7A-400B-B08E-F66D3344855A}"/>
+                <a16:creationId xmlns:a16="http://schemas.microsoft.com/office/drawing/2014/main" id="{E132B8CF-7FD5-4AE7-9423-9596356CBB49}"/>
               </a:ext>
             </a:extLst>
           </p:cNvPr>
@@ -2688,7 +2688,7 @@
           <p:cNvPr id="3" name="Right column">
             <a:extLst xmlns:a="http://schemas.openxmlformats.org/drawingml/2006/main">
               <a:ext uri="{FF2B5EF4-FFF2-40B4-BE49-F238E27FC236}">
-                <a16:creationId xmlns:a16="http://schemas.microsoft.com/office/drawing/2014/main" id="{74D47A20-1EF4-4CE1-813F-E4D909E7242F}"/>
+                <a16:creationId xmlns:a16="http://schemas.microsoft.com/office/drawing/2014/main" id="{3FBBFEC4-99CE-4BF2-8205-BE4D99230D41}"/>
               </a:ext>
             </a:extLst>
           </p:cNvPr>
@@ -2862,7 +2862,7 @@
           <p:cNvPr id="3" name="Title">
             <a:extLst xmlns:a="http://schemas.openxmlformats.org/drawingml/2006/main">
               <a:ext uri="{FF2B5EF4-FFF2-40B4-BE49-F238E27FC236}">
-                <a16:creationId xmlns:a16="http://schemas.microsoft.com/office/drawing/2014/main" id="{FBE7ACDD-B7F5-43E9-8280-D0782C583620}"/>
+                <a16:creationId xmlns:a16="http://schemas.microsoft.com/office/drawing/2014/main" id="{889E7D4B-F4D1-4CA1-8A95-FDE3CF93A9C4}"/>
               </a:ext>
             </a:extLst>
           </p:cNvPr>
@@ -3019,7 +3019,7 @@
           <p:cNvPr id="2" name="Left column">
             <a:extLst xmlns:a="http://schemas.openxmlformats.org/drawingml/2006/main">
               <a:ext uri="{FF2B5EF4-FFF2-40B4-BE49-F238E27FC236}">
-                <a16:creationId xmlns:a16="http://schemas.microsoft.com/office/drawing/2014/main" id="{2578FFB3-D492-46CB-9D05-BFA82FC8070A}"/>
+                <a16:creationId xmlns:a16="http://schemas.microsoft.com/office/drawing/2014/main" id="{FA8295A6-E438-4F9D-9337-DA5875EE7E5B}"/>
               </a:ext>
             </a:extLst>
           </p:cNvPr>
@@ -3214,12 +3214,12 @@
   </p:cSld>
   <p:clrMap bg1="lt1" tx1="dk1" bg2="lt2" tx2="dk2" accent1="accent1" accent2="accent2" accent3="accent3" accent4="accent4" accent5="accent5" accent6="accent6" hlink="hlink" folHlink="folHlink"/>
   <p:sldLayoutIdLst>
-    <p:sldLayoutId xmlns:r="http://schemas.openxmlformats.org/officeDocument/2006/relationships" id="2147483649" r:id="R67ce683ae13b4a6d"/>
-    <p:sldLayoutId xmlns:r="http://schemas.openxmlformats.org/officeDocument/2006/relationships" id="2147483650" r:id="Rc594b26d380543df"/>
-    <p:sldLayoutId xmlns:r="http://schemas.openxmlformats.org/officeDocument/2006/relationships" id="2147483651" r:id="R22c1b3aaf6224f26"/>
-    <p:sldLayoutId xmlns:r="http://schemas.openxmlformats.org/officeDocument/2006/relationships" id="2147483652" r:id="R98f00d35957c4b36"/>
-    <p:sldLayoutId xmlns:r="http://schemas.openxmlformats.org/officeDocument/2006/relationships" id="2147483653" r:id="R601d3088dc3f4fa2"/>
-    <p:sldLayoutId xmlns:r="http://schemas.openxmlformats.org/officeDocument/2006/relationships" id="2147483654" r:id="R3d27b5b254df4b8c"/>
+    <p:sldLayoutId xmlns:r="http://schemas.openxmlformats.org/officeDocument/2006/relationships" id="2147483649" r:id="Rd359bcec1d4845c2"/>
+    <p:sldLayoutId xmlns:r="http://schemas.openxmlformats.org/officeDocument/2006/relationships" id="2147483650" r:id="R416e440c1097412a"/>
+    <p:sldLayoutId xmlns:r="http://schemas.openxmlformats.org/officeDocument/2006/relationships" id="2147483651" r:id="Ra7593458e9d244c5"/>
+    <p:sldLayoutId xmlns:r="http://schemas.openxmlformats.org/officeDocument/2006/relationships" id="2147483652" r:id="R375c7fc0972b4b64"/>
+    <p:sldLayoutId xmlns:r="http://schemas.openxmlformats.org/officeDocument/2006/relationships" id="2147483653" r:id="Rc6f1b7968d4f4d05"/>
+    <p:sldLayoutId xmlns:r="http://schemas.openxmlformats.org/officeDocument/2006/relationships" id="2147483654" r:id="R328cced1585b4a89"/>
   </p:sldLayoutIdLst>
   <p:txStyles>
     <p:titleStyle>
@@ -6075,7 +6075,7 @@
           <p:cNvPr id="6" name="">
             <a:extLst xmlns:a="http://schemas.openxmlformats.org/drawingml/2006/main">
               <a:ext uri="{FF2B5EF4-FFF2-40B4-BE49-F238E27FC236}">
-                <a16:creationId xmlns:a16="http://schemas.microsoft.com/office/drawing/2014/main" id="{0BE8892E-A96F-4CCF-84E9-E8F88D66F570}"/>
+                <a16:creationId xmlns:a16="http://schemas.microsoft.com/office/drawing/2014/main" id="{C1E4A894-6053-4507-A5B7-58980691AAF4}"/>
               </a:ext>
             </a:extLst>
           </p:cNvPr>
@@ -6108,7 +6108,7 @@
           <p:cNvPr id="2" name="">
             <a:extLst xmlns:a="http://schemas.openxmlformats.org/drawingml/2006/main">
               <a:ext uri="{FF2B5EF4-FFF2-40B4-BE49-F238E27FC236}">
-                <a16:creationId xmlns:a16="http://schemas.microsoft.com/office/drawing/2014/main" id="{7218F763-9662-456B-B630-154F94F69565}"/>
+                <a16:creationId xmlns:a16="http://schemas.microsoft.com/office/drawing/2014/main" id="{3D4D5757-4E68-48DB-82B0-25C7EB6DCCF2}"/>
               </a:ext>
             </a:extLst>
           </p:cNvPr>
@@ -6199,7 +6199,7 @@
           <p:cNvPr id="3" name="">
             <a:extLst xmlns:a="http://schemas.openxmlformats.org/drawingml/2006/main">
               <a:ext uri="{FF2B5EF4-FFF2-40B4-BE49-F238E27FC236}">
-                <a16:creationId xmlns:a16="http://schemas.microsoft.com/office/drawing/2014/main" id="{2609887A-6777-496A-83BD-8101E63528CD}"/>
+                <a16:creationId xmlns:a16="http://schemas.microsoft.com/office/drawing/2014/main" id="{EEC749D6-CF93-478A-BDDA-F0FCDC50D75D}"/>
               </a:ext>
             </a:extLst>
           </p:cNvPr>
@@ -6267,7 +6267,7 @@
           <p:cNvPr id="4" name="">
             <a:extLst xmlns:a="http://schemas.openxmlformats.org/drawingml/2006/main">
               <a:ext uri="{FF2B5EF4-FFF2-40B4-BE49-F238E27FC236}">
-                <a16:creationId xmlns:a16="http://schemas.microsoft.com/office/drawing/2014/main" id="{0187A82A-BD26-4B2A-9C78-7AD66CA65E12}"/>
+                <a16:creationId xmlns:a16="http://schemas.microsoft.com/office/drawing/2014/main" id="{ADFA9FA8-BD21-487A-9DA2-DC7E2041331C}"/>
               </a:ext>
             </a:extLst>
           </p:cNvPr>
@@ -6300,7 +6300,7 @@
           <p:cNvPr id="5" name="">
             <a:extLst xmlns:a="http://schemas.openxmlformats.org/drawingml/2006/main">
               <a:ext uri="{FF2B5EF4-FFF2-40B4-BE49-F238E27FC236}">
-                <a16:creationId xmlns:a16="http://schemas.microsoft.com/office/drawing/2014/main" id="{EF1D060D-C6AE-4FCC-A022-79CF661086D9}"/>
+                <a16:creationId xmlns:a16="http://schemas.microsoft.com/office/drawing/2014/main" id="{F8F47F38-49A9-4DE7-B642-8B7FF44939C4}"/>
               </a:ext>
             </a:extLst>
           </p:cNvPr>
@@ -6366,7 +6366,7 @@
     </p:spTree>
     <p:extLst>
       <p:ext uri="{BB962C8B-B14F-4D97-AF65-F5344CB8AC3E}">
-        <p14:creationId xmlns:p14="http://schemas.microsoft.com/office/powerpoint/2010/main" val="840360078"/>
+        <p14:creationId xmlns:p14="http://schemas.microsoft.com/office/powerpoint/2010/main" val="259396633"/>
       </p:ext>
     </p:extLst>
   </p:cSld>
@@ -6397,7 +6397,7 @@
           <p:cNvPr id="9" name="">
             <a:extLst xmlns:a="http://schemas.openxmlformats.org/drawingml/2006/main">
               <a:ext uri="{FF2B5EF4-FFF2-40B4-BE49-F238E27FC236}">
-                <a16:creationId xmlns:a16="http://schemas.microsoft.com/office/drawing/2014/main" id="{733FA3A5-E2D2-41ED-A895-59B544E3E9CB}"/>
+                <a16:creationId xmlns:a16="http://schemas.microsoft.com/office/drawing/2014/main" id="{7CDDB029-B468-481E-BBC8-9655758E9B83}"/>
               </a:ext>
             </a:extLst>
           </p:cNvPr>
@@ -6465,7 +6465,7 @@
           <p:cNvPr id="2" name="">
             <a:extLst xmlns:a="http://schemas.openxmlformats.org/drawingml/2006/main">
               <a:ext uri="{FF2B5EF4-FFF2-40B4-BE49-F238E27FC236}">
-                <a16:creationId xmlns:a16="http://schemas.microsoft.com/office/drawing/2014/main" id="{65150338-26D4-4818-BD61-C0A79A201B19}"/>
+                <a16:creationId xmlns:a16="http://schemas.microsoft.com/office/drawing/2014/main" id="{534DCBC9-B367-465F-9463-A82AC006EF79}"/>
               </a:ext>
             </a:extLst>
           </p:cNvPr>
@@ -6498,7 +6498,7 @@
           <p:cNvPr id="3" name="">
             <a:extLst xmlns:a="http://schemas.openxmlformats.org/drawingml/2006/main">
               <a:ext uri="{FF2B5EF4-FFF2-40B4-BE49-F238E27FC236}">
-                <a16:creationId xmlns:a16="http://schemas.microsoft.com/office/drawing/2014/main" id="{983C78C9-34A1-418E-92F9-A68B405FB0A5}"/>
+                <a16:creationId xmlns:a16="http://schemas.microsoft.com/office/drawing/2014/main" id="{0717943D-D8E8-41E7-BB68-8B9D387BD273}"/>
               </a:ext>
             </a:extLst>
           </p:cNvPr>
@@ -6566,7 +6566,7 @@
           <p:cNvPr id="4" name="Chart">
             <a:extLst xmlns:a="http://schemas.openxmlformats.org/drawingml/2006/main">
               <a:ext uri="{FF2B5EF4-FFF2-40B4-BE49-F238E27FC236}">
-                <a16:creationId xmlns:a16="http://schemas.microsoft.com/office/drawing/2014/main" id="{465EA573-0C37-4821-B520-9DAA73EC5341}"/>
+                <a16:creationId xmlns:a16="http://schemas.microsoft.com/office/drawing/2014/main" id="{C4BAF85D-C05A-485B-97C8-C0C5B760C246}"/>
               </a:ext>
             </a:extLst>
           </p:cNvPr>
@@ -6579,7 +6579,7 @@
         </p:xfrm>
         <a:graphic xmlns:a="http://schemas.openxmlformats.org/drawingml/2006/main">
           <a:graphicData uri="http://schemas.openxmlformats.org/drawingml/2006/chart">
-            <c:chart xmlns:r="http://schemas.openxmlformats.org/officeDocument/2006/relationships" xmlns:c="http://schemas.openxmlformats.org/drawingml/2006/chart" r:id="Re372421c21cd467a"/>
+            <c:chart xmlns:r="http://schemas.openxmlformats.org/officeDocument/2006/relationships" xmlns:c="http://schemas.openxmlformats.org/drawingml/2006/chart" r:id="Ree0f5b32391c4311"/>
           </a:graphicData>
         </a:graphic>
       </p:graphicFrame>
@@ -6588,7 +6588,7 @@
           <p:cNvPr id="5" name="">
             <a:extLst xmlns:a="http://schemas.openxmlformats.org/drawingml/2006/main">
               <a:ext uri="{FF2B5EF4-FFF2-40B4-BE49-F238E27FC236}">
-                <a16:creationId xmlns:a16="http://schemas.microsoft.com/office/drawing/2014/main" id="{4665A68D-E033-4495-BD48-73D250FE84EC}"/>
+                <a16:creationId xmlns:a16="http://schemas.microsoft.com/office/drawing/2014/main" id="{139DD6E9-1C63-4380-A765-41BF3709F159}"/>
               </a:ext>
             </a:extLst>
           </p:cNvPr>
@@ -6656,7 +6656,7 @@
           <p:cNvPr id="6" name="">
             <a:extLst xmlns:a="http://schemas.openxmlformats.org/drawingml/2006/main">
               <a:ext uri="{FF2B5EF4-FFF2-40B4-BE49-F238E27FC236}">
-                <a16:creationId xmlns:a16="http://schemas.microsoft.com/office/drawing/2014/main" id="{E01D63A0-ED12-40CD-B6EB-20DB6375BC34}"/>
+                <a16:creationId xmlns:a16="http://schemas.microsoft.com/office/drawing/2014/main" id="{B4394389-4917-4415-A394-C68E93407AB3}"/>
               </a:ext>
             </a:extLst>
           </p:cNvPr>
@@ -6724,7 +6724,7 @@
           <p:cNvPr id="7" name="">
             <a:extLst xmlns:a="http://schemas.openxmlformats.org/drawingml/2006/main">
               <a:ext uri="{FF2B5EF4-FFF2-40B4-BE49-F238E27FC236}">
-                <a16:creationId xmlns:a16="http://schemas.microsoft.com/office/drawing/2014/main" id="{F67D80C0-F947-4C47-A5AA-00C5BE91517C}"/>
+                <a16:creationId xmlns:a16="http://schemas.microsoft.com/office/drawing/2014/main" id="{09DFB7C5-2058-43B2-BEF6-1678A9755C25}"/>
               </a:ext>
             </a:extLst>
           </p:cNvPr>
@@ -6792,7 +6792,7 @@
           <p:cNvPr id="8" name="">
             <a:extLst xmlns:a="http://schemas.openxmlformats.org/drawingml/2006/main">
               <a:ext uri="{FF2B5EF4-FFF2-40B4-BE49-F238E27FC236}">
-                <a16:creationId xmlns:a16="http://schemas.microsoft.com/office/drawing/2014/main" id="{01F4198F-66EE-431B-B984-40618D59E920}"/>
+                <a16:creationId xmlns:a16="http://schemas.microsoft.com/office/drawing/2014/main" id="{05D25AB2-6C1C-4738-BDB5-80D33563E075}"/>
               </a:ext>
             </a:extLst>
           </p:cNvPr>
@@ -6858,7 +6858,7 @@
     </p:spTree>
     <p:extLst>
       <p:ext uri="{BB962C8B-B14F-4D97-AF65-F5344CB8AC3E}">
-        <p14:creationId xmlns:p14="http://schemas.microsoft.com/office/powerpoint/2010/main" val="1539722329"/>
+        <p14:creationId xmlns:p14="http://schemas.microsoft.com/office/powerpoint/2010/main" val="1994520934"/>
       </p:ext>
     </p:extLst>
   </p:cSld>
@@ -6889,7 +6889,7 @@
           <p:cNvPr id="8" name="">
             <a:extLst xmlns:a="http://schemas.openxmlformats.org/drawingml/2006/main">
               <a:ext uri="{FF2B5EF4-FFF2-40B4-BE49-F238E27FC236}">
-                <a16:creationId xmlns:a16="http://schemas.microsoft.com/office/drawing/2014/main" id="{B0F0DE5D-2F02-4884-BCE8-7AD528AB4C16}"/>
+                <a16:creationId xmlns:a16="http://schemas.microsoft.com/office/drawing/2014/main" id="{8FF36284-3BCB-4A9A-9E5B-28326265884D}"/>
               </a:ext>
             </a:extLst>
           </p:cNvPr>
@@ -6957,7 +6957,7 @@
           <p:cNvPr id="2" name="">
             <a:extLst xmlns:a="http://schemas.openxmlformats.org/drawingml/2006/main">
               <a:ext uri="{FF2B5EF4-FFF2-40B4-BE49-F238E27FC236}">
-                <a16:creationId xmlns:a16="http://schemas.microsoft.com/office/drawing/2014/main" id="{BED03DDB-334B-49ED-824E-94FDEB63ECA4}"/>
+                <a16:creationId xmlns:a16="http://schemas.microsoft.com/office/drawing/2014/main" id="{31A53B48-2474-4F90-BB4C-0736A1B29A40}"/>
               </a:ext>
             </a:extLst>
           </p:cNvPr>
@@ -6990,7 +6990,7 @@
           <p:cNvPr id="3" name="">
             <a:extLst xmlns:a="http://schemas.openxmlformats.org/drawingml/2006/main">
               <a:ext uri="{FF2B5EF4-FFF2-40B4-BE49-F238E27FC236}">
-                <a16:creationId xmlns:a16="http://schemas.microsoft.com/office/drawing/2014/main" id="{D557591F-E83A-46A1-BDD7-63D39C01CB51}"/>
+                <a16:creationId xmlns:a16="http://schemas.microsoft.com/office/drawing/2014/main" id="{7AEC202D-6F55-4423-A2CE-4C66F8941649}"/>
               </a:ext>
             </a:extLst>
           </p:cNvPr>
@@ -7058,7 +7058,7 @@
           <p:cNvPr id="4" name="Chart">
             <a:extLst xmlns:a="http://schemas.openxmlformats.org/drawingml/2006/main">
               <a:ext uri="{FF2B5EF4-FFF2-40B4-BE49-F238E27FC236}">
-                <a16:creationId xmlns:a16="http://schemas.microsoft.com/office/drawing/2014/main" id="{01FF5B7A-A31B-49F8-A3EC-12805E08ACFA}"/>
+                <a16:creationId xmlns:a16="http://schemas.microsoft.com/office/drawing/2014/main" id="{CCC0AD0C-C66D-4458-B423-4E4BB188D286}"/>
               </a:ext>
             </a:extLst>
           </p:cNvPr>
@@ -7071,7 +7071,7 @@
         </p:xfrm>
         <a:graphic xmlns:a="http://schemas.openxmlformats.org/drawingml/2006/main">
           <a:graphicData uri="http://schemas.openxmlformats.org/drawingml/2006/chart">
-            <c:chart xmlns:r="http://schemas.openxmlformats.org/officeDocument/2006/relationships" xmlns:c="http://schemas.openxmlformats.org/drawingml/2006/chart" r:id="R9d1e97846c094507"/>
+            <c:chart xmlns:r="http://schemas.openxmlformats.org/officeDocument/2006/relationships" xmlns:c="http://schemas.openxmlformats.org/drawingml/2006/chart" r:id="Refd1ace0fe7e43ca"/>
           </a:graphicData>
         </a:graphic>
       </p:graphicFrame>
@@ -7080,7 +7080,7 @@
           <p:cNvPr id="5" name="">
             <a:extLst xmlns:a="http://schemas.openxmlformats.org/drawingml/2006/main">
               <a:ext uri="{FF2B5EF4-FFF2-40B4-BE49-F238E27FC236}">
-                <a16:creationId xmlns:a16="http://schemas.microsoft.com/office/drawing/2014/main" id="{989A40C2-8872-4746-8A16-F09FCD21406A}"/>
+                <a16:creationId xmlns:a16="http://schemas.microsoft.com/office/drawing/2014/main" id="{B578DD56-67BE-48EE-8537-4595070A7E4B}"/>
               </a:ext>
             </a:extLst>
           </p:cNvPr>
@@ -7148,7 +7148,7 @@
           <p:cNvPr id="6" name="">
             <a:extLst xmlns:a="http://schemas.openxmlformats.org/drawingml/2006/main">
               <a:ext uri="{FF2B5EF4-FFF2-40B4-BE49-F238E27FC236}">
-                <a16:creationId xmlns:a16="http://schemas.microsoft.com/office/drawing/2014/main" id="{C4588379-CF65-498C-B65A-BF26B09ABABC}"/>
+                <a16:creationId xmlns:a16="http://schemas.microsoft.com/office/drawing/2014/main" id="{9186DF2F-79FE-4EB6-AA21-F7935427182C}"/>
               </a:ext>
             </a:extLst>
           </p:cNvPr>
@@ -7216,7 +7216,7 @@
           <p:cNvPr id="7" name="">
             <a:extLst xmlns:a="http://schemas.openxmlformats.org/drawingml/2006/main">
               <a:ext uri="{FF2B5EF4-FFF2-40B4-BE49-F238E27FC236}">
-                <a16:creationId xmlns:a16="http://schemas.microsoft.com/office/drawing/2014/main" id="{4F86C449-3976-48A4-BC9C-20BA4095EB99}"/>
+                <a16:creationId xmlns:a16="http://schemas.microsoft.com/office/drawing/2014/main" id="{828A10B4-CF71-4A26-BDFB-7D7DCC7A94E7}"/>
               </a:ext>
             </a:extLst>
           </p:cNvPr>
@@ -7282,7 +7282,7 @@
     </p:spTree>
     <p:extLst>
       <p:ext uri="{BB962C8B-B14F-4D97-AF65-F5344CB8AC3E}">
-        <p14:creationId xmlns:p14="http://schemas.microsoft.com/office/powerpoint/2010/main" val="444506110"/>
+        <p14:creationId xmlns:p14="http://schemas.microsoft.com/office/powerpoint/2010/main" val="2062793757"/>
       </p:ext>
     </p:extLst>
   </p:cSld>
@@ -7313,7 +7313,7 @@
           <p:cNvPr id="9" name="">
             <a:extLst xmlns:a="http://schemas.openxmlformats.org/drawingml/2006/main">
               <a:ext uri="{FF2B5EF4-FFF2-40B4-BE49-F238E27FC236}">
-                <a16:creationId xmlns:a16="http://schemas.microsoft.com/office/drawing/2014/main" id="{CF90330C-4331-426E-B911-36A650AE6A17}"/>
+                <a16:creationId xmlns:a16="http://schemas.microsoft.com/office/drawing/2014/main" id="{8B01BD51-EE26-470F-8D78-798218CA378D}"/>
               </a:ext>
             </a:extLst>
           </p:cNvPr>
@@ -7381,7 +7381,7 @@
           <p:cNvPr id="2" name="">
             <a:extLst xmlns:a="http://schemas.openxmlformats.org/drawingml/2006/main">
               <a:ext uri="{FF2B5EF4-FFF2-40B4-BE49-F238E27FC236}">
-                <a16:creationId xmlns:a16="http://schemas.microsoft.com/office/drawing/2014/main" id="{DCB3C486-221D-4037-9C62-3B963BFD308D}"/>
+                <a16:creationId xmlns:a16="http://schemas.microsoft.com/office/drawing/2014/main" id="{6F0895D6-8F4F-4932-AD22-62E93AF7DCC9}"/>
               </a:ext>
             </a:extLst>
           </p:cNvPr>
@@ -7414,7 +7414,7 @@
           <p:cNvPr id="3" name="">
             <a:extLst xmlns:a="http://schemas.openxmlformats.org/drawingml/2006/main">
               <a:ext uri="{FF2B5EF4-FFF2-40B4-BE49-F238E27FC236}">
-                <a16:creationId xmlns:a16="http://schemas.microsoft.com/office/drawing/2014/main" id="{A5D5056D-405C-4C06-86F8-2EB740B8E2D7}"/>
+                <a16:creationId xmlns:a16="http://schemas.microsoft.com/office/drawing/2014/main" id="{3BD0E945-EFB1-45CB-B85E-771C81728752}"/>
               </a:ext>
             </a:extLst>
           </p:cNvPr>
@@ -7482,7 +7482,7 @@
           <p:cNvPr id="4" name="">
             <a:extLst xmlns:a="http://schemas.openxmlformats.org/drawingml/2006/main">
               <a:ext uri="{FF2B5EF4-FFF2-40B4-BE49-F238E27FC236}">
-                <a16:creationId xmlns:a16="http://schemas.microsoft.com/office/drawing/2014/main" id="{8E21BE9F-42A3-4D0D-92F7-05F1543C9EAC}"/>
+                <a16:creationId xmlns:a16="http://schemas.microsoft.com/office/drawing/2014/main" id="{74EB92D0-FA41-43E4-95C9-4F29F699A100}"/>
               </a:ext>
             </a:extLst>
           </p:cNvPr>
@@ -7492,7 +7492,7 @@
           <p:nvPr/>
         </p:nvPicPr>
         <p:blipFill>
-          <a:blip xmlns:r="http://schemas.openxmlformats.org/officeDocument/2006/relationships" xmlns:a="http://schemas.openxmlformats.org/drawingml/2006/main" r:embed="Ra2e215359c914579"/>
+          <a:blip xmlns:r="http://schemas.openxmlformats.org/officeDocument/2006/relationships" xmlns:a="http://schemas.openxmlformats.org/drawingml/2006/main" r:embed="R883a26dabfcf47fe"/>
           <a:stretch xmlns:a="http://schemas.openxmlformats.org/drawingml/2006/main"/>
         </p:blipFill>
         <p:spPr>
@@ -7510,7 +7510,7 @@
           <p:cNvPr id="5" name="">
             <a:extLst xmlns:a="http://schemas.openxmlformats.org/drawingml/2006/main">
               <a:ext uri="{FF2B5EF4-FFF2-40B4-BE49-F238E27FC236}">
-                <a16:creationId xmlns:a16="http://schemas.microsoft.com/office/drawing/2014/main" id="{E535A919-64C1-4D55-AC69-80C05B3DB933}"/>
+                <a16:creationId xmlns:a16="http://schemas.microsoft.com/office/drawing/2014/main" id="{3BABE799-3CC8-498C-9DAB-D5429123736B}"/>
               </a:ext>
             </a:extLst>
           </p:cNvPr>
@@ -7578,7 +7578,7 @@
           <p:cNvPr id="6" name="">
             <a:extLst xmlns:a="http://schemas.openxmlformats.org/drawingml/2006/main">
               <a:ext uri="{FF2B5EF4-FFF2-40B4-BE49-F238E27FC236}">
-                <a16:creationId xmlns:a16="http://schemas.microsoft.com/office/drawing/2014/main" id="{E06DBD71-9116-4E9E-9776-32666ACC1545}"/>
+                <a16:creationId xmlns:a16="http://schemas.microsoft.com/office/drawing/2014/main" id="{12EA7749-C90E-4C49-8FF8-51BEE0B191CA}"/>
               </a:ext>
             </a:extLst>
           </p:cNvPr>
@@ -7646,7 +7646,7 @@
           <p:cNvPr id="7" name="">
             <a:extLst xmlns:a="http://schemas.openxmlformats.org/drawingml/2006/main">
               <a:ext uri="{FF2B5EF4-FFF2-40B4-BE49-F238E27FC236}">
-                <a16:creationId xmlns:a16="http://schemas.microsoft.com/office/drawing/2014/main" id="{A655C3FE-D542-45DD-8C0B-91550CC3C761}"/>
+                <a16:creationId xmlns:a16="http://schemas.microsoft.com/office/drawing/2014/main" id="{1CA859A2-38C9-459A-A76E-C075E640CEB6}"/>
               </a:ext>
             </a:extLst>
           </p:cNvPr>
@@ -7714,7 +7714,7 @@
           <p:cNvPr id="8" name="">
             <a:extLst xmlns:a="http://schemas.openxmlformats.org/drawingml/2006/main">
               <a:ext uri="{FF2B5EF4-FFF2-40B4-BE49-F238E27FC236}">
-                <a16:creationId xmlns:a16="http://schemas.microsoft.com/office/drawing/2014/main" id="{3B2CF939-B86C-4993-8478-460D958C1DA4}"/>
+                <a16:creationId xmlns:a16="http://schemas.microsoft.com/office/drawing/2014/main" id="{650057DD-CDD2-41C7-BC10-89D8866E761A}"/>
               </a:ext>
             </a:extLst>
           </p:cNvPr>
@@ -7780,7 +7780,7 @@
     </p:spTree>
     <p:extLst>
       <p:ext uri="{BB962C8B-B14F-4D97-AF65-F5344CB8AC3E}">
-        <p14:creationId xmlns:p14="http://schemas.microsoft.com/office/powerpoint/2010/main" val="1682166347"/>
+        <p14:creationId xmlns:p14="http://schemas.microsoft.com/office/powerpoint/2010/main" val="1006448751"/>
       </p:ext>
     </p:extLst>
   </p:cSld>
@@ -7811,7 +7811,7 @@
           <p:cNvPr id="12" name="">
             <a:extLst xmlns:a="http://schemas.openxmlformats.org/drawingml/2006/main">
               <a:ext uri="{FF2B5EF4-FFF2-40B4-BE49-F238E27FC236}">
-                <a16:creationId xmlns:a16="http://schemas.microsoft.com/office/drawing/2014/main" id="{E26528E4-D336-440B-9212-4391C39022C7}"/>
+                <a16:creationId xmlns:a16="http://schemas.microsoft.com/office/drawing/2014/main" id="{40804774-8AC7-4ECE-8557-580BB24202B9}"/>
               </a:ext>
             </a:extLst>
           </p:cNvPr>
@@ -7879,7 +7879,7 @@
           <p:cNvPr id="2" name="">
             <a:extLst xmlns:a="http://schemas.openxmlformats.org/drawingml/2006/main">
               <a:ext uri="{FF2B5EF4-FFF2-40B4-BE49-F238E27FC236}">
-                <a16:creationId xmlns:a16="http://schemas.microsoft.com/office/drawing/2014/main" id="{411EF19C-5489-4DA2-870C-4B2A6E529191}"/>
+                <a16:creationId xmlns:a16="http://schemas.microsoft.com/office/drawing/2014/main" id="{A024C2F8-4D6C-48EA-B8E8-794EFF08E812}"/>
               </a:ext>
             </a:extLst>
           </p:cNvPr>
@@ -7912,7 +7912,7 @@
           <p:cNvPr id="3" name="">
             <a:extLst xmlns:a="http://schemas.openxmlformats.org/drawingml/2006/main">
               <a:ext uri="{FF2B5EF4-FFF2-40B4-BE49-F238E27FC236}">
-                <a16:creationId xmlns:a16="http://schemas.microsoft.com/office/drawing/2014/main" id="{DF231935-FB88-48A5-A953-149B1897A06F}"/>
+                <a16:creationId xmlns:a16="http://schemas.microsoft.com/office/drawing/2014/main" id="{050DB920-C466-4778-9FAD-540355734052}"/>
               </a:ext>
             </a:extLst>
           </p:cNvPr>
@@ -7980,7 +7980,7 @@
           <p:cNvPr id="4" name="">
             <a:extLst xmlns:a="http://schemas.openxmlformats.org/drawingml/2006/main">
               <a:ext uri="{FF2B5EF4-FFF2-40B4-BE49-F238E27FC236}">
-                <a16:creationId xmlns:a16="http://schemas.microsoft.com/office/drawing/2014/main" id="{E414DFF5-CF7B-4FA8-A5C6-C5BA9D7A7BD1}"/>
+                <a16:creationId xmlns:a16="http://schemas.microsoft.com/office/drawing/2014/main" id="{C3198104-6E58-4396-941B-BC676E7AD257}"/>
               </a:ext>
             </a:extLst>
           </p:cNvPr>
@@ -7990,7 +7990,7 @@
           <p:nvPr/>
         </p:nvPicPr>
         <p:blipFill>
-          <a:blip xmlns:r="http://schemas.openxmlformats.org/officeDocument/2006/relationships" xmlns:a="http://schemas.openxmlformats.org/drawingml/2006/main" r:embed="R02d1c1f5d57c45c1"/>
+          <a:blip xmlns:r="http://schemas.openxmlformats.org/officeDocument/2006/relationships" xmlns:a="http://schemas.openxmlformats.org/drawingml/2006/main" r:embed="R8a55d9e4c4ef4a6a"/>
           <a:stretch xmlns:a="http://schemas.openxmlformats.org/drawingml/2006/main"/>
         </p:blipFill>
         <p:spPr>
@@ -8008,7 +8008,7 @@
           <p:cNvPr id="5" name="">
             <a:extLst xmlns:a="http://schemas.openxmlformats.org/drawingml/2006/main">
               <a:ext uri="{FF2B5EF4-FFF2-40B4-BE49-F238E27FC236}">
-                <a16:creationId xmlns:a16="http://schemas.microsoft.com/office/drawing/2014/main" id="{1EAB4CF6-E486-4231-A707-3BA67A2A6D77}"/>
+                <a16:creationId xmlns:a16="http://schemas.microsoft.com/office/drawing/2014/main" id="{EC239BC9-2EFA-480E-9DB0-63F3D876A575}"/>
               </a:ext>
             </a:extLst>
           </p:cNvPr>
@@ -8076,7 +8076,7 @@
           <p:cNvPr id="6" name="">
             <a:extLst xmlns:a="http://schemas.openxmlformats.org/drawingml/2006/main">
               <a:ext uri="{FF2B5EF4-FFF2-40B4-BE49-F238E27FC236}">
-                <a16:creationId xmlns:a16="http://schemas.microsoft.com/office/drawing/2014/main" id="{B02FFA35-5554-4591-B54C-0A38EE4A5EEB}"/>
+                <a16:creationId xmlns:a16="http://schemas.microsoft.com/office/drawing/2014/main" id="{060AD203-7A12-43B6-B842-B05B19077857}"/>
               </a:ext>
             </a:extLst>
           </p:cNvPr>
@@ -8144,7 +8144,7 @@
           <p:cNvPr id="7" name="">
             <a:extLst xmlns:a="http://schemas.openxmlformats.org/drawingml/2006/main">
               <a:ext uri="{FF2B5EF4-FFF2-40B4-BE49-F238E27FC236}">
-                <a16:creationId xmlns:a16="http://schemas.microsoft.com/office/drawing/2014/main" id="{4424D809-BF6D-4A83-B1A7-FFFD7692FDDF}"/>
+                <a16:creationId xmlns:a16="http://schemas.microsoft.com/office/drawing/2014/main" id="{1D06B85D-F561-40DE-8184-62E5855A6BC3}"/>
               </a:ext>
             </a:extLst>
           </p:cNvPr>
@@ -8212,7 +8212,7 @@
           <p:cNvPr id="8" name="">
             <a:extLst xmlns:a="http://schemas.openxmlformats.org/drawingml/2006/main">
               <a:ext uri="{FF2B5EF4-FFF2-40B4-BE49-F238E27FC236}">
-                <a16:creationId xmlns:a16="http://schemas.microsoft.com/office/drawing/2014/main" id="{FDC318EB-1412-4A0B-974B-A110D18FA7A6}"/>
+                <a16:creationId xmlns:a16="http://schemas.microsoft.com/office/drawing/2014/main" id="{87BAC20D-2800-47D5-A236-FCB590541112}"/>
               </a:ext>
             </a:extLst>
           </p:cNvPr>
@@ -8280,7 +8280,7 @@
           <p:cNvPr id="9" name="">
             <a:extLst xmlns:a="http://schemas.openxmlformats.org/drawingml/2006/main">
               <a:ext uri="{FF2B5EF4-FFF2-40B4-BE49-F238E27FC236}">
-                <a16:creationId xmlns:a16="http://schemas.microsoft.com/office/drawing/2014/main" id="{FF45FD9A-96A9-4668-9378-EA2EBA0BE775}"/>
+                <a16:creationId xmlns:a16="http://schemas.microsoft.com/office/drawing/2014/main" id="{DA196710-7FEB-41F0-B701-F51ECC4ABDCB}"/>
               </a:ext>
             </a:extLst>
           </p:cNvPr>
@@ -8313,7 +8313,7 @@
           <p:cNvPr id="10" name="">
             <a:extLst xmlns:a="http://schemas.openxmlformats.org/drawingml/2006/main">
               <a:ext uri="{FF2B5EF4-FFF2-40B4-BE49-F238E27FC236}">
-                <a16:creationId xmlns:a16="http://schemas.microsoft.com/office/drawing/2014/main" id="{D83E475C-0455-4D11-AFF3-29F342AC1374}"/>
+                <a16:creationId xmlns:a16="http://schemas.microsoft.com/office/drawing/2014/main" id="{7F0F25B4-7574-4498-960A-CC27CA220B5C}"/>
               </a:ext>
             </a:extLst>
           </p:cNvPr>
@@ -8381,7 +8381,7 @@
           <p:cNvPr id="11" name="">
             <a:extLst xmlns:a="http://schemas.openxmlformats.org/drawingml/2006/main">
               <a:ext uri="{FF2B5EF4-FFF2-40B4-BE49-F238E27FC236}">
-                <a16:creationId xmlns:a16="http://schemas.microsoft.com/office/drawing/2014/main" id="{7836A7CD-6F96-4647-93EA-30C1DB8B167C}"/>
+                <a16:creationId xmlns:a16="http://schemas.microsoft.com/office/drawing/2014/main" id="{4E7A6393-C7F6-4F2E-BA30-ABAF68C7361E}"/>
               </a:ext>
             </a:extLst>
           </p:cNvPr>
@@ -8447,7 +8447,7 @@
     </p:spTree>
     <p:extLst>
       <p:ext uri="{BB962C8B-B14F-4D97-AF65-F5344CB8AC3E}">
-        <p14:creationId xmlns:p14="http://schemas.microsoft.com/office/powerpoint/2010/main" val="1666554938"/>
+        <p14:creationId xmlns:p14="http://schemas.microsoft.com/office/powerpoint/2010/main" val="1293459735"/>
       </p:ext>
     </p:extLst>
   </p:cSld>
@@ -8478,7 +8478,7 @@
           <p:cNvPr id="20" name="">
             <a:extLst xmlns:a="http://schemas.openxmlformats.org/drawingml/2006/main">
               <a:ext uri="{FF2B5EF4-FFF2-40B4-BE49-F238E27FC236}">
-                <a16:creationId xmlns:a16="http://schemas.microsoft.com/office/drawing/2014/main" id="{72A55A6E-78E3-4845-9AB9-ECF0D424839A}"/>
+                <a16:creationId xmlns:a16="http://schemas.microsoft.com/office/drawing/2014/main" id="{8860133E-5A2A-49D2-A02D-4D64E61222F9}"/>
               </a:ext>
             </a:extLst>
           </p:cNvPr>
@@ -8546,7 +8546,7 @@
           <p:cNvPr id="2" name="">
             <a:extLst xmlns:a="http://schemas.openxmlformats.org/drawingml/2006/main">
               <a:ext uri="{FF2B5EF4-FFF2-40B4-BE49-F238E27FC236}">
-                <a16:creationId xmlns:a16="http://schemas.microsoft.com/office/drawing/2014/main" id="{CAE60FFD-A151-4DC9-A056-F1AC84D7B17C}"/>
+                <a16:creationId xmlns:a16="http://schemas.microsoft.com/office/drawing/2014/main" id="{CCBEA7CF-627F-4974-85FF-329B8B054BE4}"/>
               </a:ext>
             </a:extLst>
           </p:cNvPr>
@@ -8579,7 +8579,7 @@
           <p:cNvPr id="3" name="">
             <a:extLst xmlns:a="http://schemas.openxmlformats.org/drawingml/2006/main">
               <a:ext uri="{FF2B5EF4-FFF2-40B4-BE49-F238E27FC236}">
-                <a16:creationId xmlns:a16="http://schemas.microsoft.com/office/drawing/2014/main" id="{1B92557C-155F-45D8-97F7-2847D1B6DE50}"/>
+                <a16:creationId xmlns:a16="http://schemas.microsoft.com/office/drawing/2014/main" id="{A40AA14D-B514-4320-83D1-B7DA1BE5E128}"/>
               </a:ext>
             </a:extLst>
           </p:cNvPr>
@@ -8647,7 +8647,7 @@
           <p:cNvPr id="4" name="">
             <a:extLst xmlns:a="http://schemas.openxmlformats.org/drawingml/2006/main">
               <a:ext uri="{FF2B5EF4-FFF2-40B4-BE49-F238E27FC236}">
-                <a16:creationId xmlns:a16="http://schemas.microsoft.com/office/drawing/2014/main" id="{16752431-D400-4A7F-9C93-62EF55685879}"/>
+                <a16:creationId xmlns:a16="http://schemas.microsoft.com/office/drawing/2014/main" id="{EFB697C5-F8E7-4333-9846-22F2430DA73D}"/>
               </a:ext>
             </a:extLst>
           </p:cNvPr>
@@ -8682,7 +8682,7 @@
           <p:cNvPr id="5" name="">
             <a:extLst xmlns:a="http://schemas.openxmlformats.org/drawingml/2006/main">
               <a:ext uri="{FF2B5EF4-FFF2-40B4-BE49-F238E27FC236}">
-                <a16:creationId xmlns:a16="http://schemas.microsoft.com/office/drawing/2014/main" id="{A067CB08-C3EC-408D-AB8B-239CFE206BB8}"/>
+                <a16:creationId xmlns:a16="http://schemas.microsoft.com/office/drawing/2014/main" id="{856798AB-42C2-4C44-A318-D3255E81E28C}"/>
               </a:ext>
             </a:extLst>
           </p:cNvPr>
@@ -8750,7 +8750,7 @@
           <p:cNvPr id="6" name="">
             <a:extLst xmlns:a="http://schemas.openxmlformats.org/drawingml/2006/main">
               <a:ext uri="{FF2B5EF4-FFF2-40B4-BE49-F238E27FC236}">
-                <a16:creationId xmlns:a16="http://schemas.microsoft.com/office/drawing/2014/main" id="{70A0206B-DCAF-4314-999C-0A7C4C225055}"/>
+                <a16:creationId xmlns:a16="http://schemas.microsoft.com/office/drawing/2014/main" id="{BADC0B01-6FAF-488A-8152-C6E291AA7705}"/>
               </a:ext>
             </a:extLst>
           </p:cNvPr>
@@ -8818,7 +8818,7 @@
           <p:cNvPr id="7" name="">
             <a:extLst xmlns:a="http://schemas.openxmlformats.org/drawingml/2006/main">
               <a:ext uri="{FF2B5EF4-FFF2-40B4-BE49-F238E27FC236}">
-                <a16:creationId xmlns:a16="http://schemas.microsoft.com/office/drawing/2014/main" id="{721DD8BF-9E57-4166-8625-060AE1770CBA}"/>
+                <a16:creationId xmlns:a16="http://schemas.microsoft.com/office/drawing/2014/main" id="{6F1D79F1-B9AA-4554-A40E-5FB0AA2BE52F}"/>
               </a:ext>
             </a:extLst>
           </p:cNvPr>
@@ -8851,7 +8851,7 @@
           <p:cNvPr id="8" name="">
             <a:extLst xmlns:a="http://schemas.openxmlformats.org/drawingml/2006/main">
               <a:ext uri="{FF2B5EF4-FFF2-40B4-BE49-F238E27FC236}">
-                <a16:creationId xmlns:a16="http://schemas.microsoft.com/office/drawing/2014/main" id="{8FB9EBCC-F178-4904-B1E1-239D571FA058}"/>
+                <a16:creationId xmlns:a16="http://schemas.microsoft.com/office/drawing/2014/main" id="{A3C9660B-A139-4A26-8C36-7D71973B0AFC}"/>
               </a:ext>
             </a:extLst>
           </p:cNvPr>
@@ -8886,7 +8886,7 @@
           <p:cNvPr id="9" name="">
             <a:extLst xmlns:a="http://schemas.openxmlformats.org/drawingml/2006/main">
               <a:ext uri="{FF2B5EF4-FFF2-40B4-BE49-F238E27FC236}">
-                <a16:creationId xmlns:a16="http://schemas.microsoft.com/office/drawing/2014/main" id="{13D9AB4B-70F5-4C71-A3B1-8C94F198FD7F}"/>
+                <a16:creationId xmlns:a16="http://schemas.microsoft.com/office/drawing/2014/main" id="{303BD751-9DB7-43EE-A475-6D20526CA329}"/>
               </a:ext>
             </a:extLst>
           </p:cNvPr>
@@ -8954,7 +8954,7 @@
           <p:cNvPr id="10" name="">
             <a:extLst xmlns:a="http://schemas.openxmlformats.org/drawingml/2006/main">
               <a:ext uri="{FF2B5EF4-FFF2-40B4-BE49-F238E27FC236}">
-                <a16:creationId xmlns:a16="http://schemas.microsoft.com/office/drawing/2014/main" id="{E260A1FD-A121-449C-A2D6-2A663551ACE6}"/>
+                <a16:creationId xmlns:a16="http://schemas.microsoft.com/office/drawing/2014/main" id="{8389491A-56A2-4B30-B71D-8230EFAE1B90}"/>
               </a:ext>
             </a:extLst>
           </p:cNvPr>
@@ -9022,7 +9022,7 @@
           <p:cNvPr id="11" name="">
             <a:extLst xmlns:a="http://schemas.openxmlformats.org/drawingml/2006/main">
               <a:ext uri="{FF2B5EF4-FFF2-40B4-BE49-F238E27FC236}">
-                <a16:creationId xmlns:a16="http://schemas.microsoft.com/office/drawing/2014/main" id="{526AB9EB-8536-4165-8DA8-B7017E2B505C}"/>
+                <a16:creationId xmlns:a16="http://schemas.microsoft.com/office/drawing/2014/main" id="{F01B6949-9914-4358-A848-C3D8D2922BAD}"/>
               </a:ext>
             </a:extLst>
           </p:cNvPr>
@@ -9055,7 +9055,7 @@
           <p:cNvPr id="12" name="">
             <a:extLst xmlns:a="http://schemas.openxmlformats.org/drawingml/2006/main">
               <a:ext uri="{FF2B5EF4-FFF2-40B4-BE49-F238E27FC236}">
-                <a16:creationId xmlns:a16="http://schemas.microsoft.com/office/drawing/2014/main" id="{32A7B050-1F5C-4F30-B5E0-A8BF75681342}"/>
+                <a16:creationId xmlns:a16="http://schemas.microsoft.com/office/drawing/2014/main" id="{369839A8-E95E-4968-82DC-E4FBD70B7216}"/>
               </a:ext>
             </a:extLst>
           </p:cNvPr>
@@ -9090,7 +9090,7 @@
           <p:cNvPr id="13" name="">
             <a:extLst xmlns:a="http://schemas.openxmlformats.org/drawingml/2006/main">
               <a:ext uri="{FF2B5EF4-FFF2-40B4-BE49-F238E27FC236}">
-                <a16:creationId xmlns:a16="http://schemas.microsoft.com/office/drawing/2014/main" id="{A3C91CEB-C585-4348-AFE8-A3AC43BA322F}"/>
+                <a16:creationId xmlns:a16="http://schemas.microsoft.com/office/drawing/2014/main" id="{436E92AD-50DA-4AC7-A99C-8A87466823D6}"/>
               </a:ext>
             </a:extLst>
           </p:cNvPr>
@@ -9158,7 +9158,7 @@
           <p:cNvPr id="14" name="">
             <a:extLst xmlns:a="http://schemas.openxmlformats.org/drawingml/2006/main">
               <a:ext uri="{FF2B5EF4-FFF2-40B4-BE49-F238E27FC236}">
-                <a16:creationId xmlns:a16="http://schemas.microsoft.com/office/drawing/2014/main" id="{62840F3D-4032-47C8-9EE3-566861E696C7}"/>
+                <a16:creationId xmlns:a16="http://schemas.microsoft.com/office/drawing/2014/main" id="{C77364C3-5A2A-457F-BC24-0FAC3024C7BE}"/>
               </a:ext>
             </a:extLst>
           </p:cNvPr>
@@ -9226,7 +9226,7 @@
           <p:cNvPr id="15" name="">
             <a:extLst xmlns:a="http://schemas.openxmlformats.org/drawingml/2006/main">
               <a:ext uri="{FF2B5EF4-FFF2-40B4-BE49-F238E27FC236}">
-                <a16:creationId xmlns:a16="http://schemas.microsoft.com/office/drawing/2014/main" id="{52FAEEFA-29E9-4093-8D35-47FDC63678C3}"/>
+                <a16:creationId xmlns:a16="http://schemas.microsoft.com/office/drawing/2014/main" id="{8BAFDB37-AFD1-40E1-8E72-50D9A0A6A82F}"/>
               </a:ext>
             </a:extLst>
           </p:cNvPr>
@@ -9259,7 +9259,7 @@
           <p:cNvPr id="16" name="">
             <a:extLst xmlns:a="http://schemas.openxmlformats.org/drawingml/2006/main">
               <a:ext uri="{FF2B5EF4-FFF2-40B4-BE49-F238E27FC236}">
-                <a16:creationId xmlns:a16="http://schemas.microsoft.com/office/drawing/2014/main" id="{8EB5ACD9-11B3-4CF3-9EAD-305D81ECF120}"/>
+                <a16:creationId xmlns:a16="http://schemas.microsoft.com/office/drawing/2014/main" id="{2FC8553C-27FF-49C6-9CB5-E3D268290A90}"/>
               </a:ext>
             </a:extLst>
           </p:cNvPr>
@@ -9294,7 +9294,7 @@
           <p:cNvPr id="17" name="">
             <a:extLst xmlns:a="http://schemas.openxmlformats.org/drawingml/2006/main">
               <a:ext uri="{FF2B5EF4-FFF2-40B4-BE49-F238E27FC236}">
-                <a16:creationId xmlns:a16="http://schemas.microsoft.com/office/drawing/2014/main" id="{0AB3E047-1564-4DF4-9661-C8F9AA6994BA}"/>
+                <a16:creationId xmlns:a16="http://schemas.microsoft.com/office/drawing/2014/main" id="{F8F90839-667F-42FA-BCA0-7F1B3192D3B9}"/>
               </a:ext>
             </a:extLst>
           </p:cNvPr>
@@ -9362,7 +9362,7 @@
           <p:cNvPr id="18" name="">
             <a:extLst xmlns:a="http://schemas.openxmlformats.org/drawingml/2006/main">
               <a:ext uri="{FF2B5EF4-FFF2-40B4-BE49-F238E27FC236}">
-                <a16:creationId xmlns:a16="http://schemas.microsoft.com/office/drawing/2014/main" id="{01BA18ED-2685-4A36-8484-52F33C78D196}"/>
+                <a16:creationId xmlns:a16="http://schemas.microsoft.com/office/drawing/2014/main" id="{F82F7A95-5FD5-49FF-B890-4B2AAA6B01B9}"/>
               </a:ext>
             </a:extLst>
           </p:cNvPr>
@@ -9430,7 +9430,7 @@
           <p:cNvPr id="19" name="">
             <a:extLst xmlns:a="http://schemas.openxmlformats.org/drawingml/2006/main">
               <a:ext uri="{FF2B5EF4-FFF2-40B4-BE49-F238E27FC236}">
-                <a16:creationId xmlns:a16="http://schemas.microsoft.com/office/drawing/2014/main" id="{BA7CA13F-0F32-4236-A16B-115D0CD9D3C5}"/>
+                <a16:creationId xmlns:a16="http://schemas.microsoft.com/office/drawing/2014/main" id="{F5C0761E-1677-47F9-8775-5BB9BC11A1F8}"/>
               </a:ext>
             </a:extLst>
           </p:cNvPr>
@@ -9496,7 +9496,7 @@
     </p:spTree>
     <p:extLst>
       <p:ext uri="{BB962C8B-B14F-4D97-AF65-F5344CB8AC3E}">
-        <p14:creationId xmlns:p14="http://schemas.microsoft.com/office/powerpoint/2010/main" val="836004205"/>
+        <p14:creationId xmlns:p14="http://schemas.microsoft.com/office/powerpoint/2010/main" val="1355244875"/>
       </p:ext>
     </p:extLst>
   </p:cSld>
@@ -9527,7 +9527,7 @@
           <p:cNvPr id="14" name="">
             <a:extLst xmlns:a="http://schemas.openxmlformats.org/drawingml/2006/main">
               <a:ext uri="{FF2B5EF4-FFF2-40B4-BE49-F238E27FC236}">
-                <a16:creationId xmlns:a16="http://schemas.microsoft.com/office/drawing/2014/main" id="{FC95B735-A53B-4373-89CA-D838892727E8}"/>
+                <a16:creationId xmlns:a16="http://schemas.microsoft.com/office/drawing/2014/main" id="{FE0EE503-B333-413E-8AC3-72EA169BC78B}"/>
               </a:ext>
             </a:extLst>
           </p:cNvPr>
@@ -9595,7 +9595,7 @@
           <p:cNvPr id="2" name="">
             <a:extLst xmlns:a="http://schemas.openxmlformats.org/drawingml/2006/main">
               <a:ext uri="{FF2B5EF4-FFF2-40B4-BE49-F238E27FC236}">
-                <a16:creationId xmlns:a16="http://schemas.microsoft.com/office/drawing/2014/main" id="{1A20B3BD-1E3C-4EF3-A17A-A96A3C8EF6D0}"/>
+                <a16:creationId xmlns:a16="http://schemas.microsoft.com/office/drawing/2014/main" id="{7EFE8782-97C8-4950-81A6-C1EB69A99055}"/>
               </a:ext>
             </a:extLst>
           </p:cNvPr>
@@ -9628,7 +9628,7 @@
           <p:cNvPr id="3" name="">
             <a:extLst xmlns:a="http://schemas.openxmlformats.org/drawingml/2006/main">
               <a:ext uri="{FF2B5EF4-FFF2-40B4-BE49-F238E27FC236}">
-                <a16:creationId xmlns:a16="http://schemas.microsoft.com/office/drawing/2014/main" id="{3FA18AF5-A496-4BA9-8789-5DE895F4D590}"/>
+                <a16:creationId xmlns:a16="http://schemas.microsoft.com/office/drawing/2014/main" id="{F30E0D94-89DA-4835-8246-77275958AA80}"/>
               </a:ext>
             </a:extLst>
           </p:cNvPr>
@@ -9696,7 +9696,7 @@
           <p:cNvPr id="4" name="">
             <a:extLst xmlns:a="http://schemas.openxmlformats.org/drawingml/2006/main">
               <a:ext uri="{FF2B5EF4-FFF2-40B4-BE49-F238E27FC236}">
-                <a16:creationId xmlns:a16="http://schemas.microsoft.com/office/drawing/2014/main" id="{AFE39FD9-01E9-4506-8FA5-11A7F110CE8B}"/>
+                <a16:creationId xmlns:a16="http://schemas.microsoft.com/office/drawing/2014/main" id="{1353C678-B543-4578-AAAD-70A6042882AD}"/>
               </a:ext>
             </a:extLst>
           </p:cNvPr>
@@ -9731,7 +9731,7 @@
           <p:cNvPr id="5" name="">
             <a:extLst xmlns:a="http://schemas.openxmlformats.org/drawingml/2006/main">
               <a:ext uri="{FF2B5EF4-FFF2-40B4-BE49-F238E27FC236}">
-                <a16:creationId xmlns:a16="http://schemas.microsoft.com/office/drawing/2014/main" id="{94CF1F09-106F-49FB-88FF-880B474C73A7}"/>
+                <a16:creationId xmlns:a16="http://schemas.microsoft.com/office/drawing/2014/main" id="{3A47A5F5-5CE3-40DE-9AB4-CD51A119D86B}"/>
               </a:ext>
             </a:extLst>
           </p:cNvPr>
@@ -9799,7 +9799,7 @@
           <p:cNvPr id="6" name="">
             <a:extLst xmlns:a="http://schemas.openxmlformats.org/drawingml/2006/main">
               <a:ext uri="{FF2B5EF4-FFF2-40B4-BE49-F238E27FC236}">
-                <a16:creationId xmlns:a16="http://schemas.microsoft.com/office/drawing/2014/main" id="{F6927CFE-B911-4BA2-92AD-49C050DE2B87}"/>
+                <a16:creationId xmlns:a16="http://schemas.microsoft.com/office/drawing/2014/main" id="{42CB0976-847F-4E4F-AF1F-3920A8E902EA}"/>
               </a:ext>
             </a:extLst>
           </p:cNvPr>
@@ -9834,7 +9834,7 @@
           <p:cNvPr id="7" name="">
             <a:extLst xmlns:a="http://schemas.openxmlformats.org/drawingml/2006/main">
               <a:ext uri="{FF2B5EF4-FFF2-40B4-BE49-F238E27FC236}">
-                <a16:creationId xmlns:a16="http://schemas.microsoft.com/office/drawing/2014/main" id="{D53ED601-F62D-477A-A52D-4C15BB7F7645}"/>
+                <a16:creationId xmlns:a16="http://schemas.microsoft.com/office/drawing/2014/main" id="{D4F46490-1134-4721-9607-C4213A7DCD63}"/>
               </a:ext>
             </a:extLst>
           </p:cNvPr>
@@ -9902,7 +9902,7 @@
           <p:cNvPr id="8" name="">
             <a:extLst xmlns:a="http://schemas.openxmlformats.org/drawingml/2006/main">
               <a:ext uri="{FF2B5EF4-FFF2-40B4-BE49-F238E27FC236}">
-                <a16:creationId xmlns:a16="http://schemas.microsoft.com/office/drawing/2014/main" id="{DE438A3D-70B9-4A9D-800C-494973E550B2}"/>
+                <a16:creationId xmlns:a16="http://schemas.microsoft.com/office/drawing/2014/main" id="{20BD9567-B41A-4FF2-8354-623FE0F531DC}"/>
               </a:ext>
             </a:extLst>
           </p:cNvPr>
@@ -9937,7 +9937,7 @@
           <p:cNvPr id="9" name="">
             <a:extLst xmlns:a="http://schemas.openxmlformats.org/drawingml/2006/main">
               <a:ext uri="{FF2B5EF4-FFF2-40B4-BE49-F238E27FC236}">
-                <a16:creationId xmlns:a16="http://schemas.microsoft.com/office/drawing/2014/main" id="{8443863D-8920-47D5-BD14-05DD4D15C0FE}"/>
+                <a16:creationId xmlns:a16="http://schemas.microsoft.com/office/drawing/2014/main" id="{CD8B8646-2AAC-491C-BE30-2A3BBBCAB861}"/>
               </a:ext>
             </a:extLst>
           </p:cNvPr>
@@ -10005,7 +10005,7 @@
           <p:cNvPr id="10" name="">
             <a:extLst xmlns:a="http://schemas.openxmlformats.org/drawingml/2006/main">
               <a:ext uri="{FF2B5EF4-FFF2-40B4-BE49-F238E27FC236}">
-                <a16:creationId xmlns:a16="http://schemas.microsoft.com/office/drawing/2014/main" id="{3BA7ED78-8176-460F-822E-F33EDE51476D}"/>
+                <a16:creationId xmlns:a16="http://schemas.microsoft.com/office/drawing/2014/main" id="{D8ACAE3A-23FF-473E-B6A1-2A3CB7F1ED55}"/>
               </a:ext>
             </a:extLst>
           </p:cNvPr>
@@ -10038,7 +10038,7 @@
           <p:cNvPr id="11" name="">
             <a:extLst xmlns:a="http://schemas.openxmlformats.org/drawingml/2006/main">
               <a:ext uri="{FF2B5EF4-FFF2-40B4-BE49-F238E27FC236}">
-                <a16:creationId xmlns:a16="http://schemas.microsoft.com/office/drawing/2014/main" id="{353DFB0A-A957-4150-9A65-A6FF858C9B96}"/>
+                <a16:creationId xmlns:a16="http://schemas.microsoft.com/office/drawing/2014/main" id="{8FD9D7B3-E84D-43A5-B850-943FC67E4462}"/>
               </a:ext>
             </a:extLst>
           </p:cNvPr>
@@ -10106,7 +10106,7 @@
           <p:cNvPr id="12" name="">
             <a:extLst xmlns:a="http://schemas.openxmlformats.org/drawingml/2006/main">
               <a:ext uri="{FF2B5EF4-FFF2-40B4-BE49-F238E27FC236}">
-                <a16:creationId xmlns:a16="http://schemas.microsoft.com/office/drawing/2014/main" id="{0DE31CA3-9FC4-40AE-9A4D-36F43E090A0D}"/>
+                <a16:creationId xmlns:a16="http://schemas.microsoft.com/office/drawing/2014/main" id="{04F1484D-4F89-4268-9FD8-966275E50C44}"/>
               </a:ext>
             </a:extLst>
           </p:cNvPr>
@@ -10243,7 +10243,7 @@
           <p:cNvPr id="13" name="">
             <a:extLst xmlns:a="http://schemas.openxmlformats.org/drawingml/2006/main">
               <a:ext uri="{FF2B5EF4-FFF2-40B4-BE49-F238E27FC236}">
-                <a16:creationId xmlns:a16="http://schemas.microsoft.com/office/drawing/2014/main" id="{6B96DE3F-11EE-4053-AD36-09C3FDF9D6E9}"/>
+                <a16:creationId xmlns:a16="http://schemas.microsoft.com/office/drawing/2014/main" id="{A936FEB4-E8F6-4722-BF53-EC37AE32FC1B}"/>
               </a:ext>
             </a:extLst>
           </p:cNvPr>
@@ -10309,7 +10309,7 @@
     </p:spTree>
     <p:extLst>
       <p:ext uri="{BB962C8B-B14F-4D97-AF65-F5344CB8AC3E}">
-        <p14:creationId xmlns:p14="http://schemas.microsoft.com/office/powerpoint/2010/main" val="870063554"/>
+        <p14:creationId xmlns:p14="http://schemas.microsoft.com/office/powerpoint/2010/main" val="873008979"/>
       </p:ext>
     </p:extLst>
   </p:cSld>
@@ -10340,7 +10340,7 @@
           <p:cNvPr id="8" name="">
             <a:extLst xmlns:a="http://schemas.openxmlformats.org/drawingml/2006/main">
               <a:ext uri="{FF2B5EF4-FFF2-40B4-BE49-F238E27FC236}">
-                <a16:creationId xmlns:a16="http://schemas.microsoft.com/office/drawing/2014/main" id="{51F117B9-06FF-4BA2-BC60-A7C021F708EA}"/>
+                <a16:creationId xmlns:a16="http://schemas.microsoft.com/office/drawing/2014/main" id="{06C3695F-DAE2-4911-A6C8-5F2354540B6C}"/>
               </a:ext>
             </a:extLst>
           </p:cNvPr>
@@ -10408,7 +10408,7 @@
           <p:cNvPr id="2" name="">
             <a:extLst xmlns:a="http://schemas.openxmlformats.org/drawingml/2006/main">
               <a:ext uri="{FF2B5EF4-FFF2-40B4-BE49-F238E27FC236}">
-                <a16:creationId xmlns:a16="http://schemas.microsoft.com/office/drawing/2014/main" id="{433080F1-E119-4EFB-AE32-AFE2D6DE312E}"/>
+                <a16:creationId xmlns:a16="http://schemas.microsoft.com/office/drawing/2014/main" id="{5F374A17-45B4-417E-B43D-2263E2D89CD9}"/>
               </a:ext>
             </a:extLst>
           </p:cNvPr>
@@ -10441,7 +10441,7 @@
           <p:cNvPr id="3" name="">
             <a:extLst xmlns:a="http://schemas.openxmlformats.org/drawingml/2006/main">
               <a:ext uri="{FF2B5EF4-FFF2-40B4-BE49-F238E27FC236}">
-                <a16:creationId xmlns:a16="http://schemas.microsoft.com/office/drawing/2014/main" id="{BC98E4BB-1610-447F-B5F2-523A76FCAA38}"/>
+                <a16:creationId xmlns:a16="http://schemas.microsoft.com/office/drawing/2014/main" id="{5F7BCBF6-AB53-4DE6-9FD9-A3436B296217}"/>
               </a:ext>
             </a:extLst>
           </p:cNvPr>
@@ -10509,7 +10509,7 @@
           <p:cNvPr id="4" name="">
             <a:extLst xmlns:a="http://schemas.openxmlformats.org/drawingml/2006/main">
               <a:ext uri="{FF2B5EF4-FFF2-40B4-BE49-F238E27FC236}">
-                <a16:creationId xmlns:a16="http://schemas.microsoft.com/office/drawing/2014/main" id="{00BFE3CD-E5CE-4FD1-87E6-385D488EC8D4}"/>
+                <a16:creationId xmlns:a16="http://schemas.microsoft.com/office/drawing/2014/main" id="{FF45D5D1-BC79-4F12-ACD9-BE05C7F4635C}"/>
               </a:ext>
             </a:extLst>
           </p:cNvPr>
@@ -10689,7 +10689,7 @@
           <p:cNvPr id="5" name="">
             <a:extLst xmlns:a="http://schemas.openxmlformats.org/drawingml/2006/main">
               <a:ext uri="{FF2B5EF4-FFF2-40B4-BE49-F238E27FC236}">
-                <a16:creationId xmlns:a16="http://schemas.microsoft.com/office/drawing/2014/main" id="{B41B6CCC-AE12-4298-9035-5BB78A513F73}"/>
+                <a16:creationId xmlns:a16="http://schemas.microsoft.com/office/drawing/2014/main" id="{40659D09-8D5B-4804-A4FD-48E0488E81D5}"/>
               </a:ext>
             </a:extLst>
           </p:cNvPr>
@@ -10722,7 +10722,7 @@
           <p:cNvPr id="6" name="">
             <a:extLst xmlns:a="http://schemas.openxmlformats.org/drawingml/2006/main">
               <a:ext uri="{FF2B5EF4-FFF2-40B4-BE49-F238E27FC236}">
-                <a16:creationId xmlns:a16="http://schemas.microsoft.com/office/drawing/2014/main" id="{B6D82961-0E0C-456C-91DB-BF81E32C1882}"/>
+                <a16:creationId xmlns:a16="http://schemas.microsoft.com/office/drawing/2014/main" id="{8E91DF54-A14B-4D63-9ED8-D1D85ECCA324}"/>
               </a:ext>
             </a:extLst>
           </p:cNvPr>
@@ -10790,7 +10790,7 @@
           <p:cNvPr id="7" name="">
             <a:extLst xmlns:a="http://schemas.openxmlformats.org/drawingml/2006/main">
               <a:ext uri="{FF2B5EF4-FFF2-40B4-BE49-F238E27FC236}">
-                <a16:creationId xmlns:a16="http://schemas.microsoft.com/office/drawing/2014/main" id="{96984D7F-23FB-442E-96A2-674D665FE2D6}"/>
+                <a16:creationId xmlns:a16="http://schemas.microsoft.com/office/drawing/2014/main" id="{7EF859D8-383D-4F83-964A-A017325C3DB4}"/>
               </a:ext>
             </a:extLst>
           </p:cNvPr>
@@ -10856,7 +10856,7 @@
     </p:spTree>
     <p:extLst>
       <p:ext uri="{BB962C8B-B14F-4D97-AF65-F5344CB8AC3E}">
-        <p14:creationId xmlns:p14="http://schemas.microsoft.com/office/powerpoint/2010/main" val="1942901431"/>
+        <p14:creationId xmlns:p14="http://schemas.microsoft.com/office/powerpoint/2010/main" val="2013277602"/>
       </p:ext>
     </p:extLst>
   </p:cSld>
@@ -10887,7 +10887,7 @@
           <p:cNvPr id="15" name="">
             <a:extLst xmlns:a="http://schemas.openxmlformats.org/drawingml/2006/main">
               <a:ext uri="{FF2B5EF4-FFF2-40B4-BE49-F238E27FC236}">
-                <a16:creationId xmlns:a16="http://schemas.microsoft.com/office/drawing/2014/main" id="{CC252EC9-72C4-46AC-B20F-9A93C7095FFF}"/>
+                <a16:creationId xmlns:a16="http://schemas.microsoft.com/office/drawing/2014/main" id="{4AD64EE0-CFB6-4C51-8343-5BD571E4DE00}"/>
               </a:ext>
             </a:extLst>
           </p:cNvPr>
@@ -10955,7 +10955,7 @@
           <p:cNvPr id="2" name="">
             <a:extLst xmlns:a="http://schemas.openxmlformats.org/drawingml/2006/main">
               <a:ext uri="{FF2B5EF4-FFF2-40B4-BE49-F238E27FC236}">
-                <a16:creationId xmlns:a16="http://schemas.microsoft.com/office/drawing/2014/main" id="{5FC91259-EC14-4C69-8D55-AC25B6499E0E}"/>
+                <a16:creationId xmlns:a16="http://schemas.microsoft.com/office/drawing/2014/main" id="{F2978616-CBE0-47BC-8F59-0FCB7A4E665B}"/>
               </a:ext>
             </a:extLst>
           </p:cNvPr>
@@ -10988,7 +10988,7 @@
           <p:cNvPr id="3" name="">
             <a:extLst xmlns:a="http://schemas.openxmlformats.org/drawingml/2006/main">
               <a:ext uri="{FF2B5EF4-FFF2-40B4-BE49-F238E27FC236}">
-                <a16:creationId xmlns:a16="http://schemas.microsoft.com/office/drawing/2014/main" id="{C1880B38-9620-484A-8BF6-AB5B3B71B113}"/>
+                <a16:creationId xmlns:a16="http://schemas.microsoft.com/office/drawing/2014/main" id="{957191A2-C595-43D9-BD8A-8777B72AA31D}"/>
               </a:ext>
             </a:extLst>
           </p:cNvPr>
@@ -11056,7 +11056,7 @@
           <p:cNvPr id="4" name="">
             <a:extLst xmlns:a="http://schemas.openxmlformats.org/drawingml/2006/main">
               <a:ext uri="{FF2B5EF4-FFF2-40B4-BE49-F238E27FC236}">
-                <a16:creationId xmlns:a16="http://schemas.microsoft.com/office/drawing/2014/main" id="{B76495DC-59EC-48F1-B9ED-591EEF2D3584}"/>
+                <a16:creationId xmlns:a16="http://schemas.microsoft.com/office/drawing/2014/main" id="{CDF97CC5-6626-4B1C-A365-D2851DF3C44C}"/>
               </a:ext>
             </a:extLst>
           </p:cNvPr>
@@ -11124,7 +11124,7 @@
           <p:cNvPr id="5" name="">
             <a:extLst xmlns:a="http://schemas.openxmlformats.org/drawingml/2006/main">
               <a:ext uri="{FF2B5EF4-FFF2-40B4-BE49-F238E27FC236}">
-                <a16:creationId xmlns:a16="http://schemas.microsoft.com/office/drawing/2014/main" id="{9C4B8BB9-50E3-4C8E-8D02-2B07A258B598}"/>
+                <a16:creationId xmlns:a16="http://schemas.microsoft.com/office/drawing/2014/main" id="{D0152D8A-1869-42F6-99A7-073B29F9AC28}"/>
               </a:ext>
             </a:extLst>
           </p:cNvPr>
@@ -11159,7 +11159,7 @@
           <p:cNvPr id="6" name="">
             <a:extLst xmlns:a="http://schemas.openxmlformats.org/drawingml/2006/main">
               <a:ext uri="{FF2B5EF4-FFF2-40B4-BE49-F238E27FC236}">
-                <a16:creationId xmlns:a16="http://schemas.microsoft.com/office/drawing/2014/main" id="{5620730F-DBE5-4DFA-AC6E-A6AE63EE5E6B}"/>
+                <a16:creationId xmlns:a16="http://schemas.microsoft.com/office/drawing/2014/main" id="{018475D1-1E4E-43B9-B9F2-C600174B647B}"/>
               </a:ext>
             </a:extLst>
           </p:cNvPr>
@@ -11227,7 +11227,7 @@
           <p:cNvPr id="7" name="">
             <a:extLst xmlns:a="http://schemas.openxmlformats.org/drawingml/2006/main">
               <a:ext uri="{FF2B5EF4-FFF2-40B4-BE49-F238E27FC236}">
-                <a16:creationId xmlns:a16="http://schemas.microsoft.com/office/drawing/2014/main" id="{381088B6-8944-46F8-8C94-4486ECA4D3B9}"/>
+                <a16:creationId xmlns:a16="http://schemas.microsoft.com/office/drawing/2014/main" id="{9B2AFCD7-CAB2-4F9E-A665-3ECC8303ED98}"/>
               </a:ext>
             </a:extLst>
           </p:cNvPr>
@@ -11262,7 +11262,7 @@
           <p:cNvPr id="8" name="">
             <a:extLst xmlns:a="http://schemas.openxmlformats.org/drawingml/2006/main">
               <a:ext uri="{FF2B5EF4-FFF2-40B4-BE49-F238E27FC236}">
-                <a16:creationId xmlns:a16="http://schemas.microsoft.com/office/drawing/2014/main" id="{D3EFE768-F9E0-4687-BF7E-C44318E8EA3F}"/>
+                <a16:creationId xmlns:a16="http://schemas.microsoft.com/office/drawing/2014/main" id="{E4DE0D52-A37C-49FA-9853-EBEED1C7BFEC}"/>
               </a:ext>
             </a:extLst>
           </p:cNvPr>
@@ -11330,7 +11330,7 @@
           <p:cNvPr id="9" name="">
             <a:extLst xmlns:a="http://schemas.openxmlformats.org/drawingml/2006/main">
               <a:ext uri="{FF2B5EF4-FFF2-40B4-BE49-F238E27FC236}">
-                <a16:creationId xmlns:a16="http://schemas.microsoft.com/office/drawing/2014/main" id="{F204BEFD-D8B0-4B94-BD9D-288CDCE92608}"/>
+                <a16:creationId xmlns:a16="http://schemas.microsoft.com/office/drawing/2014/main" id="{50EBD763-ABA2-4EB3-9131-8CC3EB531F25}"/>
               </a:ext>
             </a:extLst>
           </p:cNvPr>
@@ -11365,7 +11365,7 @@
           <p:cNvPr id="10" name="">
             <a:extLst xmlns:a="http://schemas.openxmlformats.org/drawingml/2006/main">
               <a:ext uri="{FF2B5EF4-FFF2-40B4-BE49-F238E27FC236}">
-                <a16:creationId xmlns:a16="http://schemas.microsoft.com/office/drawing/2014/main" id="{DE3B14BB-2CC3-42C9-A1CA-026BF3B9A1E0}"/>
+                <a16:creationId xmlns:a16="http://schemas.microsoft.com/office/drawing/2014/main" id="{FC8BF506-CEEE-4AF0-B942-DA99D6B0B87E}"/>
               </a:ext>
             </a:extLst>
           </p:cNvPr>
@@ -11433,7 +11433,7 @@
           <p:cNvPr id="11" name="">
             <a:extLst xmlns:a="http://schemas.openxmlformats.org/drawingml/2006/main">
               <a:ext uri="{FF2B5EF4-FFF2-40B4-BE49-F238E27FC236}">
-                <a16:creationId xmlns:a16="http://schemas.microsoft.com/office/drawing/2014/main" id="{E63DF977-B156-446C-B024-262036206698}"/>
+                <a16:creationId xmlns:a16="http://schemas.microsoft.com/office/drawing/2014/main" id="{10EA7235-F0F4-4FF5-8602-524E5853EB6E}"/>
               </a:ext>
             </a:extLst>
           </p:cNvPr>
@@ -11468,7 +11468,7 @@
           <p:cNvPr id="12" name="">
             <a:extLst xmlns:a="http://schemas.openxmlformats.org/drawingml/2006/main">
               <a:ext uri="{FF2B5EF4-FFF2-40B4-BE49-F238E27FC236}">
-                <a16:creationId xmlns:a16="http://schemas.microsoft.com/office/drawing/2014/main" id="{3F15405E-AF43-4B5E-B3B5-6820A6DAACF8}"/>
+                <a16:creationId xmlns:a16="http://schemas.microsoft.com/office/drawing/2014/main" id="{B92627CC-4410-4115-9B39-399DD7C7B7E8}"/>
               </a:ext>
             </a:extLst>
           </p:cNvPr>
@@ -11536,7 +11536,7 @@
           <p:cNvPr id="13" name="">
             <a:extLst xmlns:a="http://schemas.openxmlformats.org/drawingml/2006/main">
               <a:ext uri="{FF2B5EF4-FFF2-40B4-BE49-F238E27FC236}">
-                <a16:creationId xmlns:a16="http://schemas.microsoft.com/office/drawing/2014/main" id="{73328821-B7AA-4EC5-98FB-9C8ECF880AB0}"/>
+                <a16:creationId xmlns:a16="http://schemas.microsoft.com/office/drawing/2014/main" id="{5AD4D5F3-3488-4F04-B5EA-8B4FDD516CE3}"/>
               </a:ext>
             </a:extLst>
           </p:cNvPr>
@@ -11604,7 +11604,7 @@
           <p:cNvPr id="14" name="">
             <a:extLst xmlns:a="http://schemas.openxmlformats.org/drawingml/2006/main">
               <a:ext uri="{FF2B5EF4-FFF2-40B4-BE49-F238E27FC236}">
-                <a16:creationId xmlns:a16="http://schemas.microsoft.com/office/drawing/2014/main" id="{ED5394EB-5959-4924-BFB8-EA5E3B50EB85}"/>
+                <a16:creationId xmlns:a16="http://schemas.microsoft.com/office/drawing/2014/main" id="{CF2021A1-D76B-48B8-B71A-BEF079DC7F97}"/>
               </a:ext>
             </a:extLst>
           </p:cNvPr>
@@ -11670,7 +11670,7 @@
     </p:spTree>
     <p:extLst>
       <p:ext uri="{BB962C8B-B14F-4D97-AF65-F5344CB8AC3E}">
-        <p14:creationId xmlns:p14="http://schemas.microsoft.com/office/powerpoint/2010/main" val="1335205120"/>
+        <p14:creationId xmlns:p14="http://schemas.microsoft.com/office/powerpoint/2010/main" val="1945855332"/>
       </p:ext>
     </p:extLst>
   </p:cSld>
@@ -11701,7 +11701,7 @@
           <p:cNvPr id="34" name="">
             <a:extLst xmlns:a="http://schemas.openxmlformats.org/drawingml/2006/main">
               <a:ext uri="{FF2B5EF4-FFF2-40B4-BE49-F238E27FC236}">
-                <a16:creationId xmlns:a16="http://schemas.microsoft.com/office/drawing/2014/main" id="{8EE2CE52-2233-4FFF-917E-3DC9F3F47AD2}"/>
+                <a16:creationId xmlns:a16="http://schemas.microsoft.com/office/drawing/2014/main" id="{82DBAE4B-85B2-42AB-9C9A-DAAEFBE74A82}"/>
               </a:ext>
             </a:extLst>
           </p:cNvPr>
@@ -11769,7 +11769,7 @@
           <p:cNvPr id="2" name="">
             <a:extLst xmlns:a="http://schemas.openxmlformats.org/drawingml/2006/main">
               <a:ext uri="{FF2B5EF4-FFF2-40B4-BE49-F238E27FC236}">
-                <a16:creationId xmlns:a16="http://schemas.microsoft.com/office/drawing/2014/main" id="{0C10FBD0-A5B5-4A64-94F6-DE208C9EC2BC}"/>
+                <a16:creationId xmlns:a16="http://schemas.microsoft.com/office/drawing/2014/main" id="{7E53E44D-E8DF-4D91-85EF-DD3995B4D4ED}"/>
               </a:ext>
             </a:extLst>
           </p:cNvPr>
@@ -11802,7 +11802,7 @@
           <p:cNvPr id="3" name="">
             <a:extLst xmlns:a="http://schemas.openxmlformats.org/drawingml/2006/main">
               <a:ext uri="{FF2B5EF4-FFF2-40B4-BE49-F238E27FC236}">
-                <a16:creationId xmlns:a16="http://schemas.microsoft.com/office/drawing/2014/main" id="{C92F65C5-8B2B-437E-A123-E766DA75E8BB}"/>
+                <a16:creationId xmlns:a16="http://schemas.microsoft.com/office/drawing/2014/main" id="{C3B19D40-A6A5-4FCC-8146-0EC33DAD1422}"/>
               </a:ext>
             </a:extLst>
           </p:cNvPr>
@@ -11870,7 +11870,7 @@
           <p:cNvPr id="4" name="">
             <a:extLst xmlns:a="http://schemas.openxmlformats.org/drawingml/2006/main">
               <a:ext uri="{FF2B5EF4-FFF2-40B4-BE49-F238E27FC236}">
-                <a16:creationId xmlns:a16="http://schemas.microsoft.com/office/drawing/2014/main" id="{4F6736E1-C0E7-4658-81BF-B6948DCB3CB8}"/>
+                <a16:creationId xmlns:a16="http://schemas.microsoft.com/office/drawing/2014/main" id="{BDFDDEFF-0ABE-4D35-8909-5375085EB651}"/>
               </a:ext>
             </a:extLst>
           </p:cNvPr>
@@ -11905,7 +11905,7 @@
           <p:cNvPr id="5" name="">
             <a:extLst xmlns:a="http://schemas.openxmlformats.org/drawingml/2006/main">
               <a:ext uri="{FF2B5EF4-FFF2-40B4-BE49-F238E27FC236}">
-                <a16:creationId xmlns:a16="http://schemas.microsoft.com/office/drawing/2014/main" id="{9B3D999B-8C56-40EB-9AA0-A58495C51227}"/>
+                <a16:creationId xmlns:a16="http://schemas.microsoft.com/office/drawing/2014/main" id="{63802109-643E-4128-9FDB-16DE43034723}"/>
               </a:ext>
             </a:extLst>
           </p:cNvPr>
@@ -11973,7 +11973,7 @@
           <p:cNvPr id="6" name="">
             <a:extLst xmlns:a="http://schemas.openxmlformats.org/drawingml/2006/main">
               <a:ext uri="{FF2B5EF4-FFF2-40B4-BE49-F238E27FC236}">
-                <a16:creationId xmlns:a16="http://schemas.microsoft.com/office/drawing/2014/main" id="{A1D36017-9E02-44A9-A9AC-6895F83E7B71}"/>
+                <a16:creationId xmlns:a16="http://schemas.microsoft.com/office/drawing/2014/main" id="{3A24B632-7C92-449C-A32B-6CF63840D9E7}"/>
               </a:ext>
             </a:extLst>
           </p:cNvPr>
@@ -12041,7 +12041,7 @@
           <p:cNvPr id="7" name="">
             <a:extLst xmlns:a="http://schemas.openxmlformats.org/drawingml/2006/main">
               <a:ext uri="{FF2B5EF4-FFF2-40B4-BE49-F238E27FC236}">
-                <a16:creationId xmlns:a16="http://schemas.microsoft.com/office/drawing/2014/main" id="{83C02F48-3801-4818-946C-66FAA7B3E479}"/>
+                <a16:creationId xmlns:a16="http://schemas.microsoft.com/office/drawing/2014/main" id="{5E46BC96-0734-4FD9-81A8-BFDFEBAB83D4}"/>
               </a:ext>
             </a:extLst>
           </p:cNvPr>
@@ -12074,7 +12074,7 @@
           <p:cNvPr id="8" name="">
             <a:extLst xmlns:a="http://schemas.openxmlformats.org/drawingml/2006/main">
               <a:ext uri="{FF2B5EF4-FFF2-40B4-BE49-F238E27FC236}">
-                <a16:creationId xmlns:a16="http://schemas.microsoft.com/office/drawing/2014/main" id="{4B365CDF-A5FB-4C56-A010-FEB87AB5660B}"/>
+                <a16:creationId xmlns:a16="http://schemas.microsoft.com/office/drawing/2014/main" id="{207BBDC8-7DA7-4807-ADA2-4F157642BC3D}"/>
               </a:ext>
             </a:extLst>
           </p:cNvPr>
@@ -12106,7 +12106,7 @@
           <p:cNvPr id="9" name="">
             <a:extLst xmlns:a="http://schemas.openxmlformats.org/drawingml/2006/main">
               <a:ext uri="{FF2B5EF4-FFF2-40B4-BE49-F238E27FC236}">
-                <a16:creationId xmlns:a16="http://schemas.microsoft.com/office/drawing/2014/main" id="{E64C92C9-18BF-41E9-AF23-39CF79FB8BC3}"/>
+                <a16:creationId xmlns:a16="http://schemas.microsoft.com/office/drawing/2014/main" id="{F7BA5B9A-7932-4A42-923E-2D63D6AED528}"/>
               </a:ext>
             </a:extLst>
           </p:cNvPr>
@@ -12141,7 +12141,7 @@
           <p:cNvPr id="10" name="">
             <a:extLst xmlns:a="http://schemas.openxmlformats.org/drawingml/2006/main">
               <a:ext uri="{FF2B5EF4-FFF2-40B4-BE49-F238E27FC236}">
-                <a16:creationId xmlns:a16="http://schemas.microsoft.com/office/drawing/2014/main" id="{77C4F3BB-CA53-42B8-8838-A31F5C51C90F}"/>
+                <a16:creationId xmlns:a16="http://schemas.microsoft.com/office/drawing/2014/main" id="{B61489F7-52ED-4D24-9BC7-896030DD23C7}"/>
               </a:ext>
             </a:extLst>
           </p:cNvPr>
@@ -12209,7 +12209,7 @@
           <p:cNvPr id="11" name="">
             <a:extLst xmlns:a="http://schemas.openxmlformats.org/drawingml/2006/main">
               <a:ext uri="{FF2B5EF4-FFF2-40B4-BE49-F238E27FC236}">
-                <a16:creationId xmlns:a16="http://schemas.microsoft.com/office/drawing/2014/main" id="{219A0A82-8815-4017-A851-BFAD699E5548}"/>
+                <a16:creationId xmlns:a16="http://schemas.microsoft.com/office/drawing/2014/main" id="{8D68E0D4-E9E8-46CC-A440-A8E05682857E}"/>
               </a:ext>
             </a:extLst>
           </p:cNvPr>
@@ -12277,7 +12277,7 @@
           <p:cNvPr id="12" name="">
             <a:extLst xmlns:a="http://schemas.openxmlformats.org/drawingml/2006/main">
               <a:ext uri="{FF2B5EF4-FFF2-40B4-BE49-F238E27FC236}">
-                <a16:creationId xmlns:a16="http://schemas.microsoft.com/office/drawing/2014/main" id="{F73B6EF6-9F2D-426D-A0B0-365DC2C46518}"/>
+                <a16:creationId xmlns:a16="http://schemas.microsoft.com/office/drawing/2014/main" id="{A180EF8C-7F8C-4521-B7EC-801BDAB711A7}"/>
               </a:ext>
             </a:extLst>
           </p:cNvPr>
@@ -12310,7 +12310,7 @@
           <p:cNvPr id="13" name="">
             <a:extLst xmlns:a="http://schemas.openxmlformats.org/drawingml/2006/main">
               <a:ext uri="{FF2B5EF4-FFF2-40B4-BE49-F238E27FC236}">
-                <a16:creationId xmlns:a16="http://schemas.microsoft.com/office/drawing/2014/main" id="{FC1655EC-6A66-414F-ACFC-30A57D2FC662}"/>
+                <a16:creationId xmlns:a16="http://schemas.microsoft.com/office/drawing/2014/main" id="{C37E3C8A-FE70-4921-9F11-4CC3EE335C6B}"/>
               </a:ext>
             </a:extLst>
           </p:cNvPr>
@@ -12342,7 +12342,7 @@
           <p:cNvPr id="14" name="">
             <a:extLst xmlns:a="http://schemas.openxmlformats.org/drawingml/2006/main">
               <a:ext uri="{FF2B5EF4-FFF2-40B4-BE49-F238E27FC236}">
-                <a16:creationId xmlns:a16="http://schemas.microsoft.com/office/drawing/2014/main" id="{FDEEA73D-0C9B-4418-AB7A-11276BF426B7}"/>
+                <a16:creationId xmlns:a16="http://schemas.microsoft.com/office/drawing/2014/main" id="{6ADFB5A6-5845-4290-B6B3-FF9FFA93FF38}"/>
               </a:ext>
             </a:extLst>
           </p:cNvPr>
@@ -12377,7 +12377,7 @@
           <p:cNvPr id="15" name="">
             <a:extLst xmlns:a="http://schemas.openxmlformats.org/drawingml/2006/main">
               <a:ext uri="{FF2B5EF4-FFF2-40B4-BE49-F238E27FC236}">
-                <a16:creationId xmlns:a16="http://schemas.microsoft.com/office/drawing/2014/main" id="{BDC9EA7B-4FC9-49A9-B624-804942D9DCBC}"/>
+                <a16:creationId xmlns:a16="http://schemas.microsoft.com/office/drawing/2014/main" id="{79D478A1-2EF9-4DAC-AEDD-EA0EE468CD7F}"/>
               </a:ext>
             </a:extLst>
           </p:cNvPr>
@@ -12445,7 +12445,7 @@
           <p:cNvPr id="16" name="">
             <a:extLst xmlns:a="http://schemas.openxmlformats.org/drawingml/2006/main">
               <a:ext uri="{FF2B5EF4-FFF2-40B4-BE49-F238E27FC236}">
-                <a16:creationId xmlns:a16="http://schemas.microsoft.com/office/drawing/2014/main" id="{8C678EAB-0ABB-4E81-B622-5EFB56C1312F}"/>
+                <a16:creationId xmlns:a16="http://schemas.microsoft.com/office/drawing/2014/main" id="{B60810F0-1A86-4370-B25B-A6C487C8EAB2}"/>
               </a:ext>
             </a:extLst>
           </p:cNvPr>
@@ -12513,7 +12513,7 @@
           <p:cNvPr id="17" name="">
             <a:extLst xmlns:a="http://schemas.openxmlformats.org/drawingml/2006/main">
               <a:ext uri="{FF2B5EF4-FFF2-40B4-BE49-F238E27FC236}">
-                <a16:creationId xmlns:a16="http://schemas.microsoft.com/office/drawing/2014/main" id="{CC9D049F-8C75-4ECB-81B3-F221CD4BFE65}"/>
+                <a16:creationId xmlns:a16="http://schemas.microsoft.com/office/drawing/2014/main" id="{1E1CBF2D-6B58-4238-AF3E-B450806F7979}"/>
               </a:ext>
             </a:extLst>
           </p:cNvPr>
@@ -12546,7 +12546,7 @@
           <p:cNvPr id="18" name="">
             <a:extLst xmlns:a="http://schemas.openxmlformats.org/drawingml/2006/main">
               <a:ext uri="{FF2B5EF4-FFF2-40B4-BE49-F238E27FC236}">
-                <a16:creationId xmlns:a16="http://schemas.microsoft.com/office/drawing/2014/main" id="{945E3C3F-7D79-4A8A-AAD1-8B99D43A53A3}"/>
+                <a16:creationId xmlns:a16="http://schemas.microsoft.com/office/drawing/2014/main" id="{51E09D8E-146C-463F-8F46-1B6C2264B4E1}"/>
               </a:ext>
             </a:extLst>
           </p:cNvPr>
@@ -12578,7 +12578,7 @@
           <p:cNvPr id="19" name="">
             <a:extLst xmlns:a="http://schemas.openxmlformats.org/drawingml/2006/main">
               <a:ext uri="{FF2B5EF4-FFF2-40B4-BE49-F238E27FC236}">
-                <a16:creationId xmlns:a16="http://schemas.microsoft.com/office/drawing/2014/main" id="{5F8DF00C-7A83-4C1C-A767-65F4DA15869F}"/>
+                <a16:creationId xmlns:a16="http://schemas.microsoft.com/office/drawing/2014/main" id="{FDE0A7F4-C38A-4297-A527-80A62B4D6A93}"/>
               </a:ext>
             </a:extLst>
           </p:cNvPr>
@@ -12613,7 +12613,7 @@
           <p:cNvPr id="20" name="">
             <a:extLst xmlns:a="http://schemas.openxmlformats.org/drawingml/2006/main">
               <a:ext uri="{FF2B5EF4-FFF2-40B4-BE49-F238E27FC236}">
-                <a16:creationId xmlns:a16="http://schemas.microsoft.com/office/drawing/2014/main" id="{2E24E0E9-1AA9-4563-A65A-D0C31AF5D8CE}"/>
+                <a16:creationId xmlns:a16="http://schemas.microsoft.com/office/drawing/2014/main" id="{2D7E128D-7117-43CD-9431-A9F4A763A9B8}"/>
               </a:ext>
             </a:extLst>
           </p:cNvPr>
@@ -12681,7 +12681,7 @@
           <p:cNvPr id="21" name="">
             <a:extLst xmlns:a="http://schemas.openxmlformats.org/drawingml/2006/main">
               <a:ext uri="{FF2B5EF4-FFF2-40B4-BE49-F238E27FC236}">
-                <a16:creationId xmlns:a16="http://schemas.microsoft.com/office/drawing/2014/main" id="{8118856E-DC4C-4FC0-BA9F-1DA117ABA646}"/>
+                <a16:creationId xmlns:a16="http://schemas.microsoft.com/office/drawing/2014/main" id="{21E5F7D4-A76E-4112-906D-256CFB291E06}"/>
               </a:ext>
             </a:extLst>
           </p:cNvPr>
@@ -12749,7 +12749,7 @@
           <p:cNvPr id="22" name="">
             <a:extLst xmlns:a="http://schemas.openxmlformats.org/drawingml/2006/main">
               <a:ext uri="{FF2B5EF4-FFF2-40B4-BE49-F238E27FC236}">
-                <a16:creationId xmlns:a16="http://schemas.microsoft.com/office/drawing/2014/main" id="{4DD96798-7DE6-43AB-84D5-8716DDC48C6B}"/>
+                <a16:creationId xmlns:a16="http://schemas.microsoft.com/office/drawing/2014/main" id="{6145FE4C-1E17-4E29-9F73-DE2E123C7DB1}"/>
               </a:ext>
             </a:extLst>
           </p:cNvPr>
@@ -12782,7 +12782,7 @@
           <p:cNvPr id="23" name="">
             <a:extLst xmlns:a="http://schemas.openxmlformats.org/drawingml/2006/main">
               <a:ext uri="{FF2B5EF4-FFF2-40B4-BE49-F238E27FC236}">
-                <a16:creationId xmlns:a16="http://schemas.microsoft.com/office/drawing/2014/main" id="{0B2932C3-0F7C-47AA-B8A6-88282F580305}"/>
+                <a16:creationId xmlns:a16="http://schemas.microsoft.com/office/drawing/2014/main" id="{93F13803-A23B-41A4-8762-CC8A67532D0D}"/>
               </a:ext>
             </a:extLst>
           </p:cNvPr>
@@ -12814,7 +12814,7 @@
           <p:cNvPr id="24" name="">
             <a:extLst xmlns:a="http://schemas.openxmlformats.org/drawingml/2006/main">
               <a:ext uri="{FF2B5EF4-FFF2-40B4-BE49-F238E27FC236}">
-                <a16:creationId xmlns:a16="http://schemas.microsoft.com/office/drawing/2014/main" id="{0377A9C2-328D-4C9B-8F8F-131DF70005F6}"/>
+                <a16:creationId xmlns:a16="http://schemas.microsoft.com/office/drawing/2014/main" id="{1478D455-BB60-4D56-86FB-6E8AA95124FB}"/>
               </a:ext>
             </a:extLst>
           </p:cNvPr>
@@ -12849,7 +12849,7 @@
           <p:cNvPr id="25" name="">
             <a:extLst xmlns:a="http://schemas.openxmlformats.org/drawingml/2006/main">
               <a:ext uri="{FF2B5EF4-FFF2-40B4-BE49-F238E27FC236}">
-                <a16:creationId xmlns:a16="http://schemas.microsoft.com/office/drawing/2014/main" id="{06B415F5-3F3B-4034-9692-9EB77EFBC2FA}"/>
+                <a16:creationId xmlns:a16="http://schemas.microsoft.com/office/drawing/2014/main" id="{FEC79F36-9DC9-4785-BD11-32347236863B}"/>
               </a:ext>
             </a:extLst>
           </p:cNvPr>
@@ -12917,7 +12917,7 @@
           <p:cNvPr id="26" name="">
             <a:extLst xmlns:a="http://schemas.openxmlformats.org/drawingml/2006/main">
               <a:ext uri="{FF2B5EF4-FFF2-40B4-BE49-F238E27FC236}">
-                <a16:creationId xmlns:a16="http://schemas.microsoft.com/office/drawing/2014/main" id="{39F5BE9B-B8C8-4C6E-B620-2533DE045065}"/>
+                <a16:creationId xmlns:a16="http://schemas.microsoft.com/office/drawing/2014/main" id="{6B4A94D6-9F23-4A26-89DE-7024AF0EBE1E}"/>
               </a:ext>
             </a:extLst>
           </p:cNvPr>
@@ -12985,7 +12985,7 @@
           <p:cNvPr id="27" name="">
             <a:extLst xmlns:a="http://schemas.openxmlformats.org/drawingml/2006/main">
               <a:ext uri="{FF2B5EF4-FFF2-40B4-BE49-F238E27FC236}">
-                <a16:creationId xmlns:a16="http://schemas.microsoft.com/office/drawing/2014/main" id="{9D16DFAA-F671-41A7-99BB-3BC4EFE178B9}"/>
+                <a16:creationId xmlns:a16="http://schemas.microsoft.com/office/drawing/2014/main" id="{CA7EDACF-24FB-4360-ADA8-08B1163EBB66}"/>
               </a:ext>
             </a:extLst>
           </p:cNvPr>
@@ -13018,7 +13018,7 @@
           <p:cNvPr id="28" name="">
             <a:extLst xmlns:a="http://schemas.openxmlformats.org/drawingml/2006/main">
               <a:ext uri="{FF2B5EF4-FFF2-40B4-BE49-F238E27FC236}">
-                <a16:creationId xmlns:a16="http://schemas.microsoft.com/office/drawing/2014/main" id="{E2F55E5A-CB5E-4F92-8CF8-25DD15D67930}"/>
+                <a16:creationId xmlns:a16="http://schemas.microsoft.com/office/drawing/2014/main" id="{6B2D55E2-056A-4459-981A-F4AD3672E29C}"/>
               </a:ext>
             </a:extLst>
           </p:cNvPr>
@@ -13050,7 +13050,7 @@
           <p:cNvPr id="29" name="">
             <a:extLst xmlns:a="http://schemas.openxmlformats.org/drawingml/2006/main">
               <a:ext uri="{FF2B5EF4-FFF2-40B4-BE49-F238E27FC236}">
-                <a16:creationId xmlns:a16="http://schemas.microsoft.com/office/drawing/2014/main" id="{83229A1E-F23F-42FE-B923-0B3E6E0E3DC3}"/>
+                <a16:creationId xmlns:a16="http://schemas.microsoft.com/office/drawing/2014/main" id="{7BEB2128-552D-4631-BE6B-661670C7B6E1}"/>
               </a:ext>
             </a:extLst>
           </p:cNvPr>
@@ -13085,7 +13085,7 @@
           <p:cNvPr id="30" name="">
             <a:extLst xmlns:a="http://schemas.openxmlformats.org/drawingml/2006/main">
               <a:ext uri="{FF2B5EF4-FFF2-40B4-BE49-F238E27FC236}">
-                <a16:creationId xmlns:a16="http://schemas.microsoft.com/office/drawing/2014/main" id="{4B8AFD77-9CA2-4844-B93F-8F1DAE26B439}"/>
+                <a16:creationId xmlns:a16="http://schemas.microsoft.com/office/drawing/2014/main" id="{5B89489A-E8AA-400B-9D26-6ABCE540671A}"/>
               </a:ext>
             </a:extLst>
           </p:cNvPr>
@@ -13153,7 +13153,7 @@
           <p:cNvPr id="31" name="">
             <a:extLst xmlns:a="http://schemas.openxmlformats.org/drawingml/2006/main">
               <a:ext uri="{FF2B5EF4-FFF2-40B4-BE49-F238E27FC236}">
-                <a16:creationId xmlns:a16="http://schemas.microsoft.com/office/drawing/2014/main" id="{EF051A8D-E3BE-4991-A794-2EFE8CB0FF45}"/>
+                <a16:creationId xmlns:a16="http://schemas.microsoft.com/office/drawing/2014/main" id="{808F32B5-17FC-4748-8122-D61C37018416}"/>
               </a:ext>
             </a:extLst>
           </p:cNvPr>
@@ -13221,7 +13221,7 @@
           <p:cNvPr id="32" name="">
             <a:extLst xmlns:a="http://schemas.openxmlformats.org/drawingml/2006/main">
               <a:ext uri="{FF2B5EF4-FFF2-40B4-BE49-F238E27FC236}">
-                <a16:creationId xmlns:a16="http://schemas.microsoft.com/office/drawing/2014/main" id="{E24ED5AC-649A-44D7-A49D-C10F42BF61C6}"/>
+                <a16:creationId xmlns:a16="http://schemas.microsoft.com/office/drawing/2014/main" id="{B8868AE8-CD0F-49C2-91E6-3026215BFFD4}"/>
               </a:ext>
             </a:extLst>
           </p:cNvPr>
@@ -13289,7 +13289,7 @@
           <p:cNvPr id="33" name="">
             <a:extLst xmlns:a="http://schemas.openxmlformats.org/drawingml/2006/main">
               <a:ext uri="{FF2B5EF4-FFF2-40B4-BE49-F238E27FC236}">
-                <a16:creationId xmlns:a16="http://schemas.microsoft.com/office/drawing/2014/main" id="{798EBF8C-9825-41AB-90C2-D3921301EBA5}"/>
+                <a16:creationId xmlns:a16="http://schemas.microsoft.com/office/drawing/2014/main" id="{5F56DDC2-A19B-46E2-851A-CC25516C81CC}"/>
               </a:ext>
             </a:extLst>
           </p:cNvPr>
@@ -13355,7 +13355,7 @@
     </p:spTree>
     <p:extLst>
       <p:ext uri="{BB962C8B-B14F-4D97-AF65-F5344CB8AC3E}">
-        <p14:creationId xmlns:p14="http://schemas.microsoft.com/office/powerpoint/2010/main" val="21772793"/>
+        <p14:creationId xmlns:p14="http://schemas.microsoft.com/office/powerpoint/2010/main" val="2144312837"/>
       </p:ext>
     </p:extLst>
   </p:cSld>
@@ -13386,7 +13386,7 @@
           <p:cNvPr id="60" name="">
             <a:extLst xmlns:a="http://schemas.openxmlformats.org/drawingml/2006/main">
               <a:ext uri="{FF2B5EF4-FFF2-40B4-BE49-F238E27FC236}">
-                <a16:creationId xmlns:a16="http://schemas.microsoft.com/office/drawing/2014/main" id="{32E5984E-24A2-4FEE-B8E8-5381C29413EB}"/>
+                <a16:creationId xmlns:a16="http://schemas.microsoft.com/office/drawing/2014/main" id="{B7940698-1B91-4A1A-A79B-551AA37C6F2C}"/>
               </a:ext>
             </a:extLst>
           </p:cNvPr>
@@ -13454,7 +13454,7 @@
           <p:cNvPr id="2" name="">
             <a:extLst xmlns:a="http://schemas.openxmlformats.org/drawingml/2006/main">
               <a:ext uri="{FF2B5EF4-FFF2-40B4-BE49-F238E27FC236}">
-                <a16:creationId xmlns:a16="http://schemas.microsoft.com/office/drawing/2014/main" id="{B06C7200-7C30-4D83-B165-96E62E07604F}"/>
+                <a16:creationId xmlns:a16="http://schemas.microsoft.com/office/drawing/2014/main" id="{9902D962-2305-48DB-8549-931CD00FD849}"/>
               </a:ext>
             </a:extLst>
           </p:cNvPr>
@@ -13487,7 +13487,7 @@
           <p:cNvPr id="3" name="">
             <a:extLst xmlns:a="http://schemas.openxmlformats.org/drawingml/2006/main">
               <a:ext uri="{FF2B5EF4-FFF2-40B4-BE49-F238E27FC236}">
-                <a16:creationId xmlns:a16="http://schemas.microsoft.com/office/drawing/2014/main" id="{0D788B5A-4AC2-4509-99EA-39AF11ACBB7F}"/>
+                <a16:creationId xmlns:a16="http://schemas.microsoft.com/office/drawing/2014/main" id="{4C182187-DCE2-42FD-B9CA-807EF7EB1CE4}"/>
               </a:ext>
             </a:extLst>
           </p:cNvPr>
@@ -13555,7 +13555,7 @@
           <p:cNvPr id="4" name="">
             <a:extLst xmlns:a="http://schemas.openxmlformats.org/drawingml/2006/main">
               <a:ext uri="{FF2B5EF4-FFF2-40B4-BE49-F238E27FC236}">
-                <a16:creationId xmlns:a16="http://schemas.microsoft.com/office/drawing/2014/main" id="{A2C894B0-5961-4BDA-ACD9-555DDE5A4C38}"/>
+                <a16:creationId xmlns:a16="http://schemas.microsoft.com/office/drawing/2014/main" id="{7DC017B6-67EB-40D2-919D-EC518AFA0F94}"/>
               </a:ext>
             </a:extLst>
           </p:cNvPr>
@@ -13623,7 +13623,7 @@
           <p:cNvPr id="5" name="">
             <a:extLst xmlns:a="http://schemas.openxmlformats.org/drawingml/2006/main">
               <a:ext uri="{FF2B5EF4-FFF2-40B4-BE49-F238E27FC236}">
-                <a16:creationId xmlns:a16="http://schemas.microsoft.com/office/drawing/2014/main" id="{F68A94AF-F8E6-4025-94C6-923726268189}"/>
+                <a16:creationId xmlns:a16="http://schemas.microsoft.com/office/drawing/2014/main" id="{50E55CB5-417F-4F63-AFB8-864B18E0C696}"/>
               </a:ext>
             </a:extLst>
           </p:cNvPr>
@@ -13653,7 +13653,7 @@
           <p:cNvPr id="6" name="">
             <a:extLst xmlns:a="http://schemas.openxmlformats.org/drawingml/2006/main">
               <a:ext uri="{FF2B5EF4-FFF2-40B4-BE49-F238E27FC236}">
-                <a16:creationId xmlns:a16="http://schemas.microsoft.com/office/drawing/2014/main" id="{6EDAC711-2D16-401F-A2D3-F8A9A9DDD54D}"/>
+                <a16:creationId xmlns:a16="http://schemas.microsoft.com/office/drawing/2014/main" id="{309103DF-8DE1-4034-B413-46BEF1FDECE5}"/>
               </a:ext>
             </a:extLst>
           </p:cNvPr>
@@ -13683,7 +13683,7 @@
           <p:cNvPr id="7" name="">
             <a:extLst xmlns:a="http://schemas.openxmlformats.org/drawingml/2006/main">
               <a:ext uri="{FF2B5EF4-FFF2-40B4-BE49-F238E27FC236}">
-                <a16:creationId xmlns:a16="http://schemas.microsoft.com/office/drawing/2014/main" id="{75370462-7B64-4C15-8AF7-E178C48CF876}"/>
+                <a16:creationId xmlns:a16="http://schemas.microsoft.com/office/drawing/2014/main" id="{CE8DD40A-0747-4A6C-BFF2-0F6112E4E445}"/>
               </a:ext>
             </a:extLst>
           </p:cNvPr>
@@ -13713,7 +13713,7 @@
           <p:cNvPr id="8" name="">
             <a:extLst xmlns:a="http://schemas.openxmlformats.org/drawingml/2006/main">
               <a:ext uri="{FF2B5EF4-FFF2-40B4-BE49-F238E27FC236}">
-                <a16:creationId xmlns:a16="http://schemas.microsoft.com/office/drawing/2014/main" id="{E51E9648-F6F2-40C6-AFBB-94F9B9563ED4}"/>
+                <a16:creationId xmlns:a16="http://schemas.microsoft.com/office/drawing/2014/main" id="{95B6CB41-8ACE-4DB2-890A-BA52B83CB8BD}"/>
               </a:ext>
             </a:extLst>
           </p:cNvPr>
@@ -13743,7 +13743,7 @@
           <p:cNvPr id="9" name="">
             <a:extLst xmlns:a="http://schemas.openxmlformats.org/drawingml/2006/main">
               <a:ext uri="{FF2B5EF4-FFF2-40B4-BE49-F238E27FC236}">
-                <a16:creationId xmlns:a16="http://schemas.microsoft.com/office/drawing/2014/main" id="{907A15B2-663A-4B4F-B6DD-A26909DD1118}"/>
+                <a16:creationId xmlns:a16="http://schemas.microsoft.com/office/drawing/2014/main" id="{BBA59FD7-515F-48D6-BFB7-1D438DE87830}"/>
               </a:ext>
             </a:extLst>
           </p:cNvPr>
@@ -13773,7 +13773,7 @@
           <p:cNvPr id="10" name="">
             <a:extLst xmlns:a="http://schemas.openxmlformats.org/drawingml/2006/main">
               <a:ext uri="{FF2B5EF4-FFF2-40B4-BE49-F238E27FC236}">
-                <a16:creationId xmlns:a16="http://schemas.microsoft.com/office/drawing/2014/main" id="{83ED2E90-F932-412E-B498-56C14B547A2E}"/>
+                <a16:creationId xmlns:a16="http://schemas.microsoft.com/office/drawing/2014/main" id="{485CE1E0-0926-4C7F-96D9-1484DE7E1E57}"/>
               </a:ext>
             </a:extLst>
           </p:cNvPr>
@@ -13803,7 +13803,7 @@
           <p:cNvPr id="11" name="">
             <a:extLst xmlns:a="http://schemas.openxmlformats.org/drawingml/2006/main">
               <a:ext uri="{FF2B5EF4-FFF2-40B4-BE49-F238E27FC236}">
-                <a16:creationId xmlns:a16="http://schemas.microsoft.com/office/drawing/2014/main" id="{8340BE55-890E-437D-97EF-42825E79CE8C}"/>
+                <a16:creationId xmlns:a16="http://schemas.microsoft.com/office/drawing/2014/main" id="{6DF91B20-5DF7-4CFE-B40D-0F3B485D193E}"/>
               </a:ext>
             </a:extLst>
           </p:cNvPr>
@@ -13833,7 +13833,7 @@
           <p:cNvPr id="12" name="">
             <a:extLst xmlns:a="http://schemas.openxmlformats.org/drawingml/2006/main">
               <a:ext uri="{FF2B5EF4-FFF2-40B4-BE49-F238E27FC236}">
-                <a16:creationId xmlns:a16="http://schemas.microsoft.com/office/drawing/2014/main" id="{DF57DC9D-A2F1-4B39-9C7F-15D4AFA9EC60}"/>
+                <a16:creationId xmlns:a16="http://schemas.microsoft.com/office/drawing/2014/main" id="{A447C8DD-856C-4611-A047-84836853799E}"/>
               </a:ext>
             </a:extLst>
           </p:cNvPr>
@@ -13863,7 +13863,7 @@
           <p:cNvPr id="13" name="">
             <a:extLst xmlns:a="http://schemas.openxmlformats.org/drawingml/2006/main">
               <a:ext uri="{FF2B5EF4-FFF2-40B4-BE49-F238E27FC236}">
-                <a16:creationId xmlns:a16="http://schemas.microsoft.com/office/drawing/2014/main" id="{09BBC44E-0180-4844-88DE-578EE3727E0B}"/>
+                <a16:creationId xmlns:a16="http://schemas.microsoft.com/office/drawing/2014/main" id="{30BAA7D5-C2D6-460F-9DE3-EFF324C0A54D}"/>
               </a:ext>
             </a:extLst>
           </p:cNvPr>
@@ -13893,7 +13893,7 @@
           <p:cNvPr id="14" name="">
             <a:extLst xmlns:a="http://schemas.openxmlformats.org/drawingml/2006/main">
               <a:ext uri="{FF2B5EF4-FFF2-40B4-BE49-F238E27FC236}">
-                <a16:creationId xmlns:a16="http://schemas.microsoft.com/office/drawing/2014/main" id="{20CAB759-2408-4D98-9779-3FE5AD57DF6F}"/>
+                <a16:creationId xmlns:a16="http://schemas.microsoft.com/office/drawing/2014/main" id="{69466B0D-D904-4F6A-8A2A-332BA6C5CAB7}"/>
               </a:ext>
             </a:extLst>
           </p:cNvPr>
@@ -13923,7 +13923,7 @@
           <p:cNvPr id="15" name="">
             <a:extLst xmlns:a="http://schemas.openxmlformats.org/drawingml/2006/main">
               <a:ext uri="{FF2B5EF4-FFF2-40B4-BE49-F238E27FC236}">
-                <a16:creationId xmlns:a16="http://schemas.microsoft.com/office/drawing/2014/main" id="{FC2F9D63-345A-465E-999D-D42E9C59815E}"/>
+                <a16:creationId xmlns:a16="http://schemas.microsoft.com/office/drawing/2014/main" id="{DA31E549-03B5-48A3-9998-DE4F53A62397}"/>
               </a:ext>
             </a:extLst>
           </p:cNvPr>
@@ -13953,7 +13953,7 @@
           <p:cNvPr id="16" name="">
             <a:extLst xmlns:a="http://schemas.openxmlformats.org/drawingml/2006/main">
               <a:ext uri="{FF2B5EF4-FFF2-40B4-BE49-F238E27FC236}">
-                <a16:creationId xmlns:a16="http://schemas.microsoft.com/office/drawing/2014/main" id="{C9FB0BAD-86C0-4EDC-A229-213F99F3E5F7}"/>
+                <a16:creationId xmlns:a16="http://schemas.microsoft.com/office/drawing/2014/main" id="{07C2DE66-A2B4-43F3-9A4B-31E52D10FE3B}"/>
               </a:ext>
             </a:extLst>
           </p:cNvPr>
@@ -13983,7 +13983,7 @@
           <p:cNvPr id="17" name="">
             <a:extLst xmlns:a="http://schemas.openxmlformats.org/drawingml/2006/main">
               <a:ext uri="{FF2B5EF4-FFF2-40B4-BE49-F238E27FC236}">
-                <a16:creationId xmlns:a16="http://schemas.microsoft.com/office/drawing/2014/main" id="{E112A2B0-CE65-4AFC-A0F5-9DD0424CB82E}"/>
+                <a16:creationId xmlns:a16="http://schemas.microsoft.com/office/drawing/2014/main" id="{27B3B3AA-51F7-49CF-A031-E97E274F06FB}"/>
               </a:ext>
             </a:extLst>
           </p:cNvPr>
@@ -14013,7 +14013,7 @@
           <p:cNvPr id="18" name="">
             <a:extLst xmlns:a="http://schemas.openxmlformats.org/drawingml/2006/main">
               <a:ext uri="{FF2B5EF4-FFF2-40B4-BE49-F238E27FC236}">
-                <a16:creationId xmlns:a16="http://schemas.microsoft.com/office/drawing/2014/main" id="{B57AEA40-73E3-4D32-B4FB-FE2A71BB61D4}"/>
+                <a16:creationId xmlns:a16="http://schemas.microsoft.com/office/drawing/2014/main" id="{DD5B7F99-D355-4CC2-8F5D-477B2A700835}"/>
               </a:ext>
             </a:extLst>
           </p:cNvPr>
@@ -14043,7 +14043,7 @@
           <p:cNvPr id="19" name="">
             <a:extLst xmlns:a="http://schemas.openxmlformats.org/drawingml/2006/main">
               <a:ext uri="{FF2B5EF4-FFF2-40B4-BE49-F238E27FC236}">
-                <a16:creationId xmlns:a16="http://schemas.microsoft.com/office/drawing/2014/main" id="{1B47C7AE-8F5A-4AF0-97F9-3C76689FF47A}"/>
+                <a16:creationId xmlns:a16="http://schemas.microsoft.com/office/drawing/2014/main" id="{C7A9194F-5363-45D0-951D-3EBA526FB074}"/>
               </a:ext>
             </a:extLst>
           </p:cNvPr>
@@ -14073,7 +14073,7 @@
           <p:cNvPr id="20" name="">
             <a:extLst xmlns:a="http://schemas.openxmlformats.org/drawingml/2006/main">
               <a:ext uri="{FF2B5EF4-FFF2-40B4-BE49-F238E27FC236}">
-                <a16:creationId xmlns:a16="http://schemas.microsoft.com/office/drawing/2014/main" id="{46DFF46B-744A-4140-B756-1FDD781E699F}"/>
+                <a16:creationId xmlns:a16="http://schemas.microsoft.com/office/drawing/2014/main" id="{1B45A264-28BF-4653-9397-D0F63C7D2F85}"/>
               </a:ext>
             </a:extLst>
           </p:cNvPr>
@@ -14103,7 +14103,7 @@
           <p:cNvPr id="21" name="">
             <a:extLst xmlns:a="http://schemas.openxmlformats.org/drawingml/2006/main">
               <a:ext uri="{FF2B5EF4-FFF2-40B4-BE49-F238E27FC236}">
-                <a16:creationId xmlns:a16="http://schemas.microsoft.com/office/drawing/2014/main" id="{1413043D-B8B0-4ECB-9494-0970CEE30E14}"/>
+                <a16:creationId xmlns:a16="http://schemas.microsoft.com/office/drawing/2014/main" id="{1C56E022-079D-4D31-B0C2-655883338F75}"/>
               </a:ext>
             </a:extLst>
           </p:cNvPr>
@@ -14133,7 +14133,7 @@
           <p:cNvPr id="22" name="">
             <a:extLst xmlns:a="http://schemas.openxmlformats.org/drawingml/2006/main">
               <a:ext uri="{FF2B5EF4-FFF2-40B4-BE49-F238E27FC236}">
-                <a16:creationId xmlns:a16="http://schemas.microsoft.com/office/drawing/2014/main" id="{BE92EF01-FDBD-45C8-B865-6C3C6EE4FA41}"/>
+                <a16:creationId xmlns:a16="http://schemas.microsoft.com/office/drawing/2014/main" id="{B63DA488-E4A0-4F46-86DB-51997752CA9B}"/>
               </a:ext>
             </a:extLst>
           </p:cNvPr>
@@ -14163,7 +14163,7 @@
           <p:cNvPr id="23" name="">
             <a:extLst xmlns:a="http://schemas.openxmlformats.org/drawingml/2006/main">
               <a:ext uri="{FF2B5EF4-FFF2-40B4-BE49-F238E27FC236}">
-                <a16:creationId xmlns:a16="http://schemas.microsoft.com/office/drawing/2014/main" id="{8F6693B2-FB64-4838-9E01-FF7A72B9D95A}"/>
+                <a16:creationId xmlns:a16="http://schemas.microsoft.com/office/drawing/2014/main" id="{A9E6AE15-4811-426A-A28C-B08FF39987B7}"/>
               </a:ext>
             </a:extLst>
           </p:cNvPr>
@@ -14193,7 +14193,7 @@
           <p:cNvPr id="24" name="">
             <a:extLst xmlns:a="http://schemas.openxmlformats.org/drawingml/2006/main">
               <a:ext uri="{FF2B5EF4-FFF2-40B4-BE49-F238E27FC236}">
-                <a16:creationId xmlns:a16="http://schemas.microsoft.com/office/drawing/2014/main" id="{BE797879-50A8-49CB-B912-8D5174A33A24}"/>
+                <a16:creationId xmlns:a16="http://schemas.microsoft.com/office/drawing/2014/main" id="{C53A3866-E1B4-4AE8-8A54-F8BA9E27D13C}"/>
               </a:ext>
             </a:extLst>
           </p:cNvPr>
@@ -14223,7 +14223,7 @@
           <p:cNvPr id="25" name="">
             <a:extLst xmlns:a="http://schemas.openxmlformats.org/drawingml/2006/main">
               <a:ext uri="{FF2B5EF4-FFF2-40B4-BE49-F238E27FC236}">
-                <a16:creationId xmlns:a16="http://schemas.microsoft.com/office/drawing/2014/main" id="{E0D38E61-7AA2-4AAC-AC6B-587C96F36F21}"/>
+                <a16:creationId xmlns:a16="http://schemas.microsoft.com/office/drawing/2014/main" id="{95DD3A4A-A9CA-435D-868C-6A1314F57AFB}"/>
               </a:ext>
             </a:extLst>
           </p:cNvPr>
@@ -14253,7 +14253,7 @@
           <p:cNvPr id="26" name="">
             <a:extLst xmlns:a="http://schemas.openxmlformats.org/drawingml/2006/main">
               <a:ext uri="{FF2B5EF4-FFF2-40B4-BE49-F238E27FC236}">
-                <a16:creationId xmlns:a16="http://schemas.microsoft.com/office/drawing/2014/main" id="{9F15A385-2A76-45FC-9B8D-097F99314D2F}"/>
+                <a16:creationId xmlns:a16="http://schemas.microsoft.com/office/drawing/2014/main" id="{409E11F0-7EB2-42C7-BC13-39D7B281E1EC}"/>
               </a:ext>
             </a:extLst>
           </p:cNvPr>
@@ -14283,7 +14283,7 @@
           <p:cNvPr id="27" name="">
             <a:extLst xmlns:a="http://schemas.openxmlformats.org/drawingml/2006/main">
               <a:ext uri="{FF2B5EF4-FFF2-40B4-BE49-F238E27FC236}">
-                <a16:creationId xmlns:a16="http://schemas.microsoft.com/office/drawing/2014/main" id="{2A440EF1-9FE0-48BB-A27B-E625CDDBC611}"/>
+                <a16:creationId xmlns:a16="http://schemas.microsoft.com/office/drawing/2014/main" id="{DAD783F2-72D2-483A-A8CC-3049DE6E1673}"/>
               </a:ext>
             </a:extLst>
           </p:cNvPr>
@@ -14313,7 +14313,7 @@
           <p:cNvPr id="28" name="">
             <a:extLst xmlns:a="http://schemas.openxmlformats.org/drawingml/2006/main">
               <a:ext uri="{FF2B5EF4-FFF2-40B4-BE49-F238E27FC236}">
-                <a16:creationId xmlns:a16="http://schemas.microsoft.com/office/drawing/2014/main" id="{387988D4-4F58-4B7D-A693-92DEBB303F17}"/>
+                <a16:creationId xmlns:a16="http://schemas.microsoft.com/office/drawing/2014/main" id="{EF14D4D3-D872-4598-9ED2-3A989D6DFC9B}"/>
               </a:ext>
             </a:extLst>
           </p:cNvPr>
@@ -14343,7 +14343,7 @@
           <p:cNvPr id="29" name="">
             <a:extLst xmlns:a="http://schemas.openxmlformats.org/drawingml/2006/main">
               <a:ext uri="{FF2B5EF4-FFF2-40B4-BE49-F238E27FC236}">
-                <a16:creationId xmlns:a16="http://schemas.microsoft.com/office/drawing/2014/main" id="{A281ABCB-158D-44CD-A8D3-3FCBF52BE24E}"/>
+                <a16:creationId xmlns:a16="http://schemas.microsoft.com/office/drawing/2014/main" id="{AB440833-76A0-4C88-86A5-B87B7091BC05}"/>
               </a:ext>
             </a:extLst>
           </p:cNvPr>
@@ -14373,7 +14373,7 @@
           <p:cNvPr id="30" name="">
             <a:extLst xmlns:a="http://schemas.openxmlformats.org/drawingml/2006/main">
               <a:ext uri="{FF2B5EF4-FFF2-40B4-BE49-F238E27FC236}">
-                <a16:creationId xmlns:a16="http://schemas.microsoft.com/office/drawing/2014/main" id="{4D3C4D41-4621-4B18-9196-A2D677436F74}"/>
+                <a16:creationId xmlns:a16="http://schemas.microsoft.com/office/drawing/2014/main" id="{8F99EC2C-D146-476C-8BAF-A38FAE267FB9}"/>
               </a:ext>
             </a:extLst>
           </p:cNvPr>
@@ -14441,7 +14441,7 @@
           <p:cNvPr id="31" name="">
             <a:extLst xmlns:a="http://schemas.openxmlformats.org/drawingml/2006/main">
               <a:ext uri="{FF2B5EF4-FFF2-40B4-BE49-F238E27FC236}">
-                <a16:creationId xmlns:a16="http://schemas.microsoft.com/office/drawing/2014/main" id="{C2D0D09F-8B8A-4C1B-8089-AFB23230ED5D}"/>
+                <a16:creationId xmlns:a16="http://schemas.microsoft.com/office/drawing/2014/main" id="{3601C97F-7EC3-490C-8B7B-9EA9565DF153}"/>
               </a:ext>
             </a:extLst>
           </p:cNvPr>
@@ -14509,7 +14509,7 @@
           <p:cNvPr id="32" name="">
             <a:extLst xmlns:a="http://schemas.openxmlformats.org/drawingml/2006/main">
               <a:ext uri="{FF2B5EF4-FFF2-40B4-BE49-F238E27FC236}">
-                <a16:creationId xmlns:a16="http://schemas.microsoft.com/office/drawing/2014/main" id="{735233BE-3B31-4F52-B761-957D32F9F3EE}"/>
+                <a16:creationId xmlns:a16="http://schemas.microsoft.com/office/drawing/2014/main" id="{2DAC7648-EECA-4CB3-A840-C6BD1213F62D}"/>
               </a:ext>
             </a:extLst>
           </p:cNvPr>
@@ -14539,7 +14539,7 @@
           <p:cNvPr id="33" name="">
             <a:extLst xmlns:a="http://schemas.openxmlformats.org/drawingml/2006/main">
               <a:ext uri="{FF2B5EF4-FFF2-40B4-BE49-F238E27FC236}">
-                <a16:creationId xmlns:a16="http://schemas.microsoft.com/office/drawing/2014/main" id="{9BF89AF7-650E-45CA-A5BE-AF5FCFA4B99F}"/>
+                <a16:creationId xmlns:a16="http://schemas.microsoft.com/office/drawing/2014/main" id="{3CAE0007-82B9-46C2-9BAB-CC9A8060188D}"/>
               </a:ext>
             </a:extLst>
           </p:cNvPr>
@@ -14569,7 +14569,7 @@
           <p:cNvPr id="34" name="">
             <a:extLst xmlns:a="http://schemas.openxmlformats.org/drawingml/2006/main">
               <a:ext uri="{FF2B5EF4-FFF2-40B4-BE49-F238E27FC236}">
-                <a16:creationId xmlns:a16="http://schemas.microsoft.com/office/drawing/2014/main" id="{F8AF67A5-0F50-4D20-A6AE-4E3519696718}"/>
+                <a16:creationId xmlns:a16="http://schemas.microsoft.com/office/drawing/2014/main" id="{8D6E3A30-36BB-4E07-9C82-7A0CAD8A6F7E}"/>
               </a:ext>
             </a:extLst>
           </p:cNvPr>
@@ -14599,7 +14599,7 @@
           <p:cNvPr id="35" name="">
             <a:extLst xmlns:a="http://schemas.openxmlformats.org/drawingml/2006/main">
               <a:ext uri="{FF2B5EF4-FFF2-40B4-BE49-F238E27FC236}">
-                <a16:creationId xmlns:a16="http://schemas.microsoft.com/office/drawing/2014/main" id="{F19333B6-75CC-466E-8A64-D6E9A7E1EC75}"/>
+                <a16:creationId xmlns:a16="http://schemas.microsoft.com/office/drawing/2014/main" id="{6FE8EFD5-0F35-47CC-AA0F-0D725CA35F2D}"/>
               </a:ext>
             </a:extLst>
           </p:cNvPr>
@@ -14629,7 +14629,7 @@
           <p:cNvPr id="36" name="">
             <a:extLst xmlns:a="http://schemas.openxmlformats.org/drawingml/2006/main">
               <a:ext uri="{FF2B5EF4-FFF2-40B4-BE49-F238E27FC236}">
-                <a16:creationId xmlns:a16="http://schemas.microsoft.com/office/drawing/2014/main" id="{AC2FBEBC-5608-446F-87E1-32C5C3A0859B}"/>
+                <a16:creationId xmlns:a16="http://schemas.microsoft.com/office/drawing/2014/main" id="{08D1C9F5-816B-4D59-85E4-3275745D43B3}"/>
               </a:ext>
             </a:extLst>
           </p:cNvPr>
@@ -14659,7 +14659,7 @@
           <p:cNvPr id="37" name="">
             <a:extLst xmlns:a="http://schemas.openxmlformats.org/drawingml/2006/main">
               <a:ext uri="{FF2B5EF4-FFF2-40B4-BE49-F238E27FC236}">
-                <a16:creationId xmlns:a16="http://schemas.microsoft.com/office/drawing/2014/main" id="{45DC8A7C-6C81-49E5-9FC6-5CAD7E28E0F2}"/>
+                <a16:creationId xmlns:a16="http://schemas.microsoft.com/office/drawing/2014/main" id="{FEA9C903-73FE-43D9-B97A-13152F8442EF}"/>
               </a:ext>
             </a:extLst>
           </p:cNvPr>
@@ -14689,7 +14689,7 @@
           <p:cNvPr id="38" name="">
             <a:extLst xmlns:a="http://schemas.openxmlformats.org/drawingml/2006/main">
               <a:ext uri="{FF2B5EF4-FFF2-40B4-BE49-F238E27FC236}">
-                <a16:creationId xmlns:a16="http://schemas.microsoft.com/office/drawing/2014/main" id="{647680C0-6DF6-4EDA-9A94-DD7B8BB62457}"/>
+                <a16:creationId xmlns:a16="http://schemas.microsoft.com/office/drawing/2014/main" id="{36ADE775-73D3-4ED2-AF3E-2CD567B0BF27}"/>
               </a:ext>
             </a:extLst>
           </p:cNvPr>
@@ -14719,7 +14719,7 @@
           <p:cNvPr id="39" name="">
             <a:extLst xmlns:a="http://schemas.openxmlformats.org/drawingml/2006/main">
               <a:ext uri="{FF2B5EF4-FFF2-40B4-BE49-F238E27FC236}">
-                <a16:creationId xmlns:a16="http://schemas.microsoft.com/office/drawing/2014/main" id="{58FE1C2D-731D-48CE-A34C-AABF15D51475}"/>
+                <a16:creationId xmlns:a16="http://schemas.microsoft.com/office/drawing/2014/main" id="{11D2F1A2-B83A-4600-B2FD-4402EDBB029E}"/>
               </a:ext>
             </a:extLst>
           </p:cNvPr>
@@ -14749,7 +14749,7 @@
           <p:cNvPr id="40" name="">
             <a:extLst xmlns:a="http://schemas.openxmlformats.org/drawingml/2006/main">
               <a:ext uri="{FF2B5EF4-FFF2-40B4-BE49-F238E27FC236}">
-                <a16:creationId xmlns:a16="http://schemas.microsoft.com/office/drawing/2014/main" id="{3D30BC54-D1D8-477F-B84E-626CF5125402}"/>
+                <a16:creationId xmlns:a16="http://schemas.microsoft.com/office/drawing/2014/main" id="{F3C9A2BC-5C95-41D3-AEC4-CA420D46AF64}"/>
               </a:ext>
             </a:extLst>
           </p:cNvPr>
@@ -14779,7 +14779,7 @@
           <p:cNvPr id="41" name="">
             <a:extLst xmlns:a="http://schemas.openxmlformats.org/drawingml/2006/main">
               <a:ext uri="{FF2B5EF4-FFF2-40B4-BE49-F238E27FC236}">
-                <a16:creationId xmlns:a16="http://schemas.microsoft.com/office/drawing/2014/main" id="{8757AC7A-7ACE-4E4F-A552-B9160ECCBCDD}"/>
+                <a16:creationId xmlns:a16="http://schemas.microsoft.com/office/drawing/2014/main" id="{A5748A6D-82C9-4409-8E0F-615C81FF6EEF}"/>
               </a:ext>
             </a:extLst>
           </p:cNvPr>
@@ -14809,7 +14809,7 @@
           <p:cNvPr id="42" name="">
             <a:extLst xmlns:a="http://schemas.openxmlformats.org/drawingml/2006/main">
               <a:ext uri="{FF2B5EF4-FFF2-40B4-BE49-F238E27FC236}">
-                <a16:creationId xmlns:a16="http://schemas.microsoft.com/office/drawing/2014/main" id="{25A90978-D271-44A7-94DF-F8712D81094F}"/>
+                <a16:creationId xmlns:a16="http://schemas.microsoft.com/office/drawing/2014/main" id="{6A7A333E-9DD0-4C98-8B36-DAC00FE72D0A}"/>
               </a:ext>
             </a:extLst>
           </p:cNvPr>
@@ -14839,7 +14839,7 @@
           <p:cNvPr id="43" name="">
             <a:extLst xmlns:a="http://schemas.openxmlformats.org/drawingml/2006/main">
               <a:ext uri="{FF2B5EF4-FFF2-40B4-BE49-F238E27FC236}">
-                <a16:creationId xmlns:a16="http://schemas.microsoft.com/office/drawing/2014/main" id="{36BE59D2-89AC-4750-8AF6-8F70CD93671C}"/>
+                <a16:creationId xmlns:a16="http://schemas.microsoft.com/office/drawing/2014/main" id="{DCA18523-AB18-419E-9A56-E95E21F0E622}"/>
               </a:ext>
             </a:extLst>
           </p:cNvPr>
@@ -14869,7 +14869,7 @@
           <p:cNvPr id="44" name="">
             <a:extLst xmlns:a="http://schemas.openxmlformats.org/drawingml/2006/main">
               <a:ext uri="{FF2B5EF4-FFF2-40B4-BE49-F238E27FC236}">
-                <a16:creationId xmlns:a16="http://schemas.microsoft.com/office/drawing/2014/main" id="{7A6E0A99-170F-4E4B-A85D-500DEBD90CA2}"/>
+                <a16:creationId xmlns:a16="http://schemas.microsoft.com/office/drawing/2014/main" id="{33C00EAB-B962-4FC6-BB9F-7D26DB2EBB4B}"/>
               </a:ext>
             </a:extLst>
           </p:cNvPr>
@@ -14899,7 +14899,7 @@
           <p:cNvPr id="45" name="">
             <a:extLst xmlns:a="http://schemas.openxmlformats.org/drawingml/2006/main">
               <a:ext uri="{FF2B5EF4-FFF2-40B4-BE49-F238E27FC236}">
-                <a16:creationId xmlns:a16="http://schemas.microsoft.com/office/drawing/2014/main" id="{F7A931F3-BF04-4508-B3F8-531D00907595}"/>
+                <a16:creationId xmlns:a16="http://schemas.microsoft.com/office/drawing/2014/main" id="{1FC9F84D-D65F-458C-B1BD-8B4F945DDC05}"/>
               </a:ext>
             </a:extLst>
           </p:cNvPr>
@@ -14929,7 +14929,7 @@
           <p:cNvPr id="46" name="">
             <a:extLst xmlns:a="http://schemas.openxmlformats.org/drawingml/2006/main">
               <a:ext uri="{FF2B5EF4-FFF2-40B4-BE49-F238E27FC236}">
-                <a16:creationId xmlns:a16="http://schemas.microsoft.com/office/drawing/2014/main" id="{CEC05DB3-1FDF-44CB-855A-5925FE8FFFCD}"/>
+                <a16:creationId xmlns:a16="http://schemas.microsoft.com/office/drawing/2014/main" id="{61F75B5C-A0C1-451A-92CF-CAA08D52FC6A}"/>
               </a:ext>
             </a:extLst>
           </p:cNvPr>
@@ -14959,7 +14959,7 @@
           <p:cNvPr id="47" name="">
             <a:extLst xmlns:a="http://schemas.openxmlformats.org/drawingml/2006/main">
               <a:ext uri="{FF2B5EF4-FFF2-40B4-BE49-F238E27FC236}">
-                <a16:creationId xmlns:a16="http://schemas.microsoft.com/office/drawing/2014/main" id="{0EA13E64-35C4-4E2B-8A09-65F17775D1D8}"/>
+                <a16:creationId xmlns:a16="http://schemas.microsoft.com/office/drawing/2014/main" id="{D18B6114-0E29-49E2-B60B-B51785B9928F}"/>
               </a:ext>
             </a:extLst>
           </p:cNvPr>
@@ -14989,7 +14989,7 @@
           <p:cNvPr id="48" name="">
             <a:extLst xmlns:a="http://schemas.openxmlformats.org/drawingml/2006/main">
               <a:ext uri="{FF2B5EF4-FFF2-40B4-BE49-F238E27FC236}">
-                <a16:creationId xmlns:a16="http://schemas.microsoft.com/office/drawing/2014/main" id="{947289C3-6695-4415-BF4D-5F86E85DE7EA}"/>
+                <a16:creationId xmlns:a16="http://schemas.microsoft.com/office/drawing/2014/main" id="{AD8D8D99-AFE9-4808-9173-9FDDE568DA19}"/>
               </a:ext>
             </a:extLst>
           </p:cNvPr>
@@ -15019,7 +15019,7 @@
           <p:cNvPr id="49" name="">
             <a:extLst xmlns:a="http://schemas.openxmlformats.org/drawingml/2006/main">
               <a:ext uri="{FF2B5EF4-FFF2-40B4-BE49-F238E27FC236}">
-                <a16:creationId xmlns:a16="http://schemas.microsoft.com/office/drawing/2014/main" id="{7FF9CF03-6849-4EB7-84B7-61D99720A2A2}"/>
+                <a16:creationId xmlns:a16="http://schemas.microsoft.com/office/drawing/2014/main" id="{6DDCCE64-273B-45D1-AA33-A44146220204}"/>
               </a:ext>
             </a:extLst>
           </p:cNvPr>
@@ -15049,7 +15049,7 @@
           <p:cNvPr id="50" name="">
             <a:extLst xmlns:a="http://schemas.openxmlformats.org/drawingml/2006/main">
               <a:ext uri="{FF2B5EF4-FFF2-40B4-BE49-F238E27FC236}">
-                <a16:creationId xmlns:a16="http://schemas.microsoft.com/office/drawing/2014/main" id="{FBF7157D-8035-4AF9-9B4F-875F06F0E72A}"/>
+                <a16:creationId xmlns:a16="http://schemas.microsoft.com/office/drawing/2014/main" id="{70E5BB47-B5A5-41DE-8C30-61A355CD6BE9}"/>
               </a:ext>
             </a:extLst>
           </p:cNvPr>
@@ -15079,7 +15079,7 @@
           <p:cNvPr id="51" name="">
             <a:extLst xmlns:a="http://schemas.openxmlformats.org/drawingml/2006/main">
               <a:ext uri="{FF2B5EF4-FFF2-40B4-BE49-F238E27FC236}">
-                <a16:creationId xmlns:a16="http://schemas.microsoft.com/office/drawing/2014/main" id="{7577E895-8BB3-41D0-9102-41E1540645D9}"/>
+                <a16:creationId xmlns:a16="http://schemas.microsoft.com/office/drawing/2014/main" id="{07A72439-24D3-482D-939F-8F7E53E9D524}"/>
               </a:ext>
             </a:extLst>
           </p:cNvPr>
@@ -15109,7 +15109,7 @@
           <p:cNvPr id="52" name="">
             <a:extLst xmlns:a="http://schemas.openxmlformats.org/drawingml/2006/main">
               <a:ext uri="{FF2B5EF4-FFF2-40B4-BE49-F238E27FC236}">
-                <a16:creationId xmlns:a16="http://schemas.microsoft.com/office/drawing/2014/main" id="{FE6006A7-86FB-4887-B7A3-D5DA42B3DEB4}"/>
+                <a16:creationId xmlns:a16="http://schemas.microsoft.com/office/drawing/2014/main" id="{27B19482-B0A7-404B-9ED3-6D48B26E6B0C}"/>
               </a:ext>
             </a:extLst>
           </p:cNvPr>
@@ -15139,7 +15139,7 @@
           <p:cNvPr id="53" name="">
             <a:extLst xmlns:a="http://schemas.openxmlformats.org/drawingml/2006/main">
               <a:ext uri="{FF2B5EF4-FFF2-40B4-BE49-F238E27FC236}">
-                <a16:creationId xmlns:a16="http://schemas.microsoft.com/office/drawing/2014/main" id="{FA31901B-7C89-4060-83DF-03C7D9D04187}"/>
+                <a16:creationId xmlns:a16="http://schemas.microsoft.com/office/drawing/2014/main" id="{3BCFE322-9AD8-4A91-A7D8-DA4777EE81F7}"/>
               </a:ext>
             </a:extLst>
           </p:cNvPr>
@@ -15169,7 +15169,7 @@
           <p:cNvPr id="54" name="">
             <a:extLst xmlns:a="http://schemas.openxmlformats.org/drawingml/2006/main">
               <a:ext uri="{FF2B5EF4-FFF2-40B4-BE49-F238E27FC236}">
-                <a16:creationId xmlns:a16="http://schemas.microsoft.com/office/drawing/2014/main" id="{7B637714-B6B0-4A79-B7D3-25864E2C2046}"/>
+                <a16:creationId xmlns:a16="http://schemas.microsoft.com/office/drawing/2014/main" id="{2B68145F-F609-48B5-B773-E4DAA33A55D1}"/>
               </a:ext>
             </a:extLst>
           </p:cNvPr>
@@ -15199,7 +15199,7 @@
           <p:cNvPr id="55" name="">
             <a:extLst xmlns:a="http://schemas.openxmlformats.org/drawingml/2006/main">
               <a:ext uri="{FF2B5EF4-FFF2-40B4-BE49-F238E27FC236}">
-                <a16:creationId xmlns:a16="http://schemas.microsoft.com/office/drawing/2014/main" id="{E4F698D6-4D23-4318-B0E4-530CDE06C0C0}"/>
+                <a16:creationId xmlns:a16="http://schemas.microsoft.com/office/drawing/2014/main" id="{F09EC3FE-1202-45A8-AFDA-CEFE851DD924}"/>
               </a:ext>
             </a:extLst>
           </p:cNvPr>
@@ -15229,7 +15229,7 @@
           <p:cNvPr id="56" name="">
             <a:extLst xmlns:a="http://schemas.openxmlformats.org/drawingml/2006/main">
               <a:ext uri="{FF2B5EF4-FFF2-40B4-BE49-F238E27FC236}">
-                <a16:creationId xmlns:a16="http://schemas.microsoft.com/office/drawing/2014/main" id="{62D3C5BA-8E95-4412-9A78-8A4E804CF21C}"/>
+                <a16:creationId xmlns:a16="http://schemas.microsoft.com/office/drawing/2014/main" id="{41D3BD87-9C30-4CFD-80AD-0B1715026928}"/>
               </a:ext>
             </a:extLst>
           </p:cNvPr>
@@ -15259,7 +15259,7 @@
           <p:cNvPr id="57" name="">
             <a:extLst xmlns:a="http://schemas.openxmlformats.org/drawingml/2006/main">
               <a:ext uri="{FF2B5EF4-FFF2-40B4-BE49-F238E27FC236}">
-                <a16:creationId xmlns:a16="http://schemas.microsoft.com/office/drawing/2014/main" id="{39891AEA-A266-400F-BF96-51931F5D6D47}"/>
+                <a16:creationId xmlns:a16="http://schemas.microsoft.com/office/drawing/2014/main" id="{4F09C7A1-1026-4E01-805F-6A376C357326}"/>
               </a:ext>
             </a:extLst>
           </p:cNvPr>
@@ -15327,7 +15327,7 @@
           <p:cNvPr id="58" name="">
             <a:extLst xmlns:a="http://schemas.openxmlformats.org/drawingml/2006/main">
               <a:ext uri="{FF2B5EF4-FFF2-40B4-BE49-F238E27FC236}">
-                <a16:creationId xmlns:a16="http://schemas.microsoft.com/office/drawing/2014/main" id="{57886DC2-5AE2-4D56-A7C2-43B984680229}"/>
+                <a16:creationId xmlns:a16="http://schemas.microsoft.com/office/drawing/2014/main" id="{847A3848-F7CE-40D6-AC3F-C46DC809B743}"/>
               </a:ext>
             </a:extLst>
           </p:cNvPr>
@@ -15360,7 +15360,7 @@
           <p:cNvPr id="59" name="">
             <a:extLst xmlns:a="http://schemas.openxmlformats.org/drawingml/2006/main">
               <a:ext uri="{FF2B5EF4-FFF2-40B4-BE49-F238E27FC236}">
-                <a16:creationId xmlns:a16="http://schemas.microsoft.com/office/drawing/2014/main" id="{80F8AC4E-C7DF-418F-A1C8-AC3963EF7733}"/>
+                <a16:creationId xmlns:a16="http://schemas.microsoft.com/office/drawing/2014/main" id="{3C0E01E1-C069-427E-8E36-863FA8757B06}"/>
               </a:ext>
             </a:extLst>
           </p:cNvPr>
@@ -15426,7 +15426,7 @@
     </p:spTree>
     <p:extLst>
       <p:ext uri="{BB962C8B-B14F-4D97-AF65-F5344CB8AC3E}">
-        <p14:creationId xmlns:p14="http://schemas.microsoft.com/office/powerpoint/2010/main" val="236379777"/>
+        <p14:creationId xmlns:p14="http://schemas.microsoft.com/office/powerpoint/2010/main" val="486078497"/>
       </p:ext>
     </p:extLst>
   </p:cSld>
@@ -15454,10 +15454,10 @@
       </p:grpSpPr>
       <p:sp>
         <p:nvSpPr>
-          <p:cNvPr id="90" name="">
-            <a:extLst xmlns:a="http://schemas.openxmlformats.org/drawingml/2006/main">
-              <a:ext uri="{FF2B5EF4-FFF2-40B4-BE49-F238E27FC236}">
-                <a16:creationId xmlns:a16="http://schemas.microsoft.com/office/drawing/2014/main" id="{12FA06BB-703E-4636-8BF1-A2E21E3479E6}"/>
+          <p:cNvPr id="80" name="">
+            <a:extLst xmlns:a="http://schemas.openxmlformats.org/drawingml/2006/main">
+              <a:ext uri="{FF2B5EF4-FFF2-40B4-BE49-F238E27FC236}">
+                <a16:creationId xmlns:a16="http://schemas.microsoft.com/office/drawing/2014/main" id="{4799F549-ECEE-41B1-B857-B789216E9D86}"/>
               </a:ext>
             </a:extLst>
           </p:cNvPr>
@@ -15525,7 +15525,7 @@
           <p:cNvPr id="2" name="">
             <a:extLst xmlns:a="http://schemas.openxmlformats.org/drawingml/2006/main">
               <a:ext uri="{FF2B5EF4-FFF2-40B4-BE49-F238E27FC236}">
-                <a16:creationId xmlns:a16="http://schemas.microsoft.com/office/drawing/2014/main" id="{7FCC92AA-A75C-43EF-8CC4-63E30B6C399A}"/>
+                <a16:creationId xmlns:a16="http://schemas.microsoft.com/office/drawing/2014/main" id="{BB885884-8898-40F2-B56D-C6BA21CEFD0E}"/>
               </a:ext>
             </a:extLst>
           </p:cNvPr>
@@ -15558,7 +15558,7 @@
           <p:cNvPr id="3" name="">
             <a:extLst xmlns:a="http://schemas.openxmlformats.org/drawingml/2006/main">
               <a:ext uri="{FF2B5EF4-FFF2-40B4-BE49-F238E27FC236}">
-                <a16:creationId xmlns:a16="http://schemas.microsoft.com/office/drawing/2014/main" id="{3FA9FEA8-BBB6-4BE8-A646-AC02FDD5A78E}"/>
+                <a16:creationId xmlns:a16="http://schemas.microsoft.com/office/drawing/2014/main" id="{86C76007-A8D0-4E5E-81B7-3EC9B5DC8B9C}"/>
               </a:ext>
             </a:extLst>
           </p:cNvPr>
@@ -15626,7 +15626,7 @@
           <p:cNvPr id="4" name="">
             <a:extLst xmlns:a="http://schemas.openxmlformats.org/drawingml/2006/main">
               <a:ext uri="{FF2B5EF4-FFF2-40B4-BE49-F238E27FC236}">
-                <a16:creationId xmlns:a16="http://schemas.microsoft.com/office/drawing/2014/main" id="{2829AF07-C432-46EB-BDE6-01D53ADDE1FF}"/>
+                <a16:creationId xmlns:a16="http://schemas.microsoft.com/office/drawing/2014/main" id="{D9BFCE61-E2C8-4FC3-A562-80148903391B}"/>
               </a:ext>
             </a:extLst>
           </p:cNvPr>
@@ -15638,7 +15638,7 @@
         <p:spPr>
           <a:xfrm xmlns:a="http://schemas.openxmlformats.org/drawingml/2006/main">
             <a:off x="723900" y="1466850"/>
-            <a:ext cx="5048250" cy="323850"/>
+            <a:ext cx="1714500" cy="323850"/>
           </a:xfrm>
           <a:prstGeom xmlns:a="http://schemas.openxmlformats.org/drawingml/2006/main" prst="rect">
             <a:avLst/>
@@ -15684,7 +15684,7 @@
                 <a:ea typeface="Arial"/>
                 <a:cs typeface="Arial"/>
               </a:rPr>
-              <a:t>Depthwise 3×3: смотрит на соседние пиксели</a:t>
+              <a:t>Depthwise</a:t>
             </a:r>
           </a:p>
         </p:txBody>
@@ -15694,19 +15694,87 @@
           <p:cNvPr id="5" name="">
             <a:extLst xmlns:a="http://schemas.openxmlformats.org/drawingml/2006/main">
               <a:ext uri="{FF2B5EF4-FFF2-40B4-BE49-F238E27FC236}">
-                <a16:creationId xmlns:a16="http://schemas.microsoft.com/office/drawing/2014/main" id="{006BE5BA-43A1-47BC-822A-0F3E9865A536}"/>
-              </a:ext>
-            </a:extLst>
-          </p:cNvPr>
-          <p:cNvSpPr>
-            <a:spLocks xmlns:a="http://schemas.openxmlformats.org/drawingml/2006/main" noGrp="1"/>
-          </p:cNvSpPr>
-          <p:nvPr/>
-        </p:nvSpPr>
-        <p:spPr>
-          <a:xfrm xmlns:a="http://schemas.openxmlformats.org/drawingml/2006/main">
-            <a:off x="723900" y="1809750"/>
-            <a:ext cx="4953000" cy="228600"/>
+                <a16:creationId xmlns:a16="http://schemas.microsoft.com/office/drawing/2014/main" id="{1427DCD5-540B-4619-B892-172865102A95}"/>
+              </a:ext>
+            </a:extLst>
+          </p:cNvPr>
+          <p:cNvSpPr>
+            <a:spLocks xmlns:a="http://schemas.openxmlformats.org/drawingml/2006/main" noGrp="1"/>
+          </p:cNvSpPr>
+          <p:nvPr/>
+        </p:nvSpPr>
+        <p:spPr>
+          <a:xfrm xmlns:a="http://schemas.openxmlformats.org/drawingml/2006/main">
+            <a:off x="2171700" y="1466850"/>
+            <a:ext cx="685800" cy="323850"/>
+          </a:xfrm>
+          <a:prstGeom xmlns:a="http://schemas.openxmlformats.org/drawingml/2006/main" prst="rect">
+            <a:avLst/>
+          </a:prstGeom>
+          <a:noFill xmlns:a="http://schemas.openxmlformats.org/drawingml/2006/main"/>
+          <a:ln xmlns:a="http://schemas.openxmlformats.org/drawingml/2006/main" w="0">
+            <a:noFill/>
+          </a:ln>
+        </p:spPr>
+        <p:txBody>
+          <a:bodyPr xmlns:a="http://schemas.openxmlformats.org/drawingml/2006/main">
+            <a:noAutofit/>
+          </a:bodyPr>
+          <a:lstStyle xmlns:a="http://schemas.openxmlformats.org/drawingml/2006/main">
+            <a:defPPr algn="l">
+              <a:defRPr sz="1800" b="0">
+                <a:solidFill>
+                  <a:srgbClr val="111827"/>
+                </a:solidFill>
+                <a:latin typeface="Arial"/>
+                <a:ea typeface="Arial"/>
+                <a:cs typeface="Arial"/>
+              </a:defRPr>
+            </a:defPPr>
+          </a:lstStyle>
+          <a:p xmlns:a="http://schemas.openxmlformats.org/drawingml/2006/main">
+            <a:pPr algn="l">
+              <a:defRPr sz="1800" b="0">
+                <a:solidFill>
+                  <a:srgbClr val="111827"/>
+                </a:solidFill>
+                <a:latin typeface="Arial"/>
+                <a:ea typeface="Arial"/>
+                <a:cs typeface="Arial"/>
+              </a:defRPr>
+            </a:pPr>
+            <a:r>
+              <a:rPr sz="1800" b="0">
+                <a:solidFill>
+                  <a:srgbClr val="111827"/>
+                </a:solidFill>
+                <a:latin typeface="Arial"/>
+                <a:ea typeface="Arial"/>
+                <a:cs typeface="Arial"/>
+              </a:rPr>
+              <a:t>3×3</a:t>
+            </a:r>
+          </a:p>
+        </p:txBody>
+      </p:sp>
+      <p:sp>
+        <p:nvSpPr>
+          <p:cNvPr id="6" name="">
+            <a:extLst xmlns:a="http://schemas.openxmlformats.org/drawingml/2006/main">
+              <a:ext uri="{FF2B5EF4-FFF2-40B4-BE49-F238E27FC236}">
+                <a16:creationId xmlns:a16="http://schemas.microsoft.com/office/drawing/2014/main" id="{15E1F8F8-9674-48E4-8F9B-0E7647744DF3}"/>
+              </a:ext>
+            </a:extLst>
+          </p:cNvPr>
+          <p:cNvSpPr>
+            <a:spLocks xmlns:a="http://schemas.openxmlformats.org/drawingml/2006/main" noGrp="1"/>
+          </p:cNvSpPr>
+          <p:nvPr/>
+        </p:nvSpPr>
+        <p:spPr>
+          <a:xfrm xmlns:a="http://schemas.openxmlformats.org/drawingml/2006/main">
+            <a:off x="723900" y="1828800"/>
+            <a:ext cx="4857750" cy="400050"/>
           </a:xfrm>
           <a:prstGeom xmlns:a="http://schemas.openxmlformats.org/drawingml/2006/main" prst="rect">
             <a:avLst/>
@@ -15752,33 +15820,33 @@
                 <a:ea typeface="Arial"/>
                 <a:cs typeface="Arial"/>
               </a:rPr>
-              <a:t>но каждый канал обрабатывает отдельно</a:t>
+              <a:t>Три отдельных фильтра: каждый работает только со своим каналом</a:t>
             </a:r>
           </a:p>
         </p:txBody>
       </p:sp>
       <p:sp>
         <p:nvSpPr>
-          <p:cNvPr id="6" name="">
-            <a:extLst xmlns:a="http://schemas.openxmlformats.org/drawingml/2006/main">
-              <a:ext uri="{FF2B5EF4-FFF2-40B4-BE49-F238E27FC236}">
-                <a16:creationId xmlns:a16="http://schemas.microsoft.com/office/drawing/2014/main" id="{B5299927-A0F9-42BA-951D-9D32D20A6648}"/>
-              </a:ext>
-            </a:extLst>
-          </p:cNvPr>
-          <p:cNvSpPr>
-            <a:spLocks xmlns:a="http://schemas.openxmlformats.org/drawingml/2006/main" noGrp="1"/>
-          </p:cNvSpPr>
-          <p:nvPr/>
-        </p:nvSpPr>
-        <p:spPr>
-          <a:xfrm xmlns:a="http://schemas.openxmlformats.org/drawingml/2006/main">
-            <a:off x="895350" y="2343150"/>
-            <a:ext cx="590550" cy="590550"/>
+          <p:cNvPr id="7" name="">
+            <a:extLst xmlns:a="http://schemas.openxmlformats.org/drawingml/2006/main">
+              <a:ext uri="{FF2B5EF4-FFF2-40B4-BE49-F238E27FC236}">
+                <a16:creationId xmlns:a16="http://schemas.microsoft.com/office/drawing/2014/main" id="{6FF0EC52-E9DE-439D-99D0-A7649C1E1908}"/>
+              </a:ext>
+            </a:extLst>
+          </p:cNvPr>
+          <p:cNvSpPr>
+            <a:spLocks xmlns:a="http://schemas.openxmlformats.org/drawingml/2006/main" noGrp="1"/>
+          </p:cNvSpPr>
+          <p:nvPr/>
+        </p:nvSpPr>
+        <p:spPr>
+          <a:xfrm xmlns:a="http://schemas.openxmlformats.org/drawingml/2006/main">
+            <a:off x="1143000" y="2457450"/>
+            <a:ext cx="762000" cy="685800"/>
           </a:xfrm>
           <a:prstGeom xmlns:a="http://schemas.openxmlformats.org/drawingml/2006/main" prst="roundRect">
             <a:avLst>
-              <a:gd name="adj" fmla="val 11290"/>
+              <a:gd name="adj" fmla="val 9722"/>
             </a:avLst>
           </a:prstGeom>
           <a:solidFill xmlns:a="http://schemas.openxmlformats.org/drawingml/2006/main">
@@ -15786,7 +15854,7 @@
           </a:solidFill>
           <a:ln xmlns:a="http://schemas.openxmlformats.org/drawingml/2006/main" w="9525">
             <a:solidFill>
-              <a:srgbClr val="EAF2FF"/>
+              <a:srgbClr val="E5E1D8"/>
             </a:solidFill>
             <a:prstDash val="solid"/>
           </a:ln>
@@ -15794,22 +15862,22 @@
       </p:sp>
       <p:sp>
         <p:nvSpPr>
-          <p:cNvPr id="7" name="">
-            <a:extLst xmlns:a="http://schemas.openxmlformats.org/drawingml/2006/main">
-              <a:ext uri="{FF2B5EF4-FFF2-40B4-BE49-F238E27FC236}">
-                <a16:creationId xmlns:a16="http://schemas.microsoft.com/office/drawing/2014/main" id="{A70DE0BE-8B80-42B5-8B80-A42B58AD4250}"/>
-              </a:ext>
-            </a:extLst>
-          </p:cNvPr>
-          <p:cNvSpPr>
-            <a:spLocks xmlns:a="http://schemas.openxmlformats.org/drawingml/2006/main" noGrp="1"/>
-          </p:cNvSpPr>
-          <p:nvPr/>
-        </p:nvSpPr>
-        <p:spPr>
-          <a:xfrm xmlns:a="http://schemas.openxmlformats.org/drawingml/2006/main">
-            <a:off x="971550" y="2505075"/>
-            <a:ext cx="438150" cy="19050"/>
+          <p:cNvPr id="8" name="">
+            <a:extLst xmlns:a="http://schemas.openxmlformats.org/drawingml/2006/main">
+              <a:ext uri="{FF2B5EF4-FFF2-40B4-BE49-F238E27FC236}">
+                <a16:creationId xmlns:a16="http://schemas.microsoft.com/office/drawing/2014/main" id="{74FE086A-20C1-4FF0-AFDF-6A0866FA0AC3}"/>
+              </a:ext>
+            </a:extLst>
+          </p:cNvPr>
+          <p:cNvSpPr>
+            <a:spLocks xmlns:a="http://schemas.openxmlformats.org/drawingml/2006/main" noGrp="1"/>
+          </p:cNvSpPr>
+          <p:nvPr/>
+        </p:nvSpPr>
+        <p:spPr>
+          <a:xfrm xmlns:a="http://schemas.openxmlformats.org/drawingml/2006/main">
+            <a:off x="1228725" y="2686050"/>
+            <a:ext cx="590550" cy="19050"/>
           </a:xfrm>
           <a:prstGeom xmlns:a="http://schemas.openxmlformats.org/drawingml/2006/main" prst="rect">
             <a:avLst/>
@@ -15827,22 +15895,22 @@
       </p:sp>
       <p:sp>
         <p:nvSpPr>
-          <p:cNvPr id="8" name="">
-            <a:extLst xmlns:a="http://schemas.openxmlformats.org/drawingml/2006/main">
-              <a:ext uri="{FF2B5EF4-FFF2-40B4-BE49-F238E27FC236}">
-                <a16:creationId xmlns:a16="http://schemas.microsoft.com/office/drawing/2014/main" id="{252EC313-6D56-4EC2-B425-76EDAC66FAE0}"/>
-              </a:ext>
-            </a:extLst>
-          </p:cNvPr>
-          <p:cNvSpPr>
-            <a:spLocks xmlns:a="http://schemas.openxmlformats.org/drawingml/2006/main" noGrp="1"/>
-          </p:cNvSpPr>
-          <p:nvPr/>
-        </p:nvSpPr>
-        <p:spPr>
-          <a:xfrm xmlns:a="http://schemas.openxmlformats.org/drawingml/2006/main">
-            <a:off x="971550" y="2638425"/>
-            <a:ext cx="438150" cy="19050"/>
+          <p:cNvPr id="9" name="">
+            <a:extLst xmlns:a="http://schemas.openxmlformats.org/drawingml/2006/main">
+              <a:ext uri="{FF2B5EF4-FFF2-40B4-BE49-F238E27FC236}">
+                <a16:creationId xmlns:a16="http://schemas.microsoft.com/office/drawing/2014/main" id="{F9AACFD5-3161-4A87-B846-022496DB194B}"/>
+              </a:ext>
+            </a:extLst>
+          </p:cNvPr>
+          <p:cNvSpPr>
+            <a:spLocks xmlns:a="http://schemas.openxmlformats.org/drawingml/2006/main" noGrp="1"/>
+          </p:cNvSpPr>
+          <p:nvPr/>
+        </p:nvSpPr>
+        <p:spPr>
+          <a:xfrm xmlns:a="http://schemas.openxmlformats.org/drawingml/2006/main">
+            <a:off x="1228725" y="2914650"/>
+            <a:ext cx="590550" cy="19050"/>
           </a:xfrm>
           <a:prstGeom xmlns:a="http://schemas.openxmlformats.org/drawingml/2006/main" prst="rect">
             <a:avLst/>
@@ -15860,22 +15928,22 @@
       </p:sp>
       <p:sp>
         <p:nvSpPr>
-          <p:cNvPr id="9" name="">
-            <a:extLst xmlns:a="http://schemas.openxmlformats.org/drawingml/2006/main">
-              <a:ext uri="{FF2B5EF4-FFF2-40B4-BE49-F238E27FC236}">
-                <a16:creationId xmlns:a16="http://schemas.microsoft.com/office/drawing/2014/main" id="{00CB5F49-631F-4F8C-85CB-4357FB50DB47}"/>
-              </a:ext>
-            </a:extLst>
-          </p:cNvPr>
-          <p:cNvSpPr>
-            <a:spLocks xmlns:a="http://schemas.openxmlformats.org/drawingml/2006/main" noGrp="1"/>
-          </p:cNvSpPr>
-          <p:nvPr/>
-        </p:nvSpPr>
-        <p:spPr>
-          <a:xfrm xmlns:a="http://schemas.openxmlformats.org/drawingml/2006/main">
-            <a:off x="971550" y="2771775"/>
-            <a:ext cx="438150" cy="19050"/>
+          <p:cNvPr id="10" name="">
+            <a:extLst xmlns:a="http://schemas.openxmlformats.org/drawingml/2006/main">
+              <a:ext uri="{FF2B5EF4-FFF2-40B4-BE49-F238E27FC236}">
+                <a16:creationId xmlns:a16="http://schemas.microsoft.com/office/drawing/2014/main" id="{D3C3D6C9-2133-41B4-A24E-00E8B88A2A6D}"/>
+              </a:ext>
+            </a:extLst>
+          </p:cNvPr>
+          <p:cNvSpPr>
+            <a:spLocks xmlns:a="http://schemas.openxmlformats.org/drawingml/2006/main" noGrp="1"/>
+          </p:cNvSpPr>
+          <p:nvPr/>
+        </p:nvSpPr>
+        <p:spPr>
+          <a:xfrm xmlns:a="http://schemas.openxmlformats.org/drawingml/2006/main">
+            <a:off x="1390650" y="2533650"/>
+            <a:ext cx="19050" cy="533400"/>
           </a:xfrm>
           <a:prstGeom xmlns:a="http://schemas.openxmlformats.org/drawingml/2006/main" prst="rect">
             <a:avLst/>
@@ -15893,358 +15961,22 @@
       </p:sp>
       <p:sp>
         <p:nvSpPr>
-          <p:cNvPr id="10" name="">
-            <a:extLst xmlns:a="http://schemas.openxmlformats.org/drawingml/2006/main">
-              <a:ext uri="{FF2B5EF4-FFF2-40B4-BE49-F238E27FC236}">
-                <a16:creationId xmlns:a16="http://schemas.microsoft.com/office/drawing/2014/main" id="{3D47A46C-D8DB-4833-AFEC-610C859566D0}"/>
-              </a:ext>
-            </a:extLst>
-          </p:cNvPr>
-          <p:cNvSpPr>
-            <a:spLocks xmlns:a="http://schemas.openxmlformats.org/drawingml/2006/main" noGrp="1"/>
-          </p:cNvSpPr>
-          <p:nvPr/>
-        </p:nvSpPr>
-        <p:spPr>
-          <a:xfrm xmlns:a="http://schemas.openxmlformats.org/drawingml/2006/main">
-            <a:off x="895350" y="3009900"/>
-            <a:ext cx="590550" cy="190500"/>
-          </a:xfrm>
-          <a:prstGeom xmlns:a="http://schemas.openxmlformats.org/drawingml/2006/main" prst="rect">
-            <a:avLst/>
-          </a:prstGeom>
-          <a:noFill xmlns:a="http://schemas.openxmlformats.org/drawingml/2006/main"/>
-          <a:ln xmlns:a="http://schemas.openxmlformats.org/drawingml/2006/main" w="0">
-            <a:noFill/>
-          </a:ln>
-        </p:spPr>
-        <p:txBody>
-          <a:bodyPr xmlns:a="http://schemas.openxmlformats.org/drawingml/2006/main">
-            <a:noAutofit/>
-          </a:bodyPr>
-          <a:lstStyle xmlns:a="http://schemas.openxmlformats.org/drawingml/2006/main">
-            <a:defPPr algn="ctr">
-              <a:defRPr sz="1200" b="0">
-                <a:solidFill>
-                  <a:srgbClr val="596273"/>
-                </a:solidFill>
-                <a:latin typeface="Arial"/>
-                <a:ea typeface="Arial"/>
-                <a:cs typeface="Arial"/>
-              </a:defRPr>
-            </a:defPPr>
-          </a:lstStyle>
-          <a:p xmlns:a="http://schemas.openxmlformats.org/drawingml/2006/main">
-            <a:pPr algn="ctr">
-              <a:defRPr sz="1200" b="0">
-                <a:solidFill>
-                  <a:srgbClr val="596273"/>
-                </a:solidFill>
-                <a:latin typeface="Arial"/>
-                <a:ea typeface="Arial"/>
-                <a:cs typeface="Arial"/>
-              </a:defRPr>
-            </a:pPr>
-            <a:r>
-              <a:rPr sz="1200" b="0">
-                <a:solidFill>
-                  <a:srgbClr val="596273"/>
-                </a:solidFill>
-                <a:latin typeface="Arial"/>
-                <a:ea typeface="Arial"/>
-                <a:cs typeface="Arial"/>
-              </a:rPr>
-              <a:t>C1</a:t>
-            </a:r>
-          </a:p>
-        </p:txBody>
-      </p:sp>
-      <p:sp>
-        <p:nvSpPr>
           <p:cNvPr id="11" name="">
             <a:extLst xmlns:a="http://schemas.openxmlformats.org/drawingml/2006/main">
               <a:ext uri="{FF2B5EF4-FFF2-40B4-BE49-F238E27FC236}">
-                <a16:creationId xmlns:a16="http://schemas.microsoft.com/office/drawing/2014/main" id="{0EE26BED-EBE7-45BF-97E3-B523C337231E}"/>
-              </a:ext>
-            </a:extLst>
-          </p:cNvPr>
-          <p:cNvSpPr>
-            <a:spLocks xmlns:a="http://schemas.openxmlformats.org/drawingml/2006/main" noGrp="1"/>
-          </p:cNvSpPr>
-          <p:nvPr/>
-        </p:nvSpPr>
-        <p:spPr>
-          <a:xfrm xmlns:a="http://schemas.openxmlformats.org/drawingml/2006/main">
-            <a:off x="1619250" y="2638425"/>
-            <a:ext cx="723900" cy="28575"/>
-          </a:xfrm>
-          <a:prstGeom xmlns:a="http://schemas.openxmlformats.org/drawingml/2006/main" prst="rect">
-            <a:avLst/>
-          </a:prstGeom>
-          <a:solidFill xmlns:a="http://schemas.openxmlformats.org/drawingml/2006/main">
-            <a:srgbClr val="0F9D8A"/>
-          </a:solidFill>
-          <a:ln xmlns:a="http://schemas.openxmlformats.org/drawingml/2006/main" w="9525">
-            <a:solidFill>
-              <a:srgbClr val="0F9D8A"/>
-            </a:solidFill>
-            <a:prstDash val="solid"/>
-          </a:ln>
-        </p:spPr>
-      </p:sp>
-      <p:sp>
-        <p:nvSpPr>
-          <p:cNvPr id="12" name="">
-            <a:extLst xmlns:a="http://schemas.openxmlformats.org/drawingml/2006/main">
-              <a:ext uri="{FF2B5EF4-FFF2-40B4-BE49-F238E27FC236}">
-                <a16:creationId xmlns:a16="http://schemas.microsoft.com/office/drawing/2014/main" id="{F0F3B6BB-51C2-448E-B235-CC9200A0B33C}"/>
-              </a:ext>
-            </a:extLst>
-          </p:cNvPr>
-          <p:cNvSpPr>
-            <a:spLocks xmlns:a="http://schemas.openxmlformats.org/drawingml/2006/main" noGrp="1"/>
-          </p:cNvSpPr>
-          <p:nvPr/>
-        </p:nvSpPr>
-        <p:spPr>
-          <a:xfrm xmlns:a="http://schemas.openxmlformats.org/drawingml/2006/main">
-            <a:off x="2266950" y="2581275"/>
-            <a:ext cx="133350" cy="142875"/>
-          </a:xfrm>
-          <a:prstGeom xmlns:a="http://schemas.openxmlformats.org/drawingml/2006/main" prst="triangle">
-            <a:avLst/>
-          </a:prstGeom>
-          <a:solidFill xmlns:a="http://schemas.openxmlformats.org/drawingml/2006/main">
-            <a:srgbClr val="0F9D8A"/>
-          </a:solidFill>
-          <a:ln xmlns:a="http://schemas.openxmlformats.org/drawingml/2006/main" w="0">
-            <a:solidFill>
-              <a:srgbClr val="0F9D8A"/>
-            </a:solidFill>
-          </a:ln>
-        </p:spPr>
-      </p:sp>
-      <p:sp>
-        <p:nvSpPr>
-          <p:cNvPr id="13" name="">
-            <a:extLst xmlns:a="http://schemas.openxmlformats.org/drawingml/2006/main">
-              <a:ext uri="{FF2B5EF4-FFF2-40B4-BE49-F238E27FC236}">
-                <a16:creationId xmlns:a16="http://schemas.microsoft.com/office/drawing/2014/main" id="{2E2A2DDA-CD4C-41F3-BAF4-7A9F871F2812}"/>
-              </a:ext>
-            </a:extLst>
-          </p:cNvPr>
-          <p:cNvSpPr>
-            <a:spLocks xmlns:a="http://schemas.openxmlformats.org/drawingml/2006/main" noGrp="1"/>
-          </p:cNvSpPr>
-          <p:nvPr/>
-        </p:nvSpPr>
-        <p:spPr>
-          <a:xfrm xmlns:a="http://schemas.openxmlformats.org/drawingml/2006/main">
-            <a:off x="2514600" y="2428875"/>
-            <a:ext cx="685800" cy="419100"/>
-          </a:xfrm>
-          <a:prstGeom xmlns:a="http://schemas.openxmlformats.org/drawingml/2006/main" prst="roundRect">
-            <a:avLst>
-              <a:gd name="adj" fmla="val 15909"/>
-            </a:avLst>
-          </a:prstGeom>
-          <a:solidFill xmlns:a="http://schemas.openxmlformats.org/drawingml/2006/main">
-            <a:srgbClr val="0F9D8A"/>
-          </a:solidFill>
-          <a:ln xmlns:a="http://schemas.openxmlformats.org/drawingml/2006/main" w="9525">
-            <a:solidFill>
-              <a:srgbClr val="0F9D8A"/>
-            </a:solidFill>
-            <a:prstDash val="solid"/>
-          </a:ln>
-        </p:spPr>
-      </p:sp>
-      <p:sp>
-        <p:nvSpPr>
-          <p:cNvPr id="14" name="">
-            <a:extLst xmlns:a="http://schemas.openxmlformats.org/drawingml/2006/main">
-              <a:ext uri="{FF2B5EF4-FFF2-40B4-BE49-F238E27FC236}">
-                <a16:creationId xmlns:a16="http://schemas.microsoft.com/office/drawing/2014/main" id="{4620A870-C8E5-45B6-9D9F-233FEAF81A8A}"/>
-              </a:ext>
-            </a:extLst>
-          </p:cNvPr>
-          <p:cNvSpPr>
-            <a:spLocks xmlns:a="http://schemas.openxmlformats.org/drawingml/2006/main" noGrp="1"/>
-          </p:cNvSpPr>
-          <p:nvPr/>
-        </p:nvSpPr>
-        <p:spPr>
-          <a:xfrm xmlns:a="http://schemas.openxmlformats.org/drawingml/2006/main">
-            <a:off x="2514600" y="2524125"/>
-            <a:ext cx="685800" cy="209550"/>
-          </a:xfrm>
-          <a:prstGeom xmlns:a="http://schemas.openxmlformats.org/drawingml/2006/main" prst="rect">
-            <a:avLst/>
-          </a:prstGeom>
-          <a:noFill xmlns:a="http://schemas.openxmlformats.org/drawingml/2006/main"/>
-          <a:ln xmlns:a="http://schemas.openxmlformats.org/drawingml/2006/main" w="0">
-            <a:noFill/>
-          </a:ln>
-        </p:spPr>
-        <p:txBody>
-          <a:bodyPr xmlns:a="http://schemas.openxmlformats.org/drawingml/2006/main">
-            <a:noAutofit/>
-          </a:bodyPr>
-          <a:lstStyle xmlns:a="http://schemas.openxmlformats.org/drawingml/2006/main">
-            <a:defPPr algn="ctr">
-              <a:defRPr sz="1200" b="0">
-                <a:solidFill>
-                  <a:srgbClr val="596273"/>
-                </a:solidFill>
-                <a:latin typeface="Arial"/>
-                <a:ea typeface="Arial"/>
-                <a:cs typeface="Arial"/>
-              </a:defRPr>
-            </a:defPPr>
-          </a:lstStyle>
-          <a:p xmlns:a="http://schemas.openxmlformats.org/drawingml/2006/main">
-            <a:pPr algn="ctr">
-              <a:defRPr sz="1200" b="0">
-                <a:solidFill>
-                  <a:srgbClr val="596273"/>
-                </a:solidFill>
-                <a:latin typeface="Arial"/>
-                <a:ea typeface="Arial"/>
-                <a:cs typeface="Arial"/>
-              </a:defRPr>
-            </a:pPr>
-            <a:r>
-              <a:rPr sz="1200" b="0">
-                <a:solidFill>
-                  <a:srgbClr val="596273"/>
-                </a:solidFill>
-                <a:latin typeface="Arial"/>
-                <a:ea typeface="Arial"/>
-                <a:cs typeface="Arial"/>
-              </a:rPr>
-              <a:t>3×3</a:t>
-            </a:r>
-          </a:p>
-        </p:txBody>
-      </p:sp>
-      <p:sp>
-        <p:nvSpPr>
-          <p:cNvPr id="15" name="">
-            <a:extLst xmlns:a="http://schemas.openxmlformats.org/drawingml/2006/main">
-              <a:ext uri="{FF2B5EF4-FFF2-40B4-BE49-F238E27FC236}">
-                <a16:creationId xmlns:a16="http://schemas.microsoft.com/office/drawing/2014/main" id="{57F4B4AD-500D-48A3-990C-13B746A745F5}"/>
-              </a:ext>
-            </a:extLst>
-          </p:cNvPr>
-          <p:cNvSpPr>
-            <a:spLocks xmlns:a="http://schemas.openxmlformats.org/drawingml/2006/main" noGrp="1"/>
-          </p:cNvSpPr>
-          <p:nvPr/>
-        </p:nvSpPr>
-        <p:spPr>
-          <a:xfrm xmlns:a="http://schemas.openxmlformats.org/drawingml/2006/main">
-            <a:off x="3352800" y="2638425"/>
-            <a:ext cx="723900" cy="28575"/>
-          </a:xfrm>
-          <a:prstGeom xmlns:a="http://schemas.openxmlformats.org/drawingml/2006/main" prst="rect">
-            <a:avLst/>
-          </a:prstGeom>
-          <a:solidFill xmlns:a="http://schemas.openxmlformats.org/drawingml/2006/main">
-            <a:srgbClr val="0F9D8A"/>
-          </a:solidFill>
-          <a:ln xmlns:a="http://schemas.openxmlformats.org/drawingml/2006/main" w="9525">
-            <a:solidFill>
-              <a:srgbClr val="0F9D8A"/>
-            </a:solidFill>
-            <a:prstDash val="solid"/>
-          </a:ln>
-        </p:spPr>
-      </p:sp>
-      <p:sp>
-        <p:nvSpPr>
-          <p:cNvPr id="16" name="">
-            <a:extLst xmlns:a="http://schemas.openxmlformats.org/drawingml/2006/main">
-              <a:ext uri="{FF2B5EF4-FFF2-40B4-BE49-F238E27FC236}">
-                <a16:creationId xmlns:a16="http://schemas.microsoft.com/office/drawing/2014/main" id="{C0323532-93F5-4B0A-B7D0-6AAF216F44B2}"/>
-              </a:ext>
-            </a:extLst>
-          </p:cNvPr>
-          <p:cNvSpPr>
-            <a:spLocks xmlns:a="http://schemas.openxmlformats.org/drawingml/2006/main" noGrp="1"/>
-          </p:cNvSpPr>
-          <p:nvPr/>
-        </p:nvSpPr>
-        <p:spPr>
-          <a:xfrm xmlns:a="http://schemas.openxmlformats.org/drawingml/2006/main">
-            <a:off x="4000500" y="2581275"/>
-            <a:ext cx="133350" cy="142875"/>
-          </a:xfrm>
-          <a:prstGeom xmlns:a="http://schemas.openxmlformats.org/drawingml/2006/main" prst="triangle">
-            <a:avLst/>
-          </a:prstGeom>
-          <a:solidFill xmlns:a="http://schemas.openxmlformats.org/drawingml/2006/main">
-            <a:srgbClr val="0F9D8A"/>
-          </a:solidFill>
-          <a:ln xmlns:a="http://schemas.openxmlformats.org/drawingml/2006/main" w="0">
-            <a:solidFill>
-              <a:srgbClr val="0F9D8A"/>
-            </a:solidFill>
-          </a:ln>
-        </p:spPr>
-      </p:sp>
-      <p:sp>
-        <p:nvSpPr>
-          <p:cNvPr id="17" name="">
-            <a:extLst xmlns:a="http://schemas.openxmlformats.org/drawingml/2006/main">
-              <a:ext uri="{FF2B5EF4-FFF2-40B4-BE49-F238E27FC236}">
-                <a16:creationId xmlns:a16="http://schemas.microsoft.com/office/drawing/2014/main" id="{56239B20-1A00-4693-838E-B106BE2C725F}"/>
-              </a:ext>
-            </a:extLst>
-          </p:cNvPr>
-          <p:cNvSpPr>
-            <a:spLocks xmlns:a="http://schemas.openxmlformats.org/drawingml/2006/main" noGrp="1"/>
-          </p:cNvSpPr>
-          <p:nvPr/>
-        </p:nvSpPr>
-        <p:spPr>
-          <a:xfrm xmlns:a="http://schemas.openxmlformats.org/drawingml/2006/main">
-            <a:off x="4267200" y="2343150"/>
-            <a:ext cx="590550" cy="590550"/>
-          </a:xfrm>
-          <a:prstGeom xmlns:a="http://schemas.openxmlformats.org/drawingml/2006/main" prst="roundRect">
-            <a:avLst>
-              <a:gd name="adj" fmla="val 11290"/>
-            </a:avLst>
-          </a:prstGeom>
-          <a:solidFill xmlns:a="http://schemas.openxmlformats.org/drawingml/2006/main">
-            <a:srgbClr val="EAF2FF"/>
-          </a:solidFill>
-          <a:ln xmlns:a="http://schemas.openxmlformats.org/drawingml/2006/main" w="9525">
-            <a:solidFill>
-              <a:srgbClr val="EAF2FF"/>
-            </a:solidFill>
-            <a:prstDash val="solid"/>
-          </a:ln>
-        </p:spPr>
-      </p:sp>
-      <p:sp>
-        <p:nvSpPr>
-          <p:cNvPr id="18" name="">
-            <a:extLst xmlns:a="http://schemas.openxmlformats.org/drawingml/2006/main">
-              <a:ext uri="{FF2B5EF4-FFF2-40B4-BE49-F238E27FC236}">
-                <a16:creationId xmlns:a16="http://schemas.microsoft.com/office/drawing/2014/main" id="{69CFCF19-64C2-494C-AF84-03BD20E404A1}"/>
-              </a:ext>
-            </a:extLst>
-          </p:cNvPr>
-          <p:cNvSpPr>
-            <a:spLocks xmlns:a="http://schemas.openxmlformats.org/drawingml/2006/main" noGrp="1"/>
-          </p:cNvSpPr>
-          <p:nvPr/>
-        </p:nvSpPr>
-        <p:spPr>
-          <a:xfrm xmlns:a="http://schemas.openxmlformats.org/drawingml/2006/main">
-            <a:off x="4343400" y="2505075"/>
-            <a:ext cx="438150" cy="19050"/>
+                <a16:creationId xmlns:a16="http://schemas.microsoft.com/office/drawing/2014/main" id="{DBBBF404-EB6C-4BBD-8F97-905706F056ED}"/>
+              </a:ext>
+            </a:extLst>
+          </p:cNvPr>
+          <p:cNvSpPr>
+            <a:spLocks xmlns:a="http://schemas.openxmlformats.org/drawingml/2006/main" noGrp="1"/>
+          </p:cNvSpPr>
+          <p:nvPr/>
+        </p:nvSpPr>
+        <p:spPr>
+          <a:xfrm xmlns:a="http://schemas.openxmlformats.org/drawingml/2006/main">
+            <a:off x="1638300" y="2533650"/>
+            <a:ext cx="19050" cy="533400"/>
           </a:xfrm>
           <a:prstGeom xmlns:a="http://schemas.openxmlformats.org/drawingml/2006/main" prst="rect">
             <a:avLst/>
@@ -16262,22 +15994,364 @@
       </p:sp>
       <p:sp>
         <p:nvSpPr>
-          <p:cNvPr id="19" name="">
-            <a:extLst xmlns:a="http://schemas.openxmlformats.org/drawingml/2006/main">
-              <a:ext uri="{FF2B5EF4-FFF2-40B4-BE49-F238E27FC236}">
-                <a16:creationId xmlns:a16="http://schemas.microsoft.com/office/drawing/2014/main" id="{9ED26E0D-D898-4B11-BD84-3E6A03769495}"/>
-              </a:ext>
-            </a:extLst>
-          </p:cNvPr>
-          <p:cNvSpPr>
-            <a:spLocks xmlns:a="http://schemas.openxmlformats.org/drawingml/2006/main" noGrp="1"/>
-          </p:cNvSpPr>
-          <p:nvPr/>
-        </p:nvSpPr>
-        <p:spPr>
-          <a:xfrm xmlns:a="http://schemas.openxmlformats.org/drawingml/2006/main">
-            <a:off x="4343400" y="2638425"/>
-            <a:ext cx="438150" cy="19050"/>
+          <p:cNvPr id="12" name="">
+            <a:extLst xmlns:a="http://schemas.openxmlformats.org/drawingml/2006/main">
+              <a:ext uri="{FF2B5EF4-FFF2-40B4-BE49-F238E27FC236}">
+                <a16:creationId xmlns:a16="http://schemas.microsoft.com/office/drawing/2014/main" id="{2DD5D35A-DE4A-4923-BF86-55EFABF5A66C}"/>
+              </a:ext>
+            </a:extLst>
+          </p:cNvPr>
+          <p:cNvSpPr>
+            <a:spLocks xmlns:a="http://schemas.openxmlformats.org/drawingml/2006/main" noGrp="1"/>
+          </p:cNvSpPr>
+          <p:nvPr/>
+        </p:nvSpPr>
+        <p:spPr>
+          <a:xfrm xmlns:a="http://schemas.openxmlformats.org/drawingml/2006/main">
+            <a:off x="1143000" y="3171825"/>
+            <a:ext cx="762000" cy="171450"/>
+          </a:xfrm>
+          <a:prstGeom xmlns:a="http://schemas.openxmlformats.org/drawingml/2006/main" prst="rect">
+            <a:avLst/>
+          </a:prstGeom>
+          <a:noFill xmlns:a="http://schemas.openxmlformats.org/drawingml/2006/main"/>
+          <a:ln xmlns:a="http://schemas.openxmlformats.org/drawingml/2006/main" w="0">
+            <a:noFill/>
+          </a:ln>
+        </p:spPr>
+        <p:txBody>
+          <a:bodyPr xmlns:a="http://schemas.openxmlformats.org/drawingml/2006/main">
+            <a:noAutofit/>
+          </a:bodyPr>
+          <a:lstStyle xmlns:a="http://schemas.openxmlformats.org/drawingml/2006/main">
+            <a:defPPr algn="ctr">
+              <a:defRPr sz="1200" b="0">
+                <a:solidFill>
+                  <a:srgbClr val="596273"/>
+                </a:solidFill>
+                <a:latin typeface="Arial"/>
+                <a:ea typeface="Arial"/>
+                <a:cs typeface="Arial"/>
+              </a:defRPr>
+            </a:defPPr>
+          </a:lstStyle>
+          <a:p xmlns:a="http://schemas.openxmlformats.org/drawingml/2006/main">
+            <a:pPr algn="ctr">
+              <a:defRPr sz="1200" b="0">
+                <a:solidFill>
+                  <a:srgbClr val="596273"/>
+                </a:solidFill>
+                <a:latin typeface="Arial"/>
+                <a:ea typeface="Arial"/>
+                <a:cs typeface="Arial"/>
+              </a:defRPr>
+            </a:pPr>
+            <a:r>
+              <a:rPr sz="1200" b="0">
+                <a:solidFill>
+                  <a:srgbClr val="596273"/>
+                </a:solidFill>
+                <a:latin typeface="Arial"/>
+                <a:ea typeface="Arial"/>
+                <a:cs typeface="Arial"/>
+              </a:rPr>
+              <a:t>C1</a:t>
+            </a:r>
+          </a:p>
+        </p:txBody>
+      </p:sp>
+      <p:sp>
+        <p:nvSpPr>
+          <p:cNvPr id="13" name="">
+            <a:extLst xmlns:a="http://schemas.openxmlformats.org/drawingml/2006/main">
+              <a:ext uri="{FF2B5EF4-FFF2-40B4-BE49-F238E27FC236}">
+                <a16:creationId xmlns:a16="http://schemas.microsoft.com/office/drawing/2014/main" id="{75B6E19E-D5F2-4915-8CCE-40E39AAEC264}"/>
+              </a:ext>
+            </a:extLst>
+          </p:cNvPr>
+          <p:cNvSpPr>
+            <a:spLocks xmlns:a="http://schemas.openxmlformats.org/drawingml/2006/main" noGrp="1"/>
+          </p:cNvSpPr>
+          <p:nvPr/>
+        </p:nvSpPr>
+        <p:spPr>
+          <a:xfrm xmlns:a="http://schemas.openxmlformats.org/drawingml/2006/main">
+            <a:off x="2057400" y="2628900"/>
+            <a:ext cx="342900" cy="342900"/>
+          </a:xfrm>
+          <a:prstGeom xmlns:a="http://schemas.openxmlformats.org/drawingml/2006/main" prst="rect">
+            <a:avLst/>
+          </a:prstGeom>
+          <a:noFill xmlns:a="http://schemas.openxmlformats.org/drawingml/2006/main"/>
+          <a:ln xmlns:a="http://schemas.openxmlformats.org/drawingml/2006/main" w="0">
+            <a:noFill/>
+          </a:ln>
+        </p:spPr>
+        <p:txBody>
+          <a:bodyPr xmlns:a="http://schemas.openxmlformats.org/drawingml/2006/main">
+            <a:noAutofit/>
+          </a:bodyPr>
+          <a:lstStyle xmlns:a="http://schemas.openxmlformats.org/drawingml/2006/main">
+            <a:defPPr algn="ctr">
+              <a:defRPr sz="1800" b="0">
+                <a:solidFill>
+                  <a:srgbClr val="111827"/>
+                </a:solidFill>
+                <a:latin typeface="Arial"/>
+                <a:ea typeface="Arial"/>
+                <a:cs typeface="Arial"/>
+              </a:defRPr>
+            </a:defPPr>
+          </a:lstStyle>
+          <a:p xmlns:a="http://schemas.openxmlformats.org/drawingml/2006/main">
+            <a:pPr algn="ctr">
+              <a:defRPr sz="1800" b="0">
+                <a:solidFill>
+                  <a:srgbClr val="111827"/>
+                </a:solidFill>
+                <a:latin typeface="Arial"/>
+                <a:ea typeface="Arial"/>
+                <a:cs typeface="Arial"/>
+              </a:defRPr>
+            </a:pPr>
+            <a:r>
+              <a:rPr sz="1800" b="0">
+                <a:solidFill>
+                  <a:srgbClr val="111827"/>
+                </a:solidFill>
+                <a:latin typeface="Arial"/>
+                <a:ea typeface="Arial"/>
+                <a:cs typeface="Arial"/>
+              </a:rPr>
+              <a:t>→</a:t>
+            </a:r>
+          </a:p>
+        </p:txBody>
+      </p:sp>
+      <p:sp>
+        <p:nvSpPr>
+          <p:cNvPr id="14" name="">
+            <a:extLst xmlns:a="http://schemas.openxmlformats.org/drawingml/2006/main">
+              <a:ext uri="{FF2B5EF4-FFF2-40B4-BE49-F238E27FC236}">
+                <a16:creationId xmlns:a16="http://schemas.microsoft.com/office/drawing/2014/main" id="{1D60B37B-F5DB-48AD-B1A3-25CC6E0E9AF6}"/>
+              </a:ext>
+            </a:extLst>
+          </p:cNvPr>
+          <p:cNvSpPr>
+            <a:spLocks xmlns:a="http://schemas.openxmlformats.org/drawingml/2006/main" noGrp="1"/>
+          </p:cNvSpPr>
+          <p:nvPr/>
+        </p:nvSpPr>
+        <p:spPr>
+          <a:xfrm xmlns:a="http://schemas.openxmlformats.org/drawingml/2006/main">
+            <a:off x="2476500" y="2543175"/>
+            <a:ext cx="914400" cy="514350"/>
+          </a:xfrm>
+          <a:prstGeom xmlns:a="http://schemas.openxmlformats.org/drawingml/2006/main" prst="roundRect">
+            <a:avLst>
+              <a:gd name="adj" fmla="val 12963"/>
+            </a:avLst>
+          </a:prstGeom>
+          <a:solidFill xmlns:a="http://schemas.openxmlformats.org/drawingml/2006/main">
+            <a:srgbClr val="E7F7F4"/>
+          </a:solidFill>
+          <a:ln xmlns:a="http://schemas.openxmlformats.org/drawingml/2006/main" w="9525">
+            <a:solidFill>
+              <a:srgbClr val="0F9D8A"/>
+            </a:solidFill>
+            <a:prstDash val="solid"/>
+          </a:ln>
+        </p:spPr>
+      </p:sp>
+      <p:sp>
+        <p:nvSpPr>
+          <p:cNvPr id="15" name="">
+            <a:extLst xmlns:a="http://schemas.openxmlformats.org/drawingml/2006/main">
+              <a:ext uri="{FF2B5EF4-FFF2-40B4-BE49-F238E27FC236}">
+                <a16:creationId xmlns:a16="http://schemas.microsoft.com/office/drawing/2014/main" id="{7621C941-370A-4118-86CA-645AA2FF1909}"/>
+              </a:ext>
+            </a:extLst>
+          </p:cNvPr>
+          <p:cNvSpPr>
+            <a:spLocks xmlns:a="http://schemas.openxmlformats.org/drawingml/2006/main" noGrp="1"/>
+          </p:cNvSpPr>
+          <p:nvPr/>
+        </p:nvSpPr>
+        <p:spPr>
+          <a:xfrm xmlns:a="http://schemas.openxmlformats.org/drawingml/2006/main">
+            <a:off x="2571750" y="2686050"/>
+            <a:ext cx="723900" cy="228600"/>
+          </a:xfrm>
+          <a:prstGeom xmlns:a="http://schemas.openxmlformats.org/drawingml/2006/main" prst="rect">
+            <a:avLst/>
+          </a:prstGeom>
+          <a:noFill xmlns:a="http://schemas.openxmlformats.org/drawingml/2006/main"/>
+          <a:ln xmlns:a="http://schemas.openxmlformats.org/drawingml/2006/main" w="0">
+            <a:noFill/>
+          </a:ln>
+        </p:spPr>
+        <p:txBody>
+          <a:bodyPr xmlns:a="http://schemas.openxmlformats.org/drawingml/2006/main">
+            <a:noAutofit/>
+          </a:bodyPr>
+          <a:lstStyle xmlns:a="http://schemas.openxmlformats.org/drawingml/2006/main">
+            <a:defPPr algn="ctr">
+              <a:defRPr sz="1800" b="0">
+                <a:solidFill>
+                  <a:srgbClr val="111827"/>
+                </a:solidFill>
+                <a:latin typeface="Arial"/>
+                <a:ea typeface="Arial"/>
+                <a:cs typeface="Arial"/>
+              </a:defRPr>
+            </a:defPPr>
+          </a:lstStyle>
+          <a:p xmlns:a="http://schemas.openxmlformats.org/drawingml/2006/main">
+            <a:pPr algn="ctr">
+              <a:defRPr sz="1800" b="0">
+                <a:solidFill>
+                  <a:srgbClr val="111827"/>
+                </a:solidFill>
+                <a:latin typeface="Arial"/>
+                <a:ea typeface="Arial"/>
+                <a:cs typeface="Arial"/>
+              </a:defRPr>
+            </a:pPr>
+            <a:r>
+              <a:rPr sz="1800" b="0">
+                <a:solidFill>
+                  <a:srgbClr val="111827"/>
+                </a:solidFill>
+                <a:latin typeface="Arial"/>
+                <a:ea typeface="Arial"/>
+                <a:cs typeface="Arial"/>
+              </a:rPr>
+              <a:t>3×3 #1</a:t>
+            </a:r>
+          </a:p>
+        </p:txBody>
+      </p:sp>
+      <p:sp>
+        <p:nvSpPr>
+          <p:cNvPr id="16" name="">
+            <a:extLst xmlns:a="http://schemas.openxmlformats.org/drawingml/2006/main">
+              <a:ext uri="{FF2B5EF4-FFF2-40B4-BE49-F238E27FC236}">
+                <a16:creationId xmlns:a16="http://schemas.microsoft.com/office/drawing/2014/main" id="{D943C622-0972-4B03-A1B8-4443A49AFB45}"/>
+              </a:ext>
+            </a:extLst>
+          </p:cNvPr>
+          <p:cNvSpPr>
+            <a:spLocks xmlns:a="http://schemas.openxmlformats.org/drawingml/2006/main" noGrp="1"/>
+          </p:cNvSpPr>
+          <p:nvPr/>
+        </p:nvSpPr>
+        <p:spPr>
+          <a:xfrm xmlns:a="http://schemas.openxmlformats.org/drawingml/2006/main">
+            <a:off x="3524250" y="2628900"/>
+            <a:ext cx="342900" cy="342900"/>
+          </a:xfrm>
+          <a:prstGeom xmlns:a="http://schemas.openxmlformats.org/drawingml/2006/main" prst="rect">
+            <a:avLst/>
+          </a:prstGeom>
+          <a:noFill xmlns:a="http://schemas.openxmlformats.org/drawingml/2006/main"/>
+          <a:ln xmlns:a="http://schemas.openxmlformats.org/drawingml/2006/main" w="0">
+            <a:noFill/>
+          </a:ln>
+        </p:spPr>
+        <p:txBody>
+          <a:bodyPr xmlns:a="http://schemas.openxmlformats.org/drawingml/2006/main">
+            <a:noAutofit/>
+          </a:bodyPr>
+          <a:lstStyle xmlns:a="http://schemas.openxmlformats.org/drawingml/2006/main">
+            <a:defPPr algn="ctr">
+              <a:defRPr sz="1800" b="0">
+                <a:solidFill>
+                  <a:srgbClr val="111827"/>
+                </a:solidFill>
+                <a:latin typeface="Arial"/>
+                <a:ea typeface="Arial"/>
+                <a:cs typeface="Arial"/>
+              </a:defRPr>
+            </a:defPPr>
+          </a:lstStyle>
+          <a:p xmlns:a="http://schemas.openxmlformats.org/drawingml/2006/main">
+            <a:pPr algn="ctr">
+              <a:defRPr sz="1800" b="0">
+                <a:solidFill>
+                  <a:srgbClr val="111827"/>
+                </a:solidFill>
+                <a:latin typeface="Arial"/>
+                <a:ea typeface="Arial"/>
+                <a:cs typeface="Arial"/>
+              </a:defRPr>
+            </a:pPr>
+            <a:r>
+              <a:rPr sz="1800" b="0">
+                <a:solidFill>
+                  <a:srgbClr val="111827"/>
+                </a:solidFill>
+                <a:latin typeface="Arial"/>
+                <a:ea typeface="Arial"/>
+                <a:cs typeface="Arial"/>
+              </a:rPr>
+              <a:t>→</a:t>
+            </a:r>
+          </a:p>
+        </p:txBody>
+      </p:sp>
+      <p:sp>
+        <p:nvSpPr>
+          <p:cNvPr id="17" name="">
+            <a:extLst xmlns:a="http://schemas.openxmlformats.org/drawingml/2006/main">
+              <a:ext uri="{FF2B5EF4-FFF2-40B4-BE49-F238E27FC236}">
+                <a16:creationId xmlns:a16="http://schemas.microsoft.com/office/drawing/2014/main" id="{6FC40CB7-6C31-4A22-B790-EC7107046A46}"/>
+              </a:ext>
+            </a:extLst>
+          </p:cNvPr>
+          <p:cNvSpPr>
+            <a:spLocks xmlns:a="http://schemas.openxmlformats.org/drawingml/2006/main" noGrp="1"/>
+          </p:cNvSpPr>
+          <p:nvPr/>
+        </p:nvSpPr>
+        <p:spPr>
+          <a:xfrm xmlns:a="http://schemas.openxmlformats.org/drawingml/2006/main">
+            <a:off x="3943350" y="2457450"/>
+            <a:ext cx="762000" cy="685800"/>
+          </a:xfrm>
+          <a:prstGeom xmlns:a="http://schemas.openxmlformats.org/drawingml/2006/main" prst="roundRect">
+            <a:avLst>
+              <a:gd name="adj" fmla="val 9722"/>
+            </a:avLst>
+          </a:prstGeom>
+          <a:solidFill xmlns:a="http://schemas.openxmlformats.org/drawingml/2006/main">
+            <a:srgbClr val="EAF2FF"/>
+          </a:solidFill>
+          <a:ln xmlns:a="http://schemas.openxmlformats.org/drawingml/2006/main" w="9525">
+            <a:solidFill>
+              <a:srgbClr val="E5E1D8"/>
+            </a:solidFill>
+            <a:prstDash val="solid"/>
+          </a:ln>
+        </p:spPr>
+      </p:sp>
+      <p:sp>
+        <p:nvSpPr>
+          <p:cNvPr id="18" name="">
+            <a:extLst xmlns:a="http://schemas.openxmlformats.org/drawingml/2006/main">
+              <a:ext uri="{FF2B5EF4-FFF2-40B4-BE49-F238E27FC236}">
+                <a16:creationId xmlns:a16="http://schemas.microsoft.com/office/drawing/2014/main" id="{318EC2F9-E325-4C1B-8CC9-87C76E549540}"/>
+              </a:ext>
+            </a:extLst>
+          </p:cNvPr>
+          <p:cNvSpPr>
+            <a:spLocks xmlns:a="http://schemas.openxmlformats.org/drawingml/2006/main" noGrp="1"/>
+          </p:cNvSpPr>
+          <p:nvPr/>
+        </p:nvSpPr>
+        <p:spPr>
+          <a:xfrm xmlns:a="http://schemas.openxmlformats.org/drawingml/2006/main">
+            <a:off x="4029075" y="2686050"/>
+            <a:ext cx="590550" cy="19050"/>
           </a:xfrm>
           <a:prstGeom xmlns:a="http://schemas.openxmlformats.org/drawingml/2006/main" prst="rect">
             <a:avLst/>
@@ -16295,22 +16369,22 @@
       </p:sp>
       <p:sp>
         <p:nvSpPr>
-          <p:cNvPr id="20" name="">
-            <a:extLst xmlns:a="http://schemas.openxmlformats.org/drawingml/2006/main">
-              <a:ext uri="{FF2B5EF4-FFF2-40B4-BE49-F238E27FC236}">
-                <a16:creationId xmlns:a16="http://schemas.microsoft.com/office/drawing/2014/main" id="{A06C94FA-012B-45DD-A767-6A376BB2ED9C}"/>
-              </a:ext>
-            </a:extLst>
-          </p:cNvPr>
-          <p:cNvSpPr>
-            <a:spLocks xmlns:a="http://schemas.openxmlformats.org/drawingml/2006/main" noGrp="1"/>
-          </p:cNvSpPr>
-          <p:nvPr/>
-        </p:nvSpPr>
-        <p:spPr>
-          <a:xfrm xmlns:a="http://schemas.openxmlformats.org/drawingml/2006/main">
-            <a:off x="4343400" y="2771775"/>
-            <a:ext cx="438150" cy="19050"/>
+          <p:cNvPr id="19" name="">
+            <a:extLst xmlns:a="http://schemas.openxmlformats.org/drawingml/2006/main">
+              <a:ext uri="{FF2B5EF4-FFF2-40B4-BE49-F238E27FC236}">
+                <a16:creationId xmlns:a16="http://schemas.microsoft.com/office/drawing/2014/main" id="{45EFE79E-B015-4066-84FE-EE2A4C17DAAA}"/>
+              </a:ext>
+            </a:extLst>
+          </p:cNvPr>
+          <p:cNvSpPr>
+            <a:spLocks xmlns:a="http://schemas.openxmlformats.org/drawingml/2006/main" noGrp="1"/>
+          </p:cNvSpPr>
+          <p:nvPr/>
+        </p:nvSpPr>
+        <p:spPr>
+          <a:xfrm xmlns:a="http://schemas.openxmlformats.org/drawingml/2006/main">
+            <a:off x="4029075" y="2914650"/>
+            <a:ext cx="590550" cy="19050"/>
           </a:xfrm>
           <a:prstGeom xmlns:a="http://schemas.openxmlformats.org/drawingml/2006/main" prst="rect">
             <a:avLst/>
@@ -16328,125 +16402,22 @@
       </p:sp>
       <p:sp>
         <p:nvSpPr>
-          <p:cNvPr id="21" name="">
-            <a:extLst xmlns:a="http://schemas.openxmlformats.org/drawingml/2006/main">
-              <a:ext uri="{FF2B5EF4-FFF2-40B4-BE49-F238E27FC236}">
-                <a16:creationId xmlns:a16="http://schemas.microsoft.com/office/drawing/2014/main" id="{A272BE5E-3738-4041-BDA5-F59A95399B9B}"/>
-              </a:ext>
-            </a:extLst>
-          </p:cNvPr>
-          <p:cNvSpPr>
-            <a:spLocks xmlns:a="http://schemas.openxmlformats.org/drawingml/2006/main" noGrp="1"/>
-          </p:cNvSpPr>
-          <p:nvPr/>
-        </p:nvSpPr>
-        <p:spPr>
-          <a:xfrm xmlns:a="http://schemas.openxmlformats.org/drawingml/2006/main">
-            <a:off x="4267200" y="3009900"/>
-            <a:ext cx="590550" cy="190500"/>
-          </a:xfrm>
-          <a:prstGeom xmlns:a="http://schemas.openxmlformats.org/drawingml/2006/main" prst="rect">
-            <a:avLst/>
-          </a:prstGeom>
-          <a:noFill xmlns:a="http://schemas.openxmlformats.org/drawingml/2006/main"/>
-          <a:ln xmlns:a="http://schemas.openxmlformats.org/drawingml/2006/main" w="0">
-            <a:noFill/>
-          </a:ln>
-        </p:spPr>
-        <p:txBody>
-          <a:bodyPr xmlns:a="http://schemas.openxmlformats.org/drawingml/2006/main">
-            <a:noAutofit/>
-          </a:bodyPr>
-          <a:lstStyle xmlns:a="http://schemas.openxmlformats.org/drawingml/2006/main">
-            <a:defPPr algn="ctr">
-              <a:defRPr sz="1200" b="0">
-                <a:solidFill>
-                  <a:srgbClr val="596273"/>
-                </a:solidFill>
-                <a:latin typeface="Arial"/>
-                <a:ea typeface="Arial"/>
-                <a:cs typeface="Arial"/>
-              </a:defRPr>
-            </a:defPPr>
-          </a:lstStyle>
-          <a:p xmlns:a="http://schemas.openxmlformats.org/drawingml/2006/main">
-            <a:pPr algn="ctr">
-              <a:defRPr sz="1200" b="0">
-                <a:solidFill>
-                  <a:srgbClr val="596273"/>
-                </a:solidFill>
-                <a:latin typeface="Arial"/>
-                <a:ea typeface="Arial"/>
-                <a:cs typeface="Arial"/>
-              </a:defRPr>
-            </a:pPr>
-            <a:r>
-              <a:rPr sz="1200" b="0">
-                <a:solidFill>
-                  <a:srgbClr val="596273"/>
-                </a:solidFill>
-                <a:latin typeface="Arial"/>
-                <a:ea typeface="Arial"/>
-                <a:cs typeface="Arial"/>
-              </a:rPr>
-              <a:t>C1</a:t>
-            </a:r>
-          </a:p>
-        </p:txBody>
-      </p:sp>
-      <p:sp>
-        <p:nvSpPr>
-          <p:cNvPr id="22" name="">
-            <a:extLst xmlns:a="http://schemas.openxmlformats.org/drawingml/2006/main">
-              <a:ext uri="{FF2B5EF4-FFF2-40B4-BE49-F238E27FC236}">
-                <a16:creationId xmlns:a16="http://schemas.microsoft.com/office/drawing/2014/main" id="{70CD008E-9C2E-41C3-B6DE-6134647C5E20}"/>
-              </a:ext>
-            </a:extLst>
-          </p:cNvPr>
-          <p:cNvSpPr>
-            <a:spLocks xmlns:a="http://schemas.openxmlformats.org/drawingml/2006/main" noGrp="1"/>
-          </p:cNvSpPr>
-          <p:nvPr/>
-        </p:nvSpPr>
-        <p:spPr>
-          <a:xfrm xmlns:a="http://schemas.openxmlformats.org/drawingml/2006/main">
-            <a:off x="895350" y="3257550"/>
-            <a:ext cx="590550" cy="590550"/>
-          </a:xfrm>
-          <a:prstGeom xmlns:a="http://schemas.openxmlformats.org/drawingml/2006/main" prst="roundRect">
-            <a:avLst>
-              <a:gd name="adj" fmla="val 11290"/>
-            </a:avLst>
-          </a:prstGeom>
-          <a:solidFill xmlns:a="http://schemas.openxmlformats.org/drawingml/2006/main">
-            <a:srgbClr val="F0EAFE"/>
-          </a:solidFill>
-          <a:ln xmlns:a="http://schemas.openxmlformats.org/drawingml/2006/main" w="9525">
-            <a:solidFill>
-              <a:srgbClr val="F0EAFE"/>
-            </a:solidFill>
-            <a:prstDash val="solid"/>
-          </a:ln>
-        </p:spPr>
-      </p:sp>
-      <p:sp>
-        <p:nvSpPr>
-          <p:cNvPr id="23" name="">
-            <a:extLst xmlns:a="http://schemas.openxmlformats.org/drawingml/2006/main">
-              <a:ext uri="{FF2B5EF4-FFF2-40B4-BE49-F238E27FC236}">
-                <a16:creationId xmlns:a16="http://schemas.microsoft.com/office/drawing/2014/main" id="{80F946B1-6F27-4319-9A02-AAE8758C5B2E}"/>
-              </a:ext>
-            </a:extLst>
-          </p:cNvPr>
-          <p:cNvSpPr>
-            <a:spLocks xmlns:a="http://schemas.openxmlformats.org/drawingml/2006/main" noGrp="1"/>
-          </p:cNvSpPr>
-          <p:nvPr/>
-        </p:nvSpPr>
-        <p:spPr>
-          <a:xfrm xmlns:a="http://schemas.openxmlformats.org/drawingml/2006/main">
-            <a:off x="971550" y="3419475"/>
-            <a:ext cx="438150" cy="19050"/>
+          <p:cNvPr id="20" name="">
+            <a:extLst xmlns:a="http://schemas.openxmlformats.org/drawingml/2006/main">
+              <a:ext uri="{FF2B5EF4-FFF2-40B4-BE49-F238E27FC236}">
+                <a16:creationId xmlns:a16="http://schemas.microsoft.com/office/drawing/2014/main" id="{6486E3FB-8C22-41A6-A07C-800439579053}"/>
+              </a:ext>
+            </a:extLst>
+          </p:cNvPr>
+          <p:cNvSpPr>
+            <a:spLocks xmlns:a="http://schemas.openxmlformats.org/drawingml/2006/main" noGrp="1"/>
+          </p:cNvSpPr>
+          <p:nvPr/>
+        </p:nvSpPr>
+        <p:spPr>
+          <a:xfrm xmlns:a="http://schemas.openxmlformats.org/drawingml/2006/main">
+            <a:off x="4191000" y="2533650"/>
+            <a:ext cx="19050" cy="533400"/>
           </a:xfrm>
           <a:prstGeom xmlns:a="http://schemas.openxmlformats.org/drawingml/2006/main" prst="rect">
             <a:avLst/>
@@ -16464,22 +16435,22 @@
       </p:sp>
       <p:sp>
         <p:nvSpPr>
-          <p:cNvPr id="24" name="">
-            <a:extLst xmlns:a="http://schemas.openxmlformats.org/drawingml/2006/main">
-              <a:ext uri="{FF2B5EF4-FFF2-40B4-BE49-F238E27FC236}">
-                <a16:creationId xmlns:a16="http://schemas.microsoft.com/office/drawing/2014/main" id="{579EADFD-A6F2-4D48-90DA-DD95EA2FEA09}"/>
-              </a:ext>
-            </a:extLst>
-          </p:cNvPr>
-          <p:cNvSpPr>
-            <a:spLocks xmlns:a="http://schemas.openxmlformats.org/drawingml/2006/main" noGrp="1"/>
-          </p:cNvSpPr>
-          <p:nvPr/>
-        </p:nvSpPr>
-        <p:spPr>
-          <a:xfrm xmlns:a="http://schemas.openxmlformats.org/drawingml/2006/main">
-            <a:off x="971550" y="3552825"/>
-            <a:ext cx="438150" cy="19050"/>
+          <p:cNvPr id="21" name="">
+            <a:extLst xmlns:a="http://schemas.openxmlformats.org/drawingml/2006/main">
+              <a:ext uri="{FF2B5EF4-FFF2-40B4-BE49-F238E27FC236}">
+                <a16:creationId xmlns:a16="http://schemas.microsoft.com/office/drawing/2014/main" id="{83B174DB-A96D-4873-9ED6-FCD61F33E719}"/>
+              </a:ext>
+            </a:extLst>
+          </p:cNvPr>
+          <p:cNvSpPr>
+            <a:spLocks xmlns:a="http://schemas.openxmlformats.org/drawingml/2006/main" noGrp="1"/>
+          </p:cNvSpPr>
+          <p:nvPr/>
+        </p:nvSpPr>
+        <p:spPr>
+          <a:xfrm xmlns:a="http://schemas.openxmlformats.org/drawingml/2006/main">
+            <a:off x="4438650" y="2533650"/>
+            <a:ext cx="19050" cy="533400"/>
           </a:xfrm>
           <a:prstGeom xmlns:a="http://schemas.openxmlformats.org/drawingml/2006/main" prst="rect">
             <a:avLst/>
@@ -16497,22 +16468,125 @@
       </p:sp>
       <p:sp>
         <p:nvSpPr>
-          <p:cNvPr id="25" name="">
-            <a:extLst xmlns:a="http://schemas.openxmlformats.org/drawingml/2006/main">
-              <a:ext uri="{FF2B5EF4-FFF2-40B4-BE49-F238E27FC236}">
-                <a16:creationId xmlns:a16="http://schemas.microsoft.com/office/drawing/2014/main" id="{0E009BF3-D23A-4522-AEB5-569787FDFECD}"/>
-              </a:ext>
-            </a:extLst>
-          </p:cNvPr>
-          <p:cNvSpPr>
-            <a:spLocks xmlns:a="http://schemas.openxmlformats.org/drawingml/2006/main" noGrp="1"/>
-          </p:cNvSpPr>
-          <p:nvPr/>
-        </p:nvSpPr>
-        <p:spPr>
-          <a:xfrm xmlns:a="http://schemas.openxmlformats.org/drawingml/2006/main">
-            <a:off x="971550" y="3686175"/>
-            <a:ext cx="438150" cy="19050"/>
+          <p:cNvPr id="22" name="">
+            <a:extLst xmlns:a="http://schemas.openxmlformats.org/drawingml/2006/main">
+              <a:ext uri="{FF2B5EF4-FFF2-40B4-BE49-F238E27FC236}">
+                <a16:creationId xmlns:a16="http://schemas.microsoft.com/office/drawing/2014/main" id="{BE86838D-F246-49D9-B888-1099F33E2912}"/>
+              </a:ext>
+            </a:extLst>
+          </p:cNvPr>
+          <p:cNvSpPr>
+            <a:spLocks xmlns:a="http://schemas.openxmlformats.org/drawingml/2006/main" noGrp="1"/>
+          </p:cNvSpPr>
+          <p:nvPr/>
+        </p:nvSpPr>
+        <p:spPr>
+          <a:xfrm xmlns:a="http://schemas.openxmlformats.org/drawingml/2006/main">
+            <a:off x="3943350" y="3171825"/>
+            <a:ext cx="762000" cy="171450"/>
+          </a:xfrm>
+          <a:prstGeom xmlns:a="http://schemas.openxmlformats.org/drawingml/2006/main" prst="rect">
+            <a:avLst/>
+          </a:prstGeom>
+          <a:noFill xmlns:a="http://schemas.openxmlformats.org/drawingml/2006/main"/>
+          <a:ln xmlns:a="http://schemas.openxmlformats.org/drawingml/2006/main" w="0">
+            <a:noFill/>
+          </a:ln>
+        </p:spPr>
+        <p:txBody>
+          <a:bodyPr xmlns:a="http://schemas.openxmlformats.org/drawingml/2006/main">
+            <a:noAutofit/>
+          </a:bodyPr>
+          <a:lstStyle xmlns:a="http://schemas.openxmlformats.org/drawingml/2006/main">
+            <a:defPPr algn="ctr">
+              <a:defRPr sz="1200" b="0">
+                <a:solidFill>
+                  <a:srgbClr val="596273"/>
+                </a:solidFill>
+                <a:latin typeface="Arial"/>
+                <a:ea typeface="Arial"/>
+                <a:cs typeface="Arial"/>
+              </a:defRPr>
+            </a:defPPr>
+          </a:lstStyle>
+          <a:p xmlns:a="http://schemas.openxmlformats.org/drawingml/2006/main">
+            <a:pPr algn="ctr">
+              <a:defRPr sz="1200" b="0">
+                <a:solidFill>
+                  <a:srgbClr val="596273"/>
+                </a:solidFill>
+                <a:latin typeface="Arial"/>
+                <a:ea typeface="Arial"/>
+                <a:cs typeface="Arial"/>
+              </a:defRPr>
+            </a:pPr>
+            <a:r>
+              <a:rPr sz="1200" b="0">
+                <a:solidFill>
+                  <a:srgbClr val="596273"/>
+                </a:solidFill>
+                <a:latin typeface="Arial"/>
+                <a:ea typeface="Arial"/>
+                <a:cs typeface="Arial"/>
+              </a:rPr>
+              <a:t>C1</a:t>
+            </a:r>
+          </a:p>
+        </p:txBody>
+      </p:sp>
+      <p:sp>
+        <p:nvSpPr>
+          <p:cNvPr id="23" name="">
+            <a:extLst xmlns:a="http://schemas.openxmlformats.org/drawingml/2006/main">
+              <a:ext uri="{FF2B5EF4-FFF2-40B4-BE49-F238E27FC236}">
+                <a16:creationId xmlns:a16="http://schemas.microsoft.com/office/drawing/2014/main" id="{011677CD-3C3D-4B34-92DD-EF242029FCD9}"/>
+              </a:ext>
+            </a:extLst>
+          </p:cNvPr>
+          <p:cNvSpPr>
+            <a:spLocks xmlns:a="http://schemas.openxmlformats.org/drawingml/2006/main" noGrp="1"/>
+          </p:cNvSpPr>
+          <p:nvPr/>
+        </p:nvSpPr>
+        <p:spPr>
+          <a:xfrm xmlns:a="http://schemas.openxmlformats.org/drawingml/2006/main">
+            <a:off x="1143000" y="3409950"/>
+            <a:ext cx="762000" cy="685800"/>
+          </a:xfrm>
+          <a:prstGeom xmlns:a="http://schemas.openxmlformats.org/drawingml/2006/main" prst="roundRect">
+            <a:avLst>
+              <a:gd name="adj" fmla="val 9722"/>
+            </a:avLst>
+          </a:prstGeom>
+          <a:solidFill xmlns:a="http://schemas.openxmlformats.org/drawingml/2006/main">
+            <a:srgbClr val="F0EAFE"/>
+          </a:solidFill>
+          <a:ln xmlns:a="http://schemas.openxmlformats.org/drawingml/2006/main" w="9525">
+            <a:solidFill>
+              <a:srgbClr val="E5E1D8"/>
+            </a:solidFill>
+            <a:prstDash val="solid"/>
+          </a:ln>
+        </p:spPr>
+      </p:sp>
+      <p:sp>
+        <p:nvSpPr>
+          <p:cNvPr id="24" name="">
+            <a:extLst xmlns:a="http://schemas.openxmlformats.org/drawingml/2006/main">
+              <a:ext uri="{FF2B5EF4-FFF2-40B4-BE49-F238E27FC236}">
+                <a16:creationId xmlns:a16="http://schemas.microsoft.com/office/drawing/2014/main" id="{974065BA-6A69-499B-A7A4-1D61E0A38505}"/>
+              </a:ext>
+            </a:extLst>
+          </p:cNvPr>
+          <p:cNvSpPr>
+            <a:spLocks xmlns:a="http://schemas.openxmlformats.org/drawingml/2006/main" noGrp="1"/>
+          </p:cNvSpPr>
+          <p:nvPr/>
+        </p:nvSpPr>
+        <p:spPr>
+          <a:xfrm xmlns:a="http://schemas.openxmlformats.org/drawingml/2006/main">
+            <a:off x="1228725" y="3638550"/>
+            <a:ext cx="590550" cy="19050"/>
           </a:xfrm>
           <a:prstGeom xmlns:a="http://schemas.openxmlformats.org/drawingml/2006/main" prst="rect">
             <a:avLst/>
@@ -16530,358 +16604,22 @@
       </p:sp>
       <p:sp>
         <p:nvSpPr>
-          <p:cNvPr id="26" name="">
-            <a:extLst xmlns:a="http://schemas.openxmlformats.org/drawingml/2006/main">
-              <a:ext uri="{FF2B5EF4-FFF2-40B4-BE49-F238E27FC236}">
-                <a16:creationId xmlns:a16="http://schemas.microsoft.com/office/drawing/2014/main" id="{683412B5-D29A-4B63-9BE3-54BCC380703D}"/>
-              </a:ext>
-            </a:extLst>
-          </p:cNvPr>
-          <p:cNvSpPr>
-            <a:spLocks xmlns:a="http://schemas.openxmlformats.org/drawingml/2006/main" noGrp="1"/>
-          </p:cNvSpPr>
-          <p:nvPr/>
-        </p:nvSpPr>
-        <p:spPr>
-          <a:xfrm xmlns:a="http://schemas.openxmlformats.org/drawingml/2006/main">
-            <a:off x="895350" y="3924300"/>
-            <a:ext cx="590550" cy="190500"/>
-          </a:xfrm>
-          <a:prstGeom xmlns:a="http://schemas.openxmlformats.org/drawingml/2006/main" prst="rect">
-            <a:avLst/>
-          </a:prstGeom>
-          <a:noFill xmlns:a="http://schemas.openxmlformats.org/drawingml/2006/main"/>
-          <a:ln xmlns:a="http://schemas.openxmlformats.org/drawingml/2006/main" w="0">
-            <a:noFill/>
-          </a:ln>
-        </p:spPr>
-        <p:txBody>
-          <a:bodyPr xmlns:a="http://schemas.openxmlformats.org/drawingml/2006/main">
-            <a:noAutofit/>
-          </a:bodyPr>
-          <a:lstStyle xmlns:a="http://schemas.openxmlformats.org/drawingml/2006/main">
-            <a:defPPr algn="ctr">
-              <a:defRPr sz="1200" b="0">
-                <a:solidFill>
-                  <a:srgbClr val="596273"/>
-                </a:solidFill>
-                <a:latin typeface="Arial"/>
-                <a:ea typeface="Arial"/>
-                <a:cs typeface="Arial"/>
-              </a:defRPr>
-            </a:defPPr>
-          </a:lstStyle>
-          <a:p xmlns:a="http://schemas.openxmlformats.org/drawingml/2006/main">
-            <a:pPr algn="ctr">
-              <a:defRPr sz="1200" b="0">
-                <a:solidFill>
-                  <a:srgbClr val="596273"/>
-                </a:solidFill>
-                <a:latin typeface="Arial"/>
-                <a:ea typeface="Arial"/>
-                <a:cs typeface="Arial"/>
-              </a:defRPr>
-            </a:pPr>
-            <a:r>
-              <a:rPr sz="1200" b="0">
-                <a:solidFill>
-                  <a:srgbClr val="596273"/>
-                </a:solidFill>
-                <a:latin typeface="Arial"/>
-                <a:ea typeface="Arial"/>
-                <a:cs typeface="Arial"/>
-              </a:rPr>
-              <a:t>C2</a:t>
-            </a:r>
-          </a:p>
-        </p:txBody>
-      </p:sp>
-      <p:sp>
-        <p:nvSpPr>
-          <p:cNvPr id="27" name="">
-            <a:extLst xmlns:a="http://schemas.openxmlformats.org/drawingml/2006/main">
-              <a:ext uri="{FF2B5EF4-FFF2-40B4-BE49-F238E27FC236}">
-                <a16:creationId xmlns:a16="http://schemas.microsoft.com/office/drawing/2014/main" id="{F10EB87B-8000-4B5E-A839-E4CB8E95E36B}"/>
-              </a:ext>
-            </a:extLst>
-          </p:cNvPr>
-          <p:cNvSpPr>
-            <a:spLocks xmlns:a="http://schemas.openxmlformats.org/drawingml/2006/main" noGrp="1"/>
-          </p:cNvSpPr>
-          <p:nvPr/>
-        </p:nvSpPr>
-        <p:spPr>
-          <a:xfrm xmlns:a="http://schemas.openxmlformats.org/drawingml/2006/main">
-            <a:off x="1619250" y="3552825"/>
-            <a:ext cx="723900" cy="28575"/>
-          </a:xfrm>
-          <a:prstGeom xmlns:a="http://schemas.openxmlformats.org/drawingml/2006/main" prst="rect">
-            <a:avLst/>
-          </a:prstGeom>
-          <a:solidFill xmlns:a="http://schemas.openxmlformats.org/drawingml/2006/main">
-            <a:srgbClr val="0F9D8A"/>
-          </a:solidFill>
-          <a:ln xmlns:a="http://schemas.openxmlformats.org/drawingml/2006/main" w="9525">
-            <a:solidFill>
-              <a:srgbClr val="0F9D8A"/>
-            </a:solidFill>
-            <a:prstDash val="solid"/>
-          </a:ln>
-        </p:spPr>
-      </p:sp>
-      <p:sp>
-        <p:nvSpPr>
-          <p:cNvPr id="28" name="">
-            <a:extLst xmlns:a="http://schemas.openxmlformats.org/drawingml/2006/main">
-              <a:ext uri="{FF2B5EF4-FFF2-40B4-BE49-F238E27FC236}">
-                <a16:creationId xmlns:a16="http://schemas.microsoft.com/office/drawing/2014/main" id="{606E38C3-6698-4FDC-BC44-B74BEDAF612A}"/>
-              </a:ext>
-            </a:extLst>
-          </p:cNvPr>
-          <p:cNvSpPr>
-            <a:spLocks xmlns:a="http://schemas.openxmlformats.org/drawingml/2006/main" noGrp="1"/>
-          </p:cNvSpPr>
-          <p:nvPr/>
-        </p:nvSpPr>
-        <p:spPr>
-          <a:xfrm xmlns:a="http://schemas.openxmlformats.org/drawingml/2006/main">
-            <a:off x="2266950" y="3495675"/>
-            <a:ext cx="133350" cy="142875"/>
-          </a:xfrm>
-          <a:prstGeom xmlns:a="http://schemas.openxmlformats.org/drawingml/2006/main" prst="triangle">
-            <a:avLst/>
-          </a:prstGeom>
-          <a:solidFill xmlns:a="http://schemas.openxmlformats.org/drawingml/2006/main">
-            <a:srgbClr val="0F9D8A"/>
-          </a:solidFill>
-          <a:ln xmlns:a="http://schemas.openxmlformats.org/drawingml/2006/main" w="0">
-            <a:solidFill>
-              <a:srgbClr val="0F9D8A"/>
-            </a:solidFill>
-          </a:ln>
-        </p:spPr>
-      </p:sp>
-      <p:sp>
-        <p:nvSpPr>
-          <p:cNvPr id="29" name="">
-            <a:extLst xmlns:a="http://schemas.openxmlformats.org/drawingml/2006/main">
-              <a:ext uri="{FF2B5EF4-FFF2-40B4-BE49-F238E27FC236}">
-                <a16:creationId xmlns:a16="http://schemas.microsoft.com/office/drawing/2014/main" id="{E1A891DE-CE64-4939-AA9B-593A68D60C72}"/>
-              </a:ext>
-            </a:extLst>
-          </p:cNvPr>
-          <p:cNvSpPr>
-            <a:spLocks xmlns:a="http://schemas.openxmlformats.org/drawingml/2006/main" noGrp="1"/>
-          </p:cNvSpPr>
-          <p:nvPr/>
-        </p:nvSpPr>
-        <p:spPr>
-          <a:xfrm xmlns:a="http://schemas.openxmlformats.org/drawingml/2006/main">
-            <a:off x="2514600" y="3343275"/>
-            <a:ext cx="685800" cy="419100"/>
-          </a:xfrm>
-          <a:prstGeom xmlns:a="http://schemas.openxmlformats.org/drawingml/2006/main" prst="roundRect">
-            <a:avLst>
-              <a:gd name="adj" fmla="val 15909"/>
-            </a:avLst>
-          </a:prstGeom>
-          <a:solidFill xmlns:a="http://schemas.openxmlformats.org/drawingml/2006/main">
-            <a:srgbClr val="0F9D8A"/>
-          </a:solidFill>
-          <a:ln xmlns:a="http://schemas.openxmlformats.org/drawingml/2006/main" w="9525">
-            <a:solidFill>
-              <a:srgbClr val="0F9D8A"/>
-            </a:solidFill>
-            <a:prstDash val="solid"/>
-          </a:ln>
-        </p:spPr>
-      </p:sp>
-      <p:sp>
-        <p:nvSpPr>
-          <p:cNvPr id="30" name="">
-            <a:extLst xmlns:a="http://schemas.openxmlformats.org/drawingml/2006/main">
-              <a:ext uri="{FF2B5EF4-FFF2-40B4-BE49-F238E27FC236}">
-                <a16:creationId xmlns:a16="http://schemas.microsoft.com/office/drawing/2014/main" id="{AEEE360A-6451-4953-A937-78DDDBF7EA9E}"/>
-              </a:ext>
-            </a:extLst>
-          </p:cNvPr>
-          <p:cNvSpPr>
-            <a:spLocks xmlns:a="http://schemas.openxmlformats.org/drawingml/2006/main" noGrp="1"/>
-          </p:cNvSpPr>
-          <p:nvPr/>
-        </p:nvSpPr>
-        <p:spPr>
-          <a:xfrm xmlns:a="http://schemas.openxmlformats.org/drawingml/2006/main">
-            <a:off x="2514600" y="3438525"/>
-            <a:ext cx="685800" cy="209550"/>
-          </a:xfrm>
-          <a:prstGeom xmlns:a="http://schemas.openxmlformats.org/drawingml/2006/main" prst="rect">
-            <a:avLst/>
-          </a:prstGeom>
-          <a:noFill xmlns:a="http://schemas.openxmlformats.org/drawingml/2006/main"/>
-          <a:ln xmlns:a="http://schemas.openxmlformats.org/drawingml/2006/main" w="0">
-            <a:noFill/>
-          </a:ln>
-        </p:spPr>
-        <p:txBody>
-          <a:bodyPr xmlns:a="http://schemas.openxmlformats.org/drawingml/2006/main">
-            <a:noAutofit/>
-          </a:bodyPr>
-          <a:lstStyle xmlns:a="http://schemas.openxmlformats.org/drawingml/2006/main">
-            <a:defPPr algn="ctr">
-              <a:defRPr sz="1200" b="0">
-                <a:solidFill>
-                  <a:srgbClr val="596273"/>
-                </a:solidFill>
-                <a:latin typeface="Arial"/>
-                <a:ea typeface="Arial"/>
-                <a:cs typeface="Arial"/>
-              </a:defRPr>
-            </a:defPPr>
-          </a:lstStyle>
-          <a:p xmlns:a="http://schemas.openxmlformats.org/drawingml/2006/main">
-            <a:pPr algn="ctr">
-              <a:defRPr sz="1200" b="0">
-                <a:solidFill>
-                  <a:srgbClr val="596273"/>
-                </a:solidFill>
-                <a:latin typeface="Arial"/>
-                <a:ea typeface="Arial"/>
-                <a:cs typeface="Arial"/>
-              </a:defRPr>
-            </a:pPr>
-            <a:r>
-              <a:rPr sz="1200" b="0">
-                <a:solidFill>
-                  <a:srgbClr val="596273"/>
-                </a:solidFill>
-                <a:latin typeface="Arial"/>
-                <a:ea typeface="Arial"/>
-                <a:cs typeface="Arial"/>
-              </a:rPr>
-              <a:t>3×3</a:t>
-            </a:r>
-          </a:p>
-        </p:txBody>
-      </p:sp>
-      <p:sp>
-        <p:nvSpPr>
-          <p:cNvPr id="31" name="">
-            <a:extLst xmlns:a="http://schemas.openxmlformats.org/drawingml/2006/main">
-              <a:ext uri="{FF2B5EF4-FFF2-40B4-BE49-F238E27FC236}">
-                <a16:creationId xmlns:a16="http://schemas.microsoft.com/office/drawing/2014/main" id="{6A46B803-BE0D-40B1-98FB-586B01BDA1E1}"/>
-              </a:ext>
-            </a:extLst>
-          </p:cNvPr>
-          <p:cNvSpPr>
-            <a:spLocks xmlns:a="http://schemas.openxmlformats.org/drawingml/2006/main" noGrp="1"/>
-          </p:cNvSpPr>
-          <p:nvPr/>
-        </p:nvSpPr>
-        <p:spPr>
-          <a:xfrm xmlns:a="http://schemas.openxmlformats.org/drawingml/2006/main">
-            <a:off x="3352800" y="3552825"/>
-            <a:ext cx="723900" cy="28575"/>
-          </a:xfrm>
-          <a:prstGeom xmlns:a="http://schemas.openxmlformats.org/drawingml/2006/main" prst="rect">
-            <a:avLst/>
-          </a:prstGeom>
-          <a:solidFill xmlns:a="http://schemas.openxmlformats.org/drawingml/2006/main">
-            <a:srgbClr val="0F9D8A"/>
-          </a:solidFill>
-          <a:ln xmlns:a="http://schemas.openxmlformats.org/drawingml/2006/main" w="9525">
-            <a:solidFill>
-              <a:srgbClr val="0F9D8A"/>
-            </a:solidFill>
-            <a:prstDash val="solid"/>
-          </a:ln>
-        </p:spPr>
-      </p:sp>
-      <p:sp>
-        <p:nvSpPr>
-          <p:cNvPr id="32" name="">
-            <a:extLst xmlns:a="http://schemas.openxmlformats.org/drawingml/2006/main">
-              <a:ext uri="{FF2B5EF4-FFF2-40B4-BE49-F238E27FC236}">
-                <a16:creationId xmlns:a16="http://schemas.microsoft.com/office/drawing/2014/main" id="{2F1FEC1A-464E-4FE4-AC41-5C1AB20CD92B}"/>
-              </a:ext>
-            </a:extLst>
-          </p:cNvPr>
-          <p:cNvSpPr>
-            <a:spLocks xmlns:a="http://schemas.openxmlformats.org/drawingml/2006/main" noGrp="1"/>
-          </p:cNvSpPr>
-          <p:nvPr/>
-        </p:nvSpPr>
-        <p:spPr>
-          <a:xfrm xmlns:a="http://schemas.openxmlformats.org/drawingml/2006/main">
-            <a:off x="4000500" y="3495675"/>
-            <a:ext cx="133350" cy="142875"/>
-          </a:xfrm>
-          <a:prstGeom xmlns:a="http://schemas.openxmlformats.org/drawingml/2006/main" prst="triangle">
-            <a:avLst/>
-          </a:prstGeom>
-          <a:solidFill xmlns:a="http://schemas.openxmlformats.org/drawingml/2006/main">
-            <a:srgbClr val="0F9D8A"/>
-          </a:solidFill>
-          <a:ln xmlns:a="http://schemas.openxmlformats.org/drawingml/2006/main" w="0">
-            <a:solidFill>
-              <a:srgbClr val="0F9D8A"/>
-            </a:solidFill>
-          </a:ln>
-        </p:spPr>
-      </p:sp>
-      <p:sp>
-        <p:nvSpPr>
-          <p:cNvPr id="33" name="">
-            <a:extLst xmlns:a="http://schemas.openxmlformats.org/drawingml/2006/main">
-              <a:ext uri="{FF2B5EF4-FFF2-40B4-BE49-F238E27FC236}">
-                <a16:creationId xmlns:a16="http://schemas.microsoft.com/office/drawing/2014/main" id="{95A4D3DE-BF38-4A59-9B1B-286F7FB729C5}"/>
-              </a:ext>
-            </a:extLst>
-          </p:cNvPr>
-          <p:cNvSpPr>
-            <a:spLocks xmlns:a="http://schemas.openxmlformats.org/drawingml/2006/main" noGrp="1"/>
-          </p:cNvSpPr>
-          <p:nvPr/>
-        </p:nvSpPr>
-        <p:spPr>
-          <a:xfrm xmlns:a="http://schemas.openxmlformats.org/drawingml/2006/main">
-            <a:off x="4267200" y="3257550"/>
-            <a:ext cx="590550" cy="590550"/>
-          </a:xfrm>
-          <a:prstGeom xmlns:a="http://schemas.openxmlformats.org/drawingml/2006/main" prst="roundRect">
-            <a:avLst>
-              <a:gd name="adj" fmla="val 11290"/>
-            </a:avLst>
-          </a:prstGeom>
-          <a:solidFill xmlns:a="http://schemas.openxmlformats.org/drawingml/2006/main">
-            <a:srgbClr val="F0EAFE"/>
-          </a:solidFill>
-          <a:ln xmlns:a="http://schemas.openxmlformats.org/drawingml/2006/main" w="9525">
-            <a:solidFill>
-              <a:srgbClr val="F0EAFE"/>
-            </a:solidFill>
-            <a:prstDash val="solid"/>
-          </a:ln>
-        </p:spPr>
-      </p:sp>
-      <p:sp>
-        <p:nvSpPr>
-          <p:cNvPr id="34" name="">
-            <a:extLst xmlns:a="http://schemas.openxmlformats.org/drawingml/2006/main">
-              <a:ext uri="{FF2B5EF4-FFF2-40B4-BE49-F238E27FC236}">
-                <a16:creationId xmlns:a16="http://schemas.microsoft.com/office/drawing/2014/main" id="{F9054EF0-0241-45DF-93E5-59F669DBA6FB}"/>
-              </a:ext>
-            </a:extLst>
-          </p:cNvPr>
-          <p:cNvSpPr>
-            <a:spLocks xmlns:a="http://schemas.openxmlformats.org/drawingml/2006/main" noGrp="1"/>
-          </p:cNvSpPr>
-          <p:nvPr/>
-        </p:nvSpPr>
-        <p:spPr>
-          <a:xfrm xmlns:a="http://schemas.openxmlformats.org/drawingml/2006/main">
-            <a:off x="4343400" y="3419475"/>
-            <a:ext cx="438150" cy="19050"/>
+          <p:cNvPr id="25" name="">
+            <a:extLst xmlns:a="http://schemas.openxmlformats.org/drawingml/2006/main">
+              <a:ext uri="{FF2B5EF4-FFF2-40B4-BE49-F238E27FC236}">
+                <a16:creationId xmlns:a16="http://schemas.microsoft.com/office/drawing/2014/main" id="{A6A098D1-81E0-46DC-A612-51A88D74A760}"/>
+              </a:ext>
+            </a:extLst>
+          </p:cNvPr>
+          <p:cNvSpPr>
+            <a:spLocks xmlns:a="http://schemas.openxmlformats.org/drawingml/2006/main" noGrp="1"/>
+          </p:cNvSpPr>
+          <p:nvPr/>
+        </p:nvSpPr>
+        <p:spPr>
+          <a:xfrm xmlns:a="http://schemas.openxmlformats.org/drawingml/2006/main">
+            <a:off x="1228725" y="3867150"/>
+            <a:ext cx="590550" cy="19050"/>
           </a:xfrm>
           <a:prstGeom xmlns:a="http://schemas.openxmlformats.org/drawingml/2006/main" prst="rect">
             <a:avLst/>
@@ -16899,22 +16637,22 @@
       </p:sp>
       <p:sp>
         <p:nvSpPr>
-          <p:cNvPr id="35" name="">
-            <a:extLst xmlns:a="http://schemas.openxmlformats.org/drawingml/2006/main">
-              <a:ext uri="{FF2B5EF4-FFF2-40B4-BE49-F238E27FC236}">
-                <a16:creationId xmlns:a16="http://schemas.microsoft.com/office/drawing/2014/main" id="{7D3ACF2A-5641-4597-8956-536DF3D3069D}"/>
-              </a:ext>
-            </a:extLst>
-          </p:cNvPr>
-          <p:cNvSpPr>
-            <a:spLocks xmlns:a="http://schemas.openxmlformats.org/drawingml/2006/main" noGrp="1"/>
-          </p:cNvSpPr>
-          <p:nvPr/>
-        </p:nvSpPr>
-        <p:spPr>
-          <a:xfrm xmlns:a="http://schemas.openxmlformats.org/drawingml/2006/main">
-            <a:off x="4343400" y="3552825"/>
-            <a:ext cx="438150" cy="19050"/>
+          <p:cNvPr id="26" name="">
+            <a:extLst xmlns:a="http://schemas.openxmlformats.org/drawingml/2006/main">
+              <a:ext uri="{FF2B5EF4-FFF2-40B4-BE49-F238E27FC236}">
+                <a16:creationId xmlns:a16="http://schemas.microsoft.com/office/drawing/2014/main" id="{DF4E4C00-E718-4124-BF92-D4DA746F5F19}"/>
+              </a:ext>
+            </a:extLst>
+          </p:cNvPr>
+          <p:cNvSpPr>
+            <a:spLocks xmlns:a="http://schemas.openxmlformats.org/drawingml/2006/main" noGrp="1"/>
+          </p:cNvSpPr>
+          <p:nvPr/>
+        </p:nvSpPr>
+        <p:spPr>
+          <a:xfrm xmlns:a="http://schemas.openxmlformats.org/drawingml/2006/main">
+            <a:off x="1390650" y="3486150"/>
+            <a:ext cx="19050" cy="533400"/>
           </a:xfrm>
           <a:prstGeom xmlns:a="http://schemas.openxmlformats.org/drawingml/2006/main" prst="rect">
             <a:avLst/>
@@ -16932,22 +16670,22 @@
       </p:sp>
       <p:sp>
         <p:nvSpPr>
-          <p:cNvPr id="36" name="">
-            <a:extLst xmlns:a="http://schemas.openxmlformats.org/drawingml/2006/main">
-              <a:ext uri="{FF2B5EF4-FFF2-40B4-BE49-F238E27FC236}">
-                <a16:creationId xmlns:a16="http://schemas.microsoft.com/office/drawing/2014/main" id="{90DDCEC3-130E-4348-B63F-BF28EF36861C}"/>
-              </a:ext>
-            </a:extLst>
-          </p:cNvPr>
-          <p:cNvSpPr>
-            <a:spLocks xmlns:a="http://schemas.openxmlformats.org/drawingml/2006/main" noGrp="1"/>
-          </p:cNvSpPr>
-          <p:nvPr/>
-        </p:nvSpPr>
-        <p:spPr>
-          <a:xfrm xmlns:a="http://schemas.openxmlformats.org/drawingml/2006/main">
-            <a:off x="4343400" y="3686175"/>
-            <a:ext cx="438150" cy="19050"/>
+          <p:cNvPr id="27" name="">
+            <a:extLst xmlns:a="http://schemas.openxmlformats.org/drawingml/2006/main">
+              <a:ext uri="{FF2B5EF4-FFF2-40B4-BE49-F238E27FC236}">
+                <a16:creationId xmlns:a16="http://schemas.microsoft.com/office/drawing/2014/main" id="{FC21F604-3D1A-4618-A15E-C78CDCCFA924}"/>
+              </a:ext>
+            </a:extLst>
+          </p:cNvPr>
+          <p:cNvSpPr>
+            <a:spLocks xmlns:a="http://schemas.openxmlformats.org/drawingml/2006/main" noGrp="1"/>
+          </p:cNvSpPr>
+          <p:nvPr/>
+        </p:nvSpPr>
+        <p:spPr>
+          <a:xfrm xmlns:a="http://schemas.openxmlformats.org/drawingml/2006/main">
+            <a:off x="1638300" y="3486150"/>
+            <a:ext cx="19050" cy="533400"/>
           </a:xfrm>
           <a:prstGeom xmlns:a="http://schemas.openxmlformats.org/drawingml/2006/main" prst="rect">
             <a:avLst/>
@@ -16965,22 +16703,22 @@
       </p:sp>
       <p:sp>
         <p:nvSpPr>
-          <p:cNvPr id="37" name="">
-            <a:extLst xmlns:a="http://schemas.openxmlformats.org/drawingml/2006/main">
-              <a:ext uri="{FF2B5EF4-FFF2-40B4-BE49-F238E27FC236}">
-                <a16:creationId xmlns:a16="http://schemas.microsoft.com/office/drawing/2014/main" id="{8529145D-1D0F-43C1-BDCB-313217BBD016}"/>
-              </a:ext>
-            </a:extLst>
-          </p:cNvPr>
-          <p:cNvSpPr>
-            <a:spLocks xmlns:a="http://schemas.openxmlformats.org/drawingml/2006/main" noGrp="1"/>
-          </p:cNvSpPr>
-          <p:nvPr/>
-        </p:nvSpPr>
-        <p:spPr>
-          <a:xfrm xmlns:a="http://schemas.openxmlformats.org/drawingml/2006/main">
-            <a:off x="4267200" y="3924300"/>
-            <a:ext cx="590550" cy="190500"/>
+          <p:cNvPr id="28" name="">
+            <a:extLst xmlns:a="http://schemas.openxmlformats.org/drawingml/2006/main">
+              <a:ext uri="{FF2B5EF4-FFF2-40B4-BE49-F238E27FC236}">
+                <a16:creationId xmlns:a16="http://schemas.microsoft.com/office/drawing/2014/main" id="{D07F5E53-458D-4019-962B-1D6987A67119}"/>
+              </a:ext>
+            </a:extLst>
+          </p:cNvPr>
+          <p:cNvSpPr>
+            <a:spLocks xmlns:a="http://schemas.openxmlformats.org/drawingml/2006/main" noGrp="1"/>
+          </p:cNvSpPr>
+          <p:nvPr/>
+        </p:nvSpPr>
+        <p:spPr>
+          <a:xfrm xmlns:a="http://schemas.openxmlformats.org/drawingml/2006/main">
+            <a:off x="1143000" y="4124325"/>
+            <a:ext cx="762000" cy="171450"/>
           </a:xfrm>
           <a:prstGeom xmlns:a="http://schemas.openxmlformats.org/drawingml/2006/main" prst="rect">
             <a:avLst/>
@@ -17033,26 +16771,94 @@
       </p:sp>
       <p:sp>
         <p:nvSpPr>
-          <p:cNvPr id="38" name="">
-            <a:extLst xmlns:a="http://schemas.openxmlformats.org/drawingml/2006/main">
-              <a:ext uri="{FF2B5EF4-FFF2-40B4-BE49-F238E27FC236}">
-                <a16:creationId xmlns:a16="http://schemas.microsoft.com/office/drawing/2014/main" id="{67086721-6ADE-4754-8FF8-281E325E8917}"/>
-              </a:ext>
-            </a:extLst>
-          </p:cNvPr>
-          <p:cNvSpPr>
-            <a:spLocks xmlns:a="http://schemas.openxmlformats.org/drawingml/2006/main" noGrp="1"/>
-          </p:cNvSpPr>
-          <p:nvPr/>
-        </p:nvSpPr>
-        <p:spPr>
-          <a:xfrm xmlns:a="http://schemas.openxmlformats.org/drawingml/2006/main">
-            <a:off x="895350" y="4171950"/>
-            <a:ext cx="590550" cy="590550"/>
+          <p:cNvPr id="29" name="">
+            <a:extLst xmlns:a="http://schemas.openxmlformats.org/drawingml/2006/main">
+              <a:ext uri="{FF2B5EF4-FFF2-40B4-BE49-F238E27FC236}">
+                <a16:creationId xmlns:a16="http://schemas.microsoft.com/office/drawing/2014/main" id="{0C69B3FC-67EC-4C7B-821E-92B383B4BBF8}"/>
+              </a:ext>
+            </a:extLst>
+          </p:cNvPr>
+          <p:cNvSpPr>
+            <a:spLocks xmlns:a="http://schemas.openxmlformats.org/drawingml/2006/main" noGrp="1"/>
+          </p:cNvSpPr>
+          <p:nvPr/>
+        </p:nvSpPr>
+        <p:spPr>
+          <a:xfrm xmlns:a="http://schemas.openxmlformats.org/drawingml/2006/main">
+            <a:off x="2057400" y="3581400"/>
+            <a:ext cx="342900" cy="342900"/>
+          </a:xfrm>
+          <a:prstGeom xmlns:a="http://schemas.openxmlformats.org/drawingml/2006/main" prst="rect">
+            <a:avLst/>
+          </a:prstGeom>
+          <a:noFill xmlns:a="http://schemas.openxmlformats.org/drawingml/2006/main"/>
+          <a:ln xmlns:a="http://schemas.openxmlformats.org/drawingml/2006/main" w="0">
+            <a:noFill/>
+          </a:ln>
+        </p:spPr>
+        <p:txBody>
+          <a:bodyPr xmlns:a="http://schemas.openxmlformats.org/drawingml/2006/main">
+            <a:noAutofit/>
+          </a:bodyPr>
+          <a:lstStyle xmlns:a="http://schemas.openxmlformats.org/drawingml/2006/main">
+            <a:defPPr algn="ctr">
+              <a:defRPr sz="1800" b="0">
+                <a:solidFill>
+                  <a:srgbClr val="111827"/>
+                </a:solidFill>
+                <a:latin typeface="Arial"/>
+                <a:ea typeface="Arial"/>
+                <a:cs typeface="Arial"/>
+              </a:defRPr>
+            </a:defPPr>
+          </a:lstStyle>
+          <a:p xmlns:a="http://schemas.openxmlformats.org/drawingml/2006/main">
+            <a:pPr algn="ctr">
+              <a:defRPr sz="1800" b="0">
+                <a:solidFill>
+                  <a:srgbClr val="111827"/>
+                </a:solidFill>
+                <a:latin typeface="Arial"/>
+                <a:ea typeface="Arial"/>
+                <a:cs typeface="Arial"/>
+              </a:defRPr>
+            </a:pPr>
+            <a:r>
+              <a:rPr sz="1800" b="0">
+                <a:solidFill>
+                  <a:srgbClr val="111827"/>
+                </a:solidFill>
+                <a:latin typeface="Arial"/>
+                <a:ea typeface="Arial"/>
+                <a:cs typeface="Arial"/>
+              </a:rPr>
+              <a:t>→</a:t>
+            </a:r>
+          </a:p>
+        </p:txBody>
+      </p:sp>
+      <p:sp>
+        <p:nvSpPr>
+          <p:cNvPr id="30" name="">
+            <a:extLst xmlns:a="http://schemas.openxmlformats.org/drawingml/2006/main">
+              <a:ext uri="{FF2B5EF4-FFF2-40B4-BE49-F238E27FC236}">
+                <a16:creationId xmlns:a16="http://schemas.microsoft.com/office/drawing/2014/main" id="{CFA2A8C2-E403-4A26-A065-EF38DD0441B1}"/>
+              </a:ext>
+            </a:extLst>
+          </p:cNvPr>
+          <p:cNvSpPr>
+            <a:spLocks xmlns:a="http://schemas.openxmlformats.org/drawingml/2006/main" noGrp="1"/>
+          </p:cNvSpPr>
+          <p:nvPr/>
+        </p:nvSpPr>
+        <p:spPr>
+          <a:xfrm xmlns:a="http://schemas.openxmlformats.org/drawingml/2006/main">
+            <a:off x="2476500" y="3495675"/>
+            <a:ext cx="914400" cy="514350"/>
           </a:xfrm>
           <a:prstGeom xmlns:a="http://schemas.openxmlformats.org/drawingml/2006/main" prst="roundRect">
             <a:avLst>
-              <a:gd name="adj" fmla="val 11290"/>
+              <a:gd name="adj" fmla="val 12963"/>
             </a:avLst>
           </a:prstGeom>
           <a:solidFill xmlns:a="http://schemas.openxmlformats.org/drawingml/2006/main">
@@ -17060,7 +16866,7 @@
           </a:solidFill>
           <a:ln xmlns:a="http://schemas.openxmlformats.org/drawingml/2006/main" w="9525">
             <a:solidFill>
-              <a:srgbClr val="E7F7F4"/>
+              <a:srgbClr val="0F9D8A"/>
             </a:solidFill>
             <a:prstDash val="solid"/>
           </a:ln>
@@ -17068,22 +16874,193 @@
       </p:sp>
       <p:sp>
         <p:nvSpPr>
-          <p:cNvPr id="39" name="">
-            <a:extLst xmlns:a="http://schemas.openxmlformats.org/drawingml/2006/main">
-              <a:ext uri="{FF2B5EF4-FFF2-40B4-BE49-F238E27FC236}">
-                <a16:creationId xmlns:a16="http://schemas.microsoft.com/office/drawing/2014/main" id="{3CC2BD64-310B-4798-8B5C-FE61DA6748DF}"/>
-              </a:ext>
-            </a:extLst>
-          </p:cNvPr>
-          <p:cNvSpPr>
-            <a:spLocks xmlns:a="http://schemas.openxmlformats.org/drawingml/2006/main" noGrp="1"/>
-          </p:cNvSpPr>
-          <p:nvPr/>
-        </p:nvSpPr>
-        <p:spPr>
-          <a:xfrm xmlns:a="http://schemas.openxmlformats.org/drawingml/2006/main">
-            <a:off x="971550" y="4333875"/>
-            <a:ext cx="438150" cy="19050"/>
+          <p:cNvPr id="31" name="">
+            <a:extLst xmlns:a="http://schemas.openxmlformats.org/drawingml/2006/main">
+              <a:ext uri="{FF2B5EF4-FFF2-40B4-BE49-F238E27FC236}">
+                <a16:creationId xmlns:a16="http://schemas.microsoft.com/office/drawing/2014/main" id="{99ED714B-CB0D-4AE0-98A8-A9D066247926}"/>
+              </a:ext>
+            </a:extLst>
+          </p:cNvPr>
+          <p:cNvSpPr>
+            <a:spLocks xmlns:a="http://schemas.openxmlformats.org/drawingml/2006/main" noGrp="1"/>
+          </p:cNvSpPr>
+          <p:nvPr/>
+        </p:nvSpPr>
+        <p:spPr>
+          <a:xfrm xmlns:a="http://schemas.openxmlformats.org/drawingml/2006/main">
+            <a:off x="2571750" y="3638550"/>
+            <a:ext cx="723900" cy="228600"/>
+          </a:xfrm>
+          <a:prstGeom xmlns:a="http://schemas.openxmlformats.org/drawingml/2006/main" prst="rect">
+            <a:avLst/>
+          </a:prstGeom>
+          <a:noFill xmlns:a="http://schemas.openxmlformats.org/drawingml/2006/main"/>
+          <a:ln xmlns:a="http://schemas.openxmlformats.org/drawingml/2006/main" w="0">
+            <a:noFill/>
+          </a:ln>
+        </p:spPr>
+        <p:txBody>
+          <a:bodyPr xmlns:a="http://schemas.openxmlformats.org/drawingml/2006/main">
+            <a:noAutofit/>
+          </a:bodyPr>
+          <a:lstStyle xmlns:a="http://schemas.openxmlformats.org/drawingml/2006/main">
+            <a:defPPr algn="ctr">
+              <a:defRPr sz="1800" b="0">
+                <a:solidFill>
+                  <a:srgbClr val="111827"/>
+                </a:solidFill>
+                <a:latin typeface="Arial"/>
+                <a:ea typeface="Arial"/>
+                <a:cs typeface="Arial"/>
+              </a:defRPr>
+            </a:defPPr>
+          </a:lstStyle>
+          <a:p xmlns:a="http://schemas.openxmlformats.org/drawingml/2006/main">
+            <a:pPr algn="ctr">
+              <a:defRPr sz="1800" b="0">
+                <a:solidFill>
+                  <a:srgbClr val="111827"/>
+                </a:solidFill>
+                <a:latin typeface="Arial"/>
+                <a:ea typeface="Arial"/>
+                <a:cs typeface="Arial"/>
+              </a:defRPr>
+            </a:pPr>
+            <a:r>
+              <a:rPr sz="1800" b="0">
+                <a:solidFill>
+                  <a:srgbClr val="111827"/>
+                </a:solidFill>
+                <a:latin typeface="Arial"/>
+                <a:ea typeface="Arial"/>
+                <a:cs typeface="Arial"/>
+              </a:rPr>
+              <a:t>3×3 #2</a:t>
+            </a:r>
+          </a:p>
+        </p:txBody>
+      </p:sp>
+      <p:sp>
+        <p:nvSpPr>
+          <p:cNvPr id="32" name="">
+            <a:extLst xmlns:a="http://schemas.openxmlformats.org/drawingml/2006/main">
+              <a:ext uri="{FF2B5EF4-FFF2-40B4-BE49-F238E27FC236}">
+                <a16:creationId xmlns:a16="http://schemas.microsoft.com/office/drawing/2014/main" id="{0723864D-8D3E-407B-9B22-11DF763212DB}"/>
+              </a:ext>
+            </a:extLst>
+          </p:cNvPr>
+          <p:cNvSpPr>
+            <a:spLocks xmlns:a="http://schemas.openxmlformats.org/drawingml/2006/main" noGrp="1"/>
+          </p:cNvSpPr>
+          <p:nvPr/>
+        </p:nvSpPr>
+        <p:spPr>
+          <a:xfrm xmlns:a="http://schemas.openxmlformats.org/drawingml/2006/main">
+            <a:off x="3524250" y="3581400"/>
+            <a:ext cx="342900" cy="342900"/>
+          </a:xfrm>
+          <a:prstGeom xmlns:a="http://schemas.openxmlformats.org/drawingml/2006/main" prst="rect">
+            <a:avLst/>
+          </a:prstGeom>
+          <a:noFill xmlns:a="http://schemas.openxmlformats.org/drawingml/2006/main"/>
+          <a:ln xmlns:a="http://schemas.openxmlformats.org/drawingml/2006/main" w="0">
+            <a:noFill/>
+          </a:ln>
+        </p:spPr>
+        <p:txBody>
+          <a:bodyPr xmlns:a="http://schemas.openxmlformats.org/drawingml/2006/main">
+            <a:noAutofit/>
+          </a:bodyPr>
+          <a:lstStyle xmlns:a="http://schemas.openxmlformats.org/drawingml/2006/main">
+            <a:defPPr algn="ctr">
+              <a:defRPr sz="1800" b="0">
+                <a:solidFill>
+                  <a:srgbClr val="111827"/>
+                </a:solidFill>
+                <a:latin typeface="Arial"/>
+                <a:ea typeface="Arial"/>
+                <a:cs typeface="Arial"/>
+              </a:defRPr>
+            </a:defPPr>
+          </a:lstStyle>
+          <a:p xmlns:a="http://schemas.openxmlformats.org/drawingml/2006/main">
+            <a:pPr algn="ctr">
+              <a:defRPr sz="1800" b="0">
+                <a:solidFill>
+                  <a:srgbClr val="111827"/>
+                </a:solidFill>
+                <a:latin typeface="Arial"/>
+                <a:ea typeface="Arial"/>
+                <a:cs typeface="Arial"/>
+              </a:defRPr>
+            </a:pPr>
+            <a:r>
+              <a:rPr sz="1800" b="0">
+                <a:solidFill>
+                  <a:srgbClr val="111827"/>
+                </a:solidFill>
+                <a:latin typeface="Arial"/>
+                <a:ea typeface="Arial"/>
+                <a:cs typeface="Arial"/>
+              </a:rPr>
+              <a:t>→</a:t>
+            </a:r>
+          </a:p>
+        </p:txBody>
+      </p:sp>
+      <p:sp>
+        <p:nvSpPr>
+          <p:cNvPr id="33" name="">
+            <a:extLst xmlns:a="http://schemas.openxmlformats.org/drawingml/2006/main">
+              <a:ext uri="{FF2B5EF4-FFF2-40B4-BE49-F238E27FC236}">
+                <a16:creationId xmlns:a16="http://schemas.microsoft.com/office/drawing/2014/main" id="{100F6935-7019-43AF-9FB4-294DC5F68813}"/>
+              </a:ext>
+            </a:extLst>
+          </p:cNvPr>
+          <p:cNvSpPr>
+            <a:spLocks xmlns:a="http://schemas.openxmlformats.org/drawingml/2006/main" noGrp="1"/>
+          </p:cNvSpPr>
+          <p:nvPr/>
+        </p:nvSpPr>
+        <p:spPr>
+          <a:xfrm xmlns:a="http://schemas.openxmlformats.org/drawingml/2006/main">
+            <a:off x="3943350" y="3409950"/>
+            <a:ext cx="762000" cy="685800"/>
+          </a:xfrm>
+          <a:prstGeom xmlns:a="http://schemas.openxmlformats.org/drawingml/2006/main" prst="roundRect">
+            <a:avLst>
+              <a:gd name="adj" fmla="val 9722"/>
+            </a:avLst>
+          </a:prstGeom>
+          <a:solidFill xmlns:a="http://schemas.openxmlformats.org/drawingml/2006/main">
+            <a:srgbClr val="F0EAFE"/>
+          </a:solidFill>
+          <a:ln xmlns:a="http://schemas.openxmlformats.org/drawingml/2006/main" w="9525">
+            <a:solidFill>
+              <a:srgbClr val="E5E1D8"/>
+            </a:solidFill>
+            <a:prstDash val="solid"/>
+          </a:ln>
+        </p:spPr>
+      </p:sp>
+      <p:sp>
+        <p:nvSpPr>
+          <p:cNvPr id="34" name="">
+            <a:extLst xmlns:a="http://schemas.openxmlformats.org/drawingml/2006/main">
+              <a:ext uri="{FF2B5EF4-FFF2-40B4-BE49-F238E27FC236}">
+                <a16:creationId xmlns:a16="http://schemas.microsoft.com/office/drawing/2014/main" id="{1A60FDC4-F816-4538-950F-9FF5406AF1E1}"/>
+              </a:ext>
+            </a:extLst>
+          </p:cNvPr>
+          <p:cNvSpPr>
+            <a:spLocks xmlns:a="http://schemas.openxmlformats.org/drawingml/2006/main" noGrp="1"/>
+          </p:cNvSpPr>
+          <p:nvPr/>
+        </p:nvSpPr>
+        <p:spPr>
+          <a:xfrm xmlns:a="http://schemas.openxmlformats.org/drawingml/2006/main">
+            <a:off x="4029075" y="3638550"/>
+            <a:ext cx="590550" cy="19050"/>
           </a:xfrm>
           <a:prstGeom xmlns:a="http://schemas.openxmlformats.org/drawingml/2006/main" prst="rect">
             <a:avLst/>
@@ -17101,22 +17078,22 @@
       </p:sp>
       <p:sp>
         <p:nvSpPr>
-          <p:cNvPr id="40" name="">
-            <a:extLst xmlns:a="http://schemas.openxmlformats.org/drawingml/2006/main">
-              <a:ext uri="{FF2B5EF4-FFF2-40B4-BE49-F238E27FC236}">
-                <a16:creationId xmlns:a16="http://schemas.microsoft.com/office/drawing/2014/main" id="{E31BA256-73D5-4300-A362-1F3D1D8AFE57}"/>
-              </a:ext>
-            </a:extLst>
-          </p:cNvPr>
-          <p:cNvSpPr>
-            <a:spLocks xmlns:a="http://schemas.openxmlformats.org/drawingml/2006/main" noGrp="1"/>
-          </p:cNvSpPr>
-          <p:nvPr/>
-        </p:nvSpPr>
-        <p:spPr>
-          <a:xfrm xmlns:a="http://schemas.openxmlformats.org/drawingml/2006/main">
-            <a:off x="971550" y="4467225"/>
-            <a:ext cx="438150" cy="19050"/>
+          <p:cNvPr id="35" name="">
+            <a:extLst xmlns:a="http://schemas.openxmlformats.org/drawingml/2006/main">
+              <a:ext uri="{FF2B5EF4-FFF2-40B4-BE49-F238E27FC236}">
+                <a16:creationId xmlns:a16="http://schemas.microsoft.com/office/drawing/2014/main" id="{97B2B8CB-4981-412C-824B-0B5BC5AE7D38}"/>
+              </a:ext>
+            </a:extLst>
+          </p:cNvPr>
+          <p:cNvSpPr>
+            <a:spLocks xmlns:a="http://schemas.openxmlformats.org/drawingml/2006/main" noGrp="1"/>
+          </p:cNvSpPr>
+          <p:nvPr/>
+        </p:nvSpPr>
+        <p:spPr>
+          <a:xfrm xmlns:a="http://schemas.openxmlformats.org/drawingml/2006/main">
+            <a:off x="4029075" y="3867150"/>
+            <a:ext cx="590550" cy="19050"/>
           </a:xfrm>
           <a:prstGeom xmlns:a="http://schemas.openxmlformats.org/drawingml/2006/main" prst="rect">
             <a:avLst/>
@@ -17134,22 +17111,22 @@
       </p:sp>
       <p:sp>
         <p:nvSpPr>
-          <p:cNvPr id="41" name="">
-            <a:extLst xmlns:a="http://schemas.openxmlformats.org/drawingml/2006/main">
-              <a:ext uri="{FF2B5EF4-FFF2-40B4-BE49-F238E27FC236}">
-                <a16:creationId xmlns:a16="http://schemas.microsoft.com/office/drawing/2014/main" id="{1F77474D-C7FC-436E-95F5-389347EF1398}"/>
-              </a:ext>
-            </a:extLst>
-          </p:cNvPr>
-          <p:cNvSpPr>
-            <a:spLocks xmlns:a="http://schemas.openxmlformats.org/drawingml/2006/main" noGrp="1"/>
-          </p:cNvSpPr>
-          <p:nvPr/>
-        </p:nvSpPr>
-        <p:spPr>
-          <a:xfrm xmlns:a="http://schemas.openxmlformats.org/drawingml/2006/main">
-            <a:off x="971550" y="4600575"/>
-            <a:ext cx="438150" cy="19050"/>
+          <p:cNvPr id="36" name="">
+            <a:extLst xmlns:a="http://schemas.openxmlformats.org/drawingml/2006/main">
+              <a:ext uri="{FF2B5EF4-FFF2-40B4-BE49-F238E27FC236}">
+                <a16:creationId xmlns:a16="http://schemas.microsoft.com/office/drawing/2014/main" id="{D9DFE747-5F7D-4DD9-88C6-18A879DBEFF3}"/>
+              </a:ext>
+            </a:extLst>
+          </p:cNvPr>
+          <p:cNvSpPr>
+            <a:spLocks xmlns:a="http://schemas.openxmlformats.org/drawingml/2006/main" noGrp="1"/>
+          </p:cNvSpPr>
+          <p:nvPr/>
+        </p:nvSpPr>
+        <p:spPr>
+          <a:xfrm xmlns:a="http://schemas.openxmlformats.org/drawingml/2006/main">
+            <a:off x="4191000" y="3486150"/>
+            <a:ext cx="19050" cy="533400"/>
           </a:xfrm>
           <a:prstGeom xmlns:a="http://schemas.openxmlformats.org/drawingml/2006/main" prst="rect">
             <a:avLst/>
@@ -17167,358 +17144,22 @@
       </p:sp>
       <p:sp>
         <p:nvSpPr>
-          <p:cNvPr id="42" name="">
-            <a:extLst xmlns:a="http://schemas.openxmlformats.org/drawingml/2006/main">
-              <a:ext uri="{FF2B5EF4-FFF2-40B4-BE49-F238E27FC236}">
-                <a16:creationId xmlns:a16="http://schemas.microsoft.com/office/drawing/2014/main" id="{5BD3DAC5-28E5-4108-B68C-FE233E2B84A7}"/>
-              </a:ext>
-            </a:extLst>
-          </p:cNvPr>
-          <p:cNvSpPr>
-            <a:spLocks xmlns:a="http://schemas.openxmlformats.org/drawingml/2006/main" noGrp="1"/>
-          </p:cNvSpPr>
-          <p:nvPr/>
-        </p:nvSpPr>
-        <p:spPr>
-          <a:xfrm xmlns:a="http://schemas.openxmlformats.org/drawingml/2006/main">
-            <a:off x="895350" y="4838700"/>
-            <a:ext cx="590550" cy="190500"/>
-          </a:xfrm>
-          <a:prstGeom xmlns:a="http://schemas.openxmlformats.org/drawingml/2006/main" prst="rect">
-            <a:avLst/>
-          </a:prstGeom>
-          <a:noFill xmlns:a="http://schemas.openxmlformats.org/drawingml/2006/main"/>
-          <a:ln xmlns:a="http://schemas.openxmlformats.org/drawingml/2006/main" w="0">
-            <a:noFill/>
-          </a:ln>
-        </p:spPr>
-        <p:txBody>
-          <a:bodyPr xmlns:a="http://schemas.openxmlformats.org/drawingml/2006/main">
-            <a:noAutofit/>
-          </a:bodyPr>
-          <a:lstStyle xmlns:a="http://schemas.openxmlformats.org/drawingml/2006/main">
-            <a:defPPr algn="ctr">
-              <a:defRPr sz="1200" b="0">
-                <a:solidFill>
-                  <a:srgbClr val="596273"/>
-                </a:solidFill>
-                <a:latin typeface="Arial"/>
-                <a:ea typeface="Arial"/>
-                <a:cs typeface="Arial"/>
-              </a:defRPr>
-            </a:defPPr>
-          </a:lstStyle>
-          <a:p xmlns:a="http://schemas.openxmlformats.org/drawingml/2006/main">
-            <a:pPr algn="ctr">
-              <a:defRPr sz="1200" b="0">
-                <a:solidFill>
-                  <a:srgbClr val="596273"/>
-                </a:solidFill>
-                <a:latin typeface="Arial"/>
-                <a:ea typeface="Arial"/>
-                <a:cs typeface="Arial"/>
-              </a:defRPr>
-            </a:pPr>
-            <a:r>
-              <a:rPr sz="1200" b="0">
-                <a:solidFill>
-                  <a:srgbClr val="596273"/>
-                </a:solidFill>
-                <a:latin typeface="Arial"/>
-                <a:ea typeface="Arial"/>
-                <a:cs typeface="Arial"/>
-              </a:rPr>
-              <a:t>C3</a:t>
-            </a:r>
-          </a:p>
-        </p:txBody>
-      </p:sp>
-      <p:sp>
-        <p:nvSpPr>
-          <p:cNvPr id="43" name="">
-            <a:extLst xmlns:a="http://schemas.openxmlformats.org/drawingml/2006/main">
-              <a:ext uri="{FF2B5EF4-FFF2-40B4-BE49-F238E27FC236}">
-                <a16:creationId xmlns:a16="http://schemas.microsoft.com/office/drawing/2014/main" id="{FE536AF9-67B6-455E-8024-9C97B5767F07}"/>
-              </a:ext>
-            </a:extLst>
-          </p:cNvPr>
-          <p:cNvSpPr>
-            <a:spLocks xmlns:a="http://schemas.openxmlformats.org/drawingml/2006/main" noGrp="1"/>
-          </p:cNvSpPr>
-          <p:nvPr/>
-        </p:nvSpPr>
-        <p:spPr>
-          <a:xfrm xmlns:a="http://schemas.openxmlformats.org/drawingml/2006/main">
-            <a:off x="1619250" y="4467225"/>
-            <a:ext cx="723900" cy="28575"/>
-          </a:xfrm>
-          <a:prstGeom xmlns:a="http://schemas.openxmlformats.org/drawingml/2006/main" prst="rect">
-            <a:avLst/>
-          </a:prstGeom>
-          <a:solidFill xmlns:a="http://schemas.openxmlformats.org/drawingml/2006/main">
-            <a:srgbClr val="0F9D8A"/>
-          </a:solidFill>
-          <a:ln xmlns:a="http://schemas.openxmlformats.org/drawingml/2006/main" w="9525">
-            <a:solidFill>
-              <a:srgbClr val="0F9D8A"/>
-            </a:solidFill>
-            <a:prstDash val="solid"/>
-          </a:ln>
-        </p:spPr>
-      </p:sp>
-      <p:sp>
-        <p:nvSpPr>
-          <p:cNvPr id="44" name="">
-            <a:extLst xmlns:a="http://schemas.openxmlformats.org/drawingml/2006/main">
-              <a:ext uri="{FF2B5EF4-FFF2-40B4-BE49-F238E27FC236}">
-                <a16:creationId xmlns:a16="http://schemas.microsoft.com/office/drawing/2014/main" id="{59431038-3CC4-4219-A2A3-92D4AB2F3F38}"/>
-              </a:ext>
-            </a:extLst>
-          </p:cNvPr>
-          <p:cNvSpPr>
-            <a:spLocks xmlns:a="http://schemas.openxmlformats.org/drawingml/2006/main" noGrp="1"/>
-          </p:cNvSpPr>
-          <p:nvPr/>
-        </p:nvSpPr>
-        <p:spPr>
-          <a:xfrm xmlns:a="http://schemas.openxmlformats.org/drawingml/2006/main">
-            <a:off x="2266950" y="4410075"/>
-            <a:ext cx="133350" cy="142875"/>
-          </a:xfrm>
-          <a:prstGeom xmlns:a="http://schemas.openxmlformats.org/drawingml/2006/main" prst="triangle">
-            <a:avLst/>
-          </a:prstGeom>
-          <a:solidFill xmlns:a="http://schemas.openxmlformats.org/drawingml/2006/main">
-            <a:srgbClr val="0F9D8A"/>
-          </a:solidFill>
-          <a:ln xmlns:a="http://schemas.openxmlformats.org/drawingml/2006/main" w="0">
-            <a:solidFill>
-              <a:srgbClr val="0F9D8A"/>
-            </a:solidFill>
-          </a:ln>
-        </p:spPr>
-      </p:sp>
-      <p:sp>
-        <p:nvSpPr>
-          <p:cNvPr id="45" name="">
-            <a:extLst xmlns:a="http://schemas.openxmlformats.org/drawingml/2006/main">
-              <a:ext uri="{FF2B5EF4-FFF2-40B4-BE49-F238E27FC236}">
-                <a16:creationId xmlns:a16="http://schemas.microsoft.com/office/drawing/2014/main" id="{FCFDEDFA-B7CA-41F6-B3F6-DBE3C91CDCDF}"/>
-              </a:ext>
-            </a:extLst>
-          </p:cNvPr>
-          <p:cNvSpPr>
-            <a:spLocks xmlns:a="http://schemas.openxmlformats.org/drawingml/2006/main" noGrp="1"/>
-          </p:cNvSpPr>
-          <p:nvPr/>
-        </p:nvSpPr>
-        <p:spPr>
-          <a:xfrm xmlns:a="http://schemas.openxmlformats.org/drawingml/2006/main">
-            <a:off x="2514600" y="4257675"/>
-            <a:ext cx="685800" cy="419100"/>
-          </a:xfrm>
-          <a:prstGeom xmlns:a="http://schemas.openxmlformats.org/drawingml/2006/main" prst="roundRect">
-            <a:avLst>
-              <a:gd name="adj" fmla="val 15909"/>
-            </a:avLst>
-          </a:prstGeom>
-          <a:solidFill xmlns:a="http://schemas.openxmlformats.org/drawingml/2006/main">
-            <a:srgbClr val="0F9D8A"/>
-          </a:solidFill>
-          <a:ln xmlns:a="http://schemas.openxmlformats.org/drawingml/2006/main" w="9525">
-            <a:solidFill>
-              <a:srgbClr val="0F9D8A"/>
-            </a:solidFill>
-            <a:prstDash val="solid"/>
-          </a:ln>
-        </p:spPr>
-      </p:sp>
-      <p:sp>
-        <p:nvSpPr>
-          <p:cNvPr id="46" name="">
-            <a:extLst xmlns:a="http://schemas.openxmlformats.org/drawingml/2006/main">
-              <a:ext uri="{FF2B5EF4-FFF2-40B4-BE49-F238E27FC236}">
-                <a16:creationId xmlns:a16="http://schemas.microsoft.com/office/drawing/2014/main" id="{B6123613-6074-4053-9E58-8AE9A038BC20}"/>
-              </a:ext>
-            </a:extLst>
-          </p:cNvPr>
-          <p:cNvSpPr>
-            <a:spLocks xmlns:a="http://schemas.openxmlformats.org/drawingml/2006/main" noGrp="1"/>
-          </p:cNvSpPr>
-          <p:nvPr/>
-        </p:nvSpPr>
-        <p:spPr>
-          <a:xfrm xmlns:a="http://schemas.openxmlformats.org/drawingml/2006/main">
-            <a:off x="2514600" y="4352925"/>
-            <a:ext cx="685800" cy="209550"/>
-          </a:xfrm>
-          <a:prstGeom xmlns:a="http://schemas.openxmlformats.org/drawingml/2006/main" prst="rect">
-            <a:avLst/>
-          </a:prstGeom>
-          <a:noFill xmlns:a="http://schemas.openxmlformats.org/drawingml/2006/main"/>
-          <a:ln xmlns:a="http://schemas.openxmlformats.org/drawingml/2006/main" w="0">
-            <a:noFill/>
-          </a:ln>
-        </p:spPr>
-        <p:txBody>
-          <a:bodyPr xmlns:a="http://schemas.openxmlformats.org/drawingml/2006/main">
-            <a:noAutofit/>
-          </a:bodyPr>
-          <a:lstStyle xmlns:a="http://schemas.openxmlformats.org/drawingml/2006/main">
-            <a:defPPr algn="ctr">
-              <a:defRPr sz="1200" b="0">
-                <a:solidFill>
-                  <a:srgbClr val="596273"/>
-                </a:solidFill>
-                <a:latin typeface="Arial"/>
-                <a:ea typeface="Arial"/>
-                <a:cs typeface="Arial"/>
-              </a:defRPr>
-            </a:defPPr>
-          </a:lstStyle>
-          <a:p xmlns:a="http://schemas.openxmlformats.org/drawingml/2006/main">
-            <a:pPr algn="ctr">
-              <a:defRPr sz="1200" b="0">
-                <a:solidFill>
-                  <a:srgbClr val="596273"/>
-                </a:solidFill>
-                <a:latin typeface="Arial"/>
-                <a:ea typeface="Arial"/>
-                <a:cs typeface="Arial"/>
-              </a:defRPr>
-            </a:pPr>
-            <a:r>
-              <a:rPr sz="1200" b="0">
-                <a:solidFill>
-                  <a:srgbClr val="596273"/>
-                </a:solidFill>
-                <a:latin typeface="Arial"/>
-                <a:ea typeface="Arial"/>
-                <a:cs typeface="Arial"/>
-              </a:rPr>
-              <a:t>3×3</a:t>
-            </a:r>
-          </a:p>
-        </p:txBody>
-      </p:sp>
-      <p:sp>
-        <p:nvSpPr>
-          <p:cNvPr id="47" name="">
-            <a:extLst xmlns:a="http://schemas.openxmlformats.org/drawingml/2006/main">
-              <a:ext uri="{FF2B5EF4-FFF2-40B4-BE49-F238E27FC236}">
-                <a16:creationId xmlns:a16="http://schemas.microsoft.com/office/drawing/2014/main" id="{B0078606-695F-4B11-BBEF-21219DAE85FD}"/>
-              </a:ext>
-            </a:extLst>
-          </p:cNvPr>
-          <p:cNvSpPr>
-            <a:spLocks xmlns:a="http://schemas.openxmlformats.org/drawingml/2006/main" noGrp="1"/>
-          </p:cNvSpPr>
-          <p:nvPr/>
-        </p:nvSpPr>
-        <p:spPr>
-          <a:xfrm xmlns:a="http://schemas.openxmlformats.org/drawingml/2006/main">
-            <a:off x="3352800" y="4467225"/>
-            <a:ext cx="723900" cy="28575"/>
-          </a:xfrm>
-          <a:prstGeom xmlns:a="http://schemas.openxmlformats.org/drawingml/2006/main" prst="rect">
-            <a:avLst/>
-          </a:prstGeom>
-          <a:solidFill xmlns:a="http://schemas.openxmlformats.org/drawingml/2006/main">
-            <a:srgbClr val="0F9D8A"/>
-          </a:solidFill>
-          <a:ln xmlns:a="http://schemas.openxmlformats.org/drawingml/2006/main" w="9525">
-            <a:solidFill>
-              <a:srgbClr val="0F9D8A"/>
-            </a:solidFill>
-            <a:prstDash val="solid"/>
-          </a:ln>
-        </p:spPr>
-      </p:sp>
-      <p:sp>
-        <p:nvSpPr>
-          <p:cNvPr id="48" name="">
-            <a:extLst xmlns:a="http://schemas.openxmlformats.org/drawingml/2006/main">
-              <a:ext uri="{FF2B5EF4-FFF2-40B4-BE49-F238E27FC236}">
-                <a16:creationId xmlns:a16="http://schemas.microsoft.com/office/drawing/2014/main" id="{4230B249-7E41-4BF6-A15C-1CD0950FD144}"/>
-              </a:ext>
-            </a:extLst>
-          </p:cNvPr>
-          <p:cNvSpPr>
-            <a:spLocks xmlns:a="http://schemas.openxmlformats.org/drawingml/2006/main" noGrp="1"/>
-          </p:cNvSpPr>
-          <p:nvPr/>
-        </p:nvSpPr>
-        <p:spPr>
-          <a:xfrm xmlns:a="http://schemas.openxmlformats.org/drawingml/2006/main">
-            <a:off x="4000500" y="4410075"/>
-            <a:ext cx="133350" cy="142875"/>
-          </a:xfrm>
-          <a:prstGeom xmlns:a="http://schemas.openxmlformats.org/drawingml/2006/main" prst="triangle">
-            <a:avLst/>
-          </a:prstGeom>
-          <a:solidFill xmlns:a="http://schemas.openxmlformats.org/drawingml/2006/main">
-            <a:srgbClr val="0F9D8A"/>
-          </a:solidFill>
-          <a:ln xmlns:a="http://schemas.openxmlformats.org/drawingml/2006/main" w="0">
-            <a:solidFill>
-              <a:srgbClr val="0F9D8A"/>
-            </a:solidFill>
-          </a:ln>
-        </p:spPr>
-      </p:sp>
-      <p:sp>
-        <p:nvSpPr>
-          <p:cNvPr id="49" name="">
-            <a:extLst xmlns:a="http://schemas.openxmlformats.org/drawingml/2006/main">
-              <a:ext uri="{FF2B5EF4-FFF2-40B4-BE49-F238E27FC236}">
-                <a16:creationId xmlns:a16="http://schemas.microsoft.com/office/drawing/2014/main" id="{40380594-58BE-49DA-979A-86099BA1E2C7}"/>
-              </a:ext>
-            </a:extLst>
-          </p:cNvPr>
-          <p:cNvSpPr>
-            <a:spLocks xmlns:a="http://schemas.openxmlformats.org/drawingml/2006/main" noGrp="1"/>
-          </p:cNvSpPr>
-          <p:nvPr/>
-        </p:nvSpPr>
-        <p:spPr>
-          <a:xfrm xmlns:a="http://schemas.openxmlformats.org/drawingml/2006/main">
-            <a:off x="4267200" y="4171950"/>
-            <a:ext cx="590550" cy="590550"/>
-          </a:xfrm>
-          <a:prstGeom xmlns:a="http://schemas.openxmlformats.org/drawingml/2006/main" prst="roundRect">
-            <a:avLst>
-              <a:gd name="adj" fmla="val 11290"/>
-            </a:avLst>
-          </a:prstGeom>
-          <a:solidFill xmlns:a="http://schemas.openxmlformats.org/drawingml/2006/main">
-            <a:srgbClr val="E7F7F4"/>
-          </a:solidFill>
-          <a:ln xmlns:a="http://schemas.openxmlformats.org/drawingml/2006/main" w="9525">
-            <a:solidFill>
-              <a:srgbClr val="E7F7F4"/>
-            </a:solidFill>
-            <a:prstDash val="solid"/>
-          </a:ln>
-        </p:spPr>
-      </p:sp>
-      <p:sp>
-        <p:nvSpPr>
-          <p:cNvPr id="50" name="">
-            <a:extLst xmlns:a="http://schemas.openxmlformats.org/drawingml/2006/main">
-              <a:ext uri="{FF2B5EF4-FFF2-40B4-BE49-F238E27FC236}">
-                <a16:creationId xmlns:a16="http://schemas.microsoft.com/office/drawing/2014/main" id="{A46A7A11-EB66-4041-9030-711E445BF228}"/>
-              </a:ext>
-            </a:extLst>
-          </p:cNvPr>
-          <p:cNvSpPr>
-            <a:spLocks xmlns:a="http://schemas.openxmlformats.org/drawingml/2006/main" noGrp="1"/>
-          </p:cNvSpPr>
-          <p:nvPr/>
-        </p:nvSpPr>
-        <p:spPr>
-          <a:xfrm xmlns:a="http://schemas.openxmlformats.org/drawingml/2006/main">
-            <a:off x="4343400" y="4333875"/>
-            <a:ext cx="438150" cy="19050"/>
+          <p:cNvPr id="37" name="">
+            <a:extLst xmlns:a="http://schemas.openxmlformats.org/drawingml/2006/main">
+              <a:ext uri="{FF2B5EF4-FFF2-40B4-BE49-F238E27FC236}">
+                <a16:creationId xmlns:a16="http://schemas.microsoft.com/office/drawing/2014/main" id="{AA65EE2A-E1E7-4E54-B626-31EFF343734B}"/>
+              </a:ext>
+            </a:extLst>
+          </p:cNvPr>
+          <p:cNvSpPr>
+            <a:spLocks xmlns:a="http://schemas.openxmlformats.org/drawingml/2006/main" noGrp="1"/>
+          </p:cNvSpPr>
+          <p:nvPr/>
+        </p:nvSpPr>
+        <p:spPr>
+          <a:xfrm xmlns:a="http://schemas.openxmlformats.org/drawingml/2006/main">
+            <a:off x="4438650" y="3486150"/>
+            <a:ext cx="19050" cy="533400"/>
           </a:xfrm>
           <a:prstGeom xmlns:a="http://schemas.openxmlformats.org/drawingml/2006/main" prst="rect">
             <a:avLst/>
@@ -17536,22 +17177,125 @@
       </p:sp>
       <p:sp>
         <p:nvSpPr>
-          <p:cNvPr id="51" name="">
-            <a:extLst xmlns:a="http://schemas.openxmlformats.org/drawingml/2006/main">
-              <a:ext uri="{FF2B5EF4-FFF2-40B4-BE49-F238E27FC236}">
-                <a16:creationId xmlns:a16="http://schemas.microsoft.com/office/drawing/2014/main" id="{695370CD-BB5D-493A-AF8E-53ED56E2A096}"/>
-              </a:ext>
-            </a:extLst>
-          </p:cNvPr>
-          <p:cNvSpPr>
-            <a:spLocks xmlns:a="http://schemas.openxmlformats.org/drawingml/2006/main" noGrp="1"/>
-          </p:cNvSpPr>
-          <p:nvPr/>
-        </p:nvSpPr>
-        <p:spPr>
-          <a:xfrm xmlns:a="http://schemas.openxmlformats.org/drawingml/2006/main">
-            <a:off x="4343400" y="4467225"/>
-            <a:ext cx="438150" cy="19050"/>
+          <p:cNvPr id="38" name="">
+            <a:extLst xmlns:a="http://schemas.openxmlformats.org/drawingml/2006/main">
+              <a:ext uri="{FF2B5EF4-FFF2-40B4-BE49-F238E27FC236}">
+                <a16:creationId xmlns:a16="http://schemas.microsoft.com/office/drawing/2014/main" id="{AB643E85-3E8D-4085-8058-A64F44561031}"/>
+              </a:ext>
+            </a:extLst>
+          </p:cNvPr>
+          <p:cNvSpPr>
+            <a:spLocks xmlns:a="http://schemas.openxmlformats.org/drawingml/2006/main" noGrp="1"/>
+          </p:cNvSpPr>
+          <p:nvPr/>
+        </p:nvSpPr>
+        <p:spPr>
+          <a:xfrm xmlns:a="http://schemas.openxmlformats.org/drawingml/2006/main">
+            <a:off x="3943350" y="4124325"/>
+            <a:ext cx="762000" cy="171450"/>
+          </a:xfrm>
+          <a:prstGeom xmlns:a="http://schemas.openxmlformats.org/drawingml/2006/main" prst="rect">
+            <a:avLst/>
+          </a:prstGeom>
+          <a:noFill xmlns:a="http://schemas.openxmlformats.org/drawingml/2006/main"/>
+          <a:ln xmlns:a="http://schemas.openxmlformats.org/drawingml/2006/main" w="0">
+            <a:noFill/>
+          </a:ln>
+        </p:spPr>
+        <p:txBody>
+          <a:bodyPr xmlns:a="http://schemas.openxmlformats.org/drawingml/2006/main">
+            <a:noAutofit/>
+          </a:bodyPr>
+          <a:lstStyle xmlns:a="http://schemas.openxmlformats.org/drawingml/2006/main">
+            <a:defPPr algn="ctr">
+              <a:defRPr sz="1200" b="0">
+                <a:solidFill>
+                  <a:srgbClr val="596273"/>
+                </a:solidFill>
+                <a:latin typeface="Arial"/>
+                <a:ea typeface="Arial"/>
+                <a:cs typeface="Arial"/>
+              </a:defRPr>
+            </a:defPPr>
+          </a:lstStyle>
+          <a:p xmlns:a="http://schemas.openxmlformats.org/drawingml/2006/main">
+            <a:pPr algn="ctr">
+              <a:defRPr sz="1200" b="0">
+                <a:solidFill>
+                  <a:srgbClr val="596273"/>
+                </a:solidFill>
+                <a:latin typeface="Arial"/>
+                <a:ea typeface="Arial"/>
+                <a:cs typeface="Arial"/>
+              </a:defRPr>
+            </a:pPr>
+            <a:r>
+              <a:rPr sz="1200" b="0">
+                <a:solidFill>
+                  <a:srgbClr val="596273"/>
+                </a:solidFill>
+                <a:latin typeface="Arial"/>
+                <a:ea typeface="Arial"/>
+                <a:cs typeface="Arial"/>
+              </a:rPr>
+              <a:t>C2</a:t>
+            </a:r>
+          </a:p>
+        </p:txBody>
+      </p:sp>
+      <p:sp>
+        <p:nvSpPr>
+          <p:cNvPr id="39" name="">
+            <a:extLst xmlns:a="http://schemas.openxmlformats.org/drawingml/2006/main">
+              <a:ext uri="{FF2B5EF4-FFF2-40B4-BE49-F238E27FC236}">
+                <a16:creationId xmlns:a16="http://schemas.microsoft.com/office/drawing/2014/main" id="{5F78567B-7BFA-4F24-85FC-B7285454C237}"/>
+              </a:ext>
+            </a:extLst>
+          </p:cNvPr>
+          <p:cNvSpPr>
+            <a:spLocks xmlns:a="http://schemas.openxmlformats.org/drawingml/2006/main" noGrp="1"/>
+          </p:cNvSpPr>
+          <p:nvPr/>
+        </p:nvSpPr>
+        <p:spPr>
+          <a:xfrm xmlns:a="http://schemas.openxmlformats.org/drawingml/2006/main">
+            <a:off x="1143000" y="4362450"/>
+            <a:ext cx="762000" cy="685800"/>
+          </a:xfrm>
+          <a:prstGeom xmlns:a="http://schemas.openxmlformats.org/drawingml/2006/main" prst="roundRect">
+            <a:avLst>
+              <a:gd name="adj" fmla="val 9722"/>
+            </a:avLst>
+          </a:prstGeom>
+          <a:solidFill xmlns:a="http://schemas.openxmlformats.org/drawingml/2006/main">
+            <a:srgbClr val="E7F7F4"/>
+          </a:solidFill>
+          <a:ln xmlns:a="http://schemas.openxmlformats.org/drawingml/2006/main" w="9525">
+            <a:solidFill>
+              <a:srgbClr val="E5E1D8"/>
+            </a:solidFill>
+            <a:prstDash val="solid"/>
+          </a:ln>
+        </p:spPr>
+      </p:sp>
+      <p:sp>
+        <p:nvSpPr>
+          <p:cNvPr id="40" name="">
+            <a:extLst xmlns:a="http://schemas.openxmlformats.org/drawingml/2006/main">
+              <a:ext uri="{FF2B5EF4-FFF2-40B4-BE49-F238E27FC236}">
+                <a16:creationId xmlns:a16="http://schemas.microsoft.com/office/drawing/2014/main" id="{170245D1-5119-4F68-B2DD-B93CD7E82234}"/>
+              </a:ext>
+            </a:extLst>
+          </p:cNvPr>
+          <p:cNvSpPr>
+            <a:spLocks xmlns:a="http://schemas.openxmlformats.org/drawingml/2006/main" noGrp="1"/>
+          </p:cNvSpPr>
+          <p:nvPr/>
+        </p:nvSpPr>
+        <p:spPr>
+          <a:xfrm xmlns:a="http://schemas.openxmlformats.org/drawingml/2006/main">
+            <a:off x="1228725" y="4591050"/>
+            <a:ext cx="590550" cy="19050"/>
           </a:xfrm>
           <a:prstGeom xmlns:a="http://schemas.openxmlformats.org/drawingml/2006/main" prst="rect">
             <a:avLst/>
@@ -17569,22 +17313,22 @@
       </p:sp>
       <p:sp>
         <p:nvSpPr>
-          <p:cNvPr id="52" name="">
-            <a:extLst xmlns:a="http://schemas.openxmlformats.org/drawingml/2006/main">
-              <a:ext uri="{FF2B5EF4-FFF2-40B4-BE49-F238E27FC236}">
-                <a16:creationId xmlns:a16="http://schemas.microsoft.com/office/drawing/2014/main" id="{9FE07E15-DD37-4768-9519-9893D576D62E}"/>
-              </a:ext>
-            </a:extLst>
-          </p:cNvPr>
-          <p:cNvSpPr>
-            <a:spLocks xmlns:a="http://schemas.openxmlformats.org/drawingml/2006/main" noGrp="1"/>
-          </p:cNvSpPr>
-          <p:nvPr/>
-        </p:nvSpPr>
-        <p:spPr>
-          <a:xfrm xmlns:a="http://schemas.openxmlformats.org/drawingml/2006/main">
-            <a:off x="4343400" y="4600575"/>
-            <a:ext cx="438150" cy="19050"/>
+          <p:cNvPr id="41" name="">
+            <a:extLst xmlns:a="http://schemas.openxmlformats.org/drawingml/2006/main">
+              <a:ext uri="{FF2B5EF4-FFF2-40B4-BE49-F238E27FC236}">
+                <a16:creationId xmlns:a16="http://schemas.microsoft.com/office/drawing/2014/main" id="{776EA55F-50E1-46F5-9024-41EF4FC1A47F}"/>
+              </a:ext>
+            </a:extLst>
+          </p:cNvPr>
+          <p:cNvSpPr>
+            <a:spLocks xmlns:a="http://schemas.openxmlformats.org/drawingml/2006/main" noGrp="1"/>
+          </p:cNvSpPr>
+          <p:nvPr/>
+        </p:nvSpPr>
+        <p:spPr>
+          <a:xfrm xmlns:a="http://schemas.openxmlformats.org/drawingml/2006/main">
+            <a:off x="1228725" y="4819650"/>
+            <a:ext cx="590550" cy="19050"/>
           </a:xfrm>
           <a:prstGeom xmlns:a="http://schemas.openxmlformats.org/drawingml/2006/main" prst="rect">
             <a:avLst/>
@@ -17602,22 +17346,88 @@
       </p:sp>
       <p:sp>
         <p:nvSpPr>
-          <p:cNvPr id="53" name="">
-            <a:extLst xmlns:a="http://schemas.openxmlformats.org/drawingml/2006/main">
-              <a:ext uri="{FF2B5EF4-FFF2-40B4-BE49-F238E27FC236}">
-                <a16:creationId xmlns:a16="http://schemas.microsoft.com/office/drawing/2014/main" id="{7111E83C-C04E-4953-ACC6-FFB8FB98CC56}"/>
-              </a:ext>
-            </a:extLst>
-          </p:cNvPr>
-          <p:cNvSpPr>
-            <a:spLocks xmlns:a="http://schemas.openxmlformats.org/drawingml/2006/main" noGrp="1"/>
-          </p:cNvSpPr>
-          <p:nvPr/>
-        </p:nvSpPr>
-        <p:spPr>
-          <a:xfrm xmlns:a="http://schemas.openxmlformats.org/drawingml/2006/main">
-            <a:off x="4267200" y="4838700"/>
-            <a:ext cx="590550" cy="190500"/>
+          <p:cNvPr id="42" name="">
+            <a:extLst xmlns:a="http://schemas.openxmlformats.org/drawingml/2006/main">
+              <a:ext uri="{FF2B5EF4-FFF2-40B4-BE49-F238E27FC236}">
+                <a16:creationId xmlns:a16="http://schemas.microsoft.com/office/drawing/2014/main" id="{9E190AD6-1A5A-406B-8A76-B6E70BB3FF8E}"/>
+              </a:ext>
+            </a:extLst>
+          </p:cNvPr>
+          <p:cNvSpPr>
+            <a:spLocks xmlns:a="http://schemas.openxmlformats.org/drawingml/2006/main" noGrp="1"/>
+          </p:cNvSpPr>
+          <p:nvPr/>
+        </p:nvSpPr>
+        <p:spPr>
+          <a:xfrm xmlns:a="http://schemas.openxmlformats.org/drawingml/2006/main">
+            <a:off x="1390650" y="4438650"/>
+            <a:ext cx="19050" cy="533400"/>
+          </a:xfrm>
+          <a:prstGeom xmlns:a="http://schemas.openxmlformats.org/drawingml/2006/main" prst="rect">
+            <a:avLst/>
+          </a:prstGeom>
+          <a:solidFill xmlns:a="http://schemas.openxmlformats.org/drawingml/2006/main">
+            <a:srgbClr val="FFFFFF"/>
+          </a:solidFill>
+          <a:ln xmlns:a="http://schemas.openxmlformats.org/drawingml/2006/main" w="9525">
+            <a:solidFill>
+              <a:srgbClr val="FFFFFF"/>
+            </a:solidFill>
+            <a:prstDash val="solid"/>
+          </a:ln>
+        </p:spPr>
+      </p:sp>
+      <p:sp>
+        <p:nvSpPr>
+          <p:cNvPr id="43" name="">
+            <a:extLst xmlns:a="http://schemas.openxmlformats.org/drawingml/2006/main">
+              <a:ext uri="{FF2B5EF4-FFF2-40B4-BE49-F238E27FC236}">
+                <a16:creationId xmlns:a16="http://schemas.microsoft.com/office/drawing/2014/main" id="{A97E3134-FCA4-4E41-AC96-762CB9A57515}"/>
+              </a:ext>
+            </a:extLst>
+          </p:cNvPr>
+          <p:cNvSpPr>
+            <a:spLocks xmlns:a="http://schemas.openxmlformats.org/drawingml/2006/main" noGrp="1"/>
+          </p:cNvSpPr>
+          <p:nvPr/>
+        </p:nvSpPr>
+        <p:spPr>
+          <a:xfrm xmlns:a="http://schemas.openxmlformats.org/drawingml/2006/main">
+            <a:off x="1638300" y="4438650"/>
+            <a:ext cx="19050" cy="533400"/>
+          </a:xfrm>
+          <a:prstGeom xmlns:a="http://schemas.openxmlformats.org/drawingml/2006/main" prst="rect">
+            <a:avLst/>
+          </a:prstGeom>
+          <a:solidFill xmlns:a="http://schemas.openxmlformats.org/drawingml/2006/main">
+            <a:srgbClr val="FFFFFF"/>
+          </a:solidFill>
+          <a:ln xmlns:a="http://schemas.openxmlformats.org/drawingml/2006/main" w="9525">
+            <a:solidFill>
+              <a:srgbClr val="FFFFFF"/>
+            </a:solidFill>
+            <a:prstDash val="solid"/>
+          </a:ln>
+        </p:spPr>
+      </p:sp>
+      <p:sp>
+        <p:nvSpPr>
+          <p:cNvPr id="44" name="">
+            <a:extLst xmlns:a="http://schemas.openxmlformats.org/drawingml/2006/main">
+              <a:ext uri="{FF2B5EF4-FFF2-40B4-BE49-F238E27FC236}">
+                <a16:creationId xmlns:a16="http://schemas.microsoft.com/office/drawing/2014/main" id="{849842D5-4411-4C39-95E8-2058B709B372}"/>
+              </a:ext>
+            </a:extLst>
+          </p:cNvPr>
+          <p:cNvSpPr>
+            <a:spLocks xmlns:a="http://schemas.openxmlformats.org/drawingml/2006/main" noGrp="1"/>
+          </p:cNvSpPr>
+          <p:nvPr/>
+        </p:nvSpPr>
+        <p:spPr>
+          <a:xfrm xmlns:a="http://schemas.openxmlformats.org/drawingml/2006/main">
+            <a:off x="1143000" y="5076825"/>
+            <a:ext cx="762000" cy="171450"/>
           </a:xfrm>
           <a:prstGeom xmlns:a="http://schemas.openxmlformats.org/drawingml/2006/main" prst="rect">
             <a:avLst/>
@@ -17670,22 +17480,428 @@
       </p:sp>
       <p:sp>
         <p:nvSpPr>
+          <p:cNvPr id="45" name="">
+            <a:extLst xmlns:a="http://schemas.openxmlformats.org/drawingml/2006/main">
+              <a:ext uri="{FF2B5EF4-FFF2-40B4-BE49-F238E27FC236}">
+                <a16:creationId xmlns:a16="http://schemas.microsoft.com/office/drawing/2014/main" id="{669F49B2-2A5B-4286-AA92-0F95CF90E5A5}"/>
+              </a:ext>
+            </a:extLst>
+          </p:cNvPr>
+          <p:cNvSpPr>
+            <a:spLocks xmlns:a="http://schemas.openxmlformats.org/drawingml/2006/main" noGrp="1"/>
+          </p:cNvSpPr>
+          <p:nvPr/>
+        </p:nvSpPr>
+        <p:spPr>
+          <a:xfrm xmlns:a="http://schemas.openxmlformats.org/drawingml/2006/main">
+            <a:off x="2057400" y="4533900"/>
+            <a:ext cx="342900" cy="342900"/>
+          </a:xfrm>
+          <a:prstGeom xmlns:a="http://schemas.openxmlformats.org/drawingml/2006/main" prst="rect">
+            <a:avLst/>
+          </a:prstGeom>
+          <a:noFill xmlns:a="http://schemas.openxmlformats.org/drawingml/2006/main"/>
+          <a:ln xmlns:a="http://schemas.openxmlformats.org/drawingml/2006/main" w="0">
+            <a:noFill/>
+          </a:ln>
+        </p:spPr>
+        <p:txBody>
+          <a:bodyPr xmlns:a="http://schemas.openxmlformats.org/drawingml/2006/main">
+            <a:noAutofit/>
+          </a:bodyPr>
+          <a:lstStyle xmlns:a="http://schemas.openxmlformats.org/drawingml/2006/main">
+            <a:defPPr algn="ctr">
+              <a:defRPr sz="1800" b="0">
+                <a:solidFill>
+                  <a:srgbClr val="111827"/>
+                </a:solidFill>
+                <a:latin typeface="Arial"/>
+                <a:ea typeface="Arial"/>
+                <a:cs typeface="Arial"/>
+              </a:defRPr>
+            </a:defPPr>
+          </a:lstStyle>
+          <a:p xmlns:a="http://schemas.openxmlformats.org/drawingml/2006/main">
+            <a:pPr algn="ctr">
+              <a:defRPr sz="1800" b="0">
+                <a:solidFill>
+                  <a:srgbClr val="111827"/>
+                </a:solidFill>
+                <a:latin typeface="Arial"/>
+                <a:ea typeface="Arial"/>
+                <a:cs typeface="Arial"/>
+              </a:defRPr>
+            </a:pPr>
+            <a:r>
+              <a:rPr sz="1800" b="0">
+                <a:solidFill>
+                  <a:srgbClr val="111827"/>
+                </a:solidFill>
+                <a:latin typeface="Arial"/>
+                <a:ea typeface="Arial"/>
+                <a:cs typeface="Arial"/>
+              </a:rPr>
+              <a:t>→</a:t>
+            </a:r>
+          </a:p>
+        </p:txBody>
+      </p:sp>
+      <p:sp>
+        <p:nvSpPr>
+          <p:cNvPr id="46" name="">
+            <a:extLst xmlns:a="http://schemas.openxmlformats.org/drawingml/2006/main">
+              <a:ext uri="{FF2B5EF4-FFF2-40B4-BE49-F238E27FC236}">
+                <a16:creationId xmlns:a16="http://schemas.microsoft.com/office/drawing/2014/main" id="{BB75CA18-9E14-4DB8-9BE3-C5EF65DA22FC}"/>
+              </a:ext>
+            </a:extLst>
+          </p:cNvPr>
+          <p:cNvSpPr>
+            <a:spLocks xmlns:a="http://schemas.openxmlformats.org/drawingml/2006/main" noGrp="1"/>
+          </p:cNvSpPr>
+          <p:nvPr/>
+        </p:nvSpPr>
+        <p:spPr>
+          <a:xfrm xmlns:a="http://schemas.openxmlformats.org/drawingml/2006/main">
+            <a:off x="2476500" y="4448175"/>
+            <a:ext cx="914400" cy="514350"/>
+          </a:xfrm>
+          <a:prstGeom xmlns:a="http://schemas.openxmlformats.org/drawingml/2006/main" prst="roundRect">
+            <a:avLst>
+              <a:gd name="adj" fmla="val 12963"/>
+            </a:avLst>
+          </a:prstGeom>
+          <a:solidFill xmlns:a="http://schemas.openxmlformats.org/drawingml/2006/main">
+            <a:srgbClr val="E7F7F4"/>
+          </a:solidFill>
+          <a:ln xmlns:a="http://schemas.openxmlformats.org/drawingml/2006/main" w="9525">
+            <a:solidFill>
+              <a:srgbClr val="0F9D8A"/>
+            </a:solidFill>
+            <a:prstDash val="solid"/>
+          </a:ln>
+        </p:spPr>
+      </p:sp>
+      <p:sp>
+        <p:nvSpPr>
+          <p:cNvPr id="47" name="">
+            <a:extLst xmlns:a="http://schemas.openxmlformats.org/drawingml/2006/main">
+              <a:ext uri="{FF2B5EF4-FFF2-40B4-BE49-F238E27FC236}">
+                <a16:creationId xmlns:a16="http://schemas.microsoft.com/office/drawing/2014/main" id="{ABD51C36-66BF-4C66-9A19-31BD5F377752}"/>
+              </a:ext>
+            </a:extLst>
+          </p:cNvPr>
+          <p:cNvSpPr>
+            <a:spLocks xmlns:a="http://schemas.openxmlformats.org/drawingml/2006/main" noGrp="1"/>
+          </p:cNvSpPr>
+          <p:nvPr/>
+        </p:nvSpPr>
+        <p:spPr>
+          <a:xfrm xmlns:a="http://schemas.openxmlformats.org/drawingml/2006/main">
+            <a:off x="2571750" y="4591050"/>
+            <a:ext cx="723900" cy="228600"/>
+          </a:xfrm>
+          <a:prstGeom xmlns:a="http://schemas.openxmlformats.org/drawingml/2006/main" prst="rect">
+            <a:avLst/>
+          </a:prstGeom>
+          <a:noFill xmlns:a="http://schemas.openxmlformats.org/drawingml/2006/main"/>
+          <a:ln xmlns:a="http://schemas.openxmlformats.org/drawingml/2006/main" w="0">
+            <a:noFill/>
+          </a:ln>
+        </p:spPr>
+        <p:txBody>
+          <a:bodyPr xmlns:a="http://schemas.openxmlformats.org/drawingml/2006/main">
+            <a:noAutofit/>
+          </a:bodyPr>
+          <a:lstStyle xmlns:a="http://schemas.openxmlformats.org/drawingml/2006/main">
+            <a:defPPr algn="ctr">
+              <a:defRPr sz="1800" b="0">
+                <a:solidFill>
+                  <a:srgbClr val="111827"/>
+                </a:solidFill>
+                <a:latin typeface="Arial"/>
+                <a:ea typeface="Arial"/>
+                <a:cs typeface="Arial"/>
+              </a:defRPr>
+            </a:defPPr>
+          </a:lstStyle>
+          <a:p xmlns:a="http://schemas.openxmlformats.org/drawingml/2006/main">
+            <a:pPr algn="ctr">
+              <a:defRPr sz="1800" b="0">
+                <a:solidFill>
+                  <a:srgbClr val="111827"/>
+                </a:solidFill>
+                <a:latin typeface="Arial"/>
+                <a:ea typeface="Arial"/>
+                <a:cs typeface="Arial"/>
+              </a:defRPr>
+            </a:pPr>
+            <a:r>
+              <a:rPr sz="1800" b="0">
+                <a:solidFill>
+                  <a:srgbClr val="111827"/>
+                </a:solidFill>
+                <a:latin typeface="Arial"/>
+                <a:ea typeface="Arial"/>
+                <a:cs typeface="Arial"/>
+              </a:rPr>
+              <a:t>3×3 #3</a:t>
+            </a:r>
+          </a:p>
+        </p:txBody>
+      </p:sp>
+      <p:sp>
+        <p:nvSpPr>
+          <p:cNvPr id="48" name="">
+            <a:extLst xmlns:a="http://schemas.openxmlformats.org/drawingml/2006/main">
+              <a:ext uri="{FF2B5EF4-FFF2-40B4-BE49-F238E27FC236}">
+                <a16:creationId xmlns:a16="http://schemas.microsoft.com/office/drawing/2014/main" id="{2BE7E193-B887-4B3D-8597-6E0801B913FC}"/>
+              </a:ext>
+            </a:extLst>
+          </p:cNvPr>
+          <p:cNvSpPr>
+            <a:spLocks xmlns:a="http://schemas.openxmlformats.org/drawingml/2006/main" noGrp="1"/>
+          </p:cNvSpPr>
+          <p:nvPr/>
+        </p:nvSpPr>
+        <p:spPr>
+          <a:xfrm xmlns:a="http://schemas.openxmlformats.org/drawingml/2006/main">
+            <a:off x="3524250" y="4533900"/>
+            <a:ext cx="342900" cy="342900"/>
+          </a:xfrm>
+          <a:prstGeom xmlns:a="http://schemas.openxmlformats.org/drawingml/2006/main" prst="rect">
+            <a:avLst/>
+          </a:prstGeom>
+          <a:noFill xmlns:a="http://schemas.openxmlformats.org/drawingml/2006/main"/>
+          <a:ln xmlns:a="http://schemas.openxmlformats.org/drawingml/2006/main" w="0">
+            <a:noFill/>
+          </a:ln>
+        </p:spPr>
+        <p:txBody>
+          <a:bodyPr xmlns:a="http://schemas.openxmlformats.org/drawingml/2006/main">
+            <a:noAutofit/>
+          </a:bodyPr>
+          <a:lstStyle xmlns:a="http://schemas.openxmlformats.org/drawingml/2006/main">
+            <a:defPPr algn="ctr">
+              <a:defRPr sz="1800" b="0">
+                <a:solidFill>
+                  <a:srgbClr val="111827"/>
+                </a:solidFill>
+                <a:latin typeface="Arial"/>
+                <a:ea typeface="Arial"/>
+                <a:cs typeface="Arial"/>
+              </a:defRPr>
+            </a:defPPr>
+          </a:lstStyle>
+          <a:p xmlns:a="http://schemas.openxmlformats.org/drawingml/2006/main">
+            <a:pPr algn="ctr">
+              <a:defRPr sz="1800" b="0">
+                <a:solidFill>
+                  <a:srgbClr val="111827"/>
+                </a:solidFill>
+                <a:latin typeface="Arial"/>
+                <a:ea typeface="Arial"/>
+                <a:cs typeface="Arial"/>
+              </a:defRPr>
+            </a:pPr>
+            <a:r>
+              <a:rPr sz="1800" b="0">
+                <a:solidFill>
+                  <a:srgbClr val="111827"/>
+                </a:solidFill>
+                <a:latin typeface="Arial"/>
+                <a:ea typeface="Arial"/>
+                <a:cs typeface="Arial"/>
+              </a:rPr>
+              <a:t>→</a:t>
+            </a:r>
+          </a:p>
+        </p:txBody>
+      </p:sp>
+      <p:sp>
+        <p:nvSpPr>
+          <p:cNvPr id="49" name="">
+            <a:extLst xmlns:a="http://schemas.openxmlformats.org/drawingml/2006/main">
+              <a:ext uri="{FF2B5EF4-FFF2-40B4-BE49-F238E27FC236}">
+                <a16:creationId xmlns:a16="http://schemas.microsoft.com/office/drawing/2014/main" id="{4405D599-4B58-47B3-BE94-9E7AB4D7D7E5}"/>
+              </a:ext>
+            </a:extLst>
+          </p:cNvPr>
+          <p:cNvSpPr>
+            <a:spLocks xmlns:a="http://schemas.openxmlformats.org/drawingml/2006/main" noGrp="1"/>
+          </p:cNvSpPr>
+          <p:nvPr/>
+        </p:nvSpPr>
+        <p:spPr>
+          <a:xfrm xmlns:a="http://schemas.openxmlformats.org/drawingml/2006/main">
+            <a:off x="3943350" y="4362450"/>
+            <a:ext cx="762000" cy="685800"/>
+          </a:xfrm>
+          <a:prstGeom xmlns:a="http://schemas.openxmlformats.org/drawingml/2006/main" prst="roundRect">
+            <a:avLst>
+              <a:gd name="adj" fmla="val 9722"/>
+            </a:avLst>
+          </a:prstGeom>
+          <a:solidFill xmlns:a="http://schemas.openxmlformats.org/drawingml/2006/main">
+            <a:srgbClr val="E7F7F4"/>
+          </a:solidFill>
+          <a:ln xmlns:a="http://schemas.openxmlformats.org/drawingml/2006/main" w="9525">
+            <a:solidFill>
+              <a:srgbClr val="E5E1D8"/>
+            </a:solidFill>
+            <a:prstDash val="solid"/>
+          </a:ln>
+        </p:spPr>
+      </p:sp>
+      <p:sp>
+        <p:nvSpPr>
+          <p:cNvPr id="50" name="">
+            <a:extLst xmlns:a="http://schemas.openxmlformats.org/drawingml/2006/main">
+              <a:ext uri="{FF2B5EF4-FFF2-40B4-BE49-F238E27FC236}">
+                <a16:creationId xmlns:a16="http://schemas.microsoft.com/office/drawing/2014/main" id="{762CF175-082A-4C2F-A872-94DA2662BAE6}"/>
+              </a:ext>
+            </a:extLst>
+          </p:cNvPr>
+          <p:cNvSpPr>
+            <a:spLocks xmlns:a="http://schemas.openxmlformats.org/drawingml/2006/main" noGrp="1"/>
+          </p:cNvSpPr>
+          <p:nvPr/>
+        </p:nvSpPr>
+        <p:spPr>
+          <a:xfrm xmlns:a="http://schemas.openxmlformats.org/drawingml/2006/main">
+            <a:off x="4029075" y="4591050"/>
+            <a:ext cx="590550" cy="19050"/>
+          </a:xfrm>
+          <a:prstGeom xmlns:a="http://schemas.openxmlformats.org/drawingml/2006/main" prst="rect">
+            <a:avLst/>
+          </a:prstGeom>
+          <a:solidFill xmlns:a="http://schemas.openxmlformats.org/drawingml/2006/main">
+            <a:srgbClr val="FFFFFF"/>
+          </a:solidFill>
+          <a:ln xmlns:a="http://schemas.openxmlformats.org/drawingml/2006/main" w="9525">
+            <a:solidFill>
+              <a:srgbClr val="FFFFFF"/>
+            </a:solidFill>
+            <a:prstDash val="solid"/>
+          </a:ln>
+        </p:spPr>
+      </p:sp>
+      <p:sp>
+        <p:nvSpPr>
+          <p:cNvPr id="51" name="">
+            <a:extLst xmlns:a="http://schemas.openxmlformats.org/drawingml/2006/main">
+              <a:ext uri="{FF2B5EF4-FFF2-40B4-BE49-F238E27FC236}">
+                <a16:creationId xmlns:a16="http://schemas.microsoft.com/office/drawing/2014/main" id="{2EA2C238-1543-4181-AE3B-56A7790B742F}"/>
+              </a:ext>
+            </a:extLst>
+          </p:cNvPr>
+          <p:cNvSpPr>
+            <a:spLocks xmlns:a="http://schemas.openxmlformats.org/drawingml/2006/main" noGrp="1"/>
+          </p:cNvSpPr>
+          <p:nvPr/>
+        </p:nvSpPr>
+        <p:spPr>
+          <a:xfrm xmlns:a="http://schemas.openxmlformats.org/drawingml/2006/main">
+            <a:off x="4029075" y="4819650"/>
+            <a:ext cx="590550" cy="19050"/>
+          </a:xfrm>
+          <a:prstGeom xmlns:a="http://schemas.openxmlformats.org/drawingml/2006/main" prst="rect">
+            <a:avLst/>
+          </a:prstGeom>
+          <a:solidFill xmlns:a="http://schemas.openxmlformats.org/drawingml/2006/main">
+            <a:srgbClr val="FFFFFF"/>
+          </a:solidFill>
+          <a:ln xmlns:a="http://schemas.openxmlformats.org/drawingml/2006/main" w="9525">
+            <a:solidFill>
+              <a:srgbClr val="FFFFFF"/>
+            </a:solidFill>
+            <a:prstDash val="solid"/>
+          </a:ln>
+        </p:spPr>
+      </p:sp>
+      <p:sp>
+        <p:nvSpPr>
+          <p:cNvPr id="52" name="">
+            <a:extLst xmlns:a="http://schemas.openxmlformats.org/drawingml/2006/main">
+              <a:ext uri="{FF2B5EF4-FFF2-40B4-BE49-F238E27FC236}">
+                <a16:creationId xmlns:a16="http://schemas.microsoft.com/office/drawing/2014/main" id="{06E52E1F-2DED-4D0B-AE60-978471AD0910}"/>
+              </a:ext>
+            </a:extLst>
+          </p:cNvPr>
+          <p:cNvSpPr>
+            <a:spLocks xmlns:a="http://schemas.openxmlformats.org/drawingml/2006/main" noGrp="1"/>
+          </p:cNvSpPr>
+          <p:nvPr/>
+        </p:nvSpPr>
+        <p:spPr>
+          <a:xfrm xmlns:a="http://schemas.openxmlformats.org/drawingml/2006/main">
+            <a:off x="4191000" y="4438650"/>
+            <a:ext cx="19050" cy="533400"/>
+          </a:xfrm>
+          <a:prstGeom xmlns:a="http://schemas.openxmlformats.org/drawingml/2006/main" prst="rect">
+            <a:avLst/>
+          </a:prstGeom>
+          <a:solidFill xmlns:a="http://schemas.openxmlformats.org/drawingml/2006/main">
+            <a:srgbClr val="FFFFFF"/>
+          </a:solidFill>
+          <a:ln xmlns:a="http://schemas.openxmlformats.org/drawingml/2006/main" w="9525">
+            <a:solidFill>
+              <a:srgbClr val="FFFFFF"/>
+            </a:solidFill>
+            <a:prstDash val="solid"/>
+          </a:ln>
+        </p:spPr>
+      </p:sp>
+      <p:sp>
+        <p:nvSpPr>
+          <p:cNvPr id="53" name="">
+            <a:extLst xmlns:a="http://schemas.openxmlformats.org/drawingml/2006/main">
+              <a:ext uri="{FF2B5EF4-FFF2-40B4-BE49-F238E27FC236}">
+                <a16:creationId xmlns:a16="http://schemas.microsoft.com/office/drawing/2014/main" id="{55EF2C46-FBB6-483A-9722-6447FB0593B0}"/>
+              </a:ext>
+            </a:extLst>
+          </p:cNvPr>
+          <p:cNvSpPr>
+            <a:spLocks xmlns:a="http://schemas.openxmlformats.org/drawingml/2006/main" noGrp="1"/>
+          </p:cNvSpPr>
+          <p:nvPr/>
+        </p:nvSpPr>
+        <p:spPr>
+          <a:xfrm xmlns:a="http://schemas.openxmlformats.org/drawingml/2006/main">
+            <a:off x="4438650" y="4438650"/>
+            <a:ext cx="19050" cy="533400"/>
+          </a:xfrm>
+          <a:prstGeom xmlns:a="http://schemas.openxmlformats.org/drawingml/2006/main" prst="rect">
+            <a:avLst/>
+          </a:prstGeom>
+          <a:solidFill xmlns:a="http://schemas.openxmlformats.org/drawingml/2006/main">
+            <a:srgbClr val="FFFFFF"/>
+          </a:solidFill>
+          <a:ln xmlns:a="http://schemas.openxmlformats.org/drawingml/2006/main" w="9525">
+            <a:solidFill>
+              <a:srgbClr val="FFFFFF"/>
+            </a:solidFill>
+            <a:prstDash val="solid"/>
+          </a:ln>
+        </p:spPr>
+      </p:sp>
+      <p:sp>
+        <p:nvSpPr>
           <p:cNvPr id="54" name="">
             <a:extLst xmlns:a="http://schemas.openxmlformats.org/drawingml/2006/main">
               <a:ext uri="{FF2B5EF4-FFF2-40B4-BE49-F238E27FC236}">
-                <a16:creationId xmlns:a16="http://schemas.microsoft.com/office/drawing/2014/main" id="{822F2814-F23E-43C7-879A-3D3AD5FFF31A}"/>
-              </a:ext>
-            </a:extLst>
-          </p:cNvPr>
-          <p:cNvSpPr>
-            <a:spLocks xmlns:a="http://schemas.openxmlformats.org/drawingml/2006/main" noGrp="1"/>
-          </p:cNvSpPr>
-          <p:nvPr/>
-        </p:nvSpPr>
-        <p:spPr>
-          <a:xfrm xmlns:a="http://schemas.openxmlformats.org/drawingml/2006/main">
-            <a:off x="723900" y="5238750"/>
-            <a:ext cx="4762500" cy="247650"/>
+                <a16:creationId xmlns:a16="http://schemas.microsoft.com/office/drawing/2014/main" id="{CAA278FB-9727-4632-A977-A6B048DC4416}"/>
+              </a:ext>
+            </a:extLst>
+          </p:cNvPr>
+          <p:cNvSpPr>
+            <a:spLocks xmlns:a="http://schemas.openxmlformats.org/drawingml/2006/main" noGrp="1"/>
+          </p:cNvSpPr>
+          <p:nvPr/>
+        </p:nvSpPr>
+        <p:spPr>
+          <a:xfrm xmlns:a="http://schemas.openxmlformats.org/drawingml/2006/main">
+            <a:off x="3943350" y="5076825"/>
+            <a:ext cx="762000" cy="171450"/>
           </a:xfrm>
           <a:prstGeom xmlns:a="http://schemas.openxmlformats.org/drawingml/2006/main" prst="rect">
             <a:avLst/>
@@ -17731,7 +17947,7 @@
                 <a:ea typeface="Arial"/>
                 <a:cs typeface="Arial"/>
               </a:rPr>
-              <a:t>C1 → C1, C2 → C2, C3 → C3</a:t>
+              <a:t>C3</a:t>
             </a:r>
           </a:p>
         </p:txBody>
@@ -17741,19 +17957,87 @@
           <p:cNvPr id="55" name="">
             <a:extLst xmlns:a="http://schemas.openxmlformats.org/drawingml/2006/main">
               <a:ext uri="{FF2B5EF4-FFF2-40B4-BE49-F238E27FC236}">
-                <a16:creationId xmlns:a16="http://schemas.microsoft.com/office/drawing/2014/main" id="{3AAE4016-40BB-4A6D-BE92-F6096786C155}"/>
-              </a:ext>
-            </a:extLst>
-          </p:cNvPr>
-          <p:cNvSpPr>
-            <a:spLocks xmlns:a="http://schemas.openxmlformats.org/drawingml/2006/main" noGrp="1"/>
-          </p:cNvSpPr>
-          <p:nvPr/>
-        </p:nvSpPr>
-        <p:spPr>
-          <a:xfrm xmlns:a="http://schemas.openxmlformats.org/drawingml/2006/main">
-            <a:off x="6096000" y="1466850"/>
-            <a:ext cx="19050" cy="4076700"/>
+                <a16:creationId xmlns:a16="http://schemas.microsoft.com/office/drawing/2014/main" id="{9F9A1CFD-872C-4D75-BBD4-19F8749707BA}"/>
+              </a:ext>
+            </a:extLst>
+          </p:cNvPr>
+          <p:cNvSpPr>
+            <a:spLocks xmlns:a="http://schemas.openxmlformats.org/drawingml/2006/main" noGrp="1"/>
+          </p:cNvSpPr>
+          <p:nvPr/>
+        </p:nvSpPr>
+        <p:spPr>
+          <a:xfrm xmlns:a="http://schemas.openxmlformats.org/drawingml/2006/main">
+            <a:off x="723900" y="5524500"/>
+            <a:ext cx="4762500" cy="266700"/>
+          </a:xfrm>
+          <a:prstGeom xmlns:a="http://schemas.openxmlformats.org/drawingml/2006/main" prst="rect">
+            <a:avLst/>
+          </a:prstGeom>
+          <a:noFill xmlns:a="http://schemas.openxmlformats.org/drawingml/2006/main"/>
+          <a:ln xmlns:a="http://schemas.openxmlformats.org/drawingml/2006/main" w="0">
+            <a:noFill/>
+          </a:ln>
+        </p:spPr>
+        <p:txBody>
+          <a:bodyPr xmlns:a="http://schemas.openxmlformats.org/drawingml/2006/main">
+            <a:noAutofit/>
+          </a:bodyPr>
+          <a:lstStyle xmlns:a="http://schemas.openxmlformats.org/drawingml/2006/main">
+            <a:defPPr algn="ctr">
+              <a:defRPr sz="1200" b="0">
+                <a:solidFill>
+                  <a:srgbClr val="596273"/>
+                </a:solidFill>
+                <a:latin typeface="Arial"/>
+                <a:ea typeface="Arial"/>
+                <a:cs typeface="Arial"/>
+              </a:defRPr>
+            </a:defPPr>
+          </a:lstStyle>
+          <a:p xmlns:a="http://schemas.openxmlformats.org/drawingml/2006/main">
+            <a:pPr algn="ctr">
+              <a:defRPr sz="1200" b="0">
+                <a:solidFill>
+                  <a:srgbClr val="596273"/>
+                </a:solidFill>
+                <a:latin typeface="Arial"/>
+                <a:ea typeface="Arial"/>
+                <a:cs typeface="Arial"/>
+              </a:defRPr>
+            </a:pPr>
+            <a:r>
+              <a:rPr sz="1200" b="0">
+                <a:solidFill>
+                  <a:srgbClr val="596273"/>
+                </a:solidFill>
+                <a:latin typeface="Arial"/>
+                <a:ea typeface="Arial"/>
+                <a:cs typeface="Arial"/>
+              </a:rPr>
+              <a:t>Ни один фильтр не смешивает C1, C2 и C3</a:t>
+            </a:r>
+          </a:p>
+        </p:txBody>
+      </p:sp>
+      <p:sp>
+        <p:nvSpPr>
+          <p:cNvPr id="56" name="">
+            <a:extLst xmlns:a="http://schemas.openxmlformats.org/drawingml/2006/main">
+              <a:ext uri="{FF2B5EF4-FFF2-40B4-BE49-F238E27FC236}">
+                <a16:creationId xmlns:a16="http://schemas.microsoft.com/office/drawing/2014/main" id="{997B5E00-C981-46BB-A795-1C753524CC99}"/>
+              </a:ext>
+            </a:extLst>
+          </p:cNvPr>
+          <p:cNvSpPr>
+            <a:spLocks xmlns:a="http://schemas.openxmlformats.org/drawingml/2006/main" noGrp="1"/>
+          </p:cNvSpPr>
+          <p:nvPr/>
+        </p:nvSpPr>
+        <p:spPr>
+          <a:xfrm xmlns:a="http://schemas.openxmlformats.org/drawingml/2006/main">
+            <a:off x="6000750" y="1466850"/>
+            <a:ext cx="19050" cy="4324350"/>
           </a:xfrm>
           <a:prstGeom xmlns:a="http://schemas.openxmlformats.org/drawingml/2006/main" prst="rect">
             <a:avLst/>
@@ -17771,22 +18055,22 @@
       </p:sp>
       <p:sp>
         <p:nvSpPr>
-          <p:cNvPr id="56" name="">
-            <a:extLst xmlns:a="http://schemas.openxmlformats.org/drawingml/2006/main">
-              <a:ext uri="{FF2B5EF4-FFF2-40B4-BE49-F238E27FC236}">
-                <a16:creationId xmlns:a16="http://schemas.microsoft.com/office/drawing/2014/main" id="{E94B34F8-2D36-4B43-BD7B-8F8DBE7A83B8}"/>
-              </a:ext>
-            </a:extLst>
-          </p:cNvPr>
-          <p:cNvSpPr>
-            <a:spLocks xmlns:a="http://schemas.openxmlformats.org/drawingml/2006/main" noGrp="1"/>
-          </p:cNvSpPr>
-          <p:nvPr/>
-        </p:nvSpPr>
-        <p:spPr>
-          <a:xfrm xmlns:a="http://schemas.openxmlformats.org/drawingml/2006/main">
-            <a:off x="6572250" y="1466850"/>
-            <a:ext cx="4381500" cy="323850"/>
+          <p:cNvPr id="57" name="">
+            <a:extLst xmlns:a="http://schemas.openxmlformats.org/drawingml/2006/main">
+              <a:ext uri="{FF2B5EF4-FFF2-40B4-BE49-F238E27FC236}">
+                <a16:creationId xmlns:a16="http://schemas.microsoft.com/office/drawing/2014/main" id="{9139122D-C118-4466-AA00-469C2F3EC985}"/>
+              </a:ext>
+            </a:extLst>
+          </p:cNvPr>
+          <p:cNvSpPr>
+            <a:spLocks xmlns:a="http://schemas.openxmlformats.org/drawingml/2006/main" noGrp="1"/>
+          </p:cNvSpPr>
+          <p:nvPr/>
+        </p:nvSpPr>
+        <p:spPr>
+          <a:xfrm xmlns:a="http://schemas.openxmlformats.org/drawingml/2006/main">
+            <a:off x="6515100" y="1466850"/>
+            <a:ext cx="4095750" cy="323850"/>
           </a:xfrm>
           <a:prstGeom xmlns:a="http://schemas.openxmlformats.org/drawingml/2006/main" prst="rect">
             <a:avLst/>
@@ -17832,29 +18116,29 @@
                 <a:ea typeface="Arial"/>
                 <a:cs typeface="Arial"/>
               </a:rPr>
-              <a:t>Pointwise 1×1: смешивает каналы</a:t>
+              <a:t>Pointwise 1×1</a:t>
             </a:r>
           </a:p>
         </p:txBody>
       </p:sp>
       <p:sp>
         <p:nvSpPr>
-          <p:cNvPr id="57" name="">
-            <a:extLst xmlns:a="http://schemas.openxmlformats.org/drawingml/2006/main">
-              <a:ext uri="{FF2B5EF4-FFF2-40B4-BE49-F238E27FC236}">
-                <a16:creationId xmlns:a16="http://schemas.microsoft.com/office/drawing/2014/main" id="{94091992-DBBF-4F59-932A-7ECB100A1664}"/>
-              </a:ext>
-            </a:extLst>
-          </p:cNvPr>
-          <p:cNvSpPr>
-            <a:spLocks xmlns:a="http://schemas.openxmlformats.org/drawingml/2006/main" noGrp="1"/>
-          </p:cNvSpPr>
-          <p:nvPr/>
-        </p:nvSpPr>
-        <p:spPr>
-          <a:xfrm xmlns:a="http://schemas.openxmlformats.org/drawingml/2006/main">
-            <a:off x="6572250" y="1809750"/>
-            <a:ext cx="4381500" cy="228600"/>
+          <p:cNvPr id="58" name="">
+            <a:extLst xmlns:a="http://schemas.openxmlformats.org/drawingml/2006/main">
+              <a:ext uri="{FF2B5EF4-FFF2-40B4-BE49-F238E27FC236}">
+                <a16:creationId xmlns:a16="http://schemas.microsoft.com/office/drawing/2014/main" id="{C5282FBA-039E-4DB8-BD5D-E33B7610B539}"/>
+              </a:ext>
+            </a:extLst>
+          </p:cNvPr>
+          <p:cNvSpPr>
+            <a:spLocks xmlns:a="http://schemas.openxmlformats.org/drawingml/2006/main" noGrp="1"/>
+          </p:cNvSpPr>
+          <p:nvPr/>
+        </p:nvSpPr>
+        <p:spPr>
+          <a:xfrm xmlns:a="http://schemas.openxmlformats.org/drawingml/2006/main">
+            <a:off x="6515100" y="1828800"/>
+            <a:ext cx="4381500" cy="400050"/>
           </a:xfrm>
           <a:prstGeom xmlns:a="http://schemas.openxmlformats.org/drawingml/2006/main" prst="rect">
             <a:avLst/>
@@ -17900,29 +18184,29 @@
                 <a:ea typeface="Arial"/>
                 <a:cs typeface="Arial"/>
               </a:rPr>
-              <a:t>в одной и той же позиции изображения</a:t>
+              <a:t>В одной позиции (i, j) он берёт значения всех входных каналов</a:t>
             </a:r>
           </a:p>
         </p:txBody>
       </p:sp>
       <p:sp>
         <p:nvSpPr>
-          <p:cNvPr id="58" name="">
-            <a:extLst xmlns:a="http://schemas.openxmlformats.org/drawingml/2006/main">
-              <a:ext uri="{FF2B5EF4-FFF2-40B4-BE49-F238E27FC236}">
-                <a16:creationId xmlns:a16="http://schemas.microsoft.com/office/drawing/2014/main" id="{9F7B723D-529A-4DC0-A9C9-E1913E32BE90}"/>
-              </a:ext>
-            </a:extLst>
-          </p:cNvPr>
-          <p:cNvSpPr>
-            <a:spLocks xmlns:a="http://schemas.openxmlformats.org/drawingml/2006/main" noGrp="1"/>
-          </p:cNvSpPr>
-          <p:nvPr/>
-        </p:nvSpPr>
-        <p:spPr>
-          <a:xfrm xmlns:a="http://schemas.openxmlformats.org/drawingml/2006/main">
-            <a:off x="6705600" y="2571750"/>
-            <a:ext cx="476250" cy="228600"/>
+          <p:cNvPr id="59" name="">
+            <a:extLst xmlns:a="http://schemas.openxmlformats.org/drawingml/2006/main">
+              <a:ext uri="{FF2B5EF4-FFF2-40B4-BE49-F238E27FC236}">
+                <a16:creationId xmlns:a16="http://schemas.microsoft.com/office/drawing/2014/main" id="{A0056A12-F055-4E4C-B74E-C2CEF70DB254}"/>
+              </a:ext>
+            </a:extLst>
+          </p:cNvPr>
+          <p:cNvSpPr>
+            <a:spLocks xmlns:a="http://schemas.openxmlformats.org/drawingml/2006/main" noGrp="1"/>
+          </p:cNvSpPr>
+          <p:nvPr/>
+        </p:nvSpPr>
+        <p:spPr>
+          <a:xfrm xmlns:a="http://schemas.openxmlformats.org/drawingml/2006/main">
+            <a:off x="6591300" y="2324100"/>
+            <a:ext cx="1104900" cy="323850"/>
           </a:xfrm>
           <a:prstGeom xmlns:a="http://schemas.openxmlformats.org/drawingml/2006/main" prst="rect">
             <a:avLst/>
@@ -17968,29 +18252,99 @@
                 <a:ea typeface="Arial"/>
                 <a:cs typeface="Arial"/>
               </a:rPr>
-              <a:t>C1</a:t>
+              <a:t>входной вектор</a:t>
             </a:r>
           </a:p>
         </p:txBody>
       </p:sp>
       <p:sp>
         <p:nvSpPr>
-          <p:cNvPr id="59" name="">
-            <a:extLst xmlns:a="http://schemas.openxmlformats.org/drawingml/2006/main">
-              <a:ext uri="{FF2B5EF4-FFF2-40B4-BE49-F238E27FC236}">
-                <a16:creationId xmlns:a16="http://schemas.microsoft.com/office/drawing/2014/main" id="{A4C5E0E1-F6EB-4A66-BDCF-C4F6CC385686}"/>
-              </a:ext>
-            </a:extLst>
-          </p:cNvPr>
-          <p:cNvSpPr>
-            <a:spLocks xmlns:a="http://schemas.openxmlformats.org/drawingml/2006/main" noGrp="1"/>
-          </p:cNvSpPr>
-          <p:nvPr/>
-        </p:nvSpPr>
-        <p:spPr>
-          <a:xfrm xmlns:a="http://schemas.openxmlformats.org/drawingml/2006/main">
-            <a:off x="6705600" y="3200400"/>
-            <a:ext cx="476250" cy="228600"/>
+          <p:cNvPr id="60" name="">
+            <a:extLst xmlns:a="http://schemas.openxmlformats.org/drawingml/2006/main">
+              <a:ext uri="{FF2B5EF4-FFF2-40B4-BE49-F238E27FC236}">
+                <a16:creationId xmlns:a16="http://schemas.microsoft.com/office/drawing/2014/main" id="{65F301EE-B105-4484-960E-3C138B154E30}"/>
+              </a:ext>
+            </a:extLst>
+          </p:cNvPr>
+          <p:cNvSpPr>
+            <a:spLocks xmlns:a="http://schemas.openxmlformats.org/drawingml/2006/main" noGrp="1"/>
+          </p:cNvSpPr>
+          <p:nvPr/>
+        </p:nvSpPr>
+        <p:spPr>
+          <a:xfrm xmlns:a="http://schemas.openxmlformats.org/drawingml/2006/main">
+            <a:off x="6591300" y="2781300"/>
+            <a:ext cx="1104900" cy="1619250"/>
+          </a:xfrm>
+          <a:prstGeom xmlns:a="http://schemas.openxmlformats.org/drawingml/2006/main" prst="roundRect">
+            <a:avLst>
+              <a:gd name="adj" fmla="val 6034"/>
+            </a:avLst>
+          </a:prstGeom>
+          <a:solidFill xmlns:a="http://schemas.openxmlformats.org/drawingml/2006/main">
+            <a:srgbClr val="FFFFFF"/>
+          </a:solidFill>
+          <a:ln xmlns:a="http://schemas.openxmlformats.org/drawingml/2006/main" w="9525">
+            <a:solidFill>
+              <a:srgbClr val="E5E1D8"/>
+            </a:solidFill>
+            <a:prstDash val="solid"/>
+          </a:ln>
+        </p:spPr>
+      </p:sp>
+      <p:sp>
+        <p:nvSpPr>
+          <p:cNvPr id="61" name="">
+            <a:extLst xmlns:a="http://schemas.openxmlformats.org/drawingml/2006/main">
+              <a:ext uri="{FF2B5EF4-FFF2-40B4-BE49-F238E27FC236}">
+                <a16:creationId xmlns:a16="http://schemas.microsoft.com/office/drawing/2014/main" id="{B6A68829-A673-45E1-B53C-8B5A46D61A94}"/>
+              </a:ext>
+            </a:extLst>
+          </p:cNvPr>
+          <p:cNvSpPr>
+            <a:spLocks xmlns:a="http://schemas.openxmlformats.org/drawingml/2006/main" noGrp="1"/>
+          </p:cNvSpPr>
+          <p:nvPr/>
+        </p:nvSpPr>
+        <p:spPr>
+          <a:xfrm xmlns:a="http://schemas.openxmlformats.org/drawingml/2006/main">
+            <a:off x="6743700" y="2857500"/>
+            <a:ext cx="800100" cy="304800"/>
+          </a:xfrm>
+          <a:prstGeom xmlns:a="http://schemas.openxmlformats.org/drawingml/2006/main" prst="roundRect">
+            <a:avLst>
+              <a:gd name="adj" fmla="val 15625"/>
+            </a:avLst>
+          </a:prstGeom>
+          <a:solidFill xmlns:a="http://schemas.openxmlformats.org/drawingml/2006/main">
+            <a:srgbClr val="EAF2FF"/>
+          </a:solidFill>
+          <a:ln xmlns:a="http://schemas.openxmlformats.org/drawingml/2006/main" w="9525">
+            <a:solidFill>
+              <a:srgbClr val="E5E1D8"/>
+            </a:solidFill>
+            <a:prstDash val="solid"/>
+          </a:ln>
+        </p:spPr>
+      </p:sp>
+      <p:sp>
+        <p:nvSpPr>
+          <p:cNvPr id="62" name="">
+            <a:extLst xmlns:a="http://schemas.openxmlformats.org/drawingml/2006/main">
+              <a:ext uri="{FF2B5EF4-FFF2-40B4-BE49-F238E27FC236}">
+                <a16:creationId xmlns:a16="http://schemas.microsoft.com/office/drawing/2014/main" id="{09F2DFCF-721B-441B-97C7-10BB2D01CC03}"/>
+              </a:ext>
+            </a:extLst>
+          </p:cNvPr>
+          <p:cNvSpPr>
+            <a:spLocks xmlns:a="http://schemas.openxmlformats.org/drawingml/2006/main" noGrp="1"/>
+          </p:cNvSpPr>
+          <p:nvPr/>
+        </p:nvSpPr>
+        <p:spPr>
+          <a:xfrm xmlns:a="http://schemas.openxmlformats.org/drawingml/2006/main">
+            <a:off x="6762750" y="2924175"/>
+            <a:ext cx="762000" cy="171450"/>
           </a:xfrm>
           <a:prstGeom xmlns:a="http://schemas.openxmlformats.org/drawingml/2006/main" prst="rect">
             <a:avLst/>
@@ -18036,29 +18390,64 @@
                 <a:ea typeface="Arial"/>
                 <a:cs typeface="Arial"/>
               </a:rPr>
-              <a:t>C2</a:t>
+              <a:t>C1(i,j)</a:t>
             </a:r>
           </a:p>
         </p:txBody>
       </p:sp>
       <p:sp>
         <p:nvSpPr>
-          <p:cNvPr id="60" name="">
-            <a:extLst xmlns:a="http://schemas.openxmlformats.org/drawingml/2006/main">
-              <a:ext uri="{FF2B5EF4-FFF2-40B4-BE49-F238E27FC236}">
-                <a16:creationId xmlns:a16="http://schemas.microsoft.com/office/drawing/2014/main" id="{D1CF1359-D831-4085-B8B0-1A4C2E7A76C4}"/>
-              </a:ext>
-            </a:extLst>
-          </p:cNvPr>
-          <p:cNvSpPr>
-            <a:spLocks xmlns:a="http://schemas.openxmlformats.org/drawingml/2006/main" noGrp="1"/>
-          </p:cNvSpPr>
-          <p:nvPr/>
-        </p:nvSpPr>
-        <p:spPr>
-          <a:xfrm xmlns:a="http://schemas.openxmlformats.org/drawingml/2006/main">
-            <a:off x="6705600" y="3829050"/>
-            <a:ext cx="476250" cy="228600"/>
+          <p:cNvPr id="63" name="">
+            <a:extLst xmlns:a="http://schemas.openxmlformats.org/drawingml/2006/main">
+              <a:ext uri="{FF2B5EF4-FFF2-40B4-BE49-F238E27FC236}">
+                <a16:creationId xmlns:a16="http://schemas.microsoft.com/office/drawing/2014/main" id="{3CB8544A-1533-43E0-BB86-6ED84DD0A2D6}"/>
+              </a:ext>
+            </a:extLst>
+          </p:cNvPr>
+          <p:cNvSpPr>
+            <a:spLocks xmlns:a="http://schemas.openxmlformats.org/drawingml/2006/main" noGrp="1"/>
+          </p:cNvSpPr>
+          <p:nvPr/>
+        </p:nvSpPr>
+        <p:spPr>
+          <a:xfrm xmlns:a="http://schemas.openxmlformats.org/drawingml/2006/main">
+            <a:off x="6743700" y="3314700"/>
+            <a:ext cx="800100" cy="304800"/>
+          </a:xfrm>
+          <a:prstGeom xmlns:a="http://schemas.openxmlformats.org/drawingml/2006/main" prst="roundRect">
+            <a:avLst>
+              <a:gd name="adj" fmla="val 15625"/>
+            </a:avLst>
+          </a:prstGeom>
+          <a:solidFill xmlns:a="http://schemas.openxmlformats.org/drawingml/2006/main">
+            <a:srgbClr val="F0EAFE"/>
+          </a:solidFill>
+          <a:ln xmlns:a="http://schemas.openxmlformats.org/drawingml/2006/main" w="9525">
+            <a:solidFill>
+              <a:srgbClr val="E5E1D8"/>
+            </a:solidFill>
+            <a:prstDash val="solid"/>
+          </a:ln>
+        </p:spPr>
+      </p:sp>
+      <p:sp>
+        <p:nvSpPr>
+          <p:cNvPr id="64" name="">
+            <a:extLst xmlns:a="http://schemas.openxmlformats.org/drawingml/2006/main">
+              <a:ext uri="{FF2B5EF4-FFF2-40B4-BE49-F238E27FC236}">
+                <a16:creationId xmlns:a16="http://schemas.microsoft.com/office/drawing/2014/main" id="{A33AB911-36FC-4162-9222-1016197F966A}"/>
+              </a:ext>
+            </a:extLst>
+          </p:cNvPr>
+          <p:cNvSpPr>
+            <a:spLocks xmlns:a="http://schemas.openxmlformats.org/drawingml/2006/main" noGrp="1"/>
+          </p:cNvSpPr>
+          <p:nvPr/>
+        </p:nvSpPr>
+        <p:spPr>
+          <a:xfrm xmlns:a="http://schemas.openxmlformats.org/drawingml/2006/main">
+            <a:off x="6762750" y="3381375"/>
+            <a:ext cx="762000" cy="171450"/>
           </a:xfrm>
           <a:prstGeom xmlns:a="http://schemas.openxmlformats.org/drawingml/2006/main" prst="rect">
             <a:avLst/>
@@ -18104,71 +18493,41 @@
                 <a:ea typeface="Arial"/>
                 <a:cs typeface="Arial"/>
               </a:rPr>
-              <a:t>C3</a:t>
+              <a:t>C2(i,j)</a:t>
             </a:r>
           </a:p>
         </p:txBody>
       </p:sp>
       <p:sp>
         <p:nvSpPr>
-          <p:cNvPr id="61" name="">
-            <a:extLst xmlns:a="http://schemas.openxmlformats.org/drawingml/2006/main">
-              <a:ext uri="{FF2B5EF4-FFF2-40B4-BE49-F238E27FC236}">
-                <a16:creationId xmlns:a16="http://schemas.microsoft.com/office/drawing/2014/main" id="{296AB645-1D24-439B-A48C-CC24D4555516}"/>
-              </a:ext>
-            </a:extLst>
-          </p:cNvPr>
-          <p:cNvSpPr>
-            <a:spLocks xmlns:a="http://schemas.openxmlformats.org/drawingml/2006/main" noGrp="1"/>
-          </p:cNvSpPr>
-          <p:nvPr/>
-        </p:nvSpPr>
-        <p:spPr>
-          <a:xfrm xmlns:a="http://schemas.openxmlformats.org/drawingml/2006/main">
-            <a:off x="7372350" y="2571750"/>
-            <a:ext cx="228600" cy="228600"/>
-          </a:xfrm>
-          <a:prstGeom xmlns:a="http://schemas.openxmlformats.org/drawingml/2006/main" prst="ellipse">
-            <a:avLst/>
+          <p:cNvPr id="65" name="">
+            <a:extLst xmlns:a="http://schemas.openxmlformats.org/drawingml/2006/main">
+              <a:ext uri="{FF2B5EF4-FFF2-40B4-BE49-F238E27FC236}">
+                <a16:creationId xmlns:a16="http://schemas.microsoft.com/office/drawing/2014/main" id="{2939599C-8B24-49AB-A5D3-B6FD1C1F1C27}"/>
+              </a:ext>
+            </a:extLst>
+          </p:cNvPr>
+          <p:cNvSpPr>
+            <a:spLocks xmlns:a="http://schemas.openxmlformats.org/drawingml/2006/main" noGrp="1"/>
+          </p:cNvSpPr>
+          <p:nvPr/>
+        </p:nvSpPr>
+        <p:spPr>
+          <a:xfrm xmlns:a="http://schemas.openxmlformats.org/drawingml/2006/main">
+            <a:off x="6743700" y="3771900"/>
+            <a:ext cx="800100" cy="304800"/>
+          </a:xfrm>
+          <a:prstGeom xmlns:a="http://schemas.openxmlformats.org/drawingml/2006/main" prst="roundRect">
+            <a:avLst>
+              <a:gd name="adj" fmla="val 15625"/>
+            </a:avLst>
           </a:prstGeom>
           <a:solidFill xmlns:a="http://schemas.openxmlformats.org/drawingml/2006/main">
-            <a:srgbClr val="2563EB"/>
-          </a:solidFill>
-          <a:ln xmlns:a="http://schemas.openxmlformats.org/drawingml/2006/main" w="0">
-            <a:solidFill>
-              <a:srgbClr val="2563EB"/>
-            </a:solidFill>
-          </a:ln>
-        </p:spPr>
-      </p:sp>
-      <p:sp>
-        <p:nvSpPr>
-          <p:cNvPr id="62" name="">
-            <a:extLst xmlns:a="http://schemas.openxmlformats.org/drawingml/2006/main">
-              <a:ext uri="{FF2B5EF4-FFF2-40B4-BE49-F238E27FC236}">
-                <a16:creationId xmlns:a16="http://schemas.microsoft.com/office/drawing/2014/main" id="{61B71C51-C57C-4166-9AFB-F216D4E81C3D}"/>
-              </a:ext>
-            </a:extLst>
-          </p:cNvPr>
-          <p:cNvSpPr>
-            <a:spLocks xmlns:a="http://schemas.openxmlformats.org/drawingml/2006/main" noGrp="1"/>
-          </p:cNvSpPr>
-          <p:nvPr/>
-        </p:nvSpPr>
-        <p:spPr>
-          <a:xfrm xmlns:a="http://schemas.openxmlformats.org/drawingml/2006/main">
-            <a:off x="7677150" y="2686050"/>
-            <a:ext cx="742950" cy="28575"/>
-          </a:xfrm>
-          <a:prstGeom xmlns:a="http://schemas.openxmlformats.org/drawingml/2006/main" prst="rect">
-            <a:avLst/>
-          </a:prstGeom>
-          <a:solidFill xmlns:a="http://schemas.openxmlformats.org/drawingml/2006/main">
-            <a:srgbClr val="7C3AED"/>
+            <a:srgbClr val="E7F7F4"/>
           </a:solidFill>
           <a:ln xmlns:a="http://schemas.openxmlformats.org/drawingml/2006/main" w="9525">
             <a:solidFill>
-              <a:srgbClr val="7C3AED"/>
+              <a:srgbClr val="E5E1D8"/>
             </a:solidFill>
             <a:prstDash val="solid"/>
           </a:ln>
@@ -18176,381 +18535,22 @@
       </p:sp>
       <p:sp>
         <p:nvSpPr>
-          <p:cNvPr id="63" name="">
-            <a:extLst xmlns:a="http://schemas.openxmlformats.org/drawingml/2006/main">
-              <a:ext uri="{FF2B5EF4-FFF2-40B4-BE49-F238E27FC236}">
-                <a16:creationId xmlns:a16="http://schemas.microsoft.com/office/drawing/2014/main" id="{B83027A4-73BB-4656-857B-9DD50A74A1B4}"/>
-              </a:ext>
-            </a:extLst>
-          </p:cNvPr>
-          <p:cNvSpPr>
-            <a:spLocks xmlns:a="http://schemas.openxmlformats.org/drawingml/2006/main" noGrp="1"/>
-          </p:cNvSpPr>
-          <p:nvPr/>
-        </p:nvSpPr>
-        <p:spPr>
-          <a:xfrm xmlns:a="http://schemas.openxmlformats.org/drawingml/2006/main">
-            <a:off x="8343900" y="2628900"/>
-            <a:ext cx="133350" cy="142875"/>
-          </a:xfrm>
-          <a:prstGeom xmlns:a="http://schemas.openxmlformats.org/drawingml/2006/main" prst="triangle">
-            <a:avLst/>
-          </a:prstGeom>
-          <a:solidFill xmlns:a="http://schemas.openxmlformats.org/drawingml/2006/main">
-            <a:srgbClr val="7C3AED"/>
-          </a:solidFill>
-          <a:ln xmlns:a="http://schemas.openxmlformats.org/drawingml/2006/main" w="0">
-            <a:solidFill>
-              <a:srgbClr val="7C3AED"/>
-            </a:solidFill>
-          </a:ln>
-        </p:spPr>
-      </p:sp>
-      <p:sp>
-        <p:nvSpPr>
-          <p:cNvPr id="64" name="">
-            <a:extLst xmlns:a="http://schemas.openxmlformats.org/drawingml/2006/main">
-              <a:ext uri="{FF2B5EF4-FFF2-40B4-BE49-F238E27FC236}">
-                <a16:creationId xmlns:a16="http://schemas.microsoft.com/office/drawing/2014/main" id="{804EEC46-E0CA-4FC9-AE7E-DE9EA03F8DDC}"/>
-              </a:ext>
-            </a:extLst>
-          </p:cNvPr>
-          <p:cNvSpPr>
-            <a:spLocks xmlns:a="http://schemas.openxmlformats.org/drawingml/2006/main" noGrp="1"/>
-          </p:cNvSpPr>
-          <p:nvPr/>
-        </p:nvSpPr>
-        <p:spPr>
-          <a:xfrm xmlns:a="http://schemas.openxmlformats.org/drawingml/2006/main">
-            <a:off x="7372350" y="3200400"/>
-            <a:ext cx="228600" cy="228600"/>
-          </a:xfrm>
-          <a:prstGeom xmlns:a="http://schemas.openxmlformats.org/drawingml/2006/main" prst="ellipse">
-            <a:avLst/>
-          </a:prstGeom>
-          <a:solidFill xmlns:a="http://schemas.openxmlformats.org/drawingml/2006/main">
-            <a:srgbClr val="7C3AED"/>
-          </a:solidFill>
-          <a:ln xmlns:a="http://schemas.openxmlformats.org/drawingml/2006/main" w="0">
-            <a:solidFill>
-              <a:srgbClr val="7C3AED"/>
-            </a:solidFill>
-          </a:ln>
-        </p:spPr>
-      </p:sp>
-      <p:sp>
-        <p:nvSpPr>
-          <p:cNvPr id="65" name="">
-            <a:extLst xmlns:a="http://schemas.openxmlformats.org/drawingml/2006/main">
-              <a:ext uri="{FF2B5EF4-FFF2-40B4-BE49-F238E27FC236}">
-                <a16:creationId xmlns:a16="http://schemas.microsoft.com/office/drawing/2014/main" id="{EA2AB79E-01A4-4DF1-892F-374CBF64E830}"/>
-              </a:ext>
-            </a:extLst>
-          </p:cNvPr>
-          <p:cNvSpPr>
-            <a:spLocks xmlns:a="http://schemas.openxmlformats.org/drawingml/2006/main" noGrp="1"/>
-          </p:cNvSpPr>
-          <p:nvPr/>
-        </p:nvSpPr>
-        <p:spPr>
-          <a:xfrm xmlns:a="http://schemas.openxmlformats.org/drawingml/2006/main">
-            <a:off x="7677150" y="3314700"/>
-            <a:ext cx="742950" cy="28575"/>
-          </a:xfrm>
-          <a:prstGeom xmlns:a="http://schemas.openxmlformats.org/drawingml/2006/main" prst="rect">
-            <a:avLst/>
-          </a:prstGeom>
-          <a:solidFill xmlns:a="http://schemas.openxmlformats.org/drawingml/2006/main">
-            <a:srgbClr val="7C3AED"/>
-          </a:solidFill>
-          <a:ln xmlns:a="http://schemas.openxmlformats.org/drawingml/2006/main" w="9525">
-            <a:solidFill>
-              <a:srgbClr val="7C3AED"/>
-            </a:solidFill>
-            <a:prstDash val="solid"/>
-          </a:ln>
-        </p:spPr>
-      </p:sp>
-      <p:sp>
-        <p:nvSpPr>
           <p:cNvPr id="66" name="">
             <a:extLst xmlns:a="http://schemas.openxmlformats.org/drawingml/2006/main">
               <a:ext uri="{FF2B5EF4-FFF2-40B4-BE49-F238E27FC236}">
-                <a16:creationId xmlns:a16="http://schemas.microsoft.com/office/drawing/2014/main" id="{96AEC20C-2077-4FDA-93FE-233A30F0949D}"/>
-              </a:ext>
-            </a:extLst>
-          </p:cNvPr>
-          <p:cNvSpPr>
-            <a:spLocks xmlns:a="http://schemas.openxmlformats.org/drawingml/2006/main" noGrp="1"/>
-          </p:cNvSpPr>
-          <p:nvPr/>
-        </p:nvSpPr>
-        <p:spPr>
-          <a:xfrm xmlns:a="http://schemas.openxmlformats.org/drawingml/2006/main">
-            <a:off x="8343900" y="3257550"/>
-            <a:ext cx="133350" cy="142875"/>
-          </a:xfrm>
-          <a:prstGeom xmlns:a="http://schemas.openxmlformats.org/drawingml/2006/main" prst="triangle">
-            <a:avLst/>
-          </a:prstGeom>
-          <a:solidFill xmlns:a="http://schemas.openxmlformats.org/drawingml/2006/main">
-            <a:srgbClr val="7C3AED"/>
-          </a:solidFill>
-          <a:ln xmlns:a="http://schemas.openxmlformats.org/drawingml/2006/main" w="0">
-            <a:solidFill>
-              <a:srgbClr val="7C3AED"/>
-            </a:solidFill>
-          </a:ln>
-        </p:spPr>
-      </p:sp>
-      <p:sp>
-        <p:nvSpPr>
-          <p:cNvPr id="67" name="">
-            <a:extLst xmlns:a="http://schemas.openxmlformats.org/drawingml/2006/main">
-              <a:ext uri="{FF2B5EF4-FFF2-40B4-BE49-F238E27FC236}">
-                <a16:creationId xmlns:a16="http://schemas.microsoft.com/office/drawing/2014/main" id="{6A2DFFFC-21BE-4FBD-9782-C78401A3D29A}"/>
-              </a:ext>
-            </a:extLst>
-          </p:cNvPr>
-          <p:cNvSpPr>
-            <a:spLocks xmlns:a="http://schemas.openxmlformats.org/drawingml/2006/main" noGrp="1"/>
-          </p:cNvSpPr>
-          <p:nvPr/>
-        </p:nvSpPr>
-        <p:spPr>
-          <a:xfrm xmlns:a="http://schemas.openxmlformats.org/drawingml/2006/main">
-            <a:off x="7372350" y="3829050"/>
-            <a:ext cx="228600" cy="228600"/>
-          </a:xfrm>
-          <a:prstGeom xmlns:a="http://schemas.openxmlformats.org/drawingml/2006/main" prst="ellipse">
-            <a:avLst/>
-          </a:prstGeom>
-          <a:solidFill xmlns:a="http://schemas.openxmlformats.org/drawingml/2006/main">
-            <a:srgbClr val="0F9D8A"/>
-          </a:solidFill>
-          <a:ln xmlns:a="http://schemas.openxmlformats.org/drawingml/2006/main" w="0">
-            <a:solidFill>
-              <a:srgbClr val="0F9D8A"/>
-            </a:solidFill>
-          </a:ln>
-        </p:spPr>
-      </p:sp>
-      <p:sp>
-        <p:nvSpPr>
-          <p:cNvPr id="68" name="">
-            <a:extLst xmlns:a="http://schemas.openxmlformats.org/drawingml/2006/main">
-              <a:ext uri="{FF2B5EF4-FFF2-40B4-BE49-F238E27FC236}">
-                <a16:creationId xmlns:a16="http://schemas.microsoft.com/office/drawing/2014/main" id="{740991DE-CADB-4203-8C40-D8A8696A632B}"/>
-              </a:ext>
-            </a:extLst>
-          </p:cNvPr>
-          <p:cNvSpPr>
-            <a:spLocks xmlns:a="http://schemas.openxmlformats.org/drawingml/2006/main" noGrp="1"/>
-          </p:cNvSpPr>
-          <p:nvPr/>
-        </p:nvSpPr>
-        <p:spPr>
-          <a:xfrm xmlns:a="http://schemas.openxmlformats.org/drawingml/2006/main">
-            <a:off x="7677150" y="3943350"/>
-            <a:ext cx="742950" cy="28575"/>
-          </a:xfrm>
-          <a:prstGeom xmlns:a="http://schemas.openxmlformats.org/drawingml/2006/main" prst="rect">
-            <a:avLst/>
-          </a:prstGeom>
-          <a:solidFill xmlns:a="http://schemas.openxmlformats.org/drawingml/2006/main">
-            <a:srgbClr val="7C3AED"/>
-          </a:solidFill>
-          <a:ln xmlns:a="http://schemas.openxmlformats.org/drawingml/2006/main" w="9525">
-            <a:solidFill>
-              <a:srgbClr val="7C3AED"/>
-            </a:solidFill>
-            <a:prstDash val="solid"/>
-          </a:ln>
-        </p:spPr>
-      </p:sp>
-      <p:sp>
-        <p:nvSpPr>
-          <p:cNvPr id="69" name="">
-            <a:extLst xmlns:a="http://schemas.openxmlformats.org/drawingml/2006/main">
-              <a:ext uri="{FF2B5EF4-FFF2-40B4-BE49-F238E27FC236}">
-                <a16:creationId xmlns:a16="http://schemas.microsoft.com/office/drawing/2014/main" id="{4EDA0493-EE6D-4975-9417-2F703BBDF488}"/>
-              </a:ext>
-            </a:extLst>
-          </p:cNvPr>
-          <p:cNvSpPr>
-            <a:spLocks xmlns:a="http://schemas.openxmlformats.org/drawingml/2006/main" noGrp="1"/>
-          </p:cNvSpPr>
-          <p:nvPr/>
-        </p:nvSpPr>
-        <p:spPr>
-          <a:xfrm xmlns:a="http://schemas.openxmlformats.org/drawingml/2006/main">
-            <a:off x="8343900" y="3886200"/>
-            <a:ext cx="133350" cy="142875"/>
-          </a:xfrm>
-          <a:prstGeom xmlns:a="http://schemas.openxmlformats.org/drawingml/2006/main" prst="triangle">
-            <a:avLst/>
-          </a:prstGeom>
-          <a:solidFill xmlns:a="http://schemas.openxmlformats.org/drawingml/2006/main">
-            <a:srgbClr val="7C3AED"/>
-          </a:solidFill>
-          <a:ln xmlns:a="http://schemas.openxmlformats.org/drawingml/2006/main" w="0">
-            <a:solidFill>
-              <a:srgbClr val="7C3AED"/>
-            </a:solidFill>
-          </a:ln>
-        </p:spPr>
-      </p:sp>
-      <p:sp>
-        <p:nvSpPr>
-          <p:cNvPr id="70" name="">
-            <a:extLst xmlns:a="http://schemas.openxmlformats.org/drawingml/2006/main">
-              <a:ext uri="{FF2B5EF4-FFF2-40B4-BE49-F238E27FC236}">
-                <a16:creationId xmlns:a16="http://schemas.microsoft.com/office/drawing/2014/main" id="{BB911FE0-0DBB-4468-94FC-462E0D3191C9}"/>
-              </a:ext>
-            </a:extLst>
-          </p:cNvPr>
-          <p:cNvSpPr>
-            <a:spLocks xmlns:a="http://schemas.openxmlformats.org/drawingml/2006/main" noGrp="1"/>
-          </p:cNvSpPr>
-          <p:nvPr/>
-        </p:nvSpPr>
-        <p:spPr>
-          <a:xfrm xmlns:a="http://schemas.openxmlformats.org/drawingml/2006/main">
-            <a:off x="8420100" y="2686050"/>
-            <a:ext cx="28575" cy="1257300"/>
-          </a:xfrm>
-          <a:prstGeom xmlns:a="http://schemas.openxmlformats.org/drawingml/2006/main" prst="rect">
-            <a:avLst/>
-          </a:prstGeom>
-          <a:solidFill xmlns:a="http://schemas.openxmlformats.org/drawingml/2006/main">
-            <a:srgbClr val="7C3AED"/>
-          </a:solidFill>
-          <a:ln xmlns:a="http://schemas.openxmlformats.org/drawingml/2006/main" w="9525">
-            <a:solidFill>
-              <a:srgbClr val="7C3AED"/>
-            </a:solidFill>
-            <a:prstDash val="solid"/>
-          </a:ln>
-        </p:spPr>
-      </p:sp>
-      <p:sp>
-        <p:nvSpPr>
-          <p:cNvPr id="71" name="">
-            <a:extLst xmlns:a="http://schemas.openxmlformats.org/drawingml/2006/main">
-              <a:ext uri="{FF2B5EF4-FFF2-40B4-BE49-F238E27FC236}">
-                <a16:creationId xmlns:a16="http://schemas.microsoft.com/office/drawing/2014/main" id="{94E4265B-9DF8-4521-92AA-24EA35233F38}"/>
-              </a:ext>
-            </a:extLst>
-          </p:cNvPr>
-          <p:cNvSpPr>
-            <a:spLocks xmlns:a="http://schemas.openxmlformats.org/drawingml/2006/main" noGrp="1"/>
-          </p:cNvSpPr>
-          <p:nvPr/>
-        </p:nvSpPr>
-        <p:spPr>
-          <a:xfrm xmlns:a="http://schemas.openxmlformats.org/drawingml/2006/main">
-            <a:off x="8448675" y="3343275"/>
-            <a:ext cx="123825" cy="28575"/>
-          </a:xfrm>
-          <a:prstGeom xmlns:a="http://schemas.openxmlformats.org/drawingml/2006/main" prst="rect">
-            <a:avLst/>
-          </a:prstGeom>
-          <a:solidFill xmlns:a="http://schemas.openxmlformats.org/drawingml/2006/main">
-            <a:srgbClr val="7C3AED"/>
-          </a:solidFill>
-          <a:ln xmlns:a="http://schemas.openxmlformats.org/drawingml/2006/main" w="9525">
-            <a:solidFill>
-              <a:srgbClr val="7C3AED"/>
-            </a:solidFill>
-            <a:prstDash val="solid"/>
-          </a:ln>
-        </p:spPr>
-      </p:sp>
-      <p:sp>
-        <p:nvSpPr>
-          <p:cNvPr id="72" name="">
-            <a:extLst xmlns:a="http://schemas.openxmlformats.org/drawingml/2006/main">
-              <a:ext uri="{FF2B5EF4-FFF2-40B4-BE49-F238E27FC236}">
-                <a16:creationId xmlns:a16="http://schemas.microsoft.com/office/drawing/2014/main" id="{CBFC170D-758B-455F-AE6B-00A441CD924A}"/>
-              </a:ext>
-            </a:extLst>
-          </p:cNvPr>
-          <p:cNvSpPr>
-            <a:spLocks xmlns:a="http://schemas.openxmlformats.org/drawingml/2006/main" noGrp="1"/>
-          </p:cNvSpPr>
-          <p:nvPr/>
-        </p:nvSpPr>
-        <p:spPr>
-          <a:xfrm xmlns:a="http://schemas.openxmlformats.org/drawingml/2006/main">
-            <a:off x="8496300" y="3286125"/>
-            <a:ext cx="133350" cy="142875"/>
-          </a:xfrm>
-          <a:prstGeom xmlns:a="http://schemas.openxmlformats.org/drawingml/2006/main" prst="triangle">
-            <a:avLst/>
-          </a:prstGeom>
-          <a:solidFill xmlns:a="http://schemas.openxmlformats.org/drawingml/2006/main">
-            <a:srgbClr val="7C3AED"/>
-          </a:solidFill>
-          <a:ln xmlns:a="http://schemas.openxmlformats.org/drawingml/2006/main" w="0">
-            <a:solidFill>
-              <a:srgbClr val="7C3AED"/>
-            </a:solidFill>
-          </a:ln>
-        </p:spPr>
-      </p:sp>
-      <p:sp>
-        <p:nvSpPr>
-          <p:cNvPr id="73" name="">
-            <a:extLst xmlns:a="http://schemas.openxmlformats.org/drawingml/2006/main">
-              <a:ext uri="{FF2B5EF4-FFF2-40B4-BE49-F238E27FC236}">
-                <a16:creationId xmlns:a16="http://schemas.microsoft.com/office/drawing/2014/main" id="{4F33A6C0-0E0C-4DB2-BCFF-ED94013F9325}"/>
-              </a:ext>
-            </a:extLst>
-          </p:cNvPr>
-          <p:cNvSpPr>
-            <a:spLocks xmlns:a="http://schemas.openxmlformats.org/drawingml/2006/main" noGrp="1"/>
-          </p:cNvSpPr>
-          <p:nvPr/>
-        </p:nvSpPr>
-        <p:spPr>
-          <a:xfrm xmlns:a="http://schemas.openxmlformats.org/drawingml/2006/main">
-            <a:off x="8572500" y="3143250"/>
-            <a:ext cx="685800" cy="419100"/>
-          </a:xfrm>
-          <a:prstGeom xmlns:a="http://schemas.openxmlformats.org/drawingml/2006/main" prst="roundRect">
-            <a:avLst>
-              <a:gd name="adj" fmla="val 15909"/>
-            </a:avLst>
-          </a:prstGeom>
-          <a:solidFill xmlns:a="http://schemas.openxmlformats.org/drawingml/2006/main">
-            <a:srgbClr val="7C3AED"/>
-          </a:solidFill>
-          <a:ln xmlns:a="http://schemas.openxmlformats.org/drawingml/2006/main" w="9525">
-            <a:solidFill>
-              <a:srgbClr val="7C3AED"/>
-            </a:solidFill>
-            <a:prstDash val="solid"/>
-          </a:ln>
-        </p:spPr>
-      </p:sp>
-      <p:sp>
-        <p:nvSpPr>
-          <p:cNvPr id="74" name="">
-            <a:extLst xmlns:a="http://schemas.openxmlformats.org/drawingml/2006/main">
-              <a:ext uri="{FF2B5EF4-FFF2-40B4-BE49-F238E27FC236}">
-                <a16:creationId xmlns:a16="http://schemas.microsoft.com/office/drawing/2014/main" id="{7E46C7CA-E3E5-4A17-8028-A2F2FA38EDA8}"/>
-              </a:ext>
-            </a:extLst>
-          </p:cNvPr>
-          <p:cNvSpPr>
-            <a:spLocks xmlns:a="http://schemas.openxmlformats.org/drawingml/2006/main" noGrp="1"/>
-          </p:cNvSpPr>
-          <p:nvPr/>
-        </p:nvSpPr>
-        <p:spPr>
-          <a:xfrm xmlns:a="http://schemas.openxmlformats.org/drawingml/2006/main">
-            <a:off x="8572500" y="3238500"/>
-            <a:ext cx="685800" cy="209550"/>
+                <a16:creationId xmlns:a16="http://schemas.microsoft.com/office/drawing/2014/main" id="{52D440CD-3689-4B5F-B00B-6D5CD1F186C9}"/>
+              </a:ext>
+            </a:extLst>
+          </p:cNvPr>
+          <p:cNvSpPr>
+            <a:spLocks xmlns:a="http://schemas.openxmlformats.org/drawingml/2006/main" noGrp="1"/>
+          </p:cNvSpPr>
+          <p:nvPr/>
+        </p:nvSpPr>
+        <p:spPr>
+          <a:xfrm xmlns:a="http://schemas.openxmlformats.org/drawingml/2006/main">
+            <a:off x="6762750" y="3838575"/>
+            <a:ext cx="762000" cy="171450"/>
           </a:xfrm>
           <a:prstGeom xmlns:a="http://schemas.openxmlformats.org/drawingml/2006/main" prst="rect">
             <a:avLst/>
@@ -18596,35 +18596,105 @@
                 <a:ea typeface="Arial"/>
                 <a:cs typeface="Arial"/>
               </a:rPr>
-              <a:t>1×1</a:t>
+              <a:t>C3(i,j)</a:t>
             </a:r>
           </a:p>
         </p:txBody>
       </p:sp>
       <p:sp>
         <p:nvSpPr>
-          <p:cNvPr id="75" name="">
-            <a:extLst xmlns:a="http://schemas.openxmlformats.org/drawingml/2006/main">
-              <a:ext uri="{FF2B5EF4-FFF2-40B4-BE49-F238E27FC236}">
-                <a16:creationId xmlns:a16="http://schemas.microsoft.com/office/drawing/2014/main" id="{3C89C08B-6155-480B-9BD9-65DBECC12EE9}"/>
-              </a:ext>
-            </a:extLst>
-          </p:cNvPr>
-          <p:cNvSpPr>
-            <a:spLocks xmlns:a="http://schemas.openxmlformats.org/drawingml/2006/main" noGrp="1"/>
-          </p:cNvSpPr>
-          <p:nvPr/>
-        </p:nvSpPr>
-        <p:spPr>
-          <a:xfrm xmlns:a="http://schemas.openxmlformats.org/drawingml/2006/main">
-            <a:off x="9258300" y="3343275"/>
-            <a:ext cx="1047750" cy="28575"/>
+          <p:cNvPr id="67" name="">
+            <a:extLst xmlns:a="http://schemas.openxmlformats.org/drawingml/2006/main">
+              <a:ext uri="{FF2B5EF4-FFF2-40B4-BE49-F238E27FC236}">
+                <a16:creationId xmlns:a16="http://schemas.microsoft.com/office/drawing/2014/main" id="{D442DA9E-7FC0-4516-85F6-BBD5EADF176F}"/>
+              </a:ext>
+            </a:extLst>
+          </p:cNvPr>
+          <p:cNvSpPr>
+            <a:spLocks xmlns:a="http://schemas.openxmlformats.org/drawingml/2006/main" noGrp="1"/>
+          </p:cNvSpPr>
+          <p:nvPr/>
+        </p:nvSpPr>
+        <p:spPr>
+          <a:xfrm xmlns:a="http://schemas.openxmlformats.org/drawingml/2006/main">
+            <a:off x="7810500" y="3333750"/>
+            <a:ext cx="342900" cy="342900"/>
           </a:xfrm>
           <a:prstGeom xmlns:a="http://schemas.openxmlformats.org/drawingml/2006/main" prst="rect">
             <a:avLst/>
           </a:prstGeom>
+          <a:noFill xmlns:a="http://schemas.openxmlformats.org/drawingml/2006/main"/>
+          <a:ln xmlns:a="http://schemas.openxmlformats.org/drawingml/2006/main" w="0">
+            <a:noFill/>
+          </a:ln>
+        </p:spPr>
+        <p:txBody>
+          <a:bodyPr xmlns:a="http://schemas.openxmlformats.org/drawingml/2006/main">
+            <a:noAutofit/>
+          </a:bodyPr>
+          <a:lstStyle xmlns:a="http://schemas.openxmlformats.org/drawingml/2006/main">
+            <a:defPPr algn="ctr">
+              <a:defRPr sz="1800" b="0">
+                <a:solidFill>
+                  <a:srgbClr val="111827"/>
+                </a:solidFill>
+                <a:latin typeface="Arial"/>
+                <a:ea typeface="Arial"/>
+                <a:cs typeface="Arial"/>
+              </a:defRPr>
+            </a:defPPr>
+          </a:lstStyle>
+          <a:p xmlns:a="http://schemas.openxmlformats.org/drawingml/2006/main">
+            <a:pPr algn="ctr">
+              <a:defRPr sz="1800" b="0">
+                <a:solidFill>
+                  <a:srgbClr val="111827"/>
+                </a:solidFill>
+                <a:latin typeface="Arial"/>
+                <a:ea typeface="Arial"/>
+                <a:cs typeface="Arial"/>
+              </a:defRPr>
+            </a:pPr>
+            <a:r>
+              <a:rPr sz="1800" b="0">
+                <a:solidFill>
+                  <a:srgbClr val="111827"/>
+                </a:solidFill>
+                <a:latin typeface="Arial"/>
+                <a:ea typeface="Arial"/>
+                <a:cs typeface="Arial"/>
+              </a:rPr>
+              <a:t>→</a:t>
+            </a:r>
+          </a:p>
+        </p:txBody>
+      </p:sp>
+      <p:sp>
+        <p:nvSpPr>
+          <p:cNvPr id="68" name="">
+            <a:extLst xmlns:a="http://schemas.openxmlformats.org/drawingml/2006/main">
+              <a:ext uri="{FF2B5EF4-FFF2-40B4-BE49-F238E27FC236}">
+                <a16:creationId xmlns:a16="http://schemas.microsoft.com/office/drawing/2014/main" id="{5DB8E454-AF4C-4278-92BF-9D5CE1705B73}"/>
+              </a:ext>
+            </a:extLst>
+          </p:cNvPr>
+          <p:cNvSpPr>
+            <a:spLocks xmlns:a="http://schemas.openxmlformats.org/drawingml/2006/main" noGrp="1"/>
+          </p:cNvSpPr>
+          <p:nvPr/>
+        </p:nvSpPr>
+        <p:spPr>
+          <a:xfrm xmlns:a="http://schemas.openxmlformats.org/drawingml/2006/main">
+            <a:off x="8172450" y="2705100"/>
+            <a:ext cx="1295400" cy="1619250"/>
+          </a:xfrm>
+          <a:prstGeom xmlns:a="http://schemas.openxmlformats.org/drawingml/2006/main" prst="roundRect">
+            <a:avLst>
+              <a:gd name="adj" fmla="val 5147"/>
+            </a:avLst>
+          </a:prstGeom>
           <a:solidFill xmlns:a="http://schemas.openxmlformats.org/drawingml/2006/main">
-            <a:srgbClr val="7C3AED"/>
+            <a:srgbClr val="F0EAFE"/>
           </a:solidFill>
           <a:ln xmlns:a="http://schemas.openxmlformats.org/drawingml/2006/main" w="9525">
             <a:solidFill>
@@ -18636,188 +18706,90 @@
       </p:sp>
       <p:sp>
         <p:nvSpPr>
-          <p:cNvPr id="76" name="">
-            <a:extLst xmlns:a="http://schemas.openxmlformats.org/drawingml/2006/main">
-              <a:ext uri="{FF2B5EF4-FFF2-40B4-BE49-F238E27FC236}">
-                <a16:creationId xmlns:a16="http://schemas.microsoft.com/office/drawing/2014/main" id="{2EE908C3-9338-4773-B48E-66B8AE19B9C5}"/>
-              </a:ext>
-            </a:extLst>
-          </p:cNvPr>
-          <p:cNvSpPr>
-            <a:spLocks xmlns:a="http://schemas.openxmlformats.org/drawingml/2006/main" noGrp="1"/>
-          </p:cNvSpPr>
-          <p:nvPr/>
-        </p:nvSpPr>
-        <p:spPr>
-          <a:xfrm xmlns:a="http://schemas.openxmlformats.org/drawingml/2006/main">
-            <a:off x="10229850" y="3286125"/>
-            <a:ext cx="133350" cy="142875"/>
-          </a:xfrm>
-          <a:prstGeom xmlns:a="http://schemas.openxmlformats.org/drawingml/2006/main" prst="triangle">
-            <a:avLst/>
-          </a:prstGeom>
-          <a:solidFill xmlns:a="http://schemas.openxmlformats.org/drawingml/2006/main">
-            <a:srgbClr val="7C3AED"/>
-          </a:solidFill>
-          <a:ln xmlns:a="http://schemas.openxmlformats.org/drawingml/2006/main" w="0">
-            <a:solidFill>
-              <a:srgbClr val="7C3AED"/>
-            </a:solidFill>
-          </a:ln>
-        </p:spPr>
-      </p:sp>
-      <p:sp>
-        <p:nvSpPr>
-          <p:cNvPr id="77" name="">
-            <a:extLst xmlns:a="http://schemas.openxmlformats.org/drawingml/2006/main">
-              <a:ext uri="{FF2B5EF4-FFF2-40B4-BE49-F238E27FC236}">
-                <a16:creationId xmlns:a16="http://schemas.microsoft.com/office/drawing/2014/main" id="{0A10FE0E-7122-4A0C-8838-9E98D3F3DFA8}"/>
-              </a:ext>
-            </a:extLst>
-          </p:cNvPr>
-          <p:cNvSpPr>
-            <a:spLocks xmlns:a="http://schemas.openxmlformats.org/drawingml/2006/main" noGrp="1"/>
-          </p:cNvSpPr>
-          <p:nvPr/>
-        </p:nvSpPr>
-        <p:spPr>
-          <a:xfrm xmlns:a="http://schemas.openxmlformats.org/drawingml/2006/main">
-            <a:off x="10382250" y="3028950"/>
-            <a:ext cx="590550" cy="590550"/>
-          </a:xfrm>
-          <a:prstGeom xmlns:a="http://schemas.openxmlformats.org/drawingml/2006/main" prst="roundRect">
-            <a:avLst>
-              <a:gd name="adj" fmla="val 11290"/>
-            </a:avLst>
-          </a:prstGeom>
-          <a:solidFill xmlns:a="http://schemas.openxmlformats.org/drawingml/2006/main">
-            <a:srgbClr val="EAF2FF"/>
-          </a:solidFill>
-          <a:ln xmlns:a="http://schemas.openxmlformats.org/drawingml/2006/main" w="9525">
-            <a:solidFill>
-              <a:srgbClr val="EAF2FF"/>
-            </a:solidFill>
-            <a:prstDash val="solid"/>
-          </a:ln>
-        </p:spPr>
-      </p:sp>
-      <p:sp>
-        <p:nvSpPr>
-          <p:cNvPr id="78" name="">
-            <a:extLst xmlns:a="http://schemas.openxmlformats.org/drawingml/2006/main">
-              <a:ext uri="{FF2B5EF4-FFF2-40B4-BE49-F238E27FC236}">
-                <a16:creationId xmlns:a16="http://schemas.microsoft.com/office/drawing/2014/main" id="{72572DD9-9838-45BE-8F97-0EEB1E2F227B}"/>
-              </a:ext>
-            </a:extLst>
-          </p:cNvPr>
-          <p:cNvSpPr>
-            <a:spLocks xmlns:a="http://schemas.openxmlformats.org/drawingml/2006/main" noGrp="1"/>
-          </p:cNvSpPr>
-          <p:nvPr/>
-        </p:nvSpPr>
-        <p:spPr>
-          <a:xfrm xmlns:a="http://schemas.openxmlformats.org/drawingml/2006/main">
-            <a:off x="10458450" y="3190875"/>
-            <a:ext cx="438150" cy="19050"/>
+          <p:cNvPr id="69" name="">
+            <a:extLst xmlns:a="http://schemas.openxmlformats.org/drawingml/2006/main">
+              <a:ext uri="{FF2B5EF4-FFF2-40B4-BE49-F238E27FC236}">
+                <a16:creationId xmlns:a16="http://schemas.microsoft.com/office/drawing/2014/main" id="{52D0BCC6-C9C9-4D8C-A65E-569E64101233}"/>
+              </a:ext>
+            </a:extLst>
+          </p:cNvPr>
+          <p:cNvSpPr>
+            <a:spLocks xmlns:a="http://schemas.openxmlformats.org/drawingml/2006/main" noGrp="1"/>
+          </p:cNvSpPr>
+          <p:nvPr/>
+        </p:nvSpPr>
+        <p:spPr>
+          <a:xfrm xmlns:a="http://schemas.openxmlformats.org/drawingml/2006/main">
+            <a:off x="8286750" y="2914650"/>
+            <a:ext cx="1066800" cy="323850"/>
           </a:xfrm>
           <a:prstGeom xmlns:a="http://schemas.openxmlformats.org/drawingml/2006/main" prst="rect">
             <a:avLst/>
           </a:prstGeom>
-          <a:solidFill xmlns:a="http://schemas.openxmlformats.org/drawingml/2006/main">
-            <a:srgbClr val="FFFFFF"/>
-          </a:solidFill>
-          <a:ln xmlns:a="http://schemas.openxmlformats.org/drawingml/2006/main" w="9525">
-            <a:solidFill>
-              <a:srgbClr val="FFFFFF"/>
-            </a:solidFill>
-            <a:prstDash val="solid"/>
-          </a:ln>
-        </p:spPr>
-      </p:sp>
-      <p:sp>
-        <p:nvSpPr>
-          <p:cNvPr id="79" name="">
-            <a:extLst xmlns:a="http://schemas.openxmlformats.org/drawingml/2006/main">
-              <a:ext uri="{FF2B5EF4-FFF2-40B4-BE49-F238E27FC236}">
-                <a16:creationId xmlns:a16="http://schemas.microsoft.com/office/drawing/2014/main" id="{E7ACBE1F-6886-424C-A6DE-A6C1E3561AA4}"/>
-              </a:ext>
-            </a:extLst>
-          </p:cNvPr>
-          <p:cNvSpPr>
-            <a:spLocks xmlns:a="http://schemas.openxmlformats.org/drawingml/2006/main" noGrp="1"/>
-          </p:cNvSpPr>
-          <p:nvPr/>
-        </p:nvSpPr>
-        <p:spPr>
-          <a:xfrm xmlns:a="http://schemas.openxmlformats.org/drawingml/2006/main">
-            <a:off x="10458450" y="3324225"/>
-            <a:ext cx="438150" cy="19050"/>
-          </a:xfrm>
-          <a:prstGeom xmlns:a="http://schemas.openxmlformats.org/drawingml/2006/main" prst="rect">
-            <a:avLst/>
-          </a:prstGeom>
-          <a:solidFill xmlns:a="http://schemas.openxmlformats.org/drawingml/2006/main">
-            <a:srgbClr val="FFFFFF"/>
-          </a:solidFill>
-          <a:ln xmlns:a="http://schemas.openxmlformats.org/drawingml/2006/main" w="9525">
-            <a:solidFill>
-              <a:srgbClr val="FFFFFF"/>
-            </a:solidFill>
-            <a:prstDash val="solid"/>
-          </a:ln>
-        </p:spPr>
-      </p:sp>
-      <p:sp>
-        <p:nvSpPr>
-          <p:cNvPr id="80" name="">
-            <a:extLst xmlns:a="http://schemas.openxmlformats.org/drawingml/2006/main">
-              <a:ext uri="{FF2B5EF4-FFF2-40B4-BE49-F238E27FC236}">
-                <a16:creationId xmlns:a16="http://schemas.microsoft.com/office/drawing/2014/main" id="{B6324CFC-BB85-424C-8179-FFA87D494AB9}"/>
-              </a:ext>
-            </a:extLst>
-          </p:cNvPr>
-          <p:cNvSpPr>
-            <a:spLocks xmlns:a="http://schemas.openxmlformats.org/drawingml/2006/main" noGrp="1"/>
-          </p:cNvSpPr>
-          <p:nvPr/>
-        </p:nvSpPr>
-        <p:spPr>
-          <a:xfrm xmlns:a="http://schemas.openxmlformats.org/drawingml/2006/main">
-            <a:off x="10458450" y="3457575"/>
-            <a:ext cx="438150" cy="19050"/>
-          </a:xfrm>
-          <a:prstGeom xmlns:a="http://schemas.openxmlformats.org/drawingml/2006/main" prst="rect">
-            <a:avLst/>
-          </a:prstGeom>
-          <a:solidFill xmlns:a="http://schemas.openxmlformats.org/drawingml/2006/main">
-            <a:srgbClr val="FFFFFF"/>
-          </a:solidFill>
-          <a:ln xmlns:a="http://schemas.openxmlformats.org/drawingml/2006/main" w="9525">
-            <a:solidFill>
-              <a:srgbClr val="FFFFFF"/>
-            </a:solidFill>
-            <a:prstDash val="solid"/>
-          </a:ln>
-        </p:spPr>
-      </p:sp>
-      <p:sp>
-        <p:nvSpPr>
-          <p:cNvPr id="81" name="">
-            <a:extLst xmlns:a="http://schemas.openxmlformats.org/drawingml/2006/main">
-              <a:ext uri="{FF2B5EF4-FFF2-40B4-BE49-F238E27FC236}">
-                <a16:creationId xmlns:a16="http://schemas.microsoft.com/office/drawing/2014/main" id="{7D38389F-24A7-4D13-93EF-1DFF8323AF8C}"/>
-              </a:ext>
-            </a:extLst>
-          </p:cNvPr>
-          <p:cNvSpPr>
-            <a:spLocks xmlns:a="http://schemas.openxmlformats.org/drawingml/2006/main" noGrp="1"/>
-          </p:cNvSpPr>
-          <p:nvPr/>
-        </p:nvSpPr>
-        <p:spPr>
-          <a:xfrm xmlns:a="http://schemas.openxmlformats.org/drawingml/2006/main">
-            <a:off x="10382250" y="3695700"/>
-            <a:ext cx="590550" cy="190500"/>
+          <a:noFill xmlns:a="http://schemas.openxmlformats.org/drawingml/2006/main"/>
+          <a:ln xmlns:a="http://schemas.openxmlformats.org/drawingml/2006/main" w="0">
+            <a:noFill/>
+          </a:ln>
+        </p:spPr>
+        <p:txBody>
+          <a:bodyPr xmlns:a="http://schemas.openxmlformats.org/drawingml/2006/main">
+            <a:noAutofit/>
+          </a:bodyPr>
+          <a:lstStyle xmlns:a="http://schemas.openxmlformats.org/drawingml/2006/main">
+            <a:defPPr algn="ctr">
+              <a:defRPr sz="1800" b="0">
+                <a:solidFill>
+                  <a:srgbClr val="111827"/>
+                </a:solidFill>
+                <a:latin typeface="Arial"/>
+                <a:ea typeface="Arial"/>
+                <a:cs typeface="Arial"/>
+              </a:defRPr>
+            </a:defPPr>
+          </a:lstStyle>
+          <a:p xmlns:a="http://schemas.openxmlformats.org/drawingml/2006/main">
+            <a:pPr algn="ctr">
+              <a:defRPr sz="1800" b="0">
+                <a:solidFill>
+                  <a:srgbClr val="111827"/>
+                </a:solidFill>
+                <a:latin typeface="Arial"/>
+                <a:ea typeface="Arial"/>
+                <a:cs typeface="Arial"/>
+              </a:defRPr>
+            </a:pPr>
+            <a:r>
+              <a:rPr sz="1800" b="0">
+                <a:solidFill>
+                  <a:srgbClr val="111827"/>
+                </a:solidFill>
+                <a:latin typeface="Arial"/>
+                <a:ea typeface="Arial"/>
+                <a:cs typeface="Arial"/>
+              </a:rPr>
+              <a:t>1×1</a:t>
+            </a:r>
+          </a:p>
+        </p:txBody>
+      </p:sp>
+      <p:sp>
+        <p:nvSpPr>
+          <p:cNvPr id="70" name="">
+            <a:extLst xmlns:a="http://schemas.openxmlformats.org/drawingml/2006/main">
+              <a:ext uri="{FF2B5EF4-FFF2-40B4-BE49-F238E27FC236}">
+                <a16:creationId xmlns:a16="http://schemas.microsoft.com/office/drawing/2014/main" id="{EBEB4000-8FA0-4CD2-82C5-01ED6A2E3F6A}"/>
+              </a:ext>
+            </a:extLst>
+          </p:cNvPr>
+          <p:cNvSpPr>
+            <a:spLocks xmlns:a="http://schemas.openxmlformats.org/drawingml/2006/main" noGrp="1"/>
+          </p:cNvSpPr>
+          <p:nvPr/>
+        </p:nvSpPr>
+        <p:spPr>
+          <a:xfrm xmlns:a="http://schemas.openxmlformats.org/drawingml/2006/main">
+            <a:off x="8286750" y="3429000"/>
+            <a:ext cx="1066800" cy="495300"/>
           </a:xfrm>
           <a:prstGeom xmlns:a="http://schemas.openxmlformats.org/drawingml/2006/main" prst="rect">
             <a:avLst/>
@@ -18863,163 +18835,120 @@
                 <a:ea typeface="Arial"/>
                 <a:cs typeface="Arial"/>
               </a:rPr>
-              <a:t>O1</a:t>
+              <a:t>Cout разных</a:t>
+            </a:r>
+          </a:p>
+          <a:p xmlns:a="http://schemas.openxmlformats.org/drawingml/2006/main">
+            <a:pPr algn="ctr">
+              <a:defRPr sz="1200" b="0">
+                <a:solidFill>
+                  <a:srgbClr val="596273"/>
+                </a:solidFill>
+                <a:latin typeface="Arial"/>
+                <a:ea typeface="Arial"/>
+                <a:cs typeface="Arial"/>
+              </a:defRPr>
+            </a:pPr>
+            <a:r>
+              <a:rPr sz="1200" b="0">
+                <a:solidFill>
+                  <a:srgbClr val="596273"/>
+                </a:solidFill>
+                <a:latin typeface="Arial"/>
+                <a:ea typeface="Arial"/>
+                <a:cs typeface="Arial"/>
+              </a:rPr>
+              <a:t>фильтров</a:t>
             </a:r>
           </a:p>
         </p:txBody>
       </p:sp>
       <p:sp>
         <p:nvSpPr>
-          <p:cNvPr id="82" name="">
-            <a:extLst xmlns:a="http://schemas.openxmlformats.org/drawingml/2006/main">
-              <a:ext uri="{FF2B5EF4-FFF2-40B4-BE49-F238E27FC236}">
-                <a16:creationId xmlns:a16="http://schemas.microsoft.com/office/drawing/2014/main" id="{34E8199C-91E9-4BAF-89B3-81EE98860200}"/>
-              </a:ext>
-            </a:extLst>
-          </p:cNvPr>
-          <p:cNvSpPr>
-            <a:spLocks xmlns:a="http://schemas.openxmlformats.org/drawingml/2006/main" noGrp="1"/>
-          </p:cNvSpPr>
-          <p:nvPr/>
-        </p:nvSpPr>
-        <p:spPr>
-          <a:xfrm xmlns:a="http://schemas.openxmlformats.org/drawingml/2006/main">
-            <a:off x="10382250" y="3829050"/>
-            <a:ext cx="590550" cy="590550"/>
-          </a:xfrm>
-          <a:prstGeom xmlns:a="http://schemas.openxmlformats.org/drawingml/2006/main" prst="roundRect">
-            <a:avLst>
-              <a:gd name="adj" fmla="val 11290"/>
-            </a:avLst>
-          </a:prstGeom>
-          <a:solidFill xmlns:a="http://schemas.openxmlformats.org/drawingml/2006/main">
-            <a:srgbClr val="F0EAFE"/>
-          </a:solidFill>
-          <a:ln xmlns:a="http://schemas.openxmlformats.org/drawingml/2006/main" w="9525">
-            <a:solidFill>
-              <a:srgbClr val="F0EAFE"/>
-            </a:solidFill>
-            <a:prstDash val="solid"/>
-          </a:ln>
-        </p:spPr>
-      </p:sp>
-      <p:sp>
-        <p:nvSpPr>
-          <p:cNvPr id="83" name="">
-            <a:extLst xmlns:a="http://schemas.openxmlformats.org/drawingml/2006/main">
-              <a:ext uri="{FF2B5EF4-FFF2-40B4-BE49-F238E27FC236}">
-                <a16:creationId xmlns:a16="http://schemas.microsoft.com/office/drawing/2014/main" id="{2AE0A370-EA0E-4CAE-8264-B52F9E30DAD8}"/>
-              </a:ext>
-            </a:extLst>
-          </p:cNvPr>
-          <p:cNvSpPr>
-            <a:spLocks xmlns:a="http://schemas.openxmlformats.org/drawingml/2006/main" noGrp="1"/>
-          </p:cNvSpPr>
-          <p:nvPr/>
-        </p:nvSpPr>
-        <p:spPr>
-          <a:xfrm xmlns:a="http://schemas.openxmlformats.org/drawingml/2006/main">
-            <a:off x="10458450" y="3990975"/>
-            <a:ext cx="438150" cy="19050"/>
+          <p:cNvPr id="71" name="">
+            <a:extLst xmlns:a="http://schemas.openxmlformats.org/drawingml/2006/main">
+              <a:ext uri="{FF2B5EF4-FFF2-40B4-BE49-F238E27FC236}">
+                <a16:creationId xmlns:a16="http://schemas.microsoft.com/office/drawing/2014/main" id="{26AD7001-EF2E-4D05-8108-13EED3E1CA03}"/>
+              </a:ext>
+            </a:extLst>
+          </p:cNvPr>
+          <p:cNvSpPr>
+            <a:spLocks xmlns:a="http://schemas.openxmlformats.org/drawingml/2006/main" noGrp="1"/>
+          </p:cNvSpPr>
+          <p:nvPr/>
+        </p:nvSpPr>
+        <p:spPr>
+          <a:xfrm xmlns:a="http://schemas.openxmlformats.org/drawingml/2006/main">
+            <a:off x="9601200" y="3333750"/>
+            <a:ext cx="342900" cy="342900"/>
           </a:xfrm>
           <a:prstGeom xmlns:a="http://schemas.openxmlformats.org/drawingml/2006/main" prst="rect">
             <a:avLst/>
           </a:prstGeom>
-          <a:solidFill xmlns:a="http://schemas.openxmlformats.org/drawingml/2006/main">
-            <a:srgbClr val="FFFFFF"/>
-          </a:solidFill>
-          <a:ln xmlns:a="http://schemas.openxmlformats.org/drawingml/2006/main" w="9525">
-            <a:solidFill>
-              <a:srgbClr val="FFFFFF"/>
-            </a:solidFill>
-            <a:prstDash val="solid"/>
-          </a:ln>
-        </p:spPr>
-      </p:sp>
-      <p:sp>
-        <p:nvSpPr>
-          <p:cNvPr id="84" name="">
-            <a:extLst xmlns:a="http://schemas.openxmlformats.org/drawingml/2006/main">
-              <a:ext uri="{FF2B5EF4-FFF2-40B4-BE49-F238E27FC236}">
-                <a16:creationId xmlns:a16="http://schemas.microsoft.com/office/drawing/2014/main" id="{75E12B68-FBC0-4235-BB1D-701832FA451F}"/>
-              </a:ext>
-            </a:extLst>
-          </p:cNvPr>
-          <p:cNvSpPr>
-            <a:spLocks xmlns:a="http://schemas.openxmlformats.org/drawingml/2006/main" noGrp="1"/>
-          </p:cNvSpPr>
-          <p:nvPr/>
-        </p:nvSpPr>
-        <p:spPr>
-          <a:xfrm xmlns:a="http://schemas.openxmlformats.org/drawingml/2006/main">
-            <a:off x="10458450" y="4124325"/>
-            <a:ext cx="438150" cy="19050"/>
-          </a:xfrm>
-          <a:prstGeom xmlns:a="http://schemas.openxmlformats.org/drawingml/2006/main" prst="rect">
-            <a:avLst/>
-          </a:prstGeom>
-          <a:solidFill xmlns:a="http://schemas.openxmlformats.org/drawingml/2006/main">
-            <a:srgbClr val="FFFFFF"/>
-          </a:solidFill>
-          <a:ln xmlns:a="http://schemas.openxmlformats.org/drawingml/2006/main" w="9525">
-            <a:solidFill>
-              <a:srgbClr val="FFFFFF"/>
-            </a:solidFill>
-            <a:prstDash val="solid"/>
-          </a:ln>
-        </p:spPr>
-      </p:sp>
-      <p:sp>
-        <p:nvSpPr>
-          <p:cNvPr id="85" name="">
-            <a:extLst xmlns:a="http://schemas.openxmlformats.org/drawingml/2006/main">
-              <a:ext uri="{FF2B5EF4-FFF2-40B4-BE49-F238E27FC236}">
-                <a16:creationId xmlns:a16="http://schemas.microsoft.com/office/drawing/2014/main" id="{392C3D47-5AF7-4CFA-9951-A5A0491B40F8}"/>
-              </a:ext>
-            </a:extLst>
-          </p:cNvPr>
-          <p:cNvSpPr>
-            <a:spLocks xmlns:a="http://schemas.openxmlformats.org/drawingml/2006/main" noGrp="1"/>
-          </p:cNvSpPr>
-          <p:nvPr/>
-        </p:nvSpPr>
-        <p:spPr>
-          <a:xfrm xmlns:a="http://schemas.openxmlformats.org/drawingml/2006/main">
-            <a:off x="10458450" y="4257675"/>
-            <a:ext cx="438150" cy="19050"/>
-          </a:xfrm>
-          <a:prstGeom xmlns:a="http://schemas.openxmlformats.org/drawingml/2006/main" prst="rect">
-            <a:avLst/>
-          </a:prstGeom>
-          <a:solidFill xmlns:a="http://schemas.openxmlformats.org/drawingml/2006/main">
-            <a:srgbClr val="FFFFFF"/>
-          </a:solidFill>
-          <a:ln xmlns:a="http://schemas.openxmlformats.org/drawingml/2006/main" w="9525">
-            <a:solidFill>
-              <a:srgbClr val="FFFFFF"/>
-            </a:solidFill>
-            <a:prstDash val="solid"/>
-          </a:ln>
-        </p:spPr>
-      </p:sp>
-      <p:sp>
-        <p:nvSpPr>
-          <p:cNvPr id="86" name="">
-            <a:extLst xmlns:a="http://schemas.openxmlformats.org/drawingml/2006/main">
-              <a:ext uri="{FF2B5EF4-FFF2-40B4-BE49-F238E27FC236}">
-                <a16:creationId xmlns:a16="http://schemas.microsoft.com/office/drawing/2014/main" id="{2B74BE98-BB67-453A-8DBA-0AFD1DB024FE}"/>
-              </a:ext>
-            </a:extLst>
-          </p:cNvPr>
-          <p:cNvSpPr>
-            <a:spLocks xmlns:a="http://schemas.openxmlformats.org/drawingml/2006/main" noGrp="1"/>
-          </p:cNvSpPr>
-          <p:nvPr/>
-        </p:nvSpPr>
-        <p:spPr>
-          <a:xfrm xmlns:a="http://schemas.openxmlformats.org/drawingml/2006/main">
-            <a:off x="10382250" y="4495800"/>
-            <a:ext cx="590550" cy="190500"/>
+          <a:noFill xmlns:a="http://schemas.openxmlformats.org/drawingml/2006/main"/>
+          <a:ln xmlns:a="http://schemas.openxmlformats.org/drawingml/2006/main" w="0">
+            <a:noFill/>
+          </a:ln>
+        </p:spPr>
+        <p:txBody>
+          <a:bodyPr xmlns:a="http://schemas.openxmlformats.org/drawingml/2006/main">
+            <a:noAutofit/>
+          </a:bodyPr>
+          <a:lstStyle xmlns:a="http://schemas.openxmlformats.org/drawingml/2006/main">
+            <a:defPPr algn="ctr">
+              <a:defRPr sz="1800" b="0">
+                <a:solidFill>
+                  <a:srgbClr val="111827"/>
+                </a:solidFill>
+                <a:latin typeface="Arial"/>
+                <a:ea typeface="Arial"/>
+                <a:cs typeface="Arial"/>
+              </a:defRPr>
+            </a:defPPr>
+          </a:lstStyle>
+          <a:p xmlns:a="http://schemas.openxmlformats.org/drawingml/2006/main">
+            <a:pPr algn="ctr">
+              <a:defRPr sz="1800" b="0">
+                <a:solidFill>
+                  <a:srgbClr val="111827"/>
+                </a:solidFill>
+                <a:latin typeface="Arial"/>
+                <a:ea typeface="Arial"/>
+                <a:cs typeface="Arial"/>
+              </a:defRPr>
+            </a:pPr>
+            <a:r>
+              <a:rPr sz="1800" b="0">
+                <a:solidFill>
+                  <a:srgbClr val="111827"/>
+                </a:solidFill>
+                <a:latin typeface="Arial"/>
+                <a:ea typeface="Arial"/>
+                <a:cs typeface="Arial"/>
+              </a:rPr>
+              <a:t>→</a:t>
+            </a:r>
+          </a:p>
+        </p:txBody>
+      </p:sp>
+      <p:sp>
+        <p:nvSpPr>
+          <p:cNvPr id="72" name="">
+            <a:extLst xmlns:a="http://schemas.openxmlformats.org/drawingml/2006/main">
+              <a:ext uri="{FF2B5EF4-FFF2-40B4-BE49-F238E27FC236}">
+                <a16:creationId xmlns:a16="http://schemas.microsoft.com/office/drawing/2014/main" id="{7955542B-3D2E-4C30-8A48-F101C844C9BA}"/>
+              </a:ext>
+            </a:extLst>
+          </p:cNvPr>
+          <p:cNvSpPr>
+            <a:spLocks xmlns:a="http://schemas.openxmlformats.org/drawingml/2006/main" noGrp="1"/>
+          </p:cNvSpPr>
+          <p:nvPr/>
+        </p:nvSpPr>
+        <p:spPr>
+          <a:xfrm xmlns:a="http://schemas.openxmlformats.org/drawingml/2006/main">
+            <a:off x="10001250" y="2324100"/>
+            <a:ext cx="1162050" cy="323850"/>
           </a:xfrm>
           <a:prstGeom xmlns:a="http://schemas.openxmlformats.org/drawingml/2006/main" prst="rect">
             <a:avLst/>
@@ -19065,29 +18994,200 @@
                 <a:ea typeface="Arial"/>
                 <a:cs typeface="Arial"/>
               </a:rPr>
-              <a:t>O2</a:t>
+              <a:t>выходной вектор</a:t>
             </a:r>
           </a:p>
         </p:txBody>
       </p:sp>
       <p:sp>
         <p:nvSpPr>
-          <p:cNvPr id="87" name="">
-            <a:extLst xmlns:a="http://schemas.openxmlformats.org/drawingml/2006/main">
-              <a:ext uri="{FF2B5EF4-FFF2-40B4-BE49-F238E27FC236}">
-                <a16:creationId xmlns:a16="http://schemas.microsoft.com/office/drawing/2014/main" id="{8953C3F7-DF4A-44EA-8C59-89F2C6264BE5}"/>
-              </a:ext>
-            </a:extLst>
-          </p:cNvPr>
-          <p:cNvSpPr>
-            <a:spLocks xmlns:a="http://schemas.openxmlformats.org/drawingml/2006/main" noGrp="1"/>
-          </p:cNvSpPr>
-          <p:nvPr/>
-        </p:nvSpPr>
-        <p:spPr>
-          <a:xfrm xmlns:a="http://schemas.openxmlformats.org/drawingml/2006/main">
-            <a:off x="10572750" y="4629150"/>
-            <a:ext cx="228600" cy="228600"/>
+          <p:cNvPr id="73" name="">
+            <a:extLst xmlns:a="http://schemas.openxmlformats.org/drawingml/2006/main">
+              <a:ext uri="{FF2B5EF4-FFF2-40B4-BE49-F238E27FC236}">
+                <a16:creationId xmlns:a16="http://schemas.microsoft.com/office/drawing/2014/main" id="{6012F62B-DB8D-41D4-9650-DBE0F39A475B}"/>
+              </a:ext>
+            </a:extLst>
+          </p:cNvPr>
+          <p:cNvSpPr>
+            <a:spLocks xmlns:a="http://schemas.openxmlformats.org/drawingml/2006/main" noGrp="1"/>
+          </p:cNvSpPr>
+          <p:nvPr/>
+        </p:nvSpPr>
+        <p:spPr>
+          <a:xfrm xmlns:a="http://schemas.openxmlformats.org/drawingml/2006/main">
+            <a:off x="10020300" y="2781300"/>
+            <a:ext cx="1104900" cy="1619250"/>
+          </a:xfrm>
+          <a:prstGeom xmlns:a="http://schemas.openxmlformats.org/drawingml/2006/main" prst="roundRect">
+            <a:avLst>
+              <a:gd name="adj" fmla="val 6034"/>
+            </a:avLst>
+          </a:prstGeom>
+          <a:solidFill xmlns:a="http://schemas.openxmlformats.org/drawingml/2006/main">
+            <a:srgbClr val="FFFFFF"/>
+          </a:solidFill>
+          <a:ln xmlns:a="http://schemas.openxmlformats.org/drawingml/2006/main" w="9525">
+            <a:solidFill>
+              <a:srgbClr val="E5E1D8"/>
+            </a:solidFill>
+            <a:prstDash val="solid"/>
+          </a:ln>
+        </p:spPr>
+      </p:sp>
+      <p:sp>
+        <p:nvSpPr>
+          <p:cNvPr id="74" name="">
+            <a:extLst xmlns:a="http://schemas.openxmlformats.org/drawingml/2006/main">
+              <a:ext uri="{FF2B5EF4-FFF2-40B4-BE49-F238E27FC236}">
+                <a16:creationId xmlns:a16="http://schemas.microsoft.com/office/drawing/2014/main" id="{EDE7C4E5-216C-4C97-B5E2-B433E7C37160}"/>
+              </a:ext>
+            </a:extLst>
+          </p:cNvPr>
+          <p:cNvSpPr>
+            <a:spLocks xmlns:a="http://schemas.openxmlformats.org/drawingml/2006/main" noGrp="1"/>
+          </p:cNvSpPr>
+          <p:nvPr/>
+        </p:nvSpPr>
+        <p:spPr>
+          <a:xfrm xmlns:a="http://schemas.openxmlformats.org/drawingml/2006/main">
+            <a:off x="10096500" y="2857500"/>
+            <a:ext cx="952500" cy="209550"/>
+          </a:xfrm>
+          <a:prstGeom xmlns:a="http://schemas.openxmlformats.org/drawingml/2006/main" prst="rect">
+            <a:avLst/>
+          </a:prstGeom>
+          <a:noFill xmlns:a="http://schemas.openxmlformats.org/drawingml/2006/main"/>
+          <a:ln xmlns:a="http://schemas.openxmlformats.org/drawingml/2006/main" w="0">
+            <a:noFill/>
+          </a:ln>
+        </p:spPr>
+        <p:txBody>
+          <a:bodyPr xmlns:a="http://schemas.openxmlformats.org/drawingml/2006/main">
+            <a:noAutofit/>
+          </a:bodyPr>
+          <a:lstStyle xmlns:a="http://schemas.openxmlformats.org/drawingml/2006/main">
+            <a:defPPr algn="ctr">
+              <a:defRPr sz="1200" b="0">
+                <a:solidFill>
+                  <a:srgbClr val="596273"/>
+                </a:solidFill>
+                <a:latin typeface="Arial"/>
+                <a:ea typeface="Arial"/>
+                <a:cs typeface="Arial"/>
+              </a:defRPr>
+            </a:defPPr>
+          </a:lstStyle>
+          <a:p xmlns:a="http://schemas.openxmlformats.org/drawingml/2006/main">
+            <a:pPr algn="ctr">
+              <a:defRPr sz="1200" b="0">
+                <a:solidFill>
+                  <a:srgbClr val="596273"/>
+                </a:solidFill>
+                <a:latin typeface="Arial"/>
+                <a:ea typeface="Arial"/>
+                <a:cs typeface="Arial"/>
+              </a:defRPr>
+            </a:pPr>
+            <a:r>
+              <a:rPr sz="1200" b="0">
+                <a:solidFill>
+                  <a:srgbClr val="596273"/>
+                </a:solidFill>
+                <a:latin typeface="Arial"/>
+                <a:ea typeface="Arial"/>
+                <a:cs typeface="Arial"/>
+              </a:rPr>
+              <a:t>O1(i,j)</a:t>
+            </a:r>
+          </a:p>
+        </p:txBody>
+      </p:sp>
+      <p:sp>
+        <p:nvSpPr>
+          <p:cNvPr id="75" name="">
+            <a:extLst xmlns:a="http://schemas.openxmlformats.org/drawingml/2006/main">
+              <a:ext uri="{FF2B5EF4-FFF2-40B4-BE49-F238E27FC236}">
+                <a16:creationId xmlns:a16="http://schemas.microsoft.com/office/drawing/2014/main" id="{0C635CBC-6752-43E3-91F6-CA1D39A9BCB8}"/>
+              </a:ext>
+            </a:extLst>
+          </p:cNvPr>
+          <p:cNvSpPr>
+            <a:spLocks xmlns:a="http://schemas.openxmlformats.org/drawingml/2006/main" noGrp="1"/>
+          </p:cNvSpPr>
+          <p:nvPr/>
+        </p:nvSpPr>
+        <p:spPr>
+          <a:xfrm xmlns:a="http://schemas.openxmlformats.org/drawingml/2006/main">
+            <a:off x="10096500" y="3181350"/>
+            <a:ext cx="952500" cy="209550"/>
+          </a:xfrm>
+          <a:prstGeom xmlns:a="http://schemas.openxmlformats.org/drawingml/2006/main" prst="rect">
+            <a:avLst/>
+          </a:prstGeom>
+          <a:noFill xmlns:a="http://schemas.openxmlformats.org/drawingml/2006/main"/>
+          <a:ln xmlns:a="http://schemas.openxmlformats.org/drawingml/2006/main" w="0">
+            <a:noFill/>
+          </a:ln>
+        </p:spPr>
+        <p:txBody>
+          <a:bodyPr xmlns:a="http://schemas.openxmlformats.org/drawingml/2006/main">
+            <a:noAutofit/>
+          </a:bodyPr>
+          <a:lstStyle xmlns:a="http://schemas.openxmlformats.org/drawingml/2006/main">
+            <a:defPPr algn="ctr">
+              <a:defRPr sz="1200" b="0">
+                <a:solidFill>
+                  <a:srgbClr val="596273"/>
+                </a:solidFill>
+                <a:latin typeface="Arial"/>
+                <a:ea typeface="Arial"/>
+                <a:cs typeface="Arial"/>
+              </a:defRPr>
+            </a:defPPr>
+          </a:lstStyle>
+          <a:p xmlns:a="http://schemas.openxmlformats.org/drawingml/2006/main">
+            <a:pPr algn="ctr">
+              <a:defRPr sz="1200" b="0">
+                <a:solidFill>
+                  <a:srgbClr val="596273"/>
+                </a:solidFill>
+                <a:latin typeface="Arial"/>
+                <a:ea typeface="Arial"/>
+                <a:cs typeface="Arial"/>
+              </a:defRPr>
+            </a:pPr>
+            <a:r>
+              <a:rPr sz="1200" b="0">
+                <a:solidFill>
+                  <a:srgbClr val="596273"/>
+                </a:solidFill>
+                <a:latin typeface="Arial"/>
+                <a:ea typeface="Arial"/>
+                <a:cs typeface="Arial"/>
+              </a:rPr>
+              <a:t>O2(i,j)</a:t>
+            </a:r>
+          </a:p>
+        </p:txBody>
+      </p:sp>
+      <p:sp>
+        <p:nvSpPr>
+          <p:cNvPr id="76" name="">
+            <a:extLst xmlns:a="http://schemas.openxmlformats.org/drawingml/2006/main">
+              <a:ext uri="{FF2B5EF4-FFF2-40B4-BE49-F238E27FC236}">
+                <a16:creationId xmlns:a16="http://schemas.microsoft.com/office/drawing/2014/main" id="{F9798C6F-7AE6-4D10-B07D-7924874BE857}"/>
+              </a:ext>
+            </a:extLst>
+          </p:cNvPr>
+          <p:cNvSpPr>
+            <a:spLocks xmlns:a="http://schemas.openxmlformats.org/drawingml/2006/main" noGrp="1"/>
+          </p:cNvSpPr>
+          <p:nvPr/>
+        </p:nvSpPr>
+        <p:spPr>
+          <a:xfrm xmlns:a="http://schemas.openxmlformats.org/drawingml/2006/main">
+            <a:off x="10096500" y="3505200"/>
+            <a:ext cx="952500" cy="209550"/>
           </a:xfrm>
           <a:prstGeom xmlns:a="http://schemas.openxmlformats.org/drawingml/2006/main" prst="rect">
             <a:avLst/>
@@ -19140,22 +19240,22 @@
       </p:sp>
       <p:sp>
         <p:nvSpPr>
-          <p:cNvPr id="88" name="">
-            <a:extLst xmlns:a="http://schemas.openxmlformats.org/drawingml/2006/main">
-              <a:ext uri="{FF2B5EF4-FFF2-40B4-BE49-F238E27FC236}">
-                <a16:creationId xmlns:a16="http://schemas.microsoft.com/office/drawing/2014/main" id="{2331ABC3-F523-4903-BDF0-682C44EA069B}"/>
-              </a:ext>
-            </a:extLst>
-          </p:cNvPr>
-          <p:cNvSpPr>
-            <a:spLocks xmlns:a="http://schemas.openxmlformats.org/drawingml/2006/main" noGrp="1"/>
-          </p:cNvSpPr>
-          <p:nvPr/>
-        </p:nvSpPr>
-        <p:spPr>
-          <a:xfrm xmlns:a="http://schemas.openxmlformats.org/drawingml/2006/main">
-            <a:off x="6572250" y="5238750"/>
-            <a:ext cx="4381500" cy="247650"/>
+          <p:cNvPr id="77" name="">
+            <a:extLst xmlns:a="http://schemas.openxmlformats.org/drawingml/2006/main">
+              <a:ext uri="{FF2B5EF4-FFF2-40B4-BE49-F238E27FC236}">
+                <a16:creationId xmlns:a16="http://schemas.microsoft.com/office/drawing/2014/main" id="{9EAEAFD3-6253-4C13-B35D-64A1102252B4}"/>
+              </a:ext>
+            </a:extLst>
+          </p:cNvPr>
+          <p:cNvSpPr>
+            <a:spLocks xmlns:a="http://schemas.openxmlformats.org/drawingml/2006/main" noGrp="1"/>
+          </p:cNvSpPr>
+          <p:nvPr/>
+        </p:nvSpPr>
+        <p:spPr>
+          <a:xfrm xmlns:a="http://schemas.openxmlformats.org/drawingml/2006/main">
+            <a:off x="10096500" y="3829050"/>
+            <a:ext cx="952500" cy="209550"/>
           </a:xfrm>
           <a:prstGeom xmlns:a="http://schemas.openxmlformats.org/drawingml/2006/main" prst="rect">
             <a:avLst/>
@@ -19201,28 +19301,96 @@
                 <a:ea typeface="Arial"/>
                 <a:cs typeface="Arial"/>
               </a:rPr>
-              <a:t>новые каналы O1, O2, …, Cout</a:t>
+              <a:t>OCout(i,j)</a:t>
             </a:r>
           </a:p>
         </p:txBody>
       </p:sp>
       <p:sp>
         <p:nvSpPr>
-          <p:cNvPr id="89" name="">
-            <a:extLst xmlns:a="http://schemas.openxmlformats.org/drawingml/2006/main">
-              <a:ext uri="{FF2B5EF4-FFF2-40B4-BE49-F238E27FC236}">
-                <a16:creationId xmlns:a16="http://schemas.microsoft.com/office/drawing/2014/main" id="{60B86FA7-00B3-49EA-9608-B89BACE13DDA}"/>
-              </a:ext>
-            </a:extLst>
-          </p:cNvPr>
-          <p:cNvSpPr>
-            <a:spLocks xmlns:a="http://schemas.openxmlformats.org/drawingml/2006/main" noGrp="1"/>
-          </p:cNvSpPr>
-          <p:nvPr/>
-        </p:nvSpPr>
-        <p:spPr>
-          <a:xfrm xmlns:a="http://schemas.openxmlformats.org/drawingml/2006/main">
-            <a:off x="723900" y="5886450"/>
+          <p:cNvPr id="78" name="">
+            <a:extLst xmlns:a="http://schemas.openxmlformats.org/drawingml/2006/main">
+              <a:ext uri="{FF2B5EF4-FFF2-40B4-BE49-F238E27FC236}">
+                <a16:creationId xmlns:a16="http://schemas.microsoft.com/office/drawing/2014/main" id="{CC9AC8C2-FC2E-4AED-9261-CF5C877F03DD}"/>
+              </a:ext>
+            </a:extLst>
+          </p:cNvPr>
+          <p:cNvSpPr>
+            <a:spLocks xmlns:a="http://schemas.openxmlformats.org/drawingml/2006/main" noGrp="1"/>
+          </p:cNvSpPr>
+          <p:nvPr/>
+        </p:nvSpPr>
+        <p:spPr>
+          <a:xfrm xmlns:a="http://schemas.openxmlformats.org/drawingml/2006/main">
+            <a:off x="6515100" y="4857750"/>
+            <a:ext cx="4476750" cy="266700"/>
+          </a:xfrm>
+          <a:prstGeom xmlns:a="http://schemas.openxmlformats.org/drawingml/2006/main" prst="rect">
+            <a:avLst/>
+          </a:prstGeom>
+          <a:noFill xmlns:a="http://schemas.openxmlformats.org/drawingml/2006/main"/>
+          <a:ln xmlns:a="http://schemas.openxmlformats.org/drawingml/2006/main" w="0">
+            <a:noFill/>
+          </a:ln>
+        </p:spPr>
+        <p:txBody>
+          <a:bodyPr xmlns:a="http://schemas.openxmlformats.org/drawingml/2006/main">
+            <a:noAutofit/>
+          </a:bodyPr>
+          <a:lstStyle xmlns:a="http://schemas.openxmlformats.org/drawingml/2006/main">
+            <a:defPPr algn="ctr">
+              <a:defRPr sz="1200" b="0">
+                <a:solidFill>
+                  <a:srgbClr val="596273"/>
+                </a:solidFill>
+                <a:latin typeface="Arial"/>
+                <a:ea typeface="Arial"/>
+                <a:cs typeface="Arial"/>
+              </a:defRPr>
+            </a:defPPr>
+          </a:lstStyle>
+          <a:p xmlns:a="http://schemas.openxmlformats.org/drawingml/2006/main">
+            <a:pPr algn="ctr">
+              <a:defRPr sz="1200" b="0">
+                <a:solidFill>
+                  <a:srgbClr val="596273"/>
+                </a:solidFill>
+                <a:latin typeface="Arial"/>
+                <a:ea typeface="Arial"/>
+                <a:cs typeface="Arial"/>
+              </a:defRPr>
+            </a:pPr>
+            <a:r>
+              <a:rPr sz="1200" b="0">
+                <a:solidFill>
+                  <a:srgbClr val="596273"/>
+                </a:solidFill>
+                <a:latin typeface="Arial"/>
+                <a:ea typeface="Arial"/>
+                <a:cs typeface="Arial"/>
+              </a:rPr>
+              <a:t>Соседние пиксели здесь не участвуют</a:t>
+            </a:r>
+          </a:p>
+        </p:txBody>
+      </p:sp>
+      <p:sp>
+        <p:nvSpPr>
+          <p:cNvPr id="79" name="">
+            <a:extLst xmlns:a="http://schemas.openxmlformats.org/drawingml/2006/main">
+              <a:ext uri="{FF2B5EF4-FFF2-40B4-BE49-F238E27FC236}">
+                <a16:creationId xmlns:a16="http://schemas.microsoft.com/office/drawing/2014/main" id="{3E68971E-7A94-4288-A33E-A8777F5810C2}"/>
+              </a:ext>
+            </a:extLst>
+          </p:cNvPr>
+          <p:cNvSpPr>
+            <a:spLocks xmlns:a="http://schemas.openxmlformats.org/drawingml/2006/main" noGrp="1"/>
+          </p:cNvSpPr>
+          <p:nvPr/>
+        </p:nvSpPr>
+        <p:spPr>
+          <a:xfrm xmlns:a="http://schemas.openxmlformats.org/drawingml/2006/main">
+            <a:off x="723900" y="6000750"/>
             <a:ext cx="10096500" cy="323850"/>
           </a:xfrm>
           <a:prstGeom xmlns:a="http://schemas.openxmlformats.org/drawingml/2006/main" prst="rect">
@@ -19269,7 +19437,7 @@
                 <a:ea typeface="Arial"/>
                 <a:cs typeface="Arial"/>
               </a:rPr>
-              <a:t>Итого: depthwise отвечает за пространство, pointwise — за связи между каналами</a:t>
+              <a:t>Depthwise: работа в пространстве. Pointwise: смешивание каналов.</a:t>
             </a:r>
           </a:p>
         </p:txBody>
@@ -19277,7 +19445,7 @@
     </p:spTree>
     <p:extLst>
       <p:ext uri="{BB962C8B-B14F-4D97-AF65-F5344CB8AC3E}">
-        <p14:creationId xmlns:p14="http://schemas.microsoft.com/office/powerpoint/2010/main" val="169101578"/>
+        <p14:creationId xmlns:p14="http://schemas.microsoft.com/office/powerpoint/2010/main" val="2121388601"/>
       </p:ext>
     </p:extLst>
   </p:cSld>
@@ -19308,7 +19476,7 @@
           <p:cNvPr id="68" name="">
             <a:extLst xmlns:a="http://schemas.openxmlformats.org/drawingml/2006/main">
               <a:ext uri="{FF2B5EF4-FFF2-40B4-BE49-F238E27FC236}">
-                <a16:creationId xmlns:a16="http://schemas.microsoft.com/office/drawing/2014/main" id="{2259D2C8-3A23-473A-825B-9D970794C309}"/>
+                <a16:creationId xmlns:a16="http://schemas.microsoft.com/office/drawing/2014/main" id="{EE81E3B5-6DE5-4819-BA0A-E8A154A38498}"/>
               </a:ext>
             </a:extLst>
           </p:cNvPr>
@@ -19376,7 +19544,7 @@
           <p:cNvPr id="2" name="">
             <a:extLst xmlns:a="http://schemas.openxmlformats.org/drawingml/2006/main">
               <a:ext uri="{FF2B5EF4-FFF2-40B4-BE49-F238E27FC236}">
-                <a16:creationId xmlns:a16="http://schemas.microsoft.com/office/drawing/2014/main" id="{80A579DF-1E9F-4900-BFAC-8B219C476B48}"/>
+                <a16:creationId xmlns:a16="http://schemas.microsoft.com/office/drawing/2014/main" id="{5BA7B7EC-9B96-402F-87E9-B62EB8F07F10}"/>
               </a:ext>
             </a:extLst>
           </p:cNvPr>
@@ -19409,7 +19577,7 @@
           <p:cNvPr id="3" name="">
             <a:extLst xmlns:a="http://schemas.openxmlformats.org/drawingml/2006/main">
               <a:ext uri="{FF2B5EF4-FFF2-40B4-BE49-F238E27FC236}">
-                <a16:creationId xmlns:a16="http://schemas.microsoft.com/office/drawing/2014/main" id="{9B6CA581-4D2C-4538-9CC8-F9344387C24A}"/>
+                <a16:creationId xmlns:a16="http://schemas.microsoft.com/office/drawing/2014/main" id="{5C9C479F-8973-4C81-B2A3-3301E613F093}"/>
               </a:ext>
             </a:extLst>
           </p:cNvPr>
@@ -19477,7 +19645,7 @@
           <p:cNvPr id="4" name="">
             <a:extLst xmlns:a="http://schemas.openxmlformats.org/drawingml/2006/main">
               <a:ext uri="{FF2B5EF4-FFF2-40B4-BE49-F238E27FC236}">
-                <a16:creationId xmlns:a16="http://schemas.microsoft.com/office/drawing/2014/main" id="{D879FA53-D864-4A40-B49F-091FD7397BA2}"/>
+                <a16:creationId xmlns:a16="http://schemas.microsoft.com/office/drawing/2014/main" id="{4799ECEB-D8E2-4296-8660-84178836100C}"/>
               </a:ext>
             </a:extLst>
           </p:cNvPr>
@@ -19545,7 +19713,7 @@
           <p:cNvPr id="5" name="">
             <a:extLst xmlns:a="http://schemas.openxmlformats.org/drawingml/2006/main">
               <a:ext uri="{FF2B5EF4-FFF2-40B4-BE49-F238E27FC236}">
-                <a16:creationId xmlns:a16="http://schemas.microsoft.com/office/drawing/2014/main" id="{8F2A8FF7-6D47-4491-B4FC-4CD605916860}"/>
+                <a16:creationId xmlns:a16="http://schemas.microsoft.com/office/drawing/2014/main" id="{B7748908-44B0-404F-91E8-5231DAE8B8EE}"/>
               </a:ext>
             </a:extLst>
           </p:cNvPr>
@@ -19575,7 +19743,7 @@
           <p:cNvPr id="6" name="">
             <a:extLst xmlns:a="http://schemas.openxmlformats.org/drawingml/2006/main">
               <a:ext uri="{FF2B5EF4-FFF2-40B4-BE49-F238E27FC236}">
-                <a16:creationId xmlns:a16="http://schemas.microsoft.com/office/drawing/2014/main" id="{BF3EE176-972B-486A-98EF-E074CAA5D114}"/>
+                <a16:creationId xmlns:a16="http://schemas.microsoft.com/office/drawing/2014/main" id="{0565B4DD-0883-4066-A41A-0F8340936C18}"/>
               </a:ext>
             </a:extLst>
           </p:cNvPr>
@@ -19605,7 +19773,7 @@
           <p:cNvPr id="7" name="">
             <a:extLst xmlns:a="http://schemas.openxmlformats.org/drawingml/2006/main">
               <a:ext uri="{FF2B5EF4-FFF2-40B4-BE49-F238E27FC236}">
-                <a16:creationId xmlns:a16="http://schemas.microsoft.com/office/drawing/2014/main" id="{010CB30B-852A-4FE0-BDB4-B9028D5BBAD4}"/>
+                <a16:creationId xmlns:a16="http://schemas.microsoft.com/office/drawing/2014/main" id="{3C56F384-023F-41D2-9F55-27B981FFF921}"/>
               </a:ext>
             </a:extLst>
           </p:cNvPr>
@@ -19635,7 +19803,7 @@
           <p:cNvPr id="8" name="">
             <a:extLst xmlns:a="http://schemas.openxmlformats.org/drawingml/2006/main">
               <a:ext uri="{FF2B5EF4-FFF2-40B4-BE49-F238E27FC236}">
-                <a16:creationId xmlns:a16="http://schemas.microsoft.com/office/drawing/2014/main" id="{8A02DA7F-DB6F-48AF-9DC2-2BDA7F6177ED}"/>
+                <a16:creationId xmlns:a16="http://schemas.microsoft.com/office/drawing/2014/main" id="{2DC69E38-AE73-4DC1-A7A4-7C50382DD12A}"/>
               </a:ext>
             </a:extLst>
           </p:cNvPr>
@@ -19665,7 +19833,7 @@
           <p:cNvPr id="9" name="">
             <a:extLst xmlns:a="http://schemas.openxmlformats.org/drawingml/2006/main">
               <a:ext uri="{FF2B5EF4-FFF2-40B4-BE49-F238E27FC236}">
-                <a16:creationId xmlns:a16="http://schemas.microsoft.com/office/drawing/2014/main" id="{9604AAAE-EA05-4D26-840B-0F53C2FCEE02}"/>
+                <a16:creationId xmlns:a16="http://schemas.microsoft.com/office/drawing/2014/main" id="{DF492E78-750C-463E-BD94-00ACFD44A29D}"/>
               </a:ext>
             </a:extLst>
           </p:cNvPr>
@@ -19695,7 +19863,7 @@
           <p:cNvPr id="10" name="">
             <a:extLst xmlns:a="http://schemas.openxmlformats.org/drawingml/2006/main">
               <a:ext uri="{FF2B5EF4-FFF2-40B4-BE49-F238E27FC236}">
-                <a16:creationId xmlns:a16="http://schemas.microsoft.com/office/drawing/2014/main" id="{25923445-65B0-449A-9B34-97084D4A4F17}"/>
+                <a16:creationId xmlns:a16="http://schemas.microsoft.com/office/drawing/2014/main" id="{A4C92FF0-D672-411D-8944-E919C4B69D22}"/>
               </a:ext>
             </a:extLst>
           </p:cNvPr>
@@ -19725,7 +19893,7 @@
           <p:cNvPr id="11" name="">
             <a:extLst xmlns:a="http://schemas.openxmlformats.org/drawingml/2006/main">
               <a:ext uri="{FF2B5EF4-FFF2-40B4-BE49-F238E27FC236}">
-                <a16:creationId xmlns:a16="http://schemas.microsoft.com/office/drawing/2014/main" id="{4BF69306-D275-4BC2-A312-86FA53B8C65B}"/>
+                <a16:creationId xmlns:a16="http://schemas.microsoft.com/office/drawing/2014/main" id="{7CB94011-F386-4E89-A5CC-7D1085128323}"/>
               </a:ext>
             </a:extLst>
           </p:cNvPr>
@@ -19755,7 +19923,7 @@
           <p:cNvPr id="12" name="">
             <a:extLst xmlns:a="http://schemas.openxmlformats.org/drawingml/2006/main">
               <a:ext uri="{FF2B5EF4-FFF2-40B4-BE49-F238E27FC236}">
-                <a16:creationId xmlns:a16="http://schemas.microsoft.com/office/drawing/2014/main" id="{67F98EC9-D44B-4312-9102-53643D9B6F93}"/>
+                <a16:creationId xmlns:a16="http://schemas.microsoft.com/office/drawing/2014/main" id="{9249F093-EC3A-426D-8A79-1E5CE3169E37}"/>
               </a:ext>
             </a:extLst>
           </p:cNvPr>
@@ -19785,7 +19953,7 @@
           <p:cNvPr id="13" name="">
             <a:extLst xmlns:a="http://schemas.openxmlformats.org/drawingml/2006/main">
               <a:ext uri="{FF2B5EF4-FFF2-40B4-BE49-F238E27FC236}">
-                <a16:creationId xmlns:a16="http://schemas.microsoft.com/office/drawing/2014/main" id="{0D8C71C8-0A19-49D7-83C1-B0DD2608C351}"/>
+                <a16:creationId xmlns:a16="http://schemas.microsoft.com/office/drawing/2014/main" id="{BE77EC45-A747-4D28-9198-4F7804823ACF}"/>
               </a:ext>
             </a:extLst>
           </p:cNvPr>
@@ -19815,7 +19983,7 @@
           <p:cNvPr id="14" name="">
             <a:extLst xmlns:a="http://schemas.openxmlformats.org/drawingml/2006/main">
               <a:ext uri="{FF2B5EF4-FFF2-40B4-BE49-F238E27FC236}">
-                <a16:creationId xmlns:a16="http://schemas.microsoft.com/office/drawing/2014/main" id="{E341AA3C-21D6-4514-B528-EA624C61E2EA}"/>
+                <a16:creationId xmlns:a16="http://schemas.microsoft.com/office/drawing/2014/main" id="{00BC77FC-CEDB-4972-8E02-0D62D7C09F21}"/>
               </a:ext>
             </a:extLst>
           </p:cNvPr>
@@ -19845,7 +20013,7 @@
           <p:cNvPr id="15" name="">
             <a:extLst xmlns:a="http://schemas.openxmlformats.org/drawingml/2006/main">
               <a:ext uri="{FF2B5EF4-FFF2-40B4-BE49-F238E27FC236}">
-                <a16:creationId xmlns:a16="http://schemas.microsoft.com/office/drawing/2014/main" id="{6C8FE653-FB71-4DF9-8224-DDD2B158C5B2}"/>
+                <a16:creationId xmlns:a16="http://schemas.microsoft.com/office/drawing/2014/main" id="{BE62341B-5941-41A6-85C5-EACBD7A3AD97}"/>
               </a:ext>
             </a:extLst>
           </p:cNvPr>
@@ -19875,7 +20043,7 @@
           <p:cNvPr id="16" name="">
             <a:extLst xmlns:a="http://schemas.openxmlformats.org/drawingml/2006/main">
               <a:ext uri="{FF2B5EF4-FFF2-40B4-BE49-F238E27FC236}">
-                <a16:creationId xmlns:a16="http://schemas.microsoft.com/office/drawing/2014/main" id="{938049DF-4A35-4A47-B3F4-A86FD71EE47C}"/>
+                <a16:creationId xmlns:a16="http://schemas.microsoft.com/office/drawing/2014/main" id="{F815E93B-06C4-493F-885F-11B22364F236}"/>
               </a:ext>
             </a:extLst>
           </p:cNvPr>
@@ -19905,7 +20073,7 @@
           <p:cNvPr id="17" name="">
             <a:extLst xmlns:a="http://schemas.openxmlformats.org/drawingml/2006/main">
               <a:ext uri="{FF2B5EF4-FFF2-40B4-BE49-F238E27FC236}">
-                <a16:creationId xmlns:a16="http://schemas.microsoft.com/office/drawing/2014/main" id="{B98987EC-1B37-465D-B30B-ED2F8BE729AE}"/>
+                <a16:creationId xmlns:a16="http://schemas.microsoft.com/office/drawing/2014/main" id="{AC4561FB-CCD1-4329-8235-C11EFCA16104}"/>
               </a:ext>
             </a:extLst>
           </p:cNvPr>
@@ -19935,7 +20103,7 @@
           <p:cNvPr id="18" name="">
             <a:extLst xmlns:a="http://schemas.openxmlformats.org/drawingml/2006/main">
               <a:ext uri="{FF2B5EF4-FFF2-40B4-BE49-F238E27FC236}">
-                <a16:creationId xmlns:a16="http://schemas.microsoft.com/office/drawing/2014/main" id="{51005443-5EA7-4438-8DB3-0507BE6B42A0}"/>
+                <a16:creationId xmlns:a16="http://schemas.microsoft.com/office/drawing/2014/main" id="{F02E7993-52D8-4D81-9098-7246C6ACCC7D}"/>
               </a:ext>
             </a:extLst>
           </p:cNvPr>
@@ -19965,7 +20133,7 @@
           <p:cNvPr id="19" name="">
             <a:extLst xmlns:a="http://schemas.openxmlformats.org/drawingml/2006/main">
               <a:ext uri="{FF2B5EF4-FFF2-40B4-BE49-F238E27FC236}">
-                <a16:creationId xmlns:a16="http://schemas.microsoft.com/office/drawing/2014/main" id="{67BC06C5-0150-44D1-A204-AC71C38F86E6}"/>
+                <a16:creationId xmlns:a16="http://schemas.microsoft.com/office/drawing/2014/main" id="{637EAD50-F7AE-43FA-8FE0-06B8A663EC7E}"/>
               </a:ext>
             </a:extLst>
           </p:cNvPr>
@@ -19995,7 +20163,7 @@
           <p:cNvPr id="20" name="">
             <a:extLst xmlns:a="http://schemas.openxmlformats.org/drawingml/2006/main">
               <a:ext uri="{FF2B5EF4-FFF2-40B4-BE49-F238E27FC236}">
-                <a16:creationId xmlns:a16="http://schemas.microsoft.com/office/drawing/2014/main" id="{8C539C2F-0B20-4A41-A411-910614E122A4}"/>
+                <a16:creationId xmlns:a16="http://schemas.microsoft.com/office/drawing/2014/main" id="{2A6A0F9E-72E3-4767-8F81-FA751A43E910}"/>
               </a:ext>
             </a:extLst>
           </p:cNvPr>
@@ -20025,7 +20193,7 @@
           <p:cNvPr id="21" name="">
             <a:extLst xmlns:a="http://schemas.openxmlformats.org/drawingml/2006/main">
               <a:ext uri="{FF2B5EF4-FFF2-40B4-BE49-F238E27FC236}">
-                <a16:creationId xmlns:a16="http://schemas.microsoft.com/office/drawing/2014/main" id="{E6CA2C11-7257-467F-91B2-F6453AE000E7}"/>
+                <a16:creationId xmlns:a16="http://schemas.microsoft.com/office/drawing/2014/main" id="{356E1EC6-4072-4978-B02B-ACB7A72FCAF8}"/>
               </a:ext>
             </a:extLst>
           </p:cNvPr>
@@ -20055,7 +20223,7 @@
           <p:cNvPr id="22" name="">
             <a:extLst xmlns:a="http://schemas.openxmlformats.org/drawingml/2006/main">
               <a:ext uri="{FF2B5EF4-FFF2-40B4-BE49-F238E27FC236}">
-                <a16:creationId xmlns:a16="http://schemas.microsoft.com/office/drawing/2014/main" id="{59F28AD2-DE40-43B0-A080-DCB219E796EA}"/>
+                <a16:creationId xmlns:a16="http://schemas.microsoft.com/office/drawing/2014/main" id="{A04B1B35-3FCD-40FA-809D-9A5AD3686600}"/>
               </a:ext>
             </a:extLst>
           </p:cNvPr>
@@ -20085,7 +20253,7 @@
           <p:cNvPr id="23" name="">
             <a:extLst xmlns:a="http://schemas.openxmlformats.org/drawingml/2006/main">
               <a:ext uri="{FF2B5EF4-FFF2-40B4-BE49-F238E27FC236}">
-                <a16:creationId xmlns:a16="http://schemas.microsoft.com/office/drawing/2014/main" id="{D6F6A860-1BF5-43DC-8091-7FEDEE6CE2DC}"/>
+                <a16:creationId xmlns:a16="http://schemas.microsoft.com/office/drawing/2014/main" id="{5C6D123E-5690-41BE-A46E-C3CFAA386C0B}"/>
               </a:ext>
             </a:extLst>
           </p:cNvPr>
@@ -20115,7 +20283,7 @@
           <p:cNvPr id="24" name="">
             <a:extLst xmlns:a="http://schemas.openxmlformats.org/drawingml/2006/main">
               <a:ext uri="{FF2B5EF4-FFF2-40B4-BE49-F238E27FC236}">
-                <a16:creationId xmlns:a16="http://schemas.microsoft.com/office/drawing/2014/main" id="{206ACB7A-FF08-45A0-B261-6B8B8D512850}"/>
+                <a16:creationId xmlns:a16="http://schemas.microsoft.com/office/drawing/2014/main" id="{0D8777C4-104E-473F-8889-59F7730FE571}"/>
               </a:ext>
             </a:extLst>
           </p:cNvPr>
@@ -20145,7 +20313,7 @@
           <p:cNvPr id="25" name="">
             <a:extLst xmlns:a="http://schemas.openxmlformats.org/drawingml/2006/main">
               <a:ext uri="{FF2B5EF4-FFF2-40B4-BE49-F238E27FC236}">
-                <a16:creationId xmlns:a16="http://schemas.microsoft.com/office/drawing/2014/main" id="{1FC01F37-3BC2-4104-A014-E1198AD3407F}"/>
+                <a16:creationId xmlns:a16="http://schemas.microsoft.com/office/drawing/2014/main" id="{0B68CF23-E5F7-48DC-B77A-035A4BF92164}"/>
               </a:ext>
             </a:extLst>
           </p:cNvPr>
@@ -20175,7 +20343,7 @@
           <p:cNvPr id="26" name="">
             <a:extLst xmlns:a="http://schemas.openxmlformats.org/drawingml/2006/main">
               <a:ext uri="{FF2B5EF4-FFF2-40B4-BE49-F238E27FC236}">
-                <a16:creationId xmlns:a16="http://schemas.microsoft.com/office/drawing/2014/main" id="{5A7852DE-AAD0-4967-B7B4-2524DE0B95CA}"/>
+                <a16:creationId xmlns:a16="http://schemas.microsoft.com/office/drawing/2014/main" id="{5A498421-BDC6-487E-A6F0-0B08E53CC219}"/>
               </a:ext>
             </a:extLst>
           </p:cNvPr>
@@ -20205,7 +20373,7 @@
           <p:cNvPr id="27" name="">
             <a:extLst xmlns:a="http://schemas.openxmlformats.org/drawingml/2006/main">
               <a:ext uri="{FF2B5EF4-FFF2-40B4-BE49-F238E27FC236}">
-                <a16:creationId xmlns:a16="http://schemas.microsoft.com/office/drawing/2014/main" id="{548D4889-AE02-4274-9092-6247F7066FFC}"/>
+                <a16:creationId xmlns:a16="http://schemas.microsoft.com/office/drawing/2014/main" id="{F570AEB2-D022-406A-A3B7-51AAC478CB31}"/>
               </a:ext>
             </a:extLst>
           </p:cNvPr>
@@ -20235,7 +20403,7 @@
           <p:cNvPr id="28" name="">
             <a:extLst xmlns:a="http://schemas.openxmlformats.org/drawingml/2006/main">
               <a:ext uri="{FF2B5EF4-FFF2-40B4-BE49-F238E27FC236}">
-                <a16:creationId xmlns:a16="http://schemas.microsoft.com/office/drawing/2014/main" id="{E90D60FF-4D86-4BA1-98B9-A50569113880}"/>
+                <a16:creationId xmlns:a16="http://schemas.microsoft.com/office/drawing/2014/main" id="{B2DA8507-E281-4857-99D0-E1126956E507}"/>
               </a:ext>
             </a:extLst>
           </p:cNvPr>
@@ -20265,7 +20433,7 @@
           <p:cNvPr id="29" name="">
             <a:extLst xmlns:a="http://schemas.openxmlformats.org/drawingml/2006/main">
               <a:ext uri="{FF2B5EF4-FFF2-40B4-BE49-F238E27FC236}">
-                <a16:creationId xmlns:a16="http://schemas.microsoft.com/office/drawing/2014/main" id="{99EA79B8-AF16-47ED-A318-30B797F84663}"/>
+                <a16:creationId xmlns:a16="http://schemas.microsoft.com/office/drawing/2014/main" id="{14B3220B-1BF7-4F14-8B4F-4EF3AE3404D3}"/>
               </a:ext>
             </a:extLst>
           </p:cNvPr>
@@ -20295,7 +20463,7 @@
           <p:cNvPr id="30" name="">
             <a:extLst xmlns:a="http://schemas.openxmlformats.org/drawingml/2006/main">
               <a:ext uri="{FF2B5EF4-FFF2-40B4-BE49-F238E27FC236}">
-                <a16:creationId xmlns:a16="http://schemas.microsoft.com/office/drawing/2014/main" id="{25E18A04-66C7-4C92-9968-2E1DE5A7398B}"/>
+                <a16:creationId xmlns:a16="http://schemas.microsoft.com/office/drawing/2014/main" id="{B596B412-DF80-43F0-8EEC-9B9EEF545F41}"/>
               </a:ext>
             </a:extLst>
           </p:cNvPr>
@@ -20363,7 +20531,7 @@
           <p:cNvPr id="31" name="">
             <a:extLst xmlns:a="http://schemas.openxmlformats.org/drawingml/2006/main">
               <a:ext uri="{FF2B5EF4-FFF2-40B4-BE49-F238E27FC236}">
-                <a16:creationId xmlns:a16="http://schemas.microsoft.com/office/drawing/2014/main" id="{8425437C-E0D0-47CB-BCF7-4D7F680D67DF}"/>
+                <a16:creationId xmlns:a16="http://schemas.microsoft.com/office/drawing/2014/main" id="{EA678FA9-26EC-4810-B44B-DE0E13D050B5}"/>
               </a:ext>
             </a:extLst>
           </p:cNvPr>
@@ -20393,7 +20561,7 @@
           <p:cNvPr id="32" name="">
             <a:extLst xmlns:a="http://schemas.openxmlformats.org/drawingml/2006/main">
               <a:ext uri="{FF2B5EF4-FFF2-40B4-BE49-F238E27FC236}">
-                <a16:creationId xmlns:a16="http://schemas.microsoft.com/office/drawing/2014/main" id="{2BF3E76F-C436-4991-B1F1-56665196A555}"/>
+                <a16:creationId xmlns:a16="http://schemas.microsoft.com/office/drawing/2014/main" id="{2DDD4649-6554-45A6-B601-4C4596BE4D4B}"/>
               </a:ext>
             </a:extLst>
           </p:cNvPr>
@@ -20423,7 +20591,7 @@
           <p:cNvPr id="33" name="">
             <a:extLst xmlns:a="http://schemas.openxmlformats.org/drawingml/2006/main">
               <a:ext uri="{FF2B5EF4-FFF2-40B4-BE49-F238E27FC236}">
-                <a16:creationId xmlns:a16="http://schemas.microsoft.com/office/drawing/2014/main" id="{C5ACB260-6406-46E9-9EDF-1C38AF5941A4}"/>
+                <a16:creationId xmlns:a16="http://schemas.microsoft.com/office/drawing/2014/main" id="{99B9D5FE-1747-46EF-AB7A-55CE1D92D43B}"/>
               </a:ext>
             </a:extLst>
           </p:cNvPr>
@@ -20453,7 +20621,7 @@
           <p:cNvPr id="34" name="">
             <a:extLst xmlns:a="http://schemas.openxmlformats.org/drawingml/2006/main">
               <a:ext uri="{FF2B5EF4-FFF2-40B4-BE49-F238E27FC236}">
-                <a16:creationId xmlns:a16="http://schemas.microsoft.com/office/drawing/2014/main" id="{1900A77D-617D-45AD-BB07-6CD0C8680A65}"/>
+                <a16:creationId xmlns:a16="http://schemas.microsoft.com/office/drawing/2014/main" id="{45290337-B9BC-48B7-B465-22DCAA24D875}"/>
               </a:ext>
             </a:extLst>
           </p:cNvPr>
@@ -20483,7 +20651,7 @@
           <p:cNvPr id="35" name="">
             <a:extLst xmlns:a="http://schemas.openxmlformats.org/drawingml/2006/main">
               <a:ext uri="{FF2B5EF4-FFF2-40B4-BE49-F238E27FC236}">
-                <a16:creationId xmlns:a16="http://schemas.microsoft.com/office/drawing/2014/main" id="{5F0CE85C-768D-480F-8C76-6B522B5E7796}"/>
+                <a16:creationId xmlns:a16="http://schemas.microsoft.com/office/drawing/2014/main" id="{C3FE71EE-D1AB-4261-B9A3-1DA68264C703}"/>
               </a:ext>
             </a:extLst>
           </p:cNvPr>
@@ -20513,7 +20681,7 @@
           <p:cNvPr id="36" name="">
             <a:extLst xmlns:a="http://schemas.openxmlformats.org/drawingml/2006/main">
               <a:ext uri="{FF2B5EF4-FFF2-40B4-BE49-F238E27FC236}">
-                <a16:creationId xmlns:a16="http://schemas.microsoft.com/office/drawing/2014/main" id="{FB33135D-F419-4C45-BFC9-631B2DFDC096}"/>
+                <a16:creationId xmlns:a16="http://schemas.microsoft.com/office/drawing/2014/main" id="{B9CF0B22-AFD6-4F2D-AE09-8409B83D224E}"/>
               </a:ext>
             </a:extLst>
           </p:cNvPr>
@@ -20543,7 +20711,7 @@
           <p:cNvPr id="37" name="">
             <a:extLst xmlns:a="http://schemas.openxmlformats.org/drawingml/2006/main">
               <a:ext uri="{FF2B5EF4-FFF2-40B4-BE49-F238E27FC236}">
-                <a16:creationId xmlns:a16="http://schemas.microsoft.com/office/drawing/2014/main" id="{8B2C7643-12E3-4AA4-A02E-9353C6E60072}"/>
+                <a16:creationId xmlns:a16="http://schemas.microsoft.com/office/drawing/2014/main" id="{B6578DBA-BDBB-4145-9C93-4845F00DA0A4}"/>
               </a:ext>
             </a:extLst>
           </p:cNvPr>
@@ -20573,7 +20741,7 @@
           <p:cNvPr id="38" name="">
             <a:extLst xmlns:a="http://schemas.openxmlformats.org/drawingml/2006/main">
               <a:ext uri="{FF2B5EF4-FFF2-40B4-BE49-F238E27FC236}">
-                <a16:creationId xmlns:a16="http://schemas.microsoft.com/office/drawing/2014/main" id="{5E7A9602-B418-4DB7-86FF-74689ECD9C08}"/>
+                <a16:creationId xmlns:a16="http://schemas.microsoft.com/office/drawing/2014/main" id="{7FFCC027-9AD4-47AE-BAA4-1B2BBB7218DE}"/>
               </a:ext>
             </a:extLst>
           </p:cNvPr>
@@ -20603,7 +20771,7 @@
           <p:cNvPr id="39" name="">
             <a:extLst xmlns:a="http://schemas.openxmlformats.org/drawingml/2006/main">
               <a:ext uri="{FF2B5EF4-FFF2-40B4-BE49-F238E27FC236}">
-                <a16:creationId xmlns:a16="http://schemas.microsoft.com/office/drawing/2014/main" id="{44E927C2-0EAD-4A11-A436-91C7C02E460A}"/>
+                <a16:creationId xmlns:a16="http://schemas.microsoft.com/office/drawing/2014/main" id="{B067CAC2-B024-4A07-B112-AA0452D0E9C2}"/>
               </a:ext>
             </a:extLst>
           </p:cNvPr>
@@ -20633,7 +20801,7 @@
           <p:cNvPr id="40" name="">
             <a:extLst xmlns:a="http://schemas.openxmlformats.org/drawingml/2006/main">
               <a:ext uri="{FF2B5EF4-FFF2-40B4-BE49-F238E27FC236}">
-                <a16:creationId xmlns:a16="http://schemas.microsoft.com/office/drawing/2014/main" id="{5A91FB46-26A0-4A4A-A09D-CD305D04753E}"/>
+                <a16:creationId xmlns:a16="http://schemas.microsoft.com/office/drawing/2014/main" id="{88723C68-5F2A-476A-B0C0-94D513E36409}"/>
               </a:ext>
             </a:extLst>
           </p:cNvPr>
@@ -20663,7 +20831,7 @@
           <p:cNvPr id="41" name="">
             <a:extLst xmlns:a="http://schemas.openxmlformats.org/drawingml/2006/main">
               <a:ext uri="{FF2B5EF4-FFF2-40B4-BE49-F238E27FC236}">
-                <a16:creationId xmlns:a16="http://schemas.microsoft.com/office/drawing/2014/main" id="{1F69020D-44A9-49FB-8AC2-13968BC1AD46}"/>
+                <a16:creationId xmlns:a16="http://schemas.microsoft.com/office/drawing/2014/main" id="{1A433ABE-B44B-4DCC-A42A-9F7CA8AF6F78}"/>
               </a:ext>
             </a:extLst>
           </p:cNvPr>
@@ -20693,7 +20861,7 @@
           <p:cNvPr id="42" name="">
             <a:extLst xmlns:a="http://schemas.openxmlformats.org/drawingml/2006/main">
               <a:ext uri="{FF2B5EF4-FFF2-40B4-BE49-F238E27FC236}">
-                <a16:creationId xmlns:a16="http://schemas.microsoft.com/office/drawing/2014/main" id="{10AE0097-5CB3-4C3D-9F44-04A1F245D36C}"/>
+                <a16:creationId xmlns:a16="http://schemas.microsoft.com/office/drawing/2014/main" id="{5493EC41-D2BC-4AF5-BB77-896807D812E0}"/>
               </a:ext>
             </a:extLst>
           </p:cNvPr>
@@ -20723,7 +20891,7 @@
           <p:cNvPr id="43" name="">
             <a:extLst xmlns:a="http://schemas.openxmlformats.org/drawingml/2006/main">
               <a:ext uri="{FF2B5EF4-FFF2-40B4-BE49-F238E27FC236}">
-                <a16:creationId xmlns:a16="http://schemas.microsoft.com/office/drawing/2014/main" id="{E6EDA7ED-19FE-42A8-BD9F-F6DE66808129}"/>
+                <a16:creationId xmlns:a16="http://schemas.microsoft.com/office/drawing/2014/main" id="{83DF19EF-0295-4A10-8736-B7785A365FCA}"/>
               </a:ext>
             </a:extLst>
           </p:cNvPr>
@@ -20753,7 +20921,7 @@
           <p:cNvPr id="44" name="">
             <a:extLst xmlns:a="http://schemas.openxmlformats.org/drawingml/2006/main">
               <a:ext uri="{FF2B5EF4-FFF2-40B4-BE49-F238E27FC236}">
-                <a16:creationId xmlns:a16="http://schemas.microsoft.com/office/drawing/2014/main" id="{475C8CE5-45A2-40A9-8EE3-42E0CCA01ACC}"/>
+                <a16:creationId xmlns:a16="http://schemas.microsoft.com/office/drawing/2014/main" id="{A56A039C-E0C6-4EE7-8E99-43866033F3C1}"/>
               </a:ext>
             </a:extLst>
           </p:cNvPr>
@@ -20783,7 +20951,7 @@
           <p:cNvPr id="45" name="">
             <a:extLst xmlns:a="http://schemas.openxmlformats.org/drawingml/2006/main">
               <a:ext uri="{FF2B5EF4-FFF2-40B4-BE49-F238E27FC236}">
-                <a16:creationId xmlns:a16="http://schemas.microsoft.com/office/drawing/2014/main" id="{7A2133D5-A58E-4757-970E-BEB959D194FE}"/>
+                <a16:creationId xmlns:a16="http://schemas.microsoft.com/office/drawing/2014/main" id="{85584E4C-B54B-4836-9BF2-71B8C3C1D6A5}"/>
               </a:ext>
             </a:extLst>
           </p:cNvPr>
@@ -20813,7 +20981,7 @@
           <p:cNvPr id="46" name="">
             <a:extLst xmlns:a="http://schemas.openxmlformats.org/drawingml/2006/main">
               <a:ext uri="{FF2B5EF4-FFF2-40B4-BE49-F238E27FC236}">
-                <a16:creationId xmlns:a16="http://schemas.microsoft.com/office/drawing/2014/main" id="{82526DC3-86FE-4E98-BDAF-84B11FF617B6}"/>
+                <a16:creationId xmlns:a16="http://schemas.microsoft.com/office/drawing/2014/main" id="{E2DE4013-DF37-47D2-ABA9-9F241BBD6FC6}"/>
               </a:ext>
             </a:extLst>
           </p:cNvPr>
@@ -20843,7 +21011,7 @@
           <p:cNvPr id="47" name="">
             <a:extLst xmlns:a="http://schemas.openxmlformats.org/drawingml/2006/main">
               <a:ext uri="{FF2B5EF4-FFF2-40B4-BE49-F238E27FC236}">
-                <a16:creationId xmlns:a16="http://schemas.microsoft.com/office/drawing/2014/main" id="{EEDA0B9A-2245-4AD4-B434-E8234F439EBD}"/>
+                <a16:creationId xmlns:a16="http://schemas.microsoft.com/office/drawing/2014/main" id="{1ACBAD2A-C055-45D5-BBD8-312C91E3F281}"/>
               </a:ext>
             </a:extLst>
           </p:cNvPr>
@@ -20873,7 +21041,7 @@
           <p:cNvPr id="48" name="">
             <a:extLst xmlns:a="http://schemas.openxmlformats.org/drawingml/2006/main">
               <a:ext uri="{FF2B5EF4-FFF2-40B4-BE49-F238E27FC236}">
-                <a16:creationId xmlns:a16="http://schemas.microsoft.com/office/drawing/2014/main" id="{F43CDEF1-FC38-4CD6-8740-B9C45E77EA36}"/>
+                <a16:creationId xmlns:a16="http://schemas.microsoft.com/office/drawing/2014/main" id="{8C2EDC82-67B1-48EA-8E92-4C51ADAA3A39}"/>
               </a:ext>
             </a:extLst>
           </p:cNvPr>
@@ -20903,7 +21071,7 @@
           <p:cNvPr id="49" name="">
             <a:extLst xmlns:a="http://schemas.openxmlformats.org/drawingml/2006/main">
               <a:ext uri="{FF2B5EF4-FFF2-40B4-BE49-F238E27FC236}">
-                <a16:creationId xmlns:a16="http://schemas.microsoft.com/office/drawing/2014/main" id="{D04C1D78-EC34-4958-8016-E184BD33451A}"/>
+                <a16:creationId xmlns:a16="http://schemas.microsoft.com/office/drawing/2014/main" id="{1E03700C-CECA-416A-8AE1-36956E212826}"/>
               </a:ext>
             </a:extLst>
           </p:cNvPr>
@@ -20933,7 +21101,7 @@
           <p:cNvPr id="50" name="">
             <a:extLst xmlns:a="http://schemas.openxmlformats.org/drawingml/2006/main">
               <a:ext uri="{FF2B5EF4-FFF2-40B4-BE49-F238E27FC236}">
-                <a16:creationId xmlns:a16="http://schemas.microsoft.com/office/drawing/2014/main" id="{1F6830D0-E411-40E0-85CE-B8E58A269E53}"/>
+                <a16:creationId xmlns:a16="http://schemas.microsoft.com/office/drawing/2014/main" id="{BAFE6AD1-D10C-4FE0-9AD7-29DB67C775F4}"/>
               </a:ext>
             </a:extLst>
           </p:cNvPr>
@@ -20963,7 +21131,7 @@
           <p:cNvPr id="51" name="">
             <a:extLst xmlns:a="http://schemas.openxmlformats.org/drawingml/2006/main">
               <a:ext uri="{FF2B5EF4-FFF2-40B4-BE49-F238E27FC236}">
-                <a16:creationId xmlns:a16="http://schemas.microsoft.com/office/drawing/2014/main" id="{1CFFD99F-0194-4917-B8FA-43A30F3D2DCE}"/>
+                <a16:creationId xmlns:a16="http://schemas.microsoft.com/office/drawing/2014/main" id="{9728F8A5-18FD-4177-9046-84C70AAC40AD}"/>
               </a:ext>
             </a:extLst>
           </p:cNvPr>
@@ -20993,7 +21161,7 @@
           <p:cNvPr id="52" name="">
             <a:extLst xmlns:a="http://schemas.openxmlformats.org/drawingml/2006/main">
               <a:ext uri="{FF2B5EF4-FFF2-40B4-BE49-F238E27FC236}">
-                <a16:creationId xmlns:a16="http://schemas.microsoft.com/office/drawing/2014/main" id="{8EB5B844-6B02-4C66-A2B9-A4A938111872}"/>
+                <a16:creationId xmlns:a16="http://schemas.microsoft.com/office/drawing/2014/main" id="{1E442322-5191-4CDC-81BF-2295FC8DCB13}"/>
               </a:ext>
             </a:extLst>
           </p:cNvPr>
@@ -21023,7 +21191,7 @@
           <p:cNvPr id="53" name="">
             <a:extLst xmlns:a="http://schemas.openxmlformats.org/drawingml/2006/main">
               <a:ext uri="{FF2B5EF4-FFF2-40B4-BE49-F238E27FC236}">
-                <a16:creationId xmlns:a16="http://schemas.microsoft.com/office/drawing/2014/main" id="{AA8B62DE-35B8-465D-9E44-5E5A6A7FF1F5}"/>
+                <a16:creationId xmlns:a16="http://schemas.microsoft.com/office/drawing/2014/main" id="{E1F6A238-0161-418D-970D-C81F158B7E23}"/>
               </a:ext>
             </a:extLst>
           </p:cNvPr>
@@ -21053,7 +21221,7 @@
           <p:cNvPr id="54" name="">
             <a:extLst xmlns:a="http://schemas.openxmlformats.org/drawingml/2006/main">
               <a:ext uri="{FF2B5EF4-FFF2-40B4-BE49-F238E27FC236}">
-                <a16:creationId xmlns:a16="http://schemas.microsoft.com/office/drawing/2014/main" id="{50C70D6D-A675-42DC-B557-B0C008BD1BE2}"/>
+                <a16:creationId xmlns:a16="http://schemas.microsoft.com/office/drawing/2014/main" id="{3BA326E4-A564-4BA2-B4AC-FD5FF582A5E5}"/>
               </a:ext>
             </a:extLst>
           </p:cNvPr>
@@ -21083,7 +21251,7 @@
           <p:cNvPr id="55" name="">
             <a:extLst xmlns:a="http://schemas.openxmlformats.org/drawingml/2006/main">
               <a:ext uri="{FF2B5EF4-FFF2-40B4-BE49-F238E27FC236}">
-                <a16:creationId xmlns:a16="http://schemas.microsoft.com/office/drawing/2014/main" id="{42F74109-A579-4130-A57B-2A298828F5ED}"/>
+                <a16:creationId xmlns:a16="http://schemas.microsoft.com/office/drawing/2014/main" id="{E0BC99C6-FB07-41D9-A80B-C805DB7F311A}"/>
               </a:ext>
             </a:extLst>
           </p:cNvPr>
@@ -21113,7 +21281,7 @@
           <p:cNvPr id="56" name="">
             <a:extLst xmlns:a="http://schemas.openxmlformats.org/drawingml/2006/main">
               <a:ext uri="{FF2B5EF4-FFF2-40B4-BE49-F238E27FC236}">
-                <a16:creationId xmlns:a16="http://schemas.microsoft.com/office/drawing/2014/main" id="{9AF591D8-5719-42FA-889D-862D23C2B252}"/>
+                <a16:creationId xmlns:a16="http://schemas.microsoft.com/office/drawing/2014/main" id="{E41E423A-EEE7-4686-A8D4-29726E6489AB}"/>
               </a:ext>
             </a:extLst>
           </p:cNvPr>
@@ -21146,7 +21314,7 @@
           <p:cNvPr id="57" name="">
             <a:extLst xmlns:a="http://schemas.openxmlformats.org/drawingml/2006/main">
               <a:ext uri="{FF2B5EF4-FFF2-40B4-BE49-F238E27FC236}">
-                <a16:creationId xmlns:a16="http://schemas.microsoft.com/office/drawing/2014/main" id="{E0DA7F7F-72E5-46F9-926D-6B45A35B4295}"/>
+                <a16:creationId xmlns:a16="http://schemas.microsoft.com/office/drawing/2014/main" id="{7B7AFCE2-3E33-4A9B-9098-7074E22211EF}"/>
               </a:ext>
             </a:extLst>
           </p:cNvPr>
@@ -21179,7 +21347,7 @@
           <p:cNvPr id="58" name="">
             <a:extLst xmlns:a="http://schemas.openxmlformats.org/drawingml/2006/main">
               <a:ext uri="{FF2B5EF4-FFF2-40B4-BE49-F238E27FC236}">
-                <a16:creationId xmlns:a16="http://schemas.microsoft.com/office/drawing/2014/main" id="{E46B7099-61B3-4D50-A724-8752B9061131}"/>
+                <a16:creationId xmlns:a16="http://schemas.microsoft.com/office/drawing/2014/main" id="{1B21B6A6-94BE-4B91-BB5C-BD5E838133EC}"/>
               </a:ext>
             </a:extLst>
           </p:cNvPr>
@@ -21212,7 +21380,7 @@
           <p:cNvPr id="59" name="">
             <a:extLst xmlns:a="http://schemas.openxmlformats.org/drawingml/2006/main">
               <a:ext uri="{FF2B5EF4-FFF2-40B4-BE49-F238E27FC236}">
-                <a16:creationId xmlns:a16="http://schemas.microsoft.com/office/drawing/2014/main" id="{8FE9F1E3-496C-4E9B-89B8-F38C9811B98B}"/>
+                <a16:creationId xmlns:a16="http://schemas.microsoft.com/office/drawing/2014/main" id="{618F5F22-69AF-443F-A6E0-B0A0A43FD40C}"/>
               </a:ext>
             </a:extLst>
           </p:cNvPr>
@@ -21245,7 +21413,7 @@
           <p:cNvPr id="60" name="">
             <a:extLst xmlns:a="http://schemas.openxmlformats.org/drawingml/2006/main">
               <a:ext uri="{FF2B5EF4-FFF2-40B4-BE49-F238E27FC236}">
-                <a16:creationId xmlns:a16="http://schemas.microsoft.com/office/drawing/2014/main" id="{2CB63701-2A77-4DDE-ADBF-99C17DFD5851}"/>
+                <a16:creationId xmlns:a16="http://schemas.microsoft.com/office/drawing/2014/main" id="{EE3BFFCA-804B-4EEB-B5E3-C35F6F14AF98}"/>
               </a:ext>
             </a:extLst>
           </p:cNvPr>
@@ -21278,7 +21446,7 @@
           <p:cNvPr id="61" name="">
             <a:extLst xmlns:a="http://schemas.openxmlformats.org/drawingml/2006/main">
               <a:ext uri="{FF2B5EF4-FFF2-40B4-BE49-F238E27FC236}">
-                <a16:creationId xmlns:a16="http://schemas.microsoft.com/office/drawing/2014/main" id="{307CDAC7-38DC-4F3C-8EAC-8EE423C5EEE2}"/>
+                <a16:creationId xmlns:a16="http://schemas.microsoft.com/office/drawing/2014/main" id="{CF9AAAEB-6BD1-4C19-A4E6-C2840F069060}"/>
               </a:ext>
             </a:extLst>
           </p:cNvPr>
@@ -21311,7 +21479,7 @@
           <p:cNvPr id="62" name="">
             <a:extLst xmlns:a="http://schemas.openxmlformats.org/drawingml/2006/main">
               <a:ext uri="{FF2B5EF4-FFF2-40B4-BE49-F238E27FC236}">
-                <a16:creationId xmlns:a16="http://schemas.microsoft.com/office/drawing/2014/main" id="{DDE45720-67BA-4F89-91F9-8166FD7F0666}"/>
+                <a16:creationId xmlns:a16="http://schemas.microsoft.com/office/drawing/2014/main" id="{2638C46F-3498-474D-8891-8019D4BB2F55}"/>
               </a:ext>
             </a:extLst>
           </p:cNvPr>
@@ -21344,7 +21512,7 @@
           <p:cNvPr id="63" name="">
             <a:extLst xmlns:a="http://schemas.openxmlformats.org/drawingml/2006/main">
               <a:ext uri="{FF2B5EF4-FFF2-40B4-BE49-F238E27FC236}">
-                <a16:creationId xmlns:a16="http://schemas.microsoft.com/office/drawing/2014/main" id="{32163E62-A89C-4ED0-9D4A-69A254D702E7}"/>
+                <a16:creationId xmlns:a16="http://schemas.microsoft.com/office/drawing/2014/main" id="{10926F26-90B0-462A-8029-1CADF8780CD2}"/>
               </a:ext>
             </a:extLst>
           </p:cNvPr>
@@ -21377,7 +21545,7 @@
           <p:cNvPr id="64" name="">
             <a:extLst xmlns:a="http://schemas.openxmlformats.org/drawingml/2006/main">
               <a:ext uri="{FF2B5EF4-FFF2-40B4-BE49-F238E27FC236}">
-                <a16:creationId xmlns:a16="http://schemas.microsoft.com/office/drawing/2014/main" id="{A2888CEE-3E12-4B42-B0AA-DF37B6E80032}"/>
+                <a16:creationId xmlns:a16="http://schemas.microsoft.com/office/drawing/2014/main" id="{57B18A28-382C-4966-9BA4-20CB64EB0F99}"/>
               </a:ext>
             </a:extLst>
           </p:cNvPr>
@@ -21410,7 +21578,7 @@
           <p:cNvPr id="65" name="">
             <a:extLst xmlns:a="http://schemas.openxmlformats.org/drawingml/2006/main">
               <a:ext uri="{FF2B5EF4-FFF2-40B4-BE49-F238E27FC236}">
-                <a16:creationId xmlns:a16="http://schemas.microsoft.com/office/drawing/2014/main" id="{A04CCA7B-9DEB-4A32-9336-B1434BAF150B}"/>
+                <a16:creationId xmlns:a16="http://schemas.microsoft.com/office/drawing/2014/main" id="{C30D1DD1-4EB9-42C4-8ED9-1EB943AE6200}"/>
               </a:ext>
             </a:extLst>
           </p:cNvPr>
@@ -21478,7 +21646,7 @@
           <p:cNvPr id="66" name="">
             <a:extLst xmlns:a="http://schemas.openxmlformats.org/drawingml/2006/main">
               <a:ext uri="{FF2B5EF4-FFF2-40B4-BE49-F238E27FC236}">
-                <a16:creationId xmlns:a16="http://schemas.microsoft.com/office/drawing/2014/main" id="{64FC2CDA-87BB-44BF-BCEE-A8E2A3D05A4A}"/>
+                <a16:creationId xmlns:a16="http://schemas.microsoft.com/office/drawing/2014/main" id="{2279A54A-5965-4600-9705-E2AE6EBEFA74}"/>
               </a:ext>
             </a:extLst>
           </p:cNvPr>
@@ -21546,7 +21714,7 @@
           <p:cNvPr id="67" name="">
             <a:extLst xmlns:a="http://schemas.openxmlformats.org/drawingml/2006/main">
               <a:ext uri="{FF2B5EF4-FFF2-40B4-BE49-F238E27FC236}">
-                <a16:creationId xmlns:a16="http://schemas.microsoft.com/office/drawing/2014/main" id="{DF1C04B8-260A-41FF-8716-245672CA166C}"/>
+                <a16:creationId xmlns:a16="http://schemas.microsoft.com/office/drawing/2014/main" id="{C1AE594A-0E70-4682-A911-A23D9BA98E11}"/>
               </a:ext>
             </a:extLst>
           </p:cNvPr>
@@ -21612,7 +21780,7 @@
     </p:spTree>
     <p:extLst>
       <p:ext uri="{BB962C8B-B14F-4D97-AF65-F5344CB8AC3E}">
-        <p14:creationId xmlns:p14="http://schemas.microsoft.com/office/powerpoint/2010/main" val="764504658"/>
+        <p14:creationId xmlns:p14="http://schemas.microsoft.com/office/powerpoint/2010/main" val="46698944"/>
       </p:ext>
     </p:extLst>
   </p:cSld>
@@ -21643,7 +21811,7 @@
           <p:cNvPr id="8" name="">
             <a:extLst xmlns:a="http://schemas.openxmlformats.org/drawingml/2006/main">
               <a:ext uri="{FF2B5EF4-FFF2-40B4-BE49-F238E27FC236}">
-                <a16:creationId xmlns:a16="http://schemas.microsoft.com/office/drawing/2014/main" id="{B33BC0E6-9279-4DE3-A776-C6435C000A20}"/>
+                <a16:creationId xmlns:a16="http://schemas.microsoft.com/office/drawing/2014/main" id="{11ED7C48-0830-40FA-944B-659FF42EB064}"/>
               </a:ext>
             </a:extLst>
           </p:cNvPr>
@@ -21711,7 +21879,7 @@
           <p:cNvPr id="2" name="">
             <a:extLst xmlns:a="http://schemas.openxmlformats.org/drawingml/2006/main">
               <a:ext uri="{FF2B5EF4-FFF2-40B4-BE49-F238E27FC236}">
-                <a16:creationId xmlns:a16="http://schemas.microsoft.com/office/drawing/2014/main" id="{F0EBBD4D-72F6-4289-B34B-5189C8611699}"/>
+                <a16:creationId xmlns:a16="http://schemas.microsoft.com/office/drawing/2014/main" id="{34B0149C-C5DC-405D-9C92-1CC4128E07F1}"/>
               </a:ext>
             </a:extLst>
           </p:cNvPr>
@@ -21744,7 +21912,7 @@
           <p:cNvPr id="3" name="">
             <a:extLst xmlns:a="http://schemas.openxmlformats.org/drawingml/2006/main">
               <a:ext uri="{FF2B5EF4-FFF2-40B4-BE49-F238E27FC236}">
-                <a16:creationId xmlns:a16="http://schemas.microsoft.com/office/drawing/2014/main" id="{6F7DC1C2-6A5D-4A3E-94AB-8F703598CF1B}"/>
+                <a16:creationId xmlns:a16="http://schemas.microsoft.com/office/drawing/2014/main" id="{5F6F8E44-D951-4DDE-9507-B6EB36311DF6}"/>
               </a:ext>
             </a:extLst>
           </p:cNvPr>
@@ -21812,7 +21980,7 @@
           <p:cNvPr id="4" name="">
             <a:extLst xmlns:a="http://schemas.openxmlformats.org/drawingml/2006/main">
               <a:ext uri="{FF2B5EF4-FFF2-40B4-BE49-F238E27FC236}">
-                <a16:creationId xmlns:a16="http://schemas.microsoft.com/office/drawing/2014/main" id="{D30FB228-B186-4CE0-BD9F-02B842FB453B}"/>
+                <a16:creationId xmlns:a16="http://schemas.microsoft.com/office/drawing/2014/main" id="{D6D71816-F6BB-4599-84AE-57806D9AC238}"/>
               </a:ext>
             </a:extLst>
           </p:cNvPr>
@@ -21822,7 +21990,7 @@
           <p:nvPr/>
         </p:nvPicPr>
         <p:blipFill>
-          <a:blip xmlns:r="http://schemas.openxmlformats.org/officeDocument/2006/relationships" xmlns:a="http://schemas.openxmlformats.org/drawingml/2006/main" r:embed="Reb38cfc1ff9d4c57"/>
+          <a:blip xmlns:r="http://schemas.openxmlformats.org/officeDocument/2006/relationships" xmlns:a="http://schemas.openxmlformats.org/drawingml/2006/main" r:embed="R49b8b7c511fd42b5"/>
           <a:stretch xmlns:a="http://schemas.openxmlformats.org/drawingml/2006/main"/>
         </p:blipFill>
         <p:spPr>
@@ -21840,7 +22008,7 @@
           <p:cNvPr id="5" name="">
             <a:extLst xmlns:a="http://schemas.openxmlformats.org/drawingml/2006/main">
               <a:ext uri="{FF2B5EF4-FFF2-40B4-BE49-F238E27FC236}">
-                <a16:creationId xmlns:a16="http://schemas.microsoft.com/office/drawing/2014/main" id="{3332B391-2F4F-4FF3-B8CB-FC96B6138990}"/>
+                <a16:creationId xmlns:a16="http://schemas.microsoft.com/office/drawing/2014/main" id="{4B379934-D0FF-4A9E-A51D-4DE9425A0E5C}"/>
               </a:ext>
             </a:extLst>
           </p:cNvPr>
@@ -21908,7 +22076,7 @@
           <p:cNvPr id="6" name="">
             <a:extLst xmlns:a="http://schemas.openxmlformats.org/drawingml/2006/main">
               <a:ext uri="{FF2B5EF4-FFF2-40B4-BE49-F238E27FC236}">
-                <a16:creationId xmlns:a16="http://schemas.microsoft.com/office/drawing/2014/main" id="{F9930067-7856-4B45-8178-690A99CE9988}"/>
+                <a16:creationId xmlns:a16="http://schemas.microsoft.com/office/drawing/2014/main" id="{83A06B79-46FC-482E-A38A-682CDDF26921}"/>
               </a:ext>
             </a:extLst>
           </p:cNvPr>
@@ -21976,7 +22144,7 @@
           <p:cNvPr id="7" name="">
             <a:extLst xmlns:a="http://schemas.openxmlformats.org/drawingml/2006/main">
               <a:ext uri="{FF2B5EF4-FFF2-40B4-BE49-F238E27FC236}">
-                <a16:creationId xmlns:a16="http://schemas.microsoft.com/office/drawing/2014/main" id="{A0C0F1C6-172D-4A8E-9C28-BEFA6B4AADA8}"/>
+                <a16:creationId xmlns:a16="http://schemas.microsoft.com/office/drawing/2014/main" id="{EA0ECF86-3C76-4F35-9B80-D3F82CFDAE03}"/>
               </a:ext>
             </a:extLst>
           </p:cNvPr>
@@ -22042,7 +22210,7 @@
     </p:spTree>
     <p:extLst>
       <p:ext uri="{BB962C8B-B14F-4D97-AF65-F5344CB8AC3E}">
-        <p14:creationId xmlns:p14="http://schemas.microsoft.com/office/powerpoint/2010/main" val="1099059147"/>
+        <p14:creationId xmlns:p14="http://schemas.microsoft.com/office/powerpoint/2010/main" val="1932282142"/>
       </p:ext>
     </p:extLst>
   </p:cSld>
@@ -22073,7 +22241,7 @@
           <p:cNvPr id="19" name="">
             <a:extLst xmlns:a="http://schemas.openxmlformats.org/drawingml/2006/main">
               <a:ext uri="{FF2B5EF4-FFF2-40B4-BE49-F238E27FC236}">
-                <a16:creationId xmlns:a16="http://schemas.microsoft.com/office/drawing/2014/main" id="{176795E2-DF07-4FCF-AB8B-F536ABBB4946}"/>
+                <a16:creationId xmlns:a16="http://schemas.microsoft.com/office/drawing/2014/main" id="{6526020A-0505-4DEC-8EC5-97A80759BDA4}"/>
               </a:ext>
             </a:extLst>
           </p:cNvPr>
@@ -22141,7 +22309,7 @@
           <p:cNvPr id="2" name="">
             <a:extLst xmlns:a="http://schemas.openxmlformats.org/drawingml/2006/main">
               <a:ext uri="{FF2B5EF4-FFF2-40B4-BE49-F238E27FC236}">
-                <a16:creationId xmlns:a16="http://schemas.microsoft.com/office/drawing/2014/main" id="{F60E4B03-B23D-4860-8E35-2F059DF8CCC3}"/>
+                <a16:creationId xmlns:a16="http://schemas.microsoft.com/office/drawing/2014/main" id="{8A6563B9-A56E-4174-9FEF-EDC62A6DC263}"/>
               </a:ext>
             </a:extLst>
           </p:cNvPr>
@@ -22174,7 +22342,7 @@
           <p:cNvPr id="3" name="">
             <a:extLst xmlns:a="http://schemas.openxmlformats.org/drawingml/2006/main">
               <a:ext uri="{FF2B5EF4-FFF2-40B4-BE49-F238E27FC236}">
-                <a16:creationId xmlns:a16="http://schemas.microsoft.com/office/drawing/2014/main" id="{7DC32EAC-13F8-403B-A677-C8A40483D986}"/>
+                <a16:creationId xmlns:a16="http://schemas.microsoft.com/office/drawing/2014/main" id="{47DE686E-340A-472F-BA6C-33643EBFD27D}"/>
               </a:ext>
             </a:extLst>
           </p:cNvPr>
@@ -22242,7 +22410,7 @@
           <p:cNvPr id="4" name="">
             <a:extLst xmlns:a="http://schemas.openxmlformats.org/drawingml/2006/main">
               <a:ext uri="{FF2B5EF4-FFF2-40B4-BE49-F238E27FC236}">
-                <a16:creationId xmlns:a16="http://schemas.microsoft.com/office/drawing/2014/main" id="{0F49D93D-4FEE-4525-830B-5BA2E001095E}"/>
+                <a16:creationId xmlns:a16="http://schemas.microsoft.com/office/drawing/2014/main" id="{BC319D6B-43BA-4DEC-BB48-B46A5E2D9586}"/>
               </a:ext>
             </a:extLst>
           </p:cNvPr>
@@ -22277,7 +22445,7 @@
           <p:cNvPr id="5" name="">
             <a:extLst xmlns:a="http://schemas.openxmlformats.org/drawingml/2006/main">
               <a:ext uri="{FF2B5EF4-FFF2-40B4-BE49-F238E27FC236}">
-                <a16:creationId xmlns:a16="http://schemas.microsoft.com/office/drawing/2014/main" id="{6DDB0946-C20A-426F-AA26-F70C5AE092FB}"/>
+                <a16:creationId xmlns:a16="http://schemas.microsoft.com/office/drawing/2014/main" id="{B460C2EC-E107-4F76-9B9A-6910DDAFBC2A}"/>
               </a:ext>
             </a:extLst>
           </p:cNvPr>
@@ -22345,7 +22513,7 @@
           <p:cNvPr id="6" name="">
             <a:extLst xmlns:a="http://schemas.openxmlformats.org/drawingml/2006/main">
               <a:ext uri="{FF2B5EF4-FFF2-40B4-BE49-F238E27FC236}">
-                <a16:creationId xmlns:a16="http://schemas.microsoft.com/office/drawing/2014/main" id="{D4E1BF93-0605-449F-9D2D-CC872EF8EF92}"/>
+                <a16:creationId xmlns:a16="http://schemas.microsoft.com/office/drawing/2014/main" id="{21E2BD00-C878-4AEC-BECD-00C8C4DE319A}"/>
               </a:ext>
             </a:extLst>
           </p:cNvPr>
@@ -22413,7 +22581,7 @@
           <p:cNvPr id="7" name="">
             <a:extLst xmlns:a="http://schemas.openxmlformats.org/drawingml/2006/main">
               <a:ext uri="{FF2B5EF4-FFF2-40B4-BE49-F238E27FC236}">
-                <a16:creationId xmlns:a16="http://schemas.microsoft.com/office/drawing/2014/main" id="{F5B2A7EB-8F51-47EB-AEBE-67C3182599A6}"/>
+                <a16:creationId xmlns:a16="http://schemas.microsoft.com/office/drawing/2014/main" id="{E7D23000-E26D-4C7F-BDA1-DB112B45E3DB}"/>
               </a:ext>
             </a:extLst>
           </p:cNvPr>
@@ -22448,7 +22616,7 @@
           <p:cNvPr id="8" name="">
             <a:extLst xmlns:a="http://schemas.openxmlformats.org/drawingml/2006/main">
               <a:ext uri="{FF2B5EF4-FFF2-40B4-BE49-F238E27FC236}">
-                <a16:creationId xmlns:a16="http://schemas.microsoft.com/office/drawing/2014/main" id="{A7CEDCD9-EAFD-42C4-A79B-5549C0B886FD}"/>
+                <a16:creationId xmlns:a16="http://schemas.microsoft.com/office/drawing/2014/main" id="{E179363F-064A-43DF-BD68-084596556991}"/>
               </a:ext>
             </a:extLst>
           </p:cNvPr>
@@ -22516,7 +22684,7 @@
           <p:cNvPr id="9" name="">
             <a:extLst xmlns:a="http://schemas.openxmlformats.org/drawingml/2006/main">
               <a:ext uri="{FF2B5EF4-FFF2-40B4-BE49-F238E27FC236}">
-                <a16:creationId xmlns:a16="http://schemas.microsoft.com/office/drawing/2014/main" id="{5E8E3FE9-234B-4639-9149-665FA84326A5}"/>
+                <a16:creationId xmlns:a16="http://schemas.microsoft.com/office/drawing/2014/main" id="{E4B8447C-D307-4CF0-9437-C3B73C74490D}"/>
               </a:ext>
             </a:extLst>
           </p:cNvPr>
@@ -22584,7 +22752,7 @@
           <p:cNvPr id="10" name="">
             <a:extLst xmlns:a="http://schemas.openxmlformats.org/drawingml/2006/main">
               <a:ext uri="{FF2B5EF4-FFF2-40B4-BE49-F238E27FC236}">
-                <a16:creationId xmlns:a16="http://schemas.microsoft.com/office/drawing/2014/main" id="{19E9E7DE-0F6E-47D0-991C-B8EA6283A921}"/>
+                <a16:creationId xmlns:a16="http://schemas.microsoft.com/office/drawing/2014/main" id="{81C5B31F-C7E5-4EBF-A1E8-29AD1375B44B}"/>
               </a:ext>
             </a:extLst>
           </p:cNvPr>
@@ -22619,7 +22787,7 @@
           <p:cNvPr id="11" name="">
             <a:extLst xmlns:a="http://schemas.openxmlformats.org/drawingml/2006/main">
               <a:ext uri="{FF2B5EF4-FFF2-40B4-BE49-F238E27FC236}">
-                <a16:creationId xmlns:a16="http://schemas.microsoft.com/office/drawing/2014/main" id="{A9CC9B44-5870-477A-A94E-4AE3AB97937A}"/>
+                <a16:creationId xmlns:a16="http://schemas.microsoft.com/office/drawing/2014/main" id="{7F73E682-32A8-4AE5-BB0C-87DD70B83D1F}"/>
               </a:ext>
             </a:extLst>
           </p:cNvPr>
@@ -22687,7 +22855,7 @@
           <p:cNvPr id="12" name="">
             <a:extLst xmlns:a="http://schemas.openxmlformats.org/drawingml/2006/main">
               <a:ext uri="{FF2B5EF4-FFF2-40B4-BE49-F238E27FC236}">
-                <a16:creationId xmlns:a16="http://schemas.microsoft.com/office/drawing/2014/main" id="{7B81F970-869C-4034-A951-8D22DD245376}"/>
+                <a16:creationId xmlns:a16="http://schemas.microsoft.com/office/drawing/2014/main" id="{766A89F7-317C-4F7E-BA2C-6237C03B1B39}"/>
               </a:ext>
             </a:extLst>
           </p:cNvPr>
@@ -22755,7 +22923,7 @@
           <p:cNvPr id="13" name="">
             <a:extLst xmlns:a="http://schemas.openxmlformats.org/drawingml/2006/main">
               <a:ext uri="{FF2B5EF4-FFF2-40B4-BE49-F238E27FC236}">
-                <a16:creationId xmlns:a16="http://schemas.microsoft.com/office/drawing/2014/main" id="{BDB324C2-B285-40FB-BA33-665DCF37BBEF}"/>
+                <a16:creationId xmlns:a16="http://schemas.microsoft.com/office/drawing/2014/main" id="{E6061C1E-56B8-4CCC-8D2F-DB727A7C2F9D}"/>
               </a:ext>
             </a:extLst>
           </p:cNvPr>
@@ -22790,7 +22958,7 @@
           <p:cNvPr id="14" name="">
             <a:extLst xmlns:a="http://schemas.openxmlformats.org/drawingml/2006/main">
               <a:ext uri="{FF2B5EF4-FFF2-40B4-BE49-F238E27FC236}">
-                <a16:creationId xmlns:a16="http://schemas.microsoft.com/office/drawing/2014/main" id="{B7D88E80-0F6D-4543-B7C4-8EB46CFAA6D8}"/>
+                <a16:creationId xmlns:a16="http://schemas.microsoft.com/office/drawing/2014/main" id="{240966DB-1F53-446A-89EB-E26521ABA876}"/>
               </a:ext>
             </a:extLst>
           </p:cNvPr>
@@ -22858,7 +23026,7 @@
           <p:cNvPr id="15" name="">
             <a:extLst xmlns:a="http://schemas.openxmlformats.org/drawingml/2006/main">
               <a:ext uri="{FF2B5EF4-FFF2-40B4-BE49-F238E27FC236}">
-                <a16:creationId xmlns:a16="http://schemas.microsoft.com/office/drawing/2014/main" id="{8ECC204F-91AD-4AA7-8BA2-C6AEE2D9F783}"/>
+                <a16:creationId xmlns:a16="http://schemas.microsoft.com/office/drawing/2014/main" id="{66E28C67-28DB-4972-B453-DD77C90D0119}"/>
               </a:ext>
             </a:extLst>
           </p:cNvPr>
@@ -22926,7 +23094,7 @@
           <p:cNvPr id="16" name="">
             <a:extLst xmlns:a="http://schemas.openxmlformats.org/drawingml/2006/main">
               <a:ext uri="{FF2B5EF4-FFF2-40B4-BE49-F238E27FC236}">
-                <a16:creationId xmlns:a16="http://schemas.microsoft.com/office/drawing/2014/main" id="{C8753A1E-2003-4D9F-9D9F-D0576AC2BDE6}"/>
+                <a16:creationId xmlns:a16="http://schemas.microsoft.com/office/drawing/2014/main" id="{38ACE7D4-3333-4073-A3F6-3C4665E1450E}"/>
               </a:ext>
             </a:extLst>
           </p:cNvPr>
@@ -22994,7 +23162,7 @@
           <p:cNvPr id="17" name="">
             <a:extLst xmlns:a="http://schemas.openxmlformats.org/drawingml/2006/main">
               <a:ext uri="{FF2B5EF4-FFF2-40B4-BE49-F238E27FC236}">
-                <a16:creationId xmlns:a16="http://schemas.microsoft.com/office/drawing/2014/main" id="{E60D2227-ACF6-442C-B22E-4B5F1AA82B06}"/>
+                <a16:creationId xmlns:a16="http://schemas.microsoft.com/office/drawing/2014/main" id="{399B4FA1-ECCB-4402-9671-C60988917520}"/>
               </a:ext>
             </a:extLst>
           </p:cNvPr>
@@ -23062,7 +23230,7 @@
           <p:cNvPr id="18" name="">
             <a:extLst xmlns:a="http://schemas.openxmlformats.org/drawingml/2006/main">
               <a:ext uri="{FF2B5EF4-FFF2-40B4-BE49-F238E27FC236}">
-                <a16:creationId xmlns:a16="http://schemas.microsoft.com/office/drawing/2014/main" id="{9F1C684D-5AF3-419A-82DF-F97EF277FEBD}"/>
+                <a16:creationId xmlns:a16="http://schemas.microsoft.com/office/drawing/2014/main" id="{01A0EF9F-9B48-4AE9-87AB-26F98C160B29}"/>
               </a:ext>
             </a:extLst>
           </p:cNvPr>
@@ -23128,7 +23296,7 @@
     </p:spTree>
     <p:extLst>
       <p:ext uri="{BB962C8B-B14F-4D97-AF65-F5344CB8AC3E}">
-        <p14:creationId xmlns:p14="http://schemas.microsoft.com/office/powerpoint/2010/main" val="1214790472"/>
+        <p14:creationId xmlns:p14="http://schemas.microsoft.com/office/powerpoint/2010/main" val="1174805359"/>
       </p:ext>
     </p:extLst>
   </p:cSld>
@@ -23159,7 +23327,7 @@
           <p:cNvPr id="10" name="">
             <a:extLst xmlns:a="http://schemas.openxmlformats.org/drawingml/2006/main">
               <a:ext uri="{FF2B5EF4-FFF2-40B4-BE49-F238E27FC236}">
-                <a16:creationId xmlns:a16="http://schemas.microsoft.com/office/drawing/2014/main" id="{4167076A-D89C-4AC3-9360-A77893E8D4A5}"/>
+                <a16:creationId xmlns:a16="http://schemas.microsoft.com/office/drawing/2014/main" id="{C34B9E90-A6A7-4AC9-996B-B4F82BC1C26F}"/>
               </a:ext>
             </a:extLst>
           </p:cNvPr>
@@ -23227,7 +23395,7 @@
           <p:cNvPr id="2" name="">
             <a:extLst xmlns:a="http://schemas.openxmlformats.org/drawingml/2006/main">
               <a:ext uri="{FF2B5EF4-FFF2-40B4-BE49-F238E27FC236}">
-                <a16:creationId xmlns:a16="http://schemas.microsoft.com/office/drawing/2014/main" id="{0EECC33C-AE16-4BBC-A82E-ACCD300DEA60}"/>
+                <a16:creationId xmlns:a16="http://schemas.microsoft.com/office/drawing/2014/main" id="{E8374206-01FF-4F0C-B4B0-C61DB3D30E27}"/>
               </a:ext>
             </a:extLst>
           </p:cNvPr>
@@ -23260,7 +23428,7 @@
           <p:cNvPr id="3" name="">
             <a:extLst xmlns:a="http://schemas.openxmlformats.org/drawingml/2006/main">
               <a:ext uri="{FF2B5EF4-FFF2-40B4-BE49-F238E27FC236}">
-                <a16:creationId xmlns:a16="http://schemas.microsoft.com/office/drawing/2014/main" id="{92ACC3F8-6CA4-4F05-B6CB-9F2CCBF6DA73}"/>
+                <a16:creationId xmlns:a16="http://schemas.microsoft.com/office/drawing/2014/main" id="{F480C5C7-EDEF-4798-892A-D9FDCE63C314}"/>
               </a:ext>
             </a:extLst>
           </p:cNvPr>
@@ -23328,7 +23496,7 @@
           <p:cNvPr id="4" name="">
             <a:extLst xmlns:a="http://schemas.openxmlformats.org/drawingml/2006/main">
               <a:ext uri="{FF2B5EF4-FFF2-40B4-BE49-F238E27FC236}">
-                <a16:creationId xmlns:a16="http://schemas.microsoft.com/office/drawing/2014/main" id="{72426317-03CE-4561-9ED4-96BDDE918B6F}"/>
+                <a16:creationId xmlns:a16="http://schemas.microsoft.com/office/drawing/2014/main" id="{24CD6CEB-54C6-4BF9-A160-A4FAA83E4D44}"/>
               </a:ext>
             </a:extLst>
           </p:cNvPr>
@@ -23396,7 +23564,7 @@
           <p:cNvPr id="5" name="Chart">
             <a:extLst xmlns:a="http://schemas.openxmlformats.org/drawingml/2006/main">
               <a:ext uri="{FF2B5EF4-FFF2-40B4-BE49-F238E27FC236}">
-                <a16:creationId xmlns:a16="http://schemas.microsoft.com/office/drawing/2014/main" id="{83724080-A92D-47E9-967D-B67D978004FF}"/>
+                <a16:creationId xmlns:a16="http://schemas.microsoft.com/office/drawing/2014/main" id="{26D5E08B-5D3C-4845-A176-B6F267AB61AA}"/>
               </a:ext>
             </a:extLst>
           </p:cNvPr>
@@ -23409,7 +23577,7 @@
         </p:xfrm>
         <a:graphic xmlns:a="http://schemas.openxmlformats.org/drawingml/2006/main">
           <a:graphicData uri="http://schemas.openxmlformats.org/drawingml/2006/chart">
-            <c:chart xmlns:r="http://schemas.openxmlformats.org/officeDocument/2006/relationships" xmlns:c="http://schemas.openxmlformats.org/drawingml/2006/chart" r:id="R17381299df574e3b"/>
+            <c:chart xmlns:r="http://schemas.openxmlformats.org/officeDocument/2006/relationships" xmlns:c="http://schemas.openxmlformats.org/drawingml/2006/chart" r:id="R2ccebab8c93948dd"/>
           </a:graphicData>
         </a:graphic>
       </p:graphicFrame>
@@ -23418,7 +23586,7 @@
           <p:cNvPr id="6" name="">
             <a:extLst xmlns:a="http://schemas.openxmlformats.org/drawingml/2006/main">
               <a:ext uri="{FF2B5EF4-FFF2-40B4-BE49-F238E27FC236}">
-                <a16:creationId xmlns:a16="http://schemas.microsoft.com/office/drawing/2014/main" id="{6F32E2DF-0C6D-44A5-9A01-79A9C800B5F7}"/>
+                <a16:creationId xmlns:a16="http://schemas.microsoft.com/office/drawing/2014/main" id="{1A711D73-98A4-469B-91FD-8BF436E87DCC}"/>
               </a:ext>
             </a:extLst>
           </p:cNvPr>
@@ -23486,7 +23654,7 @@
           <p:cNvPr id="7" name="Chart">
             <a:extLst xmlns:a="http://schemas.openxmlformats.org/drawingml/2006/main">
               <a:ext uri="{FF2B5EF4-FFF2-40B4-BE49-F238E27FC236}">
-                <a16:creationId xmlns:a16="http://schemas.microsoft.com/office/drawing/2014/main" id="{94A75974-BF48-4252-A302-426453F8C9C4}"/>
+                <a16:creationId xmlns:a16="http://schemas.microsoft.com/office/drawing/2014/main" id="{0D382AB7-15DF-4476-8E9A-7682B7636894}"/>
               </a:ext>
             </a:extLst>
           </p:cNvPr>
@@ -23499,7 +23667,7 @@
         </p:xfrm>
         <a:graphic xmlns:a="http://schemas.openxmlformats.org/drawingml/2006/main">
           <a:graphicData uri="http://schemas.openxmlformats.org/drawingml/2006/chart">
-            <c:chart xmlns:r="http://schemas.openxmlformats.org/officeDocument/2006/relationships" xmlns:c="http://schemas.openxmlformats.org/drawingml/2006/chart" r:id="R3821f66639104e68"/>
+            <c:chart xmlns:r="http://schemas.openxmlformats.org/officeDocument/2006/relationships" xmlns:c="http://schemas.openxmlformats.org/drawingml/2006/chart" r:id="R94b25d1b019e4a78"/>
           </a:graphicData>
         </a:graphic>
       </p:graphicFrame>
@@ -23508,7 +23676,7 @@
           <p:cNvPr id="8" name="">
             <a:extLst xmlns:a="http://schemas.openxmlformats.org/drawingml/2006/main">
               <a:ext uri="{FF2B5EF4-FFF2-40B4-BE49-F238E27FC236}">
-                <a16:creationId xmlns:a16="http://schemas.microsoft.com/office/drawing/2014/main" id="{B4B34E08-8122-430A-A9D4-44CE8E052B0A}"/>
+                <a16:creationId xmlns:a16="http://schemas.microsoft.com/office/drawing/2014/main" id="{9303AFBC-A6E5-4105-BF12-D79E17769CAA}"/>
               </a:ext>
             </a:extLst>
           </p:cNvPr>
@@ -23576,7 +23744,7 @@
           <p:cNvPr id="9" name="">
             <a:extLst xmlns:a="http://schemas.openxmlformats.org/drawingml/2006/main">
               <a:ext uri="{FF2B5EF4-FFF2-40B4-BE49-F238E27FC236}">
-                <a16:creationId xmlns:a16="http://schemas.microsoft.com/office/drawing/2014/main" id="{A33461DE-F99A-49E6-9A38-CD49EEA4F256}"/>
+                <a16:creationId xmlns:a16="http://schemas.microsoft.com/office/drawing/2014/main" id="{7395ACC0-6C1D-450A-ABDD-2482BFEB66CF}"/>
               </a:ext>
             </a:extLst>
           </p:cNvPr>
@@ -23642,7 +23810,7 @@
     </p:spTree>
     <p:extLst>
       <p:ext uri="{BB962C8B-B14F-4D97-AF65-F5344CB8AC3E}">
-        <p14:creationId xmlns:p14="http://schemas.microsoft.com/office/powerpoint/2010/main" val="1055225965"/>
+        <p14:creationId xmlns:p14="http://schemas.microsoft.com/office/powerpoint/2010/main" val="54581612"/>
       </p:ext>
     </p:extLst>
   </p:cSld>
